--- a/downloads/presentations/modules/anl-230.pptx
+++ b/downloads/presentations/modules/anl-230.pptx
@@ -615,7 +615,8 @@
               <a:t>Technical Deep Dive
 Geospatial AI begins with location data, and location data are rarely perfect. Addresses may be missing, misspelled, outdated, rural route-based, temporary, or unstable. People experiencing homelessness, migration, displacement, incarceration, or housing instability may be poorly represented by address-based analysis. Geocoding errors can shift records across boundaries and distort rates for small areas.
 Spatial scale shapes interpretation. County-level maps may hide neighborhood-level inequities. Census tract maps may reveal meaningful local variation but increase privacy risks. ZIP codes are convenient but were created for mail delivery, not public health analysis. Staff should choose geographic units based on the question, data quality, privacy requirements, and actionability.
-AI-supported hotspot detection requires baseline context. An apparent cluster may reflect higher testing volume, better reporting, a facility-specific outbreak, or a true increase in incidence. Algorithms can detect unusual patterns, but epidemiologists must assess plausibility, data quality, denominator stability, and reporting artifacts. Automated hotspot alerts should be treated as signals for review, not conclusions.</a:t>
+AI-supported hotspot detection requires baseline context. An apparent cluster may reflect higher testing volume, better reporting, a facility-specific outbreak, or a true increase in incidence. Algorithms can detect unusual patterns, but epidemiologists must assess plausibility, data quality, denominator stability, and reporting artifacts. Automated hotspot alerts should be treated as signals for review, not conclusions.
+Application guidance: Connect the concept to public health purpose, responsible use, required safeguards, documentation, and the next action a department should take.</a:t>
             </a:r>
             <a:endParaRPr lang="en-US" dirty="0"/>
           </a:p>
@@ -705,7 +706,8 @@
               <a:rPr lang="en-US" dirty="0"/>
               <a:t>Technical Deep Dive
 Geospatial models may use spatial proxies for social conditions. Social vulnerability, deprivation, rurality, housing burden, transportation access, and environmental exposure indicators can improve public health planning. They can also be misused if they stigmatize communities or support restrictive decisions. Agencies should use these indicators to guide supportive action and resource allocation, not blame.
-Privacy protection should be planned before analysis. Techniques include aggregation, suppression, geomasking, minimum cell-size rules, role-based access, public/private map separation, and review of small-area outputs before publication. For internal AI tools, access controls and audit logs should apply to spatial data just as they do to clinical or case data.</a:t>
+Privacy protection should be planned before analysis. Techniques include aggregation, suppression, geomasking, minimum cell-size rules, role-based access, public/private map separation, and review of small-area outputs before publication. For internal AI tools, access controls and audit logs should apply to spatial data just as they do to clinical or case data.
+Application guidance: Connect the concept to public health purpose, responsible use, required safeguards, documentation, and the next action a department should take.</a:t>
             </a:r>
             <a:endParaRPr lang="en-US" dirty="0"/>
           </a:p>
@@ -796,7 +798,8 @@
               <a:t>Risks, Failure Modes, and Guardrails
 Geocoding bias. Some populations and locations are harder to geocode accurately. Guardrails include geocoding quality checks, manual review for unmatched records, and documentation of missingness.
 Small-area privacy risk. Detailed maps can reveal sensitive patterns or identities. Guardrails include aggregation, suppression, role-based access, and public release review.
-Overinterpretation of hotspots. Spatial clusters may reflect testing or reporting patterns. Guardrails include denominator review, baseline comparison, and epidemiologic confirmation.</a:t>
+Overinterpretation of hotspots. Spatial clusters may reflect testing or reporting patterns. Guardrails include denominator review, baseline comparison, and epidemiologic confirmation.
+Application guidance: Identify what could go wrong, who could be affected, what safeguards are needed, and what evidence should be reviewed before use expands.</a:t>
             </a:r>
             <a:endParaRPr lang="en-US" dirty="0"/>
           </a:p>
@@ -885,7 +888,8 @@
             <a:r>
               <a:rPr lang="en-US" dirty="0"/>
               <a:t>Risks, Failure Modes, and Guardrails
-Stigmatizing communities. Maps can unintentionally label communities as problems. Guardrails include equity framing, community engagement, careful language, and focus on structural supports.</a:t>
+Stigmatizing communities. Maps can unintentionally label communities as problems. Guardrails include equity framing, community engagement, careful language, and focus on structural supports.
+Application guidance: Identify what could go wrong, who could be affected, what safeguards are needed, and what evidence should be reviewed before use expands.</a:t>
             </a:r>
             <a:endParaRPr lang="en-US" dirty="0"/>
           </a:p>
@@ -975,7 +979,8 @@
               <a:rPr lang="en-US" dirty="0"/>
               <a:t>Application to AI-Supported Workflows
 Geospatial AI may support predictive analytics, emergency response, inspection prioritization, environmental monitoring, and service planning. Generative AI may summarize spatial patterns for leaders, but it must not overstate certainty or ignore limitations. RAG tools may retrieve local plans, maps, and protocols, while agentic workflows may propose outreach routes or inspection assignments that require human approval.
-The responsible application of geospatial AI requires explicit attention to privacy, geography, and equity. A spatial output should answer a public health question, support a feasible action, and include enough context for staff and communities to interpret it appropriately.</a:t>
+The responsible application of geospatial AI requires explicit attention to privacy, geography, and equity. A spatial output should answer a public health question, support a feasible action, and include enough context for staff and communities to interpret it appropriately.
+Application guidance: Use the concept to clarify workflow changes, dependencies, staffing, procurement requirements, training needs, and implementation checkpoints.</a:t>
             </a:r>
             <a:endParaRPr lang="en-US" dirty="0"/>
           </a:p>
@@ -1066,7 +1071,8 @@
               <a:t>Reflection Questions
 What location data are used, and how complete and accurate are they?
 Which geographic unit best matches the public health action?
-Could missing or poor-quality location data affect certain populations more than others?</a:t>
+Could missing or poor-quality location data affect certain populations more than others?
+Application guidance: Connect the concept to public health purpose, responsible use, required safeguards, documentation, and the next action a department should take.</a:t>
             </a:r>
             <a:endParaRPr lang="en-US" dirty="0"/>
           </a:p>
@@ -1156,7 +1162,8 @@
               <a:rPr lang="en-US" dirty="0"/>
               <a:t>Reflection Questions
 What privacy safeguards are needed for internal and public maps?
-How will community context be included before action is taken?</a:t>
+How will community context be included before action is taken?
+Application guidance: Connect the concept to public health purpose, responsible use, required safeguards, documentation, and the next action a department should take.</a:t>
             </a:r>
             <a:endParaRPr lang="en-US" dirty="0"/>
           </a:p>
@@ -1246,7 +1253,8 @@
               <a:rPr lang="en-US" dirty="0"/>
               <a:t>Practical Exercise
 Create a geospatial AI readiness worksheet for one public health workflow. Include the public health question, location data sources, geocoding method, geographic unit, denominator, privacy safeguards, equity concerns, AI-supported task, human review process, and communication plan.
-The worksheet should identify at least one way the map could be misinterpreted and one safeguard that would reduce the risk of harm.</a:t>
+The worksheet should identify at least one way the map could be misinterpreted and one safeguard that would reduce the risk of harm.
+Application guidance: Use the assignment to test whether you can explain the concept, apply it to a realistic public health situation, and identify what would need review before the work moves forward.</a:t>
             </a:r>
             <a:endParaRPr lang="en-US" dirty="0"/>
           </a:p>
@@ -1337,7 +1345,8 @@
               <a:t>Expected Artifact or Evidence
 Geospatial AI readiness worksheet
 Map interpretation and limitations memo
-Privacy and suppression review notes</a:t>
+Privacy and suppression review notes
+Application guidance: Connect the concept to public health purpose, responsible use, required safeguards, documentation, and the next action a department should take.</a:t>
             </a:r>
             <a:endParaRPr lang="en-US" dirty="0"/>
           </a:p>
@@ -1426,7 +1435,8 @@
             <a:r>
               <a:rPr lang="en-US" dirty="0"/>
               <a:t>Expected Artifact or Evidence
-Community context and action plan</a:t>
+Community context and action plan
+Application guidance: Connect the concept to public health purpose, responsible use, required safeguards, documentation, and the next action a department should take.</a:t>
             </a:r>
             <a:endParaRPr lang="en-US" dirty="0"/>
           </a:p>
@@ -1610,7 +1620,8 @@
 Geospatial AI readiness worksheet
 Map interpretation and limitations memo
 Privacy and suppression review notes
-Community context and action plan</a:t>
+Community context and action plan
+Application guidance: Use the assignment to test whether you can explain the concept, apply it to a realistic public health situation, and identify what would need review before the work moves forward.</a:t>
             </a:r>
             <a:endParaRPr lang="en-US" dirty="0"/>
           </a:p>
@@ -1703,7 +1714,8 @@
 2. Why can maps create misleading impressions?
 3. What is the modifiable areal unit problem?
 4. Which safeguard is appropriate before publishing a small-area health map?
-5. What is strong completion evidence for this module?</a:t>
+5. What is strong completion evidence for this module?
+Application guidance: Use the assignment to test whether you can explain the concept, apply it to a realistic public health situation, and identify what would need review before the work moves forward.</a:t>
             </a:r>
             <a:endParaRPr lang="en-US" dirty="0"/>
           </a:p>
@@ -1795,7 +1807,8 @@
 CDC GIS and Public Health Resources: https://www.cdc.gov/gis/
 NIST Artificial Intelligence Risk Management Framework: https://www.nist.gov/itl/ai-risk-management-framework
 NIST Privacy Framework: https://www.nist.gov/privacy-framework
-CDC Public Health Data Strategy: https://www.cdc.gov/public-health-data-strategy/php/about/index.html</a:t>
+CDC Public Health Data Strategy: https://www.cdc.gov/public-health-data-strategy/php/about/index.html
+Application guidance: Connect the concept to public health purpose, responsible use, required safeguards, documentation, and the next action a department should take.</a:t>
             </a:r>
             <a:endParaRPr lang="en-US" dirty="0"/>
           </a:p>
@@ -2074,7 +2087,8 @@
 Explain how geocoding, aggregation, spatial scale, and data quality affect AI-supported maps and analyses.
 Identify privacy and re-identification risks related to location data.
 Recognize spatial bias, modifiable areal unit problems, and ecological interpretation risks.
-Design guardrails for AI-supported spatial analysis, hotspot detection, service planning, or emergency response.</a:t>
+Design guardrails for AI-supported spatial analysis, hotspot detection, service planning, or emergency response.
+Application guidance: Use the assignment to test whether you can explain the concept, apply it to a realistic public health situation, and identify what would need review before the work moves forward.</a:t>
             </a:r>
             <a:endParaRPr lang="en-US" dirty="0"/>
           </a:p>
@@ -2163,7 +2177,8 @@
             <a:r>
               <a:rPr lang="en-US" dirty="0"/>
               <a:t>Learning Objectives
-Produce a geospatial AI readiness worksheet for a public health workflow.</a:t>
+Produce a geospatial AI readiness worksheet for a public health workflow.
+Application guidance: Use the assignment to test whether you can explain the concept, apply it to a realistic public health situation, and identify what would need review before the work moves forward.</a:t>
             </a:r>
             <a:endParaRPr lang="en-US" dirty="0"/>
           </a:p>
@@ -2254,7 +2269,8 @@
               <a:t>Module Overview
 Geospatial AI combines spatial data, geographic analysis, and AI methods to identify patterns across place. In public health, spatial analysis is already central to outbreak response, environmental health, emergency preparedness, community health assessment, service planning, and health equity work. AI can strengthen these activities when it helps detect clusters, estimate access barriers, classify imagery, prioritize field work, or synthesize spatial information for decision-makers.
 This module introduces the technical and governance issues that arise when AI uses location. Location data can be powerful, but it can also be sensitive. Even when names are removed, detailed geography can reveal identity, community characteristics, or sensitive health patterns. Public health staff must understand geocoding quality, aggregation, spatial bias, privacy, and the limits of maps.
-Learners will examine how geospatial AI can support public health while avoiding common mistakes, such as treating maps as neutral, ignoring missing addresses, overinterpreting small-area patterns, or using spatial proxies that reproduce inequity.</a:t>
+Learners will examine how geospatial AI can support public health while avoiding common mistakes, such as treating maps as neutral, ignoring missing addresses, overinterpreting small-area patterns, or using spatial proxies that reproduce inequity.
+Application guidance: Connect the concept to public health purpose, responsible use, required safeguards, documentation, and the next action a department should take.</a:t>
             </a:r>
             <a:endParaRPr lang="en-US" dirty="0"/>
           </a:p>
@@ -2345,7 +2361,8 @@
               <a:t>Why This Topic Matters for Public Health AI
 Geospatial AI matters because public health decisions are often place-based. Agencies decide where to conduct outreach, deploy mobile services, inspect facilities, respond to environmental hazards, monitor outbreaks, and communicate risks. AI-supported spatial tools can help analyze large volumes of geographic information and identify patterns that may not be visible in simple tables.
 However, maps can create a false sense of objectivity. A hotspot may reflect where data are collected, who has access to testing, which providers report electronically, or which addresses are easier to geocode. Areas with missing or poor-quality data may appear low risk when they are actually under-observed. Spatial AI therefore requires careful review of data completeness, spatial scale, and community context.
-Location data also raises privacy and trust concerns. Public health agencies have authority to collect and use sensitive information, but that authority should be matched with safeguards. When AI tools combine health data, address data, demographic data, mobility data, environmental data, or social vulnerability indicators, agencies must consider re-identification, stigmatization, public communication, and community impact.</a:t>
+Location data also raises privacy and trust concerns. Public health agencies have authority to collect and use sensitive information, but that authority should be matched with safeguards. When AI tools combine health data, address data, demographic data, mobility data, environmental data, or social vulnerability indicators, agencies must consider re-identification, stigmatization, public communication, and community impact.
+Application guidance: Connect the concept to public health purpose, responsible use, required safeguards, documentation, and the next action a department should take.</a:t>
             </a:r>
             <a:endParaRPr lang="en-US" dirty="0"/>
           </a:p>
@@ -2435,7 +2452,8 @@
               <a:rPr lang="en-US" dirty="0"/>
               <a:t>Public Health Example
 A health department may use AI-supported geospatial analysis to identify areas where mobile vaccination clinics could improve access. The tool may combine immunization coverage, school locations, transportation routes, census variables, provider locations, and appointment availability. The output may recommend priority areas for outreach and clinic placement.
-This workflow can advance equity if it identifies access barriers and supports community partnership. It can cause harm if it labels neighborhoods as low-performing without context, uses outdated population denominators, ignores language access, or fails to engage local organizations. The geospatial analysis should be paired with community review, accessibility planning, and transparent explanation of limitations.</a:t>
+This workflow can advance equity if it identifies access barriers and supports community partnership. It can cause harm if it labels neighborhoods as low-performing without context, uses outdated population denominators, ignores language access, or fails to engage local organizations. The geospatial analysis should be paired with community review, accessibility planning, and transparent explanation of limitations.
+Application guidance: Connect the concept to public health purpose, responsible use, required safeguards, documentation, and the next action a department should take.</a:t>
             </a:r>
             <a:endParaRPr lang="en-US" dirty="0"/>
           </a:p>
@@ -3206,8 +3224,8 @@
         </p:nvSpPr>
         <p:spPr>
           <a:xfrm>
-            <a:off x="9966960" y="6537960"/>
-            <a:ext cx="1645920" cy="201168"/>
+            <a:off x="9646920" y="6537960"/>
+            <a:ext cx="1965960" cy="201168"/>
           </a:xfrm>
           <a:prstGeom prst="rect">
             <a:avLst/>
@@ -3231,7 +3249,7 @@
                 <a:ea typeface="Aptos" pitchFamily="34" charset="-122"/>
                 <a:cs typeface="Aptos" pitchFamily="34" charset="-120"/>
               </a:rPr>
-              <a:t>Â© Paula Soper</a:t>
+              <a:t>Copyright Paula Soper</a:t>
             </a:r>
             <a:endParaRPr lang="en-US" sz="800" dirty="0"/>
           </a:p>
@@ -3278,77 +3296,13 @@
       </p:sp>
       <p:sp>
         <p:nvSpPr>
-          <p:cNvPr id="8" name="Shape 6"/>
+          <p:cNvPr id="8" name="Text 6"/>
           <p:cNvSpPr/>
           <p:nvPr/>
         </p:nvSpPr>
         <p:spPr>
           <a:xfrm>
             <a:off x="640080" y="658368"/>
-            <a:ext cx="420624" cy="420624"/>
-          </a:xfrm>
-          <a:prstGeom prst="ellipse">
-            <a:avLst/>
-          </a:prstGeom>
-          <a:solidFill>
-            <a:srgbClr val="0068B7"/>
-          </a:solidFill>
-          <a:ln w="12700">
-            <a:solidFill>
-              <a:srgbClr val="0068B7"/>
-            </a:solidFill>
-            <a:prstDash val="solid"/>
-          </a:ln>
-        </p:spPr>
-      </p:sp>
-      <p:sp>
-        <p:nvSpPr>
-          <p:cNvPr id="9" name="Text 7"/>
-          <p:cNvSpPr/>
-          <p:nvPr/>
-        </p:nvSpPr>
-        <p:spPr>
-          <a:xfrm>
-            <a:off x="640080" y="731520"/>
-            <a:ext cx="420624" cy="164592"/>
-          </a:xfrm>
-          <a:prstGeom prst="rect">
-            <a:avLst/>
-          </a:prstGeom>
-          <a:noFill/>
-          <a:ln/>
-        </p:spPr>
-        <p:txBody>
-          <a:bodyPr wrap="square" lIns="0" tIns="0" rIns="0" bIns="0" rtlCol="0" anchor="ctr"/>
-          <a:lstStyle/>
-          <a:p>
-            <a:pPr algn="ctr" indent="0" marL="0">
-              <a:buNone/>
-            </a:pPr>
-            <a:r>
-              <a:rPr lang="en-US" sz="1100" b="1" dirty="0">
-                <a:solidFill>
-                  <a:srgbClr val="FFFFFF"/>
-                </a:solidFill>
-                <a:latin typeface="Aptos" pitchFamily="34" charset="0"/>
-                <a:ea typeface="Aptos" pitchFamily="34" charset="-122"/>
-                <a:cs typeface="Aptos" pitchFamily="34" charset="-120"/>
-              </a:rPr>
-              <a:t>5</a:t>
-            </a:r>
-            <a:endParaRPr lang="en-US" sz="1100" dirty="0"/>
-          </a:p>
-        </p:txBody>
-      </p:sp>
-      <p:sp>
-        <p:nvSpPr>
-          <p:cNvPr id="10" name="Text 8"/>
-          <p:cNvSpPr/>
-          <p:nvPr/>
-        </p:nvSpPr>
-        <p:spPr>
-          <a:xfrm>
-            <a:off x="640080" y="621792"/>
             <a:ext cx="10881360" cy="713232"/>
           </a:xfrm>
           <a:prstGeom prst="rect">
@@ -3383,14 +3337,14 @@
       </p:sp>
       <p:sp>
         <p:nvSpPr>
-          <p:cNvPr id="11" name="Text 9"/>
+          <p:cNvPr id="9" name="Text 7"/>
           <p:cNvSpPr/>
           <p:nvPr/>
         </p:nvSpPr>
         <p:spPr>
           <a:xfrm>
             <a:off x="868680" y="1508760"/>
-            <a:ext cx="6537960" cy="4160520"/>
+            <a:ext cx="6309360" cy="4160520"/>
           </a:xfrm>
           <a:prstGeom prst="rect">
             <a:avLst/>
@@ -3449,18 +3403,18 @@
       </p:sp>
       <p:sp>
         <p:nvSpPr>
-          <p:cNvPr id="12" name="Shape 10"/>
-          <p:cNvSpPr/>
-          <p:nvPr/>
-        </p:nvSpPr>
-        <p:spPr>
-          <a:xfrm>
-            <a:off x="7909560" y="1417320"/>
-            <a:ext cx="3154680" cy="1828800"/>
+          <p:cNvPr id="10" name="Shape 8"/>
+          <p:cNvSpPr/>
+          <p:nvPr/>
+        </p:nvSpPr>
+        <p:spPr>
+          <a:xfrm>
+            <a:off x="7635240" y="1325880"/>
+            <a:ext cx="3474720" cy="1325880"/>
           </a:xfrm>
           <a:prstGeom prst="roundRect">
             <a:avLst>
-              <a:gd name="adj" fmla="val 6000"/>
+              <a:gd name="adj" fmla="val 8276"/>
             </a:avLst>
           </a:prstGeom>
           <a:solidFill>
@@ -3476,14 +3430,14 @@
       </p:sp>
       <p:sp>
         <p:nvSpPr>
-          <p:cNvPr id="13" name="Text 11"/>
-          <p:cNvSpPr/>
-          <p:nvPr/>
-        </p:nvSpPr>
-        <p:spPr>
-          <a:xfrm>
-            <a:off x="8074152" y="1563624"/>
-            <a:ext cx="2825496" cy="256032"/>
+          <p:cNvPr id="11" name="Text 9"/>
+          <p:cNvSpPr/>
+          <p:nvPr/>
+        </p:nvSpPr>
+        <p:spPr>
+          <a:xfrm>
+            <a:off x="7799832" y="1472184"/>
+            <a:ext cx="3145536" cy="256032"/>
           </a:xfrm>
           <a:prstGeom prst="rect">
             <a:avLst/>
@@ -3507,7 +3461,7 @@
                 <a:ea typeface="Aptos" pitchFamily="34" charset="-122"/>
                 <a:cs typeface="Aptos" pitchFamily="34" charset="-120"/>
               </a:rPr>
-              <a:t>Key idea</a:t>
+              <a:t>Core concept</a:t>
             </a:r>
             <a:endParaRPr lang="en-US" sz="1300" dirty="0"/>
           </a:p>
@@ -3515,14 +3469,14 @@
       </p:sp>
       <p:sp>
         <p:nvSpPr>
-          <p:cNvPr id="14" name="Text 12"/>
-          <p:cNvSpPr/>
-          <p:nvPr/>
-        </p:nvSpPr>
-        <p:spPr>
-          <a:xfrm>
-            <a:off x="8074152" y="1920240"/>
-            <a:ext cx="2825496" cy="1188720"/>
+          <p:cNvPr id="12" name="Text 10"/>
+          <p:cNvSpPr/>
+          <p:nvPr/>
+        </p:nvSpPr>
+        <p:spPr>
+          <a:xfrm>
+            <a:off x="7799832" y="1828800"/>
+            <a:ext cx="3145536" cy="685800"/>
           </a:xfrm>
           <a:prstGeom prst="rect">
             <a:avLst/>
@@ -3556,18 +3510,159 @@
       </p:sp>
       <p:sp>
         <p:nvSpPr>
-          <p:cNvPr id="15" name="Shape 13"/>
-          <p:cNvSpPr/>
-          <p:nvPr/>
-        </p:nvSpPr>
-        <p:spPr>
-          <a:xfrm>
-            <a:off x="7909560" y="3520440"/>
-            <a:ext cx="3154680" cy="1737360"/>
+          <p:cNvPr id="13" name="Shape 11"/>
+          <p:cNvSpPr/>
+          <p:nvPr/>
+        </p:nvSpPr>
+        <p:spPr>
+          <a:xfrm>
+            <a:off x="7635240" y="2788920"/>
+            <a:ext cx="3474720" cy="1536192"/>
           </a:xfrm>
           <a:prstGeom prst="roundRect">
             <a:avLst>
-              <a:gd name="adj" fmla="val 6316"/>
+              <a:gd name="adj" fmla="val 7143"/>
+            </a:avLst>
+          </a:prstGeom>
+          <a:solidFill>
+            <a:srgbClr val="FFFFFF">
+              <a:alpha val="88000"/>
+            </a:srgbClr>
+          </a:solidFill>
+          <a:ln w="12700">
+            <a:solidFill>
+              <a:srgbClr val="D6E8F2"/>
+            </a:solidFill>
+            <a:prstDash val="solid"/>
+          </a:ln>
+        </p:spPr>
+      </p:sp>
+      <p:sp>
+        <p:nvSpPr>
+          <p:cNvPr id="14" name="Shape 12"/>
+          <p:cNvSpPr/>
+          <p:nvPr/>
+        </p:nvSpPr>
+        <p:spPr>
+          <a:xfrm>
+            <a:off x="8074152" y="3291840"/>
+            <a:ext cx="2596896" cy="749808"/>
+          </a:xfrm>
+          <a:prstGeom prst="rect">
+            <a:avLst/>
+          </a:prstGeom>
+          <a:solidFill>
+            <a:srgbClr val="EAF6F8"/>
+          </a:solidFill>
+          <a:ln w="12700">
+            <a:solidFill>
+              <a:srgbClr val="8ABBD8"/>
+            </a:solidFill>
+            <a:prstDash val="solid"/>
+          </a:ln>
+        </p:spPr>
+      </p:sp>
+      <p:sp>
+        <p:nvSpPr>
+          <p:cNvPr id="15" name="Shape 13"/>
+          <p:cNvSpPr/>
+          <p:nvPr/>
+        </p:nvSpPr>
+        <p:spPr>
+          <a:xfrm>
+            <a:off x="8202168" y="3721608"/>
+            <a:ext cx="2340864" cy="0"/>
+          </a:xfrm>
+          <a:prstGeom prst="line">
+            <a:avLst/>
+          </a:prstGeom>
+          <a:noFill/>
+          <a:ln w="19050">
+            <a:solidFill>
+              <a:srgbClr val="0068B7"/>
+            </a:solidFill>
+            <a:prstDash val="solid"/>
+          </a:ln>
+        </p:spPr>
+      </p:sp>
+      <p:sp>
+        <p:nvSpPr>
+          <p:cNvPr id="16" name="Shape 14"/>
+          <p:cNvSpPr/>
+          <p:nvPr/>
+        </p:nvSpPr>
+        <p:spPr>
+          <a:xfrm>
+            <a:off x="9198864" y="4206240"/>
+            <a:ext cx="347472" cy="347472"/>
+          </a:xfrm>
+          <a:prstGeom prst="ellipse">
+            <a:avLst/>
+          </a:prstGeom>
+          <a:solidFill>
+            <a:srgbClr val="2F8A28"/>
+          </a:solidFill>
+          <a:ln w="12700">
+            <a:solidFill>
+              <a:srgbClr val="2F8A28"/>
+            </a:solidFill>
+            <a:prstDash val="solid"/>
+          </a:ln>
+        </p:spPr>
+      </p:sp>
+      <p:sp>
+        <p:nvSpPr>
+          <p:cNvPr id="17" name="Text 15"/>
+          <p:cNvSpPr/>
+          <p:nvPr/>
+        </p:nvSpPr>
+        <p:spPr>
+          <a:xfrm>
+            <a:off x="7909560" y="3977640"/>
+            <a:ext cx="2926080" cy="182880"/>
+          </a:xfrm>
+          <a:prstGeom prst="rect">
+            <a:avLst/>
+          </a:prstGeom>
+          <a:noFill/>
+          <a:ln/>
+        </p:spPr>
+        <p:txBody>
+          <a:bodyPr wrap="square" lIns="0" tIns="0" rIns="0" bIns="0" rtlCol="0" anchor="ctr"/>
+          <a:lstStyle/>
+          <a:p>
+            <a:pPr algn="ctr" indent="0" marL="0">
+              <a:buNone/>
+            </a:pPr>
+            <a:r>
+              <a:rPr lang="en-US" sz="1000" dirty="0">
+                <a:solidFill>
+                  <a:srgbClr val="003A63"/>
+                </a:solidFill>
+                <a:latin typeface="Aptos" pitchFamily="34" charset="0"/>
+                <a:ea typeface="Aptos" pitchFamily="34" charset="-122"/>
+                <a:cs typeface="Aptos" pitchFamily="34" charset="-120"/>
+              </a:rPr>
+              <a:t>Concept to action</a:t>
+            </a:r>
+            <a:endParaRPr lang="en-US" sz="1000" dirty="0"/>
+          </a:p>
+        </p:txBody>
+      </p:sp>
+      <p:sp>
+        <p:nvSpPr>
+          <p:cNvPr id="18" name="Shape 16"/>
+          <p:cNvSpPr/>
+          <p:nvPr/>
+        </p:nvSpPr>
+        <p:spPr>
+          <a:xfrm>
+            <a:off x="7635240" y="4498848"/>
+            <a:ext cx="3474720" cy="1143000"/>
+          </a:xfrm>
+          <a:prstGeom prst="roundRect">
+            <a:avLst>
+              <a:gd name="adj" fmla="val 9600"/>
             </a:avLst>
           </a:prstGeom>
           <a:solidFill>
@@ -3583,14 +3678,14 @@
       </p:sp>
       <p:sp>
         <p:nvSpPr>
-          <p:cNvPr id="16" name="Text 14"/>
-          <p:cNvSpPr/>
-          <p:nvPr/>
-        </p:nvSpPr>
-        <p:spPr>
-          <a:xfrm>
-            <a:off x="8074152" y="3666744"/>
-            <a:ext cx="2825496" cy="256032"/>
+          <p:cNvPr id="19" name="Text 17"/>
+          <p:cNvSpPr/>
+          <p:nvPr/>
+        </p:nvSpPr>
+        <p:spPr>
+          <a:xfrm>
+            <a:off x="7799832" y="4645152"/>
+            <a:ext cx="3145536" cy="256032"/>
           </a:xfrm>
           <a:prstGeom prst="rect">
             <a:avLst/>
@@ -3614,7 +3709,7 @@
                 <a:ea typeface="Aptos" pitchFamily="34" charset="-122"/>
                 <a:cs typeface="Aptos" pitchFamily="34" charset="-120"/>
               </a:rPr>
-              <a:t>Use this for</a:t>
+              <a:t>Apply it</a:t>
             </a:r>
             <a:endParaRPr lang="en-US" sz="1300" dirty="0"/>
           </a:p>
@@ -3622,14 +3717,14 @@
       </p:sp>
       <p:sp>
         <p:nvSpPr>
-          <p:cNvPr id="17" name="Text 15"/>
-          <p:cNvSpPr/>
-          <p:nvPr/>
-        </p:nvSpPr>
-        <p:spPr>
-          <a:xfrm>
-            <a:off x="8074152" y="4023360"/>
-            <a:ext cx="2825496" cy="1097280"/>
+          <p:cNvPr id="20" name="Text 18"/>
+          <p:cNvSpPr/>
+          <p:nvPr/>
+        </p:nvSpPr>
+        <p:spPr>
+          <a:xfrm>
+            <a:off x="7799832" y="5001768"/>
+            <a:ext cx="3145536" cy="502920"/>
           </a:xfrm>
           <a:prstGeom prst="rect">
             <a:avLst/>
@@ -3655,7 +3750,7 @@
                 <a:ea typeface="Aptos" pitchFamily="34" charset="-122"/>
                 <a:cs typeface="Aptos" pitchFamily="34" charset="-120"/>
               </a:rPr>
-              <a:t>Connect the concept to public health decisions, safeguards, documentation, or implementation work.</a:t>
+              <a:t>Connect the concept to public health purpose, responsible use, required safeguards, documentation, and the next action a department should take.</a:t>
             </a:r>
             <a:endParaRPr lang="en-US" sz="1550" dirty="0"/>
           </a:p>
@@ -3829,8 +3924,8 @@
         </p:nvSpPr>
         <p:spPr>
           <a:xfrm>
-            <a:off x="9966960" y="6537960"/>
-            <a:ext cx="1645920" cy="201168"/>
+            <a:off x="9646920" y="6537960"/>
+            <a:ext cx="1965960" cy="201168"/>
           </a:xfrm>
           <a:prstGeom prst="rect">
             <a:avLst/>
@@ -3854,7 +3949,7 @@
                 <a:ea typeface="Aptos" pitchFamily="34" charset="-122"/>
                 <a:cs typeface="Aptos" pitchFamily="34" charset="-120"/>
               </a:rPr>
-              <a:t>Â© Paula Soper</a:t>
+              <a:t>Copyright Paula Soper</a:t>
             </a:r>
             <a:endParaRPr lang="en-US" sz="800" dirty="0"/>
           </a:p>
@@ -3949,7 +4044,7 @@
         <p:spPr>
           <a:xfrm>
             <a:off x="868680" y="1508760"/>
-            <a:ext cx="6537960" cy="4160520"/>
+            <a:ext cx="6309360" cy="4160520"/>
           </a:xfrm>
           <a:prstGeom prst="rect">
             <a:avLst/>
@@ -4014,12 +4109,12 @@
         </p:nvSpPr>
         <p:spPr>
           <a:xfrm>
-            <a:off x="7909560" y="1417320"/>
-            <a:ext cx="3154680" cy="1828800"/>
+            <a:off x="7635240" y="1325880"/>
+            <a:ext cx="3474720" cy="1325880"/>
           </a:xfrm>
           <a:prstGeom prst="roundRect">
             <a:avLst>
-              <a:gd name="adj" fmla="val 6000"/>
+              <a:gd name="adj" fmla="val 8276"/>
             </a:avLst>
           </a:prstGeom>
           <a:solidFill>
@@ -4041,8 +4136,8 @@
         </p:nvSpPr>
         <p:spPr>
           <a:xfrm>
-            <a:off x="8074152" y="1563624"/>
-            <a:ext cx="2825496" cy="256032"/>
+            <a:off x="7799832" y="1472184"/>
+            <a:ext cx="3145536" cy="256032"/>
           </a:xfrm>
           <a:prstGeom prst="rect">
             <a:avLst/>
@@ -4066,7 +4161,7 @@
                 <a:ea typeface="Aptos" pitchFamily="34" charset="-122"/>
                 <a:cs typeface="Aptos" pitchFamily="34" charset="-120"/>
               </a:rPr>
-              <a:t>Key idea</a:t>
+              <a:t>Core concept</a:t>
             </a:r>
             <a:endParaRPr lang="en-US" sz="1300" dirty="0"/>
           </a:p>
@@ -4080,8 +4175,8 @@
         </p:nvSpPr>
         <p:spPr>
           <a:xfrm>
-            <a:off x="8074152" y="1920240"/>
-            <a:ext cx="2825496" cy="1188720"/>
+            <a:off x="7799832" y="1828800"/>
+            <a:ext cx="3145536" cy="685800"/>
           </a:xfrm>
           <a:prstGeom prst="rect">
             <a:avLst/>
@@ -4121,12 +4216,153 @@
         </p:nvSpPr>
         <p:spPr>
           <a:xfrm>
-            <a:off x="7909560" y="3520440"/>
-            <a:ext cx="3154680" cy="1737360"/>
+            <a:off x="7635240" y="2788920"/>
+            <a:ext cx="3474720" cy="1536192"/>
           </a:xfrm>
           <a:prstGeom prst="roundRect">
             <a:avLst>
-              <a:gd name="adj" fmla="val 6316"/>
+              <a:gd name="adj" fmla="val 7143"/>
+            </a:avLst>
+          </a:prstGeom>
+          <a:solidFill>
+            <a:srgbClr val="FFFFFF">
+              <a:alpha val="88000"/>
+            </a:srgbClr>
+          </a:solidFill>
+          <a:ln w="12700">
+            <a:solidFill>
+              <a:srgbClr val="D6E8F2"/>
+            </a:solidFill>
+            <a:prstDash val="solid"/>
+          </a:ln>
+        </p:spPr>
+      </p:sp>
+      <p:sp>
+        <p:nvSpPr>
+          <p:cNvPr id="14" name="Shape 12"/>
+          <p:cNvSpPr/>
+          <p:nvPr/>
+        </p:nvSpPr>
+        <p:spPr>
+          <a:xfrm>
+            <a:off x="8074152" y="3291840"/>
+            <a:ext cx="2596896" cy="749808"/>
+          </a:xfrm>
+          <a:prstGeom prst="rect">
+            <a:avLst/>
+          </a:prstGeom>
+          <a:solidFill>
+            <a:srgbClr val="EAF6F8"/>
+          </a:solidFill>
+          <a:ln w="12700">
+            <a:solidFill>
+              <a:srgbClr val="8ABBD8"/>
+            </a:solidFill>
+            <a:prstDash val="solid"/>
+          </a:ln>
+        </p:spPr>
+      </p:sp>
+      <p:sp>
+        <p:nvSpPr>
+          <p:cNvPr id="15" name="Shape 13"/>
+          <p:cNvSpPr/>
+          <p:nvPr/>
+        </p:nvSpPr>
+        <p:spPr>
+          <a:xfrm>
+            <a:off x="8202168" y="3721608"/>
+            <a:ext cx="2340864" cy="0"/>
+          </a:xfrm>
+          <a:prstGeom prst="line">
+            <a:avLst/>
+          </a:prstGeom>
+          <a:noFill/>
+          <a:ln w="19050">
+            <a:solidFill>
+              <a:srgbClr val="0068B7"/>
+            </a:solidFill>
+            <a:prstDash val="solid"/>
+          </a:ln>
+        </p:spPr>
+      </p:sp>
+      <p:sp>
+        <p:nvSpPr>
+          <p:cNvPr id="16" name="Shape 14"/>
+          <p:cNvSpPr/>
+          <p:nvPr/>
+        </p:nvSpPr>
+        <p:spPr>
+          <a:xfrm>
+            <a:off x="9198864" y="4206240"/>
+            <a:ext cx="347472" cy="347472"/>
+          </a:xfrm>
+          <a:prstGeom prst="ellipse">
+            <a:avLst/>
+          </a:prstGeom>
+          <a:solidFill>
+            <a:srgbClr val="2F8A28"/>
+          </a:solidFill>
+          <a:ln w="12700">
+            <a:solidFill>
+              <a:srgbClr val="2F8A28"/>
+            </a:solidFill>
+            <a:prstDash val="solid"/>
+          </a:ln>
+        </p:spPr>
+      </p:sp>
+      <p:sp>
+        <p:nvSpPr>
+          <p:cNvPr id="17" name="Text 15"/>
+          <p:cNvSpPr/>
+          <p:nvPr/>
+        </p:nvSpPr>
+        <p:spPr>
+          <a:xfrm>
+            <a:off x="7909560" y="3977640"/>
+            <a:ext cx="2926080" cy="182880"/>
+          </a:xfrm>
+          <a:prstGeom prst="rect">
+            <a:avLst/>
+          </a:prstGeom>
+          <a:noFill/>
+          <a:ln/>
+        </p:spPr>
+        <p:txBody>
+          <a:bodyPr wrap="square" lIns="0" tIns="0" rIns="0" bIns="0" rtlCol="0" anchor="ctr"/>
+          <a:lstStyle/>
+          <a:p>
+            <a:pPr algn="ctr" indent="0" marL="0">
+              <a:buNone/>
+            </a:pPr>
+            <a:r>
+              <a:rPr lang="en-US" sz="1000" dirty="0">
+                <a:solidFill>
+                  <a:srgbClr val="003A63"/>
+                </a:solidFill>
+                <a:latin typeface="Aptos" pitchFamily="34" charset="0"/>
+                <a:ea typeface="Aptos" pitchFamily="34" charset="-122"/>
+                <a:cs typeface="Aptos" pitchFamily="34" charset="-120"/>
+              </a:rPr>
+              <a:t>Concept to action</a:t>
+            </a:r>
+            <a:endParaRPr lang="en-US" sz="1000" dirty="0"/>
+          </a:p>
+        </p:txBody>
+      </p:sp>
+      <p:sp>
+        <p:nvSpPr>
+          <p:cNvPr id="18" name="Shape 16"/>
+          <p:cNvSpPr/>
+          <p:nvPr/>
+        </p:nvSpPr>
+        <p:spPr>
+          <a:xfrm>
+            <a:off x="7635240" y="4498848"/>
+            <a:ext cx="3474720" cy="1143000"/>
+          </a:xfrm>
+          <a:prstGeom prst="roundRect">
+            <a:avLst>
+              <a:gd name="adj" fmla="val 9600"/>
             </a:avLst>
           </a:prstGeom>
           <a:solidFill>
@@ -4142,14 +4378,14 @@
       </p:sp>
       <p:sp>
         <p:nvSpPr>
-          <p:cNvPr id="14" name="Text 12"/>
-          <p:cNvSpPr/>
-          <p:nvPr/>
-        </p:nvSpPr>
-        <p:spPr>
-          <a:xfrm>
-            <a:off x="8074152" y="3666744"/>
-            <a:ext cx="2825496" cy="256032"/>
+          <p:cNvPr id="19" name="Text 17"/>
+          <p:cNvSpPr/>
+          <p:nvPr/>
+        </p:nvSpPr>
+        <p:spPr>
+          <a:xfrm>
+            <a:off x="7799832" y="4645152"/>
+            <a:ext cx="3145536" cy="256032"/>
           </a:xfrm>
           <a:prstGeom prst="rect">
             <a:avLst/>
@@ -4173,7 +4409,7 @@
                 <a:ea typeface="Aptos" pitchFamily="34" charset="-122"/>
                 <a:cs typeface="Aptos" pitchFamily="34" charset="-120"/>
               </a:rPr>
-              <a:t>Use this for</a:t>
+              <a:t>Apply it</a:t>
             </a:r>
             <a:endParaRPr lang="en-US" sz="1300" dirty="0"/>
           </a:p>
@@ -4181,14 +4417,14 @@
       </p:sp>
       <p:sp>
         <p:nvSpPr>
-          <p:cNvPr id="15" name="Text 13"/>
-          <p:cNvSpPr/>
-          <p:nvPr/>
-        </p:nvSpPr>
-        <p:spPr>
-          <a:xfrm>
-            <a:off x="8074152" y="4023360"/>
-            <a:ext cx="2825496" cy="1097280"/>
+          <p:cNvPr id="20" name="Text 18"/>
+          <p:cNvSpPr/>
+          <p:nvPr/>
+        </p:nvSpPr>
+        <p:spPr>
+          <a:xfrm>
+            <a:off x="7799832" y="5001768"/>
+            <a:ext cx="3145536" cy="502920"/>
           </a:xfrm>
           <a:prstGeom prst="rect">
             <a:avLst/>
@@ -4214,7 +4450,7 @@
                 <a:ea typeface="Aptos" pitchFamily="34" charset="-122"/>
                 <a:cs typeface="Aptos" pitchFamily="34" charset="-120"/>
               </a:rPr>
-              <a:t>Connect the concept to public health decisions, safeguards, documentation, or implementation work.</a:t>
+              <a:t>Connect the concept to public health purpose, responsible use, required safeguards, documentation, and the next action a department should take.</a:t>
             </a:r>
             <a:endParaRPr lang="en-US" sz="1550" dirty="0"/>
           </a:p>
@@ -4388,8 +4624,8 @@
         </p:nvSpPr>
         <p:spPr>
           <a:xfrm>
-            <a:off x="9966960" y="6537960"/>
-            <a:ext cx="1645920" cy="201168"/>
+            <a:off x="9646920" y="6537960"/>
+            <a:ext cx="1965960" cy="201168"/>
           </a:xfrm>
           <a:prstGeom prst="rect">
             <a:avLst/>
@@ -4413,7 +4649,7 @@
                 <a:ea typeface="Aptos" pitchFamily="34" charset="-122"/>
                 <a:cs typeface="Aptos" pitchFamily="34" charset="-120"/>
               </a:rPr>
-              <a:t>Â© Paula Soper</a:t>
+              <a:t>Copyright Paula Soper</a:t>
             </a:r>
             <a:endParaRPr lang="en-US" sz="800" dirty="0"/>
           </a:p>
@@ -4460,77 +4696,13 @@
       </p:sp>
       <p:sp>
         <p:nvSpPr>
-          <p:cNvPr id="8" name="Shape 6"/>
+          <p:cNvPr id="8" name="Text 6"/>
           <p:cNvSpPr/>
           <p:nvPr/>
         </p:nvSpPr>
         <p:spPr>
           <a:xfrm>
             <a:off x="640080" y="658368"/>
-            <a:ext cx="420624" cy="420624"/>
-          </a:xfrm>
-          <a:prstGeom prst="ellipse">
-            <a:avLst/>
-          </a:prstGeom>
-          <a:solidFill>
-            <a:srgbClr val="0068B7"/>
-          </a:solidFill>
-          <a:ln w="12700">
-            <a:solidFill>
-              <a:srgbClr val="0068B7"/>
-            </a:solidFill>
-            <a:prstDash val="solid"/>
-          </a:ln>
-        </p:spPr>
-      </p:sp>
-      <p:sp>
-        <p:nvSpPr>
-          <p:cNvPr id="9" name="Text 7"/>
-          <p:cNvSpPr/>
-          <p:nvPr/>
-        </p:nvSpPr>
-        <p:spPr>
-          <a:xfrm>
-            <a:off x="640080" y="731520"/>
-            <a:ext cx="420624" cy="164592"/>
-          </a:xfrm>
-          <a:prstGeom prst="rect">
-            <a:avLst/>
-          </a:prstGeom>
-          <a:noFill/>
-          <a:ln/>
-        </p:spPr>
-        <p:txBody>
-          <a:bodyPr wrap="square" lIns="0" tIns="0" rIns="0" bIns="0" rtlCol="0" anchor="ctr"/>
-          <a:lstStyle/>
-          <a:p>
-            <a:pPr algn="ctr" indent="0" marL="0">
-              <a:buNone/>
-            </a:pPr>
-            <a:r>
-              <a:rPr lang="en-US" sz="1100" b="1" dirty="0">
-                <a:solidFill>
-                  <a:srgbClr val="FFFFFF"/>
-                </a:solidFill>
-                <a:latin typeface="Aptos" pitchFamily="34" charset="0"/>
-                <a:ea typeface="Aptos" pitchFamily="34" charset="-122"/>
-                <a:cs typeface="Aptos" pitchFamily="34" charset="-120"/>
-              </a:rPr>
-              <a:t>6</a:t>
-            </a:r>
-            <a:endParaRPr lang="en-US" sz="1100" dirty="0"/>
-          </a:p>
-        </p:txBody>
-      </p:sp>
-      <p:sp>
-        <p:nvSpPr>
-          <p:cNvPr id="10" name="Text 8"/>
-          <p:cNvSpPr/>
-          <p:nvPr/>
-        </p:nvSpPr>
-        <p:spPr>
-          <a:xfrm>
-            <a:off x="640080" y="621792"/>
             <a:ext cx="10881360" cy="713232"/>
           </a:xfrm>
           <a:prstGeom prst="rect">
@@ -4565,14 +4737,14 @@
       </p:sp>
       <p:sp>
         <p:nvSpPr>
-          <p:cNvPr id="11" name="Text 9"/>
+          <p:cNvPr id="9" name="Text 7"/>
           <p:cNvSpPr/>
           <p:nvPr/>
         </p:nvSpPr>
         <p:spPr>
           <a:xfrm>
             <a:off x="868680" y="1508760"/>
-            <a:ext cx="6537960" cy="4160520"/>
+            <a:ext cx="6309360" cy="4160520"/>
           </a:xfrm>
           <a:prstGeom prst="rect">
             <a:avLst/>
@@ -4631,18 +4803,18 @@
       </p:sp>
       <p:sp>
         <p:nvSpPr>
-          <p:cNvPr id="12" name="Shape 10"/>
-          <p:cNvSpPr/>
-          <p:nvPr/>
-        </p:nvSpPr>
-        <p:spPr>
-          <a:xfrm>
-            <a:off x="7909560" y="1417320"/>
-            <a:ext cx="3154680" cy="1828800"/>
+          <p:cNvPr id="10" name="Shape 8"/>
+          <p:cNvSpPr/>
+          <p:nvPr/>
+        </p:nvSpPr>
+        <p:spPr>
+          <a:xfrm>
+            <a:off x="7635240" y="1325880"/>
+            <a:ext cx="3474720" cy="1325880"/>
           </a:xfrm>
           <a:prstGeom prst="roundRect">
             <a:avLst>
-              <a:gd name="adj" fmla="val 6000"/>
+              <a:gd name="adj" fmla="val 8276"/>
             </a:avLst>
           </a:prstGeom>
           <a:solidFill>
@@ -4658,14 +4830,14 @@
       </p:sp>
       <p:sp>
         <p:nvSpPr>
-          <p:cNvPr id="13" name="Text 11"/>
-          <p:cNvSpPr/>
-          <p:nvPr/>
-        </p:nvSpPr>
-        <p:spPr>
-          <a:xfrm>
-            <a:off x="8074152" y="1563624"/>
-            <a:ext cx="2825496" cy="256032"/>
+          <p:cNvPr id="11" name="Text 9"/>
+          <p:cNvSpPr/>
+          <p:nvPr/>
+        </p:nvSpPr>
+        <p:spPr>
+          <a:xfrm>
+            <a:off x="7799832" y="1472184"/>
+            <a:ext cx="3145536" cy="256032"/>
           </a:xfrm>
           <a:prstGeom prst="rect">
             <a:avLst/>
@@ -4689,7 +4861,7 @@
                 <a:ea typeface="Aptos" pitchFamily="34" charset="-122"/>
                 <a:cs typeface="Aptos" pitchFamily="34" charset="-120"/>
               </a:rPr>
-              <a:t>Key idea</a:t>
+              <a:t>Risk check</a:t>
             </a:r>
             <a:endParaRPr lang="en-US" sz="1300" dirty="0"/>
           </a:p>
@@ -4697,14 +4869,14 @@
       </p:sp>
       <p:sp>
         <p:nvSpPr>
-          <p:cNvPr id="14" name="Text 12"/>
-          <p:cNvSpPr/>
-          <p:nvPr/>
-        </p:nvSpPr>
-        <p:spPr>
-          <a:xfrm>
-            <a:off x="8074152" y="1920240"/>
-            <a:ext cx="2825496" cy="1188720"/>
+          <p:cNvPr id="12" name="Text 10"/>
+          <p:cNvSpPr/>
+          <p:nvPr/>
+        </p:nvSpPr>
+        <p:spPr>
+          <a:xfrm>
+            <a:off x="7799832" y="1828800"/>
+            <a:ext cx="3145536" cy="685800"/>
           </a:xfrm>
           <a:prstGeom prst="rect">
             <a:avLst/>
@@ -4738,18 +4910,171 @@
       </p:sp>
       <p:sp>
         <p:nvSpPr>
-          <p:cNvPr id="15" name="Shape 13"/>
-          <p:cNvSpPr/>
-          <p:nvPr/>
-        </p:nvSpPr>
-        <p:spPr>
-          <a:xfrm>
-            <a:off x="7909560" y="3520440"/>
-            <a:ext cx="3154680" cy="1737360"/>
+          <p:cNvPr id="13" name="Shape 11"/>
+          <p:cNvSpPr/>
+          <p:nvPr/>
+        </p:nvSpPr>
+        <p:spPr>
+          <a:xfrm>
+            <a:off x="7635240" y="2788920"/>
+            <a:ext cx="3474720" cy="1536192"/>
           </a:xfrm>
           <a:prstGeom prst="roundRect">
             <a:avLst>
-              <a:gd name="adj" fmla="val 6316"/>
+              <a:gd name="adj" fmla="val 7143"/>
+            </a:avLst>
+          </a:prstGeom>
+          <a:solidFill>
+            <a:srgbClr val="FFFFFF">
+              <a:alpha val="88000"/>
+            </a:srgbClr>
+          </a:solidFill>
+          <a:ln w="12700">
+            <a:solidFill>
+              <a:srgbClr val="D6E8F2"/>
+            </a:solidFill>
+            <a:prstDash val="solid"/>
+          </a:ln>
+        </p:spPr>
+      </p:sp>
+      <p:sp>
+        <p:nvSpPr>
+          <p:cNvPr id="14" name="Shape 12"/>
+          <p:cNvSpPr/>
+          <p:nvPr/>
+        </p:nvSpPr>
+        <p:spPr>
+          <a:xfrm>
+            <a:off x="8046720" y="3108960"/>
+            <a:ext cx="2651760" cy="896112"/>
+          </a:xfrm>
+          <a:prstGeom prst="arc">
+            <a:avLst/>
+          </a:prstGeom>
+          <a:noFill/>
+          <a:ln w="25400">
+            <a:solidFill>
+              <a:srgbClr val="0068B7"/>
+            </a:solidFill>
+            <a:prstDash val="solid"/>
+          </a:ln>
+        </p:spPr>
+      </p:sp>
+      <p:sp>
+        <p:nvSpPr>
+          <p:cNvPr id="15" name="Text 13"/>
+          <p:cNvSpPr/>
+          <p:nvPr/>
+        </p:nvSpPr>
+        <p:spPr>
+          <a:xfrm>
+            <a:off x="7909560" y="3099816"/>
+            <a:ext cx="2926080" cy="256032"/>
+          </a:xfrm>
+          <a:prstGeom prst="rect">
+            <a:avLst/>
+          </a:prstGeom>
+          <a:noFill/>
+          <a:ln/>
+        </p:spPr>
+        <p:txBody>
+          <a:bodyPr wrap="square" lIns="0" tIns="0" rIns="0" bIns="0" rtlCol="0" anchor="ctr"/>
+          <a:lstStyle/>
+          <a:p>
+            <a:pPr algn="ctr" indent="0" marL="0">
+              <a:buNone/>
+            </a:pPr>
+            <a:r>
+              <a:rPr lang="en-US" sz="1500" b="1" dirty="0">
+                <a:solidFill>
+                  <a:srgbClr val="003A63"/>
+                </a:solidFill>
+                <a:latin typeface="Aptos" pitchFamily="34" charset="0"/>
+                <a:ea typeface="Aptos" pitchFamily="34" charset="-122"/>
+                <a:cs typeface="Aptos" pitchFamily="34" charset="-120"/>
+              </a:rPr>
+              <a:t>Risk</a:t>
+            </a:r>
+            <a:endParaRPr lang="en-US" sz="1500" dirty="0"/>
+          </a:p>
+        </p:txBody>
+      </p:sp>
+      <p:sp>
+        <p:nvSpPr>
+          <p:cNvPr id="16" name="Shape 14"/>
+          <p:cNvSpPr/>
+          <p:nvPr/>
+        </p:nvSpPr>
+        <p:spPr>
+          <a:xfrm>
+            <a:off x="8366760" y="3639312"/>
+            <a:ext cx="2011680" cy="0"/>
+          </a:xfrm>
+          <a:prstGeom prst="line">
+            <a:avLst/>
+          </a:prstGeom>
+          <a:noFill/>
+          <a:ln w="63500">
+            <a:solidFill>
+              <a:srgbClr val="2F8A28"/>
+            </a:solidFill>
+            <a:prstDash val="solid"/>
+          </a:ln>
+        </p:spPr>
+      </p:sp>
+      <p:sp>
+        <p:nvSpPr>
+          <p:cNvPr id="17" name="Text 15"/>
+          <p:cNvSpPr/>
+          <p:nvPr/>
+        </p:nvSpPr>
+        <p:spPr>
+          <a:xfrm>
+            <a:off x="7909560" y="3849624"/>
+            <a:ext cx="2926080" cy="164592"/>
+          </a:xfrm>
+          <a:prstGeom prst="rect">
+            <a:avLst/>
+          </a:prstGeom>
+          <a:noFill/>
+          <a:ln/>
+        </p:spPr>
+        <p:txBody>
+          <a:bodyPr wrap="square" lIns="0" tIns="0" rIns="0" bIns="0" rtlCol="0" anchor="ctr"/>
+          <a:lstStyle/>
+          <a:p>
+            <a:pPr algn="ctr" indent="0" marL="0">
+              <a:buNone/>
+            </a:pPr>
+            <a:r>
+              <a:rPr lang="en-US" sz="900" dirty="0">
+                <a:solidFill>
+                  <a:srgbClr val="003A63"/>
+                </a:solidFill>
+                <a:latin typeface="Aptos" pitchFamily="34" charset="0"/>
+                <a:ea typeface="Aptos" pitchFamily="34" charset="-122"/>
+                <a:cs typeface="Aptos" pitchFamily="34" charset="-120"/>
+              </a:rPr>
+              <a:t>Human review</a:t>
+            </a:r>
+            <a:endParaRPr lang="en-US" sz="900" dirty="0"/>
+          </a:p>
+        </p:txBody>
+      </p:sp>
+      <p:sp>
+        <p:nvSpPr>
+          <p:cNvPr id="18" name="Shape 16"/>
+          <p:cNvSpPr/>
+          <p:nvPr/>
+        </p:nvSpPr>
+        <p:spPr>
+          <a:xfrm>
+            <a:off x="7635240" y="4498848"/>
+            <a:ext cx="3474720" cy="1143000"/>
+          </a:xfrm>
+          <a:prstGeom prst="roundRect">
+            <a:avLst>
+              <a:gd name="adj" fmla="val 9600"/>
             </a:avLst>
           </a:prstGeom>
           <a:solidFill>
@@ -4765,14 +5090,14 @@
       </p:sp>
       <p:sp>
         <p:nvSpPr>
-          <p:cNvPr id="16" name="Text 14"/>
-          <p:cNvSpPr/>
-          <p:nvPr/>
-        </p:nvSpPr>
-        <p:spPr>
-          <a:xfrm>
-            <a:off x="8074152" y="3666744"/>
-            <a:ext cx="2825496" cy="256032"/>
+          <p:cNvPr id="19" name="Text 17"/>
+          <p:cNvSpPr/>
+          <p:nvPr/>
+        </p:nvSpPr>
+        <p:spPr>
+          <a:xfrm>
+            <a:off x="7799832" y="4645152"/>
+            <a:ext cx="3145536" cy="256032"/>
           </a:xfrm>
           <a:prstGeom prst="rect">
             <a:avLst/>
@@ -4796,7 +5121,7 @@
                 <a:ea typeface="Aptos" pitchFamily="34" charset="-122"/>
                 <a:cs typeface="Aptos" pitchFamily="34" charset="-120"/>
               </a:rPr>
-              <a:t>Use this for</a:t>
+              <a:t>Safeguard to plan</a:t>
             </a:r>
             <a:endParaRPr lang="en-US" sz="1300" dirty="0"/>
           </a:p>
@@ -4804,14 +5129,14 @@
       </p:sp>
       <p:sp>
         <p:nvSpPr>
-          <p:cNvPr id="17" name="Text 15"/>
-          <p:cNvSpPr/>
-          <p:nvPr/>
-        </p:nvSpPr>
-        <p:spPr>
-          <a:xfrm>
-            <a:off x="8074152" y="4023360"/>
-            <a:ext cx="2825496" cy="1097280"/>
+          <p:cNvPr id="20" name="Text 18"/>
+          <p:cNvSpPr/>
+          <p:nvPr/>
+        </p:nvSpPr>
+        <p:spPr>
+          <a:xfrm>
+            <a:off x="7799832" y="5001768"/>
+            <a:ext cx="3145536" cy="502920"/>
           </a:xfrm>
           <a:prstGeom prst="rect">
             <a:avLst/>
@@ -4837,7 +5162,7 @@
                 <a:ea typeface="Aptos" pitchFamily="34" charset="-122"/>
                 <a:cs typeface="Aptos" pitchFamily="34" charset="-120"/>
               </a:rPr>
-              <a:t>Connect the concept to public health decisions, safeguards, documentation, or implementation work.</a:t>
+              <a:t>Identify what could go wrong, who could be affected, what safeguards are needed, and what evidence should be reviewed before use expands.</a:t>
             </a:r>
             <a:endParaRPr lang="en-US" sz="1550" dirty="0"/>
           </a:p>
@@ -5011,8 +5336,8 @@
         </p:nvSpPr>
         <p:spPr>
           <a:xfrm>
-            <a:off x="9966960" y="6537960"/>
-            <a:ext cx="1645920" cy="201168"/>
+            <a:off x="9646920" y="6537960"/>
+            <a:ext cx="1965960" cy="201168"/>
           </a:xfrm>
           <a:prstGeom prst="rect">
             <a:avLst/>
@@ -5036,7 +5361,7 @@
                 <a:ea typeface="Aptos" pitchFamily="34" charset="-122"/>
                 <a:cs typeface="Aptos" pitchFamily="34" charset="-120"/>
               </a:rPr>
-              <a:t>Â© Paula Soper</a:t>
+              <a:t>Copyright Paula Soper</a:t>
             </a:r>
             <a:endParaRPr lang="en-US" sz="800" dirty="0"/>
           </a:p>
@@ -5131,7 +5456,7 @@
         <p:spPr>
           <a:xfrm>
             <a:off x="868680" y="1508760"/>
-            <a:ext cx="6537960" cy="4160520"/>
+            <a:ext cx="6309360" cy="4160520"/>
           </a:xfrm>
           <a:prstGeom prst="rect">
             <a:avLst/>
@@ -5196,12 +5521,12 @@
         </p:nvSpPr>
         <p:spPr>
           <a:xfrm>
-            <a:off x="7909560" y="1417320"/>
-            <a:ext cx="3154680" cy="1828800"/>
+            <a:off x="7635240" y="1325880"/>
+            <a:ext cx="3474720" cy="1325880"/>
           </a:xfrm>
           <a:prstGeom prst="roundRect">
             <a:avLst>
-              <a:gd name="adj" fmla="val 6000"/>
+              <a:gd name="adj" fmla="val 8276"/>
             </a:avLst>
           </a:prstGeom>
           <a:solidFill>
@@ -5223,8 +5548,8 @@
         </p:nvSpPr>
         <p:spPr>
           <a:xfrm>
-            <a:off x="8074152" y="1563624"/>
-            <a:ext cx="2825496" cy="256032"/>
+            <a:off x="7799832" y="1472184"/>
+            <a:ext cx="3145536" cy="256032"/>
           </a:xfrm>
           <a:prstGeom prst="rect">
             <a:avLst/>
@@ -5248,7 +5573,7 @@
                 <a:ea typeface="Aptos" pitchFamily="34" charset="-122"/>
                 <a:cs typeface="Aptos" pitchFamily="34" charset="-120"/>
               </a:rPr>
-              <a:t>Key idea</a:t>
+              <a:t>Risk check</a:t>
             </a:r>
             <a:endParaRPr lang="en-US" sz="1300" dirty="0"/>
           </a:p>
@@ -5262,8 +5587,8 @@
         </p:nvSpPr>
         <p:spPr>
           <a:xfrm>
-            <a:off x="8074152" y="1920240"/>
-            <a:ext cx="2825496" cy="1188720"/>
+            <a:off x="7799832" y="1828800"/>
+            <a:ext cx="3145536" cy="685800"/>
           </a:xfrm>
           <a:prstGeom prst="rect">
             <a:avLst/>
@@ -5303,12 +5628,165 @@
         </p:nvSpPr>
         <p:spPr>
           <a:xfrm>
-            <a:off x="7909560" y="3520440"/>
-            <a:ext cx="3154680" cy="1737360"/>
+            <a:off x="7635240" y="2788920"/>
+            <a:ext cx="3474720" cy="1536192"/>
           </a:xfrm>
           <a:prstGeom prst="roundRect">
             <a:avLst>
-              <a:gd name="adj" fmla="val 6316"/>
+              <a:gd name="adj" fmla="val 7143"/>
+            </a:avLst>
+          </a:prstGeom>
+          <a:solidFill>
+            <a:srgbClr val="FFFFFF">
+              <a:alpha val="88000"/>
+            </a:srgbClr>
+          </a:solidFill>
+          <a:ln w="12700">
+            <a:solidFill>
+              <a:srgbClr val="D6E8F2"/>
+            </a:solidFill>
+            <a:prstDash val="solid"/>
+          </a:ln>
+        </p:spPr>
+      </p:sp>
+      <p:sp>
+        <p:nvSpPr>
+          <p:cNvPr id="14" name="Shape 12"/>
+          <p:cNvSpPr/>
+          <p:nvPr/>
+        </p:nvSpPr>
+        <p:spPr>
+          <a:xfrm>
+            <a:off x="8046720" y="3108960"/>
+            <a:ext cx="2651760" cy="896112"/>
+          </a:xfrm>
+          <a:prstGeom prst="arc">
+            <a:avLst/>
+          </a:prstGeom>
+          <a:noFill/>
+          <a:ln w="25400">
+            <a:solidFill>
+              <a:srgbClr val="0068B7"/>
+            </a:solidFill>
+            <a:prstDash val="solid"/>
+          </a:ln>
+        </p:spPr>
+      </p:sp>
+      <p:sp>
+        <p:nvSpPr>
+          <p:cNvPr id="15" name="Text 13"/>
+          <p:cNvSpPr/>
+          <p:nvPr/>
+        </p:nvSpPr>
+        <p:spPr>
+          <a:xfrm>
+            <a:off x="7909560" y="3099816"/>
+            <a:ext cx="2926080" cy="256032"/>
+          </a:xfrm>
+          <a:prstGeom prst="rect">
+            <a:avLst/>
+          </a:prstGeom>
+          <a:noFill/>
+          <a:ln/>
+        </p:spPr>
+        <p:txBody>
+          <a:bodyPr wrap="square" lIns="0" tIns="0" rIns="0" bIns="0" rtlCol="0" anchor="ctr"/>
+          <a:lstStyle/>
+          <a:p>
+            <a:pPr algn="ctr" indent="0" marL="0">
+              <a:buNone/>
+            </a:pPr>
+            <a:r>
+              <a:rPr lang="en-US" sz="1500" b="1" dirty="0">
+                <a:solidFill>
+                  <a:srgbClr val="003A63"/>
+                </a:solidFill>
+                <a:latin typeface="Aptos" pitchFamily="34" charset="0"/>
+                <a:ea typeface="Aptos" pitchFamily="34" charset="-122"/>
+                <a:cs typeface="Aptos" pitchFamily="34" charset="-120"/>
+              </a:rPr>
+              <a:t>Risk</a:t>
+            </a:r>
+            <a:endParaRPr lang="en-US" sz="1500" dirty="0"/>
+          </a:p>
+        </p:txBody>
+      </p:sp>
+      <p:sp>
+        <p:nvSpPr>
+          <p:cNvPr id="16" name="Shape 14"/>
+          <p:cNvSpPr/>
+          <p:nvPr/>
+        </p:nvSpPr>
+        <p:spPr>
+          <a:xfrm>
+            <a:off x="8366760" y="3639312"/>
+            <a:ext cx="2011680" cy="0"/>
+          </a:xfrm>
+          <a:prstGeom prst="line">
+            <a:avLst/>
+          </a:prstGeom>
+          <a:noFill/>
+          <a:ln w="63500">
+            <a:solidFill>
+              <a:srgbClr val="2F8A28"/>
+            </a:solidFill>
+            <a:prstDash val="solid"/>
+          </a:ln>
+        </p:spPr>
+      </p:sp>
+      <p:sp>
+        <p:nvSpPr>
+          <p:cNvPr id="17" name="Text 15"/>
+          <p:cNvSpPr/>
+          <p:nvPr/>
+        </p:nvSpPr>
+        <p:spPr>
+          <a:xfrm>
+            <a:off x="7909560" y="3849624"/>
+            <a:ext cx="2926080" cy="164592"/>
+          </a:xfrm>
+          <a:prstGeom prst="rect">
+            <a:avLst/>
+          </a:prstGeom>
+          <a:noFill/>
+          <a:ln/>
+        </p:spPr>
+        <p:txBody>
+          <a:bodyPr wrap="square" lIns="0" tIns="0" rIns="0" bIns="0" rtlCol="0" anchor="ctr"/>
+          <a:lstStyle/>
+          <a:p>
+            <a:pPr algn="ctr" indent="0" marL="0">
+              <a:buNone/>
+            </a:pPr>
+            <a:r>
+              <a:rPr lang="en-US" sz="900" dirty="0">
+                <a:solidFill>
+                  <a:srgbClr val="003A63"/>
+                </a:solidFill>
+                <a:latin typeface="Aptos" pitchFamily="34" charset="0"/>
+                <a:ea typeface="Aptos" pitchFamily="34" charset="-122"/>
+                <a:cs typeface="Aptos" pitchFamily="34" charset="-120"/>
+              </a:rPr>
+              <a:t>Human review</a:t>
+            </a:r>
+            <a:endParaRPr lang="en-US" sz="900" dirty="0"/>
+          </a:p>
+        </p:txBody>
+      </p:sp>
+      <p:sp>
+        <p:nvSpPr>
+          <p:cNvPr id="18" name="Shape 16"/>
+          <p:cNvSpPr/>
+          <p:nvPr/>
+        </p:nvSpPr>
+        <p:spPr>
+          <a:xfrm>
+            <a:off x="7635240" y="4498848"/>
+            <a:ext cx="3474720" cy="1143000"/>
+          </a:xfrm>
+          <a:prstGeom prst="roundRect">
+            <a:avLst>
+              <a:gd name="adj" fmla="val 9600"/>
             </a:avLst>
           </a:prstGeom>
           <a:solidFill>
@@ -5324,14 +5802,14 @@
       </p:sp>
       <p:sp>
         <p:nvSpPr>
-          <p:cNvPr id="14" name="Text 12"/>
-          <p:cNvSpPr/>
-          <p:nvPr/>
-        </p:nvSpPr>
-        <p:spPr>
-          <a:xfrm>
-            <a:off x="8074152" y="3666744"/>
-            <a:ext cx="2825496" cy="256032"/>
+          <p:cNvPr id="19" name="Text 17"/>
+          <p:cNvSpPr/>
+          <p:nvPr/>
+        </p:nvSpPr>
+        <p:spPr>
+          <a:xfrm>
+            <a:off x="7799832" y="4645152"/>
+            <a:ext cx="3145536" cy="256032"/>
           </a:xfrm>
           <a:prstGeom prst="rect">
             <a:avLst/>
@@ -5355,7 +5833,7 @@
                 <a:ea typeface="Aptos" pitchFamily="34" charset="-122"/>
                 <a:cs typeface="Aptos" pitchFamily="34" charset="-120"/>
               </a:rPr>
-              <a:t>Use this for</a:t>
+              <a:t>Safeguard to plan</a:t>
             </a:r>
             <a:endParaRPr lang="en-US" sz="1300" dirty="0"/>
           </a:p>
@@ -5363,14 +5841,14 @@
       </p:sp>
       <p:sp>
         <p:nvSpPr>
-          <p:cNvPr id="15" name="Text 13"/>
-          <p:cNvSpPr/>
-          <p:nvPr/>
-        </p:nvSpPr>
-        <p:spPr>
-          <a:xfrm>
-            <a:off x="8074152" y="4023360"/>
-            <a:ext cx="2825496" cy="1097280"/>
+          <p:cNvPr id="20" name="Text 18"/>
+          <p:cNvSpPr/>
+          <p:nvPr/>
+        </p:nvSpPr>
+        <p:spPr>
+          <a:xfrm>
+            <a:off x="7799832" y="5001768"/>
+            <a:ext cx="3145536" cy="502920"/>
           </a:xfrm>
           <a:prstGeom prst="rect">
             <a:avLst/>
@@ -5396,7 +5874,7 @@
                 <a:ea typeface="Aptos" pitchFamily="34" charset="-122"/>
                 <a:cs typeface="Aptos" pitchFamily="34" charset="-120"/>
               </a:rPr>
-              <a:t>Connect the concept to public health decisions, safeguards, documentation, or implementation work.</a:t>
+              <a:t>Identify what could go wrong, who could be affected, what safeguards are needed, and what evidence should be reviewed before use expands.</a:t>
             </a:r>
             <a:endParaRPr lang="en-US" sz="1550" dirty="0"/>
           </a:p>
@@ -5570,8 +6048,8 @@
         </p:nvSpPr>
         <p:spPr>
           <a:xfrm>
-            <a:off x="9966960" y="6537960"/>
-            <a:ext cx="1645920" cy="201168"/>
+            <a:off x="9646920" y="6537960"/>
+            <a:ext cx="1965960" cy="201168"/>
           </a:xfrm>
           <a:prstGeom prst="rect">
             <a:avLst/>
@@ -5595,7 +6073,7 @@
                 <a:ea typeface="Aptos" pitchFamily="34" charset="-122"/>
                 <a:cs typeface="Aptos" pitchFamily="34" charset="-120"/>
               </a:rPr>
-              <a:t>Â© Paula Soper</a:t>
+              <a:t>Copyright Paula Soper</a:t>
             </a:r>
             <a:endParaRPr lang="en-US" sz="800" dirty="0"/>
           </a:p>
@@ -5642,17 +6120,262 @@
       </p:sp>
       <p:sp>
         <p:nvSpPr>
-          <p:cNvPr id="8" name="Shape 6"/>
+          <p:cNvPr id="8" name="Text 6"/>
           <p:cNvSpPr/>
           <p:nvPr/>
         </p:nvSpPr>
         <p:spPr>
           <a:xfrm>
             <a:off x="640080" y="658368"/>
-            <a:ext cx="420624" cy="420624"/>
-          </a:xfrm>
-          <a:prstGeom prst="ellipse">
-            <a:avLst/>
+            <a:ext cx="10881360" cy="713232"/>
+          </a:xfrm>
+          <a:prstGeom prst="rect">
+            <a:avLst/>
+          </a:prstGeom>
+          <a:noFill/>
+          <a:ln/>
+        </p:spPr>
+        <p:txBody>
+          <a:bodyPr wrap="square" lIns="0" tIns="0" rIns="0" bIns="0" rtlCol="0" anchor="ctr">
+            <a:normAutofit/>
+          </a:bodyPr>
+          <a:lstStyle/>
+          <a:p>
+            <a:pPr indent="0" marL="0">
+              <a:buNone/>
+            </a:pPr>
+            <a:r>
+              <a:rPr lang="en-US" sz="3400" b="1" dirty="0">
+                <a:solidFill>
+                  <a:srgbClr val="003A63"/>
+                </a:solidFill>
+                <a:latin typeface="Aptos Display" pitchFamily="34" charset="0"/>
+                <a:ea typeface="Aptos Display" pitchFamily="34" charset="-122"/>
+                <a:cs typeface="Aptos Display" pitchFamily="34" charset="-120"/>
+              </a:rPr>
+              <a:t>Application to AI-Supported Workflows</a:t>
+            </a:r>
+            <a:endParaRPr lang="en-US" sz="3400" dirty="0"/>
+          </a:p>
+        </p:txBody>
+      </p:sp>
+      <p:sp>
+        <p:nvSpPr>
+          <p:cNvPr id="9" name="Text 7"/>
+          <p:cNvSpPr/>
+          <p:nvPr/>
+        </p:nvSpPr>
+        <p:spPr>
+          <a:xfrm>
+            <a:off x="868680" y="1508760"/>
+            <a:ext cx="6309360" cy="4160520"/>
+          </a:xfrm>
+          <a:prstGeom prst="rect">
+            <a:avLst/>
+          </a:prstGeom>
+          <a:noFill/>
+          <a:ln/>
+        </p:spPr>
+        <p:txBody>
+          <a:bodyPr wrap="square" lIns="635" tIns="635" rIns="635" bIns="635" rtlCol="0" anchor="t">
+            <a:normAutofit/>
+          </a:bodyPr>
+          <a:lstStyle/>
+          <a:p>
+            <a:r>
+              <a:rPr lang="en-US" sz="2100" dirty="0">
+                <a:solidFill>
+                  <a:srgbClr val="17364A"/>
+                </a:solidFill>
+                <a:latin typeface="Aptos" pitchFamily="34" charset="0"/>
+                <a:ea typeface="Aptos" pitchFamily="34" charset="-122"/>
+                <a:cs typeface="Aptos" pitchFamily="34" charset="-120"/>
+              </a:rPr>
+              <a:t>Geospatial AI may support predictive analytics, emergency response, inspection prioritization,.</a:t>
+            </a:r>
+            <a:endParaRPr lang="en-US" sz="2100" dirty="0"/>
+          </a:p>
+          <a:p>
+            <a:r>
+              <a:rPr lang="en-US" sz="2100" dirty="0">
+                <a:solidFill>
+                  <a:srgbClr val="17364A"/>
+                </a:solidFill>
+                <a:latin typeface="Aptos" pitchFamily="34" charset="0"/>
+                <a:ea typeface="Aptos" pitchFamily="34" charset="-122"/>
+                <a:cs typeface="Aptos" pitchFamily="34" charset="-120"/>
+              </a:rPr>
+              <a:t>Generative AI may summarize spatial patterns for leaders, but it must not overstate certainty or ignore.</a:t>
+            </a:r>
+            <a:endParaRPr lang="en-US" sz="2100" dirty="0"/>
+          </a:p>
+          <a:p>
+            <a:r>
+              <a:rPr lang="en-US" sz="2100" dirty="0">
+                <a:solidFill>
+                  <a:srgbClr val="17364A"/>
+                </a:solidFill>
+                <a:latin typeface="Aptos" pitchFamily="34" charset="0"/>
+                <a:ea typeface="Aptos" pitchFamily="34" charset="-122"/>
+                <a:cs typeface="Aptos" pitchFamily="34" charset="-120"/>
+              </a:rPr>
+              <a:t>RAG tools may retrieve local plans, maps, and protocols, while agentic workflows may propose outreach.</a:t>
+            </a:r>
+            <a:endParaRPr lang="en-US" sz="2100" dirty="0"/>
+          </a:p>
+        </p:txBody>
+      </p:sp>
+      <p:sp>
+        <p:nvSpPr>
+          <p:cNvPr id="10" name="Shape 8"/>
+          <p:cNvSpPr/>
+          <p:nvPr/>
+        </p:nvSpPr>
+        <p:spPr>
+          <a:xfrm>
+            <a:off x="7635240" y="1325880"/>
+            <a:ext cx="3474720" cy="1325880"/>
+          </a:xfrm>
+          <a:prstGeom prst="roundRect">
+            <a:avLst>
+              <a:gd name="adj" fmla="val 8276"/>
+            </a:avLst>
+          </a:prstGeom>
+          <a:solidFill>
+            <a:srgbClr val="EEF8ED"/>
+          </a:solidFill>
+          <a:ln w="12700">
+            <a:solidFill>
+              <a:srgbClr val="B9D7E6"/>
+            </a:solidFill>
+            <a:prstDash val="solid"/>
+          </a:ln>
+        </p:spPr>
+      </p:sp>
+      <p:sp>
+        <p:nvSpPr>
+          <p:cNvPr id="11" name="Text 9"/>
+          <p:cNvSpPr/>
+          <p:nvPr/>
+        </p:nvSpPr>
+        <p:spPr>
+          <a:xfrm>
+            <a:off x="7799832" y="1472184"/>
+            <a:ext cx="3145536" cy="256032"/>
+          </a:xfrm>
+          <a:prstGeom prst="rect">
+            <a:avLst/>
+          </a:prstGeom>
+          <a:noFill/>
+          <a:ln/>
+        </p:spPr>
+        <p:txBody>
+          <a:bodyPr wrap="square" lIns="0" tIns="0" rIns="0" bIns="0" rtlCol="0" anchor="ctr"/>
+          <a:lstStyle/>
+          <a:p>
+            <a:pPr indent="0" marL="0">
+              <a:buNone/>
+            </a:pPr>
+            <a:r>
+              <a:rPr lang="en-US" sz="1300" b="1" dirty="0">
+                <a:solidFill>
+                  <a:srgbClr val="0068B7"/>
+                </a:solidFill>
+                <a:latin typeface="Aptos" pitchFamily="34" charset="0"/>
+                <a:ea typeface="Aptos" pitchFamily="34" charset="-122"/>
+                <a:cs typeface="Aptos" pitchFamily="34" charset="-120"/>
+              </a:rPr>
+              <a:t>Implementation cue</a:t>
+            </a:r>
+            <a:endParaRPr lang="en-US" sz="1300" dirty="0"/>
+          </a:p>
+        </p:txBody>
+      </p:sp>
+      <p:sp>
+        <p:nvSpPr>
+          <p:cNvPr id="12" name="Text 10"/>
+          <p:cNvSpPr/>
+          <p:nvPr/>
+        </p:nvSpPr>
+        <p:spPr>
+          <a:xfrm>
+            <a:off x="7799832" y="1828800"/>
+            <a:ext cx="3145536" cy="685800"/>
+          </a:xfrm>
+          <a:prstGeom prst="rect">
+            <a:avLst/>
+          </a:prstGeom>
+          <a:noFill/>
+          <a:ln/>
+        </p:spPr>
+        <p:txBody>
+          <a:bodyPr wrap="square" lIns="0" tIns="0" rIns="0" bIns="0" rtlCol="0" anchor="t">
+            <a:normAutofit/>
+          </a:bodyPr>
+          <a:lstStyle/>
+          <a:p>
+            <a:pPr indent="0" marL="0">
+              <a:buNone/>
+            </a:pPr>
+            <a:r>
+              <a:rPr lang="en-US" sz="1550" dirty="0">
+                <a:solidFill>
+                  <a:srgbClr val="17364A"/>
+                </a:solidFill>
+                <a:latin typeface="Aptos" pitchFamily="34" charset="0"/>
+                <a:ea typeface="Aptos" pitchFamily="34" charset="-122"/>
+                <a:cs typeface="Aptos" pitchFamily="34" charset="-120"/>
+              </a:rPr>
+              <a:t>Geospatial AI may support predictive analytics, emergency response, inspection prioritization,.</a:t>
+            </a:r>
+            <a:endParaRPr lang="en-US" sz="1550" dirty="0"/>
+          </a:p>
+        </p:txBody>
+      </p:sp>
+      <p:sp>
+        <p:nvSpPr>
+          <p:cNvPr id="13" name="Shape 11"/>
+          <p:cNvSpPr/>
+          <p:nvPr/>
+        </p:nvSpPr>
+        <p:spPr>
+          <a:xfrm>
+            <a:off x="7635240" y="2788920"/>
+            <a:ext cx="3474720" cy="1536192"/>
+          </a:xfrm>
+          <a:prstGeom prst="roundRect">
+            <a:avLst>
+              <a:gd name="adj" fmla="val 7143"/>
+            </a:avLst>
+          </a:prstGeom>
+          <a:solidFill>
+            <a:srgbClr val="FFFFFF">
+              <a:alpha val="88000"/>
+            </a:srgbClr>
+          </a:solidFill>
+          <a:ln w="12700">
+            <a:solidFill>
+              <a:srgbClr val="D6E8F2"/>
+            </a:solidFill>
+            <a:prstDash val="solid"/>
+          </a:ln>
+        </p:spPr>
+      </p:sp>
+      <p:sp>
+        <p:nvSpPr>
+          <p:cNvPr id="14" name="Shape 12"/>
+          <p:cNvSpPr/>
+          <p:nvPr/>
+        </p:nvSpPr>
+        <p:spPr>
+          <a:xfrm>
+            <a:off x="7927848" y="3319272"/>
+            <a:ext cx="792480" cy="749808"/>
+          </a:xfrm>
+          <a:prstGeom prst="roundRect">
+            <a:avLst>
+              <a:gd name="adj" fmla="val 14634"/>
+            </a:avLst>
           </a:prstGeom>
           <a:solidFill>
             <a:srgbClr val="0068B7"/>
@@ -5667,53 +6390,14 @@
       </p:sp>
       <p:sp>
         <p:nvSpPr>
-          <p:cNvPr id="9" name="Text 7"/>
-          <p:cNvSpPr/>
-          <p:nvPr/>
-        </p:nvSpPr>
-        <p:spPr>
-          <a:xfrm>
-            <a:off x="640080" y="731520"/>
-            <a:ext cx="420624" cy="164592"/>
-          </a:xfrm>
-          <a:prstGeom prst="rect">
-            <a:avLst/>
-          </a:prstGeom>
-          <a:noFill/>
-          <a:ln/>
-        </p:spPr>
-        <p:txBody>
-          <a:bodyPr wrap="square" lIns="0" tIns="0" rIns="0" bIns="0" rtlCol="0" anchor="ctr"/>
-          <a:lstStyle/>
-          <a:p>
-            <a:pPr algn="ctr" indent="0" marL="0">
-              <a:buNone/>
-            </a:pPr>
-            <a:r>
-              <a:rPr lang="en-US" sz="1100" b="1" dirty="0">
-                <a:solidFill>
-                  <a:srgbClr val="FFFFFF"/>
-                </a:solidFill>
-                <a:latin typeface="Aptos" pitchFamily="34" charset="0"/>
-                <a:ea typeface="Aptos" pitchFamily="34" charset="-122"/>
-                <a:cs typeface="Aptos" pitchFamily="34" charset="-120"/>
-              </a:rPr>
-              <a:t>7</a:t>
-            </a:r>
-            <a:endParaRPr lang="en-US" sz="1100" dirty="0"/>
-          </a:p>
-        </p:txBody>
-      </p:sp>
-      <p:sp>
-        <p:nvSpPr>
-          <p:cNvPr id="10" name="Text 8"/>
-          <p:cNvSpPr/>
-          <p:nvPr/>
-        </p:nvSpPr>
-        <p:spPr>
-          <a:xfrm>
-            <a:off x="640080" y="621792"/>
-            <a:ext cx="10881360" cy="713232"/>
+          <p:cNvPr id="15" name="Text 13"/>
+          <p:cNvSpPr/>
+          <p:nvPr/>
+        </p:nvSpPr>
+        <p:spPr>
+          <a:xfrm>
+            <a:off x="8001000" y="3511296"/>
+            <a:ext cx="646176" cy="310896"/>
           </a:xfrm>
           <a:prstGeom prst="rect">
             <a:avLst/>
@@ -5727,112 +6411,46 @@
           </a:bodyPr>
           <a:lstStyle/>
           <a:p>
-            <a:pPr indent="0" marL="0">
-              <a:buNone/>
-            </a:pPr>
-            <a:r>
-              <a:rPr lang="en-US" sz="3400" b="1" dirty="0">
-                <a:solidFill>
-                  <a:srgbClr val="003A63"/>
-                </a:solidFill>
-                <a:latin typeface="Aptos Display" pitchFamily="34" charset="0"/>
-                <a:ea typeface="Aptos Display" pitchFamily="34" charset="-122"/>
-                <a:cs typeface="Aptos Display" pitchFamily="34" charset="-120"/>
-              </a:rPr>
-              <a:t>Application to AI-Supported Workflows</a:t>
-            </a:r>
-            <a:endParaRPr lang="en-US" sz="3400" dirty="0"/>
-          </a:p>
-        </p:txBody>
-      </p:sp>
-      <p:sp>
-        <p:nvSpPr>
-          <p:cNvPr id="11" name="Text 9"/>
-          <p:cNvSpPr/>
-          <p:nvPr/>
-        </p:nvSpPr>
-        <p:spPr>
-          <a:xfrm>
-            <a:off x="868680" y="1508760"/>
-            <a:ext cx="6537960" cy="4160520"/>
-          </a:xfrm>
-          <a:prstGeom prst="rect">
-            <a:avLst/>
-          </a:prstGeom>
-          <a:noFill/>
-          <a:ln/>
-        </p:spPr>
-        <p:txBody>
-          <a:bodyPr wrap="square" lIns="635" tIns="635" rIns="635" bIns="635" rtlCol="0" anchor="t">
-            <a:normAutofit/>
-          </a:bodyPr>
-          <a:lstStyle/>
-          <a:p>
-            <a:r>
-              <a:rPr lang="en-US" sz="2100" dirty="0">
-                <a:solidFill>
-                  <a:srgbClr val="17364A"/>
-                </a:solidFill>
-                <a:latin typeface="Aptos" pitchFamily="34" charset="0"/>
-                <a:ea typeface="Aptos" pitchFamily="34" charset="-122"/>
-                <a:cs typeface="Aptos" pitchFamily="34" charset="-120"/>
-              </a:rPr>
-              <a:t>Geospatial AI may support predictive analytics, emergency response, inspection prioritization,.</a:t>
-            </a:r>
-            <a:endParaRPr lang="en-US" sz="2100" dirty="0"/>
-          </a:p>
-          <a:p>
-            <a:r>
-              <a:rPr lang="en-US" sz="2100" dirty="0">
-                <a:solidFill>
-                  <a:srgbClr val="17364A"/>
-                </a:solidFill>
-                <a:latin typeface="Aptos" pitchFamily="34" charset="0"/>
-                <a:ea typeface="Aptos" pitchFamily="34" charset="-122"/>
-                <a:cs typeface="Aptos" pitchFamily="34" charset="-120"/>
-              </a:rPr>
-              <a:t>Generative AI may summarize spatial patterns for leaders, but it must not overstate certainty or ignore.</a:t>
-            </a:r>
-            <a:endParaRPr lang="en-US" sz="2100" dirty="0"/>
-          </a:p>
-          <a:p>
-            <a:r>
-              <a:rPr lang="en-US" sz="2100" dirty="0">
-                <a:solidFill>
-                  <a:srgbClr val="17364A"/>
-                </a:solidFill>
-                <a:latin typeface="Aptos" pitchFamily="34" charset="0"/>
-                <a:ea typeface="Aptos" pitchFamily="34" charset="-122"/>
-                <a:cs typeface="Aptos" pitchFamily="34" charset="-120"/>
-              </a:rPr>
-              <a:t>RAG tools may retrieve local plans, maps, and protocols, while agentic workflows may propose outreach.</a:t>
-            </a:r>
-            <a:endParaRPr lang="en-US" sz="2100" dirty="0"/>
-          </a:p>
-        </p:txBody>
-      </p:sp>
-      <p:sp>
-        <p:nvSpPr>
-          <p:cNvPr id="12" name="Shape 10"/>
-          <p:cNvSpPr/>
-          <p:nvPr/>
-        </p:nvSpPr>
-        <p:spPr>
-          <a:xfrm>
-            <a:off x="7909560" y="1417320"/>
-            <a:ext cx="3154680" cy="1828800"/>
+            <a:pPr algn="ctr" indent="0" marL="0">
+              <a:buNone/>
+            </a:pPr>
+            <a:r>
+              <a:rPr lang="en-US" sz="1500" b="1" dirty="0">
+                <a:solidFill>
+                  <a:srgbClr val="FFFFFF"/>
+                </a:solidFill>
+                <a:latin typeface="Aptos" pitchFamily="34" charset="0"/>
+                <a:ea typeface="Aptos" pitchFamily="34" charset="-122"/>
+                <a:cs typeface="Aptos" pitchFamily="34" charset="-120"/>
+              </a:rPr>
+              <a:t>Plan</a:t>
+            </a:r>
+            <a:endParaRPr lang="en-US" sz="1500" dirty="0"/>
+          </a:p>
+        </p:txBody>
+      </p:sp>
+      <p:sp>
+        <p:nvSpPr>
+          <p:cNvPr id="16" name="Shape 14"/>
+          <p:cNvSpPr/>
+          <p:nvPr/>
+        </p:nvSpPr>
+        <p:spPr>
+          <a:xfrm>
+            <a:off x="8976360" y="3319272"/>
+            <a:ext cx="792480" cy="749808"/>
           </a:xfrm>
           <a:prstGeom prst="roundRect">
             <a:avLst>
-              <a:gd name="adj" fmla="val 6000"/>
+              <a:gd name="adj" fmla="val 14634"/>
             </a:avLst>
           </a:prstGeom>
           <a:solidFill>
-            <a:srgbClr val="EEF8ED"/>
+            <a:srgbClr val="2F8A28"/>
           </a:solidFill>
           <a:ln w="12700">
             <a:solidFill>
-              <a:srgbClr val="B9D7E6"/>
+              <a:srgbClr val="2F8A28"/>
             </a:solidFill>
             <a:prstDash val="solid"/>
           </a:ln>
@@ -5840,98 +6458,189 @@
       </p:sp>
       <p:sp>
         <p:nvSpPr>
-          <p:cNvPr id="13" name="Text 11"/>
-          <p:cNvSpPr/>
-          <p:nvPr/>
-        </p:nvSpPr>
-        <p:spPr>
-          <a:xfrm>
-            <a:off x="8074152" y="1563624"/>
-            <a:ext cx="2825496" cy="256032"/>
-          </a:xfrm>
-          <a:prstGeom prst="rect">
-            <a:avLst/>
-          </a:prstGeom>
-          <a:noFill/>
-          <a:ln/>
-        </p:spPr>
-        <p:txBody>
-          <a:bodyPr wrap="square" lIns="0" tIns="0" rIns="0" bIns="0" rtlCol="0" anchor="ctr"/>
-          <a:lstStyle/>
-          <a:p>
-            <a:pPr indent="0" marL="0">
-              <a:buNone/>
-            </a:pPr>
-            <a:r>
-              <a:rPr lang="en-US" sz="1300" b="1" dirty="0">
-                <a:solidFill>
-                  <a:srgbClr val="0068B7"/>
-                </a:solidFill>
-                <a:latin typeface="Aptos" pitchFamily="34" charset="0"/>
-                <a:ea typeface="Aptos" pitchFamily="34" charset="-122"/>
-                <a:cs typeface="Aptos" pitchFamily="34" charset="-120"/>
-              </a:rPr>
-              <a:t>Key idea</a:t>
-            </a:r>
-            <a:endParaRPr lang="en-US" sz="1300" dirty="0"/>
-          </a:p>
-        </p:txBody>
-      </p:sp>
-      <p:sp>
-        <p:nvSpPr>
-          <p:cNvPr id="14" name="Text 12"/>
-          <p:cNvSpPr/>
-          <p:nvPr/>
-        </p:nvSpPr>
-        <p:spPr>
-          <a:xfrm>
-            <a:off x="8074152" y="1920240"/>
-            <a:ext cx="2825496" cy="1188720"/>
-          </a:xfrm>
-          <a:prstGeom prst="rect">
-            <a:avLst/>
-          </a:prstGeom>
-          <a:noFill/>
-          <a:ln/>
-        </p:spPr>
-        <p:txBody>
-          <a:bodyPr wrap="square" lIns="0" tIns="0" rIns="0" bIns="0" rtlCol="0" anchor="t">
+          <p:cNvPr id="17" name="Text 15"/>
+          <p:cNvSpPr/>
+          <p:nvPr/>
+        </p:nvSpPr>
+        <p:spPr>
+          <a:xfrm>
+            <a:off x="9049512" y="3511296"/>
+            <a:ext cx="646176" cy="310896"/>
+          </a:xfrm>
+          <a:prstGeom prst="rect">
+            <a:avLst/>
+          </a:prstGeom>
+          <a:noFill/>
+          <a:ln/>
+        </p:spPr>
+        <p:txBody>
+          <a:bodyPr wrap="square" lIns="0" tIns="0" rIns="0" bIns="0" rtlCol="0" anchor="ctr">
             <a:normAutofit/>
           </a:bodyPr>
           <a:lstStyle/>
           <a:p>
-            <a:pPr indent="0" marL="0">
-              <a:buNone/>
-            </a:pPr>
-            <a:r>
-              <a:rPr lang="en-US" sz="1550" dirty="0">
-                <a:solidFill>
-                  <a:srgbClr val="17364A"/>
-                </a:solidFill>
-                <a:latin typeface="Aptos" pitchFamily="34" charset="0"/>
-                <a:ea typeface="Aptos" pitchFamily="34" charset="-122"/>
-                <a:cs typeface="Aptos" pitchFamily="34" charset="-120"/>
-              </a:rPr>
-              <a:t>Geospatial AI may support predictive analytics, emergency response, inspection prioritization,.</a:t>
-            </a:r>
-            <a:endParaRPr lang="en-US" sz="1550" dirty="0"/>
-          </a:p>
-        </p:txBody>
-      </p:sp>
-      <p:sp>
-        <p:nvSpPr>
-          <p:cNvPr id="15" name="Shape 13"/>
-          <p:cNvSpPr/>
-          <p:nvPr/>
-        </p:nvSpPr>
-        <p:spPr>
-          <a:xfrm>
-            <a:off x="7909560" y="3520440"/>
-            <a:ext cx="3154680" cy="1737360"/>
+            <a:pPr algn="ctr" indent="0" marL="0">
+              <a:buNone/>
+            </a:pPr>
+            <a:r>
+              <a:rPr lang="en-US" sz="1500" b="1" dirty="0">
+                <a:solidFill>
+                  <a:srgbClr val="FFFFFF"/>
+                </a:solidFill>
+                <a:latin typeface="Aptos" pitchFamily="34" charset="0"/>
+                <a:ea typeface="Aptos" pitchFamily="34" charset="-122"/>
+                <a:cs typeface="Aptos" pitchFamily="34" charset="-120"/>
+              </a:rPr>
+              <a:t>Do</a:t>
+            </a:r>
+            <a:endParaRPr lang="en-US" sz="1500" dirty="0"/>
+          </a:p>
+        </p:txBody>
+      </p:sp>
+      <p:sp>
+        <p:nvSpPr>
+          <p:cNvPr id="18" name="Shape 16"/>
+          <p:cNvSpPr/>
+          <p:nvPr/>
+        </p:nvSpPr>
+        <p:spPr>
+          <a:xfrm>
+            <a:off x="10024872" y="3319272"/>
+            <a:ext cx="792480" cy="749808"/>
           </a:xfrm>
           <a:prstGeom prst="roundRect">
             <a:avLst>
-              <a:gd name="adj" fmla="val 6316"/>
+              <a:gd name="adj" fmla="val 14634"/>
+            </a:avLst>
+          </a:prstGeom>
+          <a:solidFill>
+            <a:srgbClr val="D69A2D"/>
+          </a:solidFill>
+          <a:ln w="12700">
+            <a:solidFill>
+              <a:srgbClr val="D69A2D"/>
+            </a:solidFill>
+            <a:prstDash val="solid"/>
+          </a:ln>
+        </p:spPr>
+      </p:sp>
+      <p:sp>
+        <p:nvSpPr>
+          <p:cNvPr id="19" name="Text 17"/>
+          <p:cNvSpPr/>
+          <p:nvPr/>
+        </p:nvSpPr>
+        <p:spPr>
+          <a:xfrm>
+            <a:off x="10098024" y="3511296"/>
+            <a:ext cx="646176" cy="310896"/>
+          </a:xfrm>
+          <a:prstGeom prst="rect">
+            <a:avLst/>
+          </a:prstGeom>
+          <a:noFill/>
+          <a:ln/>
+        </p:spPr>
+        <p:txBody>
+          <a:bodyPr wrap="square" lIns="0" tIns="0" rIns="0" bIns="0" rtlCol="0" anchor="ctr">
+            <a:normAutofit/>
+          </a:bodyPr>
+          <a:lstStyle/>
+          <a:p>
+            <a:pPr algn="ctr" indent="0" marL="0">
+              <a:buNone/>
+            </a:pPr>
+            <a:r>
+              <a:rPr lang="en-US" sz="1500" b="1" dirty="0">
+                <a:solidFill>
+                  <a:srgbClr val="FFFFFF"/>
+                </a:solidFill>
+                <a:latin typeface="Aptos" pitchFamily="34" charset="0"/>
+                <a:ea typeface="Aptos" pitchFamily="34" charset="-122"/>
+                <a:cs typeface="Aptos" pitchFamily="34" charset="-120"/>
+              </a:rPr>
+              <a:t>Review</a:t>
+            </a:r>
+            <a:endParaRPr lang="en-US" sz="1500" dirty="0"/>
+          </a:p>
+        </p:txBody>
+      </p:sp>
+      <p:sp>
+        <p:nvSpPr>
+          <p:cNvPr id="20" name="Shape 18"/>
+          <p:cNvSpPr/>
+          <p:nvPr/>
+        </p:nvSpPr>
+        <p:spPr>
+          <a:xfrm>
+            <a:off x="8293608" y="4389120"/>
+            <a:ext cx="2157984" cy="0"/>
+          </a:xfrm>
+          <a:prstGeom prst="line">
+            <a:avLst/>
+          </a:prstGeom>
+          <a:noFill/>
+          <a:ln w="25400">
+            <a:solidFill>
+              <a:srgbClr val="8ABBD8"/>
+            </a:solidFill>
+            <a:prstDash val="solid"/>
+          </a:ln>
+        </p:spPr>
+      </p:sp>
+      <p:sp>
+        <p:nvSpPr>
+          <p:cNvPr id="21" name="Text 19"/>
+          <p:cNvSpPr/>
+          <p:nvPr/>
+        </p:nvSpPr>
+        <p:spPr>
+          <a:xfrm>
+            <a:off x="7909560" y="3977640"/>
+            <a:ext cx="2926080" cy="182880"/>
+          </a:xfrm>
+          <a:prstGeom prst="rect">
+            <a:avLst/>
+          </a:prstGeom>
+          <a:noFill/>
+          <a:ln/>
+        </p:spPr>
+        <p:txBody>
+          <a:bodyPr wrap="square" lIns="0" tIns="0" rIns="0" bIns="0" rtlCol="0" anchor="ctr"/>
+          <a:lstStyle/>
+          <a:p>
+            <a:pPr algn="ctr" indent="0" marL="0">
+              <a:buNone/>
+            </a:pPr>
+            <a:r>
+              <a:rPr lang="en-US" sz="1000" dirty="0">
+                <a:solidFill>
+                  <a:srgbClr val="003A63"/>
+                </a:solidFill>
+                <a:latin typeface="Aptos" pitchFamily="34" charset="0"/>
+                <a:ea typeface="Aptos" pitchFamily="34" charset="-122"/>
+                <a:cs typeface="Aptos" pitchFamily="34" charset="-120"/>
+              </a:rPr>
+              <a:t>Dependencies visible</a:t>
+            </a:r>
+            <a:endParaRPr lang="en-US" sz="1000" dirty="0"/>
+          </a:p>
+        </p:txBody>
+      </p:sp>
+      <p:sp>
+        <p:nvSpPr>
+          <p:cNvPr id="22" name="Shape 20"/>
+          <p:cNvSpPr/>
+          <p:nvPr/>
+        </p:nvSpPr>
+        <p:spPr>
+          <a:xfrm>
+            <a:off x="7635240" y="4498848"/>
+            <a:ext cx="3474720" cy="1143000"/>
+          </a:xfrm>
+          <a:prstGeom prst="roundRect">
+            <a:avLst>
+              <a:gd name="adj" fmla="val 9600"/>
             </a:avLst>
           </a:prstGeom>
           <a:solidFill>
@@ -5947,14 +6656,14 @@
       </p:sp>
       <p:sp>
         <p:nvSpPr>
-          <p:cNvPr id="16" name="Text 14"/>
-          <p:cNvSpPr/>
-          <p:nvPr/>
-        </p:nvSpPr>
-        <p:spPr>
-          <a:xfrm>
-            <a:off x="8074152" y="3666744"/>
-            <a:ext cx="2825496" cy="256032"/>
+          <p:cNvPr id="23" name="Text 21"/>
+          <p:cNvSpPr/>
+          <p:nvPr/>
+        </p:nvSpPr>
+        <p:spPr>
+          <a:xfrm>
+            <a:off x="7799832" y="4645152"/>
+            <a:ext cx="3145536" cy="256032"/>
           </a:xfrm>
           <a:prstGeom prst="rect">
             <a:avLst/>
@@ -5978,7 +6687,7 @@
                 <a:ea typeface="Aptos" pitchFamily="34" charset="-122"/>
                 <a:cs typeface="Aptos" pitchFamily="34" charset="-120"/>
               </a:rPr>
-              <a:t>Use this for</a:t>
+              <a:t>Next action</a:t>
             </a:r>
             <a:endParaRPr lang="en-US" sz="1300" dirty="0"/>
           </a:p>
@@ -5986,14 +6695,14 @@
       </p:sp>
       <p:sp>
         <p:nvSpPr>
-          <p:cNvPr id="17" name="Text 15"/>
-          <p:cNvSpPr/>
-          <p:nvPr/>
-        </p:nvSpPr>
-        <p:spPr>
-          <a:xfrm>
-            <a:off x="8074152" y="4023360"/>
-            <a:ext cx="2825496" cy="1097280"/>
+          <p:cNvPr id="24" name="Text 22"/>
+          <p:cNvSpPr/>
+          <p:nvPr/>
+        </p:nvSpPr>
+        <p:spPr>
+          <a:xfrm>
+            <a:off x="7799832" y="5001768"/>
+            <a:ext cx="3145536" cy="502920"/>
           </a:xfrm>
           <a:prstGeom prst="rect">
             <a:avLst/>
@@ -6019,7 +6728,7 @@
                 <a:ea typeface="Aptos" pitchFamily="34" charset="-122"/>
                 <a:cs typeface="Aptos" pitchFamily="34" charset="-120"/>
               </a:rPr>
-              <a:t>Connect the concept to public health decisions, safeguards, documentation, or implementation work.</a:t>
+              <a:t>Use the concept to clarify workflow changes, dependencies, staffing, procurement requirements, training needs, and implementation checkpoints.</a:t>
             </a:r>
             <a:endParaRPr lang="en-US" sz="1550" dirty="0"/>
           </a:p>
@@ -6193,8 +6902,8 @@
         </p:nvSpPr>
         <p:spPr>
           <a:xfrm>
-            <a:off x="9966960" y="6537960"/>
-            <a:ext cx="1645920" cy="201168"/>
+            <a:off x="9646920" y="6537960"/>
+            <a:ext cx="1965960" cy="201168"/>
           </a:xfrm>
           <a:prstGeom prst="rect">
             <a:avLst/>
@@ -6218,7 +6927,7 @@
                 <a:ea typeface="Aptos" pitchFamily="34" charset="-122"/>
                 <a:cs typeface="Aptos" pitchFamily="34" charset="-120"/>
               </a:rPr>
-              <a:t>Â© Paula Soper</a:t>
+              <a:t>Copyright Paula Soper</a:t>
             </a:r>
             <a:endParaRPr lang="en-US" sz="800" dirty="0"/>
           </a:p>
@@ -6265,77 +6974,13 @@
       </p:sp>
       <p:sp>
         <p:nvSpPr>
-          <p:cNvPr id="8" name="Shape 6"/>
+          <p:cNvPr id="8" name="Text 6"/>
           <p:cNvSpPr/>
           <p:nvPr/>
         </p:nvSpPr>
         <p:spPr>
           <a:xfrm>
             <a:off x="640080" y="658368"/>
-            <a:ext cx="420624" cy="420624"/>
-          </a:xfrm>
-          <a:prstGeom prst="ellipse">
-            <a:avLst/>
-          </a:prstGeom>
-          <a:solidFill>
-            <a:srgbClr val="0068B7"/>
-          </a:solidFill>
-          <a:ln w="12700">
-            <a:solidFill>
-              <a:srgbClr val="0068B7"/>
-            </a:solidFill>
-            <a:prstDash val="solid"/>
-          </a:ln>
-        </p:spPr>
-      </p:sp>
-      <p:sp>
-        <p:nvSpPr>
-          <p:cNvPr id="9" name="Text 7"/>
-          <p:cNvSpPr/>
-          <p:nvPr/>
-        </p:nvSpPr>
-        <p:spPr>
-          <a:xfrm>
-            <a:off x="640080" y="731520"/>
-            <a:ext cx="420624" cy="164592"/>
-          </a:xfrm>
-          <a:prstGeom prst="rect">
-            <a:avLst/>
-          </a:prstGeom>
-          <a:noFill/>
-          <a:ln/>
-        </p:spPr>
-        <p:txBody>
-          <a:bodyPr wrap="square" lIns="0" tIns="0" rIns="0" bIns="0" rtlCol="0" anchor="ctr"/>
-          <a:lstStyle/>
-          <a:p>
-            <a:pPr algn="ctr" indent="0" marL="0">
-              <a:buNone/>
-            </a:pPr>
-            <a:r>
-              <a:rPr lang="en-US" sz="1100" b="1" dirty="0">
-                <a:solidFill>
-                  <a:srgbClr val="FFFFFF"/>
-                </a:solidFill>
-                <a:latin typeface="Aptos" pitchFamily="34" charset="0"/>
-                <a:ea typeface="Aptos" pitchFamily="34" charset="-122"/>
-                <a:cs typeface="Aptos" pitchFamily="34" charset="-120"/>
-              </a:rPr>
-              <a:t>8</a:t>
-            </a:r>
-            <a:endParaRPr lang="en-US" sz="1100" dirty="0"/>
-          </a:p>
-        </p:txBody>
-      </p:sp>
-      <p:sp>
-        <p:nvSpPr>
-          <p:cNvPr id="10" name="Text 8"/>
-          <p:cNvSpPr/>
-          <p:nvPr/>
-        </p:nvSpPr>
-        <p:spPr>
-          <a:xfrm>
-            <a:off x="640080" y="621792"/>
             <a:ext cx="10881360" cy="713232"/>
           </a:xfrm>
           <a:prstGeom prst="rect">
@@ -6370,14 +7015,14 @@
       </p:sp>
       <p:sp>
         <p:nvSpPr>
-          <p:cNvPr id="11" name="Text 9"/>
+          <p:cNvPr id="9" name="Text 7"/>
           <p:cNvSpPr/>
           <p:nvPr/>
         </p:nvSpPr>
         <p:spPr>
           <a:xfrm>
             <a:off x="868680" y="1508760"/>
-            <a:ext cx="6537960" cy="4160520"/>
+            <a:ext cx="6309360" cy="4160520"/>
           </a:xfrm>
           <a:prstGeom prst="rect">
             <a:avLst/>
@@ -6436,18 +7081,18 @@
       </p:sp>
       <p:sp>
         <p:nvSpPr>
-          <p:cNvPr id="12" name="Shape 10"/>
-          <p:cNvSpPr/>
-          <p:nvPr/>
-        </p:nvSpPr>
-        <p:spPr>
-          <a:xfrm>
-            <a:off x="7909560" y="1417320"/>
-            <a:ext cx="3154680" cy="1828800"/>
+          <p:cNvPr id="10" name="Shape 8"/>
+          <p:cNvSpPr/>
+          <p:nvPr/>
+        </p:nvSpPr>
+        <p:spPr>
+          <a:xfrm>
+            <a:off x="7635240" y="1325880"/>
+            <a:ext cx="3474720" cy="1325880"/>
           </a:xfrm>
           <a:prstGeom prst="roundRect">
             <a:avLst>
-              <a:gd name="adj" fmla="val 6000"/>
+              <a:gd name="adj" fmla="val 8276"/>
             </a:avLst>
           </a:prstGeom>
           <a:solidFill>
@@ -6463,14 +7108,14 @@
       </p:sp>
       <p:sp>
         <p:nvSpPr>
-          <p:cNvPr id="13" name="Text 11"/>
-          <p:cNvSpPr/>
-          <p:nvPr/>
-        </p:nvSpPr>
-        <p:spPr>
-          <a:xfrm>
-            <a:off x="8074152" y="1563624"/>
-            <a:ext cx="2825496" cy="256032"/>
+          <p:cNvPr id="11" name="Text 9"/>
+          <p:cNvSpPr/>
+          <p:nvPr/>
+        </p:nvSpPr>
+        <p:spPr>
+          <a:xfrm>
+            <a:off x="7799832" y="1472184"/>
+            <a:ext cx="3145536" cy="256032"/>
           </a:xfrm>
           <a:prstGeom prst="rect">
             <a:avLst/>
@@ -6494,7 +7139,7 @@
                 <a:ea typeface="Aptos" pitchFamily="34" charset="-122"/>
                 <a:cs typeface="Aptos" pitchFamily="34" charset="-120"/>
               </a:rPr>
-              <a:t>Key idea</a:t>
+              <a:t>Core concept</a:t>
             </a:r>
             <a:endParaRPr lang="en-US" sz="1300" dirty="0"/>
           </a:p>
@@ -6502,14 +7147,14 @@
       </p:sp>
       <p:sp>
         <p:nvSpPr>
-          <p:cNvPr id="14" name="Text 12"/>
-          <p:cNvSpPr/>
-          <p:nvPr/>
-        </p:nvSpPr>
-        <p:spPr>
-          <a:xfrm>
-            <a:off x="8074152" y="1920240"/>
-            <a:ext cx="2825496" cy="1188720"/>
+          <p:cNvPr id="12" name="Text 10"/>
+          <p:cNvSpPr/>
+          <p:nvPr/>
+        </p:nvSpPr>
+        <p:spPr>
+          <a:xfrm>
+            <a:off x="7799832" y="1828800"/>
+            <a:ext cx="3145536" cy="685800"/>
           </a:xfrm>
           <a:prstGeom prst="rect">
             <a:avLst/>
@@ -6543,18 +7188,159 @@
       </p:sp>
       <p:sp>
         <p:nvSpPr>
-          <p:cNvPr id="15" name="Shape 13"/>
-          <p:cNvSpPr/>
-          <p:nvPr/>
-        </p:nvSpPr>
-        <p:spPr>
-          <a:xfrm>
-            <a:off x="7909560" y="3520440"/>
-            <a:ext cx="3154680" cy="1737360"/>
+          <p:cNvPr id="13" name="Shape 11"/>
+          <p:cNvSpPr/>
+          <p:nvPr/>
+        </p:nvSpPr>
+        <p:spPr>
+          <a:xfrm>
+            <a:off x="7635240" y="2788920"/>
+            <a:ext cx="3474720" cy="1536192"/>
           </a:xfrm>
           <a:prstGeom prst="roundRect">
             <a:avLst>
-              <a:gd name="adj" fmla="val 6316"/>
+              <a:gd name="adj" fmla="val 7143"/>
+            </a:avLst>
+          </a:prstGeom>
+          <a:solidFill>
+            <a:srgbClr val="FFFFFF">
+              <a:alpha val="88000"/>
+            </a:srgbClr>
+          </a:solidFill>
+          <a:ln w="12700">
+            <a:solidFill>
+              <a:srgbClr val="D6E8F2"/>
+            </a:solidFill>
+            <a:prstDash val="solid"/>
+          </a:ln>
+        </p:spPr>
+      </p:sp>
+      <p:sp>
+        <p:nvSpPr>
+          <p:cNvPr id="14" name="Shape 12"/>
+          <p:cNvSpPr/>
+          <p:nvPr/>
+        </p:nvSpPr>
+        <p:spPr>
+          <a:xfrm>
+            <a:off x="8074152" y="3291840"/>
+            <a:ext cx="2596896" cy="749808"/>
+          </a:xfrm>
+          <a:prstGeom prst="rect">
+            <a:avLst/>
+          </a:prstGeom>
+          <a:solidFill>
+            <a:srgbClr val="EAF6F8"/>
+          </a:solidFill>
+          <a:ln w="12700">
+            <a:solidFill>
+              <a:srgbClr val="8ABBD8"/>
+            </a:solidFill>
+            <a:prstDash val="solid"/>
+          </a:ln>
+        </p:spPr>
+      </p:sp>
+      <p:sp>
+        <p:nvSpPr>
+          <p:cNvPr id="15" name="Shape 13"/>
+          <p:cNvSpPr/>
+          <p:nvPr/>
+        </p:nvSpPr>
+        <p:spPr>
+          <a:xfrm>
+            <a:off x="8202168" y="3721608"/>
+            <a:ext cx="2340864" cy="0"/>
+          </a:xfrm>
+          <a:prstGeom prst="line">
+            <a:avLst/>
+          </a:prstGeom>
+          <a:noFill/>
+          <a:ln w="19050">
+            <a:solidFill>
+              <a:srgbClr val="0068B7"/>
+            </a:solidFill>
+            <a:prstDash val="solid"/>
+          </a:ln>
+        </p:spPr>
+      </p:sp>
+      <p:sp>
+        <p:nvSpPr>
+          <p:cNvPr id="16" name="Shape 14"/>
+          <p:cNvSpPr/>
+          <p:nvPr/>
+        </p:nvSpPr>
+        <p:spPr>
+          <a:xfrm>
+            <a:off x="9198864" y="4206240"/>
+            <a:ext cx="347472" cy="347472"/>
+          </a:xfrm>
+          <a:prstGeom prst="ellipse">
+            <a:avLst/>
+          </a:prstGeom>
+          <a:solidFill>
+            <a:srgbClr val="2F8A28"/>
+          </a:solidFill>
+          <a:ln w="12700">
+            <a:solidFill>
+              <a:srgbClr val="2F8A28"/>
+            </a:solidFill>
+            <a:prstDash val="solid"/>
+          </a:ln>
+        </p:spPr>
+      </p:sp>
+      <p:sp>
+        <p:nvSpPr>
+          <p:cNvPr id="17" name="Text 15"/>
+          <p:cNvSpPr/>
+          <p:nvPr/>
+        </p:nvSpPr>
+        <p:spPr>
+          <a:xfrm>
+            <a:off x="7909560" y="3977640"/>
+            <a:ext cx="2926080" cy="182880"/>
+          </a:xfrm>
+          <a:prstGeom prst="rect">
+            <a:avLst/>
+          </a:prstGeom>
+          <a:noFill/>
+          <a:ln/>
+        </p:spPr>
+        <p:txBody>
+          <a:bodyPr wrap="square" lIns="0" tIns="0" rIns="0" bIns="0" rtlCol="0" anchor="ctr"/>
+          <a:lstStyle/>
+          <a:p>
+            <a:pPr algn="ctr" indent="0" marL="0">
+              <a:buNone/>
+            </a:pPr>
+            <a:r>
+              <a:rPr lang="en-US" sz="1000" dirty="0">
+                <a:solidFill>
+                  <a:srgbClr val="003A63"/>
+                </a:solidFill>
+                <a:latin typeface="Aptos" pitchFamily="34" charset="0"/>
+                <a:ea typeface="Aptos" pitchFamily="34" charset="-122"/>
+                <a:cs typeface="Aptos" pitchFamily="34" charset="-120"/>
+              </a:rPr>
+              <a:t>Concept to action</a:t>
+            </a:r>
+            <a:endParaRPr lang="en-US" sz="1000" dirty="0"/>
+          </a:p>
+        </p:txBody>
+      </p:sp>
+      <p:sp>
+        <p:nvSpPr>
+          <p:cNvPr id="18" name="Shape 16"/>
+          <p:cNvSpPr/>
+          <p:nvPr/>
+        </p:nvSpPr>
+        <p:spPr>
+          <a:xfrm>
+            <a:off x="7635240" y="4498848"/>
+            <a:ext cx="3474720" cy="1143000"/>
+          </a:xfrm>
+          <a:prstGeom prst="roundRect">
+            <a:avLst>
+              <a:gd name="adj" fmla="val 9600"/>
             </a:avLst>
           </a:prstGeom>
           <a:solidFill>
@@ -6570,14 +7356,14 @@
       </p:sp>
       <p:sp>
         <p:nvSpPr>
-          <p:cNvPr id="16" name="Text 14"/>
-          <p:cNvSpPr/>
-          <p:nvPr/>
-        </p:nvSpPr>
-        <p:spPr>
-          <a:xfrm>
-            <a:off x="8074152" y="3666744"/>
-            <a:ext cx="2825496" cy="256032"/>
+          <p:cNvPr id="19" name="Text 17"/>
+          <p:cNvSpPr/>
+          <p:nvPr/>
+        </p:nvSpPr>
+        <p:spPr>
+          <a:xfrm>
+            <a:off x="7799832" y="4645152"/>
+            <a:ext cx="3145536" cy="256032"/>
           </a:xfrm>
           <a:prstGeom prst="rect">
             <a:avLst/>
@@ -6601,7 +7387,7 @@
                 <a:ea typeface="Aptos" pitchFamily="34" charset="-122"/>
                 <a:cs typeface="Aptos" pitchFamily="34" charset="-120"/>
               </a:rPr>
-              <a:t>Use this for</a:t>
+              <a:t>Apply it</a:t>
             </a:r>
             <a:endParaRPr lang="en-US" sz="1300" dirty="0"/>
           </a:p>
@@ -6609,14 +7395,14 @@
       </p:sp>
       <p:sp>
         <p:nvSpPr>
-          <p:cNvPr id="17" name="Text 15"/>
-          <p:cNvSpPr/>
-          <p:nvPr/>
-        </p:nvSpPr>
-        <p:spPr>
-          <a:xfrm>
-            <a:off x="8074152" y="4023360"/>
-            <a:ext cx="2825496" cy="1097280"/>
+          <p:cNvPr id="20" name="Text 18"/>
+          <p:cNvSpPr/>
+          <p:nvPr/>
+        </p:nvSpPr>
+        <p:spPr>
+          <a:xfrm>
+            <a:off x="7799832" y="5001768"/>
+            <a:ext cx="3145536" cy="502920"/>
           </a:xfrm>
           <a:prstGeom prst="rect">
             <a:avLst/>
@@ -6642,7 +7428,7 @@
                 <a:ea typeface="Aptos" pitchFamily="34" charset="-122"/>
                 <a:cs typeface="Aptos" pitchFamily="34" charset="-120"/>
               </a:rPr>
-              <a:t>Connect the concept to public health decisions, safeguards, documentation, or implementation work.</a:t>
+              <a:t>Connect the concept to public health purpose, responsible use, required safeguards, documentation, and the next action a department should take.</a:t>
             </a:r>
             <a:endParaRPr lang="en-US" sz="1550" dirty="0"/>
           </a:p>
@@ -6816,8 +7602,8 @@
         </p:nvSpPr>
         <p:spPr>
           <a:xfrm>
-            <a:off x="9966960" y="6537960"/>
-            <a:ext cx="1645920" cy="201168"/>
+            <a:off x="9646920" y="6537960"/>
+            <a:ext cx="1965960" cy="201168"/>
           </a:xfrm>
           <a:prstGeom prst="rect">
             <a:avLst/>
@@ -6841,7 +7627,7 @@
                 <a:ea typeface="Aptos" pitchFamily="34" charset="-122"/>
                 <a:cs typeface="Aptos" pitchFamily="34" charset="-120"/>
               </a:rPr>
-              <a:t>Â© Paula Soper</a:t>
+              <a:t>Copyright Paula Soper</a:t>
             </a:r>
             <a:endParaRPr lang="en-US" sz="800" dirty="0"/>
           </a:p>
@@ -6936,7 +7722,7 @@
         <p:spPr>
           <a:xfrm>
             <a:off x="868680" y="1508760"/>
-            <a:ext cx="6537960" cy="4160520"/>
+            <a:ext cx="6309360" cy="4160520"/>
           </a:xfrm>
           <a:prstGeom prst="rect">
             <a:avLst/>
@@ -6987,12 +7773,12 @@
         </p:nvSpPr>
         <p:spPr>
           <a:xfrm>
-            <a:off x="7909560" y="1417320"/>
-            <a:ext cx="3154680" cy="1828800"/>
+            <a:off x="7635240" y="1325880"/>
+            <a:ext cx="3474720" cy="1325880"/>
           </a:xfrm>
           <a:prstGeom prst="roundRect">
             <a:avLst>
-              <a:gd name="adj" fmla="val 6000"/>
+              <a:gd name="adj" fmla="val 8276"/>
             </a:avLst>
           </a:prstGeom>
           <a:solidFill>
@@ -7014,8 +7800,8 @@
         </p:nvSpPr>
         <p:spPr>
           <a:xfrm>
-            <a:off x="8074152" y="1563624"/>
-            <a:ext cx="2825496" cy="256032"/>
+            <a:off x="7799832" y="1472184"/>
+            <a:ext cx="3145536" cy="256032"/>
           </a:xfrm>
           <a:prstGeom prst="rect">
             <a:avLst/>
@@ -7039,7 +7825,7 @@
                 <a:ea typeface="Aptos" pitchFamily="34" charset="-122"/>
                 <a:cs typeface="Aptos" pitchFamily="34" charset="-120"/>
               </a:rPr>
-              <a:t>Key idea</a:t>
+              <a:t>Core concept</a:t>
             </a:r>
             <a:endParaRPr lang="en-US" sz="1300" dirty="0"/>
           </a:p>
@@ -7053,8 +7839,8 @@
         </p:nvSpPr>
         <p:spPr>
           <a:xfrm>
-            <a:off x="8074152" y="1920240"/>
-            <a:ext cx="2825496" cy="1188720"/>
+            <a:off x="7799832" y="1828800"/>
+            <a:ext cx="3145536" cy="685800"/>
           </a:xfrm>
           <a:prstGeom prst="rect">
             <a:avLst/>
@@ -7094,12 +7880,153 @@
         </p:nvSpPr>
         <p:spPr>
           <a:xfrm>
-            <a:off x="7909560" y="3520440"/>
-            <a:ext cx="3154680" cy="1737360"/>
+            <a:off x="7635240" y="2788920"/>
+            <a:ext cx="3474720" cy="1536192"/>
           </a:xfrm>
           <a:prstGeom prst="roundRect">
             <a:avLst>
-              <a:gd name="adj" fmla="val 6316"/>
+              <a:gd name="adj" fmla="val 7143"/>
+            </a:avLst>
+          </a:prstGeom>
+          <a:solidFill>
+            <a:srgbClr val="FFFFFF">
+              <a:alpha val="88000"/>
+            </a:srgbClr>
+          </a:solidFill>
+          <a:ln w="12700">
+            <a:solidFill>
+              <a:srgbClr val="D6E8F2"/>
+            </a:solidFill>
+            <a:prstDash val="solid"/>
+          </a:ln>
+        </p:spPr>
+      </p:sp>
+      <p:sp>
+        <p:nvSpPr>
+          <p:cNvPr id="14" name="Shape 12"/>
+          <p:cNvSpPr/>
+          <p:nvPr/>
+        </p:nvSpPr>
+        <p:spPr>
+          <a:xfrm>
+            <a:off x="8074152" y="3291840"/>
+            <a:ext cx="2596896" cy="749808"/>
+          </a:xfrm>
+          <a:prstGeom prst="rect">
+            <a:avLst/>
+          </a:prstGeom>
+          <a:solidFill>
+            <a:srgbClr val="EAF6F8"/>
+          </a:solidFill>
+          <a:ln w="12700">
+            <a:solidFill>
+              <a:srgbClr val="8ABBD8"/>
+            </a:solidFill>
+            <a:prstDash val="solid"/>
+          </a:ln>
+        </p:spPr>
+      </p:sp>
+      <p:sp>
+        <p:nvSpPr>
+          <p:cNvPr id="15" name="Shape 13"/>
+          <p:cNvSpPr/>
+          <p:nvPr/>
+        </p:nvSpPr>
+        <p:spPr>
+          <a:xfrm>
+            <a:off x="8202168" y="3721608"/>
+            <a:ext cx="2340864" cy="0"/>
+          </a:xfrm>
+          <a:prstGeom prst="line">
+            <a:avLst/>
+          </a:prstGeom>
+          <a:noFill/>
+          <a:ln w="19050">
+            <a:solidFill>
+              <a:srgbClr val="0068B7"/>
+            </a:solidFill>
+            <a:prstDash val="solid"/>
+          </a:ln>
+        </p:spPr>
+      </p:sp>
+      <p:sp>
+        <p:nvSpPr>
+          <p:cNvPr id="16" name="Shape 14"/>
+          <p:cNvSpPr/>
+          <p:nvPr/>
+        </p:nvSpPr>
+        <p:spPr>
+          <a:xfrm>
+            <a:off x="9198864" y="4206240"/>
+            <a:ext cx="347472" cy="347472"/>
+          </a:xfrm>
+          <a:prstGeom prst="ellipse">
+            <a:avLst/>
+          </a:prstGeom>
+          <a:solidFill>
+            <a:srgbClr val="2F8A28"/>
+          </a:solidFill>
+          <a:ln w="12700">
+            <a:solidFill>
+              <a:srgbClr val="2F8A28"/>
+            </a:solidFill>
+            <a:prstDash val="solid"/>
+          </a:ln>
+        </p:spPr>
+      </p:sp>
+      <p:sp>
+        <p:nvSpPr>
+          <p:cNvPr id="17" name="Text 15"/>
+          <p:cNvSpPr/>
+          <p:nvPr/>
+        </p:nvSpPr>
+        <p:spPr>
+          <a:xfrm>
+            <a:off x="7909560" y="3977640"/>
+            <a:ext cx="2926080" cy="182880"/>
+          </a:xfrm>
+          <a:prstGeom prst="rect">
+            <a:avLst/>
+          </a:prstGeom>
+          <a:noFill/>
+          <a:ln/>
+        </p:spPr>
+        <p:txBody>
+          <a:bodyPr wrap="square" lIns="0" tIns="0" rIns="0" bIns="0" rtlCol="0" anchor="ctr"/>
+          <a:lstStyle/>
+          <a:p>
+            <a:pPr algn="ctr" indent="0" marL="0">
+              <a:buNone/>
+            </a:pPr>
+            <a:r>
+              <a:rPr lang="en-US" sz="1000" dirty="0">
+                <a:solidFill>
+                  <a:srgbClr val="003A63"/>
+                </a:solidFill>
+                <a:latin typeface="Aptos" pitchFamily="34" charset="0"/>
+                <a:ea typeface="Aptos" pitchFamily="34" charset="-122"/>
+                <a:cs typeface="Aptos" pitchFamily="34" charset="-120"/>
+              </a:rPr>
+              <a:t>Concept to action</a:t>
+            </a:r>
+            <a:endParaRPr lang="en-US" sz="1000" dirty="0"/>
+          </a:p>
+        </p:txBody>
+      </p:sp>
+      <p:sp>
+        <p:nvSpPr>
+          <p:cNvPr id="18" name="Shape 16"/>
+          <p:cNvSpPr/>
+          <p:nvPr/>
+        </p:nvSpPr>
+        <p:spPr>
+          <a:xfrm>
+            <a:off x="7635240" y="4498848"/>
+            <a:ext cx="3474720" cy="1143000"/>
+          </a:xfrm>
+          <a:prstGeom prst="roundRect">
+            <a:avLst>
+              <a:gd name="adj" fmla="val 9600"/>
             </a:avLst>
           </a:prstGeom>
           <a:solidFill>
@@ -7115,14 +8042,14 @@
       </p:sp>
       <p:sp>
         <p:nvSpPr>
-          <p:cNvPr id="14" name="Text 12"/>
-          <p:cNvSpPr/>
-          <p:nvPr/>
-        </p:nvSpPr>
-        <p:spPr>
-          <a:xfrm>
-            <a:off x="8074152" y="3666744"/>
-            <a:ext cx="2825496" cy="256032"/>
+          <p:cNvPr id="19" name="Text 17"/>
+          <p:cNvSpPr/>
+          <p:nvPr/>
+        </p:nvSpPr>
+        <p:spPr>
+          <a:xfrm>
+            <a:off x="7799832" y="4645152"/>
+            <a:ext cx="3145536" cy="256032"/>
           </a:xfrm>
           <a:prstGeom prst="rect">
             <a:avLst/>
@@ -7146,7 +8073,7 @@
                 <a:ea typeface="Aptos" pitchFamily="34" charset="-122"/>
                 <a:cs typeface="Aptos" pitchFamily="34" charset="-120"/>
               </a:rPr>
-              <a:t>Use this for</a:t>
+              <a:t>Apply it</a:t>
             </a:r>
             <a:endParaRPr lang="en-US" sz="1300" dirty="0"/>
           </a:p>
@@ -7154,14 +8081,14 @@
       </p:sp>
       <p:sp>
         <p:nvSpPr>
-          <p:cNvPr id="15" name="Text 13"/>
-          <p:cNvSpPr/>
-          <p:nvPr/>
-        </p:nvSpPr>
-        <p:spPr>
-          <a:xfrm>
-            <a:off x="8074152" y="4023360"/>
-            <a:ext cx="2825496" cy="1097280"/>
+          <p:cNvPr id="20" name="Text 18"/>
+          <p:cNvSpPr/>
+          <p:nvPr/>
+        </p:nvSpPr>
+        <p:spPr>
+          <a:xfrm>
+            <a:off x="7799832" y="5001768"/>
+            <a:ext cx="3145536" cy="502920"/>
           </a:xfrm>
           <a:prstGeom prst="rect">
             <a:avLst/>
@@ -7187,7 +8114,7 @@
                 <a:ea typeface="Aptos" pitchFamily="34" charset="-122"/>
                 <a:cs typeface="Aptos" pitchFamily="34" charset="-120"/>
               </a:rPr>
-              <a:t>Connect the concept to public health decisions, safeguards, documentation, or implementation work.</a:t>
+              <a:t>Connect the concept to public health purpose, responsible use, required safeguards, documentation, and the next action a department should take.</a:t>
             </a:r>
             <a:endParaRPr lang="en-US" sz="1550" dirty="0"/>
           </a:p>
@@ -7361,8 +8288,8 @@
         </p:nvSpPr>
         <p:spPr>
           <a:xfrm>
-            <a:off x="9966960" y="6537960"/>
-            <a:ext cx="1645920" cy="201168"/>
+            <a:off x="9646920" y="6537960"/>
+            <a:ext cx="1965960" cy="201168"/>
           </a:xfrm>
           <a:prstGeom prst="rect">
             <a:avLst/>
@@ -7386,7 +8313,7 @@
                 <a:ea typeface="Aptos" pitchFamily="34" charset="-122"/>
                 <a:cs typeface="Aptos" pitchFamily="34" charset="-120"/>
               </a:rPr>
-              <a:t>Â© Paula Soper</a:t>
+              <a:t>Copyright Paula Soper</a:t>
             </a:r>
             <a:endParaRPr lang="en-US" sz="800" dirty="0"/>
           </a:p>
@@ -7433,77 +8360,13 @@
       </p:sp>
       <p:sp>
         <p:nvSpPr>
-          <p:cNvPr id="8" name="Shape 6"/>
+          <p:cNvPr id="8" name="Text 6"/>
           <p:cNvSpPr/>
           <p:nvPr/>
         </p:nvSpPr>
         <p:spPr>
           <a:xfrm>
             <a:off x="640080" y="658368"/>
-            <a:ext cx="420624" cy="420624"/>
-          </a:xfrm>
-          <a:prstGeom prst="ellipse">
-            <a:avLst/>
-          </a:prstGeom>
-          <a:solidFill>
-            <a:srgbClr val="0068B7"/>
-          </a:solidFill>
-          <a:ln w="12700">
-            <a:solidFill>
-              <a:srgbClr val="0068B7"/>
-            </a:solidFill>
-            <a:prstDash val="solid"/>
-          </a:ln>
-        </p:spPr>
-      </p:sp>
-      <p:sp>
-        <p:nvSpPr>
-          <p:cNvPr id="9" name="Text 7"/>
-          <p:cNvSpPr/>
-          <p:nvPr/>
-        </p:nvSpPr>
-        <p:spPr>
-          <a:xfrm>
-            <a:off x="640080" y="731520"/>
-            <a:ext cx="420624" cy="164592"/>
-          </a:xfrm>
-          <a:prstGeom prst="rect">
-            <a:avLst/>
-          </a:prstGeom>
-          <a:noFill/>
-          <a:ln/>
-        </p:spPr>
-        <p:txBody>
-          <a:bodyPr wrap="square" lIns="0" tIns="0" rIns="0" bIns="0" rtlCol="0" anchor="ctr"/>
-          <a:lstStyle/>
-          <a:p>
-            <a:pPr algn="ctr" indent="0" marL="0">
-              <a:buNone/>
-            </a:pPr>
-            <a:r>
-              <a:rPr lang="en-US" sz="1100" b="1" dirty="0">
-                <a:solidFill>
-                  <a:srgbClr val="FFFFFF"/>
-                </a:solidFill>
-                <a:latin typeface="Aptos" pitchFamily="34" charset="0"/>
-                <a:ea typeface="Aptos" pitchFamily="34" charset="-122"/>
-                <a:cs typeface="Aptos" pitchFamily="34" charset="-120"/>
-              </a:rPr>
-              <a:t>9</a:t>
-            </a:r>
-            <a:endParaRPr lang="en-US" sz="1100" dirty="0"/>
-          </a:p>
-        </p:txBody>
-      </p:sp>
-      <p:sp>
-        <p:nvSpPr>
-          <p:cNvPr id="10" name="Text 8"/>
-          <p:cNvSpPr/>
-          <p:nvPr/>
-        </p:nvSpPr>
-        <p:spPr>
-          <a:xfrm>
-            <a:off x="640080" y="621792"/>
             <a:ext cx="10881360" cy="713232"/>
           </a:xfrm>
           <a:prstGeom prst="rect">
@@ -7538,14 +8401,14 @@
       </p:sp>
       <p:sp>
         <p:nvSpPr>
-          <p:cNvPr id="11" name="Text 9"/>
+          <p:cNvPr id="9" name="Text 7"/>
           <p:cNvSpPr/>
           <p:nvPr/>
         </p:nvSpPr>
         <p:spPr>
           <a:xfrm>
             <a:off x="868680" y="1508760"/>
-            <a:ext cx="6537960" cy="4160520"/>
+            <a:ext cx="6309360" cy="4160520"/>
           </a:xfrm>
           <a:prstGeom prst="rect">
             <a:avLst/>
@@ -7604,18 +8467,18 @@
       </p:sp>
       <p:sp>
         <p:nvSpPr>
-          <p:cNvPr id="12" name="Shape 10"/>
-          <p:cNvSpPr/>
-          <p:nvPr/>
-        </p:nvSpPr>
-        <p:spPr>
-          <a:xfrm>
-            <a:off x="7909560" y="1417320"/>
-            <a:ext cx="3154680" cy="1828800"/>
+          <p:cNvPr id="10" name="Shape 8"/>
+          <p:cNvSpPr/>
+          <p:nvPr/>
+        </p:nvSpPr>
+        <p:spPr>
+          <a:xfrm>
+            <a:off x="7635240" y="1325880"/>
+            <a:ext cx="3474720" cy="1325880"/>
           </a:xfrm>
           <a:prstGeom prst="roundRect">
             <a:avLst>
-              <a:gd name="adj" fmla="val 6000"/>
+              <a:gd name="adj" fmla="val 8276"/>
             </a:avLst>
           </a:prstGeom>
           <a:solidFill>
@@ -7631,14 +8494,14 @@
       </p:sp>
       <p:sp>
         <p:nvSpPr>
-          <p:cNvPr id="13" name="Text 11"/>
-          <p:cNvSpPr/>
-          <p:nvPr/>
-        </p:nvSpPr>
-        <p:spPr>
-          <a:xfrm>
-            <a:off x="8074152" y="1563624"/>
-            <a:ext cx="2825496" cy="256032"/>
+          <p:cNvPr id="11" name="Text 9"/>
+          <p:cNvSpPr/>
+          <p:nvPr/>
+        </p:nvSpPr>
+        <p:spPr>
+          <a:xfrm>
+            <a:off x="7799832" y="1472184"/>
+            <a:ext cx="3145536" cy="256032"/>
           </a:xfrm>
           <a:prstGeom prst="rect">
             <a:avLst/>
@@ -7662,7 +8525,7 @@
                 <a:ea typeface="Aptos" pitchFamily="34" charset="-122"/>
                 <a:cs typeface="Aptos" pitchFamily="34" charset="-120"/>
               </a:rPr>
-              <a:t>Key idea</a:t>
+              <a:t>Practice focus</a:t>
             </a:r>
             <a:endParaRPr lang="en-US" sz="1300" dirty="0"/>
           </a:p>
@@ -7670,14 +8533,14 @@
       </p:sp>
       <p:sp>
         <p:nvSpPr>
-          <p:cNvPr id="14" name="Text 12"/>
-          <p:cNvSpPr/>
-          <p:nvPr/>
-        </p:nvSpPr>
-        <p:spPr>
-          <a:xfrm>
-            <a:off x="8074152" y="1920240"/>
-            <a:ext cx="2825496" cy="1188720"/>
+          <p:cNvPr id="12" name="Text 10"/>
+          <p:cNvSpPr/>
+          <p:nvPr/>
+        </p:nvSpPr>
+        <p:spPr>
+          <a:xfrm>
+            <a:off x="7799832" y="1828800"/>
+            <a:ext cx="3145536" cy="685800"/>
           </a:xfrm>
           <a:prstGeom prst="rect">
             <a:avLst/>
@@ -7711,18 +8574,159 @@
       </p:sp>
       <p:sp>
         <p:nvSpPr>
-          <p:cNvPr id="15" name="Shape 13"/>
-          <p:cNvSpPr/>
-          <p:nvPr/>
-        </p:nvSpPr>
-        <p:spPr>
-          <a:xfrm>
-            <a:off x="7909560" y="3520440"/>
-            <a:ext cx="3154680" cy="1737360"/>
+          <p:cNvPr id="13" name="Shape 11"/>
+          <p:cNvSpPr/>
+          <p:nvPr/>
+        </p:nvSpPr>
+        <p:spPr>
+          <a:xfrm>
+            <a:off x="7635240" y="2788920"/>
+            <a:ext cx="3474720" cy="1536192"/>
           </a:xfrm>
           <a:prstGeom prst="roundRect">
             <a:avLst>
-              <a:gd name="adj" fmla="val 6316"/>
+              <a:gd name="adj" fmla="val 7143"/>
+            </a:avLst>
+          </a:prstGeom>
+          <a:solidFill>
+            <a:srgbClr val="FFFFFF">
+              <a:alpha val="88000"/>
+            </a:srgbClr>
+          </a:solidFill>
+          <a:ln w="12700">
+            <a:solidFill>
+              <a:srgbClr val="D6E8F2"/>
+            </a:solidFill>
+            <a:prstDash val="solid"/>
+          </a:ln>
+        </p:spPr>
+      </p:sp>
+      <p:sp>
+        <p:nvSpPr>
+          <p:cNvPr id="14" name="Shape 12"/>
+          <p:cNvSpPr/>
+          <p:nvPr/>
+        </p:nvSpPr>
+        <p:spPr>
+          <a:xfrm>
+            <a:off x="8074152" y="3291840"/>
+            <a:ext cx="2596896" cy="749808"/>
+          </a:xfrm>
+          <a:prstGeom prst="rect">
+            <a:avLst/>
+          </a:prstGeom>
+          <a:solidFill>
+            <a:srgbClr val="EAF6F8"/>
+          </a:solidFill>
+          <a:ln w="12700">
+            <a:solidFill>
+              <a:srgbClr val="8ABBD8"/>
+            </a:solidFill>
+            <a:prstDash val="solid"/>
+          </a:ln>
+        </p:spPr>
+      </p:sp>
+      <p:sp>
+        <p:nvSpPr>
+          <p:cNvPr id="15" name="Shape 13"/>
+          <p:cNvSpPr/>
+          <p:nvPr/>
+        </p:nvSpPr>
+        <p:spPr>
+          <a:xfrm>
+            <a:off x="8202168" y="3721608"/>
+            <a:ext cx="2340864" cy="0"/>
+          </a:xfrm>
+          <a:prstGeom prst="line">
+            <a:avLst/>
+          </a:prstGeom>
+          <a:noFill/>
+          <a:ln w="19050">
+            <a:solidFill>
+              <a:srgbClr val="0068B7"/>
+            </a:solidFill>
+            <a:prstDash val="solid"/>
+          </a:ln>
+        </p:spPr>
+      </p:sp>
+      <p:sp>
+        <p:nvSpPr>
+          <p:cNvPr id="16" name="Shape 14"/>
+          <p:cNvSpPr/>
+          <p:nvPr/>
+        </p:nvSpPr>
+        <p:spPr>
+          <a:xfrm>
+            <a:off x="9198864" y="4206240"/>
+            <a:ext cx="347472" cy="347472"/>
+          </a:xfrm>
+          <a:prstGeom prst="ellipse">
+            <a:avLst/>
+          </a:prstGeom>
+          <a:solidFill>
+            <a:srgbClr val="2F8A28"/>
+          </a:solidFill>
+          <a:ln w="12700">
+            <a:solidFill>
+              <a:srgbClr val="2F8A28"/>
+            </a:solidFill>
+            <a:prstDash val="solid"/>
+          </a:ln>
+        </p:spPr>
+      </p:sp>
+      <p:sp>
+        <p:nvSpPr>
+          <p:cNvPr id="17" name="Text 15"/>
+          <p:cNvSpPr/>
+          <p:nvPr/>
+        </p:nvSpPr>
+        <p:spPr>
+          <a:xfrm>
+            <a:off x="7909560" y="3977640"/>
+            <a:ext cx="2926080" cy="182880"/>
+          </a:xfrm>
+          <a:prstGeom prst="rect">
+            <a:avLst/>
+          </a:prstGeom>
+          <a:noFill/>
+          <a:ln/>
+        </p:spPr>
+        <p:txBody>
+          <a:bodyPr wrap="square" lIns="0" tIns="0" rIns="0" bIns="0" rtlCol="0" anchor="ctr"/>
+          <a:lstStyle/>
+          <a:p>
+            <a:pPr algn="ctr" indent="0" marL="0">
+              <a:buNone/>
+            </a:pPr>
+            <a:r>
+              <a:rPr lang="en-US" sz="1000" dirty="0">
+                <a:solidFill>
+                  <a:srgbClr val="003A63"/>
+                </a:solidFill>
+                <a:latin typeface="Aptos" pitchFamily="34" charset="0"/>
+                <a:ea typeface="Aptos" pitchFamily="34" charset="-122"/>
+                <a:cs typeface="Aptos" pitchFamily="34" charset="-120"/>
+              </a:rPr>
+              <a:t>Concept to action</a:t>
+            </a:r>
+            <a:endParaRPr lang="en-US" sz="1000" dirty="0"/>
+          </a:p>
+        </p:txBody>
+      </p:sp>
+      <p:sp>
+        <p:nvSpPr>
+          <p:cNvPr id="18" name="Shape 16"/>
+          <p:cNvSpPr/>
+          <p:nvPr/>
+        </p:nvSpPr>
+        <p:spPr>
+          <a:xfrm>
+            <a:off x="7635240" y="4498848"/>
+            <a:ext cx="3474720" cy="1143000"/>
+          </a:xfrm>
+          <a:prstGeom prst="roundRect">
+            <a:avLst>
+              <a:gd name="adj" fmla="val 9600"/>
             </a:avLst>
           </a:prstGeom>
           <a:solidFill>
@@ -7738,14 +8742,14 @@
       </p:sp>
       <p:sp>
         <p:nvSpPr>
-          <p:cNvPr id="16" name="Text 14"/>
-          <p:cNvSpPr/>
-          <p:nvPr/>
-        </p:nvSpPr>
-        <p:spPr>
-          <a:xfrm>
-            <a:off x="8074152" y="3666744"/>
-            <a:ext cx="2825496" cy="256032"/>
+          <p:cNvPr id="19" name="Text 17"/>
+          <p:cNvSpPr/>
+          <p:nvPr/>
+        </p:nvSpPr>
+        <p:spPr>
+          <a:xfrm>
+            <a:off x="7799832" y="4645152"/>
+            <a:ext cx="3145536" cy="256032"/>
           </a:xfrm>
           <a:prstGeom prst="rect">
             <a:avLst/>
@@ -7769,7 +8773,7 @@
                 <a:ea typeface="Aptos" pitchFamily="34" charset="-122"/>
                 <a:cs typeface="Aptos" pitchFamily="34" charset="-120"/>
               </a:rPr>
-              <a:t>Use this for</a:t>
+              <a:t>What to produce</a:t>
             </a:r>
             <a:endParaRPr lang="en-US" sz="1300" dirty="0"/>
           </a:p>
@@ -7777,14 +8781,14 @@
       </p:sp>
       <p:sp>
         <p:nvSpPr>
-          <p:cNvPr id="17" name="Text 15"/>
-          <p:cNvSpPr/>
-          <p:nvPr/>
-        </p:nvSpPr>
-        <p:spPr>
-          <a:xfrm>
-            <a:off x="8074152" y="4023360"/>
-            <a:ext cx="2825496" cy="1097280"/>
+          <p:cNvPr id="20" name="Text 18"/>
+          <p:cNvSpPr/>
+          <p:nvPr/>
+        </p:nvSpPr>
+        <p:spPr>
+          <a:xfrm>
+            <a:off x="7799832" y="5001768"/>
+            <a:ext cx="3145536" cy="502920"/>
           </a:xfrm>
           <a:prstGeom prst="rect">
             <a:avLst/>
@@ -7810,7 +8814,7 @@
                 <a:ea typeface="Aptos" pitchFamily="34" charset="-122"/>
                 <a:cs typeface="Aptos" pitchFamily="34" charset="-120"/>
               </a:rPr>
-              <a:t>Connect the concept to public health decisions, safeguards, documentation, or implementation work.</a:t>
+              <a:t>Use the assignment to test whether you can explain the concept, apply it to a realistic public health situation, and identify what would need review before the work moves forward.</a:t>
             </a:r>
             <a:endParaRPr lang="en-US" sz="1550" dirty="0"/>
           </a:p>
@@ -7984,8 +8988,8 @@
         </p:nvSpPr>
         <p:spPr>
           <a:xfrm>
-            <a:off x="9966960" y="6537960"/>
-            <a:ext cx="1645920" cy="201168"/>
+            <a:off x="9646920" y="6537960"/>
+            <a:ext cx="1965960" cy="201168"/>
           </a:xfrm>
           <a:prstGeom prst="rect">
             <a:avLst/>
@@ -8009,7 +9013,7 @@
                 <a:ea typeface="Aptos" pitchFamily="34" charset="-122"/>
                 <a:cs typeface="Aptos" pitchFamily="34" charset="-120"/>
               </a:rPr>
-              <a:t>Â© Paula Soper</a:t>
+              <a:t>Copyright Paula Soper</a:t>
             </a:r>
             <a:endParaRPr lang="en-US" sz="800" dirty="0"/>
           </a:p>
@@ -8056,77 +9060,13 @@
       </p:sp>
       <p:sp>
         <p:nvSpPr>
-          <p:cNvPr id="8" name="Shape 6"/>
+          <p:cNvPr id="8" name="Text 6"/>
           <p:cNvSpPr/>
           <p:nvPr/>
         </p:nvSpPr>
         <p:spPr>
           <a:xfrm>
             <a:off x="640080" y="658368"/>
-            <a:ext cx="420624" cy="420624"/>
-          </a:xfrm>
-          <a:prstGeom prst="ellipse">
-            <a:avLst/>
-          </a:prstGeom>
-          <a:solidFill>
-            <a:srgbClr val="0068B7"/>
-          </a:solidFill>
-          <a:ln w="12700">
-            <a:solidFill>
-              <a:srgbClr val="0068B7"/>
-            </a:solidFill>
-            <a:prstDash val="solid"/>
-          </a:ln>
-        </p:spPr>
-      </p:sp>
-      <p:sp>
-        <p:nvSpPr>
-          <p:cNvPr id="9" name="Text 7"/>
-          <p:cNvSpPr/>
-          <p:nvPr/>
-        </p:nvSpPr>
-        <p:spPr>
-          <a:xfrm>
-            <a:off x="640080" y="731520"/>
-            <a:ext cx="420624" cy="164592"/>
-          </a:xfrm>
-          <a:prstGeom prst="rect">
-            <a:avLst/>
-          </a:prstGeom>
-          <a:noFill/>
-          <a:ln/>
-        </p:spPr>
-        <p:txBody>
-          <a:bodyPr wrap="square" lIns="0" tIns="0" rIns="0" bIns="0" rtlCol="0" anchor="ctr"/>
-          <a:lstStyle/>
-          <a:p>
-            <a:pPr algn="ctr" indent="0" marL="0">
-              <a:buNone/>
-            </a:pPr>
-            <a:r>
-              <a:rPr lang="en-US" sz="1100" b="1" dirty="0">
-                <a:solidFill>
-                  <a:srgbClr val="FFFFFF"/>
-                </a:solidFill>
-                <a:latin typeface="Aptos" pitchFamily="34" charset="0"/>
-                <a:ea typeface="Aptos" pitchFamily="34" charset="-122"/>
-                <a:cs typeface="Aptos" pitchFamily="34" charset="-120"/>
-              </a:rPr>
-              <a:t>10</a:t>
-            </a:r>
-            <a:endParaRPr lang="en-US" sz="1100" dirty="0"/>
-          </a:p>
-        </p:txBody>
-      </p:sp>
-      <p:sp>
-        <p:nvSpPr>
-          <p:cNvPr id="10" name="Text 8"/>
-          <p:cNvSpPr/>
-          <p:nvPr/>
-        </p:nvSpPr>
-        <p:spPr>
-          <a:xfrm>
-            <a:off x="640080" y="621792"/>
             <a:ext cx="10881360" cy="713232"/>
           </a:xfrm>
           <a:prstGeom prst="rect">
@@ -8161,14 +9101,14 @@
       </p:sp>
       <p:sp>
         <p:nvSpPr>
-          <p:cNvPr id="11" name="Text 9"/>
+          <p:cNvPr id="9" name="Text 7"/>
           <p:cNvSpPr/>
           <p:nvPr/>
         </p:nvSpPr>
         <p:spPr>
           <a:xfrm>
             <a:off x="868680" y="1508760"/>
-            <a:ext cx="6537960" cy="4160520"/>
+            <a:ext cx="6309360" cy="4160520"/>
           </a:xfrm>
           <a:prstGeom prst="rect">
             <a:avLst/>
@@ -8227,18 +9167,18 @@
       </p:sp>
       <p:sp>
         <p:nvSpPr>
-          <p:cNvPr id="12" name="Shape 10"/>
-          <p:cNvSpPr/>
-          <p:nvPr/>
-        </p:nvSpPr>
-        <p:spPr>
-          <a:xfrm>
-            <a:off x="7909560" y="1417320"/>
-            <a:ext cx="3154680" cy="1828800"/>
+          <p:cNvPr id="10" name="Shape 8"/>
+          <p:cNvSpPr/>
+          <p:nvPr/>
+        </p:nvSpPr>
+        <p:spPr>
+          <a:xfrm>
+            <a:off x="7635240" y="1325880"/>
+            <a:ext cx="3474720" cy="1325880"/>
           </a:xfrm>
           <a:prstGeom prst="roundRect">
             <a:avLst>
-              <a:gd name="adj" fmla="val 6000"/>
+              <a:gd name="adj" fmla="val 8276"/>
             </a:avLst>
           </a:prstGeom>
           <a:solidFill>
@@ -8254,14 +9194,14 @@
       </p:sp>
       <p:sp>
         <p:nvSpPr>
-          <p:cNvPr id="13" name="Text 11"/>
-          <p:cNvSpPr/>
-          <p:nvPr/>
-        </p:nvSpPr>
-        <p:spPr>
-          <a:xfrm>
-            <a:off x="8074152" y="1563624"/>
-            <a:ext cx="2825496" cy="256032"/>
+          <p:cNvPr id="11" name="Text 9"/>
+          <p:cNvSpPr/>
+          <p:nvPr/>
+        </p:nvSpPr>
+        <p:spPr>
+          <a:xfrm>
+            <a:off x="7799832" y="1472184"/>
+            <a:ext cx="3145536" cy="256032"/>
           </a:xfrm>
           <a:prstGeom prst="rect">
             <a:avLst/>
@@ -8285,7 +9225,7 @@
                 <a:ea typeface="Aptos" pitchFamily="34" charset="-122"/>
                 <a:cs typeface="Aptos" pitchFamily="34" charset="-120"/>
               </a:rPr>
-              <a:t>Key idea</a:t>
+              <a:t>Core concept</a:t>
             </a:r>
             <a:endParaRPr lang="en-US" sz="1300" dirty="0"/>
           </a:p>
@@ -8293,14 +9233,14 @@
       </p:sp>
       <p:sp>
         <p:nvSpPr>
-          <p:cNvPr id="14" name="Text 12"/>
-          <p:cNvSpPr/>
-          <p:nvPr/>
-        </p:nvSpPr>
-        <p:spPr>
-          <a:xfrm>
-            <a:off x="8074152" y="1920240"/>
-            <a:ext cx="2825496" cy="1188720"/>
+          <p:cNvPr id="12" name="Text 10"/>
+          <p:cNvSpPr/>
+          <p:nvPr/>
+        </p:nvSpPr>
+        <p:spPr>
+          <a:xfrm>
+            <a:off x="7799832" y="1828800"/>
+            <a:ext cx="3145536" cy="685800"/>
           </a:xfrm>
           <a:prstGeom prst="rect">
             <a:avLst/>
@@ -8334,18 +9274,159 @@
       </p:sp>
       <p:sp>
         <p:nvSpPr>
-          <p:cNvPr id="15" name="Shape 13"/>
-          <p:cNvSpPr/>
-          <p:nvPr/>
-        </p:nvSpPr>
-        <p:spPr>
-          <a:xfrm>
-            <a:off x="7909560" y="3520440"/>
-            <a:ext cx="3154680" cy="1737360"/>
+          <p:cNvPr id="13" name="Shape 11"/>
+          <p:cNvSpPr/>
+          <p:nvPr/>
+        </p:nvSpPr>
+        <p:spPr>
+          <a:xfrm>
+            <a:off x="7635240" y="2788920"/>
+            <a:ext cx="3474720" cy="1536192"/>
           </a:xfrm>
           <a:prstGeom prst="roundRect">
             <a:avLst>
-              <a:gd name="adj" fmla="val 6316"/>
+              <a:gd name="adj" fmla="val 7143"/>
+            </a:avLst>
+          </a:prstGeom>
+          <a:solidFill>
+            <a:srgbClr val="FFFFFF">
+              <a:alpha val="88000"/>
+            </a:srgbClr>
+          </a:solidFill>
+          <a:ln w="12700">
+            <a:solidFill>
+              <a:srgbClr val="D6E8F2"/>
+            </a:solidFill>
+            <a:prstDash val="solid"/>
+          </a:ln>
+        </p:spPr>
+      </p:sp>
+      <p:sp>
+        <p:nvSpPr>
+          <p:cNvPr id="14" name="Shape 12"/>
+          <p:cNvSpPr/>
+          <p:nvPr/>
+        </p:nvSpPr>
+        <p:spPr>
+          <a:xfrm>
+            <a:off x="8074152" y="3291840"/>
+            <a:ext cx="2596896" cy="749808"/>
+          </a:xfrm>
+          <a:prstGeom prst="rect">
+            <a:avLst/>
+          </a:prstGeom>
+          <a:solidFill>
+            <a:srgbClr val="EAF6F8"/>
+          </a:solidFill>
+          <a:ln w="12700">
+            <a:solidFill>
+              <a:srgbClr val="8ABBD8"/>
+            </a:solidFill>
+            <a:prstDash val="solid"/>
+          </a:ln>
+        </p:spPr>
+      </p:sp>
+      <p:sp>
+        <p:nvSpPr>
+          <p:cNvPr id="15" name="Shape 13"/>
+          <p:cNvSpPr/>
+          <p:nvPr/>
+        </p:nvSpPr>
+        <p:spPr>
+          <a:xfrm>
+            <a:off x="8202168" y="3721608"/>
+            <a:ext cx="2340864" cy="0"/>
+          </a:xfrm>
+          <a:prstGeom prst="line">
+            <a:avLst/>
+          </a:prstGeom>
+          <a:noFill/>
+          <a:ln w="19050">
+            <a:solidFill>
+              <a:srgbClr val="0068B7"/>
+            </a:solidFill>
+            <a:prstDash val="solid"/>
+          </a:ln>
+        </p:spPr>
+      </p:sp>
+      <p:sp>
+        <p:nvSpPr>
+          <p:cNvPr id="16" name="Shape 14"/>
+          <p:cNvSpPr/>
+          <p:nvPr/>
+        </p:nvSpPr>
+        <p:spPr>
+          <a:xfrm>
+            <a:off x="9198864" y="4206240"/>
+            <a:ext cx="347472" cy="347472"/>
+          </a:xfrm>
+          <a:prstGeom prst="ellipse">
+            <a:avLst/>
+          </a:prstGeom>
+          <a:solidFill>
+            <a:srgbClr val="2F8A28"/>
+          </a:solidFill>
+          <a:ln w="12700">
+            <a:solidFill>
+              <a:srgbClr val="2F8A28"/>
+            </a:solidFill>
+            <a:prstDash val="solid"/>
+          </a:ln>
+        </p:spPr>
+      </p:sp>
+      <p:sp>
+        <p:nvSpPr>
+          <p:cNvPr id="17" name="Text 15"/>
+          <p:cNvSpPr/>
+          <p:nvPr/>
+        </p:nvSpPr>
+        <p:spPr>
+          <a:xfrm>
+            <a:off x="7909560" y="3977640"/>
+            <a:ext cx="2926080" cy="182880"/>
+          </a:xfrm>
+          <a:prstGeom prst="rect">
+            <a:avLst/>
+          </a:prstGeom>
+          <a:noFill/>
+          <a:ln/>
+        </p:spPr>
+        <p:txBody>
+          <a:bodyPr wrap="square" lIns="0" tIns="0" rIns="0" bIns="0" rtlCol="0" anchor="ctr"/>
+          <a:lstStyle/>
+          <a:p>
+            <a:pPr algn="ctr" indent="0" marL="0">
+              <a:buNone/>
+            </a:pPr>
+            <a:r>
+              <a:rPr lang="en-US" sz="1000" dirty="0">
+                <a:solidFill>
+                  <a:srgbClr val="003A63"/>
+                </a:solidFill>
+                <a:latin typeface="Aptos" pitchFamily="34" charset="0"/>
+                <a:ea typeface="Aptos" pitchFamily="34" charset="-122"/>
+                <a:cs typeface="Aptos" pitchFamily="34" charset="-120"/>
+              </a:rPr>
+              <a:t>Concept to action</a:t>
+            </a:r>
+            <a:endParaRPr lang="en-US" sz="1000" dirty="0"/>
+          </a:p>
+        </p:txBody>
+      </p:sp>
+      <p:sp>
+        <p:nvSpPr>
+          <p:cNvPr id="18" name="Shape 16"/>
+          <p:cNvSpPr/>
+          <p:nvPr/>
+        </p:nvSpPr>
+        <p:spPr>
+          <a:xfrm>
+            <a:off x="7635240" y="4498848"/>
+            <a:ext cx="3474720" cy="1143000"/>
+          </a:xfrm>
+          <a:prstGeom prst="roundRect">
+            <a:avLst>
+              <a:gd name="adj" fmla="val 9600"/>
             </a:avLst>
           </a:prstGeom>
           <a:solidFill>
@@ -8361,14 +9442,14 @@
       </p:sp>
       <p:sp>
         <p:nvSpPr>
-          <p:cNvPr id="16" name="Text 14"/>
-          <p:cNvSpPr/>
-          <p:nvPr/>
-        </p:nvSpPr>
-        <p:spPr>
-          <a:xfrm>
-            <a:off x="8074152" y="3666744"/>
-            <a:ext cx="2825496" cy="256032"/>
+          <p:cNvPr id="19" name="Text 17"/>
+          <p:cNvSpPr/>
+          <p:nvPr/>
+        </p:nvSpPr>
+        <p:spPr>
+          <a:xfrm>
+            <a:off x="7799832" y="4645152"/>
+            <a:ext cx="3145536" cy="256032"/>
           </a:xfrm>
           <a:prstGeom prst="rect">
             <a:avLst/>
@@ -8392,7 +9473,7 @@
                 <a:ea typeface="Aptos" pitchFamily="34" charset="-122"/>
                 <a:cs typeface="Aptos" pitchFamily="34" charset="-120"/>
               </a:rPr>
-              <a:t>Use this for</a:t>
+              <a:t>Apply it</a:t>
             </a:r>
             <a:endParaRPr lang="en-US" sz="1300" dirty="0"/>
           </a:p>
@@ -8400,14 +9481,14 @@
       </p:sp>
       <p:sp>
         <p:nvSpPr>
-          <p:cNvPr id="17" name="Text 15"/>
-          <p:cNvSpPr/>
-          <p:nvPr/>
-        </p:nvSpPr>
-        <p:spPr>
-          <a:xfrm>
-            <a:off x="8074152" y="4023360"/>
-            <a:ext cx="2825496" cy="1097280"/>
+          <p:cNvPr id="20" name="Text 18"/>
+          <p:cNvSpPr/>
+          <p:nvPr/>
+        </p:nvSpPr>
+        <p:spPr>
+          <a:xfrm>
+            <a:off x="7799832" y="5001768"/>
+            <a:ext cx="3145536" cy="502920"/>
           </a:xfrm>
           <a:prstGeom prst="rect">
             <a:avLst/>
@@ -8433,7 +9514,7 @@
                 <a:ea typeface="Aptos" pitchFamily="34" charset="-122"/>
                 <a:cs typeface="Aptos" pitchFamily="34" charset="-120"/>
               </a:rPr>
-              <a:t>Connect the concept to public health decisions, safeguards, documentation, or implementation work.</a:t>
+              <a:t>Connect the concept to public health purpose, responsible use, required safeguards, documentation, and the next action a department should take.</a:t>
             </a:r>
             <a:endParaRPr lang="en-US" sz="1550" dirty="0"/>
           </a:p>
@@ -8607,8 +9688,8 @@
         </p:nvSpPr>
         <p:spPr>
           <a:xfrm>
-            <a:off x="9966960" y="6537960"/>
-            <a:ext cx="1645920" cy="201168"/>
+            <a:off x="9646920" y="6537960"/>
+            <a:ext cx="1965960" cy="201168"/>
           </a:xfrm>
           <a:prstGeom prst="rect">
             <a:avLst/>
@@ -8632,7 +9713,7 @@
                 <a:ea typeface="Aptos" pitchFamily="34" charset="-122"/>
                 <a:cs typeface="Aptos" pitchFamily="34" charset="-120"/>
               </a:rPr>
-              <a:t>Â© Paula Soper</a:t>
+              <a:t>Copyright Paula Soper</a:t>
             </a:r>
             <a:endParaRPr lang="en-US" sz="800" dirty="0"/>
           </a:p>
@@ -8727,7 +9808,7 @@
         <p:spPr>
           <a:xfrm>
             <a:off x="868680" y="1508760"/>
-            <a:ext cx="6537960" cy="4160520"/>
+            <a:ext cx="6309360" cy="4160520"/>
           </a:xfrm>
           <a:prstGeom prst="rect">
             <a:avLst/>
@@ -8764,12 +9845,12 @@
         </p:nvSpPr>
         <p:spPr>
           <a:xfrm>
-            <a:off x="7909560" y="1417320"/>
-            <a:ext cx="3154680" cy="1828800"/>
+            <a:off x="7635240" y="1325880"/>
+            <a:ext cx="3474720" cy="1325880"/>
           </a:xfrm>
           <a:prstGeom prst="roundRect">
             <a:avLst>
-              <a:gd name="adj" fmla="val 6000"/>
+              <a:gd name="adj" fmla="val 8276"/>
             </a:avLst>
           </a:prstGeom>
           <a:solidFill>
@@ -8791,8 +9872,8 @@
         </p:nvSpPr>
         <p:spPr>
           <a:xfrm>
-            <a:off x="8074152" y="1563624"/>
-            <a:ext cx="2825496" cy="256032"/>
+            <a:off x="7799832" y="1472184"/>
+            <a:ext cx="3145536" cy="256032"/>
           </a:xfrm>
           <a:prstGeom prst="rect">
             <a:avLst/>
@@ -8816,7 +9897,7 @@
                 <a:ea typeface="Aptos" pitchFamily="34" charset="-122"/>
                 <a:cs typeface="Aptos" pitchFamily="34" charset="-120"/>
               </a:rPr>
-              <a:t>Key idea</a:t>
+              <a:t>Core concept</a:t>
             </a:r>
             <a:endParaRPr lang="en-US" sz="1300" dirty="0"/>
           </a:p>
@@ -8830,8 +9911,8 @@
         </p:nvSpPr>
         <p:spPr>
           <a:xfrm>
-            <a:off x="8074152" y="1920240"/>
-            <a:ext cx="2825496" cy="1188720"/>
+            <a:off x="7799832" y="1828800"/>
+            <a:ext cx="3145536" cy="685800"/>
           </a:xfrm>
           <a:prstGeom prst="rect">
             <a:avLst/>
@@ -8871,12 +9952,153 @@
         </p:nvSpPr>
         <p:spPr>
           <a:xfrm>
-            <a:off x="7909560" y="3520440"/>
-            <a:ext cx="3154680" cy="1737360"/>
+            <a:off x="7635240" y="2788920"/>
+            <a:ext cx="3474720" cy="1536192"/>
           </a:xfrm>
           <a:prstGeom prst="roundRect">
             <a:avLst>
-              <a:gd name="adj" fmla="val 6316"/>
+              <a:gd name="adj" fmla="val 7143"/>
+            </a:avLst>
+          </a:prstGeom>
+          <a:solidFill>
+            <a:srgbClr val="FFFFFF">
+              <a:alpha val="88000"/>
+            </a:srgbClr>
+          </a:solidFill>
+          <a:ln w="12700">
+            <a:solidFill>
+              <a:srgbClr val="D6E8F2"/>
+            </a:solidFill>
+            <a:prstDash val="solid"/>
+          </a:ln>
+        </p:spPr>
+      </p:sp>
+      <p:sp>
+        <p:nvSpPr>
+          <p:cNvPr id="14" name="Shape 12"/>
+          <p:cNvSpPr/>
+          <p:nvPr/>
+        </p:nvSpPr>
+        <p:spPr>
+          <a:xfrm>
+            <a:off x="8074152" y="3291840"/>
+            <a:ext cx="2596896" cy="749808"/>
+          </a:xfrm>
+          <a:prstGeom prst="rect">
+            <a:avLst/>
+          </a:prstGeom>
+          <a:solidFill>
+            <a:srgbClr val="EAF6F8"/>
+          </a:solidFill>
+          <a:ln w="12700">
+            <a:solidFill>
+              <a:srgbClr val="8ABBD8"/>
+            </a:solidFill>
+            <a:prstDash val="solid"/>
+          </a:ln>
+        </p:spPr>
+      </p:sp>
+      <p:sp>
+        <p:nvSpPr>
+          <p:cNvPr id="15" name="Shape 13"/>
+          <p:cNvSpPr/>
+          <p:nvPr/>
+        </p:nvSpPr>
+        <p:spPr>
+          <a:xfrm>
+            <a:off x="8202168" y="3721608"/>
+            <a:ext cx="2340864" cy="0"/>
+          </a:xfrm>
+          <a:prstGeom prst="line">
+            <a:avLst/>
+          </a:prstGeom>
+          <a:noFill/>
+          <a:ln w="19050">
+            <a:solidFill>
+              <a:srgbClr val="0068B7"/>
+            </a:solidFill>
+            <a:prstDash val="solid"/>
+          </a:ln>
+        </p:spPr>
+      </p:sp>
+      <p:sp>
+        <p:nvSpPr>
+          <p:cNvPr id="16" name="Shape 14"/>
+          <p:cNvSpPr/>
+          <p:nvPr/>
+        </p:nvSpPr>
+        <p:spPr>
+          <a:xfrm>
+            <a:off x="9198864" y="4206240"/>
+            <a:ext cx="347472" cy="347472"/>
+          </a:xfrm>
+          <a:prstGeom prst="ellipse">
+            <a:avLst/>
+          </a:prstGeom>
+          <a:solidFill>
+            <a:srgbClr val="2F8A28"/>
+          </a:solidFill>
+          <a:ln w="12700">
+            <a:solidFill>
+              <a:srgbClr val="2F8A28"/>
+            </a:solidFill>
+            <a:prstDash val="solid"/>
+          </a:ln>
+        </p:spPr>
+      </p:sp>
+      <p:sp>
+        <p:nvSpPr>
+          <p:cNvPr id="17" name="Text 15"/>
+          <p:cNvSpPr/>
+          <p:nvPr/>
+        </p:nvSpPr>
+        <p:spPr>
+          <a:xfrm>
+            <a:off x="7909560" y="3977640"/>
+            <a:ext cx="2926080" cy="182880"/>
+          </a:xfrm>
+          <a:prstGeom prst="rect">
+            <a:avLst/>
+          </a:prstGeom>
+          <a:noFill/>
+          <a:ln/>
+        </p:spPr>
+        <p:txBody>
+          <a:bodyPr wrap="square" lIns="0" tIns="0" rIns="0" bIns="0" rtlCol="0" anchor="ctr"/>
+          <a:lstStyle/>
+          <a:p>
+            <a:pPr algn="ctr" indent="0" marL="0">
+              <a:buNone/>
+            </a:pPr>
+            <a:r>
+              <a:rPr lang="en-US" sz="1000" dirty="0">
+                <a:solidFill>
+                  <a:srgbClr val="003A63"/>
+                </a:solidFill>
+                <a:latin typeface="Aptos" pitchFamily="34" charset="0"/>
+                <a:ea typeface="Aptos" pitchFamily="34" charset="-122"/>
+                <a:cs typeface="Aptos" pitchFamily="34" charset="-120"/>
+              </a:rPr>
+              <a:t>Concept to action</a:t>
+            </a:r>
+            <a:endParaRPr lang="en-US" sz="1000" dirty="0"/>
+          </a:p>
+        </p:txBody>
+      </p:sp>
+      <p:sp>
+        <p:nvSpPr>
+          <p:cNvPr id="18" name="Shape 16"/>
+          <p:cNvSpPr/>
+          <p:nvPr/>
+        </p:nvSpPr>
+        <p:spPr>
+          <a:xfrm>
+            <a:off x="7635240" y="4498848"/>
+            <a:ext cx="3474720" cy="1143000"/>
+          </a:xfrm>
+          <a:prstGeom prst="roundRect">
+            <a:avLst>
+              <a:gd name="adj" fmla="val 9600"/>
             </a:avLst>
           </a:prstGeom>
           <a:solidFill>
@@ -8892,14 +10114,14 @@
       </p:sp>
       <p:sp>
         <p:nvSpPr>
-          <p:cNvPr id="14" name="Text 12"/>
-          <p:cNvSpPr/>
-          <p:nvPr/>
-        </p:nvSpPr>
-        <p:spPr>
-          <a:xfrm>
-            <a:off x="8074152" y="3666744"/>
-            <a:ext cx="2825496" cy="256032"/>
+          <p:cNvPr id="19" name="Text 17"/>
+          <p:cNvSpPr/>
+          <p:nvPr/>
+        </p:nvSpPr>
+        <p:spPr>
+          <a:xfrm>
+            <a:off x="7799832" y="4645152"/>
+            <a:ext cx="3145536" cy="256032"/>
           </a:xfrm>
           <a:prstGeom prst="rect">
             <a:avLst/>
@@ -8923,7 +10145,7 @@
                 <a:ea typeface="Aptos" pitchFamily="34" charset="-122"/>
                 <a:cs typeface="Aptos" pitchFamily="34" charset="-120"/>
               </a:rPr>
-              <a:t>Use this for</a:t>
+              <a:t>Apply it</a:t>
             </a:r>
             <a:endParaRPr lang="en-US" sz="1300" dirty="0"/>
           </a:p>
@@ -8931,14 +10153,14 @@
       </p:sp>
       <p:sp>
         <p:nvSpPr>
-          <p:cNvPr id="15" name="Text 13"/>
-          <p:cNvSpPr/>
-          <p:nvPr/>
-        </p:nvSpPr>
-        <p:spPr>
-          <a:xfrm>
-            <a:off x="8074152" y="4023360"/>
-            <a:ext cx="2825496" cy="1097280"/>
+          <p:cNvPr id="20" name="Text 18"/>
+          <p:cNvSpPr/>
+          <p:nvPr/>
+        </p:nvSpPr>
+        <p:spPr>
+          <a:xfrm>
+            <a:off x="7799832" y="5001768"/>
+            <a:ext cx="3145536" cy="502920"/>
           </a:xfrm>
           <a:prstGeom prst="rect">
             <a:avLst/>
@@ -8964,7 +10186,7 @@
                 <a:ea typeface="Aptos" pitchFamily="34" charset="-122"/>
                 <a:cs typeface="Aptos" pitchFamily="34" charset="-120"/>
               </a:rPr>
-              <a:t>Connect the concept to public health decisions, safeguards, documentation, or implementation work.</a:t>
+              <a:t>Connect the concept to public health purpose, responsible use, required safeguards, documentation, and the next action a department should take.</a:t>
             </a:r>
             <a:endParaRPr lang="en-US" sz="1550" dirty="0"/>
           </a:p>
@@ -9138,8 +10360,8 @@
         </p:nvSpPr>
         <p:spPr>
           <a:xfrm>
-            <a:off x="9966960" y="6537960"/>
-            <a:ext cx="1645920" cy="201168"/>
+            <a:off x="9646920" y="6537960"/>
+            <a:ext cx="1965960" cy="201168"/>
           </a:xfrm>
           <a:prstGeom prst="rect">
             <a:avLst/>
@@ -9163,7 +10385,7 @@
                 <a:ea typeface="Aptos" pitchFamily="34" charset="-122"/>
                 <a:cs typeface="Aptos" pitchFamily="34" charset="-120"/>
               </a:rPr>
-              <a:t>Â© Paula Soper</a:t>
+              <a:t>Copyright Paula Soper</a:t>
             </a:r>
             <a:endParaRPr lang="en-US" sz="800" dirty="0"/>
           </a:p>
@@ -9526,46 +10748,7 @@
       </p:sp>
       <p:sp>
         <p:nvSpPr>
-          <p:cNvPr id="15" name="Text 13"/>
-          <p:cNvSpPr/>
-          <p:nvPr/>
-        </p:nvSpPr>
-        <p:spPr>
-          <a:xfrm>
-            <a:off x="8695944" y="3941064"/>
-            <a:ext cx="201168" cy="256032"/>
-          </a:xfrm>
-          <a:prstGeom prst="rect">
-            <a:avLst/>
-          </a:prstGeom>
-          <a:noFill/>
-          <a:ln/>
-        </p:spPr>
-        <p:txBody>
-          <a:bodyPr wrap="square" lIns="0" tIns="0" rIns="0" bIns="0" rtlCol="0" anchor="ctr"/>
-          <a:lstStyle/>
-          <a:p>
-            <a:pPr algn="ctr" indent="0" marL="0">
-              <a:buNone/>
-            </a:pPr>
-            <a:r>
-              <a:rPr lang="en-US" sz="1800" b="1" dirty="0">
-                <a:solidFill>
-                  <a:srgbClr val="0068B7"/>
-                </a:solidFill>
-                <a:latin typeface="Aptos" pitchFamily="34" charset="0"/>
-                <a:ea typeface="Aptos" pitchFamily="34" charset="-122"/>
-                <a:cs typeface="Aptos" pitchFamily="34" charset="-120"/>
-              </a:rPr>
-              <a:t>â†’</a:t>
-            </a:r>
-            <a:endParaRPr lang="en-US" sz="1800" dirty="0"/>
-          </a:p>
-        </p:txBody>
-      </p:sp>
-      <p:sp>
-        <p:nvSpPr>
-          <p:cNvPr id="16" name="Shape 14"/>
+          <p:cNvPr id="15" name="Shape 13"/>
           <p:cNvSpPr/>
           <p:nvPr/>
         </p:nvSpPr>
@@ -9592,7 +10775,7 @@
       </p:sp>
       <p:sp>
         <p:nvSpPr>
-          <p:cNvPr id="17" name="Text 15"/>
+          <p:cNvPr id="16" name="Text 14"/>
           <p:cNvSpPr/>
           <p:nvPr/>
         </p:nvSpPr>
@@ -9633,46 +10816,7 @@
       </p:sp>
       <p:sp>
         <p:nvSpPr>
-          <p:cNvPr id="18" name="Text 16"/>
-          <p:cNvSpPr/>
-          <p:nvPr/>
-        </p:nvSpPr>
-        <p:spPr>
-          <a:xfrm>
-            <a:off x="9985248" y="3941064"/>
-            <a:ext cx="201168" cy="256032"/>
-          </a:xfrm>
-          <a:prstGeom prst="rect">
-            <a:avLst/>
-          </a:prstGeom>
-          <a:noFill/>
-          <a:ln/>
-        </p:spPr>
-        <p:txBody>
-          <a:bodyPr wrap="square" lIns="0" tIns="0" rIns="0" bIns="0" rtlCol="0" anchor="ctr"/>
-          <a:lstStyle/>
-          <a:p>
-            <a:pPr algn="ctr" indent="0" marL="0">
-              <a:buNone/>
-            </a:pPr>
-            <a:r>
-              <a:rPr lang="en-US" sz="1800" b="1" dirty="0">
-                <a:solidFill>
-                  <a:srgbClr val="0068B7"/>
-                </a:solidFill>
-                <a:latin typeface="Aptos" pitchFamily="34" charset="0"/>
-                <a:ea typeface="Aptos" pitchFamily="34" charset="-122"/>
-                <a:cs typeface="Aptos" pitchFamily="34" charset="-120"/>
-              </a:rPr>
-              <a:t>â†’</a:t>
-            </a:r>
-            <a:endParaRPr lang="en-US" sz="1800" dirty="0"/>
-          </a:p>
-        </p:txBody>
-      </p:sp>
-      <p:sp>
-        <p:nvSpPr>
-          <p:cNvPr id="19" name="Shape 17"/>
+          <p:cNvPr id="17" name="Shape 15"/>
           <p:cNvSpPr/>
           <p:nvPr/>
         </p:nvSpPr>
@@ -9699,7 +10843,7 @@
       </p:sp>
       <p:sp>
         <p:nvSpPr>
-          <p:cNvPr id="20" name="Text 18"/>
+          <p:cNvPr id="18" name="Text 16"/>
           <p:cNvSpPr/>
           <p:nvPr/>
         </p:nvSpPr>
@@ -9906,8 +11050,8 @@
         </p:nvSpPr>
         <p:spPr>
           <a:xfrm>
-            <a:off x="9966960" y="6537960"/>
-            <a:ext cx="1645920" cy="201168"/>
+            <a:off x="9646920" y="6537960"/>
+            <a:ext cx="1965960" cy="201168"/>
           </a:xfrm>
           <a:prstGeom prst="rect">
             <a:avLst/>
@@ -9931,7 +11075,7 @@
                 <a:ea typeface="Aptos" pitchFamily="34" charset="-122"/>
                 <a:cs typeface="Aptos" pitchFamily="34" charset="-120"/>
               </a:rPr>
-              <a:t>Â© Paula Soper</a:t>
+              <a:t>Copyright Paula Soper</a:t>
             </a:r>
             <a:endParaRPr lang="en-US" sz="800" dirty="0"/>
           </a:p>
@@ -9978,77 +11122,13 @@
       </p:sp>
       <p:sp>
         <p:nvSpPr>
-          <p:cNvPr id="8" name="Shape 6"/>
+          <p:cNvPr id="8" name="Text 6"/>
           <p:cNvSpPr/>
           <p:nvPr/>
         </p:nvSpPr>
         <p:spPr>
           <a:xfrm>
             <a:off x="640080" y="658368"/>
-            <a:ext cx="420624" cy="420624"/>
-          </a:xfrm>
-          <a:prstGeom prst="ellipse">
-            <a:avLst/>
-          </a:prstGeom>
-          <a:solidFill>
-            <a:srgbClr val="0068B7"/>
-          </a:solidFill>
-          <a:ln w="12700">
-            <a:solidFill>
-              <a:srgbClr val="0068B7"/>
-            </a:solidFill>
-            <a:prstDash val="solid"/>
-          </a:ln>
-        </p:spPr>
-      </p:sp>
-      <p:sp>
-        <p:nvSpPr>
-          <p:cNvPr id="9" name="Text 7"/>
-          <p:cNvSpPr/>
-          <p:nvPr/>
-        </p:nvSpPr>
-        <p:spPr>
-          <a:xfrm>
-            <a:off x="640080" y="731520"/>
-            <a:ext cx="420624" cy="164592"/>
-          </a:xfrm>
-          <a:prstGeom prst="rect">
-            <a:avLst/>
-          </a:prstGeom>
-          <a:noFill/>
-          <a:ln/>
-        </p:spPr>
-        <p:txBody>
-          <a:bodyPr wrap="square" lIns="0" tIns="0" rIns="0" bIns="0" rtlCol="0" anchor="ctr"/>
-          <a:lstStyle/>
-          <a:p>
-            <a:pPr algn="ctr" indent="0" marL="0">
-              <a:buNone/>
-            </a:pPr>
-            <a:r>
-              <a:rPr lang="en-US" sz="1100" b="1" dirty="0">
-                <a:solidFill>
-                  <a:srgbClr val="FFFFFF"/>
-                </a:solidFill>
-                <a:latin typeface="Aptos" pitchFamily="34" charset="0"/>
-                <a:ea typeface="Aptos" pitchFamily="34" charset="-122"/>
-                <a:cs typeface="Aptos" pitchFamily="34" charset="-120"/>
-              </a:rPr>
-              <a:t>11</a:t>
-            </a:r>
-            <a:endParaRPr lang="en-US" sz="1100" dirty="0"/>
-          </a:p>
-        </p:txBody>
-      </p:sp>
-      <p:sp>
-        <p:nvSpPr>
-          <p:cNvPr id="10" name="Text 8"/>
-          <p:cNvSpPr/>
-          <p:nvPr/>
-        </p:nvSpPr>
-        <p:spPr>
-          <a:xfrm>
-            <a:off x="640080" y="621792"/>
             <a:ext cx="10881360" cy="713232"/>
           </a:xfrm>
           <a:prstGeom prst="rect">
@@ -10083,14 +11163,14 @@
       </p:sp>
       <p:sp>
         <p:nvSpPr>
-          <p:cNvPr id="11" name="Text 9"/>
+          <p:cNvPr id="9" name="Text 7"/>
           <p:cNvSpPr/>
           <p:nvPr/>
         </p:nvSpPr>
         <p:spPr>
           <a:xfrm>
             <a:off x="868680" y="1508760"/>
-            <a:ext cx="6537960" cy="4160520"/>
+            <a:ext cx="6309360" cy="4160520"/>
           </a:xfrm>
           <a:prstGeom prst="rect">
             <a:avLst/>
@@ -10149,18 +11229,18 @@
       </p:sp>
       <p:sp>
         <p:nvSpPr>
-          <p:cNvPr id="12" name="Shape 10"/>
-          <p:cNvSpPr/>
-          <p:nvPr/>
-        </p:nvSpPr>
-        <p:spPr>
-          <a:xfrm>
-            <a:off x="7909560" y="1417320"/>
-            <a:ext cx="3154680" cy="1828800"/>
+          <p:cNvPr id="10" name="Shape 8"/>
+          <p:cNvSpPr/>
+          <p:nvPr/>
+        </p:nvSpPr>
+        <p:spPr>
+          <a:xfrm>
+            <a:off x="7635240" y="1325880"/>
+            <a:ext cx="3474720" cy="1325880"/>
           </a:xfrm>
           <a:prstGeom prst="roundRect">
             <a:avLst>
-              <a:gd name="adj" fmla="val 6000"/>
+              <a:gd name="adj" fmla="val 8276"/>
             </a:avLst>
           </a:prstGeom>
           <a:solidFill>
@@ -10176,14 +11256,14 @@
       </p:sp>
       <p:sp>
         <p:nvSpPr>
-          <p:cNvPr id="13" name="Text 11"/>
-          <p:cNvSpPr/>
-          <p:nvPr/>
-        </p:nvSpPr>
-        <p:spPr>
-          <a:xfrm>
-            <a:off x="8074152" y="1563624"/>
-            <a:ext cx="2825496" cy="256032"/>
+          <p:cNvPr id="11" name="Text 9"/>
+          <p:cNvSpPr/>
+          <p:nvPr/>
+        </p:nvSpPr>
+        <p:spPr>
+          <a:xfrm>
+            <a:off x="7799832" y="1472184"/>
+            <a:ext cx="3145536" cy="256032"/>
           </a:xfrm>
           <a:prstGeom prst="rect">
             <a:avLst/>
@@ -10207,7 +11287,7 @@
                 <a:ea typeface="Aptos" pitchFamily="34" charset="-122"/>
                 <a:cs typeface="Aptos" pitchFamily="34" charset="-120"/>
               </a:rPr>
-              <a:t>Key idea</a:t>
+              <a:t>Practice focus</a:t>
             </a:r>
             <a:endParaRPr lang="en-US" sz="1300" dirty="0"/>
           </a:p>
@@ -10215,14 +11295,14 @@
       </p:sp>
       <p:sp>
         <p:nvSpPr>
-          <p:cNvPr id="14" name="Text 12"/>
-          <p:cNvSpPr/>
-          <p:nvPr/>
-        </p:nvSpPr>
-        <p:spPr>
-          <a:xfrm>
-            <a:off x="8074152" y="1920240"/>
-            <a:ext cx="2825496" cy="1188720"/>
+          <p:cNvPr id="12" name="Text 10"/>
+          <p:cNvSpPr/>
+          <p:nvPr/>
+        </p:nvSpPr>
+        <p:spPr>
+          <a:xfrm>
+            <a:off x="7799832" y="1828800"/>
+            <a:ext cx="3145536" cy="685800"/>
           </a:xfrm>
           <a:prstGeom prst="rect">
             <a:avLst/>
@@ -10256,18 +11336,159 @@
       </p:sp>
       <p:sp>
         <p:nvSpPr>
-          <p:cNvPr id="15" name="Shape 13"/>
-          <p:cNvSpPr/>
-          <p:nvPr/>
-        </p:nvSpPr>
-        <p:spPr>
-          <a:xfrm>
-            <a:off x="7909560" y="3520440"/>
-            <a:ext cx="3154680" cy="1737360"/>
+          <p:cNvPr id="13" name="Shape 11"/>
+          <p:cNvSpPr/>
+          <p:nvPr/>
+        </p:nvSpPr>
+        <p:spPr>
+          <a:xfrm>
+            <a:off x="7635240" y="2788920"/>
+            <a:ext cx="3474720" cy="1536192"/>
           </a:xfrm>
           <a:prstGeom prst="roundRect">
             <a:avLst>
-              <a:gd name="adj" fmla="val 6316"/>
+              <a:gd name="adj" fmla="val 7143"/>
+            </a:avLst>
+          </a:prstGeom>
+          <a:solidFill>
+            <a:srgbClr val="FFFFFF">
+              <a:alpha val="88000"/>
+            </a:srgbClr>
+          </a:solidFill>
+          <a:ln w="12700">
+            <a:solidFill>
+              <a:srgbClr val="D6E8F2"/>
+            </a:solidFill>
+            <a:prstDash val="solid"/>
+          </a:ln>
+        </p:spPr>
+      </p:sp>
+      <p:sp>
+        <p:nvSpPr>
+          <p:cNvPr id="14" name="Shape 12"/>
+          <p:cNvSpPr/>
+          <p:nvPr/>
+        </p:nvSpPr>
+        <p:spPr>
+          <a:xfrm>
+            <a:off x="8074152" y="3291840"/>
+            <a:ext cx="2596896" cy="749808"/>
+          </a:xfrm>
+          <a:prstGeom prst="rect">
+            <a:avLst/>
+          </a:prstGeom>
+          <a:solidFill>
+            <a:srgbClr val="EAF6F8"/>
+          </a:solidFill>
+          <a:ln w="12700">
+            <a:solidFill>
+              <a:srgbClr val="8ABBD8"/>
+            </a:solidFill>
+            <a:prstDash val="solid"/>
+          </a:ln>
+        </p:spPr>
+      </p:sp>
+      <p:sp>
+        <p:nvSpPr>
+          <p:cNvPr id="15" name="Shape 13"/>
+          <p:cNvSpPr/>
+          <p:nvPr/>
+        </p:nvSpPr>
+        <p:spPr>
+          <a:xfrm>
+            <a:off x="8202168" y="3721608"/>
+            <a:ext cx="2340864" cy="0"/>
+          </a:xfrm>
+          <a:prstGeom prst="line">
+            <a:avLst/>
+          </a:prstGeom>
+          <a:noFill/>
+          <a:ln w="19050">
+            <a:solidFill>
+              <a:srgbClr val="0068B7"/>
+            </a:solidFill>
+            <a:prstDash val="solid"/>
+          </a:ln>
+        </p:spPr>
+      </p:sp>
+      <p:sp>
+        <p:nvSpPr>
+          <p:cNvPr id="16" name="Shape 14"/>
+          <p:cNvSpPr/>
+          <p:nvPr/>
+        </p:nvSpPr>
+        <p:spPr>
+          <a:xfrm>
+            <a:off x="9198864" y="4206240"/>
+            <a:ext cx="347472" cy="347472"/>
+          </a:xfrm>
+          <a:prstGeom prst="ellipse">
+            <a:avLst/>
+          </a:prstGeom>
+          <a:solidFill>
+            <a:srgbClr val="2F8A28"/>
+          </a:solidFill>
+          <a:ln w="12700">
+            <a:solidFill>
+              <a:srgbClr val="2F8A28"/>
+            </a:solidFill>
+            <a:prstDash val="solid"/>
+          </a:ln>
+        </p:spPr>
+      </p:sp>
+      <p:sp>
+        <p:nvSpPr>
+          <p:cNvPr id="17" name="Text 15"/>
+          <p:cNvSpPr/>
+          <p:nvPr/>
+        </p:nvSpPr>
+        <p:spPr>
+          <a:xfrm>
+            <a:off x="7909560" y="3977640"/>
+            <a:ext cx="2926080" cy="182880"/>
+          </a:xfrm>
+          <a:prstGeom prst="rect">
+            <a:avLst/>
+          </a:prstGeom>
+          <a:noFill/>
+          <a:ln/>
+        </p:spPr>
+        <p:txBody>
+          <a:bodyPr wrap="square" lIns="0" tIns="0" rIns="0" bIns="0" rtlCol="0" anchor="ctr"/>
+          <a:lstStyle/>
+          <a:p>
+            <a:pPr algn="ctr" indent="0" marL="0">
+              <a:buNone/>
+            </a:pPr>
+            <a:r>
+              <a:rPr lang="en-US" sz="1000" dirty="0">
+                <a:solidFill>
+                  <a:srgbClr val="003A63"/>
+                </a:solidFill>
+                <a:latin typeface="Aptos" pitchFamily="34" charset="0"/>
+                <a:ea typeface="Aptos" pitchFamily="34" charset="-122"/>
+                <a:cs typeface="Aptos" pitchFamily="34" charset="-120"/>
+              </a:rPr>
+              <a:t>Concept to action</a:t>
+            </a:r>
+            <a:endParaRPr lang="en-US" sz="1000" dirty="0"/>
+          </a:p>
+        </p:txBody>
+      </p:sp>
+      <p:sp>
+        <p:nvSpPr>
+          <p:cNvPr id="18" name="Shape 16"/>
+          <p:cNvSpPr/>
+          <p:nvPr/>
+        </p:nvSpPr>
+        <p:spPr>
+          <a:xfrm>
+            <a:off x="7635240" y="4498848"/>
+            <a:ext cx="3474720" cy="1143000"/>
+          </a:xfrm>
+          <a:prstGeom prst="roundRect">
+            <a:avLst>
+              <a:gd name="adj" fmla="val 9600"/>
             </a:avLst>
           </a:prstGeom>
           <a:solidFill>
@@ -10283,14 +11504,14 @@
       </p:sp>
       <p:sp>
         <p:nvSpPr>
-          <p:cNvPr id="16" name="Text 14"/>
-          <p:cNvSpPr/>
-          <p:nvPr/>
-        </p:nvSpPr>
-        <p:spPr>
-          <a:xfrm>
-            <a:off x="8074152" y="3666744"/>
-            <a:ext cx="2825496" cy="256032"/>
+          <p:cNvPr id="19" name="Text 17"/>
+          <p:cNvSpPr/>
+          <p:nvPr/>
+        </p:nvSpPr>
+        <p:spPr>
+          <a:xfrm>
+            <a:off x="7799832" y="4645152"/>
+            <a:ext cx="3145536" cy="256032"/>
           </a:xfrm>
           <a:prstGeom prst="rect">
             <a:avLst/>
@@ -10314,7 +11535,7 @@
                 <a:ea typeface="Aptos" pitchFamily="34" charset="-122"/>
                 <a:cs typeface="Aptos" pitchFamily="34" charset="-120"/>
               </a:rPr>
-              <a:t>Use this for</a:t>
+              <a:t>What to produce</a:t>
             </a:r>
             <a:endParaRPr lang="en-US" sz="1300" dirty="0"/>
           </a:p>
@@ -10322,14 +11543,14 @@
       </p:sp>
       <p:sp>
         <p:nvSpPr>
-          <p:cNvPr id="17" name="Text 15"/>
-          <p:cNvSpPr/>
-          <p:nvPr/>
-        </p:nvSpPr>
-        <p:spPr>
-          <a:xfrm>
-            <a:off x="8074152" y="4023360"/>
-            <a:ext cx="2825496" cy="1097280"/>
+          <p:cNvPr id="20" name="Text 18"/>
+          <p:cNvSpPr/>
+          <p:nvPr/>
+        </p:nvSpPr>
+        <p:spPr>
+          <a:xfrm>
+            <a:off x="7799832" y="5001768"/>
+            <a:ext cx="3145536" cy="502920"/>
           </a:xfrm>
           <a:prstGeom prst="rect">
             <a:avLst/>
@@ -10355,7 +11576,7 @@
                 <a:ea typeface="Aptos" pitchFamily="34" charset="-122"/>
                 <a:cs typeface="Aptos" pitchFamily="34" charset="-120"/>
               </a:rPr>
-              <a:t>Connect the concept to public health decisions, safeguards, documentation, or implementation work.</a:t>
+              <a:t>Use the assignment to test whether you can explain the concept, apply it to a realistic public health situation, and identify what would need review before the work moves forward.</a:t>
             </a:r>
             <a:endParaRPr lang="en-US" sz="1550" dirty="0"/>
           </a:p>
@@ -10529,8 +11750,8 @@
         </p:nvSpPr>
         <p:spPr>
           <a:xfrm>
-            <a:off x="9966960" y="6537960"/>
-            <a:ext cx="1645920" cy="201168"/>
+            <a:off x="9646920" y="6537960"/>
+            <a:ext cx="1965960" cy="201168"/>
           </a:xfrm>
           <a:prstGeom prst="rect">
             <a:avLst/>
@@ -10554,7 +11775,7 @@
                 <a:ea typeface="Aptos" pitchFamily="34" charset="-122"/>
                 <a:cs typeface="Aptos" pitchFamily="34" charset="-120"/>
               </a:rPr>
-              <a:t>Â© Paula Soper</a:t>
+              <a:t>Copyright Paula Soper</a:t>
             </a:r>
             <a:endParaRPr lang="en-US" sz="800" dirty="0"/>
           </a:p>
@@ -10601,77 +11822,13 @@
       </p:sp>
       <p:sp>
         <p:nvSpPr>
-          <p:cNvPr id="8" name="Shape 6"/>
+          <p:cNvPr id="8" name="Text 6"/>
           <p:cNvSpPr/>
           <p:nvPr/>
         </p:nvSpPr>
         <p:spPr>
           <a:xfrm>
             <a:off x="640080" y="658368"/>
-            <a:ext cx="420624" cy="420624"/>
-          </a:xfrm>
-          <a:prstGeom prst="ellipse">
-            <a:avLst/>
-          </a:prstGeom>
-          <a:solidFill>
-            <a:srgbClr val="0068B7"/>
-          </a:solidFill>
-          <a:ln w="12700">
-            <a:solidFill>
-              <a:srgbClr val="0068B7"/>
-            </a:solidFill>
-            <a:prstDash val="solid"/>
-          </a:ln>
-        </p:spPr>
-      </p:sp>
-      <p:sp>
-        <p:nvSpPr>
-          <p:cNvPr id="9" name="Text 7"/>
-          <p:cNvSpPr/>
-          <p:nvPr/>
-        </p:nvSpPr>
-        <p:spPr>
-          <a:xfrm>
-            <a:off x="640080" y="731520"/>
-            <a:ext cx="420624" cy="164592"/>
-          </a:xfrm>
-          <a:prstGeom prst="rect">
-            <a:avLst/>
-          </a:prstGeom>
-          <a:noFill/>
-          <a:ln/>
-        </p:spPr>
-        <p:txBody>
-          <a:bodyPr wrap="square" lIns="0" tIns="0" rIns="0" bIns="0" rtlCol="0" anchor="ctr"/>
-          <a:lstStyle/>
-          <a:p>
-            <a:pPr algn="ctr" indent="0" marL="0">
-              <a:buNone/>
-            </a:pPr>
-            <a:r>
-              <a:rPr lang="en-US" sz="1100" b="1" dirty="0">
-                <a:solidFill>
-                  <a:srgbClr val="FFFFFF"/>
-                </a:solidFill>
-                <a:latin typeface="Aptos" pitchFamily="34" charset="0"/>
-                <a:ea typeface="Aptos" pitchFamily="34" charset="-122"/>
-                <a:cs typeface="Aptos" pitchFamily="34" charset="-120"/>
-              </a:rPr>
-              <a:t>12</a:t>
-            </a:r>
-            <a:endParaRPr lang="en-US" sz="1100" dirty="0"/>
-          </a:p>
-        </p:txBody>
-      </p:sp>
-      <p:sp>
-        <p:nvSpPr>
-          <p:cNvPr id="10" name="Text 8"/>
-          <p:cNvSpPr/>
-          <p:nvPr/>
-        </p:nvSpPr>
-        <p:spPr>
-          <a:xfrm>
-            <a:off x="640080" y="621792"/>
             <a:ext cx="10881360" cy="713232"/>
           </a:xfrm>
           <a:prstGeom prst="rect">
@@ -10706,14 +11863,14 @@
       </p:sp>
       <p:sp>
         <p:nvSpPr>
-          <p:cNvPr id="11" name="Text 9"/>
+          <p:cNvPr id="9" name="Text 7"/>
           <p:cNvSpPr/>
           <p:nvPr/>
         </p:nvSpPr>
         <p:spPr>
           <a:xfrm>
             <a:off x="868680" y="1508760"/>
-            <a:ext cx="6537960" cy="4160520"/>
+            <a:ext cx="6309360" cy="4160520"/>
           </a:xfrm>
           <a:prstGeom prst="rect">
             <a:avLst/>
@@ -10772,18 +11929,18 @@
       </p:sp>
       <p:sp>
         <p:nvSpPr>
-          <p:cNvPr id="12" name="Shape 10"/>
-          <p:cNvSpPr/>
-          <p:nvPr/>
-        </p:nvSpPr>
-        <p:spPr>
-          <a:xfrm>
-            <a:off x="7909560" y="1417320"/>
-            <a:ext cx="3154680" cy="1828800"/>
+          <p:cNvPr id="10" name="Shape 8"/>
+          <p:cNvSpPr/>
+          <p:nvPr/>
+        </p:nvSpPr>
+        <p:spPr>
+          <a:xfrm>
+            <a:off x="7635240" y="1325880"/>
+            <a:ext cx="3474720" cy="1325880"/>
           </a:xfrm>
           <a:prstGeom prst="roundRect">
             <a:avLst>
-              <a:gd name="adj" fmla="val 6000"/>
+              <a:gd name="adj" fmla="val 8276"/>
             </a:avLst>
           </a:prstGeom>
           <a:solidFill>
@@ -10799,14 +11956,14 @@
       </p:sp>
       <p:sp>
         <p:nvSpPr>
-          <p:cNvPr id="13" name="Text 11"/>
-          <p:cNvSpPr/>
-          <p:nvPr/>
-        </p:nvSpPr>
-        <p:spPr>
-          <a:xfrm>
-            <a:off x="8074152" y="1563624"/>
-            <a:ext cx="2825496" cy="256032"/>
+          <p:cNvPr id="11" name="Text 9"/>
+          <p:cNvSpPr/>
+          <p:nvPr/>
+        </p:nvSpPr>
+        <p:spPr>
+          <a:xfrm>
+            <a:off x="7799832" y="1472184"/>
+            <a:ext cx="3145536" cy="256032"/>
           </a:xfrm>
           <a:prstGeom prst="rect">
             <a:avLst/>
@@ -10830,7 +11987,7 @@
                 <a:ea typeface="Aptos" pitchFamily="34" charset="-122"/>
                 <a:cs typeface="Aptos" pitchFamily="34" charset="-120"/>
               </a:rPr>
-              <a:t>Key idea</a:t>
+              <a:t>Practice focus</a:t>
             </a:r>
             <a:endParaRPr lang="en-US" sz="1300" dirty="0"/>
           </a:p>
@@ -10838,14 +11995,14 @@
       </p:sp>
       <p:sp>
         <p:nvSpPr>
-          <p:cNvPr id="14" name="Text 12"/>
-          <p:cNvSpPr/>
-          <p:nvPr/>
-        </p:nvSpPr>
-        <p:spPr>
-          <a:xfrm>
-            <a:off x="8074152" y="1920240"/>
-            <a:ext cx="2825496" cy="1188720"/>
+          <p:cNvPr id="12" name="Text 10"/>
+          <p:cNvSpPr/>
+          <p:nvPr/>
+        </p:nvSpPr>
+        <p:spPr>
+          <a:xfrm>
+            <a:off x="7799832" y="1828800"/>
+            <a:ext cx="3145536" cy="685800"/>
           </a:xfrm>
           <a:prstGeom prst="rect">
             <a:avLst/>
@@ -10879,18 +12036,159 @@
       </p:sp>
       <p:sp>
         <p:nvSpPr>
-          <p:cNvPr id="15" name="Shape 13"/>
-          <p:cNvSpPr/>
-          <p:nvPr/>
-        </p:nvSpPr>
-        <p:spPr>
-          <a:xfrm>
-            <a:off x="7909560" y="3520440"/>
-            <a:ext cx="3154680" cy="1737360"/>
+          <p:cNvPr id="13" name="Shape 11"/>
+          <p:cNvSpPr/>
+          <p:nvPr/>
+        </p:nvSpPr>
+        <p:spPr>
+          <a:xfrm>
+            <a:off x="7635240" y="2788920"/>
+            <a:ext cx="3474720" cy="1536192"/>
           </a:xfrm>
           <a:prstGeom prst="roundRect">
             <a:avLst>
-              <a:gd name="adj" fmla="val 6316"/>
+              <a:gd name="adj" fmla="val 7143"/>
+            </a:avLst>
+          </a:prstGeom>
+          <a:solidFill>
+            <a:srgbClr val="FFFFFF">
+              <a:alpha val="88000"/>
+            </a:srgbClr>
+          </a:solidFill>
+          <a:ln w="12700">
+            <a:solidFill>
+              <a:srgbClr val="D6E8F2"/>
+            </a:solidFill>
+            <a:prstDash val="solid"/>
+          </a:ln>
+        </p:spPr>
+      </p:sp>
+      <p:sp>
+        <p:nvSpPr>
+          <p:cNvPr id="14" name="Shape 12"/>
+          <p:cNvSpPr/>
+          <p:nvPr/>
+        </p:nvSpPr>
+        <p:spPr>
+          <a:xfrm>
+            <a:off x="8074152" y="3291840"/>
+            <a:ext cx="2596896" cy="749808"/>
+          </a:xfrm>
+          <a:prstGeom prst="rect">
+            <a:avLst/>
+          </a:prstGeom>
+          <a:solidFill>
+            <a:srgbClr val="EAF6F8"/>
+          </a:solidFill>
+          <a:ln w="12700">
+            <a:solidFill>
+              <a:srgbClr val="8ABBD8"/>
+            </a:solidFill>
+            <a:prstDash val="solid"/>
+          </a:ln>
+        </p:spPr>
+      </p:sp>
+      <p:sp>
+        <p:nvSpPr>
+          <p:cNvPr id="15" name="Shape 13"/>
+          <p:cNvSpPr/>
+          <p:nvPr/>
+        </p:nvSpPr>
+        <p:spPr>
+          <a:xfrm>
+            <a:off x="8202168" y="3721608"/>
+            <a:ext cx="2340864" cy="0"/>
+          </a:xfrm>
+          <a:prstGeom prst="line">
+            <a:avLst/>
+          </a:prstGeom>
+          <a:noFill/>
+          <a:ln w="19050">
+            <a:solidFill>
+              <a:srgbClr val="0068B7"/>
+            </a:solidFill>
+            <a:prstDash val="solid"/>
+          </a:ln>
+        </p:spPr>
+      </p:sp>
+      <p:sp>
+        <p:nvSpPr>
+          <p:cNvPr id="16" name="Shape 14"/>
+          <p:cNvSpPr/>
+          <p:nvPr/>
+        </p:nvSpPr>
+        <p:spPr>
+          <a:xfrm>
+            <a:off x="9198864" y="4206240"/>
+            <a:ext cx="347472" cy="347472"/>
+          </a:xfrm>
+          <a:prstGeom prst="ellipse">
+            <a:avLst/>
+          </a:prstGeom>
+          <a:solidFill>
+            <a:srgbClr val="2F8A28"/>
+          </a:solidFill>
+          <a:ln w="12700">
+            <a:solidFill>
+              <a:srgbClr val="2F8A28"/>
+            </a:solidFill>
+            <a:prstDash val="solid"/>
+          </a:ln>
+        </p:spPr>
+      </p:sp>
+      <p:sp>
+        <p:nvSpPr>
+          <p:cNvPr id="17" name="Text 15"/>
+          <p:cNvSpPr/>
+          <p:nvPr/>
+        </p:nvSpPr>
+        <p:spPr>
+          <a:xfrm>
+            <a:off x="7909560" y="3977640"/>
+            <a:ext cx="2926080" cy="182880"/>
+          </a:xfrm>
+          <a:prstGeom prst="rect">
+            <a:avLst/>
+          </a:prstGeom>
+          <a:noFill/>
+          <a:ln/>
+        </p:spPr>
+        <p:txBody>
+          <a:bodyPr wrap="square" lIns="0" tIns="0" rIns="0" bIns="0" rtlCol="0" anchor="ctr"/>
+          <a:lstStyle/>
+          <a:p>
+            <a:pPr algn="ctr" indent="0" marL="0">
+              <a:buNone/>
+            </a:pPr>
+            <a:r>
+              <a:rPr lang="en-US" sz="1000" dirty="0">
+                <a:solidFill>
+                  <a:srgbClr val="003A63"/>
+                </a:solidFill>
+                <a:latin typeface="Aptos" pitchFamily="34" charset="0"/>
+                <a:ea typeface="Aptos" pitchFamily="34" charset="-122"/>
+                <a:cs typeface="Aptos" pitchFamily="34" charset="-120"/>
+              </a:rPr>
+              <a:t>Concept to action</a:t>
+            </a:r>
+            <a:endParaRPr lang="en-US" sz="1000" dirty="0"/>
+          </a:p>
+        </p:txBody>
+      </p:sp>
+      <p:sp>
+        <p:nvSpPr>
+          <p:cNvPr id="18" name="Shape 16"/>
+          <p:cNvSpPr/>
+          <p:nvPr/>
+        </p:nvSpPr>
+        <p:spPr>
+          <a:xfrm>
+            <a:off x="7635240" y="4498848"/>
+            <a:ext cx="3474720" cy="1143000"/>
+          </a:xfrm>
+          <a:prstGeom prst="roundRect">
+            <a:avLst>
+              <a:gd name="adj" fmla="val 9600"/>
             </a:avLst>
           </a:prstGeom>
           <a:solidFill>
@@ -10906,14 +12204,14 @@
       </p:sp>
       <p:sp>
         <p:nvSpPr>
-          <p:cNvPr id="16" name="Text 14"/>
-          <p:cNvSpPr/>
-          <p:nvPr/>
-        </p:nvSpPr>
-        <p:spPr>
-          <a:xfrm>
-            <a:off x="8074152" y="3666744"/>
-            <a:ext cx="2825496" cy="256032"/>
+          <p:cNvPr id="19" name="Text 17"/>
+          <p:cNvSpPr/>
+          <p:nvPr/>
+        </p:nvSpPr>
+        <p:spPr>
+          <a:xfrm>
+            <a:off x="7799832" y="4645152"/>
+            <a:ext cx="3145536" cy="256032"/>
           </a:xfrm>
           <a:prstGeom prst="rect">
             <a:avLst/>
@@ -10937,7 +12235,7 @@
                 <a:ea typeface="Aptos" pitchFamily="34" charset="-122"/>
                 <a:cs typeface="Aptos" pitchFamily="34" charset="-120"/>
               </a:rPr>
-              <a:t>Use this for</a:t>
+              <a:t>What to produce</a:t>
             </a:r>
             <a:endParaRPr lang="en-US" sz="1300" dirty="0"/>
           </a:p>
@@ -10945,14 +12243,14 @@
       </p:sp>
       <p:sp>
         <p:nvSpPr>
-          <p:cNvPr id="17" name="Text 15"/>
-          <p:cNvSpPr/>
-          <p:nvPr/>
-        </p:nvSpPr>
-        <p:spPr>
-          <a:xfrm>
-            <a:off x="8074152" y="4023360"/>
-            <a:ext cx="2825496" cy="1097280"/>
+          <p:cNvPr id="20" name="Text 18"/>
+          <p:cNvSpPr/>
+          <p:nvPr/>
+        </p:nvSpPr>
+        <p:spPr>
+          <a:xfrm>
+            <a:off x="7799832" y="5001768"/>
+            <a:ext cx="3145536" cy="502920"/>
           </a:xfrm>
           <a:prstGeom prst="rect">
             <a:avLst/>
@@ -10978,7 +12276,7 @@
                 <a:ea typeface="Aptos" pitchFamily="34" charset="-122"/>
                 <a:cs typeface="Aptos" pitchFamily="34" charset="-120"/>
               </a:rPr>
-              <a:t>Connect the concept to public health decisions, safeguards, documentation, or implementation work.</a:t>
+              <a:t>Use the assignment to test whether you can explain the concept, apply it to a realistic public health situation, and identify what would need review before the work moves forward.</a:t>
             </a:r>
             <a:endParaRPr lang="en-US" sz="1550" dirty="0"/>
           </a:p>
@@ -11152,8 +12450,8 @@
         </p:nvSpPr>
         <p:spPr>
           <a:xfrm>
-            <a:off x="9966960" y="6537960"/>
-            <a:ext cx="1645920" cy="201168"/>
+            <a:off x="9646920" y="6537960"/>
+            <a:ext cx="1965960" cy="201168"/>
           </a:xfrm>
           <a:prstGeom prst="rect">
             <a:avLst/>
@@ -11177,7 +12475,7 @@
                 <a:ea typeface="Aptos" pitchFamily="34" charset="-122"/>
                 <a:cs typeface="Aptos" pitchFamily="34" charset="-120"/>
               </a:rPr>
-              <a:t>Â© Paula Soper</a:t>
+              <a:t>Copyright Paula Soper</a:t>
             </a:r>
             <a:endParaRPr lang="en-US" sz="800" dirty="0"/>
           </a:p>
@@ -11224,77 +12522,13 @@
       </p:sp>
       <p:sp>
         <p:nvSpPr>
-          <p:cNvPr id="8" name="Shape 6"/>
+          <p:cNvPr id="8" name="Text 6"/>
           <p:cNvSpPr/>
           <p:nvPr/>
         </p:nvSpPr>
         <p:spPr>
           <a:xfrm>
             <a:off x="640080" y="658368"/>
-            <a:ext cx="420624" cy="420624"/>
-          </a:xfrm>
-          <a:prstGeom prst="ellipse">
-            <a:avLst/>
-          </a:prstGeom>
-          <a:solidFill>
-            <a:srgbClr val="0068B7"/>
-          </a:solidFill>
-          <a:ln w="12700">
-            <a:solidFill>
-              <a:srgbClr val="0068B7"/>
-            </a:solidFill>
-            <a:prstDash val="solid"/>
-          </a:ln>
-        </p:spPr>
-      </p:sp>
-      <p:sp>
-        <p:nvSpPr>
-          <p:cNvPr id="9" name="Text 7"/>
-          <p:cNvSpPr/>
-          <p:nvPr/>
-        </p:nvSpPr>
-        <p:spPr>
-          <a:xfrm>
-            <a:off x="640080" y="731520"/>
-            <a:ext cx="420624" cy="164592"/>
-          </a:xfrm>
-          <a:prstGeom prst="rect">
-            <a:avLst/>
-          </a:prstGeom>
-          <a:noFill/>
-          <a:ln/>
-        </p:spPr>
-        <p:txBody>
-          <a:bodyPr wrap="square" lIns="0" tIns="0" rIns="0" bIns="0" rtlCol="0" anchor="ctr"/>
-          <a:lstStyle/>
-          <a:p>
-            <a:pPr algn="ctr" indent="0" marL="0">
-              <a:buNone/>
-            </a:pPr>
-            <a:r>
-              <a:rPr lang="en-US" sz="1100" b="1" dirty="0">
-                <a:solidFill>
-                  <a:srgbClr val="FFFFFF"/>
-                </a:solidFill>
-                <a:latin typeface="Aptos" pitchFamily="34" charset="0"/>
-                <a:ea typeface="Aptos" pitchFamily="34" charset="-122"/>
-                <a:cs typeface="Aptos" pitchFamily="34" charset="-120"/>
-              </a:rPr>
-              <a:t>13</a:t>
-            </a:r>
-            <a:endParaRPr lang="en-US" sz="1100" dirty="0"/>
-          </a:p>
-        </p:txBody>
-      </p:sp>
-      <p:sp>
-        <p:nvSpPr>
-          <p:cNvPr id="10" name="Text 8"/>
-          <p:cNvSpPr/>
-          <p:nvPr/>
-        </p:nvSpPr>
-        <p:spPr>
-          <a:xfrm>
-            <a:off x="640080" y="621792"/>
             <a:ext cx="10881360" cy="713232"/>
           </a:xfrm>
           <a:prstGeom prst="rect">
@@ -11329,14 +12563,14 @@
       </p:sp>
       <p:sp>
         <p:nvSpPr>
-          <p:cNvPr id="11" name="Text 9"/>
+          <p:cNvPr id="9" name="Text 7"/>
           <p:cNvSpPr/>
           <p:nvPr/>
         </p:nvSpPr>
         <p:spPr>
           <a:xfrm>
             <a:off x="868680" y="1508760"/>
-            <a:ext cx="6537960" cy="4160520"/>
+            <a:ext cx="6309360" cy="4160520"/>
           </a:xfrm>
           <a:prstGeom prst="rect">
             <a:avLst/>
@@ -11395,18 +12629,18 @@
       </p:sp>
       <p:sp>
         <p:nvSpPr>
-          <p:cNvPr id="12" name="Shape 10"/>
-          <p:cNvSpPr/>
-          <p:nvPr/>
-        </p:nvSpPr>
-        <p:spPr>
-          <a:xfrm>
-            <a:off x="7909560" y="1417320"/>
-            <a:ext cx="3154680" cy="1828800"/>
+          <p:cNvPr id="10" name="Shape 8"/>
+          <p:cNvSpPr/>
+          <p:nvPr/>
+        </p:nvSpPr>
+        <p:spPr>
+          <a:xfrm>
+            <a:off x="7635240" y="1325880"/>
+            <a:ext cx="3474720" cy="1325880"/>
           </a:xfrm>
           <a:prstGeom prst="roundRect">
             <a:avLst>
-              <a:gd name="adj" fmla="val 6000"/>
+              <a:gd name="adj" fmla="val 8276"/>
             </a:avLst>
           </a:prstGeom>
           <a:solidFill>
@@ -11422,14 +12656,14 @@
       </p:sp>
       <p:sp>
         <p:nvSpPr>
-          <p:cNvPr id="13" name="Text 11"/>
-          <p:cNvSpPr/>
-          <p:nvPr/>
-        </p:nvSpPr>
-        <p:spPr>
-          <a:xfrm>
-            <a:off x="8074152" y="1563624"/>
-            <a:ext cx="2825496" cy="256032"/>
+          <p:cNvPr id="11" name="Text 9"/>
+          <p:cNvSpPr/>
+          <p:nvPr/>
+        </p:nvSpPr>
+        <p:spPr>
+          <a:xfrm>
+            <a:off x="7799832" y="1472184"/>
+            <a:ext cx="3145536" cy="256032"/>
           </a:xfrm>
           <a:prstGeom prst="rect">
             <a:avLst/>
@@ -11453,7 +12687,7 @@
                 <a:ea typeface="Aptos" pitchFamily="34" charset="-122"/>
                 <a:cs typeface="Aptos" pitchFamily="34" charset="-120"/>
               </a:rPr>
-              <a:t>Key idea</a:t>
+              <a:t>Core concept</a:t>
             </a:r>
             <a:endParaRPr lang="en-US" sz="1300" dirty="0"/>
           </a:p>
@@ -11461,14 +12695,14 @@
       </p:sp>
       <p:sp>
         <p:nvSpPr>
-          <p:cNvPr id="14" name="Text 12"/>
-          <p:cNvSpPr/>
-          <p:nvPr/>
-        </p:nvSpPr>
-        <p:spPr>
-          <a:xfrm>
-            <a:off x="8074152" y="1920240"/>
-            <a:ext cx="2825496" cy="1188720"/>
+          <p:cNvPr id="12" name="Text 10"/>
+          <p:cNvSpPr/>
+          <p:nvPr/>
+        </p:nvSpPr>
+        <p:spPr>
+          <a:xfrm>
+            <a:off x="7799832" y="1828800"/>
+            <a:ext cx="3145536" cy="685800"/>
           </a:xfrm>
           <a:prstGeom prst="rect">
             <a:avLst/>
@@ -11502,18 +12736,159 @@
       </p:sp>
       <p:sp>
         <p:nvSpPr>
-          <p:cNvPr id="15" name="Shape 13"/>
-          <p:cNvSpPr/>
-          <p:nvPr/>
-        </p:nvSpPr>
-        <p:spPr>
-          <a:xfrm>
-            <a:off x="7909560" y="3520440"/>
-            <a:ext cx="3154680" cy="1737360"/>
+          <p:cNvPr id="13" name="Shape 11"/>
+          <p:cNvSpPr/>
+          <p:nvPr/>
+        </p:nvSpPr>
+        <p:spPr>
+          <a:xfrm>
+            <a:off x="7635240" y="2788920"/>
+            <a:ext cx="3474720" cy="1536192"/>
           </a:xfrm>
           <a:prstGeom prst="roundRect">
             <a:avLst>
-              <a:gd name="adj" fmla="val 6316"/>
+              <a:gd name="adj" fmla="val 7143"/>
+            </a:avLst>
+          </a:prstGeom>
+          <a:solidFill>
+            <a:srgbClr val="FFFFFF">
+              <a:alpha val="88000"/>
+            </a:srgbClr>
+          </a:solidFill>
+          <a:ln w="12700">
+            <a:solidFill>
+              <a:srgbClr val="D6E8F2"/>
+            </a:solidFill>
+            <a:prstDash val="solid"/>
+          </a:ln>
+        </p:spPr>
+      </p:sp>
+      <p:sp>
+        <p:nvSpPr>
+          <p:cNvPr id="14" name="Shape 12"/>
+          <p:cNvSpPr/>
+          <p:nvPr/>
+        </p:nvSpPr>
+        <p:spPr>
+          <a:xfrm>
+            <a:off x="8074152" y="3291840"/>
+            <a:ext cx="2596896" cy="749808"/>
+          </a:xfrm>
+          <a:prstGeom prst="rect">
+            <a:avLst/>
+          </a:prstGeom>
+          <a:solidFill>
+            <a:srgbClr val="EAF6F8"/>
+          </a:solidFill>
+          <a:ln w="12700">
+            <a:solidFill>
+              <a:srgbClr val="8ABBD8"/>
+            </a:solidFill>
+            <a:prstDash val="solid"/>
+          </a:ln>
+        </p:spPr>
+      </p:sp>
+      <p:sp>
+        <p:nvSpPr>
+          <p:cNvPr id="15" name="Shape 13"/>
+          <p:cNvSpPr/>
+          <p:nvPr/>
+        </p:nvSpPr>
+        <p:spPr>
+          <a:xfrm>
+            <a:off x="8202168" y="3721608"/>
+            <a:ext cx="2340864" cy="0"/>
+          </a:xfrm>
+          <a:prstGeom prst="line">
+            <a:avLst/>
+          </a:prstGeom>
+          <a:noFill/>
+          <a:ln w="19050">
+            <a:solidFill>
+              <a:srgbClr val="0068B7"/>
+            </a:solidFill>
+            <a:prstDash val="solid"/>
+          </a:ln>
+        </p:spPr>
+      </p:sp>
+      <p:sp>
+        <p:nvSpPr>
+          <p:cNvPr id="16" name="Shape 14"/>
+          <p:cNvSpPr/>
+          <p:nvPr/>
+        </p:nvSpPr>
+        <p:spPr>
+          <a:xfrm>
+            <a:off x="9198864" y="4206240"/>
+            <a:ext cx="347472" cy="347472"/>
+          </a:xfrm>
+          <a:prstGeom prst="ellipse">
+            <a:avLst/>
+          </a:prstGeom>
+          <a:solidFill>
+            <a:srgbClr val="2F8A28"/>
+          </a:solidFill>
+          <a:ln w="12700">
+            <a:solidFill>
+              <a:srgbClr val="2F8A28"/>
+            </a:solidFill>
+            <a:prstDash val="solid"/>
+          </a:ln>
+        </p:spPr>
+      </p:sp>
+      <p:sp>
+        <p:nvSpPr>
+          <p:cNvPr id="17" name="Text 15"/>
+          <p:cNvSpPr/>
+          <p:nvPr/>
+        </p:nvSpPr>
+        <p:spPr>
+          <a:xfrm>
+            <a:off x="7909560" y="3977640"/>
+            <a:ext cx="2926080" cy="182880"/>
+          </a:xfrm>
+          <a:prstGeom prst="rect">
+            <a:avLst/>
+          </a:prstGeom>
+          <a:noFill/>
+          <a:ln/>
+        </p:spPr>
+        <p:txBody>
+          <a:bodyPr wrap="square" lIns="0" tIns="0" rIns="0" bIns="0" rtlCol="0" anchor="ctr"/>
+          <a:lstStyle/>
+          <a:p>
+            <a:pPr algn="ctr" indent="0" marL="0">
+              <a:buNone/>
+            </a:pPr>
+            <a:r>
+              <a:rPr lang="en-US" sz="1000" dirty="0">
+                <a:solidFill>
+                  <a:srgbClr val="003A63"/>
+                </a:solidFill>
+                <a:latin typeface="Aptos" pitchFamily="34" charset="0"/>
+                <a:ea typeface="Aptos" pitchFamily="34" charset="-122"/>
+                <a:cs typeface="Aptos" pitchFamily="34" charset="-120"/>
+              </a:rPr>
+              <a:t>Concept to action</a:t>
+            </a:r>
+            <a:endParaRPr lang="en-US" sz="1000" dirty="0"/>
+          </a:p>
+        </p:txBody>
+      </p:sp>
+      <p:sp>
+        <p:nvSpPr>
+          <p:cNvPr id="18" name="Shape 16"/>
+          <p:cNvSpPr/>
+          <p:nvPr/>
+        </p:nvSpPr>
+        <p:spPr>
+          <a:xfrm>
+            <a:off x="7635240" y="4498848"/>
+            <a:ext cx="3474720" cy="1143000"/>
+          </a:xfrm>
+          <a:prstGeom prst="roundRect">
+            <a:avLst>
+              <a:gd name="adj" fmla="val 9600"/>
             </a:avLst>
           </a:prstGeom>
           <a:solidFill>
@@ -11529,14 +12904,14 @@
       </p:sp>
       <p:sp>
         <p:nvSpPr>
-          <p:cNvPr id="16" name="Text 14"/>
-          <p:cNvSpPr/>
-          <p:nvPr/>
-        </p:nvSpPr>
-        <p:spPr>
-          <a:xfrm>
-            <a:off x="8074152" y="3666744"/>
-            <a:ext cx="2825496" cy="256032"/>
+          <p:cNvPr id="19" name="Text 17"/>
+          <p:cNvSpPr/>
+          <p:nvPr/>
+        </p:nvSpPr>
+        <p:spPr>
+          <a:xfrm>
+            <a:off x="7799832" y="4645152"/>
+            <a:ext cx="3145536" cy="256032"/>
           </a:xfrm>
           <a:prstGeom prst="rect">
             <a:avLst/>
@@ -11560,7 +12935,7 @@
                 <a:ea typeface="Aptos" pitchFamily="34" charset="-122"/>
                 <a:cs typeface="Aptos" pitchFamily="34" charset="-120"/>
               </a:rPr>
-              <a:t>Use this for</a:t>
+              <a:t>Apply it</a:t>
             </a:r>
             <a:endParaRPr lang="en-US" sz="1300" dirty="0"/>
           </a:p>
@@ -11568,14 +12943,14 @@
       </p:sp>
       <p:sp>
         <p:nvSpPr>
-          <p:cNvPr id="17" name="Text 15"/>
-          <p:cNvSpPr/>
-          <p:nvPr/>
-        </p:nvSpPr>
-        <p:spPr>
-          <a:xfrm>
-            <a:off x="8074152" y="4023360"/>
-            <a:ext cx="2825496" cy="1097280"/>
+          <p:cNvPr id="20" name="Text 18"/>
+          <p:cNvSpPr/>
+          <p:nvPr/>
+        </p:nvSpPr>
+        <p:spPr>
+          <a:xfrm>
+            <a:off x="7799832" y="5001768"/>
+            <a:ext cx="3145536" cy="502920"/>
           </a:xfrm>
           <a:prstGeom prst="rect">
             <a:avLst/>
@@ -11601,7 +12976,7 @@
                 <a:ea typeface="Aptos" pitchFamily="34" charset="-122"/>
                 <a:cs typeface="Aptos" pitchFamily="34" charset="-120"/>
               </a:rPr>
-              <a:t>Connect the concept to public health decisions, safeguards, documentation, or implementation work.</a:t>
+              <a:t>Connect the concept to public health purpose, responsible use, required safeguards, documentation, and the next action a department should take.</a:t>
             </a:r>
             <a:endParaRPr lang="en-US" sz="1550" dirty="0"/>
           </a:p>
@@ -11775,8 +13150,8 @@
         </p:nvSpPr>
         <p:spPr>
           <a:xfrm>
-            <a:off x="9966960" y="6537960"/>
-            <a:ext cx="1645920" cy="201168"/>
+            <a:off x="9646920" y="6537960"/>
+            <a:ext cx="1965960" cy="201168"/>
           </a:xfrm>
           <a:prstGeom prst="rect">
             <a:avLst/>
@@ -11800,7 +13175,7 @@
                 <a:ea typeface="Aptos" pitchFamily="34" charset="-122"/>
                 <a:cs typeface="Aptos" pitchFamily="34" charset="-120"/>
               </a:rPr>
-              <a:t>Â© Paula Soper</a:t>
+              <a:t>Copyright Paula Soper</a:t>
             </a:r>
             <a:endParaRPr lang="en-US" sz="800" dirty="0"/>
           </a:p>
@@ -12143,46 +13518,7 @@
       </p:sp>
       <p:sp>
         <p:nvSpPr>
-          <p:cNvPr id="15" name="Text 13"/>
-          <p:cNvSpPr/>
-          <p:nvPr/>
-        </p:nvSpPr>
-        <p:spPr>
-          <a:xfrm>
-            <a:off x="8817864" y="4187952"/>
-            <a:ext cx="201168" cy="256032"/>
-          </a:xfrm>
-          <a:prstGeom prst="rect">
-            <a:avLst/>
-          </a:prstGeom>
-          <a:noFill/>
-          <a:ln/>
-        </p:spPr>
-        <p:txBody>
-          <a:bodyPr wrap="square" lIns="0" tIns="0" rIns="0" bIns="0" rtlCol="0" anchor="ctr"/>
-          <a:lstStyle/>
-          <a:p>
-            <a:pPr algn="ctr" indent="0" marL="0">
-              <a:buNone/>
-            </a:pPr>
-            <a:r>
-              <a:rPr lang="en-US" sz="1800" b="1" dirty="0">
-                <a:solidFill>
-                  <a:srgbClr val="0068B7"/>
-                </a:solidFill>
-                <a:latin typeface="Aptos" pitchFamily="34" charset="0"/>
-                <a:ea typeface="Aptos" pitchFamily="34" charset="-122"/>
-                <a:cs typeface="Aptos" pitchFamily="34" charset="-120"/>
-              </a:rPr>
-              <a:t>â†’</a:t>
-            </a:r>
-            <a:endParaRPr lang="en-US" sz="1800" dirty="0"/>
-          </a:p>
-        </p:txBody>
-      </p:sp>
-      <p:sp>
-        <p:nvSpPr>
-          <p:cNvPr id="16" name="Shape 14"/>
+          <p:cNvPr id="15" name="Shape 13"/>
           <p:cNvSpPr/>
           <p:nvPr/>
         </p:nvSpPr>
@@ -12209,7 +13545,7 @@
       </p:sp>
       <p:sp>
         <p:nvSpPr>
-          <p:cNvPr id="17" name="Text 15"/>
+          <p:cNvPr id="16" name="Text 14"/>
           <p:cNvSpPr/>
           <p:nvPr/>
         </p:nvSpPr>
@@ -12250,46 +13586,7 @@
       </p:sp>
       <p:sp>
         <p:nvSpPr>
-          <p:cNvPr id="18" name="Text 16"/>
-          <p:cNvSpPr/>
-          <p:nvPr/>
-        </p:nvSpPr>
-        <p:spPr>
-          <a:xfrm>
-            <a:off x="10046208" y="4187952"/>
-            <a:ext cx="201168" cy="256032"/>
-          </a:xfrm>
-          <a:prstGeom prst="rect">
-            <a:avLst/>
-          </a:prstGeom>
-          <a:noFill/>
-          <a:ln/>
-        </p:spPr>
-        <p:txBody>
-          <a:bodyPr wrap="square" lIns="0" tIns="0" rIns="0" bIns="0" rtlCol="0" anchor="ctr"/>
-          <a:lstStyle/>
-          <a:p>
-            <a:pPr algn="ctr" indent="0" marL="0">
-              <a:buNone/>
-            </a:pPr>
-            <a:r>
-              <a:rPr lang="en-US" sz="1800" b="1" dirty="0">
-                <a:solidFill>
-                  <a:srgbClr val="0068B7"/>
-                </a:solidFill>
-                <a:latin typeface="Aptos" pitchFamily="34" charset="0"/>
-                <a:ea typeface="Aptos" pitchFamily="34" charset="-122"/>
-                <a:cs typeface="Aptos" pitchFamily="34" charset="-120"/>
-              </a:rPr>
-              <a:t>â†’</a:t>
-            </a:r>
-            <a:endParaRPr lang="en-US" sz="1800" dirty="0"/>
-          </a:p>
-        </p:txBody>
-      </p:sp>
-      <p:sp>
-        <p:nvSpPr>
-          <p:cNvPr id="19" name="Shape 17"/>
+          <p:cNvPr id="17" name="Shape 15"/>
           <p:cNvSpPr/>
           <p:nvPr/>
         </p:nvSpPr>
@@ -12316,7 +13613,7 @@
       </p:sp>
       <p:sp>
         <p:nvSpPr>
-          <p:cNvPr id="20" name="Text 18"/>
+          <p:cNvPr id="18" name="Text 16"/>
           <p:cNvSpPr/>
           <p:nvPr/>
         </p:nvSpPr>
@@ -12523,8 +13820,8 @@
         </p:nvSpPr>
         <p:spPr>
           <a:xfrm>
-            <a:off x="9966960" y="6537960"/>
-            <a:ext cx="1645920" cy="201168"/>
+            <a:off x="9646920" y="6537960"/>
+            <a:ext cx="1965960" cy="201168"/>
           </a:xfrm>
           <a:prstGeom prst="rect">
             <a:avLst/>
@@ -12548,7 +13845,7 @@
                 <a:ea typeface="Aptos" pitchFamily="34" charset="-122"/>
                 <a:cs typeface="Aptos" pitchFamily="34" charset="-120"/>
               </a:rPr>
-              <a:t>Â© Paula Soper</a:t>
+              <a:t>Copyright Paula Soper</a:t>
             </a:r>
             <a:endParaRPr lang="en-US" sz="800" dirty="0"/>
           </a:p>
@@ -12891,46 +14188,7 @@
       </p:sp>
       <p:sp>
         <p:nvSpPr>
-          <p:cNvPr id="15" name="Text 13"/>
-          <p:cNvSpPr/>
-          <p:nvPr/>
-        </p:nvSpPr>
-        <p:spPr>
-          <a:xfrm>
-            <a:off x="8817864" y="4187952"/>
-            <a:ext cx="201168" cy="256032"/>
-          </a:xfrm>
-          <a:prstGeom prst="rect">
-            <a:avLst/>
-          </a:prstGeom>
-          <a:noFill/>
-          <a:ln/>
-        </p:spPr>
-        <p:txBody>
-          <a:bodyPr wrap="square" lIns="0" tIns="0" rIns="0" bIns="0" rtlCol="0" anchor="ctr"/>
-          <a:lstStyle/>
-          <a:p>
-            <a:pPr algn="ctr" indent="0" marL="0">
-              <a:buNone/>
-            </a:pPr>
-            <a:r>
-              <a:rPr lang="en-US" sz="1800" b="1" dirty="0">
-                <a:solidFill>
-                  <a:srgbClr val="0068B7"/>
-                </a:solidFill>
-                <a:latin typeface="Aptos" pitchFamily="34" charset="0"/>
-                <a:ea typeface="Aptos" pitchFamily="34" charset="-122"/>
-                <a:cs typeface="Aptos" pitchFamily="34" charset="-120"/>
-              </a:rPr>
-              <a:t>â†’</a:t>
-            </a:r>
-            <a:endParaRPr lang="en-US" sz="1800" dirty="0"/>
-          </a:p>
-        </p:txBody>
-      </p:sp>
-      <p:sp>
-        <p:nvSpPr>
-          <p:cNvPr id="16" name="Shape 14"/>
+          <p:cNvPr id="15" name="Shape 13"/>
           <p:cNvSpPr/>
           <p:nvPr/>
         </p:nvSpPr>
@@ -12957,7 +14215,7 @@
       </p:sp>
       <p:sp>
         <p:nvSpPr>
-          <p:cNvPr id="17" name="Text 15"/>
+          <p:cNvPr id="16" name="Text 14"/>
           <p:cNvSpPr/>
           <p:nvPr/>
         </p:nvSpPr>
@@ -12998,46 +14256,7 @@
       </p:sp>
       <p:sp>
         <p:nvSpPr>
-          <p:cNvPr id="18" name="Text 16"/>
-          <p:cNvSpPr/>
-          <p:nvPr/>
-        </p:nvSpPr>
-        <p:spPr>
-          <a:xfrm>
-            <a:off x="10046208" y="4187952"/>
-            <a:ext cx="201168" cy="256032"/>
-          </a:xfrm>
-          <a:prstGeom prst="rect">
-            <a:avLst/>
-          </a:prstGeom>
-          <a:noFill/>
-          <a:ln/>
-        </p:spPr>
-        <p:txBody>
-          <a:bodyPr wrap="square" lIns="0" tIns="0" rIns="0" bIns="0" rtlCol="0" anchor="ctr"/>
-          <a:lstStyle/>
-          <a:p>
-            <a:pPr algn="ctr" indent="0" marL="0">
-              <a:buNone/>
-            </a:pPr>
-            <a:r>
-              <a:rPr lang="en-US" sz="1800" b="1" dirty="0">
-                <a:solidFill>
-                  <a:srgbClr val="0068B7"/>
-                </a:solidFill>
-                <a:latin typeface="Aptos" pitchFamily="34" charset="0"/>
-                <a:ea typeface="Aptos" pitchFamily="34" charset="-122"/>
-                <a:cs typeface="Aptos" pitchFamily="34" charset="-120"/>
-              </a:rPr>
-              <a:t>â†’</a:t>
-            </a:r>
-            <a:endParaRPr lang="en-US" sz="1800" dirty="0"/>
-          </a:p>
-        </p:txBody>
-      </p:sp>
-      <p:sp>
-        <p:nvSpPr>
-          <p:cNvPr id="19" name="Shape 17"/>
+          <p:cNvPr id="17" name="Shape 15"/>
           <p:cNvSpPr/>
           <p:nvPr/>
         </p:nvSpPr>
@@ -13064,7 +14283,7 @@
       </p:sp>
       <p:sp>
         <p:nvSpPr>
-          <p:cNvPr id="20" name="Text 18"/>
+          <p:cNvPr id="18" name="Text 16"/>
           <p:cNvSpPr/>
           <p:nvPr/>
         </p:nvSpPr>
@@ -13271,8 +14490,8 @@
         </p:nvSpPr>
         <p:spPr>
           <a:xfrm>
-            <a:off x="9966960" y="6537960"/>
-            <a:ext cx="1645920" cy="201168"/>
+            <a:off x="9646920" y="6537960"/>
+            <a:ext cx="1965960" cy="201168"/>
           </a:xfrm>
           <a:prstGeom prst="rect">
             <a:avLst/>
@@ -13296,7 +14515,7 @@
                 <a:ea typeface="Aptos" pitchFamily="34" charset="-122"/>
                 <a:cs typeface="Aptos" pitchFamily="34" charset="-120"/>
               </a:rPr>
-              <a:t>Â© Paula Soper</a:t>
+              <a:t>Copyright Paula Soper</a:t>
             </a:r>
             <a:endParaRPr lang="en-US" sz="800" dirty="0"/>
           </a:p>
@@ -13343,77 +14562,13 @@
       </p:sp>
       <p:sp>
         <p:nvSpPr>
-          <p:cNvPr id="8" name="Shape 6"/>
+          <p:cNvPr id="8" name="Text 6"/>
           <p:cNvSpPr/>
           <p:nvPr/>
         </p:nvSpPr>
         <p:spPr>
           <a:xfrm>
             <a:off x="640080" y="658368"/>
-            <a:ext cx="420624" cy="420624"/>
-          </a:xfrm>
-          <a:prstGeom prst="ellipse">
-            <a:avLst/>
-          </a:prstGeom>
-          <a:solidFill>
-            <a:srgbClr val="0068B7"/>
-          </a:solidFill>
-          <a:ln w="12700">
-            <a:solidFill>
-              <a:srgbClr val="0068B7"/>
-            </a:solidFill>
-            <a:prstDash val="solid"/>
-          </a:ln>
-        </p:spPr>
-      </p:sp>
-      <p:sp>
-        <p:nvSpPr>
-          <p:cNvPr id="9" name="Text 7"/>
-          <p:cNvSpPr/>
-          <p:nvPr/>
-        </p:nvSpPr>
-        <p:spPr>
-          <a:xfrm>
-            <a:off x="640080" y="731520"/>
-            <a:ext cx="420624" cy="164592"/>
-          </a:xfrm>
-          <a:prstGeom prst="rect">
-            <a:avLst/>
-          </a:prstGeom>
-          <a:noFill/>
-          <a:ln/>
-        </p:spPr>
-        <p:txBody>
-          <a:bodyPr wrap="square" lIns="0" tIns="0" rIns="0" bIns="0" rtlCol="0" anchor="ctr"/>
-          <a:lstStyle/>
-          <a:p>
-            <a:pPr algn="ctr" indent="0" marL="0">
-              <a:buNone/>
-            </a:pPr>
-            <a:r>
-              <a:rPr lang="en-US" sz="1100" b="1" dirty="0">
-                <a:solidFill>
-                  <a:srgbClr val="FFFFFF"/>
-                </a:solidFill>
-                <a:latin typeface="Aptos" pitchFamily="34" charset="0"/>
-                <a:ea typeface="Aptos" pitchFamily="34" charset="-122"/>
-                <a:cs typeface="Aptos" pitchFamily="34" charset="-120"/>
-              </a:rPr>
-              <a:t>1</a:t>
-            </a:r>
-            <a:endParaRPr lang="en-US" sz="1100" dirty="0"/>
-          </a:p>
-        </p:txBody>
-      </p:sp>
-      <p:sp>
-        <p:nvSpPr>
-          <p:cNvPr id="10" name="Text 8"/>
-          <p:cNvSpPr/>
-          <p:nvPr/>
-        </p:nvSpPr>
-        <p:spPr>
-          <a:xfrm>
-            <a:off x="640080" y="621792"/>
             <a:ext cx="10881360" cy="713232"/>
           </a:xfrm>
           <a:prstGeom prst="rect">
@@ -13448,14 +14603,14 @@
       </p:sp>
       <p:sp>
         <p:nvSpPr>
-          <p:cNvPr id="11" name="Text 9"/>
+          <p:cNvPr id="9" name="Text 7"/>
           <p:cNvSpPr/>
           <p:nvPr/>
         </p:nvSpPr>
         <p:spPr>
           <a:xfrm>
             <a:off x="868680" y="1508760"/>
-            <a:ext cx="6537960" cy="4160520"/>
+            <a:ext cx="6309360" cy="4160520"/>
           </a:xfrm>
           <a:prstGeom prst="rect">
             <a:avLst/>
@@ -13514,18 +14669,18 @@
       </p:sp>
       <p:sp>
         <p:nvSpPr>
-          <p:cNvPr id="12" name="Shape 10"/>
-          <p:cNvSpPr/>
-          <p:nvPr/>
-        </p:nvSpPr>
-        <p:spPr>
-          <a:xfrm>
-            <a:off x="7909560" y="1417320"/>
-            <a:ext cx="3154680" cy="1828800"/>
+          <p:cNvPr id="10" name="Shape 8"/>
+          <p:cNvSpPr/>
+          <p:nvPr/>
+        </p:nvSpPr>
+        <p:spPr>
+          <a:xfrm>
+            <a:off x="7635240" y="1325880"/>
+            <a:ext cx="3474720" cy="1325880"/>
           </a:xfrm>
           <a:prstGeom prst="roundRect">
             <a:avLst>
-              <a:gd name="adj" fmla="val 6000"/>
+              <a:gd name="adj" fmla="val 8276"/>
             </a:avLst>
           </a:prstGeom>
           <a:solidFill>
@@ -13541,14 +14696,14 @@
       </p:sp>
       <p:sp>
         <p:nvSpPr>
-          <p:cNvPr id="13" name="Text 11"/>
-          <p:cNvSpPr/>
-          <p:nvPr/>
-        </p:nvSpPr>
-        <p:spPr>
-          <a:xfrm>
-            <a:off x="8074152" y="1563624"/>
-            <a:ext cx="2825496" cy="256032"/>
+          <p:cNvPr id="11" name="Text 9"/>
+          <p:cNvSpPr/>
+          <p:nvPr/>
+        </p:nvSpPr>
+        <p:spPr>
+          <a:xfrm>
+            <a:off x="7799832" y="1472184"/>
+            <a:ext cx="3145536" cy="256032"/>
           </a:xfrm>
           <a:prstGeom prst="rect">
             <a:avLst/>
@@ -13572,7 +14727,7 @@
                 <a:ea typeface="Aptos" pitchFamily="34" charset="-122"/>
                 <a:cs typeface="Aptos" pitchFamily="34" charset="-120"/>
               </a:rPr>
-              <a:t>Key idea</a:t>
+              <a:t>Practice focus</a:t>
             </a:r>
             <a:endParaRPr lang="en-US" sz="1300" dirty="0"/>
           </a:p>
@@ -13580,14 +14735,14 @@
       </p:sp>
       <p:sp>
         <p:nvSpPr>
-          <p:cNvPr id="14" name="Text 12"/>
-          <p:cNvSpPr/>
-          <p:nvPr/>
-        </p:nvSpPr>
-        <p:spPr>
-          <a:xfrm>
-            <a:off x="8074152" y="1920240"/>
-            <a:ext cx="2825496" cy="1188720"/>
+          <p:cNvPr id="12" name="Text 10"/>
+          <p:cNvSpPr/>
+          <p:nvPr/>
+        </p:nvSpPr>
+        <p:spPr>
+          <a:xfrm>
+            <a:off x="7799832" y="1828800"/>
+            <a:ext cx="3145536" cy="685800"/>
           </a:xfrm>
           <a:prstGeom prst="rect">
             <a:avLst/>
@@ -13621,18 +14776,159 @@
       </p:sp>
       <p:sp>
         <p:nvSpPr>
-          <p:cNvPr id="15" name="Shape 13"/>
-          <p:cNvSpPr/>
-          <p:nvPr/>
-        </p:nvSpPr>
-        <p:spPr>
-          <a:xfrm>
-            <a:off x="7909560" y="3520440"/>
-            <a:ext cx="3154680" cy="1737360"/>
+          <p:cNvPr id="13" name="Shape 11"/>
+          <p:cNvSpPr/>
+          <p:nvPr/>
+        </p:nvSpPr>
+        <p:spPr>
+          <a:xfrm>
+            <a:off x="7635240" y="2788920"/>
+            <a:ext cx="3474720" cy="1536192"/>
           </a:xfrm>
           <a:prstGeom prst="roundRect">
             <a:avLst>
-              <a:gd name="adj" fmla="val 6316"/>
+              <a:gd name="adj" fmla="val 7143"/>
+            </a:avLst>
+          </a:prstGeom>
+          <a:solidFill>
+            <a:srgbClr val="FFFFFF">
+              <a:alpha val="88000"/>
+            </a:srgbClr>
+          </a:solidFill>
+          <a:ln w="12700">
+            <a:solidFill>
+              <a:srgbClr val="D6E8F2"/>
+            </a:solidFill>
+            <a:prstDash val="solid"/>
+          </a:ln>
+        </p:spPr>
+      </p:sp>
+      <p:sp>
+        <p:nvSpPr>
+          <p:cNvPr id="14" name="Shape 12"/>
+          <p:cNvSpPr/>
+          <p:nvPr/>
+        </p:nvSpPr>
+        <p:spPr>
+          <a:xfrm>
+            <a:off x="8074152" y="3291840"/>
+            <a:ext cx="2596896" cy="749808"/>
+          </a:xfrm>
+          <a:prstGeom prst="rect">
+            <a:avLst/>
+          </a:prstGeom>
+          <a:solidFill>
+            <a:srgbClr val="EAF6F8"/>
+          </a:solidFill>
+          <a:ln w="12700">
+            <a:solidFill>
+              <a:srgbClr val="8ABBD8"/>
+            </a:solidFill>
+            <a:prstDash val="solid"/>
+          </a:ln>
+        </p:spPr>
+      </p:sp>
+      <p:sp>
+        <p:nvSpPr>
+          <p:cNvPr id="15" name="Shape 13"/>
+          <p:cNvSpPr/>
+          <p:nvPr/>
+        </p:nvSpPr>
+        <p:spPr>
+          <a:xfrm>
+            <a:off x="8202168" y="3721608"/>
+            <a:ext cx="2340864" cy="0"/>
+          </a:xfrm>
+          <a:prstGeom prst="line">
+            <a:avLst/>
+          </a:prstGeom>
+          <a:noFill/>
+          <a:ln w="19050">
+            <a:solidFill>
+              <a:srgbClr val="0068B7"/>
+            </a:solidFill>
+            <a:prstDash val="solid"/>
+          </a:ln>
+        </p:spPr>
+      </p:sp>
+      <p:sp>
+        <p:nvSpPr>
+          <p:cNvPr id="16" name="Shape 14"/>
+          <p:cNvSpPr/>
+          <p:nvPr/>
+        </p:nvSpPr>
+        <p:spPr>
+          <a:xfrm>
+            <a:off x="9198864" y="4206240"/>
+            <a:ext cx="347472" cy="347472"/>
+          </a:xfrm>
+          <a:prstGeom prst="ellipse">
+            <a:avLst/>
+          </a:prstGeom>
+          <a:solidFill>
+            <a:srgbClr val="2F8A28"/>
+          </a:solidFill>
+          <a:ln w="12700">
+            <a:solidFill>
+              <a:srgbClr val="2F8A28"/>
+            </a:solidFill>
+            <a:prstDash val="solid"/>
+          </a:ln>
+        </p:spPr>
+      </p:sp>
+      <p:sp>
+        <p:nvSpPr>
+          <p:cNvPr id="17" name="Text 15"/>
+          <p:cNvSpPr/>
+          <p:nvPr/>
+        </p:nvSpPr>
+        <p:spPr>
+          <a:xfrm>
+            <a:off x="7909560" y="3977640"/>
+            <a:ext cx="2926080" cy="182880"/>
+          </a:xfrm>
+          <a:prstGeom prst="rect">
+            <a:avLst/>
+          </a:prstGeom>
+          <a:noFill/>
+          <a:ln/>
+        </p:spPr>
+        <p:txBody>
+          <a:bodyPr wrap="square" lIns="0" tIns="0" rIns="0" bIns="0" rtlCol="0" anchor="ctr"/>
+          <a:lstStyle/>
+          <a:p>
+            <a:pPr algn="ctr" indent="0" marL="0">
+              <a:buNone/>
+            </a:pPr>
+            <a:r>
+              <a:rPr lang="en-US" sz="1000" dirty="0">
+                <a:solidFill>
+                  <a:srgbClr val="003A63"/>
+                </a:solidFill>
+                <a:latin typeface="Aptos" pitchFamily="34" charset="0"/>
+                <a:ea typeface="Aptos" pitchFamily="34" charset="-122"/>
+                <a:cs typeface="Aptos" pitchFamily="34" charset="-120"/>
+              </a:rPr>
+              <a:t>Concept to action</a:t>
+            </a:r>
+            <a:endParaRPr lang="en-US" sz="1000" dirty="0"/>
+          </a:p>
+        </p:txBody>
+      </p:sp>
+      <p:sp>
+        <p:nvSpPr>
+          <p:cNvPr id="18" name="Shape 16"/>
+          <p:cNvSpPr/>
+          <p:nvPr/>
+        </p:nvSpPr>
+        <p:spPr>
+          <a:xfrm>
+            <a:off x="7635240" y="4498848"/>
+            <a:ext cx="3474720" cy="1143000"/>
+          </a:xfrm>
+          <a:prstGeom prst="roundRect">
+            <a:avLst>
+              <a:gd name="adj" fmla="val 9600"/>
             </a:avLst>
           </a:prstGeom>
           <a:solidFill>
@@ -13648,14 +14944,14 @@
       </p:sp>
       <p:sp>
         <p:nvSpPr>
-          <p:cNvPr id="16" name="Text 14"/>
-          <p:cNvSpPr/>
-          <p:nvPr/>
-        </p:nvSpPr>
-        <p:spPr>
-          <a:xfrm>
-            <a:off x="8074152" y="3666744"/>
-            <a:ext cx="2825496" cy="256032"/>
+          <p:cNvPr id="19" name="Text 17"/>
+          <p:cNvSpPr/>
+          <p:nvPr/>
+        </p:nvSpPr>
+        <p:spPr>
+          <a:xfrm>
+            <a:off x="7799832" y="4645152"/>
+            <a:ext cx="3145536" cy="256032"/>
           </a:xfrm>
           <a:prstGeom prst="rect">
             <a:avLst/>
@@ -13679,7 +14975,7 @@
                 <a:ea typeface="Aptos" pitchFamily="34" charset="-122"/>
                 <a:cs typeface="Aptos" pitchFamily="34" charset="-120"/>
               </a:rPr>
-              <a:t>Use this for</a:t>
+              <a:t>What to produce</a:t>
             </a:r>
             <a:endParaRPr lang="en-US" sz="1300" dirty="0"/>
           </a:p>
@@ -13687,14 +14983,14 @@
       </p:sp>
       <p:sp>
         <p:nvSpPr>
-          <p:cNvPr id="17" name="Text 15"/>
-          <p:cNvSpPr/>
-          <p:nvPr/>
-        </p:nvSpPr>
-        <p:spPr>
-          <a:xfrm>
-            <a:off x="8074152" y="4023360"/>
-            <a:ext cx="2825496" cy="1097280"/>
+          <p:cNvPr id="20" name="Text 18"/>
+          <p:cNvSpPr/>
+          <p:nvPr/>
+        </p:nvSpPr>
+        <p:spPr>
+          <a:xfrm>
+            <a:off x="7799832" y="5001768"/>
+            <a:ext cx="3145536" cy="502920"/>
           </a:xfrm>
           <a:prstGeom prst="rect">
             <a:avLst/>
@@ -13720,7 +15016,7 @@
                 <a:ea typeface="Aptos" pitchFamily="34" charset="-122"/>
                 <a:cs typeface="Aptos" pitchFamily="34" charset="-120"/>
               </a:rPr>
-              <a:t>Connect the concept to public health decisions, safeguards, documentation, or implementation work.</a:t>
+              <a:t>Use the assignment to test whether you can explain the concept, apply it to a realistic public health situation, and identify what would need review before the work moves forward.</a:t>
             </a:r>
             <a:endParaRPr lang="en-US" sz="1550" dirty="0"/>
           </a:p>
@@ -13894,8 +15190,8 @@
         </p:nvSpPr>
         <p:spPr>
           <a:xfrm>
-            <a:off x="9966960" y="6537960"/>
-            <a:ext cx="1645920" cy="201168"/>
+            <a:off x="9646920" y="6537960"/>
+            <a:ext cx="1965960" cy="201168"/>
           </a:xfrm>
           <a:prstGeom prst="rect">
             <a:avLst/>
@@ -13919,7 +15215,7 @@
                 <a:ea typeface="Aptos" pitchFamily="34" charset="-122"/>
                 <a:cs typeface="Aptos" pitchFamily="34" charset="-120"/>
               </a:rPr>
-              <a:t>Â© Paula Soper</a:t>
+              <a:t>Copyright Paula Soper</a:t>
             </a:r>
             <a:endParaRPr lang="en-US" sz="800" dirty="0"/>
           </a:p>
@@ -14014,7 +15310,7 @@
         <p:spPr>
           <a:xfrm>
             <a:off x="868680" y="1508760"/>
-            <a:ext cx="6537960" cy="4160520"/>
+            <a:ext cx="6309360" cy="4160520"/>
           </a:xfrm>
           <a:prstGeom prst="rect">
             <a:avLst/>
@@ -14051,12 +15347,12 @@
         </p:nvSpPr>
         <p:spPr>
           <a:xfrm>
-            <a:off x="7909560" y="1417320"/>
-            <a:ext cx="3154680" cy="1828800"/>
+            <a:off x="7635240" y="1325880"/>
+            <a:ext cx="3474720" cy="1325880"/>
           </a:xfrm>
           <a:prstGeom prst="roundRect">
             <a:avLst>
-              <a:gd name="adj" fmla="val 6000"/>
+              <a:gd name="adj" fmla="val 8276"/>
             </a:avLst>
           </a:prstGeom>
           <a:solidFill>
@@ -14078,8 +15374,8 @@
         </p:nvSpPr>
         <p:spPr>
           <a:xfrm>
-            <a:off x="8074152" y="1563624"/>
-            <a:ext cx="2825496" cy="256032"/>
+            <a:off x="7799832" y="1472184"/>
+            <a:ext cx="3145536" cy="256032"/>
           </a:xfrm>
           <a:prstGeom prst="rect">
             <a:avLst/>
@@ -14103,7 +15399,7 @@
                 <a:ea typeface="Aptos" pitchFamily="34" charset="-122"/>
                 <a:cs typeface="Aptos" pitchFamily="34" charset="-120"/>
               </a:rPr>
-              <a:t>Key idea</a:t>
+              <a:t>Practice focus</a:t>
             </a:r>
             <a:endParaRPr lang="en-US" sz="1300" dirty="0"/>
           </a:p>
@@ -14117,8 +15413,8 @@
         </p:nvSpPr>
         <p:spPr>
           <a:xfrm>
-            <a:off x="8074152" y="1920240"/>
-            <a:ext cx="2825496" cy="1188720"/>
+            <a:off x="7799832" y="1828800"/>
+            <a:ext cx="3145536" cy="685800"/>
           </a:xfrm>
           <a:prstGeom prst="rect">
             <a:avLst/>
@@ -14158,12 +15454,153 @@
         </p:nvSpPr>
         <p:spPr>
           <a:xfrm>
-            <a:off x="7909560" y="3520440"/>
-            <a:ext cx="3154680" cy="1737360"/>
+            <a:off x="7635240" y="2788920"/>
+            <a:ext cx="3474720" cy="1536192"/>
           </a:xfrm>
           <a:prstGeom prst="roundRect">
             <a:avLst>
-              <a:gd name="adj" fmla="val 6316"/>
+              <a:gd name="adj" fmla="val 7143"/>
+            </a:avLst>
+          </a:prstGeom>
+          <a:solidFill>
+            <a:srgbClr val="FFFFFF">
+              <a:alpha val="88000"/>
+            </a:srgbClr>
+          </a:solidFill>
+          <a:ln w="12700">
+            <a:solidFill>
+              <a:srgbClr val="D6E8F2"/>
+            </a:solidFill>
+            <a:prstDash val="solid"/>
+          </a:ln>
+        </p:spPr>
+      </p:sp>
+      <p:sp>
+        <p:nvSpPr>
+          <p:cNvPr id="14" name="Shape 12"/>
+          <p:cNvSpPr/>
+          <p:nvPr/>
+        </p:nvSpPr>
+        <p:spPr>
+          <a:xfrm>
+            <a:off x="8074152" y="3291840"/>
+            <a:ext cx="2596896" cy="749808"/>
+          </a:xfrm>
+          <a:prstGeom prst="rect">
+            <a:avLst/>
+          </a:prstGeom>
+          <a:solidFill>
+            <a:srgbClr val="EAF6F8"/>
+          </a:solidFill>
+          <a:ln w="12700">
+            <a:solidFill>
+              <a:srgbClr val="8ABBD8"/>
+            </a:solidFill>
+            <a:prstDash val="solid"/>
+          </a:ln>
+        </p:spPr>
+      </p:sp>
+      <p:sp>
+        <p:nvSpPr>
+          <p:cNvPr id="15" name="Shape 13"/>
+          <p:cNvSpPr/>
+          <p:nvPr/>
+        </p:nvSpPr>
+        <p:spPr>
+          <a:xfrm>
+            <a:off x="8202168" y="3721608"/>
+            <a:ext cx="2340864" cy="0"/>
+          </a:xfrm>
+          <a:prstGeom prst="line">
+            <a:avLst/>
+          </a:prstGeom>
+          <a:noFill/>
+          <a:ln w="19050">
+            <a:solidFill>
+              <a:srgbClr val="0068B7"/>
+            </a:solidFill>
+            <a:prstDash val="solid"/>
+          </a:ln>
+        </p:spPr>
+      </p:sp>
+      <p:sp>
+        <p:nvSpPr>
+          <p:cNvPr id="16" name="Shape 14"/>
+          <p:cNvSpPr/>
+          <p:nvPr/>
+        </p:nvSpPr>
+        <p:spPr>
+          <a:xfrm>
+            <a:off x="9198864" y="4206240"/>
+            <a:ext cx="347472" cy="347472"/>
+          </a:xfrm>
+          <a:prstGeom prst="ellipse">
+            <a:avLst/>
+          </a:prstGeom>
+          <a:solidFill>
+            <a:srgbClr val="2F8A28"/>
+          </a:solidFill>
+          <a:ln w="12700">
+            <a:solidFill>
+              <a:srgbClr val="2F8A28"/>
+            </a:solidFill>
+            <a:prstDash val="solid"/>
+          </a:ln>
+        </p:spPr>
+      </p:sp>
+      <p:sp>
+        <p:nvSpPr>
+          <p:cNvPr id="17" name="Text 15"/>
+          <p:cNvSpPr/>
+          <p:nvPr/>
+        </p:nvSpPr>
+        <p:spPr>
+          <a:xfrm>
+            <a:off x="7909560" y="3977640"/>
+            <a:ext cx="2926080" cy="182880"/>
+          </a:xfrm>
+          <a:prstGeom prst="rect">
+            <a:avLst/>
+          </a:prstGeom>
+          <a:noFill/>
+          <a:ln/>
+        </p:spPr>
+        <p:txBody>
+          <a:bodyPr wrap="square" lIns="0" tIns="0" rIns="0" bIns="0" rtlCol="0" anchor="ctr"/>
+          <a:lstStyle/>
+          <a:p>
+            <a:pPr algn="ctr" indent="0" marL="0">
+              <a:buNone/>
+            </a:pPr>
+            <a:r>
+              <a:rPr lang="en-US" sz="1000" dirty="0">
+                <a:solidFill>
+                  <a:srgbClr val="003A63"/>
+                </a:solidFill>
+                <a:latin typeface="Aptos" pitchFamily="34" charset="0"/>
+                <a:ea typeface="Aptos" pitchFamily="34" charset="-122"/>
+                <a:cs typeface="Aptos" pitchFamily="34" charset="-120"/>
+              </a:rPr>
+              <a:t>Concept to action</a:t>
+            </a:r>
+            <a:endParaRPr lang="en-US" sz="1000" dirty="0"/>
+          </a:p>
+        </p:txBody>
+      </p:sp>
+      <p:sp>
+        <p:nvSpPr>
+          <p:cNvPr id="18" name="Shape 16"/>
+          <p:cNvSpPr/>
+          <p:nvPr/>
+        </p:nvSpPr>
+        <p:spPr>
+          <a:xfrm>
+            <a:off x="7635240" y="4498848"/>
+            <a:ext cx="3474720" cy="1143000"/>
+          </a:xfrm>
+          <a:prstGeom prst="roundRect">
+            <a:avLst>
+              <a:gd name="adj" fmla="val 9600"/>
             </a:avLst>
           </a:prstGeom>
           <a:solidFill>
@@ -14179,14 +15616,14 @@
       </p:sp>
       <p:sp>
         <p:nvSpPr>
-          <p:cNvPr id="14" name="Text 12"/>
-          <p:cNvSpPr/>
-          <p:nvPr/>
-        </p:nvSpPr>
-        <p:spPr>
-          <a:xfrm>
-            <a:off x="8074152" y="3666744"/>
-            <a:ext cx="2825496" cy="256032"/>
+          <p:cNvPr id="19" name="Text 17"/>
+          <p:cNvSpPr/>
+          <p:nvPr/>
+        </p:nvSpPr>
+        <p:spPr>
+          <a:xfrm>
+            <a:off x="7799832" y="4645152"/>
+            <a:ext cx="3145536" cy="256032"/>
           </a:xfrm>
           <a:prstGeom prst="rect">
             <a:avLst/>
@@ -14210,7 +15647,7 @@
                 <a:ea typeface="Aptos" pitchFamily="34" charset="-122"/>
                 <a:cs typeface="Aptos" pitchFamily="34" charset="-120"/>
               </a:rPr>
-              <a:t>Use this for</a:t>
+              <a:t>What to produce</a:t>
             </a:r>
             <a:endParaRPr lang="en-US" sz="1300" dirty="0"/>
           </a:p>
@@ -14218,14 +15655,14 @@
       </p:sp>
       <p:sp>
         <p:nvSpPr>
-          <p:cNvPr id="15" name="Text 13"/>
-          <p:cNvSpPr/>
-          <p:nvPr/>
-        </p:nvSpPr>
-        <p:spPr>
-          <a:xfrm>
-            <a:off x="8074152" y="4023360"/>
-            <a:ext cx="2825496" cy="1097280"/>
+          <p:cNvPr id="20" name="Text 18"/>
+          <p:cNvSpPr/>
+          <p:nvPr/>
+        </p:nvSpPr>
+        <p:spPr>
+          <a:xfrm>
+            <a:off x="7799832" y="5001768"/>
+            <a:ext cx="3145536" cy="502920"/>
           </a:xfrm>
           <a:prstGeom prst="rect">
             <a:avLst/>
@@ -14251,7 +15688,7 @@
                 <a:ea typeface="Aptos" pitchFamily="34" charset="-122"/>
                 <a:cs typeface="Aptos" pitchFamily="34" charset="-120"/>
               </a:rPr>
-              <a:t>Connect the concept to public health decisions, safeguards, documentation, or implementation work.</a:t>
+              <a:t>Use the assignment to test whether you can explain the concept, apply it to a realistic public health situation, and identify what would need review before the work moves forward.</a:t>
             </a:r>
             <a:endParaRPr lang="en-US" sz="1550" dirty="0"/>
           </a:p>
@@ -14425,8 +15862,8 @@
         </p:nvSpPr>
         <p:spPr>
           <a:xfrm>
-            <a:off x="9966960" y="6537960"/>
-            <a:ext cx="1645920" cy="201168"/>
+            <a:off x="9646920" y="6537960"/>
+            <a:ext cx="1965960" cy="201168"/>
           </a:xfrm>
           <a:prstGeom prst="rect">
             <a:avLst/>
@@ -14450,7 +15887,7 @@
                 <a:ea typeface="Aptos" pitchFamily="34" charset="-122"/>
                 <a:cs typeface="Aptos" pitchFamily="34" charset="-120"/>
               </a:rPr>
-              <a:t>Â© Paula Soper</a:t>
+              <a:t>Copyright Paula Soper</a:t>
             </a:r>
             <a:endParaRPr lang="en-US" sz="800" dirty="0"/>
           </a:p>
@@ -14497,77 +15934,13 @@
       </p:sp>
       <p:sp>
         <p:nvSpPr>
-          <p:cNvPr id="8" name="Shape 6"/>
+          <p:cNvPr id="8" name="Text 6"/>
           <p:cNvSpPr/>
           <p:nvPr/>
         </p:nvSpPr>
         <p:spPr>
           <a:xfrm>
             <a:off x="640080" y="658368"/>
-            <a:ext cx="420624" cy="420624"/>
-          </a:xfrm>
-          <a:prstGeom prst="ellipse">
-            <a:avLst/>
-          </a:prstGeom>
-          <a:solidFill>
-            <a:srgbClr val="0068B7"/>
-          </a:solidFill>
-          <a:ln w="12700">
-            <a:solidFill>
-              <a:srgbClr val="0068B7"/>
-            </a:solidFill>
-            <a:prstDash val="solid"/>
-          </a:ln>
-        </p:spPr>
-      </p:sp>
-      <p:sp>
-        <p:nvSpPr>
-          <p:cNvPr id="9" name="Text 7"/>
-          <p:cNvSpPr/>
-          <p:nvPr/>
-        </p:nvSpPr>
-        <p:spPr>
-          <a:xfrm>
-            <a:off x="640080" y="731520"/>
-            <a:ext cx="420624" cy="164592"/>
-          </a:xfrm>
-          <a:prstGeom prst="rect">
-            <a:avLst/>
-          </a:prstGeom>
-          <a:noFill/>
-          <a:ln/>
-        </p:spPr>
-        <p:txBody>
-          <a:bodyPr wrap="square" lIns="0" tIns="0" rIns="0" bIns="0" rtlCol="0" anchor="ctr"/>
-          <a:lstStyle/>
-          <a:p>
-            <a:pPr algn="ctr" indent="0" marL="0">
-              <a:buNone/>
-            </a:pPr>
-            <a:r>
-              <a:rPr lang="en-US" sz="1100" b="1" dirty="0">
-                <a:solidFill>
-                  <a:srgbClr val="FFFFFF"/>
-                </a:solidFill>
-                <a:latin typeface="Aptos" pitchFamily="34" charset="0"/>
-                <a:ea typeface="Aptos" pitchFamily="34" charset="-122"/>
-                <a:cs typeface="Aptos" pitchFamily="34" charset="-120"/>
-              </a:rPr>
-              <a:t>2</a:t>
-            </a:r>
-            <a:endParaRPr lang="en-US" sz="1100" dirty="0"/>
-          </a:p>
-        </p:txBody>
-      </p:sp>
-      <p:sp>
-        <p:nvSpPr>
-          <p:cNvPr id="10" name="Text 8"/>
-          <p:cNvSpPr/>
-          <p:nvPr/>
-        </p:nvSpPr>
-        <p:spPr>
-          <a:xfrm>
-            <a:off x="640080" y="621792"/>
             <a:ext cx="10881360" cy="713232"/>
           </a:xfrm>
           <a:prstGeom prst="rect">
@@ -14602,14 +15975,14 @@
       </p:sp>
       <p:sp>
         <p:nvSpPr>
-          <p:cNvPr id="11" name="Text 9"/>
+          <p:cNvPr id="9" name="Text 7"/>
           <p:cNvSpPr/>
           <p:nvPr/>
         </p:nvSpPr>
         <p:spPr>
           <a:xfrm>
             <a:off x="868680" y="1508760"/>
-            <a:ext cx="6537960" cy="4160520"/>
+            <a:ext cx="6309360" cy="4160520"/>
           </a:xfrm>
           <a:prstGeom prst="rect">
             <a:avLst/>
@@ -14668,18 +16041,18 @@
       </p:sp>
       <p:sp>
         <p:nvSpPr>
-          <p:cNvPr id="12" name="Shape 10"/>
-          <p:cNvSpPr/>
-          <p:nvPr/>
-        </p:nvSpPr>
-        <p:spPr>
-          <a:xfrm>
-            <a:off x="7909560" y="1417320"/>
-            <a:ext cx="3154680" cy="1828800"/>
+          <p:cNvPr id="10" name="Shape 8"/>
+          <p:cNvSpPr/>
+          <p:nvPr/>
+        </p:nvSpPr>
+        <p:spPr>
+          <a:xfrm>
+            <a:off x="7635240" y="1325880"/>
+            <a:ext cx="3474720" cy="1325880"/>
           </a:xfrm>
           <a:prstGeom prst="roundRect">
             <a:avLst>
-              <a:gd name="adj" fmla="val 6000"/>
+              <a:gd name="adj" fmla="val 8276"/>
             </a:avLst>
           </a:prstGeom>
           <a:solidFill>
@@ -14695,14 +16068,14 @@
       </p:sp>
       <p:sp>
         <p:nvSpPr>
-          <p:cNvPr id="13" name="Text 11"/>
-          <p:cNvSpPr/>
-          <p:nvPr/>
-        </p:nvSpPr>
-        <p:spPr>
-          <a:xfrm>
-            <a:off x="8074152" y="1563624"/>
-            <a:ext cx="2825496" cy="256032"/>
+          <p:cNvPr id="11" name="Text 9"/>
+          <p:cNvSpPr/>
+          <p:nvPr/>
+        </p:nvSpPr>
+        <p:spPr>
+          <a:xfrm>
+            <a:off x="7799832" y="1472184"/>
+            <a:ext cx="3145536" cy="256032"/>
           </a:xfrm>
           <a:prstGeom prst="rect">
             <a:avLst/>
@@ -14726,7 +16099,7 @@
                 <a:ea typeface="Aptos" pitchFamily="34" charset="-122"/>
                 <a:cs typeface="Aptos" pitchFamily="34" charset="-120"/>
               </a:rPr>
-              <a:t>Key idea</a:t>
+              <a:t>Core concept</a:t>
             </a:r>
             <a:endParaRPr lang="en-US" sz="1300" dirty="0"/>
           </a:p>
@@ -14734,14 +16107,14 @@
       </p:sp>
       <p:sp>
         <p:nvSpPr>
-          <p:cNvPr id="14" name="Text 12"/>
-          <p:cNvSpPr/>
-          <p:nvPr/>
-        </p:nvSpPr>
-        <p:spPr>
-          <a:xfrm>
-            <a:off x="8074152" y="1920240"/>
-            <a:ext cx="2825496" cy="1188720"/>
+          <p:cNvPr id="12" name="Text 10"/>
+          <p:cNvSpPr/>
+          <p:nvPr/>
+        </p:nvSpPr>
+        <p:spPr>
+          <a:xfrm>
+            <a:off x="7799832" y="1828800"/>
+            <a:ext cx="3145536" cy="685800"/>
           </a:xfrm>
           <a:prstGeom prst="rect">
             <a:avLst/>
@@ -14775,18 +16148,159 @@
       </p:sp>
       <p:sp>
         <p:nvSpPr>
-          <p:cNvPr id="15" name="Shape 13"/>
-          <p:cNvSpPr/>
-          <p:nvPr/>
-        </p:nvSpPr>
-        <p:spPr>
-          <a:xfrm>
-            <a:off x="7909560" y="3520440"/>
-            <a:ext cx="3154680" cy="1737360"/>
+          <p:cNvPr id="13" name="Shape 11"/>
+          <p:cNvSpPr/>
+          <p:nvPr/>
+        </p:nvSpPr>
+        <p:spPr>
+          <a:xfrm>
+            <a:off x="7635240" y="2788920"/>
+            <a:ext cx="3474720" cy="1536192"/>
           </a:xfrm>
           <a:prstGeom prst="roundRect">
             <a:avLst>
-              <a:gd name="adj" fmla="val 6316"/>
+              <a:gd name="adj" fmla="val 7143"/>
+            </a:avLst>
+          </a:prstGeom>
+          <a:solidFill>
+            <a:srgbClr val="FFFFFF">
+              <a:alpha val="88000"/>
+            </a:srgbClr>
+          </a:solidFill>
+          <a:ln w="12700">
+            <a:solidFill>
+              <a:srgbClr val="D6E8F2"/>
+            </a:solidFill>
+            <a:prstDash val="solid"/>
+          </a:ln>
+        </p:spPr>
+      </p:sp>
+      <p:sp>
+        <p:nvSpPr>
+          <p:cNvPr id="14" name="Shape 12"/>
+          <p:cNvSpPr/>
+          <p:nvPr/>
+        </p:nvSpPr>
+        <p:spPr>
+          <a:xfrm>
+            <a:off x="8074152" y="3291840"/>
+            <a:ext cx="2596896" cy="749808"/>
+          </a:xfrm>
+          <a:prstGeom prst="rect">
+            <a:avLst/>
+          </a:prstGeom>
+          <a:solidFill>
+            <a:srgbClr val="EAF6F8"/>
+          </a:solidFill>
+          <a:ln w="12700">
+            <a:solidFill>
+              <a:srgbClr val="8ABBD8"/>
+            </a:solidFill>
+            <a:prstDash val="solid"/>
+          </a:ln>
+        </p:spPr>
+      </p:sp>
+      <p:sp>
+        <p:nvSpPr>
+          <p:cNvPr id="15" name="Shape 13"/>
+          <p:cNvSpPr/>
+          <p:nvPr/>
+        </p:nvSpPr>
+        <p:spPr>
+          <a:xfrm>
+            <a:off x="8202168" y="3721608"/>
+            <a:ext cx="2340864" cy="0"/>
+          </a:xfrm>
+          <a:prstGeom prst="line">
+            <a:avLst/>
+          </a:prstGeom>
+          <a:noFill/>
+          <a:ln w="19050">
+            <a:solidFill>
+              <a:srgbClr val="0068B7"/>
+            </a:solidFill>
+            <a:prstDash val="solid"/>
+          </a:ln>
+        </p:spPr>
+      </p:sp>
+      <p:sp>
+        <p:nvSpPr>
+          <p:cNvPr id="16" name="Shape 14"/>
+          <p:cNvSpPr/>
+          <p:nvPr/>
+        </p:nvSpPr>
+        <p:spPr>
+          <a:xfrm>
+            <a:off x="9198864" y="4206240"/>
+            <a:ext cx="347472" cy="347472"/>
+          </a:xfrm>
+          <a:prstGeom prst="ellipse">
+            <a:avLst/>
+          </a:prstGeom>
+          <a:solidFill>
+            <a:srgbClr val="2F8A28"/>
+          </a:solidFill>
+          <a:ln w="12700">
+            <a:solidFill>
+              <a:srgbClr val="2F8A28"/>
+            </a:solidFill>
+            <a:prstDash val="solid"/>
+          </a:ln>
+        </p:spPr>
+      </p:sp>
+      <p:sp>
+        <p:nvSpPr>
+          <p:cNvPr id="17" name="Text 15"/>
+          <p:cNvSpPr/>
+          <p:nvPr/>
+        </p:nvSpPr>
+        <p:spPr>
+          <a:xfrm>
+            <a:off x="7909560" y="3977640"/>
+            <a:ext cx="2926080" cy="182880"/>
+          </a:xfrm>
+          <a:prstGeom prst="rect">
+            <a:avLst/>
+          </a:prstGeom>
+          <a:noFill/>
+          <a:ln/>
+        </p:spPr>
+        <p:txBody>
+          <a:bodyPr wrap="square" lIns="0" tIns="0" rIns="0" bIns="0" rtlCol="0" anchor="ctr"/>
+          <a:lstStyle/>
+          <a:p>
+            <a:pPr algn="ctr" indent="0" marL="0">
+              <a:buNone/>
+            </a:pPr>
+            <a:r>
+              <a:rPr lang="en-US" sz="1000" dirty="0">
+                <a:solidFill>
+                  <a:srgbClr val="003A63"/>
+                </a:solidFill>
+                <a:latin typeface="Aptos" pitchFamily="34" charset="0"/>
+                <a:ea typeface="Aptos" pitchFamily="34" charset="-122"/>
+                <a:cs typeface="Aptos" pitchFamily="34" charset="-120"/>
+              </a:rPr>
+              <a:t>Concept to action</a:t>
+            </a:r>
+            <a:endParaRPr lang="en-US" sz="1000" dirty="0"/>
+          </a:p>
+        </p:txBody>
+      </p:sp>
+      <p:sp>
+        <p:nvSpPr>
+          <p:cNvPr id="18" name="Shape 16"/>
+          <p:cNvSpPr/>
+          <p:nvPr/>
+        </p:nvSpPr>
+        <p:spPr>
+          <a:xfrm>
+            <a:off x="7635240" y="4498848"/>
+            <a:ext cx="3474720" cy="1143000"/>
+          </a:xfrm>
+          <a:prstGeom prst="roundRect">
+            <a:avLst>
+              <a:gd name="adj" fmla="val 9600"/>
             </a:avLst>
           </a:prstGeom>
           <a:solidFill>
@@ -14802,14 +16316,14 @@
       </p:sp>
       <p:sp>
         <p:nvSpPr>
-          <p:cNvPr id="16" name="Text 14"/>
-          <p:cNvSpPr/>
-          <p:nvPr/>
-        </p:nvSpPr>
-        <p:spPr>
-          <a:xfrm>
-            <a:off x="8074152" y="3666744"/>
-            <a:ext cx="2825496" cy="256032"/>
+          <p:cNvPr id="19" name="Text 17"/>
+          <p:cNvSpPr/>
+          <p:nvPr/>
+        </p:nvSpPr>
+        <p:spPr>
+          <a:xfrm>
+            <a:off x="7799832" y="4645152"/>
+            <a:ext cx="3145536" cy="256032"/>
           </a:xfrm>
           <a:prstGeom prst="rect">
             <a:avLst/>
@@ -14833,7 +16347,7 @@
                 <a:ea typeface="Aptos" pitchFamily="34" charset="-122"/>
                 <a:cs typeface="Aptos" pitchFamily="34" charset="-120"/>
               </a:rPr>
-              <a:t>Use this for</a:t>
+              <a:t>Apply it</a:t>
             </a:r>
             <a:endParaRPr lang="en-US" sz="1300" dirty="0"/>
           </a:p>
@@ -14841,14 +16355,14 @@
       </p:sp>
       <p:sp>
         <p:nvSpPr>
-          <p:cNvPr id="17" name="Text 15"/>
-          <p:cNvSpPr/>
-          <p:nvPr/>
-        </p:nvSpPr>
-        <p:spPr>
-          <a:xfrm>
-            <a:off x="8074152" y="4023360"/>
-            <a:ext cx="2825496" cy="1097280"/>
+          <p:cNvPr id="20" name="Text 18"/>
+          <p:cNvSpPr/>
+          <p:nvPr/>
+        </p:nvSpPr>
+        <p:spPr>
+          <a:xfrm>
+            <a:off x="7799832" y="5001768"/>
+            <a:ext cx="3145536" cy="502920"/>
           </a:xfrm>
           <a:prstGeom prst="rect">
             <a:avLst/>
@@ -14874,7 +16388,7 @@
                 <a:ea typeface="Aptos" pitchFamily="34" charset="-122"/>
                 <a:cs typeface="Aptos" pitchFamily="34" charset="-120"/>
               </a:rPr>
-              <a:t>Connect the concept to public health decisions, safeguards, documentation, or implementation work.</a:t>
+              <a:t>Connect the concept to public health purpose, responsible use, required safeguards, documentation, and the next action a department should take.</a:t>
             </a:r>
             <a:endParaRPr lang="en-US" sz="1550" dirty="0"/>
           </a:p>
@@ -15048,8 +16562,8 @@
         </p:nvSpPr>
         <p:spPr>
           <a:xfrm>
-            <a:off x="9966960" y="6537960"/>
-            <a:ext cx="1645920" cy="201168"/>
+            <a:off x="9646920" y="6537960"/>
+            <a:ext cx="1965960" cy="201168"/>
           </a:xfrm>
           <a:prstGeom prst="rect">
             <a:avLst/>
@@ -15073,7 +16587,7 @@
                 <a:ea typeface="Aptos" pitchFamily="34" charset="-122"/>
                 <a:cs typeface="Aptos" pitchFamily="34" charset="-120"/>
               </a:rPr>
-              <a:t>Â© Paula Soper</a:t>
+              <a:t>Copyright Paula Soper</a:t>
             </a:r>
             <a:endParaRPr lang="en-US" sz="800" dirty="0"/>
           </a:p>
@@ -15120,77 +16634,13 @@
       </p:sp>
       <p:sp>
         <p:nvSpPr>
-          <p:cNvPr id="8" name="Shape 6"/>
+          <p:cNvPr id="8" name="Text 6"/>
           <p:cNvSpPr/>
           <p:nvPr/>
         </p:nvSpPr>
         <p:spPr>
           <a:xfrm>
             <a:off x="640080" y="658368"/>
-            <a:ext cx="420624" cy="420624"/>
-          </a:xfrm>
-          <a:prstGeom prst="ellipse">
-            <a:avLst/>
-          </a:prstGeom>
-          <a:solidFill>
-            <a:srgbClr val="0068B7"/>
-          </a:solidFill>
-          <a:ln w="12700">
-            <a:solidFill>
-              <a:srgbClr val="0068B7"/>
-            </a:solidFill>
-            <a:prstDash val="solid"/>
-          </a:ln>
-        </p:spPr>
-      </p:sp>
-      <p:sp>
-        <p:nvSpPr>
-          <p:cNvPr id="9" name="Text 7"/>
-          <p:cNvSpPr/>
-          <p:nvPr/>
-        </p:nvSpPr>
-        <p:spPr>
-          <a:xfrm>
-            <a:off x="640080" y="731520"/>
-            <a:ext cx="420624" cy="164592"/>
-          </a:xfrm>
-          <a:prstGeom prst="rect">
-            <a:avLst/>
-          </a:prstGeom>
-          <a:noFill/>
-          <a:ln/>
-        </p:spPr>
-        <p:txBody>
-          <a:bodyPr wrap="square" lIns="0" tIns="0" rIns="0" bIns="0" rtlCol="0" anchor="ctr"/>
-          <a:lstStyle/>
-          <a:p>
-            <a:pPr algn="ctr" indent="0" marL="0">
-              <a:buNone/>
-            </a:pPr>
-            <a:r>
-              <a:rPr lang="en-US" sz="1100" b="1" dirty="0">
-                <a:solidFill>
-                  <a:srgbClr val="FFFFFF"/>
-                </a:solidFill>
-                <a:latin typeface="Aptos" pitchFamily="34" charset="0"/>
-                <a:ea typeface="Aptos" pitchFamily="34" charset="-122"/>
-                <a:cs typeface="Aptos" pitchFamily="34" charset="-120"/>
-              </a:rPr>
-              <a:t>3</a:t>
-            </a:r>
-            <a:endParaRPr lang="en-US" sz="1100" dirty="0"/>
-          </a:p>
-        </p:txBody>
-      </p:sp>
-      <p:sp>
-        <p:nvSpPr>
-          <p:cNvPr id="10" name="Text 8"/>
-          <p:cNvSpPr/>
-          <p:nvPr/>
-        </p:nvSpPr>
-        <p:spPr>
-          <a:xfrm>
-            <a:off x="640080" y="621792"/>
             <a:ext cx="10881360" cy="713232"/>
           </a:xfrm>
           <a:prstGeom prst="rect">
@@ -15225,14 +16675,14 @@
       </p:sp>
       <p:sp>
         <p:nvSpPr>
-          <p:cNvPr id="11" name="Text 9"/>
+          <p:cNvPr id="9" name="Text 7"/>
           <p:cNvSpPr/>
           <p:nvPr/>
         </p:nvSpPr>
         <p:spPr>
           <a:xfrm>
             <a:off x="868680" y="1508760"/>
-            <a:ext cx="6537960" cy="4160520"/>
+            <a:ext cx="6309360" cy="4160520"/>
           </a:xfrm>
           <a:prstGeom prst="rect">
             <a:avLst/>
@@ -15291,18 +16741,18 @@
       </p:sp>
       <p:sp>
         <p:nvSpPr>
-          <p:cNvPr id="12" name="Shape 10"/>
-          <p:cNvSpPr/>
-          <p:nvPr/>
-        </p:nvSpPr>
-        <p:spPr>
-          <a:xfrm>
-            <a:off x="7909560" y="1417320"/>
-            <a:ext cx="3154680" cy="1828800"/>
+          <p:cNvPr id="10" name="Shape 8"/>
+          <p:cNvSpPr/>
+          <p:nvPr/>
+        </p:nvSpPr>
+        <p:spPr>
+          <a:xfrm>
+            <a:off x="7635240" y="1325880"/>
+            <a:ext cx="3474720" cy="1325880"/>
           </a:xfrm>
           <a:prstGeom prst="roundRect">
             <a:avLst>
-              <a:gd name="adj" fmla="val 6000"/>
+              <a:gd name="adj" fmla="val 8276"/>
             </a:avLst>
           </a:prstGeom>
           <a:solidFill>
@@ -15318,14 +16768,14 @@
       </p:sp>
       <p:sp>
         <p:nvSpPr>
-          <p:cNvPr id="13" name="Text 11"/>
-          <p:cNvSpPr/>
-          <p:nvPr/>
-        </p:nvSpPr>
-        <p:spPr>
-          <a:xfrm>
-            <a:off x="8074152" y="1563624"/>
-            <a:ext cx="2825496" cy="256032"/>
+          <p:cNvPr id="11" name="Text 9"/>
+          <p:cNvSpPr/>
+          <p:nvPr/>
+        </p:nvSpPr>
+        <p:spPr>
+          <a:xfrm>
+            <a:off x="7799832" y="1472184"/>
+            <a:ext cx="3145536" cy="256032"/>
           </a:xfrm>
           <a:prstGeom prst="rect">
             <a:avLst/>
@@ -15349,7 +16799,7 @@
                 <a:ea typeface="Aptos" pitchFamily="34" charset="-122"/>
                 <a:cs typeface="Aptos" pitchFamily="34" charset="-120"/>
               </a:rPr>
-              <a:t>Key idea</a:t>
+              <a:t>Core concept</a:t>
             </a:r>
             <a:endParaRPr lang="en-US" sz="1300" dirty="0"/>
           </a:p>
@@ -15357,14 +16807,14 @@
       </p:sp>
       <p:sp>
         <p:nvSpPr>
-          <p:cNvPr id="14" name="Text 12"/>
-          <p:cNvSpPr/>
-          <p:nvPr/>
-        </p:nvSpPr>
-        <p:spPr>
-          <a:xfrm>
-            <a:off x="8074152" y="1920240"/>
-            <a:ext cx="2825496" cy="1188720"/>
+          <p:cNvPr id="12" name="Text 10"/>
+          <p:cNvSpPr/>
+          <p:nvPr/>
+        </p:nvSpPr>
+        <p:spPr>
+          <a:xfrm>
+            <a:off x="7799832" y="1828800"/>
+            <a:ext cx="3145536" cy="685800"/>
           </a:xfrm>
           <a:prstGeom prst="rect">
             <a:avLst/>
@@ -15398,18 +16848,159 @@
       </p:sp>
       <p:sp>
         <p:nvSpPr>
-          <p:cNvPr id="15" name="Shape 13"/>
-          <p:cNvSpPr/>
-          <p:nvPr/>
-        </p:nvSpPr>
-        <p:spPr>
-          <a:xfrm>
-            <a:off x="7909560" y="3520440"/>
-            <a:ext cx="3154680" cy="1737360"/>
+          <p:cNvPr id="13" name="Shape 11"/>
+          <p:cNvSpPr/>
+          <p:nvPr/>
+        </p:nvSpPr>
+        <p:spPr>
+          <a:xfrm>
+            <a:off x="7635240" y="2788920"/>
+            <a:ext cx="3474720" cy="1536192"/>
           </a:xfrm>
           <a:prstGeom prst="roundRect">
             <a:avLst>
-              <a:gd name="adj" fmla="val 6316"/>
+              <a:gd name="adj" fmla="val 7143"/>
+            </a:avLst>
+          </a:prstGeom>
+          <a:solidFill>
+            <a:srgbClr val="FFFFFF">
+              <a:alpha val="88000"/>
+            </a:srgbClr>
+          </a:solidFill>
+          <a:ln w="12700">
+            <a:solidFill>
+              <a:srgbClr val="D6E8F2"/>
+            </a:solidFill>
+            <a:prstDash val="solid"/>
+          </a:ln>
+        </p:spPr>
+      </p:sp>
+      <p:sp>
+        <p:nvSpPr>
+          <p:cNvPr id="14" name="Shape 12"/>
+          <p:cNvSpPr/>
+          <p:nvPr/>
+        </p:nvSpPr>
+        <p:spPr>
+          <a:xfrm>
+            <a:off x="8074152" y="3291840"/>
+            <a:ext cx="2596896" cy="749808"/>
+          </a:xfrm>
+          <a:prstGeom prst="rect">
+            <a:avLst/>
+          </a:prstGeom>
+          <a:solidFill>
+            <a:srgbClr val="EAF6F8"/>
+          </a:solidFill>
+          <a:ln w="12700">
+            <a:solidFill>
+              <a:srgbClr val="8ABBD8"/>
+            </a:solidFill>
+            <a:prstDash val="solid"/>
+          </a:ln>
+        </p:spPr>
+      </p:sp>
+      <p:sp>
+        <p:nvSpPr>
+          <p:cNvPr id="15" name="Shape 13"/>
+          <p:cNvSpPr/>
+          <p:nvPr/>
+        </p:nvSpPr>
+        <p:spPr>
+          <a:xfrm>
+            <a:off x="8202168" y="3721608"/>
+            <a:ext cx="2340864" cy="0"/>
+          </a:xfrm>
+          <a:prstGeom prst="line">
+            <a:avLst/>
+          </a:prstGeom>
+          <a:noFill/>
+          <a:ln w="19050">
+            <a:solidFill>
+              <a:srgbClr val="0068B7"/>
+            </a:solidFill>
+            <a:prstDash val="solid"/>
+          </a:ln>
+        </p:spPr>
+      </p:sp>
+      <p:sp>
+        <p:nvSpPr>
+          <p:cNvPr id="16" name="Shape 14"/>
+          <p:cNvSpPr/>
+          <p:nvPr/>
+        </p:nvSpPr>
+        <p:spPr>
+          <a:xfrm>
+            <a:off x="9198864" y="4206240"/>
+            <a:ext cx="347472" cy="347472"/>
+          </a:xfrm>
+          <a:prstGeom prst="ellipse">
+            <a:avLst/>
+          </a:prstGeom>
+          <a:solidFill>
+            <a:srgbClr val="2F8A28"/>
+          </a:solidFill>
+          <a:ln w="12700">
+            <a:solidFill>
+              <a:srgbClr val="2F8A28"/>
+            </a:solidFill>
+            <a:prstDash val="solid"/>
+          </a:ln>
+        </p:spPr>
+      </p:sp>
+      <p:sp>
+        <p:nvSpPr>
+          <p:cNvPr id="17" name="Text 15"/>
+          <p:cNvSpPr/>
+          <p:nvPr/>
+        </p:nvSpPr>
+        <p:spPr>
+          <a:xfrm>
+            <a:off x="7909560" y="3977640"/>
+            <a:ext cx="2926080" cy="182880"/>
+          </a:xfrm>
+          <a:prstGeom prst="rect">
+            <a:avLst/>
+          </a:prstGeom>
+          <a:noFill/>
+          <a:ln/>
+        </p:spPr>
+        <p:txBody>
+          <a:bodyPr wrap="square" lIns="0" tIns="0" rIns="0" bIns="0" rtlCol="0" anchor="ctr"/>
+          <a:lstStyle/>
+          <a:p>
+            <a:pPr algn="ctr" indent="0" marL="0">
+              <a:buNone/>
+            </a:pPr>
+            <a:r>
+              <a:rPr lang="en-US" sz="1000" dirty="0">
+                <a:solidFill>
+                  <a:srgbClr val="003A63"/>
+                </a:solidFill>
+                <a:latin typeface="Aptos" pitchFamily="34" charset="0"/>
+                <a:ea typeface="Aptos" pitchFamily="34" charset="-122"/>
+                <a:cs typeface="Aptos" pitchFamily="34" charset="-120"/>
+              </a:rPr>
+              <a:t>Concept to action</a:t>
+            </a:r>
+            <a:endParaRPr lang="en-US" sz="1000" dirty="0"/>
+          </a:p>
+        </p:txBody>
+      </p:sp>
+      <p:sp>
+        <p:nvSpPr>
+          <p:cNvPr id="18" name="Shape 16"/>
+          <p:cNvSpPr/>
+          <p:nvPr/>
+        </p:nvSpPr>
+        <p:spPr>
+          <a:xfrm>
+            <a:off x="7635240" y="4498848"/>
+            <a:ext cx="3474720" cy="1143000"/>
+          </a:xfrm>
+          <a:prstGeom prst="roundRect">
+            <a:avLst>
+              <a:gd name="adj" fmla="val 9600"/>
             </a:avLst>
           </a:prstGeom>
           <a:solidFill>
@@ -15425,14 +17016,14 @@
       </p:sp>
       <p:sp>
         <p:nvSpPr>
-          <p:cNvPr id="16" name="Text 14"/>
-          <p:cNvSpPr/>
-          <p:nvPr/>
-        </p:nvSpPr>
-        <p:spPr>
-          <a:xfrm>
-            <a:off x="8074152" y="3666744"/>
-            <a:ext cx="2825496" cy="256032"/>
+          <p:cNvPr id="19" name="Text 17"/>
+          <p:cNvSpPr/>
+          <p:nvPr/>
+        </p:nvSpPr>
+        <p:spPr>
+          <a:xfrm>
+            <a:off x="7799832" y="4645152"/>
+            <a:ext cx="3145536" cy="256032"/>
           </a:xfrm>
           <a:prstGeom prst="rect">
             <a:avLst/>
@@ -15456,7 +17047,7 @@
                 <a:ea typeface="Aptos" pitchFamily="34" charset="-122"/>
                 <a:cs typeface="Aptos" pitchFamily="34" charset="-120"/>
               </a:rPr>
-              <a:t>Use this for</a:t>
+              <a:t>Apply it</a:t>
             </a:r>
             <a:endParaRPr lang="en-US" sz="1300" dirty="0"/>
           </a:p>
@@ -15464,14 +17055,14 @@
       </p:sp>
       <p:sp>
         <p:nvSpPr>
-          <p:cNvPr id="17" name="Text 15"/>
-          <p:cNvSpPr/>
-          <p:nvPr/>
-        </p:nvSpPr>
-        <p:spPr>
-          <a:xfrm>
-            <a:off x="8074152" y="4023360"/>
-            <a:ext cx="2825496" cy="1097280"/>
+          <p:cNvPr id="20" name="Text 18"/>
+          <p:cNvSpPr/>
+          <p:nvPr/>
+        </p:nvSpPr>
+        <p:spPr>
+          <a:xfrm>
+            <a:off x="7799832" y="5001768"/>
+            <a:ext cx="3145536" cy="502920"/>
           </a:xfrm>
           <a:prstGeom prst="rect">
             <a:avLst/>
@@ -15497,7 +17088,7 @@
                 <a:ea typeface="Aptos" pitchFamily="34" charset="-122"/>
                 <a:cs typeface="Aptos" pitchFamily="34" charset="-120"/>
               </a:rPr>
-              <a:t>Connect the concept to public health decisions, safeguards, documentation, or implementation work.</a:t>
+              <a:t>Connect the concept to public health purpose, responsible use, required safeguards, documentation, and the next action a department should take.</a:t>
             </a:r>
             <a:endParaRPr lang="en-US" sz="1550" dirty="0"/>
           </a:p>
@@ -15671,8 +17262,8 @@
         </p:nvSpPr>
         <p:spPr>
           <a:xfrm>
-            <a:off x="9966960" y="6537960"/>
-            <a:ext cx="1645920" cy="201168"/>
+            <a:off x="9646920" y="6537960"/>
+            <a:ext cx="1965960" cy="201168"/>
           </a:xfrm>
           <a:prstGeom prst="rect">
             <a:avLst/>
@@ -15696,7 +17287,7 @@
                 <a:ea typeface="Aptos" pitchFamily="34" charset="-122"/>
                 <a:cs typeface="Aptos" pitchFamily="34" charset="-120"/>
               </a:rPr>
-              <a:t>Â© Paula Soper</a:t>
+              <a:t>Copyright Paula Soper</a:t>
             </a:r>
             <a:endParaRPr lang="en-US" sz="800" dirty="0"/>
           </a:p>
@@ -15743,77 +17334,13 @@
       </p:sp>
       <p:sp>
         <p:nvSpPr>
-          <p:cNvPr id="8" name="Shape 6"/>
+          <p:cNvPr id="8" name="Text 6"/>
           <p:cNvSpPr/>
           <p:nvPr/>
         </p:nvSpPr>
         <p:spPr>
           <a:xfrm>
             <a:off x="640080" y="658368"/>
-            <a:ext cx="420624" cy="420624"/>
-          </a:xfrm>
-          <a:prstGeom prst="ellipse">
-            <a:avLst/>
-          </a:prstGeom>
-          <a:solidFill>
-            <a:srgbClr val="0068B7"/>
-          </a:solidFill>
-          <a:ln w="12700">
-            <a:solidFill>
-              <a:srgbClr val="0068B7"/>
-            </a:solidFill>
-            <a:prstDash val="solid"/>
-          </a:ln>
-        </p:spPr>
-      </p:sp>
-      <p:sp>
-        <p:nvSpPr>
-          <p:cNvPr id="9" name="Text 7"/>
-          <p:cNvSpPr/>
-          <p:nvPr/>
-        </p:nvSpPr>
-        <p:spPr>
-          <a:xfrm>
-            <a:off x="640080" y="731520"/>
-            <a:ext cx="420624" cy="164592"/>
-          </a:xfrm>
-          <a:prstGeom prst="rect">
-            <a:avLst/>
-          </a:prstGeom>
-          <a:noFill/>
-          <a:ln/>
-        </p:spPr>
-        <p:txBody>
-          <a:bodyPr wrap="square" lIns="0" tIns="0" rIns="0" bIns="0" rtlCol="0" anchor="ctr"/>
-          <a:lstStyle/>
-          <a:p>
-            <a:pPr algn="ctr" indent="0" marL="0">
-              <a:buNone/>
-            </a:pPr>
-            <a:r>
-              <a:rPr lang="en-US" sz="1100" b="1" dirty="0">
-                <a:solidFill>
-                  <a:srgbClr val="FFFFFF"/>
-                </a:solidFill>
-                <a:latin typeface="Aptos" pitchFamily="34" charset="0"/>
-                <a:ea typeface="Aptos" pitchFamily="34" charset="-122"/>
-                <a:cs typeface="Aptos" pitchFamily="34" charset="-120"/>
-              </a:rPr>
-              <a:t>4</a:t>
-            </a:r>
-            <a:endParaRPr lang="en-US" sz="1100" dirty="0"/>
-          </a:p>
-        </p:txBody>
-      </p:sp>
-      <p:sp>
-        <p:nvSpPr>
-          <p:cNvPr id="10" name="Text 8"/>
-          <p:cNvSpPr/>
-          <p:nvPr/>
-        </p:nvSpPr>
-        <p:spPr>
-          <a:xfrm>
-            <a:off x="640080" y="621792"/>
             <a:ext cx="10881360" cy="713232"/>
           </a:xfrm>
           <a:prstGeom prst="rect">
@@ -15848,14 +17375,14 @@
       </p:sp>
       <p:sp>
         <p:nvSpPr>
-          <p:cNvPr id="11" name="Text 9"/>
+          <p:cNvPr id="9" name="Text 7"/>
           <p:cNvSpPr/>
           <p:nvPr/>
         </p:nvSpPr>
         <p:spPr>
           <a:xfrm>
             <a:off x="868680" y="1508760"/>
-            <a:ext cx="6537960" cy="4160520"/>
+            <a:ext cx="6309360" cy="4160520"/>
           </a:xfrm>
           <a:prstGeom prst="rect">
             <a:avLst/>
@@ -15914,18 +17441,18 @@
       </p:sp>
       <p:sp>
         <p:nvSpPr>
-          <p:cNvPr id="12" name="Shape 10"/>
-          <p:cNvSpPr/>
-          <p:nvPr/>
-        </p:nvSpPr>
-        <p:spPr>
-          <a:xfrm>
-            <a:off x="7909560" y="1417320"/>
-            <a:ext cx="3154680" cy="1828800"/>
+          <p:cNvPr id="10" name="Shape 8"/>
+          <p:cNvSpPr/>
+          <p:nvPr/>
+        </p:nvSpPr>
+        <p:spPr>
+          <a:xfrm>
+            <a:off x="7635240" y="1325880"/>
+            <a:ext cx="3474720" cy="1325880"/>
           </a:xfrm>
           <a:prstGeom prst="roundRect">
             <a:avLst>
-              <a:gd name="adj" fmla="val 6000"/>
+              <a:gd name="adj" fmla="val 8276"/>
             </a:avLst>
           </a:prstGeom>
           <a:solidFill>
@@ -15941,14 +17468,14 @@
       </p:sp>
       <p:sp>
         <p:nvSpPr>
-          <p:cNvPr id="13" name="Text 11"/>
-          <p:cNvSpPr/>
-          <p:nvPr/>
-        </p:nvSpPr>
-        <p:spPr>
-          <a:xfrm>
-            <a:off x="8074152" y="1563624"/>
-            <a:ext cx="2825496" cy="256032"/>
+          <p:cNvPr id="11" name="Text 9"/>
+          <p:cNvSpPr/>
+          <p:nvPr/>
+        </p:nvSpPr>
+        <p:spPr>
+          <a:xfrm>
+            <a:off x="7799832" y="1472184"/>
+            <a:ext cx="3145536" cy="256032"/>
           </a:xfrm>
           <a:prstGeom prst="rect">
             <a:avLst/>
@@ -15972,7 +17499,7 @@
                 <a:ea typeface="Aptos" pitchFamily="34" charset="-122"/>
                 <a:cs typeface="Aptos" pitchFamily="34" charset="-120"/>
               </a:rPr>
-              <a:t>Key idea</a:t>
+              <a:t>Core concept</a:t>
             </a:r>
             <a:endParaRPr lang="en-US" sz="1300" dirty="0"/>
           </a:p>
@@ -15980,14 +17507,14 @@
       </p:sp>
       <p:sp>
         <p:nvSpPr>
-          <p:cNvPr id="14" name="Text 12"/>
-          <p:cNvSpPr/>
-          <p:nvPr/>
-        </p:nvSpPr>
-        <p:spPr>
-          <a:xfrm>
-            <a:off x="8074152" y="1920240"/>
-            <a:ext cx="2825496" cy="1188720"/>
+          <p:cNvPr id="12" name="Text 10"/>
+          <p:cNvSpPr/>
+          <p:nvPr/>
+        </p:nvSpPr>
+        <p:spPr>
+          <a:xfrm>
+            <a:off x="7799832" y="1828800"/>
+            <a:ext cx="3145536" cy="685800"/>
           </a:xfrm>
           <a:prstGeom prst="rect">
             <a:avLst/>
@@ -16021,18 +17548,159 @@
       </p:sp>
       <p:sp>
         <p:nvSpPr>
-          <p:cNvPr id="15" name="Shape 13"/>
-          <p:cNvSpPr/>
-          <p:nvPr/>
-        </p:nvSpPr>
-        <p:spPr>
-          <a:xfrm>
-            <a:off x="7909560" y="3520440"/>
-            <a:ext cx="3154680" cy="1737360"/>
+          <p:cNvPr id="13" name="Shape 11"/>
+          <p:cNvSpPr/>
+          <p:nvPr/>
+        </p:nvSpPr>
+        <p:spPr>
+          <a:xfrm>
+            <a:off x="7635240" y="2788920"/>
+            <a:ext cx="3474720" cy="1536192"/>
           </a:xfrm>
           <a:prstGeom prst="roundRect">
             <a:avLst>
-              <a:gd name="adj" fmla="val 6316"/>
+              <a:gd name="adj" fmla="val 7143"/>
+            </a:avLst>
+          </a:prstGeom>
+          <a:solidFill>
+            <a:srgbClr val="FFFFFF">
+              <a:alpha val="88000"/>
+            </a:srgbClr>
+          </a:solidFill>
+          <a:ln w="12700">
+            <a:solidFill>
+              <a:srgbClr val="D6E8F2"/>
+            </a:solidFill>
+            <a:prstDash val="solid"/>
+          </a:ln>
+        </p:spPr>
+      </p:sp>
+      <p:sp>
+        <p:nvSpPr>
+          <p:cNvPr id="14" name="Shape 12"/>
+          <p:cNvSpPr/>
+          <p:nvPr/>
+        </p:nvSpPr>
+        <p:spPr>
+          <a:xfrm>
+            <a:off x="8074152" y="3291840"/>
+            <a:ext cx="2596896" cy="749808"/>
+          </a:xfrm>
+          <a:prstGeom prst="rect">
+            <a:avLst/>
+          </a:prstGeom>
+          <a:solidFill>
+            <a:srgbClr val="EAF6F8"/>
+          </a:solidFill>
+          <a:ln w="12700">
+            <a:solidFill>
+              <a:srgbClr val="8ABBD8"/>
+            </a:solidFill>
+            <a:prstDash val="solid"/>
+          </a:ln>
+        </p:spPr>
+      </p:sp>
+      <p:sp>
+        <p:nvSpPr>
+          <p:cNvPr id="15" name="Shape 13"/>
+          <p:cNvSpPr/>
+          <p:nvPr/>
+        </p:nvSpPr>
+        <p:spPr>
+          <a:xfrm>
+            <a:off x="8202168" y="3721608"/>
+            <a:ext cx="2340864" cy="0"/>
+          </a:xfrm>
+          <a:prstGeom prst="line">
+            <a:avLst/>
+          </a:prstGeom>
+          <a:noFill/>
+          <a:ln w="19050">
+            <a:solidFill>
+              <a:srgbClr val="0068B7"/>
+            </a:solidFill>
+            <a:prstDash val="solid"/>
+          </a:ln>
+        </p:spPr>
+      </p:sp>
+      <p:sp>
+        <p:nvSpPr>
+          <p:cNvPr id="16" name="Shape 14"/>
+          <p:cNvSpPr/>
+          <p:nvPr/>
+        </p:nvSpPr>
+        <p:spPr>
+          <a:xfrm>
+            <a:off x="9198864" y="4206240"/>
+            <a:ext cx="347472" cy="347472"/>
+          </a:xfrm>
+          <a:prstGeom prst="ellipse">
+            <a:avLst/>
+          </a:prstGeom>
+          <a:solidFill>
+            <a:srgbClr val="2F8A28"/>
+          </a:solidFill>
+          <a:ln w="12700">
+            <a:solidFill>
+              <a:srgbClr val="2F8A28"/>
+            </a:solidFill>
+            <a:prstDash val="solid"/>
+          </a:ln>
+        </p:spPr>
+      </p:sp>
+      <p:sp>
+        <p:nvSpPr>
+          <p:cNvPr id="17" name="Text 15"/>
+          <p:cNvSpPr/>
+          <p:nvPr/>
+        </p:nvSpPr>
+        <p:spPr>
+          <a:xfrm>
+            <a:off x="7909560" y="3977640"/>
+            <a:ext cx="2926080" cy="182880"/>
+          </a:xfrm>
+          <a:prstGeom prst="rect">
+            <a:avLst/>
+          </a:prstGeom>
+          <a:noFill/>
+          <a:ln/>
+        </p:spPr>
+        <p:txBody>
+          <a:bodyPr wrap="square" lIns="0" tIns="0" rIns="0" bIns="0" rtlCol="0" anchor="ctr"/>
+          <a:lstStyle/>
+          <a:p>
+            <a:pPr algn="ctr" indent="0" marL="0">
+              <a:buNone/>
+            </a:pPr>
+            <a:r>
+              <a:rPr lang="en-US" sz="1000" dirty="0">
+                <a:solidFill>
+                  <a:srgbClr val="003A63"/>
+                </a:solidFill>
+                <a:latin typeface="Aptos" pitchFamily="34" charset="0"/>
+                <a:ea typeface="Aptos" pitchFamily="34" charset="-122"/>
+                <a:cs typeface="Aptos" pitchFamily="34" charset="-120"/>
+              </a:rPr>
+              <a:t>Concept to action</a:t>
+            </a:r>
+            <a:endParaRPr lang="en-US" sz="1000" dirty="0"/>
+          </a:p>
+        </p:txBody>
+      </p:sp>
+      <p:sp>
+        <p:nvSpPr>
+          <p:cNvPr id="18" name="Shape 16"/>
+          <p:cNvSpPr/>
+          <p:nvPr/>
+        </p:nvSpPr>
+        <p:spPr>
+          <a:xfrm>
+            <a:off x="7635240" y="4498848"/>
+            <a:ext cx="3474720" cy="1143000"/>
+          </a:xfrm>
+          <a:prstGeom prst="roundRect">
+            <a:avLst>
+              <a:gd name="adj" fmla="val 9600"/>
             </a:avLst>
           </a:prstGeom>
           <a:solidFill>
@@ -16048,14 +17716,14 @@
       </p:sp>
       <p:sp>
         <p:nvSpPr>
-          <p:cNvPr id="16" name="Text 14"/>
-          <p:cNvSpPr/>
-          <p:nvPr/>
-        </p:nvSpPr>
-        <p:spPr>
-          <a:xfrm>
-            <a:off x="8074152" y="3666744"/>
-            <a:ext cx="2825496" cy="256032"/>
+          <p:cNvPr id="19" name="Text 17"/>
+          <p:cNvSpPr/>
+          <p:nvPr/>
+        </p:nvSpPr>
+        <p:spPr>
+          <a:xfrm>
+            <a:off x="7799832" y="4645152"/>
+            <a:ext cx="3145536" cy="256032"/>
           </a:xfrm>
           <a:prstGeom prst="rect">
             <a:avLst/>
@@ -16079,7 +17747,7 @@
                 <a:ea typeface="Aptos" pitchFamily="34" charset="-122"/>
                 <a:cs typeface="Aptos" pitchFamily="34" charset="-120"/>
               </a:rPr>
-              <a:t>Use this for</a:t>
+              <a:t>Apply it</a:t>
             </a:r>
             <a:endParaRPr lang="en-US" sz="1300" dirty="0"/>
           </a:p>
@@ -16087,14 +17755,14 @@
       </p:sp>
       <p:sp>
         <p:nvSpPr>
-          <p:cNvPr id="17" name="Text 15"/>
-          <p:cNvSpPr/>
-          <p:nvPr/>
-        </p:nvSpPr>
-        <p:spPr>
-          <a:xfrm>
-            <a:off x="8074152" y="4023360"/>
-            <a:ext cx="2825496" cy="1097280"/>
+          <p:cNvPr id="20" name="Text 18"/>
+          <p:cNvSpPr/>
+          <p:nvPr/>
+        </p:nvSpPr>
+        <p:spPr>
+          <a:xfrm>
+            <a:off x="7799832" y="5001768"/>
+            <a:ext cx="3145536" cy="502920"/>
           </a:xfrm>
           <a:prstGeom prst="rect">
             <a:avLst/>
@@ -16120,7 +17788,7 @@
                 <a:ea typeface="Aptos" pitchFamily="34" charset="-122"/>
                 <a:cs typeface="Aptos" pitchFamily="34" charset="-120"/>
               </a:rPr>
-              <a:t>Connect the concept to public health decisions, safeguards, documentation, or implementation work.</a:t>
+              <a:t>Connect the concept to public health purpose, responsible use, required safeguards, documentation, and the next action a department should take.</a:t>
             </a:r>
             <a:endParaRPr lang="en-US" sz="1550" dirty="0"/>
           </a:p>

--- a/downloads/presentations/modules/anl-230.pptx
+++ b/downloads/presentations/modules/anl-230.pptx
@@ -3525,13 +3525,11 @@
             </a:avLst>
           </a:prstGeom>
           <a:solidFill>
-            <a:srgbClr val="FFFFFF">
-              <a:alpha val="88000"/>
-            </a:srgbClr>
+            <a:srgbClr val="FFFFFF"/>
           </a:solidFill>
           <a:ln w="12700">
             <a:solidFill>
-              <a:srgbClr val="D6E8F2"/>
+              <a:srgbClr val="B9D7E6"/>
             </a:solidFill>
             <a:prstDash val="solid"/>
           </a:ln>
@@ -3539,119 +3537,112 @@
       </p:sp>
       <p:sp>
         <p:nvSpPr>
-          <p:cNvPr id="14" name="Shape 12"/>
-          <p:cNvSpPr/>
-          <p:nvPr/>
-        </p:nvSpPr>
-        <p:spPr>
-          <a:xfrm>
-            <a:off x="8074152" y="3291840"/>
-            <a:ext cx="2596896" cy="749808"/>
-          </a:xfrm>
-          <a:prstGeom prst="rect">
-            <a:avLst/>
-          </a:prstGeom>
-          <a:solidFill>
-            <a:srgbClr val="EAF6F8"/>
-          </a:solidFill>
-          <a:ln w="12700">
-            <a:solidFill>
-              <a:srgbClr val="8ABBD8"/>
-            </a:solidFill>
-            <a:prstDash val="solid"/>
-          </a:ln>
-        </p:spPr>
-      </p:sp>
-      <p:sp>
-        <p:nvSpPr>
-          <p:cNvPr id="15" name="Shape 13"/>
-          <p:cNvSpPr/>
-          <p:nvPr/>
-        </p:nvSpPr>
-        <p:spPr>
-          <a:xfrm>
-            <a:off x="8202168" y="3721608"/>
-            <a:ext cx="2340864" cy="0"/>
-          </a:xfrm>
-          <a:prstGeom prst="line">
-            <a:avLst/>
-          </a:prstGeom>
-          <a:noFill/>
-          <a:ln w="19050">
-            <a:solidFill>
-              <a:srgbClr val="0068B7"/>
-            </a:solidFill>
-            <a:prstDash val="solid"/>
-          </a:ln>
-        </p:spPr>
+          <p:cNvPr id="14" name="Text 12"/>
+          <p:cNvSpPr/>
+          <p:nvPr/>
+        </p:nvSpPr>
+        <p:spPr>
+          <a:xfrm>
+            <a:off x="7799832" y="2935224"/>
+            <a:ext cx="3145536" cy="256032"/>
+          </a:xfrm>
+          <a:prstGeom prst="rect">
+            <a:avLst/>
+          </a:prstGeom>
+          <a:noFill/>
+          <a:ln/>
+        </p:spPr>
+        <p:txBody>
+          <a:bodyPr wrap="square" lIns="0" tIns="0" rIns="0" bIns="0" rtlCol="0" anchor="ctr"/>
+          <a:lstStyle/>
+          <a:p>
+            <a:pPr indent="0" marL="0">
+              <a:buNone/>
+            </a:pPr>
+            <a:r>
+              <a:rPr lang="en-US" sz="1300" b="1" dirty="0">
+                <a:solidFill>
+                  <a:srgbClr val="0068B7"/>
+                </a:solidFill>
+                <a:latin typeface="Aptos" pitchFamily="34" charset="0"/>
+                <a:ea typeface="Aptos" pitchFamily="34" charset="-122"/>
+                <a:cs typeface="Aptos" pitchFamily="34" charset="-120"/>
+              </a:rPr>
+              <a:t>Concept checkpoints</a:t>
+            </a:r>
+            <a:endParaRPr lang="en-US" sz="1300" dirty="0"/>
+          </a:p>
+        </p:txBody>
+      </p:sp>
+      <p:sp>
+        <p:nvSpPr>
+          <p:cNvPr id="15" name="Text 13"/>
+          <p:cNvSpPr/>
+          <p:nvPr/>
+        </p:nvSpPr>
+        <p:spPr>
+          <a:xfrm>
+            <a:off x="7818120" y="3300984"/>
+            <a:ext cx="3090672" cy="877824"/>
+          </a:xfrm>
+          <a:prstGeom prst="rect">
+            <a:avLst/>
+          </a:prstGeom>
+          <a:noFill/>
+          <a:ln/>
+        </p:spPr>
+        <p:txBody>
+          <a:bodyPr wrap="square" lIns="254" tIns="254" rIns="254" bIns="254" rtlCol="0" anchor="t">
+            <a:normAutofit/>
+          </a:bodyPr>
+          <a:lstStyle/>
+          <a:p>
+            <a:r>
+              <a:rPr lang="en-US" sz="1380" dirty="0">
+                <a:solidFill>
+                  <a:srgbClr val="17364A"/>
+                </a:solidFill>
+                <a:latin typeface="Aptos" pitchFamily="34" charset="0"/>
+                <a:ea typeface="Aptos" pitchFamily="34" charset="-122"/>
+                <a:cs typeface="Aptos" pitchFamily="34" charset="-120"/>
+              </a:rPr>
+              <a:t>People experiencing homelessness, migration, displacement, incarceration, or housing.</a:t>
+            </a:r>
+            <a:endParaRPr lang="en-US" sz="1380" dirty="0"/>
+          </a:p>
+          <a:p>
+            <a:r>
+              <a:rPr lang="en-US" sz="1380" dirty="0">
+                <a:solidFill>
+                  <a:srgbClr val="17364A"/>
+                </a:solidFill>
+                <a:latin typeface="Aptos" pitchFamily="34" charset="0"/>
+                <a:ea typeface="Aptos" pitchFamily="34" charset="-122"/>
+                <a:cs typeface="Aptos" pitchFamily="34" charset="-120"/>
+              </a:rPr>
+              <a:t>Geocoding errors can shift records across boundaries and distort rates for small areas.</a:t>
+            </a:r>
+            <a:endParaRPr lang="en-US" sz="1380" dirty="0"/>
+          </a:p>
+          <a:p>
+            <a:r>
+              <a:rPr lang="en-US" sz="1380" dirty="0">
+                <a:solidFill>
+                  <a:srgbClr val="17364A"/>
+                </a:solidFill>
+                <a:latin typeface="Aptos" pitchFamily="34" charset="0"/>
+                <a:ea typeface="Aptos" pitchFamily="34" charset="-122"/>
+                <a:cs typeface="Aptos" pitchFamily="34" charset="-120"/>
+              </a:rPr>
+              <a:t>Spatial scale shapes interpretation.</a:t>
+            </a:r>
+            <a:endParaRPr lang="en-US" sz="1380" dirty="0"/>
+          </a:p>
+        </p:txBody>
       </p:sp>
       <p:sp>
         <p:nvSpPr>
           <p:cNvPr id="16" name="Shape 14"/>
-          <p:cNvSpPr/>
-          <p:nvPr/>
-        </p:nvSpPr>
-        <p:spPr>
-          <a:xfrm>
-            <a:off x="9198864" y="4206240"/>
-            <a:ext cx="347472" cy="347472"/>
-          </a:xfrm>
-          <a:prstGeom prst="ellipse">
-            <a:avLst/>
-          </a:prstGeom>
-          <a:solidFill>
-            <a:srgbClr val="2F8A28"/>
-          </a:solidFill>
-          <a:ln w="12700">
-            <a:solidFill>
-              <a:srgbClr val="2F8A28"/>
-            </a:solidFill>
-            <a:prstDash val="solid"/>
-          </a:ln>
-        </p:spPr>
-      </p:sp>
-      <p:sp>
-        <p:nvSpPr>
-          <p:cNvPr id="17" name="Text 15"/>
-          <p:cNvSpPr/>
-          <p:nvPr/>
-        </p:nvSpPr>
-        <p:spPr>
-          <a:xfrm>
-            <a:off x="7909560" y="3977640"/>
-            <a:ext cx="2926080" cy="182880"/>
-          </a:xfrm>
-          <a:prstGeom prst="rect">
-            <a:avLst/>
-          </a:prstGeom>
-          <a:noFill/>
-          <a:ln/>
-        </p:spPr>
-        <p:txBody>
-          <a:bodyPr wrap="square" lIns="0" tIns="0" rIns="0" bIns="0" rtlCol="0" anchor="ctr"/>
-          <a:lstStyle/>
-          <a:p>
-            <a:pPr algn="ctr" indent="0" marL="0">
-              <a:buNone/>
-            </a:pPr>
-            <a:r>
-              <a:rPr lang="en-US" sz="1000" dirty="0">
-                <a:solidFill>
-                  <a:srgbClr val="003A63"/>
-                </a:solidFill>
-                <a:latin typeface="Aptos" pitchFamily="34" charset="0"/>
-                <a:ea typeface="Aptos" pitchFamily="34" charset="-122"/>
-                <a:cs typeface="Aptos" pitchFamily="34" charset="-120"/>
-              </a:rPr>
-              <a:t>Concept to action</a:t>
-            </a:r>
-            <a:endParaRPr lang="en-US" sz="1000" dirty="0"/>
-          </a:p>
-        </p:txBody>
-      </p:sp>
-      <p:sp>
-        <p:nvSpPr>
-          <p:cNvPr id="18" name="Shape 16"/>
           <p:cNvSpPr/>
           <p:nvPr/>
         </p:nvSpPr>
@@ -3678,7 +3669,7 @@
       </p:sp>
       <p:sp>
         <p:nvSpPr>
-          <p:cNvPr id="19" name="Text 17"/>
+          <p:cNvPr id="17" name="Text 15"/>
           <p:cNvSpPr/>
           <p:nvPr/>
         </p:nvSpPr>
@@ -3717,7 +3708,7 @@
       </p:sp>
       <p:sp>
         <p:nvSpPr>
-          <p:cNvPr id="20" name="Text 18"/>
+          <p:cNvPr id="18" name="Text 16"/>
           <p:cNvSpPr/>
           <p:nvPr/>
         </p:nvSpPr>
@@ -4225,13 +4216,11 @@
             </a:avLst>
           </a:prstGeom>
           <a:solidFill>
-            <a:srgbClr val="FFFFFF">
-              <a:alpha val="88000"/>
-            </a:srgbClr>
+            <a:srgbClr val="FFFFFF"/>
           </a:solidFill>
           <a:ln w="12700">
             <a:solidFill>
-              <a:srgbClr val="D6E8F2"/>
+              <a:srgbClr val="B9D7E6"/>
             </a:solidFill>
             <a:prstDash val="solid"/>
           </a:ln>
@@ -4239,119 +4228,112 @@
       </p:sp>
       <p:sp>
         <p:nvSpPr>
-          <p:cNvPr id="14" name="Shape 12"/>
-          <p:cNvSpPr/>
-          <p:nvPr/>
-        </p:nvSpPr>
-        <p:spPr>
-          <a:xfrm>
-            <a:off x="8074152" y="3291840"/>
-            <a:ext cx="2596896" cy="749808"/>
-          </a:xfrm>
-          <a:prstGeom prst="rect">
-            <a:avLst/>
-          </a:prstGeom>
-          <a:solidFill>
-            <a:srgbClr val="EAF6F8"/>
-          </a:solidFill>
-          <a:ln w="12700">
-            <a:solidFill>
-              <a:srgbClr val="8ABBD8"/>
-            </a:solidFill>
-            <a:prstDash val="solid"/>
-          </a:ln>
-        </p:spPr>
-      </p:sp>
-      <p:sp>
-        <p:nvSpPr>
-          <p:cNvPr id="15" name="Shape 13"/>
-          <p:cNvSpPr/>
-          <p:nvPr/>
-        </p:nvSpPr>
-        <p:spPr>
-          <a:xfrm>
-            <a:off x="8202168" y="3721608"/>
-            <a:ext cx="2340864" cy="0"/>
-          </a:xfrm>
-          <a:prstGeom prst="line">
-            <a:avLst/>
-          </a:prstGeom>
-          <a:noFill/>
-          <a:ln w="19050">
-            <a:solidFill>
-              <a:srgbClr val="0068B7"/>
-            </a:solidFill>
-            <a:prstDash val="solid"/>
-          </a:ln>
-        </p:spPr>
+          <p:cNvPr id="14" name="Text 12"/>
+          <p:cNvSpPr/>
+          <p:nvPr/>
+        </p:nvSpPr>
+        <p:spPr>
+          <a:xfrm>
+            <a:off x="7799832" y="2935224"/>
+            <a:ext cx="3145536" cy="256032"/>
+          </a:xfrm>
+          <a:prstGeom prst="rect">
+            <a:avLst/>
+          </a:prstGeom>
+          <a:noFill/>
+          <a:ln/>
+        </p:spPr>
+        <p:txBody>
+          <a:bodyPr wrap="square" lIns="0" tIns="0" rIns="0" bIns="0" rtlCol="0" anchor="ctr"/>
+          <a:lstStyle/>
+          <a:p>
+            <a:pPr indent="0" marL="0">
+              <a:buNone/>
+            </a:pPr>
+            <a:r>
+              <a:rPr lang="en-US" sz="1300" b="1" dirty="0">
+                <a:solidFill>
+                  <a:srgbClr val="0068B7"/>
+                </a:solidFill>
+                <a:latin typeface="Aptos" pitchFamily="34" charset="0"/>
+                <a:ea typeface="Aptos" pitchFamily="34" charset="-122"/>
+                <a:cs typeface="Aptos" pitchFamily="34" charset="-120"/>
+              </a:rPr>
+              <a:t>Concept checkpoints</a:t>
+            </a:r>
+            <a:endParaRPr lang="en-US" sz="1300" dirty="0"/>
+          </a:p>
+        </p:txBody>
+      </p:sp>
+      <p:sp>
+        <p:nvSpPr>
+          <p:cNvPr id="15" name="Text 13"/>
+          <p:cNvSpPr/>
+          <p:nvPr/>
+        </p:nvSpPr>
+        <p:spPr>
+          <a:xfrm>
+            <a:off x="7818120" y="3300984"/>
+            <a:ext cx="3090672" cy="877824"/>
+          </a:xfrm>
+          <a:prstGeom prst="rect">
+            <a:avLst/>
+          </a:prstGeom>
+          <a:noFill/>
+          <a:ln/>
+        </p:spPr>
+        <p:txBody>
+          <a:bodyPr wrap="square" lIns="254" tIns="254" rIns="254" bIns="254" rtlCol="0" anchor="t">
+            <a:normAutofit/>
+          </a:bodyPr>
+          <a:lstStyle/>
+          <a:p>
+            <a:r>
+              <a:rPr lang="en-US" sz="1380" dirty="0">
+                <a:solidFill>
+                  <a:srgbClr val="17364A"/>
+                </a:solidFill>
+                <a:latin typeface="Aptos" pitchFamily="34" charset="0"/>
+                <a:ea typeface="Aptos" pitchFamily="34" charset="-122"/>
+                <a:cs typeface="Aptos" pitchFamily="34" charset="-120"/>
+              </a:rPr>
+              <a:t>Social vulnerability, deprivation, rurality, housing burden, transportation access, and.</a:t>
+            </a:r>
+            <a:endParaRPr lang="en-US" sz="1380" dirty="0"/>
+          </a:p>
+          <a:p>
+            <a:r>
+              <a:rPr lang="en-US" sz="1380" dirty="0">
+                <a:solidFill>
+                  <a:srgbClr val="17364A"/>
+                </a:solidFill>
+                <a:latin typeface="Aptos" pitchFamily="34" charset="0"/>
+                <a:ea typeface="Aptos" pitchFamily="34" charset="-122"/>
+                <a:cs typeface="Aptos" pitchFamily="34" charset="-120"/>
+              </a:rPr>
+              <a:t>Agencies should use these indicators to guide supportive action and resource allocation,.</a:t>
+            </a:r>
+            <a:endParaRPr lang="en-US" sz="1380" dirty="0"/>
+          </a:p>
+          <a:p>
+            <a:r>
+              <a:rPr lang="en-US" sz="1380" dirty="0">
+                <a:solidFill>
+                  <a:srgbClr val="17364A"/>
+                </a:solidFill>
+                <a:latin typeface="Aptos" pitchFamily="34" charset="0"/>
+                <a:ea typeface="Aptos" pitchFamily="34" charset="-122"/>
+                <a:cs typeface="Aptos" pitchFamily="34" charset="-120"/>
+              </a:rPr>
+              <a:t>Privacy protection should be planned before analysis.</a:t>
+            </a:r>
+            <a:endParaRPr lang="en-US" sz="1380" dirty="0"/>
+          </a:p>
+        </p:txBody>
       </p:sp>
       <p:sp>
         <p:nvSpPr>
           <p:cNvPr id="16" name="Shape 14"/>
-          <p:cNvSpPr/>
-          <p:nvPr/>
-        </p:nvSpPr>
-        <p:spPr>
-          <a:xfrm>
-            <a:off x="9198864" y="4206240"/>
-            <a:ext cx="347472" cy="347472"/>
-          </a:xfrm>
-          <a:prstGeom prst="ellipse">
-            <a:avLst/>
-          </a:prstGeom>
-          <a:solidFill>
-            <a:srgbClr val="2F8A28"/>
-          </a:solidFill>
-          <a:ln w="12700">
-            <a:solidFill>
-              <a:srgbClr val="2F8A28"/>
-            </a:solidFill>
-            <a:prstDash val="solid"/>
-          </a:ln>
-        </p:spPr>
-      </p:sp>
-      <p:sp>
-        <p:nvSpPr>
-          <p:cNvPr id="17" name="Text 15"/>
-          <p:cNvSpPr/>
-          <p:nvPr/>
-        </p:nvSpPr>
-        <p:spPr>
-          <a:xfrm>
-            <a:off x="7909560" y="3977640"/>
-            <a:ext cx="2926080" cy="182880"/>
-          </a:xfrm>
-          <a:prstGeom prst="rect">
-            <a:avLst/>
-          </a:prstGeom>
-          <a:noFill/>
-          <a:ln/>
-        </p:spPr>
-        <p:txBody>
-          <a:bodyPr wrap="square" lIns="0" tIns="0" rIns="0" bIns="0" rtlCol="0" anchor="ctr"/>
-          <a:lstStyle/>
-          <a:p>
-            <a:pPr algn="ctr" indent="0" marL="0">
-              <a:buNone/>
-            </a:pPr>
-            <a:r>
-              <a:rPr lang="en-US" sz="1000" dirty="0">
-                <a:solidFill>
-                  <a:srgbClr val="003A63"/>
-                </a:solidFill>
-                <a:latin typeface="Aptos" pitchFamily="34" charset="0"/>
-                <a:ea typeface="Aptos" pitchFamily="34" charset="-122"/>
-                <a:cs typeface="Aptos" pitchFamily="34" charset="-120"/>
-              </a:rPr>
-              <a:t>Concept to action</a:t>
-            </a:r>
-            <a:endParaRPr lang="en-US" sz="1000" dirty="0"/>
-          </a:p>
-        </p:txBody>
-      </p:sp>
-      <p:sp>
-        <p:nvSpPr>
-          <p:cNvPr id="18" name="Shape 16"/>
           <p:cNvSpPr/>
           <p:nvPr/>
         </p:nvSpPr>
@@ -4378,7 +4360,7 @@
       </p:sp>
       <p:sp>
         <p:nvSpPr>
-          <p:cNvPr id="19" name="Text 17"/>
+          <p:cNvPr id="17" name="Text 15"/>
           <p:cNvSpPr/>
           <p:nvPr/>
         </p:nvSpPr>
@@ -4417,7 +4399,7 @@
       </p:sp>
       <p:sp>
         <p:nvSpPr>
-          <p:cNvPr id="20" name="Text 18"/>
+          <p:cNvPr id="18" name="Text 16"/>
           <p:cNvSpPr/>
           <p:nvPr/>
         </p:nvSpPr>
@@ -4925,13 +4907,11 @@
             </a:avLst>
           </a:prstGeom>
           <a:solidFill>
-            <a:srgbClr val="FFFFFF">
-              <a:alpha val="88000"/>
-            </a:srgbClr>
+            <a:srgbClr val="FFFFFF"/>
           </a:solidFill>
           <a:ln w="12700">
             <a:solidFill>
-              <a:srgbClr val="D6E8F2"/>
+              <a:srgbClr val="B9D7E6"/>
             </a:solidFill>
             <a:prstDash val="solid"/>
           </a:ln>
@@ -4939,26 +4919,42 @@
       </p:sp>
       <p:sp>
         <p:nvSpPr>
-          <p:cNvPr id="14" name="Shape 12"/>
-          <p:cNvSpPr/>
-          <p:nvPr/>
-        </p:nvSpPr>
-        <p:spPr>
-          <a:xfrm>
-            <a:off x="8046720" y="3108960"/>
-            <a:ext cx="2651760" cy="896112"/>
-          </a:xfrm>
-          <a:prstGeom prst="arc">
-            <a:avLst/>
-          </a:prstGeom>
-          <a:noFill/>
-          <a:ln w="25400">
-            <a:solidFill>
-              <a:srgbClr val="0068B7"/>
-            </a:solidFill>
-            <a:prstDash val="solid"/>
-          </a:ln>
-        </p:spPr>
+          <p:cNvPr id="14" name="Text 12"/>
+          <p:cNvSpPr/>
+          <p:nvPr/>
+        </p:nvSpPr>
+        <p:spPr>
+          <a:xfrm>
+            <a:off x="7799832" y="2935224"/>
+            <a:ext cx="3145536" cy="256032"/>
+          </a:xfrm>
+          <a:prstGeom prst="rect">
+            <a:avLst/>
+          </a:prstGeom>
+          <a:noFill/>
+          <a:ln/>
+        </p:spPr>
+        <p:txBody>
+          <a:bodyPr wrap="square" lIns="0" tIns="0" rIns="0" bIns="0" rtlCol="0" anchor="ctr"/>
+          <a:lstStyle/>
+          <a:p>
+            <a:pPr indent="0" marL="0">
+              <a:buNone/>
+            </a:pPr>
+            <a:r>
+              <a:rPr lang="en-US" sz="1300" b="1" dirty="0">
+                <a:solidFill>
+                  <a:srgbClr val="0068B7"/>
+                </a:solidFill>
+                <a:latin typeface="Aptos" pitchFamily="34" charset="0"/>
+                <a:ea typeface="Aptos" pitchFamily="34" charset="-122"/>
+                <a:cs typeface="Aptos" pitchFamily="34" charset="-120"/>
+              </a:rPr>
+              <a:t>Concept checkpoints</a:t>
+            </a:r>
+            <a:endParaRPr lang="en-US" sz="1300" dirty="0"/>
+          </a:p>
+        </p:txBody>
       </p:sp>
       <p:sp>
         <p:nvSpPr>
@@ -4968,102 +4964,67 @@
         </p:nvSpPr>
         <p:spPr>
           <a:xfrm>
-            <a:off x="7909560" y="3099816"/>
-            <a:ext cx="2926080" cy="256032"/>
-          </a:xfrm>
-          <a:prstGeom prst="rect">
-            <a:avLst/>
-          </a:prstGeom>
-          <a:noFill/>
-          <a:ln/>
-        </p:spPr>
-        <p:txBody>
-          <a:bodyPr wrap="square" lIns="0" tIns="0" rIns="0" bIns="0" rtlCol="0" anchor="ctr"/>
-          <a:lstStyle/>
-          <a:p>
-            <a:pPr algn="ctr" indent="0" marL="0">
-              <a:buNone/>
-            </a:pPr>
-            <a:r>
-              <a:rPr lang="en-US" sz="1500" b="1" dirty="0">
-                <a:solidFill>
-                  <a:srgbClr val="003A63"/>
-                </a:solidFill>
-                <a:latin typeface="Aptos" pitchFamily="34" charset="0"/>
-                <a:ea typeface="Aptos" pitchFamily="34" charset="-122"/>
-                <a:cs typeface="Aptos" pitchFamily="34" charset="-120"/>
-              </a:rPr>
-              <a:t>Risk</a:t>
-            </a:r>
-            <a:endParaRPr lang="en-US" sz="1500" dirty="0"/>
+            <a:off x="7818120" y="3300984"/>
+            <a:ext cx="3090672" cy="877824"/>
+          </a:xfrm>
+          <a:prstGeom prst="rect">
+            <a:avLst/>
+          </a:prstGeom>
+          <a:noFill/>
+          <a:ln/>
+        </p:spPr>
+        <p:txBody>
+          <a:bodyPr wrap="square" lIns="254" tIns="254" rIns="254" bIns="254" rtlCol="0" anchor="t">
+            <a:normAutofit/>
+          </a:bodyPr>
+          <a:lstStyle/>
+          <a:p>
+            <a:r>
+              <a:rPr lang="en-US" sz="1380" dirty="0">
+                <a:solidFill>
+                  <a:srgbClr val="17364A"/>
+                </a:solidFill>
+                <a:latin typeface="Aptos" pitchFamily="34" charset="0"/>
+                <a:ea typeface="Aptos" pitchFamily="34" charset="-122"/>
+                <a:cs typeface="Aptos" pitchFamily="34" charset="-120"/>
+              </a:rPr>
+              <a:t>Guardrails include geocoding quality checks, manual review for unmatched records, and.</a:t>
+            </a:r>
+            <a:endParaRPr lang="en-US" sz="1380" dirty="0"/>
+          </a:p>
+          <a:p>
+            <a:r>
+              <a:rPr lang="en-US" sz="1380" dirty="0">
+                <a:solidFill>
+                  <a:srgbClr val="17364A"/>
+                </a:solidFill>
+                <a:latin typeface="Aptos" pitchFamily="34" charset="0"/>
+                <a:ea typeface="Aptos" pitchFamily="34" charset="-122"/>
+                <a:cs typeface="Aptos" pitchFamily="34" charset="-120"/>
+              </a:rPr>
+              <a:t>Small-area privacy risk.</a:t>
+            </a:r>
+            <a:endParaRPr lang="en-US" sz="1380" dirty="0"/>
+          </a:p>
+          <a:p>
+            <a:r>
+              <a:rPr lang="en-US" sz="1380" dirty="0">
+                <a:solidFill>
+                  <a:srgbClr val="17364A"/>
+                </a:solidFill>
+                <a:latin typeface="Aptos" pitchFamily="34" charset="0"/>
+                <a:ea typeface="Aptos" pitchFamily="34" charset="-122"/>
+                <a:cs typeface="Aptos" pitchFamily="34" charset="-120"/>
+              </a:rPr>
+              <a:t>Detailed maps can reveal sensitive patterns or identities.</a:t>
+            </a:r>
+            <a:endParaRPr lang="en-US" sz="1380" dirty="0"/>
           </a:p>
         </p:txBody>
       </p:sp>
       <p:sp>
         <p:nvSpPr>
           <p:cNvPr id="16" name="Shape 14"/>
-          <p:cNvSpPr/>
-          <p:nvPr/>
-        </p:nvSpPr>
-        <p:spPr>
-          <a:xfrm>
-            <a:off x="8366760" y="3639312"/>
-            <a:ext cx="2011680" cy="0"/>
-          </a:xfrm>
-          <a:prstGeom prst="line">
-            <a:avLst/>
-          </a:prstGeom>
-          <a:noFill/>
-          <a:ln w="63500">
-            <a:solidFill>
-              <a:srgbClr val="2F8A28"/>
-            </a:solidFill>
-            <a:prstDash val="solid"/>
-          </a:ln>
-        </p:spPr>
-      </p:sp>
-      <p:sp>
-        <p:nvSpPr>
-          <p:cNvPr id="17" name="Text 15"/>
-          <p:cNvSpPr/>
-          <p:nvPr/>
-        </p:nvSpPr>
-        <p:spPr>
-          <a:xfrm>
-            <a:off x="7909560" y="3849624"/>
-            <a:ext cx="2926080" cy="164592"/>
-          </a:xfrm>
-          <a:prstGeom prst="rect">
-            <a:avLst/>
-          </a:prstGeom>
-          <a:noFill/>
-          <a:ln/>
-        </p:spPr>
-        <p:txBody>
-          <a:bodyPr wrap="square" lIns="0" tIns="0" rIns="0" bIns="0" rtlCol="0" anchor="ctr"/>
-          <a:lstStyle/>
-          <a:p>
-            <a:pPr algn="ctr" indent="0" marL="0">
-              <a:buNone/>
-            </a:pPr>
-            <a:r>
-              <a:rPr lang="en-US" sz="900" dirty="0">
-                <a:solidFill>
-                  <a:srgbClr val="003A63"/>
-                </a:solidFill>
-                <a:latin typeface="Aptos" pitchFamily="34" charset="0"/>
-                <a:ea typeface="Aptos" pitchFamily="34" charset="-122"/>
-                <a:cs typeface="Aptos" pitchFamily="34" charset="-120"/>
-              </a:rPr>
-              <a:t>Human review</a:t>
-            </a:r>
-            <a:endParaRPr lang="en-US" sz="900" dirty="0"/>
-          </a:p>
-        </p:txBody>
-      </p:sp>
-      <p:sp>
-        <p:nvSpPr>
-          <p:cNvPr id="18" name="Shape 16"/>
           <p:cNvSpPr/>
           <p:nvPr/>
         </p:nvSpPr>
@@ -5090,7 +5051,7 @@
       </p:sp>
       <p:sp>
         <p:nvSpPr>
-          <p:cNvPr id="19" name="Text 17"/>
+          <p:cNvPr id="17" name="Text 15"/>
           <p:cNvSpPr/>
           <p:nvPr/>
         </p:nvSpPr>
@@ -5129,7 +5090,7 @@
       </p:sp>
       <p:sp>
         <p:nvSpPr>
-          <p:cNvPr id="20" name="Text 18"/>
+          <p:cNvPr id="18" name="Text 16"/>
           <p:cNvSpPr/>
           <p:nvPr/>
         </p:nvSpPr>
@@ -5637,13 +5598,11 @@
             </a:avLst>
           </a:prstGeom>
           <a:solidFill>
-            <a:srgbClr val="FFFFFF">
-              <a:alpha val="88000"/>
-            </a:srgbClr>
+            <a:srgbClr val="FFFFFF"/>
           </a:solidFill>
           <a:ln w="12700">
             <a:solidFill>
-              <a:srgbClr val="D6E8F2"/>
+              <a:srgbClr val="B9D7E6"/>
             </a:solidFill>
             <a:prstDash val="solid"/>
           </a:ln>
@@ -5651,26 +5610,42 @@
       </p:sp>
       <p:sp>
         <p:nvSpPr>
-          <p:cNvPr id="14" name="Shape 12"/>
-          <p:cNvSpPr/>
-          <p:nvPr/>
-        </p:nvSpPr>
-        <p:spPr>
-          <a:xfrm>
-            <a:off x="8046720" y="3108960"/>
-            <a:ext cx="2651760" cy="896112"/>
-          </a:xfrm>
-          <a:prstGeom prst="arc">
-            <a:avLst/>
-          </a:prstGeom>
-          <a:noFill/>
-          <a:ln w="25400">
-            <a:solidFill>
-              <a:srgbClr val="0068B7"/>
-            </a:solidFill>
-            <a:prstDash val="solid"/>
-          </a:ln>
-        </p:spPr>
+          <p:cNvPr id="14" name="Text 12"/>
+          <p:cNvSpPr/>
+          <p:nvPr/>
+        </p:nvSpPr>
+        <p:spPr>
+          <a:xfrm>
+            <a:off x="7799832" y="2935224"/>
+            <a:ext cx="3145536" cy="256032"/>
+          </a:xfrm>
+          <a:prstGeom prst="rect">
+            <a:avLst/>
+          </a:prstGeom>
+          <a:noFill/>
+          <a:ln/>
+        </p:spPr>
+        <p:txBody>
+          <a:bodyPr wrap="square" lIns="0" tIns="0" rIns="0" bIns="0" rtlCol="0" anchor="ctr"/>
+          <a:lstStyle/>
+          <a:p>
+            <a:pPr indent="0" marL="0">
+              <a:buNone/>
+            </a:pPr>
+            <a:r>
+              <a:rPr lang="en-US" sz="1300" b="1" dirty="0">
+                <a:solidFill>
+                  <a:srgbClr val="0068B7"/>
+                </a:solidFill>
+                <a:latin typeface="Aptos" pitchFamily="34" charset="0"/>
+                <a:ea typeface="Aptos" pitchFamily="34" charset="-122"/>
+                <a:cs typeface="Aptos" pitchFamily="34" charset="-120"/>
+              </a:rPr>
+              <a:t>Concept checkpoints</a:t>
+            </a:r>
+            <a:endParaRPr lang="en-US" sz="1300" dirty="0"/>
+          </a:p>
+        </p:txBody>
       </p:sp>
       <p:sp>
         <p:nvSpPr>
@@ -5680,102 +5655,67 @@
         </p:nvSpPr>
         <p:spPr>
           <a:xfrm>
-            <a:off x="7909560" y="3099816"/>
-            <a:ext cx="2926080" cy="256032"/>
-          </a:xfrm>
-          <a:prstGeom prst="rect">
-            <a:avLst/>
-          </a:prstGeom>
-          <a:noFill/>
-          <a:ln/>
-        </p:spPr>
-        <p:txBody>
-          <a:bodyPr wrap="square" lIns="0" tIns="0" rIns="0" bIns="0" rtlCol="0" anchor="ctr"/>
-          <a:lstStyle/>
-          <a:p>
-            <a:pPr algn="ctr" indent="0" marL="0">
-              <a:buNone/>
-            </a:pPr>
-            <a:r>
-              <a:rPr lang="en-US" sz="1500" b="1" dirty="0">
-                <a:solidFill>
-                  <a:srgbClr val="003A63"/>
-                </a:solidFill>
-                <a:latin typeface="Aptos" pitchFamily="34" charset="0"/>
-                <a:ea typeface="Aptos" pitchFamily="34" charset="-122"/>
-                <a:cs typeface="Aptos" pitchFamily="34" charset="-120"/>
-              </a:rPr>
-              <a:t>Risk</a:t>
-            </a:r>
-            <a:endParaRPr lang="en-US" sz="1500" dirty="0"/>
+            <a:off x="7818120" y="3300984"/>
+            <a:ext cx="3090672" cy="877824"/>
+          </a:xfrm>
+          <a:prstGeom prst="rect">
+            <a:avLst/>
+          </a:prstGeom>
+          <a:noFill/>
+          <a:ln/>
+        </p:spPr>
+        <p:txBody>
+          <a:bodyPr wrap="square" lIns="254" tIns="254" rIns="254" bIns="254" rtlCol="0" anchor="t">
+            <a:normAutofit/>
+          </a:bodyPr>
+          <a:lstStyle/>
+          <a:p>
+            <a:r>
+              <a:rPr lang="en-US" sz="1380" dirty="0">
+                <a:solidFill>
+                  <a:srgbClr val="17364A"/>
+                </a:solidFill>
+                <a:latin typeface="Aptos" pitchFamily="34" charset="0"/>
+                <a:ea typeface="Aptos" pitchFamily="34" charset="-122"/>
+                <a:cs typeface="Aptos" pitchFamily="34" charset="-120"/>
+              </a:rPr>
+              <a:t>Stigmatizing communities.</a:t>
+            </a:r>
+            <a:endParaRPr lang="en-US" sz="1380" dirty="0"/>
+          </a:p>
+          <a:p>
+            <a:r>
+              <a:rPr lang="en-US" sz="1380" dirty="0">
+                <a:solidFill>
+                  <a:srgbClr val="17364A"/>
+                </a:solidFill>
+                <a:latin typeface="Aptos" pitchFamily="34" charset="0"/>
+                <a:ea typeface="Aptos" pitchFamily="34" charset="-122"/>
+                <a:cs typeface="Aptos" pitchFamily="34" charset="-120"/>
+              </a:rPr>
+              <a:t>Maps can unintentionally label communities as problems.</a:t>
+            </a:r>
+            <a:endParaRPr lang="en-US" sz="1380" dirty="0"/>
+          </a:p>
+          <a:p>
+            <a:r>
+              <a:rPr lang="en-US" sz="1380" dirty="0">
+                <a:solidFill>
+                  <a:srgbClr val="17364A"/>
+                </a:solidFill>
+                <a:latin typeface="Aptos" pitchFamily="34" charset="0"/>
+                <a:ea typeface="Aptos" pitchFamily="34" charset="-122"/>
+                <a:cs typeface="Aptos" pitchFamily="34" charset="-120"/>
+              </a:rPr>
+              <a:t>Guardrails include equity framing, community engagement, careful language, and focus on.</a:t>
+            </a:r>
+            <a:endParaRPr lang="en-US" sz="1380" dirty="0"/>
           </a:p>
         </p:txBody>
       </p:sp>
       <p:sp>
         <p:nvSpPr>
           <p:cNvPr id="16" name="Shape 14"/>
-          <p:cNvSpPr/>
-          <p:nvPr/>
-        </p:nvSpPr>
-        <p:spPr>
-          <a:xfrm>
-            <a:off x="8366760" y="3639312"/>
-            <a:ext cx="2011680" cy="0"/>
-          </a:xfrm>
-          <a:prstGeom prst="line">
-            <a:avLst/>
-          </a:prstGeom>
-          <a:noFill/>
-          <a:ln w="63500">
-            <a:solidFill>
-              <a:srgbClr val="2F8A28"/>
-            </a:solidFill>
-            <a:prstDash val="solid"/>
-          </a:ln>
-        </p:spPr>
-      </p:sp>
-      <p:sp>
-        <p:nvSpPr>
-          <p:cNvPr id="17" name="Text 15"/>
-          <p:cNvSpPr/>
-          <p:nvPr/>
-        </p:nvSpPr>
-        <p:spPr>
-          <a:xfrm>
-            <a:off x="7909560" y="3849624"/>
-            <a:ext cx="2926080" cy="164592"/>
-          </a:xfrm>
-          <a:prstGeom prst="rect">
-            <a:avLst/>
-          </a:prstGeom>
-          <a:noFill/>
-          <a:ln/>
-        </p:spPr>
-        <p:txBody>
-          <a:bodyPr wrap="square" lIns="0" tIns="0" rIns="0" bIns="0" rtlCol="0" anchor="ctr"/>
-          <a:lstStyle/>
-          <a:p>
-            <a:pPr algn="ctr" indent="0" marL="0">
-              <a:buNone/>
-            </a:pPr>
-            <a:r>
-              <a:rPr lang="en-US" sz="900" dirty="0">
-                <a:solidFill>
-                  <a:srgbClr val="003A63"/>
-                </a:solidFill>
-                <a:latin typeface="Aptos" pitchFamily="34" charset="0"/>
-                <a:ea typeface="Aptos" pitchFamily="34" charset="-122"/>
-                <a:cs typeface="Aptos" pitchFamily="34" charset="-120"/>
-              </a:rPr>
-              <a:t>Human review</a:t>
-            </a:r>
-            <a:endParaRPr lang="en-US" sz="900" dirty="0"/>
-          </a:p>
-        </p:txBody>
-      </p:sp>
-      <p:sp>
-        <p:nvSpPr>
-          <p:cNvPr id="18" name="Shape 16"/>
           <p:cNvSpPr/>
           <p:nvPr/>
         </p:nvSpPr>
@@ -5802,7 +5742,7 @@
       </p:sp>
       <p:sp>
         <p:nvSpPr>
-          <p:cNvPr id="19" name="Text 17"/>
+          <p:cNvPr id="17" name="Text 15"/>
           <p:cNvSpPr/>
           <p:nvPr/>
         </p:nvSpPr>
@@ -5841,7 +5781,7 @@
       </p:sp>
       <p:sp>
         <p:nvSpPr>
-          <p:cNvPr id="20" name="Text 18"/>
+          <p:cNvPr id="18" name="Text 16"/>
           <p:cNvSpPr/>
           <p:nvPr/>
         </p:nvSpPr>
@@ -6349,13 +6289,11 @@
             </a:avLst>
           </a:prstGeom>
           <a:solidFill>
-            <a:srgbClr val="FFFFFF">
-              <a:alpha val="88000"/>
-            </a:srgbClr>
+            <a:srgbClr val="FFFFFF"/>
           </a:solidFill>
           <a:ln w="12700">
             <a:solidFill>
-              <a:srgbClr val="D6E8F2"/>
+              <a:srgbClr val="B9D7E6"/>
             </a:solidFill>
             <a:prstDash val="solid"/>
           </a:ln>
@@ -6363,30 +6301,42 @@
       </p:sp>
       <p:sp>
         <p:nvSpPr>
-          <p:cNvPr id="14" name="Shape 12"/>
-          <p:cNvSpPr/>
-          <p:nvPr/>
-        </p:nvSpPr>
-        <p:spPr>
-          <a:xfrm>
-            <a:off x="7927848" y="3319272"/>
-            <a:ext cx="792480" cy="749808"/>
-          </a:xfrm>
-          <a:prstGeom prst="roundRect">
-            <a:avLst>
-              <a:gd name="adj" fmla="val 14634"/>
-            </a:avLst>
-          </a:prstGeom>
-          <a:solidFill>
-            <a:srgbClr val="0068B7"/>
-          </a:solidFill>
-          <a:ln w="12700">
-            <a:solidFill>
-              <a:srgbClr val="0068B7"/>
-            </a:solidFill>
-            <a:prstDash val="solid"/>
-          </a:ln>
-        </p:spPr>
+          <p:cNvPr id="14" name="Text 12"/>
+          <p:cNvSpPr/>
+          <p:nvPr/>
+        </p:nvSpPr>
+        <p:spPr>
+          <a:xfrm>
+            <a:off x="7799832" y="2935224"/>
+            <a:ext cx="3145536" cy="256032"/>
+          </a:xfrm>
+          <a:prstGeom prst="rect">
+            <a:avLst/>
+          </a:prstGeom>
+          <a:noFill/>
+          <a:ln/>
+        </p:spPr>
+        <p:txBody>
+          <a:bodyPr wrap="square" lIns="0" tIns="0" rIns="0" bIns="0" rtlCol="0" anchor="ctr"/>
+          <a:lstStyle/>
+          <a:p>
+            <a:pPr indent="0" marL="0">
+              <a:buNone/>
+            </a:pPr>
+            <a:r>
+              <a:rPr lang="en-US" sz="1300" b="1" dirty="0">
+                <a:solidFill>
+                  <a:srgbClr val="0068B7"/>
+                </a:solidFill>
+                <a:latin typeface="Aptos" pitchFamily="34" charset="0"/>
+                <a:ea typeface="Aptos" pitchFamily="34" charset="-122"/>
+                <a:cs typeface="Aptos" pitchFamily="34" charset="-120"/>
+              </a:rPr>
+              <a:t>Concept checkpoints</a:t>
+            </a:r>
+            <a:endParaRPr lang="en-US" sz="1300" dirty="0"/>
+          </a:p>
+        </p:txBody>
       </p:sp>
       <p:sp>
         <p:nvSpPr>
@@ -6396,240 +6346,67 @@
         </p:nvSpPr>
         <p:spPr>
           <a:xfrm>
-            <a:off x="8001000" y="3511296"/>
-            <a:ext cx="646176" cy="310896"/>
-          </a:xfrm>
-          <a:prstGeom prst="rect">
-            <a:avLst/>
-          </a:prstGeom>
-          <a:noFill/>
-          <a:ln/>
-        </p:spPr>
-        <p:txBody>
-          <a:bodyPr wrap="square" lIns="0" tIns="0" rIns="0" bIns="0" rtlCol="0" anchor="ctr">
+            <a:off x="7818120" y="3300984"/>
+            <a:ext cx="3090672" cy="877824"/>
+          </a:xfrm>
+          <a:prstGeom prst="rect">
+            <a:avLst/>
+          </a:prstGeom>
+          <a:noFill/>
+          <a:ln/>
+        </p:spPr>
+        <p:txBody>
+          <a:bodyPr wrap="square" lIns="254" tIns="254" rIns="254" bIns="254" rtlCol="0" anchor="t">
             <a:normAutofit/>
           </a:bodyPr>
           <a:lstStyle/>
           <a:p>
-            <a:pPr algn="ctr" indent="0" marL="0">
-              <a:buNone/>
-            </a:pPr>
-            <a:r>
-              <a:rPr lang="en-US" sz="1500" b="1" dirty="0">
-                <a:solidFill>
-                  <a:srgbClr val="FFFFFF"/>
-                </a:solidFill>
-                <a:latin typeface="Aptos" pitchFamily="34" charset="0"/>
-                <a:ea typeface="Aptos" pitchFamily="34" charset="-122"/>
-                <a:cs typeface="Aptos" pitchFamily="34" charset="-120"/>
-              </a:rPr>
-              <a:t>Plan</a:t>
-            </a:r>
-            <a:endParaRPr lang="en-US" sz="1500" dirty="0"/>
+            <a:r>
+              <a:rPr lang="en-US" sz="1380" dirty="0">
+                <a:solidFill>
+                  <a:srgbClr val="17364A"/>
+                </a:solidFill>
+                <a:latin typeface="Aptos" pitchFamily="34" charset="0"/>
+                <a:ea typeface="Aptos" pitchFamily="34" charset="-122"/>
+                <a:cs typeface="Aptos" pitchFamily="34" charset="-120"/>
+              </a:rPr>
+              <a:t>Geospatial AI may support predictive analytics, emergency response, inspection.</a:t>
+            </a:r>
+            <a:endParaRPr lang="en-US" sz="1380" dirty="0"/>
+          </a:p>
+          <a:p>
+            <a:r>
+              <a:rPr lang="en-US" sz="1380" dirty="0">
+                <a:solidFill>
+                  <a:srgbClr val="17364A"/>
+                </a:solidFill>
+                <a:latin typeface="Aptos" pitchFamily="34" charset="0"/>
+                <a:ea typeface="Aptos" pitchFamily="34" charset="-122"/>
+                <a:cs typeface="Aptos" pitchFamily="34" charset="-120"/>
+              </a:rPr>
+              <a:t>Generative AI may summarize spatial patterns for leaders, but it must not overstate.</a:t>
+            </a:r>
+            <a:endParaRPr lang="en-US" sz="1380" dirty="0"/>
+          </a:p>
+          <a:p>
+            <a:r>
+              <a:rPr lang="en-US" sz="1380" dirty="0">
+                <a:solidFill>
+                  <a:srgbClr val="17364A"/>
+                </a:solidFill>
+                <a:latin typeface="Aptos" pitchFamily="34" charset="0"/>
+                <a:ea typeface="Aptos" pitchFamily="34" charset="-122"/>
+                <a:cs typeface="Aptos" pitchFamily="34" charset="-120"/>
+              </a:rPr>
+              <a:t>RAG tools may retrieve local plans, maps, and protocols, while agentic workflows may.</a:t>
+            </a:r>
+            <a:endParaRPr lang="en-US" sz="1380" dirty="0"/>
           </a:p>
         </p:txBody>
       </p:sp>
       <p:sp>
         <p:nvSpPr>
           <p:cNvPr id="16" name="Shape 14"/>
-          <p:cNvSpPr/>
-          <p:nvPr/>
-        </p:nvSpPr>
-        <p:spPr>
-          <a:xfrm>
-            <a:off x="8976360" y="3319272"/>
-            <a:ext cx="792480" cy="749808"/>
-          </a:xfrm>
-          <a:prstGeom prst="roundRect">
-            <a:avLst>
-              <a:gd name="adj" fmla="val 14634"/>
-            </a:avLst>
-          </a:prstGeom>
-          <a:solidFill>
-            <a:srgbClr val="2F8A28"/>
-          </a:solidFill>
-          <a:ln w="12700">
-            <a:solidFill>
-              <a:srgbClr val="2F8A28"/>
-            </a:solidFill>
-            <a:prstDash val="solid"/>
-          </a:ln>
-        </p:spPr>
-      </p:sp>
-      <p:sp>
-        <p:nvSpPr>
-          <p:cNvPr id="17" name="Text 15"/>
-          <p:cNvSpPr/>
-          <p:nvPr/>
-        </p:nvSpPr>
-        <p:spPr>
-          <a:xfrm>
-            <a:off x="9049512" y="3511296"/>
-            <a:ext cx="646176" cy="310896"/>
-          </a:xfrm>
-          <a:prstGeom prst="rect">
-            <a:avLst/>
-          </a:prstGeom>
-          <a:noFill/>
-          <a:ln/>
-        </p:spPr>
-        <p:txBody>
-          <a:bodyPr wrap="square" lIns="0" tIns="0" rIns="0" bIns="0" rtlCol="0" anchor="ctr">
-            <a:normAutofit/>
-          </a:bodyPr>
-          <a:lstStyle/>
-          <a:p>
-            <a:pPr algn="ctr" indent="0" marL="0">
-              <a:buNone/>
-            </a:pPr>
-            <a:r>
-              <a:rPr lang="en-US" sz="1500" b="1" dirty="0">
-                <a:solidFill>
-                  <a:srgbClr val="FFFFFF"/>
-                </a:solidFill>
-                <a:latin typeface="Aptos" pitchFamily="34" charset="0"/>
-                <a:ea typeface="Aptos" pitchFamily="34" charset="-122"/>
-                <a:cs typeface="Aptos" pitchFamily="34" charset="-120"/>
-              </a:rPr>
-              <a:t>Do</a:t>
-            </a:r>
-            <a:endParaRPr lang="en-US" sz="1500" dirty="0"/>
-          </a:p>
-        </p:txBody>
-      </p:sp>
-      <p:sp>
-        <p:nvSpPr>
-          <p:cNvPr id="18" name="Shape 16"/>
-          <p:cNvSpPr/>
-          <p:nvPr/>
-        </p:nvSpPr>
-        <p:spPr>
-          <a:xfrm>
-            <a:off x="10024872" y="3319272"/>
-            <a:ext cx="792480" cy="749808"/>
-          </a:xfrm>
-          <a:prstGeom prst="roundRect">
-            <a:avLst>
-              <a:gd name="adj" fmla="val 14634"/>
-            </a:avLst>
-          </a:prstGeom>
-          <a:solidFill>
-            <a:srgbClr val="D69A2D"/>
-          </a:solidFill>
-          <a:ln w="12700">
-            <a:solidFill>
-              <a:srgbClr val="D69A2D"/>
-            </a:solidFill>
-            <a:prstDash val="solid"/>
-          </a:ln>
-        </p:spPr>
-      </p:sp>
-      <p:sp>
-        <p:nvSpPr>
-          <p:cNvPr id="19" name="Text 17"/>
-          <p:cNvSpPr/>
-          <p:nvPr/>
-        </p:nvSpPr>
-        <p:spPr>
-          <a:xfrm>
-            <a:off x="10098024" y="3511296"/>
-            <a:ext cx="646176" cy="310896"/>
-          </a:xfrm>
-          <a:prstGeom prst="rect">
-            <a:avLst/>
-          </a:prstGeom>
-          <a:noFill/>
-          <a:ln/>
-        </p:spPr>
-        <p:txBody>
-          <a:bodyPr wrap="square" lIns="0" tIns="0" rIns="0" bIns="0" rtlCol="0" anchor="ctr">
-            <a:normAutofit/>
-          </a:bodyPr>
-          <a:lstStyle/>
-          <a:p>
-            <a:pPr algn="ctr" indent="0" marL="0">
-              <a:buNone/>
-            </a:pPr>
-            <a:r>
-              <a:rPr lang="en-US" sz="1500" b="1" dirty="0">
-                <a:solidFill>
-                  <a:srgbClr val="FFFFFF"/>
-                </a:solidFill>
-                <a:latin typeface="Aptos" pitchFamily="34" charset="0"/>
-                <a:ea typeface="Aptos" pitchFamily="34" charset="-122"/>
-                <a:cs typeface="Aptos" pitchFamily="34" charset="-120"/>
-              </a:rPr>
-              <a:t>Review</a:t>
-            </a:r>
-            <a:endParaRPr lang="en-US" sz="1500" dirty="0"/>
-          </a:p>
-        </p:txBody>
-      </p:sp>
-      <p:sp>
-        <p:nvSpPr>
-          <p:cNvPr id="20" name="Shape 18"/>
-          <p:cNvSpPr/>
-          <p:nvPr/>
-        </p:nvSpPr>
-        <p:spPr>
-          <a:xfrm>
-            <a:off x="8293608" y="4389120"/>
-            <a:ext cx="2157984" cy="0"/>
-          </a:xfrm>
-          <a:prstGeom prst="line">
-            <a:avLst/>
-          </a:prstGeom>
-          <a:noFill/>
-          <a:ln w="25400">
-            <a:solidFill>
-              <a:srgbClr val="8ABBD8"/>
-            </a:solidFill>
-            <a:prstDash val="solid"/>
-          </a:ln>
-        </p:spPr>
-      </p:sp>
-      <p:sp>
-        <p:nvSpPr>
-          <p:cNvPr id="21" name="Text 19"/>
-          <p:cNvSpPr/>
-          <p:nvPr/>
-        </p:nvSpPr>
-        <p:spPr>
-          <a:xfrm>
-            <a:off x="7909560" y="3977640"/>
-            <a:ext cx="2926080" cy="182880"/>
-          </a:xfrm>
-          <a:prstGeom prst="rect">
-            <a:avLst/>
-          </a:prstGeom>
-          <a:noFill/>
-          <a:ln/>
-        </p:spPr>
-        <p:txBody>
-          <a:bodyPr wrap="square" lIns="0" tIns="0" rIns="0" bIns="0" rtlCol="0" anchor="ctr"/>
-          <a:lstStyle/>
-          <a:p>
-            <a:pPr algn="ctr" indent="0" marL="0">
-              <a:buNone/>
-            </a:pPr>
-            <a:r>
-              <a:rPr lang="en-US" sz="1000" dirty="0">
-                <a:solidFill>
-                  <a:srgbClr val="003A63"/>
-                </a:solidFill>
-                <a:latin typeface="Aptos" pitchFamily="34" charset="0"/>
-                <a:ea typeface="Aptos" pitchFamily="34" charset="-122"/>
-                <a:cs typeface="Aptos" pitchFamily="34" charset="-120"/>
-              </a:rPr>
-              <a:t>Dependencies visible</a:t>
-            </a:r>
-            <a:endParaRPr lang="en-US" sz="1000" dirty="0"/>
-          </a:p>
-        </p:txBody>
-      </p:sp>
-      <p:sp>
-        <p:nvSpPr>
-          <p:cNvPr id="22" name="Shape 20"/>
           <p:cNvSpPr/>
           <p:nvPr/>
         </p:nvSpPr>
@@ -6656,7 +6433,7 @@
       </p:sp>
       <p:sp>
         <p:nvSpPr>
-          <p:cNvPr id="23" name="Text 21"/>
+          <p:cNvPr id="17" name="Text 15"/>
           <p:cNvSpPr/>
           <p:nvPr/>
         </p:nvSpPr>
@@ -6695,7 +6472,7 @@
       </p:sp>
       <p:sp>
         <p:nvSpPr>
-          <p:cNvPr id="24" name="Text 22"/>
+          <p:cNvPr id="18" name="Text 16"/>
           <p:cNvSpPr/>
           <p:nvPr/>
         </p:nvSpPr>
@@ -7203,13 +6980,11 @@
             </a:avLst>
           </a:prstGeom>
           <a:solidFill>
-            <a:srgbClr val="FFFFFF">
-              <a:alpha val="88000"/>
-            </a:srgbClr>
+            <a:srgbClr val="FFFFFF"/>
           </a:solidFill>
           <a:ln w="12700">
             <a:solidFill>
-              <a:srgbClr val="D6E8F2"/>
+              <a:srgbClr val="B9D7E6"/>
             </a:solidFill>
             <a:prstDash val="solid"/>
           </a:ln>
@@ -7217,119 +6992,112 @@
       </p:sp>
       <p:sp>
         <p:nvSpPr>
-          <p:cNvPr id="14" name="Shape 12"/>
-          <p:cNvSpPr/>
-          <p:nvPr/>
-        </p:nvSpPr>
-        <p:spPr>
-          <a:xfrm>
-            <a:off x="8074152" y="3291840"/>
-            <a:ext cx="2596896" cy="749808"/>
-          </a:xfrm>
-          <a:prstGeom prst="rect">
-            <a:avLst/>
-          </a:prstGeom>
-          <a:solidFill>
-            <a:srgbClr val="EAF6F8"/>
-          </a:solidFill>
-          <a:ln w="12700">
-            <a:solidFill>
-              <a:srgbClr val="8ABBD8"/>
-            </a:solidFill>
-            <a:prstDash val="solid"/>
-          </a:ln>
-        </p:spPr>
-      </p:sp>
-      <p:sp>
-        <p:nvSpPr>
-          <p:cNvPr id="15" name="Shape 13"/>
-          <p:cNvSpPr/>
-          <p:nvPr/>
-        </p:nvSpPr>
-        <p:spPr>
-          <a:xfrm>
-            <a:off x="8202168" y="3721608"/>
-            <a:ext cx="2340864" cy="0"/>
-          </a:xfrm>
-          <a:prstGeom prst="line">
-            <a:avLst/>
-          </a:prstGeom>
-          <a:noFill/>
-          <a:ln w="19050">
-            <a:solidFill>
-              <a:srgbClr val="0068B7"/>
-            </a:solidFill>
-            <a:prstDash val="solid"/>
-          </a:ln>
-        </p:spPr>
+          <p:cNvPr id="14" name="Text 12"/>
+          <p:cNvSpPr/>
+          <p:nvPr/>
+        </p:nvSpPr>
+        <p:spPr>
+          <a:xfrm>
+            <a:off x="7799832" y="2935224"/>
+            <a:ext cx="3145536" cy="256032"/>
+          </a:xfrm>
+          <a:prstGeom prst="rect">
+            <a:avLst/>
+          </a:prstGeom>
+          <a:noFill/>
+          <a:ln/>
+        </p:spPr>
+        <p:txBody>
+          <a:bodyPr wrap="square" lIns="0" tIns="0" rIns="0" bIns="0" rtlCol="0" anchor="ctr"/>
+          <a:lstStyle/>
+          <a:p>
+            <a:pPr indent="0" marL="0">
+              <a:buNone/>
+            </a:pPr>
+            <a:r>
+              <a:rPr lang="en-US" sz="1300" b="1" dirty="0">
+                <a:solidFill>
+                  <a:srgbClr val="0068B7"/>
+                </a:solidFill>
+                <a:latin typeface="Aptos" pitchFamily="34" charset="0"/>
+                <a:ea typeface="Aptos" pitchFamily="34" charset="-122"/>
+                <a:cs typeface="Aptos" pitchFamily="34" charset="-120"/>
+              </a:rPr>
+              <a:t>Concept checkpoints</a:t>
+            </a:r>
+            <a:endParaRPr lang="en-US" sz="1300" dirty="0"/>
+          </a:p>
+        </p:txBody>
+      </p:sp>
+      <p:sp>
+        <p:nvSpPr>
+          <p:cNvPr id="15" name="Text 13"/>
+          <p:cNvSpPr/>
+          <p:nvPr/>
+        </p:nvSpPr>
+        <p:spPr>
+          <a:xfrm>
+            <a:off x="7818120" y="3300984"/>
+            <a:ext cx="3090672" cy="877824"/>
+          </a:xfrm>
+          <a:prstGeom prst="rect">
+            <a:avLst/>
+          </a:prstGeom>
+          <a:noFill/>
+          <a:ln/>
+        </p:spPr>
+        <p:txBody>
+          <a:bodyPr wrap="square" lIns="254" tIns="254" rIns="254" bIns="254" rtlCol="0" anchor="t">
+            <a:normAutofit/>
+          </a:bodyPr>
+          <a:lstStyle/>
+          <a:p>
+            <a:r>
+              <a:rPr lang="en-US" sz="1380" dirty="0">
+                <a:solidFill>
+                  <a:srgbClr val="17364A"/>
+                </a:solidFill>
+                <a:latin typeface="Aptos" pitchFamily="34" charset="0"/>
+                <a:ea typeface="Aptos" pitchFamily="34" charset="-122"/>
+                <a:cs typeface="Aptos" pitchFamily="34" charset="-120"/>
+              </a:rPr>
+              <a:t>What location data are used, and how complete and accurate are they?</a:t>
+            </a:r>
+            <a:endParaRPr lang="en-US" sz="1380" dirty="0"/>
+          </a:p>
+          <a:p>
+            <a:r>
+              <a:rPr lang="en-US" sz="1380" dirty="0">
+                <a:solidFill>
+                  <a:srgbClr val="17364A"/>
+                </a:solidFill>
+                <a:latin typeface="Aptos" pitchFamily="34" charset="0"/>
+                <a:ea typeface="Aptos" pitchFamily="34" charset="-122"/>
+                <a:cs typeface="Aptos" pitchFamily="34" charset="-120"/>
+              </a:rPr>
+              <a:t>Which geographic unit best matches the public health action?</a:t>
+            </a:r>
+            <a:endParaRPr lang="en-US" sz="1380" dirty="0"/>
+          </a:p>
+          <a:p>
+            <a:r>
+              <a:rPr lang="en-US" sz="1380" dirty="0">
+                <a:solidFill>
+                  <a:srgbClr val="17364A"/>
+                </a:solidFill>
+                <a:latin typeface="Aptos" pitchFamily="34" charset="0"/>
+                <a:ea typeface="Aptos" pitchFamily="34" charset="-122"/>
+                <a:cs typeface="Aptos" pitchFamily="34" charset="-120"/>
+              </a:rPr>
+              <a:t>Could missing or poor-quality location data affect certain populations more than others?</a:t>
+            </a:r>
+            <a:endParaRPr lang="en-US" sz="1380" dirty="0"/>
+          </a:p>
+        </p:txBody>
       </p:sp>
       <p:sp>
         <p:nvSpPr>
           <p:cNvPr id="16" name="Shape 14"/>
-          <p:cNvSpPr/>
-          <p:nvPr/>
-        </p:nvSpPr>
-        <p:spPr>
-          <a:xfrm>
-            <a:off x="9198864" y="4206240"/>
-            <a:ext cx="347472" cy="347472"/>
-          </a:xfrm>
-          <a:prstGeom prst="ellipse">
-            <a:avLst/>
-          </a:prstGeom>
-          <a:solidFill>
-            <a:srgbClr val="2F8A28"/>
-          </a:solidFill>
-          <a:ln w="12700">
-            <a:solidFill>
-              <a:srgbClr val="2F8A28"/>
-            </a:solidFill>
-            <a:prstDash val="solid"/>
-          </a:ln>
-        </p:spPr>
-      </p:sp>
-      <p:sp>
-        <p:nvSpPr>
-          <p:cNvPr id="17" name="Text 15"/>
-          <p:cNvSpPr/>
-          <p:nvPr/>
-        </p:nvSpPr>
-        <p:spPr>
-          <a:xfrm>
-            <a:off x="7909560" y="3977640"/>
-            <a:ext cx="2926080" cy="182880"/>
-          </a:xfrm>
-          <a:prstGeom prst="rect">
-            <a:avLst/>
-          </a:prstGeom>
-          <a:noFill/>
-          <a:ln/>
-        </p:spPr>
-        <p:txBody>
-          <a:bodyPr wrap="square" lIns="0" tIns="0" rIns="0" bIns="0" rtlCol="0" anchor="ctr"/>
-          <a:lstStyle/>
-          <a:p>
-            <a:pPr algn="ctr" indent="0" marL="0">
-              <a:buNone/>
-            </a:pPr>
-            <a:r>
-              <a:rPr lang="en-US" sz="1000" dirty="0">
-                <a:solidFill>
-                  <a:srgbClr val="003A63"/>
-                </a:solidFill>
-                <a:latin typeface="Aptos" pitchFamily="34" charset="0"/>
-                <a:ea typeface="Aptos" pitchFamily="34" charset="-122"/>
-                <a:cs typeface="Aptos" pitchFamily="34" charset="-120"/>
-              </a:rPr>
-              <a:t>Concept to action</a:t>
-            </a:r>
-            <a:endParaRPr lang="en-US" sz="1000" dirty="0"/>
-          </a:p>
-        </p:txBody>
-      </p:sp>
-      <p:sp>
-        <p:nvSpPr>
-          <p:cNvPr id="18" name="Shape 16"/>
           <p:cNvSpPr/>
           <p:nvPr/>
         </p:nvSpPr>
@@ -7356,7 +7124,7 @@
       </p:sp>
       <p:sp>
         <p:nvSpPr>
-          <p:cNvPr id="19" name="Text 17"/>
+          <p:cNvPr id="17" name="Text 15"/>
           <p:cNvSpPr/>
           <p:nvPr/>
         </p:nvSpPr>
@@ -7395,7 +7163,7 @@
       </p:sp>
       <p:sp>
         <p:nvSpPr>
-          <p:cNvPr id="20" name="Text 18"/>
+          <p:cNvPr id="18" name="Text 16"/>
           <p:cNvSpPr/>
           <p:nvPr/>
         </p:nvSpPr>
@@ -7889,13 +7657,11 @@
             </a:avLst>
           </a:prstGeom>
           <a:solidFill>
-            <a:srgbClr val="FFFFFF">
-              <a:alpha val="88000"/>
-            </a:srgbClr>
+            <a:srgbClr val="FFFFFF"/>
           </a:solidFill>
           <a:ln w="12700">
             <a:solidFill>
-              <a:srgbClr val="D6E8F2"/>
+              <a:srgbClr val="B9D7E6"/>
             </a:solidFill>
             <a:prstDash val="solid"/>
           </a:ln>
@@ -7903,119 +7669,98 @@
       </p:sp>
       <p:sp>
         <p:nvSpPr>
-          <p:cNvPr id="14" name="Shape 12"/>
-          <p:cNvSpPr/>
-          <p:nvPr/>
-        </p:nvSpPr>
-        <p:spPr>
-          <a:xfrm>
-            <a:off x="8074152" y="3291840"/>
-            <a:ext cx="2596896" cy="749808"/>
-          </a:xfrm>
-          <a:prstGeom prst="rect">
-            <a:avLst/>
-          </a:prstGeom>
-          <a:solidFill>
-            <a:srgbClr val="EAF6F8"/>
-          </a:solidFill>
-          <a:ln w="12700">
-            <a:solidFill>
-              <a:srgbClr val="8ABBD8"/>
-            </a:solidFill>
-            <a:prstDash val="solid"/>
-          </a:ln>
-        </p:spPr>
-      </p:sp>
-      <p:sp>
-        <p:nvSpPr>
-          <p:cNvPr id="15" name="Shape 13"/>
-          <p:cNvSpPr/>
-          <p:nvPr/>
-        </p:nvSpPr>
-        <p:spPr>
-          <a:xfrm>
-            <a:off x="8202168" y="3721608"/>
-            <a:ext cx="2340864" cy="0"/>
-          </a:xfrm>
-          <a:prstGeom prst="line">
-            <a:avLst/>
-          </a:prstGeom>
-          <a:noFill/>
-          <a:ln w="19050">
-            <a:solidFill>
-              <a:srgbClr val="0068B7"/>
-            </a:solidFill>
-            <a:prstDash val="solid"/>
-          </a:ln>
-        </p:spPr>
+          <p:cNvPr id="14" name="Text 12"/>
+          <p:cNvSpPr/>
+          <p:nvPr/>
+        </p:nvSpPr>
+        <p:spPr>
+          <a:xfrm>
+            <a:off x="7799832" y="2935224"/>
+            <a:ext cx="3145536" cy="256032"/>
+          </a:xfrm>
+          <a:prstGeom prst="rect">
+            <a:avLst/>
+          </a:prstGeom>
+          <a:noFill/>
+          <a:ln/>
+        </p:spPr>
+        <p:txBody>
+          <a:bodyPr wrap="square" lIns="0" tIns="0" rIns="0" bIns="0" rtlCol="0" anchor="ctr"/>
+          <a:lstStyle/>
+          <a:p>
+            <a:pPr indent="0" marL="0">
+              <a:buNone/>
+            </a:pPr>
+            <a:r>
+              <a:rPr lang="en-US" sz="1300" b="1" dirty="0">
+                <a:solidFill>
+                  <a:srgbClr val="0068B7"/>
+                </a:solidFill>
+                <a:latin typeface="Aptos" pitchFamily="34" charset="0"/>
+                <a:ea typeface="Aptos" pitchFamily="34" charset="-122"/>
+                <a:cs typeface="Aptos" pitchFamily="34" charset="-120"/>
+              </a:rPr>
+              <a:t>Concept checkpoints</a:t>
+            </a:r>
+            <a:endParaRPr lang="en-US" sz="1300" dirty="0"/>
+          </a:p>
+        </p:txBody>
+      </p:sp>
+      <p:sp>
+        <p:nvSpPr>
+          <p:cNvPr id="15" name="Text 13"/>
+          <p:cNvSpPr/>
+          <p:nvPr/>
+        </p:nvSpPr>
+        <p:spPr>
+          <a:xfrm>
+            <a:off x="7818120" y="3300984"/>
+            <a:ext cx="3090672" cy="877824"/>
+          </a:xfrm>
+          <a:prstGeom prst="rect">
+            <a:avLst/>
+          </a:prstGeom>
+          <a:noFill/>
+          <a:ln/>
+        </p:spPr>
+        <p:txBody>
+          <a:bodyPr wrap="square" lIns="254" tIns="254" rIns="254" bIns="254" rtlCol="0" anchor="t">
+            <a:normAutofit/>
+          </a:bodyPr>
+          <a:lstStyle/>
+          <a:p>
+            <a:r>
+              <a:rPr lang="en-US" sz="1380" dirty="0">
+                <a:solidFill>
+                  <a:srgbClr val="17364A"/>
+                </a:solidFill>
+                <a:latin typeface="Aptos" pitchFamily="34" charset="0"/>
+                <a:ea typeface="Aptos" pitchFamily="34" charset="-122"/>
+                <a:cs typeface="Aptos" pitchFamily="34" charset="-120"/>
+              </a:rPr>
+              <a:t>What privacy safeguards are needed for internal and public maps?</a:t>
+            </a:r>
+            <a:endParaRPr lang="en-US" sz="1380" dirty="0"/>
+          </a:p>
+          <a:p>
+            <a:r>
+              <a:rPr lang="en-US" sz="1380" dirty="0">
+                <a:solidFill>
+                  <a:srgbClr val="17364A"/>
+                </a:solidFill>
+                <a:latin typeface="Aptos" pitchFamily="34" charset="0"/>
+                <a:ea typeface="Aptos" pitchFamily="34" charset="-122"/>
+                <a:cs typeface="Aptos" pitchFamily="34" charset="-120"/>
+              </a:rPr>
+              <a:t>How will community context be included before action is taken?</a:t>
+            </a:r>
+            <a:endParaRPr lang="en-US" sz="1380" dirty="0"/>
+          </a:p>
+        </p:txBody>
       </p:sp>
       <p:sp>
         <p:nvSpPr>
           <p:cNvPr id="16" name="Shape 14"/>
-          <p:cNvSpPr/>
-          <p:nvPr/>
-        </p:nvSpPr>
-        <p:spPr>
-          <a:xfrm>
-            <a:off x="9198864" y="4206240"/>
-            <a:ext cx="347472" cy="347472"/>
-          </a:xfrm>
-          <a:prstGeom prst="ellipse">
-            <a:avLst/>
-          </a:prstGeom>
-          <a:solidFill>
-            <a:srgbClr val="2F8A28"/>
-          </a:solidFill>
-          <a:ln w="12700">
-            <a:solidFill>
-              <a:srgbClr val="2F8A28"/>
-            </a:solidFill>
-            <a:prstDash val="solid"/>
-          </a:ln>
-        </p:spPr>
-      </p:sp>
-      <p:sp>
-        <p:nvSpPr>
-          <p:cNvPr id="17" name="Text 15"/>
-          <p:cNvSpPr/>
-          <p:nvPr/>
-        </p:nvSpPr>
-        <p:spPr>
-          <a:xfrm>
-            <a:off x="7909560" y="3977640"/>
-            <a:ext cx="2926080" cy="182880"/>
-          </a:xfrm>
-          <a:prstGeom prst="rect">
-            <a:avLst/>
-          </a:prstGeom>
-          <a:noFill/>
-          <a:ln/>
-        </p:spPr>
-        <p:txBody>
-          <a:bodyPr wrap="square" lIns="0" tIns="0" rIns="0" bIns="0" rtlCol="0" anchor="ctr"/>
-          <a:lstStyle/>
-          <a:p>
-            <a:pPr algn="ctr" indent="0" marL="0">
-              <a:buNone/>
-            </a:pPr>
-            <a:r>
-              <a:rPr lang="en-US" sz="1000" dirty="0">
-                <a:solidFill>
-                  <a:srgbClr val="003A63"/>
-                </a:solidFill>
-                <a:latin typeface="Aptos" pitchFamily="34" charset="0"/>
-                <a:ea typeface="Aptos" pitchFamily="34" charset="-122"/>
-                <a:cs typeface="Aptos" pitchFamily="34" charset="-120"/>
-              </a:rPr>
-              <a:t>Concept to action</a:t>
-            </a:r>
-            <a:endParaRPr lang="en-US" sz="1000" dirty="0"/>
-          </a:p>
-        </p:txBody>
-      </p:sp>
-      <p:sp>
-        <p:nvSpPr>
-          <p:cNvPr id="18" name="Shape 16"/>
           <p:cNvSpPr/>
           <p:nvPr/>
         </p:nvSpPr>
@@ -8042,7 +7787,7 @@
       </p:sp>
       <p:sp>
         <p:nvSpPr>
-          <p:cNvPr id="19" name="Text 17"/>
+          <p:cNvPr id="17" name="Text 15"/>
           <p:cNvSpPr/>
           <p:nvPr/>
         </p:nvSpPr>
@@ -8081,7 +7826,7 @@
       </p:sp>
       <p:sp>
         <p:nvSpPr>
-          <p:cNvPr id="20" name="Text 18"/>
+          <p:cNvPr id="18" name="Text 16"/>
           <p:cNvSpPr/>
           <p:nvPr/>
         </p:nvSpPr>
@@ -8589,13 +8334,11 @@
             </a:avLst>
           </a:prstGeom>
           <a:solidFill>
-            <a:srgbClr val="FFFFFF">
-              <a:alpha val="88000"/>
-            </a:srgbClr>
+            <a:srgbClr val="FFFFFF"/>
           </a:solidFill>
           <a:ln w="12700">
             <a:solidFill>
-              <a:srgbClr val="D6E8F2"/>
+              <a:srgbClr val="B9D7E6"/>
             </a:solidFill>
             <a:prstDash val="solid"/>
           </a:ln>
@@ -8603,119 +8346,98 @@
       </p:sp>
       <p:sp>
         <p:nvSpPr>
-          <p:cNvPr id="14" name="Shape 12"/>
-          <p:cNvSpPr/>
-          <p:nvPr/>
-        </p:nvSpPr>
-        <p:spPr>
-          <a:xfrm>
-            <a:off x="8074152" y="3291840"/>
-            <a:ext cx="2596896" cy="749808"/>
-          </a:xfrm>
-          <a:prstGeom prst="rect">
-            <a:avLst/>
-          </a:prstGeom>
-          <a:solidFill>
-            <a:srgbClr val="EAF6F8"/>
-          </a:solidFill>
-          <a:ln w="12700">
-            <a:solidFill>
-              <a:srgbClr val="8ABBD8"/>
-            </a:solidFill>
-            <a:prstDash val="solid"/>
-          </a:ln>
-        </p:spPr>
-      </p:sp>
-      <p:sp>
-        <p:nvSpPr>
-          <p:cNvPr id="15" name="Shape 13"/>
-          <p:cNvSpPr/>
-          <p:nvPr/>
-        </p:nvSpPr>
-        <p:spPr>
-          <a:xfrm>
-            <a:off x="8202168" y="3721608"/>
-            <a:ext cx="2340864" cy="0"/>
-          </a:xfrm>
-          <a:prstGeom prst="line">
-            <a:avLst/>
-          </a:prstGeom>
-          <a:noFill/>
-          <a:ln w="19050">
-            <a:solidFill>
-              <a:srgbClr val="0068B7"/>
-            </a:solidFill>
-            <a:prstDash val="solid"/>
-          </a:ln>
-        </p:spPr>
+          <p:cNvPr id="14" name="Text 12"/>
+          <p:cNvSpPr/>
+          <p:nvPr/>
+        </p:nvSpPr>
+        <p:spPr>
+          <a:xfrm>
+            <a:off x="7799832" y="2935224"/>
+            <a:ext cx="3145536" cy="256032"/>
+          </a:xfrm>
+          <a:prstGeom prst="rect">
+            <a:avLst/>
+          </a:prstGeom>
+          <a:noFill/>
+          <a:ln/>
+        </p:spPr>
+        <p:txBody>
+          <a:bodyPr wrap="square" lIns="0" tIns="0" rIns="0" bIns="0" rtlCol="0" anchor="ctr"/>
+          <a:lstStyle/>
+          <a:p>
+            <a:pPr indent="0" marL="0">
+              <a:buNone/>
+            </a:pPr>
+            <a:r>
+              <a:rPr lang="en-US" sz="1300" b="1" dirty="0">
+                <a:solidFill>
+                  <a:srgbClr val="0068B7"/>
+                </a:solidFill>
+                <a:latin typeface="Aptos" pitchFamily="34" charset="0"/>
+                <a:ea typeface="Aptos" pitchFamily="34" charset="-122"/>
+                <a:cs typeface="Aptos" pitchFamily="34" charset="-120"/>
+              </a:rPr>
+              <a:t>Concept checkpoints</a:t>
+            </a:r>
+            <a:endParaRPr lang="en-US" sz="1300" dirty="0"/>
+          </a:p>
+        </p:txBody>
+      </p:sp>
+      <p:sp>
+        <p:nvSpPr>
+          <p:cNvPr id="15" name="Text 13"/>
+          <p:cNvSpPr/>
+          <p:nvPr/>
+        </p:nvSpPr>
+        <p:spPr>
+          <a:xfrm>
+            <a:off x="7818120" y="3300984"/>
+            <a:ext cx="3090672" cy="877824"/>
+          </a:xfrm>
+          <a:prstGeom prst="rect">
+            <a:avLst/>
+          </a:prstGeom>
+          <a:noFill/>
+          <a:ln/>
+        </p:spPr>
+        <p:txBody>
+          <a:bodyPr wrap="square" lIns="254" tIns="254" rIns="254" bIns="254" rtlCol="0" anchor="t">
+            <a:normAutofit/>
+          </a:bodyPr>
+          <a:lstStyle/>
+          <a:p>
+            <a:r>
+              <a:rPr lang="en-US" sz="1380" dirty="0">
+                <a:solidFill>
+                  <a:srgbClr val="17364A"/>
+                </a:solidFill>
+                <a:latin typeface="Aptos" pitchFamily="34" charset="0"/>
+                <a:ea typeface="Aptos" pitchFamily="34" charset="-122"/>
+                <a:cs typeface="Aptos" pitchFamily="34" charset="-120"/>
+              </a:rPr>
+              <a:t>Include the public health question, location data sources, geocoding method, geographic.</a:t>
+            </a:r>
+            <a:endParaRPr lang="en-US" sz="1380" dirty="0"/>
+          </a:p>
+          <a:p>
+            <a:r>
+              <a:rPr lang="en-US" sz="1380" dirty="0">
+                <a:solidFill>
+                  <a:srgbClr val="17364A"/>
+                </a:solidFill>
+                <a:latin typeface="Aptos" pitchFamily="34" charset="0"/>
+                <a:ea typeface="Aptos" pitchFamily="34" charset="-122"/>
+                <a:cs typeface="Aptos" pitchFamily="34" charset="-120"/>
+              </a:rPr>
+              <a:t>The worksheet should identify at least one way the map could be misinterpreted and one.</a:t>
+            </a:r>
+            <a:endParaRPr lang="en-US" sz="1380" dirty="0"/>
+          </a:p>
+        </p:txBody>
       </p:sp>
       <p:sp>
         <p:nvSpPr>
           <p:cNvPr id="16" name="Shape 14"/>
-          <p:cNvSpPr/>
-          <p:nvPr/>
-        </p:nvSpPr>
-        <p:spPr>
-          <a:xfrm>
-            <a:off x="9198864" y="4206240"/>
-            <a:ext cx="347472" cy="347472"/>
-          </a:xfrm>
-          <a:prstGeom prst="ellipse">
-            <a:avLst/>
-          </a:prstGeom>
-          <a:solidFill>
-            <a:srgbClr val="2F8A28"/>
-          </a:solidFill>
-          <a:ln w="12700">
-            <a:solidFill>
-              <a:srgbClr val="2F8A28"/>
-            </a:solidFill>
-            <a:prstDash val="solid"/>
-          </a:ln>
-        </p:spPr>
-      </p:sp>
-      <p:sp>
-        <p:nvSpPr>
-          <p:cNvPr id="17" name="Text 15"/>
-          <p:cNvSpPr/>
-          <p:nvPr/>
-        </p:nvSpPr>
-        <p:spPr>
-          <a:xfrm>
-            <a:off x="7909560" y="3977640"/>
-            <a:ext cx="2926080" cy="182880"/>
-          </a:xfrm>
-          <a:prstGeom prst="rect">
-            <a:avLst/>
-          </a:prstGeom>
-          <a:noFill/>
-          <a:ln/>
-        </p:spPr>
-        <p:txBody>
-          <a:bodyPr wrap="square" lIns="0" tIns="0" rIns="0" bIns="0" rtlCol="0" anchor="ctr"/>
-          <a:lstStyle/>
-          <a:p>
-            <a:pPr algn="ctr" indent="0" marL="0">
-              <a:buNone/>
-            </a:pPr>
-            <a:r>
-              <a:rPr lang="en-US" sz="1000" dirty="0">
-                <a:solidFill>
-                  <a:srgbClr val="003A63"/>
-                </a:solidFill>
-                <a:latin typeface="Aptos" pitchFamily="34" charset="0"/>
-                <a:ea typeface="Aptos" pitchFamily="34" charset="-122"/>
-                <a:cs typeface="Aptos" pitchFamily="34" charset="-120"/>
-              </a:rPr>
-              <a:t>Concept to action</a:t>
-            </a:r>
-            <a:endParaRPr lang="en-US" sz="1000" dirty="0"/>
-          </a:p>
-        </p:txBody>
-      </p:sp>
-      <p:sp>
-        <p:nvSpPr>
-          <p:cNvPr id="18" name="Shape 16"/>
           <p:cNvSpPr/>
           <p:nvPr/>
         </p:nvSpPr>
@@ -8742,7 +8464,7 @@
       </p:sp>
       <p:sp>
         <p:nvSpPr>
-          <p:cNvPr id="19" name="Text 17"/>
+          <p:cNvPr id="17" name="Text 15"/>
           <p:cNvSpPr/>
           <p:nvPr/>
         </p:nvSpPr>
@@ -8781,7 +8503,7 @@
       </p:sp>
       <p:sp>
         <p:nvSpPr>
-          <p:cNvPr id="20" name="Text 18"/>
+          <p:cNvPr id="18" name="Text 16"/>
           <p:cNvSpPr/>
           <p:nvPr/>
         </p:nvSpPr>
@@ -9289,13 +9011,11 @@
             </a:avLst>
           </a:prstGeom>
           <a:solidFill>
-            <a:srgbClr val="FFFFFF">
-              <a:alpha val="88000"/>
-            </a:srgbClr>
+            <a:srgbClr val="FFFFFF"/>
           </a:solidFill>
           <a:ln w="12700">
             <a:solidFill>
-              <a:srgbClr val="D6E8F2"/>
+              <a:srgbClr val="B9D7E6"/>
             </a:solidFill>
             <a:prstDash val="solid"/>
           </a:ln>
@@ -9303,119 +9023,112 @@
       </p:sp>
       <p:sp>
         <p:nvSpPr>
-          <p:cNvPr id="14" name="Shape 12"/>
-          <p:cNvSpPr/>
-          <p:nvPr/>
-        </p:nvSpPr>
-        <p:spPr>
-          <a:xfrm>
-            <a:off x="8074152" y="3291840"/>
-            <a:ext cx="2596896" cy="749808"/>
-          </a:xfrm>
-          <a:prstGeom prst="rect">
-            <a:avLst/>
-          </a:prstGeom>
-          <a:solidFill>
-            <a:srgbClr val="EAF6F8"/>
-          </a:solidFill>
-          <a:ln w="12700">
-            <a:solidFill>
-              <a:srgbClr val="8ABBD8"/>
-            </a:solidFill>
-            <a:prstDash val="solid"/>
-          </a:ln>
-        </p:spPr>
-      </p:sp>
-      <p:sp>
-        <p:nvSpPr>
-          <p:cNvPr id="15" name="Shape 13"/>
-          <p:cNvSpPr/>
-          <p:nvPr/>
-        </p:nvSpPr>
-        <p:spPr>
-          <a:xfrm>
-            <a:off x="8202168" y="3721608"/>
-            <a:ext cx="2340864" cy="0"/>
-          </a:xfrm>
-          <a:prstGeom prst="line">
-            <a:avLst/>
-          </a:prstGeom>
-          <a:noFill/>
-          <a:ln w="19050">
-            <a:solidFill>
-              <a:srgbClr val="0068B7"/>
-            </a:solidFill>
-            <a:prstDash val="solid"/>
-          </a:ln>
-        </p:spPr>
+          <p:cNvPr id="14" name="Text 12"/>
+          <p:cNvSpPr/>
+          <p:nvPr/>
+        </p:nvSpPr>
+        <p:spPr>
+          <a:xfrm>
+            <a:off x="7799832" y="2935224"/>
+            <a:ext cx="3145536" cy="256032"/>
+          </a:xfrm>
+          <a:prstGeom prst="rect">
+            <a:avLst/>
+          </a:prstGeom>
+          <a:noFill/>
+          <a:ln/>
+        </p:spPr>
+        <p:txBody>
+          <a:bodyPr wrap="square" lIns="0" tIns="0" rIns="0" bIns="0" rtlCol="0" anchor="ctr"/>
+          <a:lstStyle/>
+          <a:p>
+            <a:pPr indent="0" marL="0">
+              <a:buNone/>
+            </a:pPr>
+            <a:r>
+              <a:rPr lang="en-US" sz="1300" b="1" dirty="0">
+                <a:solidFill>
+                  <a:srgbClr val="0068B7"/>
+                </a:solidFill>
+                <a:latin typeface="Aptos" pitchFamily="34" charset="0"/>
+                <a:ea typeface="Aptos" pitchFamily="34" charset="-122"/>
+                <a:cs typeface="Aptos" pitchFamily="34" charset="-120"/>
+              </a:rPr>
+              <a:t>Concept checkpoints</a:t>
+            </a:r>
+            <a:endParaRPr lang="en-US" sz="1300" dirty="0"/>
+          </a:p>
+        </p:txBody>
+      </p:sp>
+      <p:sp>
+        <p:nvSpPr>
+          <p:cNvPr id="15" name="Text 13"/>
+          <p:cNvSpPr/>
+          <p:nvPr/>
+        </p:nvSpPr>
+        <p:spPr>
+          <a:xfrm>
+            <a:off x="7818120" y="3300984"/>
+            <a:ext cx="3090672" cy="877824"/>
+          </a:xfrm>
+          <a:prstGeom prst="rect">
+            <a:avLst/>
+          </a:prstGeom>
+          <a:noFill/>
+          <a:ln/>
+        </p:spPr>
+        <p:txBody>
+          <a:bodyPr wrap="square" lIns="254" tIns="254" rIns="254" bIns="254" rtlCol="0" anchor="t">
+            <a:normAutofit/>
+          </a:bodyPr>
+          <a:lstStyle/>
+          <a:p>
+            <a:r>
+              <a:rPr lang="en-US" sz="1380" dirty="0">
+                <a:solidFill>
+                  <a:srgbClr val="17364A"/>
+                </a:solidFill>
+                <a:latin typeface="Aptos" pitchFamily="34" charset="0"/>
+                <a:ea typeface="Aptos" pitchFamily="34" charset="-122"/>
+                <a:cs typeface="Aptos" pitchFamily="34" charset="-120"/>
+              </a:rPr>
+              <a:t>Geospatial AI readiness worksheet</a:t>
+            </a:r>
+            <a:endParaRPr lang="en-US" sz="1380" dirty="0"/>
+          </a:p>
+          <a:p>
+            <a:r>
+              <a:rPr lang="en-US" sz="1380" dirty="0">
+                <a:solidFill>
+                  <a:srgbClr val="17364A"/>
+                </a:solidFill>
+                <a:latin typeface="Aptos" pitchFamily="34" charset="0"/>
+                <a:ea typeface="Aptos" pitchFamily="34" charset="-122"/>
+                <a:cs typeface="Aptos" pitchFamily="34" charset="-120"/>
+              </a:rPr>
+              <a:t>Map interpretation and limitations memo</a:t>
+            </a:r>
+            <a:endParaRPr lang="en-US" sz="1380" dirty="0"/>
+          </a:p>
+          <a:p>
+            <a:r>
+              <a:rPr lang="en-US" sz="1380" dirty="0">
+                <a:solidFill>
+                  <a:srgbClr val="17364A"/>
+                </a:solidFill>
+                <a:latin typeface="Aptos" pitchFamily="34" charset="0"/>
+                <a:ea typeface="Aptos" pitchFamily="34" charset="-122"/>
+                <a:cs typeface="Aptos" pitchFamily="34" charset="-120"/>
+              </a:rPr>
+              <a:t>Privacy and suppression review notes</a:t>
+            </a:r>
+            <a:endParaRPr lang="en-US" sz="1380" dirty="0"/>
+          </a:p>
+        </p:txBody>
       </p:sp>
       <p:sp>
         <p:nvSpPr>
           <p:cNvPr id="16" name="Shape 14"/>
-          <p:cNvSpPr/>
-          <p:nvPr/>
-        </p:nvSpPr>
-        <p:spPr>
-          <a:xfrm>
-            <a:off x="9198864" y="4206240"/>
-            <a:ext cx="347472" cy="347472"/>
-          </a:xfrm>
-          <a:prstGeom prst="ellipse">
-            <a:avLst/>
-          </a:prstGeom>
-          <a:solidFill>
-            <a:srgbClr val="2F8A28"/>
-          </a:solidFill>
-          <a:ln w="12700">
-            <a:solidFill>
-              <a:srgbClr val="2F8A28"/>
-            </a:solidFill>
-            <a:prstDash val="solid"/>
-          </a:ln>
-        </p:spPr>
-      </p:sp>
-      <p:sp>
-        <p:nvSpPr>
-          <p:cNvPr id="17" name="Text 15"/>
-          <p:cNvSpPr/>
-          <p:nvPr/>
-        </p:nvSpPr>
-        <p:spPr>
-          <a:xfrm>
-            <a:off x="7909560" y="3977640"/>
-            <a:ext cx="2926080" cy="182880"/>
-          </a:xfrm>
-          <a:prstGeom prst="rect">
-            <a:avLst/>
-          </a:prstGeom>
-          <a:noFill/>
-          <a:ln/>
-        </p:spPr>
-        <p:txBody>
-          <a:bodyPr wrap="square" lIns="0" tIns="0" rIns="0" bIns="0" rtlCol="0" anchor="ctr"/>
-          <a:lstStyle/>
-          <a:p>
-            <a:pPr algn="ctr" indent="0" marL="0">
-              <a:buNone/>
-            </a:pPr>
-            <a:r>
-              <a:rPr lang="en-US" sz="1000" dirty="0">
-                <a:solidFill>
-                  <a:srgbClr val="003A63"/>
-                </a:solidFill>
-                <a:latin typeface="Aptos" pitchFamily="34" charset="0"/>
-                <a:ea typeface="Aptos" pitchFamily="34" charset="-122"/>
-                <a:cs typeface="Aptos" pitchFamily="34" charset="-120"/>
-              </a:rPr>
-              <a:t>Concept to action</a:t>
-            </a:r>
-            <a:endParaRPr lang="en-US" sz="1000" dirty="0"/>
-          </a:p>
-        </p:txBody>
-      </p:sp>
-      <p:sp>
-        <p:nvSpPr>
-          <p:cNvPr id="18" name="Shape 16"/>
           <p:cNvSpPr/>
           <p:nvPr/>
         </p:nvSpPr>
@@ -9442,7 +9155,7 @@
       </p:sp>
       <p:sp>
         <p:nvSpPr>
-          <p:cNvPr id="19" name="Text 17"/>
+          <p:cNvPr id="17" name="Text 15"/>
           <p:cNvSpPr/>
           <p:nvPr/>
         </p:nvSpPr>
@@ -9481,7 +9194,7 @@
       </p:sp>
       <p:sp>
         <p:nvSpPr>
-          <p:cNvPr id="20" name="Text 18"/>
+          <p:cNvPr id="18" name="Text 16"/>
           <p:cNvSpPr/>
           <p:nvPr/>
         </p:nvSpPr>
@@ -9961,13 +9674,11 @@
             </a:avLst>
           </a:prstGeom>
           <a:solidFill>
-            <a:srgbClr val="FFFFFF">
-              <a:alpha val="88000"/>
-            </a:srgbClr>
+            <a:srgbClr val="FFFFFF"/>
           </a:solidFill>
           <a:ln w="12700">
             <a:solidFill>
-              <a:srgbClr val="D6E8F2"/>
+              <a:srgbClr val="B9D7E6"/>
             </a:solidFill>
             <a:prstDash val="solid"/>
           </a:ln>
@@ -9975,119 +9686,84 @@
       </p:sp>
       <p:sp>
         <p:nvSpPr>
-          <p:cNvPr id="14" name="Shape 12"/>
-          <p:cNvSpPr/>
-          <p:nvPr/>
-        </p:nvSpPr>
-        <p:spPr>
-          <a:xfrm>
-            <a:off x="8074152" y="3291840"/>
-            <a:ext cx="2596896" cy="749808"/>
-          </a:xfrm>
-          <a:prstGeom prst="rect">
-            <a:avLst/>
-          </a:prstGeom>
-          <a:solidFill>
-            <a:srgbClr val="EAF6F8"/>
-          </a:solidFill>
-          <a:ln w="12700">
-            <a:solidFill>
-              <a:srgbClr val="8ABBD8"/>
-            </a:solidFill>
-            <a:prstDash val="solid"/>
-          </a:ln>
-        </p:spPr>
-      </p:sp>
-      <p:sp>
-        <p:nvSpPr>
-          <p:cNvPr id="15" name="Shape 13"/>
-          <p:cNvSpPr/>
-          <p:nvPr/>
-        </p:nvSpPr>
-        <p:spPr>
-          <a:xfrm>
-            <a:off x="8202168" y="3721608"/>
-            <a:ext cx="2340864" cy="0"/>
-          </a:xfrm>
-          <a:prstGeom prst="line">
-            <a:avLst/>
-          </a:prstGeom>
-          <a:noFill/>
-          <a:ln w="19050">
-            <a:solidFill>
-              <a:srgbClr val="0068B7"/>
-            </a:solidFill>
-            <a:prstDash val="solid"/>
-          </a:ln>
-        </p:spPr>
+          <p:cNvPr id="14" name="Text 12"/>
+          <p:cNvSpPr/>
+          <p:nvPr/>
+        </p:nvSpPr>
+        <p:spPr>
+          <a:xfrm>
+            <a:off x="7799832" y="2935224"/>
+            <a:ext cx="3145536" cy="256032"/>
+          </a:xfrm>
+          <a:prstGeom prst="rect">
+            <a:avLst/>
+          </a:prstGeom>
+          <a:noFill/>
+          <a:ln/>
+        </p:spPr>
+        <p:txBody>
+          <a:bodyPr wrap="square" lIns="0" tIns="0" rIns="0" bIns="0" rtlCol="0" anchor="ctr"/>
+          <a:lstStyle/>
+          <a:p>
+            <a:pPr indent="0" marL="0">
+              <a:buNone/>
+            </a:pPr>
+            <a:r>
+              <a:rPr lang="en-US" sz="1300" b="1" dirty="0">
+                <a:solidFill>
+                  <a:srgbClr val="0068B7"/>
+                </a:solidFill>
+                <a:latin typeface="Aptos" pitchFamily="34" charset="0"/>
+                <a:ea typeface="Aptos" pitchFamily="34" charset="-122"/>
+                <a:cs typeface="Aptos" pitchFamily="34" charset="-120"/>
+              </a:rPr>
+              <a:t>Concept checkpoints</a:t>
+            </a:r>
+            <a:endParaRPr lang="en-US" sz="1300" dirty="0"/>
+          </a:p>
+        </p:txBody>
+      </p:sp>
+      <p:sp>
+        <p:nvSpPr>
+          <p:cNvPr id="15" name="Text 13"/>
+          <p:cNvSpPr/>
+          <p:nvPr/>
+        </p:nvSpPr>
+        <p:spPr>
+          <a:xfrm>
+            <a:off x="7818120" y="3300984"/>
+            <a:ext cx="3090672" cy="877824"/>
+          </a:xfrm>
+          <a:prstGeom prst="rect">
+            <a:avLst/>
+          </a:prstGeom>
+          <a:noFill/>
+          <a:ln/>
+        </p:spPr>
+        <p:txBody>
+          <a:bodyPr wrap="square" lIns="254" tIns="254" rIns="254" bIns="254" rtlCol="0" anchor="t">
+            <a:normAutofit/>
+          </a:bodyPr>
+          <a:lstStyle/>
+          <a:p>
+            <a:r>
+              <a:rPr lang="en-US" sz="1380" dirty="0">
+                <a:solidFill>
+                  <a:srgbClr val="17364A"/>
+                </a:solidFill>
+                <a:latin typeface="Aptos" pitchFamily="34" charset="0"/>
+                <a:ea typeface="Aptos" pitchFamily="34" charset="-122"/>
+                <a:cs typeface="Aptos" pitchFamily="34" charset="-120"/>
+              </a:rPr>
+              <a:t>Community context and action plan</a:t>
+            </a:r>
+            <a:endParaRPr lang="en-US" sz="1380" dirty="0"/>
+          </a:p>
+        </p:txBody>
       </p:sp>
       <p:sp>
         <p:nvSpPr>
           <p:cNvPr id="16" name="Shape 14"/>
-          <p:cNvSpPr/>
-          <p:nvPr/>
-        </p:nvSpPr>
-        <p:spPr>
-          <a:xfrm>
-            <a:off x="9198864" y="4206240"/>
-            <a:ext cx="347472" cy="347472"/>
-          </a:xfrm>
-          <a:prstGeom prst="ellipse">
-            <a:avLst/>
-          </a:prstGeom>
-          <a:solidFill>
-            <a:srgbClr val="2F8A28"/>
-          </a:solidFill>
-          <a:ln w="12700">
-            <a:solidFill>
-              <a:srgbClr val="2F8A28"/>
-            </a:solidFill>
-            <a:prstDash val="solid"/>
-          </a:ln>
-        </p:spPr>
-      </p:sp>
-      <p:sp>
-        <p:nvSpPr>
-          <p:cNvPr id="17" name="Text 15"/>
-          <p:cNvSpPr/>
-          <p:nvPr/>
-        </p:nvSpPr>
-        <p:spPr>
-          <a:xfrm>
-            <a:off x="7909560" y="3977640"/>
-            <a:ext cx="2926080" cy="182880"/>
-          </a:xfrm>
-          <a:prstGeom prst="rect">
-            <a:avLst/>
-          </a:prstGeom>
-          <a:noFill/>
-          <a:ln/>
-        </p:spPr>
-        <p:txBody>
-          <a:bodyPr wrap="square" lIns="0" tIns="0" rIns="0" bIns="0" rtlCol="0" anchor="ctr"/>
-          <a:lstStyle/>
-          <a:p>
-            <a:pPr algn="ctr" indent="0" marL="0">
-              <a:buNone/>
-            </a:pPr>
-            <a:r>
-              <a:rPr lang="en-US" sz="1000" dirty="0">
-                <a:solidFill>
-                  <a:srgbClr val="003A63"/>
-                </a:solidFill>
-                <a:latin typeface="Aptos" pitchFamily="34" charset="0"/>
-                <a:ea typeface="Aptos" pitchFamily="34" charset="-122"/>
-                <a:cs typeface="Aptos" pitchFamily="34" charset="-120"/>
-              </a:rPr>
-              <a:t>Concept to action</a:t>
-            </a:r>
-            <a:endParaRPr lang="en-US" sz="1000" dirty="0"/>
-          </a:p>
-        </p:txBody>
-      </p:sp>
-      <p:sp>
-        <p:nvSpPr>
-          <p:cNvPr id="18" name="Shape 16"/>
           <p:cNvSpPr/>
           <p:nvPr/>
         </p:nvSpPr>
@@ -10114,7 +9790,7 @@
       </p:sp>
       <p:sp>
         <p:nvSpPr>
-          <p:cNvPr id="19" name="Text 17"/>
+          <p:cNvPr id="17" name="Text 15"/>
           <p:cNvSpPr/>
           <p:nvPr/>
         </p:nvSpPr>
@@ -10153,7 +9829,7 @@
       </p:sp>
       <p:sp>
         <p:nvSpPr>
-          <p:cNvPr id="20" name="Text 18"/>
+          <p:cNvPr id="18" name="Text 16"/>
           <p:cNvSpPr/>
           <p:nvPr/>
         </p:nvSpPr>
@@ -10686,20 +10362,20 @@
         </p:nvSpPr>
         <p:spPr>
           <a:xfrm>
-            <a:off x="7635240" y="3730752"/>
-            <a:ext cx="1033272" cy="749808"/>
+            <a:off x="7909560" y="3675888"/>
+            <a:ext cx="3154680" cy="1691640"/>
           </a:xfrm>
           <a:prstGeom prst="roundRect">
             <a:avLst>
-              <a:gd name="adj" fmla="val 14634"/>
+              <a:gd name="adj" fmla="val 6486"/>
             </a:avLst>
           </a:prstGeom>
           <a:solidFill>
-            <a:srgbClr val="0068B7"/>
+            <a:srgbClr val="FFFFFF"/>
           </a:solidFill>
           <a:ln w="12700">
             <a:solidFill>
-              <a:srgbClr val="0068B7"/>
+              <a:srgbClr val="B9D7E6"/>
             </a:solidFill>
             <a:prstDash val="solid"/>
           </a:ln>
@@ -10713,172 +10389,100 @@
         </p:nvSpPr>
         <p:spPr>
           <a:xfrm>
-            <a:off x="7708392" y="3922776"/>
-            <a:ext cx="886968" cy="310896"/>
-          </a:xfrm>
-          <a:prstGeom prst="rect">
-            <a:avLst/>
-          </a:prstGeom>
-          <a:noFill/>
-          <a:ln/>
-        </p:spPr>
-        <p:txBody>
-          <a:bodyPr wrap="square" lIns="0" tIns="0" rIns="0" bIns="0" rtlCol="0" anchor="ctr">
+            <a:off x="8074152" y="3822192"/>
+            <a:ext cx="2825496" cy="256032"/>
+          </a:xfrm>
+          <a:prstGeom prst="rect">
+            <a:avLst/>
+          </a:prstGeom>
+          <a:noFill/>
+          <a:ln/>
+        </p:spPr>
+        <p:txBody>
+          <a:bodyPr wrap="square" lIns="0" tIns="0" rIns="0" bIns="0" rtlCol="0" anchor="ctr"/>
+          <a:lstStyle/>
+          <a:p>
+            <a:pPr indent="0" marL="0">
+              <a:buNone/>
+            </a:pPr>
+            <a:r>
+              <a:rPr lang="en-US" sz="1300" b="1" dirty="0">
+                <a:solidFill>
+                  <a:srgbClr val="0068B7"/>
+                </a:solidFill>
+                <a:latin typeface="Aptos" pitchFamily="34" charset="0"/>
+                <a:ea typeface="Aptos" pitchFamily="34" charset="-122"/>
+                <a:cs typeface="Aptos" pitchFamily="34" charset="-120"/>
+              </a:rPr>
+              <a:t>Learning sequence</a:t>
+            </a:r>
+            <a:endParaRPr lang="en-US" sz="1300" dirty="0"/>
+          </a:p>
+        </p:txBody>
+      </p:sp>
+      <p:sp>
+        <p:nvSpPr>
+          <p:cNvPr id="15" name="Text 13"/>
+          <p:cNvSpPr/>
+          <p:nvPr/>
+        </p:nvSpPr>
+        <p:spPr>
+          <a:xfrm>
+            <a:off x="8092440" y="4187952"/>
+            <a:ext cx="2770632" cy="1033272"/>
+          </a:xfrm>
+          <a:prstGeom prst="rect">
+            <a:avLst/>
+          </a:prstGeom>
+          <a:noFill/>
+          <a:ln/>
+        </p:spPr>
+        <p:txBody>
+          <a:bodyPr wrap="square" lIns="254" tIns="254" rIns="254" bIns="254" rtlCol="0" anchor="t">
             <a:normAutofit/>
           </a:bodyPr>
           <a:lstStyle/>
           <a:p>
-            <a:pPr algn="ctr" indent="0" marL="0">
-              <a:buNone/>
-            </a:pPr>
-            <a:r>
-              <a:rPr lang="en-US" sz="1500" b="1" dirty="0">
-                <a:solidFill>
-                  <a:srgbClr val="FFFFFF"/>
-                </a:solidFill>
-                <a:latin typeface="Aptos" pitchFamily="34" charset="0"/>
-                <a:ea typeface="Aptos" pitchFamily="34" charset="-122"/>
-                <a:cs typeface="Aptos" pitchFamily="34" charset="-120"/>
-              </a:rPr>
-              <a:t>Learn</a:t>
-            </a:r>
-            <a:endParaRPr lang="en-US" sz="1500" dirty="0"/>
-          </a:p>
-        </p:txBody>
-      </p:sp>
-      <p:sp>
-        <p:nvSpPr>
-          <p:cNvPr id="15" name="Shape 13"/>
-          <p:cNvSpPr/>
-          <p:nvPr/>
-        </p:nvSpPr>
-        <p:spPr>
-          <a:xfrm>
-            <a:off x="8924544" y="3730752"/>
-            <a:ext cx="1033272" cy="749808"/>
-          </a:xfrm>
-          <a:prstGeom prst="roundRect">
-            <a:avLst>
-              <a:gd name="adj" fmla="val 14634"/>
-            </a:avLst>
-          </a:prstGeom>
-          <a:solidFill>
-            <a:srgbClr val="2F8A28"/>
-          </a:solidFill>
-          <a:ln w="12700">
-            <a:solidFill>
-              <a:srgbClr val="2F8A28"/>
-            </a:solidFill>
-            <a:prstDash val="solid"/>
-          </a:ln>
-        </p:spPr>
-      </p:sp>
-      <p:sp>
-        <p:nvSpPr>
-          <p:cNvPr id="16" name="Text 14"/>
-          <p:cNvSpPr/>
-          <p:nvPr/>
-        </p:nvSpPr>
-        <p:spPr>
-          <a:xfrm>
-            <a:off x="8997696" y="3922776"/>
-            <a:ext cx="886968" cy="310896"/>
-          </a:xfrm>
-          <a:prstGeom prst="rect">
-            <a:avLst/>
-          </a:prstGeom>
-          <a:noFill/>
-          <a:ln/>
-        </p:spPr>
-        <p:txBody>
-          <a:bodyPr wrap="square" lIns="0" tIns="0" rIns="0" bIns="0" rtlCol="0" anchor="ctr">
-            <a:normAutofit/>
-          </a:bodyPr>
-          <a:lstStyle/>
-          <a:p>
-            <a:pPr algn="ctr" indent="0" marL="0">
-              <a:buNone/>
-            </a:pPr>
-            <a:r>
-              <a:rPr lang="en-US" sz="1500" b="1" dirty="0">
-                <a:solidFill>
-                  <a:srgbClr val="FFFFFF"/>
-                </a:solidFill>
-                <a:latin typeface="Aptos" pitchFamily="34" charset="0"/>
-                <a:ea typeface="Aptos" pitchFamily="34" charset="-122"/>
-                <a:cs typeface="Aptos" pitchFamily="34" charset="-120"/>
-              </a:rPr>
-              <a:t>Apply</a:t>
-            </a:r>
-            <a:endParaRPr lang="en-US" sz="1500" dirty="0"/>
-          </a:p>
-        </p:txBody>
-      </p:sp>
-      <p:sp>
-        <p:nvSpPr>
-          <p:cNvPr id="17" name="Shape 15"/>
-          <p:cNvSpPr/>
-          <p:nvPr/>
-        </p:nvSpPr>
-        <p:spPr>
-          <a:xfrm>
-            <a:off x="10213848" y="3730752"/>
-            <a:ext cx="1033272" cy="749808"/>
-          </a:xfrm>
-          <a:prstGeom prst="roundRect">
-            <a:avLst>
-              <a:gd name="adj" fmla="val 14634"/>
-            </a:avLst>
-          </a:prstGeom>
-          <a:solidFill>
-            <a:srgbClr val="6A4CA3"/>
-          </a:solidFill>
-          <a:ln w="12700">
-            <a:solidFill>
-              <a:srgbClr val="6A4CA3"/>
-            </a:solidFill>
-            <a:prstDash val="solid"/>
-          </a:ln>
-        </p:spPr>
-      </p:sp>
-      <p:sp>
-        <p:nvSpPr>
-          <p:cNvPr id="18" name="Text 16"/>
-          <p:cNvSpPr/>
-          <p:nvPr/>
-        </p:nvSpPr>
-        <p:spPr>
-          <a:xfrm>
-            <a:off x="10287000" y="3922776"/>
-            <a:ext cx="886968" cy="310896"/>
-          </a:xfrm>
-          <a:prstGeom prst="rect">
-            <a:avLst/>
-          </a:prstGeom>
-          <a:noFill/>
-          <a:ln/>
-        </p:spPr>
-        <p:txBody>
-          <a:bodyPr wrap="square" lIns="0" tIns="0" rIns="0" bIns="0" rtlCol="0" anchor="ctr">
-            <a:normAutofit/>
-          </a:bodyPr>
-          <a:lstStyle/>
-          <a:p>
-            <a:pPr algn="ctr" indent="0" marL="0">
-              <a:buNone/>
-            </a:pPr>
-            <a:r>
-              <a:rPr lang="en-US" sz="1500" b="1" dirty="0">
-                <a:solidFill>
-                  <a:srgbClr val="FFFFFF"/>
-                </a:solidFill>
-                <a:latin typeface="Aptos" pitchFamily="34" charset="0"/>
-                <a:ea typeface="Aptos" pitchFamily="34" charset="-122"/>
-                <a:cs typeface="Aptos" pitchFamily="34" charset="-120"/>
-              </a:rPr>
-              <a:t>Document</a:t>
-            </a:r>
-            <a:endParaRPr lang="en-US" sz="1500" dirty="0"/>
+            <a:r>
+              <a:rPr lang="en-US" sz="1380" dirty="0">
+                <a:solidFill>
+                  <a:srgbClr val="17364A"/>
+                </a:solidFill>
+                <a:latin typeface="Aptos" pitchFamily="34" charset="0"/>
+                <a:ea typeface="Aptos" pitchFamily="34" charset="-122"/>
+                <a:cs typeface="Aptos" pitchFamily="34" charset="-120"/>
+              </a:rPr>
+              <a:t>Read the module for shared vocabulary and context.</a:t>
+            </a:r>
+            <a:endParaRPr lang="en-US" sz="1380" dirty="0"/>
+          </a:p>
+          <a:p>
+            <a:r>
+              <a:rPr lang="en-US" sz="1380" dirty="0">
+                <a:solidFill>
+                  <a:srgbClr val="17364A"/>
+                </a:solidFill>
+                <a:latin typeface="Aptos" pitchFamily="34" charset="0"/>
+                <a:ea typeface="Aptos" pitchFamily="34" charset="-122"/>
+                <a:cs typeface="Aptos" pitchFamily="34" charset="-120"/>
+              </a:rPr>
+              <a:t>Complete the practical exercise to apply the concept.</a:t>
+            </a:r>
+            <a:endParaRPr lang="en-US" sz="1380" dirty="0"/>
+          </a:p>
+          <a:p>
+            <a:r>
+              <a:rPr lang="en-US" sz="1380" dirty="0">
+                <a:solidFill>
+                  <a:srgbClr val="17364A"/>
+                </a:solidFill>
+                <a:latin typeface="Aptos" pitchFamily="34" charset="0"/>
+                <a:ea typeface="Aptos" pitchFamily="34" charset="-122"/>
+                <a:cs typeface="Aptos" pitchFamily="34" charset="-120"/>
+              </a:rPr>
+              <a:t>Use the notes and references for deeper review.</a:t>
+            </a:r>
+            <a:endParaRPr lang="en-US" sz="1380" dirty="0"/>
           </a:p>
         </p:txBody>
       </p:sp>
@@ -11351,13 +10955,11 @@
             </a:avLst>
           </a:prstGeom>
           <a:solidFill>
-            <a:srgbClr val="FFFFFF">
-              <a:alpha val="88000"/>
-            </a:srgbClr>
+            <a:srgbClr val="FFFFFF"/>
           </a:solidFill>
           <a:ln w="12700">
             <a:solidFill>
-              <a:srgbClr val="D6E8F2"/>
+              <a:srgbClr val="B9D7E6"/>
             </a:solidFill>
             <a:prstDash val="solid"/>
           </a:ln>
@@ -11365,119 +10967,112 @@
       </p:sp>
       <p:sp>
         <p:nvSpPr>
-          <p:cNvPr id="14" name="Shape 12"/>
-          <p:cNvSpPr/>
-          <p:nvPr/>
-        </p:nvSpPr>
-        <p:spPr>
-          <a:xfrm>
-            <a:off x="8074152" y="3291840"/>
-            <a:ext cx="2596896" cy="749808"/>
-          </a:xfrm>
-          <a:prstGeom prst="rect">
-            <a:avLst/>
-          </a:prstGeom>
-          <a:solidFill>
-            <a:srgbClr val="EAF6F8"/>
-          </a:solidFill>
-          <a:ln w="12700">
-            <a:solidFill>
-              <a:srgbClr val="8ABBD8"/>
-            </a:solidFill>
-            <a:prstDash val="solid"/>
-          </a:ln>
-        </p:spPr>
-      </p:sp>
-      <p:sp>
-        <p:nvSpPr>
-          <p:cNvPr id="15" name="Shape 13"/>
-          <p:cNvSpPr/>
-          <p:nvPr/>
-        </p:nvSpPr>
-        <p:spPr>
-          <a:xfrm>
-            <a:off x="8202168" y="3721608"/>
-            <a:ext cx="2340864" cy="0"/>
-          </a:xfrm>
-          <a:prstGeom prst="line">
-            <a:avLst/>
-          </a:prstGeom>
-          <a:noFill/>
-          <a:ln w="19050">
-            <a:solidFill>
-              <a:srgbClr val="0068B7"/>
-            </a:solidFill>
-            <a:prstDash val="solid"/>
-          </a:ln>
-        </p:spPr>
+          <p:cNvPr id="14" name="Text 12"/>
+          <p:cNvSpPr/>
+          <p:nvPr/>
+        </p:nvSpPr>
+        <p:spPr>
+          <a:xfrm>
+            <a:off x="7799832" y="2935224"/>
+            <a:ext cx="3145536" cy="256032"/>
+          </a:xfrm>
+          <a:prstGeom prst="rect">
+            <a:avLst/>
+          </a:prstGeom>
+          <a:noFill/>
+          <a:ln/>
+        </p:spPr>
+        <p:txBody>
+          <a:bodyPr wrap="square" lIns="0" tIns="0" rIns="0" bIns="0" rtlCol="0" anchor="ctr"/>
+          <a:lstStyle/>
+          <a:p>
+            <a:pPr indent="0" marL="0">
+              <a:buNone/>
+            </a:pPr>
+            <a:r>
+              <a:rPr lang="en-US" sz="1300" b="1" dirty="0">
+                <a:solidFill>
+                  <a:srgbClr val="0068B7"/>
+                </a:solidFill>
+                <a:latin typeface="Aptos" pitchFamily="34" charset="0"/>
+                <a:ea typeface="Aptos" pitchFamily="34" charset="-122"/>
+                <a:cs typeface="Aptos" pitchFamily="34" charset="-120"/>
+              </a:rPr>
+              <a:t>Concept checkpoints</a:t>
+            </a:r>
+            <a:endParaRPr lang="en-US" sz="1300" dirty="0"/>
+          </a:p>
+        </p:txBody>
+      </p:sp>
+      <p:sp>
+        <p:nvSpPr>
+          <p:cNvPr id="15" name="Text 13"/>
+          <p:cNvSpPr/>
+          <p:nvPr/>
+        </p:nvSpPr>
+        <p:spPr>
+          <a:xfrm>
+            <a:off x="7818120" y="3300984"/>
+            <a:ext cx="3090672" cy="877824"/>
+          </a:xfrm>
+          <a:prstGeom prst="rect">
+            <a:avLst/>
+          </a:prstGeom>
+          <a:noFill/>
+          <a:ln/>
+        </p:spPr>
+        <p:txBody>
+          <a:bodyPr wrap="square" lIns="254" tIns="254" rIns="254" bIns="254" rtlCol="0" anchor="t">
+            <a:normAutofit/>
+          </a:bodyPr>
+          <a:lstStyle/>
+          <a:p>
+            <a:r>
+              <a:rPr lang="en-US" sz="1380" dirty="0">
+                <a:solidFill>
+                  <a:srgbClr val="17364A"/>
+                </a:solidFill>
+                <a:latin typeface="Aptos" pitchFamily="34" charset="0"/>
+                <a:ea typeface="Aptos" pitchFamily="34" charset="-122"/>
+                <a:cs typeface="Aptos" pitchFamily="34" charset="-120"/>
+              </a:rPr>
+              <a:t>Geospatial AI readiness worksheet</a:t>
+            </a:r>
+            <a:endParaRPr lang="en-US" sz="1380" dirty="0"/>
+          </a:p>
+          <a:p>
+            <a:r>
+              <a:rPr lang="en-US" sz="1380" dirty="0">
+                <a:solidFill>
+                  <a:srgbClr val="17364A"/>
+                </a:solidFill>
+                <a:latin typeface="Aptos" pitchFamily="34" charset="0"/>
+                <a:ea typeface="Aptos" pitchFamily="34" charset="-122"/>
+                <a:cs typeface="Aptos" pitchFamily="34" charset="-120"/>
+              </a:rPr>
+              <a:t>Map interpretation and limitations memo</a:t>
+            </a:r>
+            <a:endParaRPr lang="en-US" sz="1380" dirty="0"/>
+          </a:p>
+          <a:p>
+            <a:r>
+              <a:rPr lang="en-US" sz="1380" dirty="0">
+                <a:solidFill>
+                  <a:srgbClr val="17364A"/>
+                </a:solidFill>
+                <a:latin typeface="Aptos" pitchFamily="34" charset="0"/>
+                <a:ea typeface="Aptos" pitchFamily="34" charset="-122"/>
+                <a:cs typeface="Aptos" pitchFamily="34" charset="-120"/>
+              </a:rPr>
+              <a:t>Privacy and suppression review notes</a:t>
+            </a:r>
+            <a:endParaRPr lang="en-US" sz="1380" dirty="0"/>
+          </a:p>
+        </p:txBody>
       </p:sp>
       <p:sp>
         <p:nvSpPr>
           <p:cNvPr id="16" name="Shape 14"/>
-          <p:cNvSpPr/>
-          <p:nvPr/>
-        </p:nvSpPr>
-        <p:spPr>
-          <a:xfrm>
-            <a:off x="9198864" y="4206240"/>
-            <a:ext cx="347472" cy="347472"/>
-          </a:xfrm>
-          <a:prstGeom prst="ellipse">
-            <a:avLst/>
-          </a:prstGeom>
-          <a:solidFill>
-            <a:srgbClr val="2F8A28"/>
-          </a:solidFill>
-          <a:ln w="12700">
-            <a:solidFill>
-              <a:srgbClr val="2F8A28"/>
-            </a:solidFill>
-            <a:prstDash val="solid"/>
-          </a:ln>
-        </p:spPr>
-      </p:sp>
-      <p:sp>
-        <p:nvSpPr>
-          <p:cNvPr id="17" name="Text 15"/>
-          <p:cNvSpPr/>
-          <p:nvPr/>
-        </p:nvSpPr>
-        <p:spPr>
-          <a:xfrm>
-            <a:off x="7909560" y="3977640"/>
-            <a:ext cx="2926080" cy="182880"/>
-          </a:xfrm>
-          <a:prstGeom prst="rect">
-            <a:avLst/>
-          </a:prstGeom>
-          <a:noFill/>
-          <a:ln/>
-        </p:spPr>
-        <p:txBody>
-          <a:bodyPr wrap="square" lIns="0" tIns="0" rIns="0" bIns="0" rtlCol="0" anchor="ctr"/>
-          <a:lstStyle/>
-          <a:p>
-            <a:pPr algn="ctr" indent="0" marL="0">
-              <a:buNone/>
-            </a:pPr>
-            <a:r>
-              <a:rPr lang="en-US" sz="1000" dirty="0">
-                <a:solidFill>
-                  <a:srgbClr val="003A63"/>
-                </a:solidFill>
-                <a:latin typeface="Aptos" pitchFamily="34" charset="0"/>
-                <a:ea typeface="Aptos" pitchFamily="34" charset="-122"/>
-                <a:cs typeface="Aptos" pitchFamily="34" charset="-120"/>
-              </a:rPr>
-              <a:t>Concept to action</a:t>
-            </a:r>
-            <a:endParaRPr lang="en-US" sz="1000" dirty="0"/>
-          </a:p>
-        </p:txBody>
-      </p:sp>
-      <p:sp>
-        <p:nvSpPr>
-          <p:cNvPr id="18" name="Shape 16"/>
           <p:cNvSpPr/>
           <p:nvPr/>
         </p:nvSpPr>
@@ -11504,7 +11099,7 @@
       </p:sp>
       <p:sp>
         <p:nvSpPr>
-          <p:cNvPr id="19" name="Text 17"/>
+          <p:cNvPr id="17" name="Text 15"/>
           <p:cNvSpPr/>
           <p:nvPr/>
         </p:nvSpPr>
@@ -11543,7 +11138,7 @@
       </p:sp>
       <p:sp>
         <p:nvSpPr>
-          <p:cNvPr id="20" name="Text 18"/>
+          <p:cNvPr id="18" name="Text 16"/>
           <p:cNvSpPr/>
           <p:nvPr/>
         </p:nvSpPr>
@@ -12051,13 +11646,11 @@
             </a:avLst>
           </a:prstGeom>
           <a:solidFill>
-            <a:srgbClr val="FFFFFF">
-              <a:alpha val="88000"/>
-            </a:srgbClr>
+            <a:srgbClr val="FFFFFF"/>
           </a:solidFill>
           <a:ln w="12700">
             <a:solidFill>
-              <a:srgbClr val="D6E8F2"/>
+              <a:srgbClr val="B9D7E6"/>
             </a:solidFill>
             <a:prstDash val="solid"/>
           </a:ln>
@@ -12065,119 +11658,112 @@
       </p:sp>
       <p:sp>
         <p:nvSpPr>
-          <p:cNvPr id="14" name="Shape 12"/>
-          <p:cNvSpPr/>
-          <p:nvPr/>
-        </p:nvSpPr>
-        <p:spPr>
-          <a:xfrm>
-            <a:off x="8074152" y="3291840"/>
-            <a:ext cx="2596896" cy="749808"/>
-          </a:xfrm>
-          <a:prstGeom prst="rect">
-            <a:avLst/>
-          </a:prstGeom>
-          <a:solidFill>
-            <a:srgbClr val="EAF6F8"/>
-          </a:solidFill>
-          <a:ln w="12700">
-            <a:solidFill>
-              <a:srgbClr val="8ABBD8"/>
-            </a:solidFill>
-            <a:prstDash val="solid"/>
-          </a:ln>
-        </p:spPr>
-      </p:sp>
-      <p:sp>
-        <p:nvSpPr>
-          <p:cNvPr id="15" name="Shape 13"/>
-          <p:cNvSpPr/>
-          <p:nvPr/>
-        </p:nvSpPr>
-        <p:spPr>
-          <a:xfrm>
-            <a:off x="8202168" y="3721608"/>
-            <a:ext cx="2340864" cy="0"/>
-          </a:xfrm>
-          <a:prstGeom prst="line">
-            <a:avLst/>
-          </a:prstGeom>
-          <a:noFill/>
-          <a:ln w="19050">
-            <a:solidFill>
-              <a:srgbClr val="0068B7"/>
-            </a:solidFill>
-            <a:prstDash val="solid"/>
-          </a:ln>
-        </p:spPr>
+          <p:cNvPr id="14" name="Text 12"/>
+          <p:cNvSpPr/>
+          <p:nvPr/>
+        </p:nvSpPr>
+        <p:spPr>
+          <a:xfrm>
+            <a:off x="7799832" y="2935224"/>
+            <a:ext cx="3145536" cy="256032"/>
+          </a:xfrm>
+          <a:prstGeom prst="rect">
+            <a:avLst/>
+          </a:prstGeom>
+          <a:noFill/>
+          <a:ln/>
+        </p:spPr>
+        <p:txBody>
+          <a:bodyPr wrap="square" lIns="0" tIns="0" rIns="0" bIns="0" rtlCol="0" anchor="ctr"/>
+          <a:lstStyle/>
+          <a:p>
+            <a:pPr indent="0" marL="0">
+              <a:buNone/>
+            </a:pPr>
+            <a:r>
+              <a:rPr lang="en-US" sz="1300" b="1" dirty="0">
+                <a:solidFill>
+                  <a:srgbClr val="0068B7"/>
+                </a:solidFill>
+                <a:latin typeface="Aptos" pitchFamily="34" charset="0"/>
+                <a:ea typeface="Aptos" pitchFamily="34" charset="-122"/>
+                <a:cs typeface="Aptos" pitchFamily="34" charset="-120"/>
+              </a:rPr>
+              <a:t>Concept checkpoints</a:t>
+            </a:r>
+            <a:endParaRPr lang="en-US" sz="1300" dirty="0"/>
+          </a:p>
+        </p:txBody>
+      </p:sp>
+      <p:sp>
+        <p:nvSpPr>
+          <p:cNvPr id="15" name="Text 13"/>
+          <p:cNvSpPr/>
+          <p:nvPr/>
+        </p:nvSpPr>
+        <p:spPr>
+          <a:xfrm>
+            <a:off x="7818120" y="3300984"/>
+            <a:ext cx="3090672" cy="877824"/>
+          </a:xfrm>
+          <a:prstGeom prst="rect">
+            <a:avLst/>
+          </a:prstGeom>
+          <a:noFill/>
+          <a:ln/>
+        </p:spPr>
+        <p:txBody>
+          <a:bodyPr wrap="square" lIns="254" tIns="254" rIns="254" bIns="254" rtlCol="0" anchor="t">
+            <a:normAutofit/>
+          </a:bodyPr>
+          <a:lstStyle/>
+          <a:p>
+            <a:r>
+              <a:rPr lang="en-US" sz="1380" dirty="0">
+                <a:solidFill>
+                  <a:srgbClr val="17364A"/>
+                </a:solidFill>
+                <a:latin typeface="Aptos" pitchFamily="34" charset="0"/>
+                <a:ea typeface="Aptos" pitchFamily="34" charset="-122"/>
+                <a:cs typeface="Aptos" pitchFamily="34" charset="-120"/>
+              </a:rPr>
+              <a:t>1.</a:t>
+            </a:r>
+            <a:endParaRPr lang="en-US" sz="1380" dirty="0"/>
+          </a:p>
+          <a:p>
+            <a:r>
+              <a:rPr lang="en-US" sz="1380" dirty="0">
+                <a:solidFill>
+                  <a:srgbClr val="17364A"/>
+                </a:solidFill>
+                <a:latin typeface="Aptos" pitchFamily="34" charset="0"/>
+                <a:ea typeface="Aptos" pitchFamily="34" charset="-122"/>
+                <a:cs typeface="Aptos" pitchFamily="34" charset="-120"/>
+              </a:rPr>
+              <a:t>What is geocoding?</a:t>
+            </a:r>
+            <a:endParaRPr lang="en-US" sz="1380" dirty="0"/>
+          </a:p>
+          <a:p>
+            <a:r>
+              <a:rPr lang="en-US" sz="1380" dirty="0">
+                <a:solidFill>
+                  <a:srgbClr val="17364A"/>
+                </a:solidFill>
+                <a:latin typeface="Aptos" pitchFamily="34" charset="0"/>
+                <a:ea typeface="Aptos" pitchFamily="34" charset="-122"/>
+                <a:cs typeface="Aptos" pitchFamily="34" charset="-120"/>
+              </a:rPr>
+              <a:t>2.</a:t>
+            </a:r>
+            <a:endParaRPr lang="en-US" sz="1380" dirty="0"/>
+          </a:p>
+        </p:txBody>
       </p:sp>
       <p:sp>
         <p:nvSpPr>
           <p:cNvPr id="16" name="Shape 14"/>
-          <p:cNvSpPr/>
-          <p:nvPr/>
-        </p:nvSpPr>
-        <p:spPr>
-          <a:xfrm>
-            <a:off x="9198864" y="4206240"/>
-            <a:ext cx="347472" cy="347472"/>
-          </a:xfrm>
-          <a:prstGeom prst="ellipse">
-            <a:avLst/>
-          </a:prstGeom>
-          <a:solidFill>
-            <a:srgbClr val="2F8A28"/>
-          </a:solidFill>
-          <a:ln w="12700">
-            <a:solidFill>
-              <a:srgbClr val="2F8A28"/>
-            </a:solidFill>
-            <a:prstDash val="solid"/>
-          </a:ln>
-        </p:spPr>
-      </p:sp>
-      <p:sp>
-        <p:nvSpPr>
-          <p:cNvPr id="17" name="Text 15"/>
-          <p:cNvSpPr/>
-          <p:nvPr/>
-        </p:nvSpPr>
-        <p:spPr>
-          <a:xfrm>
-            <a:off x="7909560" y="3977640"/>
-            <a:ext cx="2926080" cy="182880"/>
-          </a:xfrm>
-          <a:prstGeom prst="rect">
-            <a:avLst/>
-          </a:prstGeom>
-          <a:noFill/>
-          <a:ln/>
-        </p:spPr>
-        <p:txBody>
-          <a:bodyPr wrap="square" lIns="0" tIns="0" rIns="0" bIns="0" rtlCol="0" anchor="ctr"/>
-          <a:lstStyle/>
-          <a:p>
-            <a:pPr algn="ctr" indent="0" marL="0">
-              <a:buNone/>
-            </a:pPr>
-            <a:r>
-              <a:rPr lang="en-US" sz="1000" dirty="0">
-                <a:solidFill>
-                  <a:srgbClr val="003A63"/>
-                </a:solidFill>
-                <a:latin typeface="Aptos" pitchFamily="34" charset="0"/>
-                <a:ea typeface="Aptos" pitchFamily="34" charset="-122"/>
-                <a:cs typeface="Aptos" pitchFamily="34" charset="-120"/>
-              </a:rPr>
-              <a:t>Concept to action</a:t>
-            </a:r>
-            <a:endParaRPr lang="en-US" sz="1000" dirty="0"/>
-          </a:p>
-        </p:txBody>
-      </p:sp>
-      <p:sp>
-        <p:nvSpPr>
-          <p:cNvPr id="18" name="Shape 16"/>
           <p:cNvSpPr/>
           <p:nvPr/>
         </p:nvSpPr>
@@ -12204,7 +11790,7 @@
       </p:sp>
       <p:sp>
         <p:nvSpPr>
-          <p:cNvPr id="19" name="Text 17"/>
+          <p:cNvPr id="17" name="Text 15"/>
           <p:cNvSpPr/>
           <p:nvPr/>
         </p:nvSpPr>
@@ -12243,7 +11829,7 @@
       </p:sp>
       <p:sp>
         <p:nvSpPr>
-          <p:cNvPr id="20" name="Text 18"/>
+          <p:cNvPr id="18" name="Text 16"/>
           <p:cNvSpPr/>
           <p:nvPr/>
         </p:nvSpPr>
@@ -12751,13 +12337,11 @@
             </a:avLst>
           </a:prstGeom>
           <a:solidFill>
-            <a:srgbClr val="FFFFFF">
-              <a:alpha val="88000"/>
-            </a:srgbClr>
+            <a:srgbClr val="FFFFFF"/>
           </a:solidFill>
           <a:ln w="12700">
             <a:solidFill>
-              <a:srgbClr val="D6E8F2"/>
+              <a:srgbClr val="B9D7E6"/>
             </a:solidFill>
             <a:prstDash val="solid"/>
           </a:ln>
@@ -12765,119 +12349,98 @@
       </p:sp>
       <p:sp>
         <p:nvSpPr>
-          <p:cNvPr id="14" name="Shape 12"/>
-          <p:cNvSpPr/>
-          <p:nvPr/>
-        </p:nvSpPr>
-        <p:spPr>
-          <a:xfrm>
-            <a:off x="8074152" y="3291840"/>
-            <a:ext cx="2596896" cy="749808"/>
-          </a:xfrm>
-          <a:prstGeom prst="rect">
-            <a:avLst/>
-          </a:prstGeom>
-          <a:solidFill>
-            <a:srgbClr val="EAF6F8"/>
-          </a:solidFill>
-          <a:ln w="12700">
-            <a:solidFill>
-              <a:srgbClr val="8ABBD8"/>
-            </a:solidFill>
-            <a:prstDash val="solid"/>
-          </a:ln>
-        </p:spPr>
-      </p:sp>
-      <p:sp>
-        <p:nvSpPr>
-          <p:cNvPr id="15" name="Shape 13"/>
-          <p:cNvSpPr/>
-          <p:nvPr/>
-        </p:nvSpPr>
-        <p:spPr>
-          <a:xfrm>
-            <a:off x="8202168" y="3721608"/>
-            <a:ext cx="2340864" cy="0"/>
-          </a:xfrm>
-          <a:prstGeom prst="line">
-            <a:avLst/>
-          </a:prstGeom>
-          <a:noFill/>
-          <a:ln w="19050">
-            <a:solidFill>
-              <a:srgbClr val="0068B7"/>
-            </a:solidFill>
-            <a:prstDash val="solid"/>
-          </a:ln>
-        </p:spPr>
+          <p:cNvPr id="14" name="Text 12"/>
+          <p:cNvSpPr/>
+          <p:nvPr/>
+        </p:nvSpPr>
+        <p:spPr>
+          <a:xfrm>
+            <a:off x="7799832" y="2935224"/>
+            <a:ext cx="3145536" cy="256032"/>
+          </a:xfrm>
+          <a:prstGeom prst="rect">
+            <a:avLst/>
+          </a:prstGeom>
+          <a:noFill/>
+          <a:ln/>
+        </p:spPr>
+        <p:txBody>
+          <a:bodyPr wrap="square" lIns="0" tIns="0" rIns="0" bIns="0" rtlCol="0" anchor="ctr"/>
+          <a:lstStyle/>
+          <a:p>
+            <a:pPr indent="0" marL="0">
+              <a:buNone/>
+            </a:pPr>
+            <a:r>
+              <a:rPr lang="en-US" sz="1300" b="1" dirty="0">
+                <a:solidFill>
+                  <a:srgbClr val="0068B7"/>
+                </a:solidFill>
+                <a:latin typeface="Aptos" pitchFamily="34" charset="0"/>
+                <a:ea typeface="Aptos" pitchFamily="34" charset="-122"/>
+                <a:cs typeface="Aptos" pitchFamily="34" charset="-120"/>
+              </a:rPr>
+              <a:t>Concept checkpoints</a:t>
+            </a:r>
+            <a:endParaRPr lang="en-US" sz="1300" dirty="0"/>
+          </a:p>
+        </p:txBody>
+      </p:sp>
+      <p:sp>
+        <p:nvSpPr>
+          <p:cNvPr id="15" name="Text 13"/>
+          <p:cNvSpPr/>
+          <p:nvPr/>
+        </p:nvSpPr>
+        <p:spPr>
+          <a:xfrm>
+            <a:off x="7818120" y="3300984"/>
+            <a:ext cx="3090672" cy="877824"/>
+          </a:xfrm>
+          <a:prstGeom prst="rect">
+            <a:avLst/>
+          </a:prstGeom>
+          <a:noFill/>
+          <a:ln/>
+        </p:spPr>
+        <p:txBody>
+          <a:bodyPr wrap="square" lIns="254" tIns="254" rIns="254" bIns="254" rtlCol="0" anchor="t">
+            <a:normAutofit/>
+          </a:bodyPr>
+          <a:lstStyle/>
+          <a:p>
+            <a:r>
+              <a:rPr lang="en-US" sz="1380" dirty="0">
+                <a:solidFill>
+                  <a:srgbClr val="17364A"/>
+                </a:solidFill>
+                <a:latin typeface="Aptos" pitchFamily="34" charset="0"/>
+                <a:ea typeface="Aptos" pitchFamily="34" charset="-122"/>
+                <a:cs typeface="Aptos" pitchFamily="34" charset="-120"/>
+              </a:rPr>
+              <a:t>NIST Artificial Intelligence Risk Management Framework:.</a:t>
+            </a:r>
+            <a:endParaRPr lang="en-US" sz="1380" dirty="0"/>
+          </a:p>
+          <a:p>
+            <a:r>
+              <a:rPr lang="en-US" sz="1380" dirty="0">
+                <a:solidFill>
+                  <a:srgbClr val="17364A"/>
+                </a:solidFill>
+                <a:latin typeface="Aptos" pitchFamily="34" charset="0"/>
+                <a:ea typeface="Aptos" pitchFamily="34" charset="-122"/>
+                <a:cs typeface="Aptos" pitchFamily="34" charset="-120"/>
+              </a:rPr>
+              <a:t>CDC Public Health Data Strategy:.</a:t>
+            </a:r>
+            <a:endParaRPr lang="en-US" sz="1380" dirty="0"/>
+          </a:p>
+        </p:txBody>
       </p:sp>
       <p:sp>
         <p:nvSpPr>
           <p:cNvPr id="16" name="Shape 14"/>
-          <p:cNvSpPr/>
-          <p:nvPr/>
-        </p:nvSpPr>
-        <p:spPr>
-          <a:xfrm>
-            <a:off x="9198864" y="4206240"/>
-            <a:ext cx="347472" cy="347472"/>
-          </a:xfrm>
-          <a:prstGeom prst="ellipse">
-            <a:avLst/>
-          </a:prstGeom>
-          <a:solidFill>
-            <a:srgbClr val="2F8A28"/>
-          </a:solidFill>
-          <a:ln w="12700">
-            <a:solidFill>
-              <a:srgbClr val="2F8A28"/>
-            </a:solidFill>
-            <a:prstDash val="solid"/>
-          </a:ln>
-        </p:spPr>
-      </p:sp>
-      <p:sp>
-        <p:nvSpPr>
-          <p:cNvPr id="17" name="Text 15"/>
-          <p:cNvSpPr/>
-          <p:nvPr/>
-        </p:nvSpPr>
-        <p:spPr>
-          <a:xfrm>
-            <a:off x="7909560" y="3977640"/>
-            <a:ext cx="2926080" cy="182880"/>
-          </a:xfrm>
-          <a:prstGeom prst="rect">
-            <a:avLst/>
-          </a:prstGeom>
-          <a:noFill/>
-          <a:ln/>
-        </p:spPr>
-        <p:txBody>
-          <a:bodyPr wrap="square" lIns="0" tIns="0" rIns="0" bIns="0" rtlCol="0" anchor="ctr"/>
-          <a:lstStyle/>
-          <a:p>
-            <a:pPr algn="ctr" indent="0" marL="0">
-              <a:buNone/>
-            </a:pPr>
-            <a:r>
-              <a:rPr lang="en-US" sz="1000" dirty="0">
-                <a:solidFill>
-                  <a:srgbClr val="003A63"/>
-                </a:solidFill>
-                <a:latin typeface="Aptos" pitchFamily="34" charset="0"/>
-                <a:ea typeface="Aptos" pitchFamily="34" charset="-122"/>
-                <a:cs typeface="Aptos" pitchFamily="34" charset="-120"/>
-              </a:rPr>
-              <a:t>Concept to action</a:t>
-            </a:r>
-            <a:endParaRPr lang="en-US" sz="1000" dirty="0"/>
-          </a:p>
-        </p:txBody>
-      </p:sp>
-      <p:sp>
-        <p:nvSpPr>
-          <p:cNvPr id="18" name="Shape 16"/>
           <p:cNvSpPr/>
           <p:nvPr/>
         </p:nvSpPr>
@@ -12904,7 +12467,7 @@
       </p:sp>
       <p:sp>
         <p:nvSpPr>
-          <p:cNvPr id="19" name="Text 17"/>
+          <p:cNvPr id="17" name="Text 15"/>
           <p:cNvSpPr/>
           <p:nvPr/>
         </p:nvSpPr>
@@ -12943,7 +12506,7 @@
       </p:sp>
       <p:sp>
         <p:nvSpPr>
-          <p:cNvPr id="20" name="Text 18"/>
+          <p:cNvPr id="18" name="Text 16"/>
           <p:cNvSpPr/>
           <p:nvPr/>
         </p:nvSpPr>
@@ -13456,20 +13019,20 @@
         </p:nvSpPr>
         <p:spPr>
           <a:xfrm>
-            <a:off x="7818120" y="3977640"/>
-            <a:ext cx="972312" cy="749808"/>
+            <a:off x="8046720" y="3794760"/>
+            <a:ext cx="3063240" cy="1600200"/>
           </a:xfrm>
           <a:prstGeom prst="roundRect">
             <a:avLst>
-              <a:gd name="adj" fmla="val 14634"/>
+              <a:gd name="adj" fmla="val 6857"/>
             </a:avLst>
           </a:prstGeom>
           <a:solidFill>
-            <a:srgbClr val="0068B7"/>
+            <a:srgbClr val="FFFFFF"/>
           </a:solidFill>
           <a:ln w="12700">
             <a:solidFill>
-              <a:srgbClr val="0068B7"/>
+              <a:srgbClr val="B9D7E6"/>
             </a:solidFill>
             <a:prstDash val="solid"/>
           </a:ln>
@@ -13483,172 +13046,100 @@
         </p:nvSpPr>
         <p:spPr>
           <a:xfrm>
-            <a:off x="7891272" y="4169664"/>
-            <a:ext cx="826008" cy="310896"/>
-          </a:xfrm>
-          <a:prstGeom prst="rect">
-            <a:avLst/>
-          </a:prstGeom>
-          <a:noFill/>
-          <a:ln/>
-        </p:spPr>
-        <p:txBody>
-          <a:bodyPr wrap="square" lIns="0" tIns="0" rIns="0" bIns="0" rtlCol="0" anchor="ctr">
+            <a:off x="8211312" y="3941064"/>
+            <a:ext cx="2734056" cy="256032"/>
+          </a:xfrm>
+          <a:prstGeom prst="rect">
+            <a:avLst/>
+          </a:prstGeom>
+          <a:noFill/>
+          <a:ln/>
+        </p:spPr>
+        <p:txBody>
+          <a:bodyPr wrap="square" lIns="0" tIns="0" rIns="0" bIns="0" rtlCol="0" anchor="ctr"/>
+          <a:lstStyle/>
+          <a:p>
+            <a:pPr indent="0" marL="0">
+              <a:buNone/>
+            </a:pPr>
+            <a:r>
+              <a:rPr lang="en-US" sz="1300" b="1" dirty="0">
+                <a:solidFill>
+                  <a:srgbClr val="0068B7"/>
+                </a:solidFill>
+                <a:latin typeface="Aptos" pitchFamily="34" charset="0"/>
+                <a:ea typeface="Aptos" pitchFamily="34" charset="-122"/>
+                <a:cs typeface="Aptos" pitchFamily="34" charset="-120"/>
+              </a:rPr>
+              <a:t>Use the play links to</a:t>
+            </a:r>
+            <a:endParaRPr lang="en-US" sz="1300" dirty="0"/>
+          </a:p>
+        </p:txBody>
+      </p:sp>
+      <p:sp>
+        <p:nvSpPr>
+          <p:cNvPr id="15" name="Text 13"/>
+          <p:cNvSpPr/>
+          <p:nvPr/>
+        </p:nvSpPr>
+        <p:spPr>
+          <a:xfrm>
+            <a:off x="8229600" y="4306824"/>
+            <a:ext cx="2679192" cy="941832"/>
+          </a:xfrm>
+          <a:prstGeom prst="rect">
+            <a:avLst/>
+          </a:prstGeom>
+          <a:noFill/>
+          <a:ln/>
+        </p:spPr>
+        <p:txBody>
+          <a:bodyPr wrap="square" lIns="254" tIns="254" rIns="254" bIns="254" rtlCol="0" anchor="t">
             <a:normAutofit/>
           </a:bodyPr>
           <a:lstStyle/>
           <a:p>
-            <a:pPr algn="ctr" indent="0" marL="0">
-              <a:buNone/>
-            </a:pPr>
-            <a:r>
-              <a:rPr lang="en-US" sz="1500" b="1" dirty="0">
-                <a:solidFill>
-                  <a:srgbClr val="FFFFFF"/>
-                </a:solidFill>
-                <a:latin typeface="Aptos" pitchFamily="34" charset="0"/>
-                <a:ea typeface="Aptos" pitchFamily="34" charset="-122"/>
-                <a:cs typeface="Aptos" pitchFamily="34" charset="-120"/>
-              </a:rPr>
-              <a:t>Lesson</a:t>
-            </a:r>
-            <a:endParaRPr lang="en-US" sz="1500" dirty="0"/>
-          </a:p>
-        </p:txBody>
-      </p:sp>
-      <p:sp>
-        <p:nvSpPr>
-          <p:cNvPr id="15" name="Shape 13"/>
-          <p:cNvSpPr/>
-          <p:nvPr/>
-        </p:nvSpPr>
-        <p:spPr>
-          <a:xfrm>
-            <a:off x="9046464" y="3977640"/>
-            <a:ext cx="972312" cy="749808"/>
-          </a:xfrm>
-          <a:prstGeom prst="roundRect">
-            <a:avLst>
-              <a:gd name="adj" fmla="val 14634"/>
-            </a:avLst>
-          </a:prstGeom>
-          <a:solidFill>
-            <a:srgbClr val="2F8A28"/>
-          </a:solidFill>
-          <a:ln w="12700">
-            <a:solidFill>
-              <a:srgbClr val="2F8A28"/>
-            </a:solidFill>
-            <a:prstDash val="solid"/>
-          </a:ln>
-        </p:spPr>
-      </p:sp>
-      <p:sp>
-        <p:nvSpPr>
-          <p:cNvPr id="16" name="Text 14"/>
-          <p:cNvSpPr/>
-          <p:nvPr/>
-        </p:nvSpPr>
-        <p:spPr>
-          <a:xfrm>
-            <a:off x="9119616" y="4169664"/>
-            <a:ext cx="826008" cy="310896"/>
-          </a:xfrm>
-          <a:prstGeom prst="rect">
-            <a:avLst/>
-          </a:prstGeom>
-          <a:noFill/>
-          <a:ln/>
-        </p:spPr>
-        <p:txBody>
-          <a:bodyPr wrap="square" lIns="0" tIns="0" rIns="0" bIns="0" rtlCol="0" anchor="ctr">
-            <a:normAutofit/>
-          </a:bodyPr>
-          <a:lstStyle/>
-          <a:p>
-            <a:pPr algn="ctr" indent="0" marL="0">
-              <a:buNone/>
-            </a:pPr>
-            <a:r>
-              <a:rPr lang="en-US" sz="1500" b="1" dirty="0">
-                <a:solidFill>
-                  <a:srgbClr val="FFFFFF"/>
-                </a:solidFill>
-                <a:latin typeface="Aptos" pitchFamily="34" charset="0"/>
-                <a:ea typeface="Aptos" pitchFamily="34" charset="-122"/>
-                <a:cs typeface="Aptos" pitchFamily="34" charset="-120"/>
-              </a:rPr>
-              <a:t>Plays</a:t>
-            </a:r>
-            <a:endParaRPr lang="en-US" sz="1500" dirty="0"/>
-          </a:p>
-        </p:txBody>
-      </p:sp>
-      <p:sp>
-        <p:nvSpPr>
-          <p:cNvPr id="17" name="Shape 15"/>
-          <p:cNvSpPr/>
-          <p:nvPr/>
-        </p:nvSpPr>
-        <p:spPr>
-          <a:xfrm>
-            <a:off x="10274808" y="3977640"/>
-            <a:ext cx="972312" cy="749808"/>
-          </a:xfrm>
-          <a:prstGeom prst="roundRect">
-            <a:avLst>
-              <a:gd name="adj" fmla="val 14634"/>
-            </a:avLst>
-          </a:prstGeom>
-          <a:solidFill>
-            <a:srgbClr val="6A4CA3"/>
-          </a:solidFill>
-          <a:ln w="12700">
-            <a:solidFill>
-              <a:srgbClr val="6A4CA3"/>
-            </a:solidFill>
-            <a:prstDash val="solid"/>
-          </a:ln>
-        </p:spPr>
-      </p:sp>
-      <p:sp>
-        <p:nvSpPr>
-          <p:cNvPr id="18" name="Text 16"/>
-          <p:cNvSpPr/>
-          <p:nvPr/>
-        </p:nvSpPr>
-        <p:spPr>
-          <a:xfrm>
-            <a:off x="10347960" y="4169664"/>
-            <a:ext cx="826008" cy="310896"/>
-          </a:xfrm>
-          <a:prstGeom prst="rect">
-            <a:avLst/>
-          </a:prstGeom>
-          <a:noFill/>
-          <a:ln/>
-        </p:spPr>
-        <p:txBody>
-          <a:bodyPr wrap="square" lIns="0" tIns="0" rIns="0" bIns="0" rtlCol="0" anchor="ctr">
-            <a:normAutofit/>
-          </a:bodyPr>
-          <a:lstStyle/>
-          <a:p>
-            <a:pPr algn="ctr" indent="0" marL="0">
-              <a:buNone/>
-            </a:pPr>
-            <a:r>
-              <a:rPr lang="en-US" sz="1500" b="1" dirty="0">
-                <a:solidFill>
-                  <a:srgbClr val="FFFFFF"/>
-                </a:solidFill>
-                <a:latin typeface="Aptos" pitchFamily="34" charset="0"/>
-                <a:ea typeface="Aptos" pitchFamily="34" charset="-122"/>
-                <a:cs typeface="Aptos" pitchFamily="34" charset="-120"/>
-              </a:rPr>
-              <a:t>Action</a:t>
-            </a:r>
-            <a:endParaRPr lang="en-US" sz="1500" dirty="0"/>
+            <a:r>
+              <a:rPr lang="en-US" sz="1380" dirty="0">
+                <a:solidFill>
+                  <a:srgbClr val="17364A"/>
+                </a:solidFill>
+                <a:latin typeface="Aptos" pitchFamily="34" charset="0"/>
+                <a:ea typeface="Aptos" pitchFamily="34" charset="-122"/>
+                <a:cs typeface="Aptos" pitchFamily="34" charset="-120"/>
+              </a:rPr>
+              <a:t>Locate the decision point in the playbook sequence.</a:t>
+            </a:r>
+            <a:endParaRPr lang="en-US" sz="1380" dirty="0"/>
+          </a:p>
+          <a:p>
+            <a:r>
+              <a:rPr lang="en-US" sz="1380" dirty="0">
+                <a:solidFill>
+                  <a:srgbClr val="17364A"/>
+                </a:solidFill>
+                <a:latin typeface="Aptos" pitchFamily="34" charset="0"/>
+                <a:ea typeface="Aptos" pitchFamily="34" charset="-122"/>
+                <a:cs typeface="Aptos" pitchFamily="34" charset="-120"/>
+              </a:rPr>
+              <a:t>Identify who should participate in the work.</a:t>
+            </a:r>
+            <a:endParaRPr lang="en-US" sz="1380" dirty="0"/>
+          </a:p>
+          <a:p>
+            <a:r>
+              <a:rPr lang="en-US" sz="1380" dirty="0">
+                <a:solidFill>
+                  <a:srgbClr val="17364A"/>
+                </a:solidFill>
+                <a:latin typeface="Aptos" pitchFamily="34" charset="0"/>
+                <a:ea typeface="Aptos" pitchFamily="34" charset="-122"/>
+                <a:cs typeface="Aptos" pitchFamily="34" charset="-120"/>
+              </a:rPr>
+              <a:t>Document the review, approval, or implementation step.</a:t>
+            </a:r>
+            <a:endParaRPr lang="en-US" sz="1380" dirty="0"/>
           </a:p>
         </p:txBody>
       </p:sp>
@@ -14126,20 +13617,20 @@
         </p:nvSpPr>
         <p:spPr>
           <a:xfrm>
-            <a:off x="7818120" y="3977640"/>
-            <a:ext cx="972312" cy="749808"/>
+            <a:off x="8046720" y="3794760"/>
+            <a:ext cx="3063240" cy="1600200"/>
           </a:xfrm>
           <a:prstGeom prst="roundRect">
             <a:avLst>
-              <a:gd name="adj" fmla="val 14634"/>
+              <a:gd name="adj" fmla="val 6857"/>
             </a:avLst>
           </a:prstGeom>
           <a:solidFill>
-            <a:srgbClr val="0068B7"/>
+            <a:srgbClr val="FFFFFF"/>
           </a:solidFill>
           <a:ln w="12700">
             <a:solidFill>
-              <a:srgbClr val="0068B7"/>
+              <a:srgbClr val="B9D7E6"/>
             </a:solidFill>
             <a:prstDash val="solid"/>
           </a:ln>
@@ -14153,172 +13644,100 @@
         </p:nvSpPr>
         <p:spPr>
           <a:xfrm>
-            <a:off x="7891272" y="4169664"/>
-            <a:ext cx="826008" cy="310896"/>
-          </a:xfrm>
-          <a:prstGeom prst="rect">
-            <a:avLst/>
-          </a:prstGeom>
-          <a:noFill/>
-          <a:ln/>
-        </p:spPr>
-        <p:txBody>
-          <a:bodyPr wrap="square" lIns="0" tIns="0" rIns="0" bIns="0" rtlCol="0" anchor="ctr">
+            <a:off x="8211312" y="3941064"/>
+            <a:ext cx="2734056" cy="256032"/>
+          </a:xfrm>
+          <a:prstGeom prst="rect">
+            <a:avLst/>
+          </a:prstGeom>
+          <a:noFill/>
+          <a:ln/>
+        </p:spPr>
+        <p:txBody>
+          <a:bodyPr wrap="square" lIns="0" tIns="0" rIns="0" bIns="0" rtlCol="0" anchor="ctr"/>
+          <a:lstStyle/>
+          <a:p>
+            <a:pPr indent="0" marL="0">
+              <a:buNone/>
+            </a:pPr>
+            <a:r>
+              <a:rPr lang="en-US" sz="1300" b="1" dirty="0">
+                <a:solidFill>
+                  <a:srgbClr val="0068B7"/>
+                </a:solidFill>
+                <a:latin typeface="Aptos" pitchFamily="34" charset="0"/>
+                <a:ea typeface="Aptos" pitchFamily="34" charset="-122"/>
+                <a:cs typeface="Aptos" pitchFamily="34" charset="-120"/>
+              </a:rPr>
+              <a:t>Tool selection cues</a:t>
+            </a:r>
+            <a:endParaRPr lang="en-US" sz="1300" dirty="0"/>
+          </a:p>
+        </p:txBody>
+      </p:sp>
+      <p:sp>
+        <p:nvSpPr>
+          <p:cNvPr id="15" name="Text 13"/>
+          <p:cNvSpPr/>
+          <p:nvPr/>
+        </p:nvSpPr>
+        <p:spPr>
+          <a:xfrm>
+            <a:off x="8229600" y="4306824"/>
+            <a:ext cx="2679192" cy="941832"/>
+          </a:xfrm>
+          <a:prstGeom prst="rect">
+            <a:avLst/>
+          </a:prstGeom>
+          <a:noFill/>
+          <a:ln/>
+        </p:spPr>
+        <p:txBody>
+          <a:bodyPr wrap="square" lIns="254" tIns="254" rIns="254" bIns="254" rtlCol="0" anchor="t">
             <a:normAutofit/>
           </a:bodyPr>
           <a:lstStyle/>
           <a:p>
-            <a:pPr algn="ctr" indent="0" marL="0">
-              <a:buNone/>
-            </a:pPr>
-            <a:r>
-              <a:rPr lang="en-US" sz="1500" b="1" dirty="0">
-                <a:solidFill>
-                  <a:srgbClr val="FFFFFF"/>
-                </a:solidFill>
-                <a:latin typeface="Aptos" pitchFamily="34" charset="0"/>
-                <a:ea typeface="Aptos" pitchFamily="34" charset="-122"/>
-                <a:cs typeface="Aptos" pitchFamily="34" charset="-120"/>
-              </a:rPr>
-              <a:t>Concept</a:t>
-            </a:r>
-            <a:endParaRPr lang="en-US" sz="1500" dirty="0"/>
-          </a:p>
-        </p:txBody>
-      </p:sp>
-      <p:sp>
-        <p:nvSpPr>
-          <p:cNvPr id="15" name="Shape 13"/>
-          <p:cNvSpPr/>
-          <p:nvPr/>
-        </p:nvSpPr>
-        <p:spPr>
-          <a:xfrm>
-            <a:off x="9046464" y="3977640"/>
-            <a:ext cx="972312" cy="749808"/>
-          </a:xfrm>
-          <a:prstGeom prst="roundRect">
-            <a:avLst>
-              <a:gd name="adj" fmla="val 14634"/>
-            </a:avLst>
-          </a:prstGeom>
-          <a:solidFill>
-            <a:srgbClr val="2F8A28"/>
-          </a:solidFill>
-          <a:ln w="12700">
-            <a:solidFill>
-              <a:srgbClr val="2F8A28"/>
-            </a:solidFill>
-            <a:prstDash val="solid"/>
-          </a:ln>
-        </p:spPr>
-      </p:sp>
-      <p:sp>
-        <p:nvSpPr>
-          <p:cNvPr id="16" name="Text 14"/>
-          <p:cNvSpPr/>
-          <p:nvPr/>
-        </p:nvSpPr>
-        <p:spPr>
-          <a:xfrm>
-            <a:off x="9119616" y="4169664"/>
-            <a:ext cx="826008" cy="310896"/>
-          </a:xfrm>
-          <a:prstGeom prst="rect">
-            <a:avLst/>
-          </a:prstGeom>
-          <a:noFill/>
-          <a:ln/>
-        </p:spPr>
-        <p:txBody>
-          <a:bodyPr wrap="square" lIns="0" tIns="0" rIns="0" bIns="0" rtlCol="0" anchor="ctr">
-            <a:normAutofit/>
-          </a:bodyPr>
-          <a:lstStyle/>
-          <a:p>
-            <a:pPr algn="ctr" indent="0" marL="0">
-              <a:buNone/>
-            </a:pPr>
-            <a:r>
-              <a:rPr lang="en-US" sz="1500" b="1" dirty="0">
-                <a:solidFill>
-                  <a:srgbClr val="FFFFFF"/>
-                </a:solidFill>
-                <a:latin typeface="Aptos" pitchFamily="34" charset="0"/>
-                <a:ea typeface="Aptos" pitchFamily="34" charset="-122"/>
-                <a:cs typeface="Aptos" pitchFamily="34" charset="-120"/>
-              </a:rPr>
-              <a:t>Tool</a:t>
-            </a:r>
-            <a:endParaRPr lang="en-US" sz="1500" dirty="0"/>
-          </a:p>
-        </p:txBody>
-      </p:sp>
-      <p:sp>
-        <p:nvSpPr>
-          <p:cNvPr id="17" name="Shape 15"/>
-          <p:cNvSpPr/>
-          <p:nvPr/>
-        </p:nvSpPr>
-        <p:spPr>
-          <a:xfrm>
-            <a:off x="10274808" y="3977640"/>
-            <a:ext cx="972312" cy="749808"/>
-          </a:xfrm>
-          <a:prstGeom prst="roundRect">
-            <a:avLst>
-              <a:gd name="adj" fmla="val 14634"/>
-            </a:avLst>
-          </a:prstGeom>
-          <a:solidFill>
-            <a:srgbClr val="D69A2D"/>
-          </a:solidFill>
-          <a:ln w="12700">
-            <a:solidFill>
-              <a:srgbClr val="D69A2D"/>
-            </a:solidFill>
-            <a:prstDash val="solid"/>
-          </a:ln>
-        </p:spPr>
-      </p:sp>
-      <p:sp>
-        <p:nvSpPr>
-          <p:cNvPr id="18" name="Text 16"/>
-          <p:cNvSpPr/>
-          <p:nvPr/>
-        </p:nvSpPr>
-        <p:spPr>
-          <a:xfrm>
-            <a:off x="10347960" y="4169664"/>
-            <a:ext cx="826008" cy="310896"/>
-          </a:xfrm>
-          <a:prstGeom prst="rect">
-            <a:avLst/>
-          </a:prstGeom>
-          <a:noFill/>
-          <a:ln/>
-        </p:spPr>
-        <p:txBody>
-          <a:bodyPr wrap="square" lIns="0" tIns="0" rIns="0" bIns="0" rtlCol="0" anchor="ctr">
-            <a:normAutofit/>
-          </a:bodyPr>
-          <a:lstStyle/>
-          <a:p>
-            <a:pPr algn="ctr" indent="0" marL="0">
-              <a:buNone/>
-            </a:pPr>
-            <a:r>
-              <a:rPr lang="en-US" sz="1500" b="1" dirty="0">
-                <a:solidFill>
-                  <a:srgbClr val="FFFFFF"/>
-                </a:solidFill>
-                <a:latin typeface="Aptos" pitchFamily="34" charset="0"/>
-                <a:ea typeface="Aptos" pitchFamily="34" charset="-122"/>
-                <a:cs typeface="Aptos" pitchFamily="34" charset="-120"/>
-              </a:rPr>
-              <a:t>Artifact</a:t>
-            </a:r>
-            <a:endParaRPr lang="en-US" sz="1500" dirty="0"/>
+            <a:r>
+              <a:rPr lang="en-US" sz="1380" dirty="0">
+                <a:solidFill>
+                  <a:srgbClr val="17364A"/>
+                </a:solidFill>
+                <a:latin typeface="Aptos" pitchFamily="34" charset="0"/>
+                <a:ea typeface="Aptos" pitchFamily="34" charset="-122"/>
+                <a:cs typeface="Aptos" pitchFamily="34" charset="-120"/>
+              </a:rPr>
+              <a:t>Use a tool when no comparable local process exists.</a:t>
+            </a:r>
+            <a:endParaRPr lang="en-US" sz="1380" dirty="0"/>
+          </a:p>
+          <a:p>
+            <a:r>
+              <a:rPr lang="en-US" sz="1380" dirty="0">
+                <a:solidFill>
+                  <a:srgbClr val="17364A"/>
+                </a:solidFill>
+                <a:latin typeface="Aptos" pitchFamily="34" charset="0"/>
+                <a:ea typeface="Aptos" pitchFamily="34" charset="-122"/>
+                <a:cs typeface="Aptos" pitchFamily="34" charset="-120"/>
+              </a:rPr>
+              <a:t>Adapt existing department templates when they already fit the purpose.</a:t>
+            </a:r>
+            <a:endParaRPr lang="en-US" sz="1380" dirty="0"/>
+          </a:p>
+          <a:p>
+            <a:r>
+              <a:rPr lang="en-US" sz="1380" dirty="0">
+                <a:solidFill>
+                  <a:srgbClr val="17364A"/>
+                </a:solidFill>
+                <a:latin typeface="Aptos" pitchFamily="34" charset="0"/>
+                <a:ea typeface="Aptos" pitchFamily="34" charset="-122"/>
+                <a:cs typeface="Aptos" pitchFamily="34" charset="-120"/>
+              </a:rPr>
+              <a:t>Save the completed artifact as evidence of the decision.</a:t>
+            </a:r>
+            <a:endParaRPr lang="en-US" sz="1380" dirty="0"/>
           </a:p>
         </p:txBody>
       </p:sp>
@@ -14791,13 +14210,11 @@
             </a:avLst>
           </a:prstGeom>
           <a:solidFill>
-            <a:srgbClr val="FFFFFF">
-              <a:alpha val="88000"/>
-            </a:srgbClr>
+            <a:srgbClr val="FFFFFF"/>
           </a:solidFill>
           <a:ln w="12700">
             <a:solidFill>
-              <a:srgbClr val="D6E8F2"/>
+              <a:srgbClr val="B9D7E6"/>
             </a:solidFill>
             <a:prstDash val="solid"/>
           </a:ln>
@@ -14805,119 +14222,112 @@
       </p:sp>
       <p:sp>
         <p:nvSpPr>
-          <p:cNvPr id="14" name="Shape 12"/>
-          <p:cNvSpPr/>
-          <p:nvPr/>
-        </p:nvSpPr>
-        <p:spPr>
-          <a:xfrm>
-            <a:off x="8074152" y="3291840"/>
-            <a:ext cx="2596896" cy="749808"/>
-          </a:xfrm>
-          <a:prstGeom prst="rect">
-            <a:avLst/>
-          </a:prstGeom>
-          <a:solidFill>
-            <a:srgbClr val="EAF6F8"/>
-          </a:solidFill>
-          <a:ln w="12700">
-            <a:solidFill>
-              <a:srgbClr val="8ABBD8"/>
-            </a:solidFill>
-            <a:prstDash val="solid"/>
-          </a:ln>
-        </p:spPr>
-      </p:sp>
-      <p:sp>
-        <p:nvSpPr>
-          <p:cNvPr id="15" name="Shape 13"/>
-          <p:cNvSpPr/>
-          <p:nvPr/>
-        </p:nvSpPr>
-        <p:spPr>
-          <a:xfrm>
-            <a:off x="8202168" y="3721608"/>
-            <a:ext cx="2340864" cy="0"/>
-          </a:xfrm>
-          <a:prstGeom prst="line">
-            <a:avLst/>
-          </a:prstGeom>
-          <a:noFill/>
-          <a:ln w="19050">
-            <a:solidFill>
-              <a:srgbClr val="0068B7"/>
-            </a:solidFill>
-            <a:prstDash val="solid"/>
-          </a:ln>
-        </p:spPr>
+          <p:cNvPr id="14" name="Text 12"/>
+          <p:cNvSpPr/>
+          <p:nvPr/>
+        </p:nvSpPr>
+        <p:spPr>
+          <a:xfrm>
+            <a:off x="7799832" y="2935224"/>
+            <a:ext cx="3145536" cy="256032"/>
+          </a:xfrm>
+          <a:prstGeom prst="rect">
+            <a:avLst/>
+          </a:prstGeom>
+          <a:noFill/>
+          <a:ln/>
+        </p:spPr>
+        <p:txBody>
+          <a:bodyPr wrap="square" lIns="0" tIns="0" rIns="0" bIns="0" rtlCol="0" anchor="ctr"/>
+          <a:lstStyle/>
+          <a:p>
+            <a:pPr indent="0" marL="0">
+              <a:buNone/>
+            </a:pPr>
+            <a:r>
+              <a:rPr lang="en-US" sz="1300" b="1" dirty="0">
+                <a:solidFill>
+                  <a:srgbClr val="0068B7"/>
+                </a:solidFill>
+                <a:latin typeface="Aptos" pitchFamily="34" charset="0"/>
+                <a:ea typeface="Aptos" pitchFamily="34" charset="-122"/>
+                <a:cs typeface="Aptos" pitchFamily="34" charset="-120"/>
+              </a:rPr>
+              <a:t>Concept checkpoints</a:t>
+            </a:r>
+            <a:endParaRPr lang="en-US" sz="1300" dirty="0"/>
+          </a:p>
+        </p:txBody>
+      </p:sp>
+      <p:sp>
+        <p:nvSpPr>
+          <p:cNvPr id="15" name="Text 13"/>
+          <p:cNvSpPr/>
+          <p:nvPr/>
+        </p:nvSpPr>
+        <p:spPr>
+          <a:xfrm>
+            <a:off x="7818120" y="3300984"/>
+            <a:ext cx="3090672" cy="877824"/>
+          </a:xfrm>
+          <a:prstGeom prst="rect">
+            <a:avLst/>
+          </a:prstGeom>
+          <a:noFill/>
+          <a:ln/>
+        </p:spPr>
+        <p:txBody>
+          <a:bodyPr wrap="square" lIns="254" tIns="254" rIns="254" bIns="254" rtlCol="0" anchor="t">
+            <a:normAutofit/>
+          </a:bodyPr>
+          <a:lstStyle/>
+          <a:p>
+            <a:r>
+              <a:rPr lang="en-US" sz="1380" dirty="0">
+                <a:solidFill>
+                  <a:srgbClr val="17364A"/>
+                </a:solidFill>
+                <a:latin typeface="Aptos" pitchFamily="34" charset="0"/>
+                <a:ea typeface="Aptos" pitchFamily="34" charset="-122"/>
+                <a:cs typeface="Aptos" pitchFamily="34" charset="-120"/>
+              </a:rPr>
+              <a:t>Explain how geocoding, aggregation, spatial scale, and data quality affect AI-supported.</a:t>
+            </a:r>
+            <a:endParaRPr lang="en-US" sz="1380" dirty="0"/>
+          </a:p>
+          <a:p>
+            <a:r>
+              <a:rPr lang="en-US" sz="1380" dirty="0">
+                <a:solidFill>
+                  <a:srgbClr val="17364A"/>
+                </a:solidFill>
+                <a:latin typeface="Aptos" pitchFamily="34" charset="0"/>
+                <a:ea typeface="Aptos" pitchFamily="34" charset="-122"/>
+                <a:cs typeface="Aptos" pitchFamily="34" charset="-120"/>
+              </a:rPr>
+              <a:t>Recognize spatial bias, modifiable areal unit problems, and ecological interpretation risks.</a:t>
+            </a:r>
+            <a:endParaRPr lang="en-US" sz="1380" dirty="0"/>
+          </a:p>
+          <a:p>
+            <a:r>
+              <a:rPr lang="en-US" sz="1380" dirty="0">
+                <a:solidFill>
+                  <a:srgbClr val="17364A"/>
+                </a:solidFill>
+                <a:latin typeface="Aptos" pitchFamily="34" charset="0"/>
+                <a:ea typeface="Aptos" pitchFamily="34" charset="-122"/>
+                <a:cs typeface="Aptos" pitchFamily="34" charset="-120"/>
+              </a:rPr>
+              <a:t>Design guardrails for AI-supported spatial analysis, hotspot detection, service planning,.</a:t>
+            </a:r>
+            <a:endParaRPr lang="en-US" sz="1380" dirty="0"/>
+          </a:p>
+        </p:txBody>
       </p:sp>
       <p:sp>
         <p:nvSpPr>
           <p:cNvPr id="16" name="Shape 14"/>
-          <p:cNvSpPr/>
-          <p:nvPr/>
-        </p:nvSpPr>
-        <p:spPr>
-          <a:xfrm>
-            <a:off x="9198864" y="4206240"/>
-            <a:ext cx="347472" cy="347472"/>
-          </a:xfrm>
-          <a:prstGeom prst="ellipse">
-            <a:avLst/>
-          </a:prstGeom>
-          <a:solidFill>
-            <a:srgbClr val="2F8A28"/>
-          </a:solidFill>
-          <a:ln w="12700">
-            <a:solidFill>
-              <a:srgbClr val="2F8A28"/>
-            </a:solidFill>
-            <a:prstDash val="solid"/>
-          </a:ln>
-        </p:spPr>
-      </p:sp>
-      <p:sp>
-        <p:nvSpPr>
-          <p:cNvPr id="17" name="Text 15"/>
-          <p:cNvSpPr/>
-          <p:nvPr/>
-        </p:nvSpPr>
-        <p:spPr>
-          <a:xfrm>
-            <a:off x="7909560" y="3977640"/>
-            <a:ext cx="2926080" cy="182880"/>
-          </a:xfrm>
-          <a:prstGeom prst="rect">
-            <a:avLst/>
-          </a:prstGeom>
-          <a:noFill/>
-          <a:ln/>
-        </p:spPr>
-        <p:txBody>
-          <a:bodyPr wrap="square" lIns="0" tIns="0" rIns="0" bIns="0" rtlCol="0" anchor="ctr"/>
-          <a:lstStyle/>
-          <a:p>
-            <a:pPr algn="ctr" indent="0" marL="0">
-              <a:buNone/>
-            </a:pPr>
-            <a:r>
-              <a:rPr lang="en-US" sz="1000" dirty="0">
-                <a:solidFill>
-                  <a:srgbClr val="003A63"/>
-                </a:solidFill>
-                <a:latin typeface="Aptos" pitchFamily="34" charset="0"/>
-                <a:ea typeface="Aptos" pitchFamily="34" charset="-122"/>
-                <a:cs typeface="Aptos" pitchFamily="34" charset="-120"/>
-              </a:rPr>
-              <a:t>Concept to action</a:t>
-            </a:r>
-            <a:endParaRPr lang="en-US" sz="1000" dirty="0"/>
-          </a:p>
-        </p:txBody>
-      </p:sp>
-      <p:sp>
-        <p:nvSpPr>
-          <p:cNvPr id="18" name="Shape 16"/>
           <p:cNvSpPr/>
           <p:nvPr/>
         </p:nvSpPr>
@@ -14944,7 +14354,7 @@
       </p:sp>
       <p:sp>
         <p:nvSpPr>
-          <p:cNvPr id="19" name="Text 17"/>
+          <p:cNvPr id="17" name="Text 15"/>
           <p:cNvSpPr/>
           <p:nvPr/>
         </p:nvSpPr>
@@ -14983,7 +14393,7 @@
       </p:sp>
       <p:sp>
         <p:nvSpPr>
-          <p:cNvPr id="20" name="Text 18"/>
+          <p:cNvPr id="18" name="Text 16"/>
           <p:cNvSpPr/>
           <p:nvPr/>
         </p:nvSpPr>
@@ -15463,13 +14873,11 @@
             </a:avLst>
           </a:prstGeom>
           <a:solidFill>
-            <a:srgbClr val="FFFFFF">
-              <a:alpha val="88000"/>
-            </a:srgbClr>
+            <a:srgbClr val="FFFFFF"/>
           </a:solidFill>
           <a:ln w="12700">
             <a:solidFill>
-              <a:srgbClr val="D6E8F2"/>
+              <a:srgbClr val="B9D7E6"/>
             </a:solidFill>
             <a:prstDash val="solid"/>
           </a:ln>
@@ -15477,119 +14885,84 @@
       </p:sp>
       <p:sp>
         <p:nvSpPr>
-          <p:cNvPr id="14" name="Shape 12"/>
-          <p:cNvSpPr/>
-          <p:nvPr/>
-        </p:nvSpPr>
-        <p:spPr>
-          <a:xfrm>
-            <a:off x="8074152" y="3291840"/>
-            <a:ext cx="2596896" cy="749808"/>
-          </a:xfrm>
-          <a:prstGeom prst="rect">
-            <a:avLst/>
-          </a:prstGeom>
-          <a:solidFill>
-            <a:srgbClr val="EAF6F8"/>
-          </a:solidFill>
-          <a:ln w="12700">
-            <a:solidFill>
-              <a:srgbClr val="8ABBD8"/>
-            </a:solidFill>
-            <a:prstDash val="solid"/>
-          </a:ln>
-        </p:spPr>
-      </p:sp>
-      <p:sp>
-        <p:nvSpPr>
-          <p:cNvPr id="15" name="Shape 13"/>
-          <p:cNvSpPr/>
-          <p:nvPr/>
-        </p:nvSpPr>
-        <p:spPr>
-          <a:xfrm>
-            <a:off x="8202168" y="3721608"/>
-            <a:ext cx="2340864" cy="0"/>
-          </a:xfrm>
-          <a:prstGeom prst="line">
-            <a:avLst/>
-          </a:prstGeom>
-          <a:noFill/>
-          <a:ln w="19050">
-            <a:solidFill>
-              <a:srgbClr val="0068B7"/>
-            </a:solidFill>
-            <a:prstDash val="solid"/>
-          </a:ln>
-        </p:spPr>
+          <p:cNvPr id="14" name="Text 12"/>
+          <p:cNvSpPr/>
+          <p:nvPr/>
+        </p:nvSpPr>
+        <p:spPr>
+          <a:xfrm>
+            <a:off x="7799832" y="2935224"/>
+            <a:ext cx="3145536" cy="256032"/>
+          </a:xfrm>
+          <a:prstGeom prst="rect">
+            <a:avLst/>
+          </a:prstGeom>
+          <a:noFill/>
+          <a:ln/>
+        </p:spPr>
+        <p:txBody>
+          <a:bodyPr wrap="square" lIns="0" tIns="0" rIns="0" bIns="0" rtlCol="0" anchor="ctr"/>
+          <a:lstStyle/>
+          <a:p>
+            <a:pPr indent="0" marL="0">
+              <a:buNone/>
+            </a:pPr>
+            <a:r>
+              <a:rPr lang="en-US" sz="1300" b="1" dirty="0">
+                <a:solidFill>
+                  <a:srgbClr val="0068B7"/>
+                </a:solidFill>
+                <a:latin typeface="Aptos" pitchFamily="34" charset="0"/>
+                <a:ea typeface="Aptos" pitchFamily="34" charset="-122"/>
+                <a:cs typeface="Aptos" pitchFamily="34" charset="-120"/>
+              </a:rPr>
+              <a:t>Concept checkpoints</a:t>
+            </a:r>
+            <a:endParaRPr lang="en-US" sz="1300" dirty="0"/>
+          </a:p>
+        </p:txBody>
+      </p:sp>
+      <p:sp>
+        <p:nvSpPr>
+          <p:cNvPr id="15" name="Text 13"/>
+          <p:cNvSpPr/>
+          <p:nvPr/>
+        </p:nvSpPr>
+        <p:spPr>
+          <a:xfrm>
+            <a:off x="7818120" y="3300984"/>
+            <a:ext cx="3090672" cy="877824"/>
+          </a:xfrm>
+          <a:prstGeom prst="rect">
+            <a:avLst/>
+          </a:prstGeom>
+          <a:noFill/>
+          <a:ln/>
+        </p:spPr>
+        <p:txBody>
+          <a:bodyPr wrap="square" lIns="254" tIns="254" rIns="254" bIns="254" rtlCol="0" anchor="t">
+            <a:normAutofit/>
+          </a:bodyPr>
+          <a:lstStyle/>
+          <a:p>
+            <a:r>
+              <a:rPr lang="en-US" sz="1380" dirty="0">
+                <a:solidFill>
+                  <a:srgbClr val="17364A"/>
+                </a:solidFill>
+                <a:latin typeface="Aptos" pitchFamily="34" charset="0"/>
+                <a:ea typeface="Aptos" pitchFamily="34" charset="-122"/>
+                <a:cs typeface="Aptos" pitchFamily="34" charset="-120"/>
+              </a:rPr>
+              <a:t>Produce a geospatial AI readiness worksheet for a public health workflow.</a:t>
+            </a:r>
+            <a:endParaRPr lang="en-US" sz="1380" dirty="0"/>
+          </a:p>
+        </p:txBody>
       </p:sp>
       <p:sp>
         <p:nvSpPr>
           <p:cNvPr id="16" name="Shape 14"/>
-          <p:cNvSpPr/>
-          <p:nvPr/>
-        </p:nvSpPr>
-        <p:spPr>
-          <a:xfrm>
-            <a:off x="9198864" y="4206240"/>
-            <a:ext cx="347472" cy="347472"/>
-          </a:xfrm>
-          <a:prstGeom prst="ellipse">
-            <a:avLst/>
-          </a:prstGeom>
-          <a:solidFill>
-            <a:srgbClr val="2F8A28"/>
-          </a:solidFill>
-          <a:ln w="12700">
-            <a:solidFill>
-              <a:srgbClr val="2F8A28"/>
-            </a:solidFill>
-            <a:prstDash val="solid"/>
-          </a:ln>
-        </p:spPr>
-      </p:sp>
-      <p:sp>
-        <p:nvSpPr>
-          <p:cNvPr id="17" name="Text 15"/>
-          <p:cNvSpPr/>
-          <p:nvPr/>
-        </p:nvSpPr>
-        <p:spPr>
-          <a:xfrm>
-            <a:off x="7909560" y="3977640"/>
-            <a:ext cx="2926080" cy="182880"/>
-          </a:xfrm>
-          <a:prstGeom prst="rect">
-            <a:avLst/>
-          </a:prstGeom>
-          <a:noFill/>
-          <a:ln/>
-        </p:spPr>
-        <p:txBody>
-          <a:bodyPr wrap="square" lIns="0" tIns="0" rIns="0" bIns="0" rtlCol="0" anchor="ctr"/>
-          <a:lstStyle/>
-          <a:p>
-            <a:pPr algn="ctr" indent="0" marL="0">
-              <a:buNone/>
-            </a:pPr>
-            <a:r>
-              <a:rPr lang="en-US" sz="1000" dirty="0">
-                <a:solidFill>
-                  <a:srgbClr val="003A63"/>
-                </a:solidFill>
-                <a:latin typeface="Aptos" pitchFamily="34" charset="0"/>
-                <a:ea typeface="Aptos" pitchFamily="34" charset="-122"/>
-                <a:cs typeface="Aptos" pitchFamily="34" charset="-120"/>
-              </a:rPr>
-              <a:t>Concept to action</a:t>
-            </a:r>
-            <a:endParaRPr lang="en-US" sz="1000" dirty="0"/>
-          </a:p>
-        </p:txBody>
-      </p:sp>
-      <p:sp>
-        <p:nvSpPr>
-          <p:cNvPr id="18" name="Shape 16"/>
           <p:cNvSpPr/>
           <p:nvPr/>
         </p:nvSpPr>
@@ -15616,7 +14989,7 @@
       </p:sp>
       <p:sp>
         <p:nvSpPr>
-          <p:cNvPr id="19" name="Text 17"/>
+          <p:cNvPr id="17" name="Text 15"/>
           <p:cNvSpPr/>
           <p:nvPr/>
         </p:nvSpPr>
@@ -15655,7 +15028,7 @@
       </p:sp>
       <p:sp>
         <p:nvSpPr>
-          <p:cNvPr id="20" name="Text 18"/>
+          <p:cNvPr id="18" name="Text 16"/>
           <p:cNvSpPr/>
           <p:nvPr/>
         </p:nvSpPr>
@@ -16163,13 +15536,11 @@
             </a:avLst>
           </a:prstGeom>
           <a:solidFill>
-            <a:srgbClr val="FFFFFF">
-              <a:alpha val="88000"/>
-            </a:srgbClr>
+            <a:srgbClr val="FFFFFF"/>
           </a:solidFill>
           <a:ln w="12700">
             <a:solidFill>
-              <a:srgbClr val="D6E8F2"/>
+              <a:srgbClr val="B9D7E6"/>
             </a:solidFill>
             <a:prstDash val="solid"/>
           </a:ln>
@@ -16177,119 +15548,112 @@
       </p:sp>
       <p:sp>
         <p:nvSpPr>
-          <p:cNvPr id="14" name="Shape 12"/>
-          <p:cNvSpPr/>
-          <p:nvPr/>
-        </p:nvSpPr>
-        <p:spPr>
-          <a:xfrm>
-            <a:off x="8074152" y="3291840"/>
-            <a:ext cx="2596896" cy="749808"/>
-          </a:xfrm>
-          <a:prstGeom prst="rect">
-            <a:avLst/>
-          </a:prstGeom>
-          <a:solidFill>
-            <a:srgbClr val="EAF6F8"/>
-          </a:solidFill>
-          <a:ln w="12700">
-            <a:solidFill>
-              <a:srgbClr val="8ABBD8"/>
-            </a:solidFill>
-            <a:prstDash val="solid"/>
-          </a:ln>
-        </p:spPr>
-      </p:sp>
-      <p:sp>
-        <p:nvSpPr>
-          <p:cNvPr id="15" name="Shape 13"/>
-          <p:cNvSpPr/>
-          <p:nvPr/>
-        </p:nvSpPr>
-        <p:spPr>
-          <a:xfrm>
-            <a:off x="8202168" y="3721608"/>
-            <a:ext cx="2340864" cy="0"/>
-          </a:xfrm>
-          <a:prstGeom prst="line">
-            <a:avLst/>
-          </a:prstGeom>
-          <a:noFill/>
-          <a:ln w="19050">
-            <a:solidFill>
-              <a:srgbClr val="0068B7"/>
-            </a:solidFill>
-            <a:prstDash val="solid"/>
-          </a:ln>
-        </p:spPr>
+          <p:cNvPr id="14" name="Text 12"/>
+          <p:cNvSpPr/>
+          <p:nvPr/>
+        </p:nvSpPr>
+        <p:spPr>
+          <a:xfrm>
+            <a:off x="7799832" y="2935224"/>
+            <a:ext cx="3145536" cy="256032"/>
+          </a:xfrm>
+          <a:prstGeom prst="rect">
+            <a:avLst/>
+          </a:prstGeom>
+          <a:noFill/>
+          <a:ln/>
+        </p:spPr>
+        <p:txBody>
+          <a:bodyPr wrap="square" lIns="0" tIns="0" rIns="0" bIns="0" rtlCol="0" anchor="ctr"/>
+          <a:lstStyle/>
+          <a:p>
+            <a:pPr indent="0" marL="0">
+              <a:buNone/>
+            </a:pPr>
+            <a:r>
+              <a:rPr lang="en-US" sz="1300" b="1" dirty="0">
+                <a:solidFill>
+                  <a:srgbClr val="0068B7"/>
+                </a:solidFill>
+                <a:latin typeface="Aptos" pitchFamily="34" charset="0"/>
+                <a:ea typeface="Aptos" pitchFamily="34" charset="-122"/>
+                <a:cs typeface="Aptos" pitchFamily="34" charset="-120"/>
+              </a:rPr>
+              <a:t>Concept checkpoints</a:t>
+            </a:r>
+            <a:endParaRPr lang="en-US" sz="1300" dirty="0"/>
+          </a:p>
+        </p:txBody>
+      </p:sp>
+      <p:sp>
+        <p:nvSpPr>
+          <p:cNvPr id="15" name="Text 13"/>
+          <p:cNvSpPr/>
+          <p:nvPr/>
+        </p:nvSpPr>
+        <p:spPr>
+          <a:xfrm>
+            <a:off x="7818120" y="3300984"/>
+            <a:ext cx="3090672" cy="877824"/>
+          </a:xfrm>
+          <a:prstGeom prst="rect">
+            <a:avLst/>
+          </a:prstGeom>
+          <a:noFill/>
+          <a:ln/>
+        </p:spPr>
+        <p:txBody>
+          <a:bodyPr wrap="square" lIns="254" tIns="254" rIns="254" bIns="254" rtlCol="0" anchor="t">
+            <a:normAutofit/>
+          </a:bodyPr>
+          <a:lstStyle/>
+          <a:p>
+            <a:r>
+              <a:rPr lang="en-US" sz="1380" dirty="0">
+                <a:solidFill>
+                  <a:srgbClr val="17364A"/>
+                </a:solidFill>
+                <a:latin typeface="Aptos" pitchFamily="34" charset="0"/>
+                <a:ea typeface="Aptos" pitchFamily="34" charset="-122"/>
+                <a:cs typeface="Aptos" pitchFamily="34" charset="-120"/>
+              </a:rPr>
+              <a:t>Geospatial AI combines spatial data, geographic analysis, and AI methods to identify.</a:t>
+            </a:r>
+            <a:endParaRPr lang="en-US" sz="1380" dirty="0"/>
+          </a:p>
+          <a:p>
+            <a:r>
+              <a:rPr lang="en-US" sz="1380" dirty="0">
+                <a:solidFill>
+                  <a:srgbClr val="17364A"/>
+                </a:solidFill>
+                <a:latin typeface="Aptos" pitchFamily="34" charset="0"/>
+                <a:ea typeface="Aptos" pitchFamily="34" charset="-122"/>
+                <a:cs typeface="Aptos" pitchFamily="34" charset="-120"/>
+              </a:rPr>
+              <a:t>In public health, spatial analysis is already central to outbreak response, environmental.</a:t>
+            </a:r>
+            <a:endParaRPr lang="en-US" sz="1380" dirty="0"/>
+          </a:p>
+          <a:p>
+            <a:r>
+              <a:rPr lang="en-US" sz="1380" dirty="0">
+                <a:solidFill>
+                  <a:srgbClr val="17364A"/>
+                </a:solidFill>
+                <a:latin typeface="Aptos" pitchFamily="34" charset="0"/>
+                <a:ea typeface="Aptos" pitchFamily="34" charset="-122"/>
+                <a:cs typeface="Aptos" pitchFamily="34" charset="-120"/>
+              </a:rPr>
+              <a:t>AI can strengthen these activities when it helps detect clusters, estimate access.</a:t>
+            </a:r>
+            <a:endParaRPr lang="en-US" sz="1380" dirty="0"/>
+          </a:p>
+        </p:txBody>
       </p:sp>
       <p:sp>
         <p:nvSpPr>
           <p:cNvPr id="16" name="Shape 14"/>
-          <p:cNvSpPr/>
-          <p:nvPr/>
-        </p:nvSpPr>
-        <p:spPr>
-          <a:xfrm>
-            <a:off x="9198864" y="4206240"/>
-            <a:ext cx="347472" cy="347472"/>
-          </a:xfrm>
-          <a:prstGeom prst="ellipse">
-            <a:avLst/>
-          </a:prstGeom>
-          <a:solidFill>
-            <a:srgbClr val="2F8A28"/>
-          </a:solidFill>
-          <a:ln w="12700">
-            <a:solidFill>
-              <a:srgbClr val="2F8A28"/>
-            </a:solidFill>
-            <a:prstDash val="solid"/>
-          </a:ln>
-        </p:spPr>
-      </p:sp>
-      <p:sp>
-        <p:nvSpPr>
-          <p:cNvPr id="17" name="Text 15"/>
-          <p:cNvSpPr/>
-          <p:nvPr/>
-        </p:nvSpPr>
-        <p:spPr>
-          <a:xfrm>
-            <a:off x="7909560" y="3977640"/>
-            <a:ext cx="2926080" cy="182880"/>
-          </a:xfrm>
-          <a:prstGeom prst="rect">
-            <a:avLst/>
-          </a:prstGeom>
-          <a:noFill/>
-          <a:ln/>
-        </p:spPr>
-        <p:txBody>
-          <a:bodyPr wrap="square" lIns="0" tIns="0" rIns="0" bIns="0" rtlCol="0" anchor="ctr"/>
-          <a:lstStyle/>
-          <a:p>
-            <a:pPr algn="ctr" indent="0" marL="0">
-              <a:buNone/>
-            </a:pPr>
-            <a:r>
-              <a:rPr lang="en-US" sz="1000" dirty="0">
-                <a:solidFill>
-                  <a:srgbClr val="003A63"/>
-                </a:solidFill>
-                <a:latin typeface="Aptos" pitchFamily="34" charset="0"/>
-                <a:ea typeface="Aptos" pitchFamily="34" charset="-122"/>
-                <a:cs typeface="Aptos" pitchFamily="34" charset="-120"/>
-              </a:rPr>
-              <a:t>Concept to action</a:t>
-            </a:r>
-            <a:endParaRPr lang="en-US" sz="1000" dirty="0"/>
-          </a:p>
-        </p:txBody>
-      </p:sp>
-      <p:sp>
-        <p:nvSpPr>
-          <p:cNvPr id="18" name="Shape 16"/>
           <p:cNvSpPr/>
           <p:nvPr/>
         </p:nvSpPr>
@@ -16316,7 +15680,7 @@
       </p:sp>
       <p:sp>
         <p:nvSpPr>
-          <p:cNvPr id="19" name="Text 17"/>
+          <p:cNvPr id="17" name="Text 15"/>
           <p:cNvSpPr/>
           <p:nvPr/>
         </p:nvSpPr>
@@ -16355,7 +15719,7 @@
       </p:sp>
       <p:sp>
         <p:nvSpPr>
-          <p:cNvPr id="20" name="Text 18"/>
+          <p:cNvPr id="18" name="Text 16"/>
           <p:cNvSpPr/>
           <p:nvPr/>
         </p:nvSpPr>
@@ -16863,13 +16227,11 @@
             </a:avLst>
           </a:prstGeom>
           <a:solidFill>
-            <a:srgbClr val="FFFFFF">
-              <a:alpha val="88000"/>
-            </a:srgbClr>
+            <a:srgbClr val="FFFFFF"/>
           </a:solidFill>
           <a:ln w="12700">
             <a:solidFill>
-              <a:srgbClr val="D6E8F2"/>
+              <a:srgbClr val="B9D7E6"/>
             </a:solidFill>
             <a:prstDash val="solid"/>
           </a:ln>
@@ -16877,119 +16239,112 @@
       </p:sp>
       <p:sp>
         <p:nvSpPr>
-          <p:cNvPr id="14" name="Shape 12"/>
-          <p:cNvSpPr/>
-          <p:nvPr/>
-        </p:nvSpPr>
-        <p:spPr>
-          <a:xfrm>
-            <a:off x="8074152" y="3291840"/>
-            <a:ext cx="2596896" cy="749808"/>
-          </a:xfrm>
-          <a:prstGeom prst="rect">
-            <a:avLst/>
-          </a:prstGeom>
-          <a:solidFill>
-            <a:srgbClr val="EAF6F8"/>
-          </a:solidFill>
-          <a:ln w="12700">
-            <a:solidFill>
-              <a:srgbClr val="8ABBD8"/>
-            </a:solidFill>
-            <a:prstDash val="solid"/>
-          </a:ln>
-        </p:spPr>
-      </p:sp>
-      <p:sp>
-        <p:nvSpPr>
-          <p:cNvPr id="15" name="Shape 13"/>
-          <p:cNvSpPr/>
-          <p:nvPr/>
-        </p:nvSpPr>
-        <p:spPr>
-          <a:xfrm>
-            <a:off x="8202168" y="3721608"/>
-            <a:ext cx="2340864" cy="0"/>
-          </a:xfrm>
-          <a:prstGeom prst="line">
-            <a:avLst/>
-          </a:prstGeom>
-          <a:noFill/>
-          <a:ln w="19050">
-            <a:solidFill>
-              <a:srgbClr val="0068B7"/>
-            </a:solidFill>
-            <a:prstDash val="solid"/>
-          </a:ln>
-        </p:spPr>
+          <p:cNvPr id="14" name="Text 12"/>
+          <p:cNvSpPr/>
+          <p:nvPr/>
+        </p:nvSpPr>
+        <p:spPr>
+          <a:xfrm>
+            <a:off x="7799832" y="2935224"/>
+            <a:ext cx="3145536" cy="256032"/>
+          </a:xfrm>
+          <a:prstGeom prst="rect">
+            <a:avLst/>
+          </a:prstGeom>
+          <a:noFill/>
+          <a:ln/>
+        </p:spPr>
+        <p:txBody>
+          <a:bodyPr wrap="square" lIns="0" tIns="0" rIns="0" bIns="0" rtlCol="0" anchor="ctr"/>
+          <a:lstStyle/>
+          <a:p>
+            <a:pPr indent="0" marL="0">
+              <a:buNone/>
+            </a:pPr>
+            <a:r>
+              <a:rPr lang="en-US" sz="1300" b="1" dirty="0">
+                <a:solidFill>
+                  <a:srgbClr val="0068B7"/>
+                </a:solidFill>
+                <a:latin typeface="Aptos" pitchFamily="34" charset="0"/>
+                <a:ea typeface="Aptos" pitchFamily="34" charset="-122"/>
+                <a:cs typeface="Aptos" pitchFamily="34" charset="-120"/>
+              </a:rPr>
+              <a:t>Concept checkpoints</a:t>
+            </a:r>
+            <a:endParaRPr lang="en-US" sz="1300" dirty="0"/>
+          </a:p>
+        </p:txBody>
+      </p:sp>
+      <p:sp>
+        <p:nvSpPr>
+          <p:cNvPr id="15" name="Text 13"/>
+          <p:cNvSpPr/>
+          <p:nvPr/>
+        </p:nvSpPr>
+        <p:spPr>
+          <a:xfrm>
+            <a:off x="7818120" y="3300984"/>
+            <a:ext cx="3090672" cy="877824"/>
+          </a:xfrm>
+          <a:prstGeom prst="rect">
+            <a:avLst/>
+          </a:prstGeom>
+          <a:noFill/>
+          <a:ln/>
+        </p:spPr>
+        <p:txBody>
+          <a:bodyPr wrap="square" lIns="254" tIns="254" rIns="254" bIns="254" rtlCol="0" anchor="t">
+            <a:normAutofit/>
+          </a:bodyPr>
+          <a:lstStyle/>
+          <a:p>
+            <a:r>
+              <a:rPr lang="en-US" sz="1380" dirty="0">
+                <a:solidFill>
+                  <a:srgbClr val="17364A"/>
+                </a:solidFill>
+                <a:latin typeface="Aptos" pitchFamily="34" charset="0"/>
+                <a:ea typeface="Aptos" pitchFamily="34" charset="-122"/>
+                <a:cs typeface="Aptos" pitchFamily="34" charset="-120"/>
+              </a:rPr>
+              <a:t>Agencies decide where to conduct outreach, deploy mobile services, inspect facilities,.</a:t>
+            </a:r>
+            <a:endParaRPr lang="en-US" sz="1380" dirty="0"/>
+          </a:p>
+          <a:p>
+            <a:r>
+              <a:rPr lang="en-US" sz="1380" dirty="0">
+                <a:solidFill>
+                  <a:srgbClr val="17364A"/>
+                </a:solidFill>
+                <a:latin typeface="Aptos" pitchFamily="34" charset="0"/>
+                <a:ea typeface="Aptos" pitchFamily="34" charset="-122"/>
+                <a:cs typeface="Aptos" pitchFamily="34" charset="-120"/>
+              </a:rPr>
+              <a:t>AI-supported spatial tools can help analyze large volumes of geographic information and.</a:t>
+            </a:r>
+            <a:endParaRPr lang="en-US" sz="1380" dirty="0"/>
+          </a:p>
+          <a:p>
+            <a:r>
+              <a:rPr lang="en-US" sz="1380" dirty="0">
+                <a:solidFill>
+                  <a:srgbClr val="17364A"/>
+                </a:solidFill>
+                <a:latin typeface="Aptos" pitchFamily="34" charset="0"/>
+                <a:ea typeface="Aptos" pitchFamily="34" charset="-122"/>
+                <a:cs typeface="Aptos" pitchFamily="34" charset="-120"/>
+              </a:rPr>
+              <a:t>However, maps can create a false sense of objectivity.</a:t>
+            </a:r>
+            <a:endParaRPr lang="en-US" sz="1380" dirty="0"/>
+          </a:p>
+        </p:txBody>
       </p:sp>
       <p:sp>
         <p:nvSpPr>
           <p:cNvPr id="16" name="Shape 14"/>
-          <p:cNvSpPr/>
-          <p:nvPr/>
-        </p:nvSpPr>
-        <p:spPr>
-          <a:xfrm>
-            <a:off x="9198864" y="4206240"/>
-            <a:ext cx="347472" cy="347472"/>
-          </a:xfrm>
-          <a:prstGeom prst="ellipse">
-            <a:avLst/>
-          </a:prstGeom>
-          <a:solidFill>
-            <a:srgbClr val="2F8A28"/>
-          </a:solidFill>
-          <a:ln w="12700">
-            <a:solidFill>
-              <a:srgbClr val="2F8A28"/>
-            </a:solidFill>
-            <a:prstDash val="solid"/>
-          </a:ln>
-        </p:spPr>
-      </p:sp>
-      <p:sp>
-        <p:nvSpPr>
-          <p:cNvPr id="17" name="Text 15"/>
-          <p:cNvSpPr/>
-          <p:nvPr/>
-        </p:nvSpPr>
-        <p:spPr>
-          <a:xfrm>
-            <a:off x="7909560" y="3977640"/>
-            <a:ext cx="2926080" cy="182880"/>
-          </a:xfrm>
-          <a:prstGeom prst="rect">
-            <a:avLst/>
-          </a:prstGeom>
-          <a:noFill/>
-          <a:ln/>
-        </p:spPr>
-        <p:txBody>
-          <a:bodyPr wrap="square" lIns="0" tIns="0" rIns="0" bIns="0" rtlCol="0" anchor="ctr"/>
-          <a:lstStyle/>
-          <a:p>
-            <a:pPr algn="ctr" indent="0" marL="0">
-              <a:buNone/>
-            </a:pPr>
-            <a:r>
-              <a:rPr lang="en-US" sz="1000" dirty="0">
-                <a:solidFill>
-                  <a:srgbClr val="003A63"/>
-                </a:solidFill>
-                <a:latin typeface="Aptos" pitchFamily="34" charset="0"/>
-                <a:ea typeface="Aptos" pitchFamily="34" charset="-122"/>
-                <a:cs typeface="Aptos" pitchFamily="34" charset="-120"/>
-              </a:rPr>
-              <a:t>Concept to action</a:t>
-            </a:r>
-            <a:endParaRPr lang="en-US" sz="1000" dirty="0"/>
-          </a:p>
-        </p:txBody>
-      </p:sp>
-      <p:sp>
-        <p:nvSpPr>
-          <p:cNvPr id="18" name="Shape 16"/>
           <p:cNvSpPr/>
           <p:nvPr/>
         </p:nvSpPr>
@@ -17016,7 +16371,7 @@
       </p:sp>
       <p:sp>
         <p:nvSpPr>
-          <p:cNvPr id="19" name="Text 17"/>
+          <p:cNvPr id="17" name="Text 15"/>
           <p:cNvSpPr/>
           <p:nvPr/>
         </p:nvSpPr>
@@ -17055,7 +16410,7 @@
       </p:sp>
       <p:sp>
         <p:nvSpPr>
-          <p:cNvPr id="20" name="Text 18"/>
+          <p:cNvPr id="18" name="Text 16"/>
           <p:cNvSpPr/>
           <p:nvPr/>
         </p:nvSpPr>
@@ -17563,13 +16918,11 @@
             </a:avLst>
           </a:prstGeom>
           <a:solidFill>
-            <a:srgbClr val="FFFFFF">
-              <a:alpha val="88000"/>
-            </a:srgbClr>
+            <a:srgbClr val="FFFFFF"/>
           </a:solidFill>
           <a:ln w="12700">
             <a:solidFill>
-              <a:srgbClr val="D6E8F2"/>
+              <a:srgbClr val="B9D7E6"/>
             </a:solidFill>
             <a:prstDash val="solid"/>
           </a:ln>
@@ -17577,119 +16930,112 @@
       </p:sp>
       <p:sp>
         <p:nvSpPr>
-          <p:cNvPr id="14" name="Shape 12"/>
-          <p:cNvSpPr/>
-          <p:nvPr/>
-        </p:nvSpPr>
-        <p:spPr>
-          <a:xfrm>
-            <a:off x="8074152" y="3291840"/>
-            <a:ext cx="2596896" cy="749808"/>
-          </a:xfrm>
-          <a:prstGeom prst="rect">
-            <a:avLst/>
-          </a:prstGeom>
-          <a:solidFill>
-            <a:srgbClr val="EAF6F8"/>
-          </a:solidFill>
-          <a:ln w="12700">
-            <a:solidFill>
-              <a:srgbClr val="8ABBD8"/>
-            </a:solidFill>
-            <a:prstDash val="solid"/>
-          </a:ln>
-        </p:spPr>
-      </p:sp>
-      <p:sp>
-        <p:nvSpPr>
-          <p:cNvPr id="15" name="Shape 13"/>
-          <p:cNvSpPr/>
-          <p:nvPr/>
-        </p:nvSpPr>
-        <p:spPr>
-          <a:xfrm>
-            <a:off x="8202168" y="3721608"/>
-            <a:ext cx="2340864" cy="0"/>
-          </a:xfrm>
-          <a:prstGeom prst="line">
-            <a:avLst/>
-          </a:prstGeom>
-          <a:noFill/>
-          <a:ln w="19050">
-            <a:solidFill>
-              <a:srgbClr val="0068B7"/>
-            </a:solidFill>
-            <a:prstDash val="solid"/>
-          </a:ln>
-        </p:spPr>
+          <p:cNvPr id="14" name="Text 12"/>
+          <p:cNvSpPr/>
+          <p:nvPr/>
+        </p:nvSpPr>
+        <p:spPr>
+          <a:xfrm>
+            <a:off x="7799832" y="2935224"/>
+            <a:ext cx="3145536" cy="256032"/>
+          </a:xfrm>
+          <a:prstGeom prst="rect">
+            <a:avLst/>
+          </a:prstGeom>
+          <a:noFill/>
+          <a:ln/>
+        </p:spPr>
+        <p:txBody>
+          <a:bodyPr wrap="square" lIns="0" tIns="0" rIns="0" bIns="0" rtlCol="0" anchor="ctr"/>
+          <a:lstStyle/>
+          <a:p>
+            <a:pPr indent="0" marL="0">
+              <a:buNone/>
+            </a:pPr>
+            <a:r>
+              <a:rPr lang="en-US" sz="1300" b="1" dirty="0">
+                <a:solidFill>
+                  <a:srgbClr val="0068B7"/>
+                </a:solidFill>
+                <a:latin typeface="Aptos" pitchFamily="34" charset="0"/>
+                <a:ea typeface="Aptos" pitchFamily="34" charset="-122"/>
+                <a:cs typeface="Aptos" pitchFamily="34" charset="-120"/>
+              </a:rPr>
+              <a:t>Concept checkpoints</a:t>
+            </a:r>
+            <a:endParaRPr lang="en-US" sz="1300" dirty="0"/>
+          </a:p>
+        </p:txBody>
+      </p:sp>
+      <p:sp>
+        <p:nvSpPr>
+          <p:cNvPr id="15" name="Text 13"/>
+          <p:cNvSpPr/>
+          <p:nvPr/>
+        </p:nvSpPr>
+        <p:spPr>
+          <a:xfrm>
+            <a:off x="7818120" y="3300984"/>
+            <a:ext cx="3090672" cy="877824"/>
+          </a:xfrm>
+          <a:prstGeom prst="rect">
+            <a:avLst/>
+          </a:prstGeom>
+          <a:noFill/>
+          <a:ln/>
+        </p:spPr>
+        <p:txBody>
+          <a:bodyPr wrap="square" lIns="254" tIns="254" rIns="254" bIns="254" rtlCol="0" anchor="t">
+            <a:normAutofit/>
+          </a:bodyPr>
+          <a:lstStyle/>
+          <a:p>
+            <a:r>
+              <a:rPr lang="en-US" sz="1380" dirty="0">
+                <a:solidFill>
+                  <a:srgbClr val="17364A"/>
+                </a:solidFill>
+                <a:latin typeface="Aptos" pitchFamily="34" charset="0"/>
+                <a:ea typeface="Aptos" pitchFamily="34" charset="-122"/>
+                <a:cs typeface="Aptos" pitchFamily="34" charset="-120"/>
+              </a:rPr>
+              <a:t>A health department may use AI-supported geospatial analysis to identify areas where.</a:t>
+            </a:r>
+            <a:endParaRPr lang="en-US" sz="1380" dirty="0"/>
+          </a:p>
+          <a:p>
+            <a:r>
+              <a:rPr lang="en-US" sz="1380" dirty="0">
+                <a:solidFill>
+                  <a:srgbClr val="17364A"/>
+                </a:solidFill>
+                <a:latin typeface="Aptos" pitchFamily="34" charset="0"/>
+                <a:ea typeface="Aptos" pitchFamily="34" charset="-122"/>
+                <a:cs typeface="Aptos" pitchFamily="34" charset="-120"/>
+              </a:rPr>
+              <a:t>The tool may combine immunization coverage, school locations, transportation routes,.</a:t>
+            </a:r>
+            <a:endParaRPr lang="en-US" sz="1380" dirty="0"/>
+          </a:p>
+          <a:p>
+            <a:r>
+              <a:rPr lang="en-US" sz="1380" dirty="0">
+                <a:solidFill>
+                  <a:srgbClr val="17364A"/>
+                </a:solidFill>
+                <a:latin typeface="Aptos" pitchFamily="34" charset="0"/>
+                <a:ea typeface="Aptos" pitchFamily="34" charset="-122"/>
+                <a:cs typeface="Aptos" pitchFamily="34" charset="-120"/>
+              </a:rPr>
+              <a:t>This workflow can advance equity if it identifies access barriers and supports community.</a:t>
+            </a:r>
+            <a:endParaRPr lang="en-US" sz="1380" dirty="0"/>
+          </a:p>
+        </p:txBody>
       </p:sp>
       <p:sp>
         <p:nvSpPr>
           <p:cNvPr id="16" name="Shape 14"/>
-          <p:cNvSpPr/>
-          <p:nvPr/>
-        </p:nvSpPr>
-        <p:spPr>
-          <a:xfrm>
-            <a:off x="9198864" y="4206240"/>
-            <a:ext cx="347472" cy="347472"/>
-          </a:xfrm>
-          <a:prstGeom prst="ellipse">
-            <a:avLst/>
-          </a:prstGeom>
-          <a:solidFill>
-            <a:srgbClr val="2F8A28"/>
-          </a:solidFill>
-          <a:ln w="12700">
-            <a:solidFill>
-              <a:srgbClr val="2F8A28"/>
-            </a:solidFill>
-            <a:prstDash val="solid"/>
-          </a:ln>
-        </p:spPr>
-      </p:sp>
-      <p:sp>
-        <p:nvSpPr>
-          <p:cNvPr id="17" name="Text 15"/>
-          <p:cNvSpPr/>
-          <p:nvPr/>
-        </p:nvSpPr>
-        <p:spPr>
-          <a:xfrm>
-            <a:off x="7909560" y="3977640"/>
-            <a:ext cx="2926080" cy="182880"/>
-          </a:xfrm>
-          <a:prstGeom prst="rect">
-            <a:avLst/>
-          </a:prstGeom>
-          <a:noFill/>
-          <a:ln/>
-        </p:spPr>
-        <p:txBody>
-          <a:bodyPr wrap="square" lIns="0" tIns="0" rIns="0" bIns="0" rtlCol="0" anchor="ctr"/>
-          <a:lstStyle/>
-          <a:p>
-            <a:pPr algn="ctr" indent="0" marL="0">
-              <a:buNone/>
-            </a:pPr>
-            <a:r>
-              <a:rPr lang="en-US" sz="1000" dirty="0">
-                <a:solidFill>
-                  <a:srgbClr val="003A63"/>
-                </a:solidFill>
-                <a:latin typeface="Aptos" pitchFamily="34" charset="0"/>
-                <a:ea typeface="Aptos" pitchFamily="34" charset="-122"/>
-                <a:cs typeface="Aptos" pitchFamily="34" charset="-120"/>
-              </a:rPr>
-              <a:t>Concept to action</a:t>
-            </a:r>
-            <a:endParaRPr lang="en-US" sz="1000" dirty="0"/>
-          </a:p>
-        </p:txBody>
-      </p:sp>
-      <p:sp>
-        <p:nvSpPr>
-          <p:cNvPr id="18" name="Shape 16"/>
           <p:cNvSpPr/>
           <p:nvPr/>
         </p:nvSpPr>
@@ -17716,7 +17062,7 @@
       </p:sp>
       <p:sp>
         <p:nvSpPr>
-          <p:cNvPr id="19" name="Text 17"/>
+          <p:cNvPr id="17" name="Text 15"/>
           <p:cNvSpPr/>
           <p:nvPr/>
         </p:nvSpPr>
@@ -17755,7 +17101,7 @@
       </p:sp>
       <p:sp>
         <p:nvSpPr>
-          <p:cNvPr id="20" name="Text 18"/>
+          <p:cNvPr id="18" name="Text 16"/>
           <p:cNvSpPr/>
           <p:nvPr/>
         </p:nvSpPr>

--- a/downloads/presentations/modules/anl-230.pptx
+++ b/downloads/presentations/modules/anl-230.pptx
@@ -3353,49 +3353,58 @@
           <a:ln/>
         </p:spPr>
         <p:txBody>
-          <a:bodyPr wrap="square" lIns="635" tIns="635" rIns="635" bIns="635" rtlCol="0" anchor="t">
+          <a:bodyPr wrap="square" lIns="1016" tIns="1016" rIns="1016" bIns="1016" rtlCol="0" anchor="t">
             <a:normAutofit/>
           </a:bodyPr>
           <a:lstStyle/>
           <a:p>
+            <a:pPr indent="0" marL="0">
+              <a:buNone/>
+            </a:pPr>
             <a:r>
               <a:rPr lang="en-US" sz="2100" dirty="0">
                 <a:solidFill>
-                  <a:srgbClr val="17364A"/>
-                </a:solidFill>
-                <a:latin typeface="Aptos" pitchFamily="34" charset="0"/>
-                <a:ea typeface="Aptos" pitchFamily="34" charset="-122"/>
-                <a:cs typeface="Aptos" pitchFamily="34" charset="-120"/>
-              </a:rPr>
-              <a:t>Geospatial AI begins with location data, and location data are rarely perfect.</a:t>
+                  <a:srgbClr val="003A63"/>
+                </a:solidFill>
+                <a:latin typeface="Aptos" pitchFamily="34" charset="0"/>
+                <a:ea typeface="Aptos" pitchFamily="34" charset="-122"/>
+                <a:cs typeface="Aptos" pitchFamily="34" charset="-120"/>
+              </a:rPr>
+              <a:t>• Geospatial AI begins with location data, and location data are rarely perfect.</a:t>
             </a:r>
             <a:endParaRPr lang="en-US" sz="2100" dirty="0"/>
           </a:p>
           <a:p>
+            <a:pPr indent="0" marL="0">
+              <a:buNone/>
+            </a:pPr>
             <a:r>
               <a:rPr lang="en-US" sz="2100" dirty="0">
                 <a:solidFill>
-                  <a:srgbClr val="17364A"/>
-                </a:solidFill>
-                <a:latin typeface="Aptos" pitchFamily="34" charset="0"/>
-                <a:ea typeface="Aptos" pitchFamily="34" charset="-122"/>
-                <a:cs typeface="Aptos" pitchFamily="34" charset="-120"/>
-              </a:rPr>
-              <a:t>Addresses may be missing, misspelled, outdated, rural route-based, temporary, or unstable.</a:t>
+                  <a:srgbClr val="003A63"/>
+                </a:solidFill>
+                <a:latin typeface="Aptos" pitchFamily="34" charset="0"/>
+                <a:ea typeface="Aptos" pitchFamily="34" charset="-122"/>
+                <a:cs typeface="Aptos" pitchFamily="34" charset="-120"/>
+              </a:rPr>
+              <a:t>• Addresses may be missing, misspelled, outdated, rural route-based, temporary, or unstable.</a:t>
             </a:r>
             <a:endParaRPr lang="en-US" sz="2100" dirty="0"/>
           </a:p>
           <a:p>
+            <a:pPr indent="0" marL="0">
+              <a:buNone/>
+            </a:pPr>
             <a:r>
               <a:rPr lang="en-US" sz="2100" dirty="0">
                 <a:solidFill>
-                  <a:srgbClr val="17364A"/>
-                </a:solidFill>
-                <a:latin typeface="Aptos" pitchFamily="34" charset="0"/>
-                <a:ea typeface="Aptos" pitchFamily="34" charset="-122"/>
-                <a:cs typeface="Aptos" pitchFamily="34" charset="-120"/>
-              </a:rPr>
-              <a:t>People experiencing homelessness, migration, displacement, incarceration, or housing instability may be.</a:t>
+                  <a:srgbClr val="003A63"/>
+                </a:solidFill>
+                <a:latin typeface="Aptos" pitchFamily="34" charset="0"/>
+                <a:ea typeface="Aptos" pitchFamily="34" charset="-122"/>
+                <a:cs typeface="Aptos" pitchFamily="34" charset="-120"/>
+              </a:rPr>
+              <a:t>• People experiencing homelessness, migration, displacement, incarceration, or housing.</a:t>
             </a:r>
             <a:endParaRPr lang="en-US" sz="2100" dirty="0"/>
           </a:p>
@@ -3475,17 +3484,17 @@
         </p:nvSpPr>
         <p:spPr>
           <a:xfrm>
-            <a:off x="7799832" y="1828800"/>
-            <a:ext cx="3145536" cy="685800"/>
-          </a:xfrm>
-          <a:prstGeom prst="rect">
-            <a:avLst/>
-          </a:prstGeom>
-          <a:noFill/>
-          <a:ln/>
-        </p:spPr>
-        <p:txBody>
-          <a:bodyPr wrap="square" lIns="0" tIns="0" rIns="0" bIns="0" rtlCol="0" anchor="t">
+            <a:off x="7799832" y="1801368"/>
+            <a:ext cx="3145536" cy="758952"/>
+          </a:xfrm>
+          <a:prstGeom prst="rect">
+            <a:avLst/>
+          </a:prstGeom>
+          <a:noFill/>
+          <a:ln/>
+        </p:spPr>
+        <p:txBody>
+          <a:bodyPr wrap="square" lIns="254" tIns="254" rIns="254" bIns="254" rtlCol="0" anchor="t">
             <a:normAutofit/>
           </a:bodyPr>
           <a:lstStyle/>
@@ -3494,7 +3503,7 @@
               <a:buNone/>
             </a:pPr>
             <a:r>
-              <a:rPr lang="en-US" sz="1550" dirty="0">
+              <a:rPr lang="en-US" sz="1320" dirty="0">
                 <a:solidFill>
                   <a:srgbClr val="17364A"/>
                 </a:solidFill>
@@ -3504,7 +3513,7 @@
               </a:rPr>
               <a:t>Geospatial AI begins with location data, and location data are rarely perfect.</a:t>
             </a:r>
-            <a:endParaRPr lang="en-US" sz="1550" dirty="0"/>
+            <a:endParaRPr lang="en-US" sz="1320" dirty="0"/>
           </a:p>
         </p:txBody>
       </p:sp>
@@ -3592,13 +3601,16 @@
           <a:ln/>
         </p:spPr>
         <p:txBody>
-          <a:bodyPr wrap="square" lIns="254" tIns="254" rIns="254" bIns="254" rtlCol="0" anchor="t">
+          <a:bodyPr wrap="square" lIns="508" tIns="508" rIns="508" bIns="508" rtlCol="0" anchor="t">
             <a:normAutofit/>
           </a:bodyPr>
           <a:lstStyle/>
           <a:p>
-            <a:r>
-              <a:rPr lang="en-US" sz="1380" dirty="0">
+            <a:pPr indent="0" marL="0">
+              <a:buNone/>
+            </a:pPr>
+            <a:r>
+              <a:rPr lang="en-US" sz="1220" dirty="0">
                 <a:solidFill>
                   <a:srgbClr val="17364A"/>
                 </a:solidFill>
@@ -3606,13 +3618,16 @@
                 <a:ea typeface="Aptos" pitchFamily="34" charset="-122"/>
                 <a:cs typeface="Aptos" pitchFamily="34" charset="-120"/>
               </a:rPr>
-              <a:t>People experiencing homelessness, migration, displacement, incarceration, or housing.</a:t>
-            </a:r>
-            <a:endParaRPr lang="en-US" sz="1380" dirty="0"/>
-          </a:p>
-          <a:p>
-            <a:r>
-              <a:rPr lang="en-US" sz="1380" dirty="0">
+              <a:t>People experiencing homelessness, migration, displacement,.</a:t>
+            </a:r>
+            <a:endParaRPr lang="en-US" sz="1220" dirty="0"/>
+          </a:p>
+          <a:p>
+            <a:pPr indent="0" marL="0">
+              <a:buNone/>
+            </a:pPr>
+            <a:r>
+              <a:rPr lang="en-US" sz="1220" dirty="0">
                 <a:solidFill>
                   <a:srgbClr val="17364A"/>
                 </a:solidFill>
@@ -3620,13 +3635,16 @@
                 <a:ea typeface="Aptos" pitchFamily="34" charset="-122"/>
                 <a:cs typeface="Aptos" pitchFamily="34" charset="-120"/>
               </a:rPr>
-              <a:t>Geocoding errors can shift records across boundaries and distort rates for small areas.</a:t>
-            </a:r>
-            <a:endParaRPr lang="en-US" sz="1380" dirty="0"/>
-          </a:p>
-          <a:p>
-            <a:r>
-              <a:rPr lang="en-US" sz="1380" dirty="0">
+              <a:t>Geocoding errors can shift records across boundaries and distort.</a:t>
+            </a:r>
+            <a:endParaRPr lang="en-US" sz="1220" dirty="0"/>
+          </a:p>
+          <a:p>
+            <a:pPr indent="0" marL="0">
+              <a:buNone/>
+            </a:pPr>
+            <a:r>
+              <a:rPr lang="en-US" sz="1220" dirty="0">
                 <a:solidFill>
                   <a:srgbClr val="17364A"/>
                 </a:solidFill>
@@ -3636,7 +3654,7 @@
               </a:rPr>
               <a:t>Spatial scale shapes interpretation.</a:t>
             </a:r>
-            <a:endParaRPr lang="en-US" sz="1380" dirty="0"/>
+            <a:endParaRPr lang="en-US" sz="1220" dirty="0"/>
           </a:p>
         </p:txBody>
       </p:sp>
@@ -3714,17 +3732,17 @@
         </p:nvSpPr>
         <p:spPr>
           <a:xfrm>
-            <a:off x="7799832" y="5001768"/>
-            <a:ext cx="3145536" cy="502920"/>
-          </a:xfrm>
-          <a:prstGeom prst="rect">
-            <a:avLst/>
-          </a:prstGeom>
-          <a:noFill/>
-          <a:ln/>
-        </p:spPr>
-        <p:txBody>
-          <a:bodyPr wrap="square" lIns="0" tIns="0" rIns="0" bIns="0" rtlCol="0" anchor="t">
+            <a:off x="7799832" y="4974336"/>
+            <a:ext cx="3145536" cy="576072"/>
+          </a:xfrm>
+          <a:prstGeom prst="rect">
+            <a:avLst/>
+          </a:prstGeom>
+          <a:noFill/>
+          <a:ln/>
+        </p:spPr>
+        <p:txBody>
+          <a:bodyPr wrap="square" lIns="254" tIns="254" rIns="254" bIns="254" rtlCol="0" anchor="t">
             <a:normAutofit/>
           </a:bodyPr>
           <a:lstStyle/>
@@ -3733,7 +3751,7 @@
               <a:buNone/>
             </a:pPr>
             <a:r>
-              <a:rPr lang="en-US" sz="1550" dirty="0">
+              <a:rPr lang="en-US" sz="1320" dirty="0">
                 <a:solidFill>
                   <a:srgbClr val="17364A"/>
                 </a:solidFill>
@@ -3741,9 +3759,9 @@
                 <a:ea typeface="Aptos" pitchFamily="34" charset="-122"/>
                 <a:cs typeface="Aptos" pitchFamily="34" charset="-120"/>
               </a:rPr>
-              <a:t>Connect the concept to public health purpose, responsible use, required safeguards, documentation, and the next action a department should take.</a:t>
-            </a:r>
-            <a:endParaRPr lang="en-US" sz="1550" dirty="0"/>
+              <a:t>Connect the concept to public health purpose, responsible use, required safeguards, documentation, and the next action a.</a:t>
+            </a:r>
+            <a:endParaRPr lang="en-US" sz="1320" dirty="0"/>
           </a:p>
         </p:txBody>
       </p:sp>
@@ -4044,49 +4062,58 @@
           <a:ln/>
         </p:spPr>
         <p:txBody>
-          <a:bodyPr wrap="square" lIns="635" tIns="635" rIns="635" bIns="635" rtlCol="0" anchor="t">
+          <a:bodyPr wrap="square" lIns="1016" tIns="1016" rIns="1016" bIns="1016" rtlCol="0" anchor="t">
             <a:normAutofit/>
           </a:bodyPr>
           <a:lstStyle/>
           <a:p>
+            <a:pPr indent="0" marL="0">
+              <a:buNone/>
+            </a:pPr>
             <a:r>
               <a:rPr lang="en-US" sz="2100" dirty="0">
                 <a:solidFill>
-                  <a:srgbClr val="17364A"/>
-                </a:solidFill>
-                <a:latin typeface="Aptos" pitchFamily="34" charset="0"/>
-                <a:ea typeface="Aptos" pitchFamily="34" charset="-122"/>
-                <a:cs typeface="Aptos" pitchFamily="34" charset="-120"/>
-              </a:rPr>
-              <a:t>Geospatial models may use spatial proxies for social conditions.</a:t>
+                  <a:srgbClr val="003A63"/>
+                </a:solidFill>
+                <a:latin typeface="Aptos" pitchFamily="34" charset="0"/>
+                <a:ea typeface="Aptos" pitchFamily="34" charset="-122"/>
+                <a:cs typeface="Aptos" pitchFamily="34" charset="-120"/>
+              </a:rPr>
+              <a:t>• Geospatial models may use spatial proxies for social conditions.</a:t>
             </a:r>
             <a:endParaRPr lang="en-US" sz="2100" dirty="0"/>
           </a:p>
           <a:p>
+            <a:pPr indent="0" marL="0">
+              <a:buNone/>
+            </a:pPr>
             <a:r>
               <a:rPr lang="en-US" sz="2100" dirty="0">
                 <a:solidFill>
-                  <a:srgbClr val="17364A"/>
-                </a:solidFill>
-                <a:latin typeface="Aptos" pitchFamily="34" charset="0"/>
-                <a:ea typeface="Aptos" pitchFamily="34" charset="-122"/>
-                <a:cs typeface="Aptos" pitchFamily="34" charset="-120"/>
-              </a:rPr>
-              <a:t>Social vulnerability, deprivation, rurality, housing burden, transportation access, and environmental.</a:t>
+                  <a:srgbClr val="003A63"/>
+                </a:solidFill>
+                <a:latin typeface="Aptos" pitchFamily="34" charset="0"/>
+                <a:ea typeface="Aptos" pitchFamily="34" charset="-122"/>
+                <a:cs typeface="Aptos" pitchFamily="34" charset="-120"/>
+              </a:rPr>
+              <a:t>• Social vulnerability, deprivation, rurality, housing burden, transportation access, and.</a:t>
             </a:r>
             <a:endParaRPr lang="en-US" sz="2100" dirty="0"/>
           </a:p>
           <a:p>
+            <a:pPr indent="0" marL="0">
+              <a:buNone/>
+            </a:pPr>
             <a:r>
               <a:rPr lang="en-US" sz="2100" dirty="0">
                 <a:solidFill>
-                  <a:srgbClr val="17364A"/>
-                </a:solidFill>
-                <a:latin typeface="Aptos" pitchFamily="34" charset="0"/>
-                <a:ea typeface="Aptos" pitchFamily="34" charset="-122"/>
-                <a:cs typeface="Aptos" pitchFamily="34" charset="-120"/>
-              </a:rPr>
-              <a:t>They can also be misused if they stigmatize communities or support restrictive decisions.</a:t>
+                  <a:srgbClr val="003A63"/>
+                </a:solidFill>
+                <a:latin typeface="Aptos" pitchFamily="34" charset="0"/>
+                <a:ea typeface="Aptos" pitchFamily="34" charset="-122"/>
+                <a:cs typeface="Aptos" pitchFamily="34" charset="-120"/>
+              </a:rPr>
+              <a:t>• They can also be misused if they stigmatize communities or support restrictive decisions.</a:t>
             </a:r>
             <a:endParaRPr lang="en-US" sz="2100" dirty="0"/>
           </a:p>
@@ -4166,17 +4193,17 @@
         </p:nvSpPr>
         <p:spPr>
           <a:xfrm>
-            <a:off x="7799832" y="1828800"/>
-            <a:ext cx="3145536" cy="685800"/>
-          </a:xfrm>
-          <a:prstGeom prst="rect">
-            <a:avLst/>
-          </a:prstGeom>
-          <a:noFill/>
-          <a:ln/>
-        </p:spPr>
-        <p:txBody>
-          <a:bodyPr wrap="square" lIns="0" tIns="0" rIns="0" bIns="0" rtlCol="0" anchor="t">
+            <a:off x="7799832" y="1801368"/>
+            <a:ext cx="3145536" cy="758952"/>
+          </a:xfrm>
+          <a:prstGeom prst="rect">
+            <a:avLst/>
+          </a:prstGeom>
+          <a:noFill/>
+          <a:ln/>
+        </p:spPr>
+        <p:txBody>
+          <a:bodyPr wrap="square" lIns="254" tIns="254" rIns="254" bIns="254" rtlCol="0" anchor="t">
             <a:normAutofit/>
           </a:bodyPr>
           <a:lstStyle/>
@@ -4185,7 +4212,7 @@
               <a:buNone/>
             </a:pPr>
             <a:r>
-              <a:rPr lang="en-US" sz="1550" dirty="0">
+              <a:rPr lang="en-US" sz="1320" dirty="0">
                 <a:solidFill>
                   <a:srgbClr val="17364A"/>
                 </a:solidFill>
@@ -4195,7 +4222,7 @@
               </a:rPr>
               <a:t>Geospatial models may use spatial proxies for social conditions.</a:t>
             </a:r>
-            <a:endParaRPr lang="en-US" sz="1550" dirty="0"/>
+            <a:endParaRPr lang="en-US" sz="1320" dirty="0"/>
           </a:p>
         </p:txBody>
       </p:sp>
@@ -4283,13 +4310,16 @@
           <a:ln/>
         </p:spPr>
         <p:txBody>
-          <a:bodyPr wrap="square" lIns="254" tIns="254" rIns="254" bIns="254" rtlCol="0" anchor="t">
+          <a:bodyPr wrap="square" lIns="508" tIns="508" rIns="508" bIns="508" rtlCol="0" anchor="t">
             <a:normAutofit/>
           </a:bodyPr>
           <a:lstStyle/>
           <a:p>
-            <a:r>
-              <a:rPr lang="en-US" sz="1380" dirty="0">
+            <a:pPr indent="0" marL="0">
+              <a:buNone/>
+            </a:pPr>
+            <a:r>
+              <a:rPr lang="en-US" sz="1220" dirty="0">
                 <a:solidFill>
                   <a:srgbClr val="17364A"/>
                 </a:solidFill>
@@ -4297,13 +4327,16 @@
                 <a:ea typeface="Aptos" pitchFamily="34" charset="-122"/>
                 <a:cs typeface="Aptos" pitchFamily="34" charset="-120"/>
               </a:rPr>
-              <a:t>Social vulnerability, deprivation, rurality, housing burden, transportation access, and.</a:t>
-            </a:r>
-            <a:endParaRPr lang="en-US" sz="1380" dirty="0"/>
-          </a:p>
-          <a:p>
-            <a:r>
-              <a:rPr lang="en-US" sz="1380" dirty="0">
+              <a:t>Social vulnerability, deprivation, rurality, housing burden,.</a:t>
+            </a:r>
+            <a:endParaRPr lang="en-US" sz="1220" dirty="0"/>
+          </a:p>
+          <a:p>
+            <a:pPr indent="0" marL="0">
+              <a:buNone/>
+            </a:pPr>
+            <a:r>
+              <a:rPr lang="en-US" sz="1220" dirty="0">
                 <a:solidFill>
                   <a:srgbClr val="17364A"/>
                 </a:solidFill>
@@ -4311,13 +4344,16 @@
                 <a:ea typeface="Aptos" pitchFamily="34" charset="-122"/>
                 <a:cs typeface="Aptos" pitchFamily="34" charset="-120"/>
               </a:rPr>
-              <a:t>Agencies should use these indicators to guide supportive action and resource allocation,.</a:t>
-            </a:r>
-            <a:endParaRPr lang="en-US" sz="1380" dirty="0"/>
-          </a:p>
-          <a:p>
-            <a:r>
-              <a:rPr lang="en-US" sz="1380" dirty="0">
+              <a:t>Agencies should use these indicators to guide supportive action.</a:t>
+            </a:r>
+            <a:endParaRPr lang="en-US" sz="1220" dirty="0"/>
+          </a:p>
+          <a:p>
+            <a:pPr indent="0" marL="0">
+              <a:buNone/>
+            </a:pPr>
+            <a:r>
+              <a:rPr lang="en-US" sz="1220" dirty="0">
                 <a:solidFill>
                   <a:srgbClr val="17364A"/>
                 </a:solidFill>
@@ -4327,7 +4363,7 @@
               </a:rPr>
               <a:t>Privacy protection should be planned before analysis.</a:t>
             </a:r>
-            <a:endParaRPr lang="en-US" sz="1380" dirty="0"/>
+            <a:endParaRPr lang="en-US" sz="1220" dirty="0"/>
           </a:p>
         </p:txBody>
       </p:sp>
@@ -4405,17 +4441,17 @@
         </p:nvSpPr>
         <p:spPr>
           <a:xfrm>
-            <a:off x="7799832" y="5001768"/>
-            <a:ext cx="3145536" cy="502920"/>
-          </a:xfrm>
-          <a:prstGeom prst="rect">
-            <a:avLst/>
-          </a:prstGeom>
-          <a:noFill/>
-          <a:ln/>
-        </p:spPr>
-        <p:txBody>
-          <a:bodyPr wrap="square" lIns="0" tIns="0" rIns="0" bIns="0" rtlCol="0" anchor="t">
+            <a:off x="7799832" y="4974336"/>
+            <a:ext cx="3145536" cy="576072"/>
+          </a:xfrm>
+          <a:prstGeom prst="rect">
+            <a:avLst/>
+          </a:prstGeom>
+          <a:noFill/>
+          <a:ln/>
+        </p:spPr>
+        <p:txBody>
+          <a:bodyPr wrap="square" lIns="254" tIns="254" rIns="254" bIns="254" rtlCol="0" anchor="t">
             <a:normAutofit/>
           </a:bodyPr>
           <a:lstStyle/>
@@ -4424,7 +4460,7 @@
               <a:buNone/>
             </a:pPr>
             <a:r>
-              <a:rPr lang="en-US" sz="1550" dirty="0">
+              <a:rPr lang="en-US" sz="1320" dirty="0">
                 <a:solidFill>
                   <a:srgbClr val="17364A"/>
                 </a:solidFill>
@@ -4432,9 +4468,9 @@
                 <a:ea typeface="Aptos" pitchFamily="34" charset="-122"/>
                 <a:cs typeface="Aptos" pitchFamily="34" charset="-120"/>
               </a:rPr>
-              <a:t>Connect the concept to public health purpose, responsible use, required safeguards, documentation, and the next action a department should take.</a:t>
-            </a:r>
-            <a:endParaRPr lang="en-US" sz="1550" dirty="0"/>
+              <a:t>Connect the concept to public health purpose, responsible use, required safeguards, documentation, and the next action a.</a:t>
+            </a:r>
+            <a:endParaRPr lang="en-US" sz="1320" dirty="0"/>
           </a:p>
         </p:txBody>
       </p:sp>
@@ -4735,49 +4771,58 @@
           <a:ln/>
         </p:spPr>
         <p:txBody>
-          <a:bodyPr wrap="square" lIns="635" tIns="635" rIns="635" bIns="635" rtlCol="0" anchor="t">
+          <a:bodyPr wrap="square" lIns="1016" tIns="1016" rIns="1016" bIns="1016" rtlCol="0" anchor="t">
             <a:normAutofit/>
           </a:bodyPr>
           <a:lstStyle/>
           <a:p>
+            <a:pPr indent="0" marL="0">
+              <a:buNone/>
+            </a:pPr>
             <a:r>
               <a:rPr lang="en-US" sz="2100" dirty="0">
                 <a:solidFill>
-                  <a:srgbClr val="17364A"/>
-                </a:solidFill>
-                <a:latin typeface="Aptos" pitchFamily="34" charset="0"/>
-                <a:ea typeface="Aptos" pitchFamily="34" charset="-122"/>
-                <a:cs typeface="Aptos" pitchFamily="34" charset="-120"/>
-              </a:rPr>
-              <a:t>Geocoding bias.</a:t>
+                  <a:srgbClr val="003A63"/>
+                </a:solidFill>
+                <a:latin typeface="Aptos" pitchFamily="34" charset="0"/>
+                <a:ea typeface="Aptos" pitchFamily="34" charset="-122"/>
+                <a:cs typeface="Aptos" pitchFamily="34" charset="-120"/>
+              </a:rPr>
+              <a:t>• Geocoding bias.</a:t>
             </a:r>
             <a:endParaRPr lang="en-US" sz="2100" dirty="0"/>
           </a:p>
           <a:p>
+            <a:pPr indent="0" marL="0">
+              <a:buNone/>
+            </a:pPr>
             <a:r>
               <a:rPr lang="en-US" sz="2100" dirty="0">
                 <a:solidFill>
-                  <a:srgbClr val="17364A"/>
-                </a:solidFill>
-                <a:latin typeface="Aptos" pitchFamily="34" charset="0"/>
-                <a:ea typeface="Aptos" pitchFamily="34" charset="-122"/>
-                <a:cs typeface="Aptos" pitchFamily="34" charset="-120"/>
-              </a:rPr>
-              <a:t>Some populations and locations are harder to geocode accurately.</a:t>
+                  <a:srgbClr val="003A63"/>
+                </a:solidFill>
+                <a:latin typeface="Aptos" pitchFamily="34" charset="0"/>
+                <a:ea typeface="Aptos" pitchFamily="34" charset="-122"/>
+                <a:cs typeface="Aptos" pitchFamily="34" charset="-120"/>
+              </a:rPr>
+              <a:t>• Some populations and locations are harder to geocode accurately.</a:t>
             </a:r>
             <a:endParaRPr lang="en-US" sz="2100" dirty="0"/>
           </a:p>
           <a:p>
+            <a:pPr indent="0" marL="0">
+              <a:buNone/>
+            </a:pPr>
             <a:r>
               <a:rPr lang="en-US" sz="2100" dirty="0">
                 <a:solidFill>
-                  <a:srgbClr val="17364A"/>
-                </a:solidFill>
-                <a:latin typeface="Aptos" pitchFamily="34" charset="0"/>
-                <a:ea typeface="Aptos" pitchFamily="34" charset="-122"/>
-                <a:cs typeface="Aptos" pitchFamily="34" charset="-120"/>
-              </a:rPr>
-              <a:t>Guardrails include geocoding quality checks, manual review for unmatched records, and documentation of.</a:t>
+                  <a:srgbClr val="003A63"/>
+                </a:solidFill>
+                <a:latin typeface="Aptos" pitchFamily="34" charset="0"/>
+                <a:ea typeface="Aptos" pitchFamily="34" charset="-122"/>
+                <a:cs typeface="Aptos" pitchFamily="34" charset="-120"/>
+              </a:rPr>
+              <a:t>• Guardrails include geocoding quality checks, manual review for unmatched records, and.</a:t>
             </a:r>
             <a:endParaRPr lang="en-US" sz="2100" dirty="0"/>
           </a:p>
@@ -4857,17 +4902,17 @@
         </p:nvSpPr>
         <p:spPr>
           <a:xfrm>
-            <a:off x="7799832" y="1828800"/>
-            <a:ext cx="3145536" cy="685800"/>
-          </a:xfrm>
-          <a:prstGeom prst="rect">
-            <a:avLst/>
-          </a:prstGeom>
-          <a:noFill/>
-          <a:ln/>
-        </p:spPr>
-        <p:txBody>
-          <a:bodyPr wrap="square" lIns="0" tIns="0" rIns="0" bIns="0" rtlCol="0" anchor="t">
+            <a:off x="7799832" y="1801368"/>
+            <a:ext cx="3145536" cy="758952"/>
+          </a:xfrm>
+          <a:prstGeom prst="rect">
+            <a:avLst/>
+          </a:prstGeom>
+          <a:noFill/>
+          <a:ln/>
+        </p:spPr>
+        <p:txBody>
+          <a:bodyPr wrap="square" lIns="254" tIns="254" rIns="254" bIns="254" rtlCol="0" anchor="t">
             <a:normAutofit/>
           </a:bodyPr>
           <a:lstStyle/>
@@ -4876,7 +4921,7 @@
               <a:buNone/>
             </a:pPr>
             <a:r>
-              <a:rPr lang="en-US" sz="1550" dirty="0">
+              <a:rPr lang="en-US" sz="1320" dirty="0">
                 <a:solidFill>
                   <a:srgbClr val="17364A"/>
                 </a:solidFill>
@@ -4886,7 +4931,7 @@
               </a:rPr>
               <a:t>Geocoding bias.</a:t>
             </a:r>
-            <a:endParaRPr lang="en-US" sz="1550" dirty="0"/>
+            <a:endParaRPr lang="en-US" sz="1320" dirty="0"/>
           </a:p>
         </p:txBody>
       </p:sp>
@@ -4974,13 +5019,16 @@
           <a:ln/>
         </p:spPr>
         <p:txBody>
-          <a:bodyPr wrap="square" lIns="254" tIns="254" rIns="254" bIns="254" rtlCol="0" anchor="t">
+          <a:bodyPr wrap="square" lIns="508" tIns="508" rIns="508" bIns="508" rtlCol="0" anchor="t">
             <a:normAutofit/>
           </a:bodyPr>
           <a:lstStyle/>
           <a:p>
-            <a:r>
-              <a:rPr lang="en-US" sz="1380" dirty="0">
+            <a:pPr indent="0" marL="0">
+              <a:buNone/>
+            </a:pPr>
+            <a:r>
+              <a:rPr lang="en-US" sz="1220" dirty="0">
                 <a:solidFill>
                   <a:srgbClr val="17364A"/>
                 </a:solidFill>
@@ -4988,13 +5036,16 @@
                 <a:ea typeface="Aptos" pitchFamily="34" charset="-122"/>
                 <a:cs typeface="Aptos" pitchFamily="34" charset="-120"/>
               </a:rPr>
-              <a:t>Guardrails include geocoding quality checks, manual review for unmatched records, and.</a:t>
-            </a:r>
-            <a:endParaRPr lang="en-US" sz="1380" dirty="0"/>
-          </a:p>
-          <a:p>
-            <a:r>
-              <a:rPr lang="en-US" sz="1380" dirty="0">
+              <a:t>Guardrails include geocoding quality checks, manual review for.</a:t>
+            </a:r>
+            <a:endParaRPr lang="en-US" sz="1220" dirty="0"/>
+          </a:p>
+          <a:p>
+            <a:pPr indent="0" marL="0">
+              <a:buNone/>
+            </a:pPr>
+            <a:r>
+              <a:rPr lang="en-US" sz="1220" dirty="0">
                 <a:solidFill>
                   <a:srgbClr val="17364A"/>
                 </a:solidFill>
@@ -5004,11 +5055,14 @@
               </a:rPr>
               <a:t>Small-area privacy risk.</a:t>
             </a:r>
-            <a:endParaRPr lang="en-US" sz="1380" dirty="0"/>
-          </a:p>
-          <a:p>
-            <a:r>
-              <a:rPr lang="en-US" sz="1380" dirty="0">
+            <a:endParaRPr lang="en-US" sz="1220" dirty="0"/>
+          </a:p>
+          <a:p>
+            <a:pPr indent="0" marL="0">
+              <a:buNone/>
+            </a:pPr>
+            <a:r>
+              <a:rPr lang="en-US" sz="1220" dirty="0">
                 <a:solidFill>
                   <a:srgbClr val="17364A"/>
                 </a:solidFill>
@@ -5018,7 +5072,7 @@
               </a:rPr>
               <a:t>Detailed maps can reveal sensitive patterns or identities.</a:t>
             </a:r>
-            <a:endParaRPr lang="en-US" sz="1380" dirty="0"/>
+            <a:endParaRPr lang="en-US" sz="1220" dirty="0"/>
           </a:p>
         </p:txBody>
       </p:sp>
@@ -5096,17 +5150,17 @@
         </p:nvSpPr>
         <p:spPr>
           <a:xfrm>
-            <a:off x="7799832" y="5001768"/>
-            <a:ext cx="3145536" cy="502920"/>
-          </a:xfrm>
-          <a:prstGeom prst="rect">
-            <a:avLst/>
-          </a:prstGeom>
-          <a:noFill/>
-          <a:ln/>
-        </p:spPr>
-        <p:txBody>
-          <a:bodyPr wrap="square" lIns="0" tIns="0" rIns="0" bIns="0" rtlCol="0" anchor="t">
+            <a:off x="7799832" y="4974336"/>
+            <a:ext cx="3145536" cy="576072"/>
+          </a:xfrm>
+          <a:prstGeom prst="rect">
+            <a:avLst/>
+          </a:prstGeom>
+          <a:noFill/>
+          <a:ln/>
+        </p:spPr>
+        <p:txBody>
+          <a:bodyPr wrap="square" lIns="254" tIns="254" rIns="254" bIns="254" rtlCol="0" anchor="t">
             <a:normAutofit/>
           </a:bodyPr>
           <a:lstStyle/>
@@ -5115,7 +5169,7 @@
               <a:buNone/>
             </a:pPr>
             <a:r>
-              <a:rPr lang="en-US" sz="1550" dirty="0">
+              <a:rPr lang="en-US" sz="1320" dirty="0">
                 <a:solidFill>
                   <a:srgbClr val="17364A"/>
                 </a:solidFill>
@@ -5123,9 +5177,9 @@
                 <a:ea typeface="Aptos" pitchFamily="34" charset="-122"/>
                 <a:cs typeface="Aptos" pitchFamily="34" charset="-120"/>
               </a:rPr>
-              <a:t>Identify what could go wrong, who could be affected, what safeguards are needed, and what evidence should be reviewed before use expands.</a:t>
-            </a:r>
-            <a:endParaRPr lang="en-US" sz="1550" dirty="0"/>
+              <a:t>Identify what could go wrong, who could be affected, what safeguards are needed, and what evidence should be reviewed.</a:t>
+            </a:r>
+            <a:endParaRPr lang="en-US" sz="1320" dirty="0"/>
           </a:p>
         </p:txBody>
       </p:sp>
@@ -5426,49 +5480,58 @@
           <a:ln/>
         </p:spPr>
         <p:txBody>
-          <a:bodyPr wrap="square" lIns="635" tIns="635" rIns="635" bIns="635" rtlCol="0" anchor="t">
+          <a:bodyPr wrap="square" lIns="1016" tIns="1016" rIns="1016" bIns="1016" rtlCol="0" anchor="t">
             <a:normAutofit/>
           </a:bodyPr>
           <a:lstStyle/>
           <a:p>
+            <a:pPr indent="0" marL="0">
+              <a:buNone/>
+            </a:pPr>
             <a:r>
               <a:rPr lang="en-US" sz="2100" dirty="0">
                 <a:solidFill>
-                  <a:srgbClr val="17364A"/>
-                </a:solidFill>
-                <a:latin typeface="Aptos" pitchFamily="34" charset="0"/>
-                <a:ea typeface="Aptos" pitchFamily="34" charset="-122"/>
-                <a:cs typeface="Aptos" pitchFamily="34" charset="-120"/>
-              </a:rPr>
-              <a:t>Stigmatizing communities.</a:t>
+                  <a:srgbClr val="003A63"/>
+                </a:solidFill>
+                <a:latin typeface="Aptos" pitchFamily="34" charset="0"/>
+                <a:ea typeface="Aptos" pitchFamily="34" charset="-122"/>
+                <a:cs typeface="Aptos" pitchFamily="34" charset="-120"/>
+              </a:rPr>
+              <a:t>• Stigmatizing communities.</a:t>
             </a:r>
             <a:endParaRPr lang="en-US" sz="2100" dirty="0"/>
           </a:p>
           <a:p>
+            <a:pPr indent="0" marL="0">
+              <a:buNone/>
+            </a:pPr>
             <a:r>
               <a:rPr lang="en-US" sz="2100" dirty="0">
                 <a:solidFill>
-                  <a:srgbClr val="17364A"/>
-                </a:solidFill>
-                <a:latin typeface="Aptos" pitchFamily="34" charset="0"/>
-                <a:ea typeface="Aptos" pitchFamily="34" charset="-122"/>
-                <a:cs typeface="Aptos" pitchFamily="34" charset="-120"/>
-              </a:rPr>
-              <a:t>Maps can unintentionally label communities as problems.</a:t>
+                  <a:srgbClr val="003A63"/>
+                </a:solidFill>
+                <a:latin typeface="Aptos" pitchFamily="34" charset="0"/>
+                <a:ea typeface="Aptos" pitchFamily="34" charset="-122"/>
+                <a:cs typeface="Aptos" pitchFamily="34" charset="-120"/>
+              </a:rPr>
+              <a:t>• Maps can unintentionally label communities as problems.</a:t>
             </a:r>
             <a:endParaRPr lang="en-US" sz="2100" dirty="0"/>
           </a:p>
           <a:p>
+            <a:pPr indent="0" marL="0">
+              <a:buNone/>
+            </a:pPr>
             <a:r>
               <a:rPr lang="en-US" sz="2100" dirty="0">
                 <a:solidFill>
-                  <a:srgbClr val="17364A"/>
-                </a:solidFill>
-                <a:latin typeface="Aptos" pitchFamily="34" charset="0"/>
-                <a:ea typeface="Aptos" pitchFamily="34" charset="-122"/>
-                <a:cs typeface="Aptos" pitchFamily="34" charset="-120"/>
-              </a:rPr>
-              <a:t>Guardrails include equity framing, community engagement, careful language, and focus on structural.</a:t>
+                  <a:srgbClr val="003A63"/>
+                </a:solidFill>
+                <a:latin typeface="Aptos" pitchFamily="34" charset="0"/>
+                <a:ea typeface="Aptos" pitchFamily="34" charset="-122"/>
+                <a:cs typeface="Aptos" pitchFamily="34" charset="-120"/>
+              </a:rPr>
+              <a:t>• Guardrails include equity framing, community engagement, careful language, and focus on.</a:t>
             </a:r>
             <a:endParaRPr lang="en-US" sz="2100" dirty="0"/>
           </a:p>
@@ -5548,17 +5611,17 @@
         </p:nvSpPr>
         <p:spPr>
           <a:xfrm>
-            <a:off x="7799832" y="1828800"/>
-            <a:ext cx="3145536" cy="685800"/>
-          </a:xfrm>
-          <a:prstGeom prst="rect">
-            <a:avLst/>
-          </a:prstGeom>
-          <a:noFill/>
-          <a:ln/>
-        </p:spPr>
-        <p:txBody>
-          <a:bodyPr wrap="square" lIns="0" tIns="0" rIns="0" bIns="0" rtlCol="0" anchor="t">
+            <a:off x="7799832" y="1801368"/>
+            <a:ext cx="3145536" cy="758952"/>
+          </a:xfrm>
+          <a:prstGeom prst="rect">
+            <a:avLst/>
+          </a:prstGeom>
+          <a:noFill/>
+          <a:ln/>
+        </p:spPr>
+        <p:txBody>
+          <a:bodyPr wrap="square" lIns="254" tIns="254" rIns="254" bIns="254" rtlCol="0" anchor="t">
             <a:normAutofit/>
           </a:bodyPr>
           <a:lstStyle/>
@@ -5567,7 +5630,7 @@
               <a:buNone/>
             </a:pPr>
             <a:r>
-              <a:rPr lang="en-US" sz="1550" dirty="0">
+              <a:rPr lang="en-US" sz="1320" dirty="0">
                 <a:solidFill>
                   <a:srgbClr val="17364A"/>
                 </a:solidFill>
@@ -5577,7 +5640,7 @@
               </a:rPr>
               <a:t>Stigmatizing communities.</a:t>
             </a:r>
-            <a:endParaRPr lang="en-US" sz="1550" dirty="0"/>
+            <a:endParaRPr lang="en-US" sz="1320" dirty="0"/>
           </a:p>
         </p:txBody>
       </p:sp>
@@ -5665,13 +5728,16 @@
           <a:ln/>
         </p:spPr>
         <p:txBody>
-          <a:bodyPr wrap="square" lIns="254" tIns="254" rIns="254" bIns="254" rtlCol="0" anchor="t">
+          <a:bodyPr wrap="square" lIns="508" tIns="508" rIns="508" bIns="508" rtlCol="0" anchor="t">
             <a:normAutofit/>
           </a:bodyPr>
           <a:lstStyle/>
           <a:p>
-            <a:r>
-              <a:rPr lang="en-US" sz="1380" dirty="0">
+            <a:pPr indent="0" marL="0">
+              <a:buNone/>
+            </a:pPr>
+            <a:r>
+              <a:rPr lang="en-US" sz="1220" dirty="0">
                 <a:solidFill>
                   <a:srgbClr val="17364A"/>
                 </a:solidFill>
@@ -5681,11 +5747,14 @@
               </a:rPr>
               <a:t>Stigmatizing communities.</a:t>
             </a:r>
-            <a:endParaRPr lang="en-US" sz="1380" dirty="0"/>
-          </a:p>
-          <a:p>
-            <a:r>
-              <a:rPr lang="en-US" sz="1380" dirty="0">
+            <a:endParaRPr lang="en-US" sz="1220" dirty="0"/>
+          </a:p>
+          <a:p>
+            <a:pPr indent="0" marL="0">
+              <a:buNone/>
+            </a:pPr>
+            <a:r>
+              <a:rPr lang="en-US" sz="1220" dirty="0">
                 <a:solidFill>
                   <a:srgbClr val="17364A"/>
                 </a:solidFill>
@@ -5695,11 +5764,14 @@
               </a:rPr>
               <a:t>Maps can unintentionally label communities as problems.</a:t>
             </a:r>
-            <a:endParaRPr lang="en-US" sz="1380" dirty="0"/>
-          </a:p>
-          <a:p>
-            <a:r>
-              <a:rPr lang="en-US" sz="1380" dirty="0">
+            <a:endParaRPr lang="en-US" sz="1220" dirty="0"/>
+          </a:p>
+          <a:p>
+            <a:pPr indent="0" marL="0">
+              <a:buNone/>
+            </a:pPr>
+            <a:r>
+              <a:rPr lang="en-US" sz="1220" dirty="0">
                 <a:solidFill>
                   <a:srgbClr val="17364A"/>
                 </a:solidFill>
@@ -5707,9 +5779,9 @@
                 <a:ea typeface="Aptos" pitchFamily="34" charset="-122"/>
                 <a:cs typeface="Aptos" pitchFamily="34" charset="-120"/>
               </a:rPr>
-              <a:t>Guardrails include equity framing, community engagement, careful language, and focus on.</a:t>
-            </a:r>
-            <a:endParaRPr lang="en-US" sz="1380" dirty="0"/>
+              <a:t>Guardrails include equity framing, community engagement, careful.</a:t>
+            </a:r>
+            <a:endParaRPr lang="en-US" sz="1220" dirty="0"/>
           </a:p>
         </p:txBody>
       </p:sp>
@@ -5787,17 +5859,17 @@
         </p:nvSpPr>
         <p:spPr>
           <a:xfrm>
-            <a:off x="7799832" y="5001768"/>
-            <a:ext cx="3145536" cy="502920"/>
-          </a:xfrm>
-          <a:prstGeom prst="rect">
-            <a:avLst/>
-          </a:prstGeom>
-          <a:noFill/>
-          <a:ln/>
-        </p:spPr>
-        <p:txBody>
-          <a:bodyPr wrap="square" lIns="0" tIns="0" rIns="0" bIns="0" rtlCol="0" anchor="t">
+            <a:off x="7799832" y="4974336"/>
+            <a:ext cx="3145536" cy="576072"/>
+          </a:xfrm>
+          <a:prstGeom prst="rect">
+            <a:avLst/>
+          </a:prstGeom>
+          <a:noFill/>
+          <a:ln/>
+        </p:spPr>
+        <p:txBody>
+          <a:bodyPr wrap="square" lIns="254" tIns="254" rIns="254" bIns="254" rtlCol="0" anchor="t">
             <a:normAutofit/>
           </a:bodyPr>
           <a:lstStyle/>
@@ -5806,7 +5878,7 @@
               <a:buNone/>
             </a:pPr>
             <a:r>
-              <a:rPr lang="en-US" sz="1550" dirty="0">
+              <a:rPr lang="en-US" sz="1320" dirty="0">
                 <a:solidFill>
                   <a:srgbClr val="17364A"/>
                 </a:solidFill>
@@ -5814,9 +5886,9 @@
                 <a:ea typeface="Aptos" pitchFamily="34" charset="-122"/>
                 <a:cs typeface="Aptos" pitchFamily="34" charset="-120"/>
               </a:rPr>
-              <a:t>Identify what could go wrong, who could be affected, what safeguards are needed, and what evidence should be reviewed before use expands.</a:t>
-            </a:r>
-            <a:endParaRPr lang="en-US" sz="1550" dirty="0"/>
+              <a:t>Identify what could go wrong, who could be affected, what safeguards are needed, and what evidence should be reviewed.</a:t>
+            </a:r>
+            <a:endParaRPr lang="en-US" sz="1320" dirty="0"/>
           </a:p>
         </p:txBody>
       </p:sp>
@@ -6117,49 +6189,58 @@
           <a:ln/>
         </p:spPr>
         <p:txBody>
-          <a:bodyPr wrap="square" lIns="635" tIns="635" rIns="635" bIns="635" rtlCol="0" anchor="t">
+          <a:bodyPr wrap="square" lIns="1016" tIns="1016" rIns="1016" bIns="1016" rtlCol="0" anchor="t">
             <a:normAutofit/>
           </a:bodyPr>
           <a:lstStyle/>
           <a:p>
+            <a:pPr indent="0" marL="0">
+              <a:buNone/>
+            </a:pPr>
             <a:r>
               <a:rPr lang="en-US" sz="2100" dirty="0">
                 <a:solidFill>
-                  <a:srgbClr val="17364A"/>
-                </a:solidFill>
-                <a:latin typeface="Aptos" pitchFamily="34" charset="0"/>
-                <a:ea typeface="Aptos" pitchFamily="34" charset="-122"/>
-                <a:cs typeface="Aptos" pitchFamily="34" charset="-120"/>
-              </a:rPr>
-              <a:t>Geospatial AI may support predictive analytics, emergency response, inspection prioritization,.</a:t>
+                  <a:srgbClr val="003A63"/>
+                </a:solidFill>
+                <a:latin typeface="Aptos" pitchFamily="34" charset="0"/>
+                <a:ea typeface="Aptos" pitchFamily="34" charset="-122"/>
+                <a:cs typeface="Aptos" pitchFamily="34" charset="-120"/>
+              </a:rPr>
+              <a:t>• Geospatial AI may support predictive analytics, emergency response, inspection prioritization,.</a:t>
             </a:r>
             <a:endParaRPr lang="en-US" sz="2100" dirty="0"/>
           </a:p>
           <a:p>
+            <a:pPr indent="0" marL="0">
+              <a:buNone/>
+            </a:pPr>
             <a:r>
               <a:rPr lang="en-US" sz="2100" dirty="0">
                 <a:solidFill>
-                  <a:srgbClr val="17364A"/>
-                </a:solidFill>
-                <a:latin typeface="Aptos" pitchFamily="34" charset="0"/>
-                <a:ea typeface="Aptos" pitchFamily="34" charset="-122"/>
-                <a:cs typeface="Aptos" pitchFamily="34" charset="-120"/>
-              </a:rPr>
-              <a:t>Generative AI may summarize spatial patterns for leaders, but it must not overstate certainty or ignore.</a:t>
+                  <a:srgbClr val="003A63"/>
+                </a:solidFill>
+                <a:latin typeface="Aptos" pitchFamily="34" charset="0"/>
+                <a:ea typeface="Aptos" pitchFamily="34" charset="-122"/>
+                <a:cs typeface="Aptos" pitchFamily="34" charset="-120"/>
+              </a:rPr>
+              <a:t>• Generative AI may summarize spatial patterns for leaders, but it must not overstate certainty.</a:t>
             </a:r>
             <a:endParaRPr lang="en-US" sz="2100" dirty="0"/>
           </a:p>
           <a:p>
+            <a:pPr indent="0" marL="0">
+              <a:buNone/>
+            </a:pPr>
             <a:r>
               <a:rPr lang="en-US" sz="2100" dirty="0">
                 <a:solidFill>
-                  <a:srgbClr val="17364A"/>
-                </a:solidFill>
-                <a:latin typeface="Aptos" pitchFamily="34" charset="0"/>
-                <a:ea typeface="Aptos" pitchFamily="34" charset="-122"/>
-                <a:cs typeface="Aptos" pitchFamily="34" charset="-120"/>
-              </a:rPr>
-              <a:t>RAG tools may retrieve local plans, maps, and protocols, while agentic workflows may propose outreach.</a:t>
+                  <a:srgbClr val="003A63"/>
+                </a:solidFill>
+                <a:latin typeface="Aptos" pitchFamily="34" charset="0"/>
+                <a:ea typeface="Aptos" pitchFamily="34" charset="-122"/>
+                <a:cs typeface="Aptos" pitchFamily="34" charset="-120"/>
+              </a:rPr>
+              <a:t>• RAG tools may retrieve local plans, maps, and protocols, while agentic workflows may propose.</a:t>
             </a:r>
             <a:endParaRPr lang="en-US" sz="2100" dirty="0"/>
           </a:p>
@@ -6239,17 +6320,17 @@
         </p:nvSpPr>
         <p:spPr>
           <a:xfrm>
-            <a:off x="7799832" y="1828800"/>
-            <a:ext cx="3145536" cy="685800"/>
-          </a:xfrm>
-          <a:prstGeom prst="rect">
-            <a:avLst/>
-          </a:prstGeom>
-          <a:noFill/>
-          <a:ln/>
-        </p:spPr>
-        <p:txBody>
-          <a:bodyPr wrap="square" lIns="0" tIns="0" rIns="0" bIns="0" rtlCol="0" anchor="t">
+            <a:off x="7799832" y="1801368"/>
+            <a:ext cx="3145536" cy="758952"/>
+          </a:xfrm>
+          <a:prstGeom prst="rect">
+            <a:avLst/>
+          </a:prstGeom>
+          <a:noFill/>
+          <a:ln/>
+        </p:spPr>
+        <p:txBody>
+          <a:bodyPr wrap="square" lIns="254" tIns="254" rIns="254" bIns="254" rtlCol="0" anchor="t">
             <a:normAutofit/>
           </a:bodyPr>
           <a:lstStyle/>
@@ -6258,7 +6339,7 @@
               <a:buNone/>
             </a:pPr>
             <a:r>
-              <a:rPr lang="en-US" sz="1550" dirty="0">
+              <a:rPr lang="en-US" sz="1320" dirty="0">
                 <a:solidFill>
                   <a:srgbClr val="17364A"/>
                 </a:solidFill>
@@ -6268,7 +6349,7 @@
               </a:rPr>
               <a:t>Geospatial AI may support predictive analytics, emergency response, inspection prioritization,.</a:t>
             </a:r>
-            <a:endParaRPr lang="en-US" sz="1550" dirty="0"/>
+            <a:endParaRPr lang="en-US" sz="1320" dirty="0"/>
           </a:p>
         </p:txBody>
       </p:sp>
@@ -6356,13 +6437,16 @@
           <a:ln/>
         </p:spPr>
         <p:txBody>
-          <a:bodyPr wrap="square" lIns="254" tIns="254" rIns="254" bIns="254" rtlCol="0" anchor="t">
+          <a:bodyPr wrap="square" lIns="508" tIns="508" rIns="508" bIns="508" rtlCol="0" anchor="t">
             <a:normAutofit/>
           </a:bodyPr>
           <a:lstStyle/>
           <a:p>
-            <a:r>
-              <a:rPr lang="en-US" sz="1380" dirty="0">
+            <a:pPr indent="0" marL="0">
+              <a:buNone/>
+            </a:pPr>
+            <a:r>
+              <a:rPr lang="en-US" sz="1220" dirty="0">
                 <a:solidFill>
                   <a:srgbClr val="17364A"/>
                 </a:solidFill>
@@ -6370,13 +6454,16 @@
                 <a:ea typeface="Aptos" pitchFamily="34" charset="-122"/>
                 <a:cs typeface="Aptos" pitchFamily="34" charset="-120"/>
               </a:rPr>
-              <a:t>Geospatial AI may support predictive analytics, emergency response, inspection.</a:t>
-            </a:r>
-            <a:endParaRPr lang="en-US" sz="1380" dirty="0"/>
-          </a:p>
-          <a:p>
-            <a:r>
-              <a:rPr lang="en-US" sz="1380" dirty="0">
+              <a:t>Geospatial AI may support predictive analytics, emergency.</a:t>
+            </a:r>
+            <a:endParaRPr lang="en-US" sz="1220" dirty="0"/>
+          </a:p>
+          <a:p>
+            <a:pPr indent="0" marL="0">
+              <a:buNone/>
+            </a:pPr>
+            <a:r>
+              <a:rPr lang="en-US" sz="1220" dirty="0">
                 <a:solidFill>
                   <a:srgbClr val="17364A"/>
                 </a:solidFill>
@@ -6384,13 +6471,16 @@
                 <a:ea typeface="Aptos" pitchFamily="34" charset="-122"/>
                 <a:cs typeface="Aptos" pitchFamily="34" charset="-120"/>
               </a:rPr>
-              <a:t>Generative AI may summarize spatial patterns for leaders, but it must not overstate.</a:t>
-            </a:r>
-            <a:endParaRPr lang="en-US" sz="1380" dirty="0"/>
-          </a:p>
-          <a:p>
-            <a:r>
-              <a:rPr lang="en-US" sz="1380" dirty="0">
+              <a:t>Generative AI may summarize spatial patterns for leaders, but it.</a:t>
+            </a:r>
+            <a:endParaRPr lang="en-US" sz="1220" dirty="0"/>
+          </a:p>
+          <a:p>
+            <a:pPr indent="0" marL="0">
+              <a:buNone/>
+            </a:pPr>
+            <a:r>
+              <a:rPr lang="en-US" sz="1220" dirty="0">
                 <a:solidFill>
                   <a:srgbClr val="17364A"/>
                 </a:solidFill>
@@ -6398,9 +6488,9 @@
                 <a:ea typeface="Aptos" pitchFamily="34" charset="-122"/>
                 <a:cs typeface="Aptos" pitchFamily="34" charset="-120"/>
               </a:rPr>
-              <a:t>RAG tools may retrieve local plans, maps, and protocols, while agentic workflows may.</a:t>
-            </a:r>
-            <a:endParaRPr lang="en-US" sz="1380" dirty="0"/>
+              <a:t>RAG tools may retrieve local plans, maps, and protocols, while.</a:t>
+            </a:r>
+            <a:endParaRPr lang="en-US" sz="1220" dirty="0"/>
           </a:p>
         </p:txBody>
       </p:sp>
@@ -6478,17 +6568,17 @@
         </p:nvSpPr>
         <p:spPr>
           <a:xfrm>
-            <a:off x="7799832" y="5001768"/>
-            <a:ext cx="3145536" cy="502920"/>
-          </a:xfrm>
-          <a:prstGeom prst="rect">
-            <a:avLst/>
-          </a:prstGeom>
-          <a:noFill/>
-          <a:ln/>
-        </p:spPr>
-        <p:txBody>
-          <a:bodyPr wrap="square" lIns="0" tIns="0" rIns="0" bIns="0" rtlCol="0" anchor="t">
+            <a:off x="7799832" y="4974336"/>
+            <a:ext cx="3145536" cy="576072"/>
+          </a:xfrm>
+          <a:prstGeom prst="rect">
+            <a:avLst/>
+          </a:prstGeom>
+          <a:noFill/>
+          <a:ln/>
+        </p:spPr>
+        <p:txBody>
+          <a:bodyPr wrap="square" lIns="254" tIns="254" rIns="254" bIns="254" rtlCol="0" anchor="t">
             <a:normAutofit/>
           </a:bodyPr>
           <a:lstStyle/>
@@ -6497,7 +6587,7 @@
               <a:buNone/>
             </a:pPr>
             <a:r>
-              <a:rPr lang="en-US" sz="1550" dirty="0">
+              <a:rPr lang="en-US" sz="1320" dirty="0">
                 <a:solidFill>
                   <a:srgbClr val="17364A"/>
                 </a:solidFill>
@@ -6505,9 +6595,9 @@
                 <a:ea typeface="Aptos" pitchFamily="34" charset="-122"/>
                 <a:cs typeface="Aptos" pitchFamily="34" charset="-120"/>
               </a:rPr>
-              <a:t>Use the concept to clarify workflow changes, dependencies, staffing, procurement requirements, training needs, and implementation checkpoints.</a:t>
-            </a:r>
-            <a:endParaRPr lang="en-US" sz="1550" dirty="0"/>
+              <a:t>Use the concept to clarify workflow changes, dependencies, staffing, procurement requirements, training needs, and.</a:t>
+            </a:r>
+            <a:endParaRPr lang="en-US" sz="1320" dirty="0"/>
           </a:p>
         </p:txBody>
       </p:sp>
@@ -6808,49 +6898,58 @@
           <a:ln/>
         </p:spPr>
         <p:txBody>
-          <a:bodyPr wrap="square" lIns="635" tIns="635" rIns="635" bIns="635" rtlCol="0" anchor="t">
+          <a:bodyPr wrap="square" lIns="1016" tIns="1016" rIns="1016" bIns="1016" rtlCol="0" anchor="t">
             <a:normAutofit/>
           </a:bodyPr>
           <a:lstStyle/>
           <a:p>
+            <a:pPr indent="0" marL="0">
+              <a:buNone/>
+            </a:pPr>
             <a:r>
               <a:rPr lang="en-US" sz="2100" dirty="0">
                 <a:solidFill>
-                  <a:srgbClr val="17364A"/>
-                </a:solidFill>
-                <a:latin typeface="Aptos" pitchFamily="34" charset="0"/>
-                <a:ea typeface="Aptos" pitchFamily="34" charset="-122"/>
-                <a:cs typeface="Aptos" pitchFamily="34" charset="-120"/>
-              </a:rPr>
-              <a:t>What location data are used, and how complete and accurate are they?</a:t>
+                  <a:srgbClr val="003A63"/>
+                </a:solidFill>
+                <a:latin typeface="Aptos" pitchFamily="34" charset="0"/>
+                <a:ea typeface="Aptos" pitchFamily="34" charset="-122"/>
+                <a:cs typeface="Aptos" pitchFamily="34" charset="-120"/>
+              </a:rPr>
+              <a:t>• What location data are used, and how complete and accurate are they?</a:t>
             </a:r>
             <a:endParaRPr lang="en-US" sz="2100" dirty="0"/>
           </a:p>
           <a:p>
+            <a:pPr indent="0" marL="0">
+              <a:buNone/>
+            </a:pPr>
             <a:r>
               <a:rPr lang="en-US" sz="2100" dirty="0">
                 <a:solidFill>
-                  <a:srgbClr val="17364A"/>
-                </a:solidFill>
-                <a:latin typeface="Aptos" pitchFamily="34" charset="0"/>
-                <a:ea typeface="Aptos" pitchFamily="34" charset="-122"/>
-                <a:cs typeface="Aptos" pitchFamily="34" charset="-120"/>
-              </a:rPr>
-              <a:t>Which geographic unit best matches the public health action?</a:t>
+                  <a:srgbClr val="003A63"/>
+                </a:solidFill>
+                <a:latin typeface="Aptos" pitchFamily="34" charset="0"/>
+                <a:ea typeface="Aptos" pitchFamily="34" charset="-122"/>
+                <a:cs typeface="Aptos" pitchFamily="34" charset="-120"/>
+              </a:rPr>
+              <a:t>• Which geographic unit best matches the public health action?</a:t>
             </a:r>
             <a:endParaRPr lang="en-US" sz="2100" dirty="0"/>
           </a:p>
           <a:p>
+            <a:pPr indent="0" marL="0">
+              <a:buNone/>
+            </a:pPr>
             <a:r>
               <a:rPr lang="en-US" sz="2100" dirty="0">
                 <a:solidFill>
-                  <a:srgbClr val="17364A"/>
-                </a:solidFill>
-                <a:latin typeface="Aptos" pitchFamily="34" charset="0"/>
-                <a:ea typeface="Aptos" pitchFamily="34" charset="-122"/>
-                <a:cs typeface="Aptos" pitchFamily="34" charset="-120"/>
-              </a:rPr>
-              <a:t>Could missing or poor-quality location data affect certain populations more than others?</a:t>
+                  <a:srgbClr val="003A63"/>
+                </a:solidFill>
+                <a:latin typeface="Aptos" pitchFamily="34" charset="0"/>
+                <a:ea typeface="Aptos" pitchFamily="34" charset="-122"/>
+                <a:cs typeface="Aptos" pitchFamily="34" charset="-120"/>
+              </a:rPr>
+              <a:t>• Could missing or poor-quality location data affect certain populations more than others?</a:t>
             </a:r>
             <a:endParaRPr lang="en-US" sz="2100" dirty="0"/>
           </a:p>
@@ -6930,17 +7029,17 @@
         </p:nvSpPr>
         <p:spPr>
           <a:xfrm>
-            <a:off x="7799832" y="1828800"/>
-            <a:ext cx="3145536" cy="685800"/>
-          </a:xfrm>
-          <a:prstGeom prst="rect">
-            <a:avLst/>
-          </a:prstGeom>
-          <a:noFill/>
-          <a:ln/>
-        </p:spPr>
-        <p:txBody>
-          <a:bodyPr wrap="square" lIns="0" tIns="0" rIns="0" bIns="0" rtlCol="0" anchor="t">
+            <a:off x="7799832" y="1801368"/>
+            <a:ext cx="3145536" cy="758952"/>
+          </a:xfrm>
+          <a:prstGeom prst="rect">
+            <a:avLst/>
+          </a:prstGeom>
+          <a:noFill/>
+          <a:ln/>
+        </p:spPr>
+        <p:txBody>
+          <a:bodyPr wrap="square" lIns="254" tIns="254" rIns="254" bIns="254" rtlCol="0" anchor="t">
             <a:normAutofit/>
           </a:bodyPr>
           <a:lstStyle/>
@@ -6949,7 +7048,7 @@
               <a:buNone/>
             </a:pPr>
             <a:r>
-              <a:rPr lang="en-US" sz="1550" dirty="0">
+              <a:rPr lang="en-US" sz="1320" dirty="0">
                 <a:solidFill>
                   <a:srgbClr val="17364A"/>
                 </a:solidFill>
@@ -6959,7 +7058,7 @@
               </a:rPr>
               <a:t>What location data are used, and how complete and accurate are they?</a:t>
             </a:r>
-            <a:endParaRPr lang="en-US" sz="1550" dirty="0"/>
+            <a:endParaRPr lang="en-US" sz="1320" dirty="0"/>
           </a:p>
         </p:txBody>
       </p:sp>
@@ -7047,13 +7146,16 @@
           <a:ln/>
         </p:spPr>
         <p:txBody>
-          <a:bodyPr wrap="square" lIns="254" tIns="254" rIns="254" bIns="254" rtlCol="0" anchor="t">
+          <a:bodyPr wrap="square" lIns="508" tIns="508" rIns="508" bIns="508" rtlCol="0" anchor="t">
             <a:normAutofit/>
           </a:bodyPr>
           <a:lstStyle/>
           <a:p>
-            <a:r>
-              <a:rPr lang="en-US" sz="1380" dirty="0">
+            <a:pPr indent="0" marL="0">
+              <a:buNone/>
+            </a:pPr>
+            <a:r>
+              <a:rPr lang="en-US" sz="1220" dirty="0">
                 <a:solidFill>
                   <a:srgbClr val="17364A"/>
                 </a:solidFill>
@@ -7063,11 +7165,14 @@
               </a:rPr>
               <a:t>What location data are used, and how complete and accurate are they?</a:t>
             </a:r>
-            <a:endParaRPr lang="en-US" sz="1380" dirty="0"/>
-          </a:p>
-          <a:p>
-            <a:r>
-              <a:rPr lang="en-US" sz="1380" dirty="0">
+            <a:endParaRPr lang="en-US" sz="1220" dirty="0"/>
+          </a:p>
+          <a:p>
+            <a:pPr indent="0" marL="0">
+              <a:buNone/>
+            </a:pPr>
+            <a:r>
+              <a:rPr lang="en-US" sz="1220" dirty="0">
                 <a:solidFill>
                   <a:srgbClr val="17364A"/>
                 </a:solidFill>
@@ -7077,11 +7182,14 @@
               </a:rPr>
               <a:t>Which geographic unit best matches the public health action?</a:t>
             </a:r>
-            <a:endParaRPr lang="en-US" sz="1380" dirty="0"/>
-          </a:p>
-          <a:p>
-            <a:r>
-              <a:rPr lang="en-US" sz="1380" dirty="0">
+            <a:endParaRPr lang="en-US" sz="1220" dirty="0"/>
+          </a:p>
+          <a:p>
+            <a:pPr indent="0" marL="0">
+              <a:buNone/>
+            </a:pPr>
+            <a:r>
+              <a:rPr lang="en-US" sz="1220" dirty="0">
                 <a:solidFill>
                   <a:srgbClr val="17364A"/>
                 </a:solidFill>
@@ -7089,9 +7197,9 @@
                 <a:ea typeface="Aptos" pitchFamily="34" charset="-122"/>
                 <a:cs typeface="Aptos" pitchFamily="34" charset="-120"/>
               </a:rPr>
-              <a:t>Could missing or poor-quality location data affect certain populations more than others?</a:t>
-            </a:r>
-            <a:endParaRPr lang="en-US" sz="1380" dirty="0"/>
+              <a:t>Could missing or poor-quality location data affect certain.</a:t>
+            </a:r>
+            <a:endParaRPr lang="en-US" sz="1220" dirty="0"/>
           </a:p>
         </p:txBody>
       </p:sp>
@@ -7169,17 +7277,17 @@
         </p:nvSpPr>
         <p:spPr>
           <a:xfrm>
-            <a:off x="7799832" y="5001768"/>
-            <a:ext cx="3145536" cy="502920"/>
-          </a:xfrm>
-          <a:prstGeom prst="rect">
-            <a:avLst/>
-          </a:prstGeom>
-          <a:noFill/>
-          <a:ln/>
-        </p:spPr>
-        <p:txBody>
-          <a:bodyPr wrap="square" lIns="0" tIns="0" rIns="0" bIns="0" rtlCol="0" anchor="t">
+            <a:off x="7799832" y="4974336"/>
+            <a:ext cx="3145536" cy="576072"/>
+          </a:xfrm>
+          <a:prstGeom prst="rect">
+            <a:avLst/>
+          </a:prstGeom>
+          <a:noFill/>
+          <a:ln/>
+        </p:spPr>
+        <p:txBody>
+          <a:bodyPr wrap="square" lIns="254" tIns="254" rIns="254" bIns="254" rtlCol="0" anchor="t">
             <a:normAutofit/>
           </a:bodyPr>
           <a:lstStyle/>
@@ -7188,7 +7296,7 @@
               <a:buNone/>
             </a:pPr>
             <a:r>
-              <a:rPr lang="en-US" sz="1550" dirty="0">
+              <a:rPr lang="en-US" sz="1320" dirty="0">
                 <a:solidFill>
                   <a:srgbClr val="17364A"/>
                 </a:solidFill>
@@ -7196,9 +7304,9 @@
                 <a:ea typeface="Aptos" pitchFamily="34" charset="-122"/>
                 <a:cs typeface="Aptos" pitchFamily="34" charset="-120"/>
               </a:rPr>
-              <a:t>Connect the concept to public health purpose, responsible use, required safeguards, documentation, and the next action a department should take.</a:t>
-            </a:r>
-            <a:endParaRPr lang="en-US" sz="1550" dirty="0"/>
+              <a:t>Connect the concept to public health purpose, responsible use, required safeguards, documentation, and the next action a.</a:t>
+            </a:r>
+            <a:endParaRPr lang="en-US" sz="1320" dirty="0"/>
           </a:p>
         </p:txBody>
       </p:sp>
@@ -7499,35 +7607,41 @@
           <a:ln/>
         </p:spPr>
         <p:txBody>
-          <a:bodyPr wrap="square" lIns="635" tIns="635" rIns="635" bIns="635" rtlCol="0" anchor="t">
+          <a:bodyPr wrap="square" lIns="1016" tIns="1016" rIns="1016" bIns="1016" rtlCol="0" anchor="t">
             <a:normAutofit/>
           </a:bodyPr>
           <a:lstStyle/>
           <a:p>
+            <a:pPr indent="0" marL="0">
+              <a:buNone/>
+            </a:pPr>
             <a:r>
               <a:rPr lang="en-US" sz="2100" dirty="0">
                 <a:solidFill>
-                  <a:srgbClr val="17364A"/>
-                </a:solidFill>
-                <a:latin typeface="Aptos" pitchFamily="34" charset="0"/>
-                <a:ea typeface="Aptos" pitchFamily="34" charset="-122"/>
-                <a:cs typeface="Aptos" pitchFamily="34" charset="-120"/>
-              </a:rPr>
-              <a:t>What privacy safeguards are needed for internal and public maps?</a:t>
+                  <a:srgbClr val="003A63"/>
+                </a:solidFill>
+                <a:latin typeface="Aptos" pitchFamily="34" charset="0"/>
+                <a:ea typeface="Aptos" pitchFamily="34" charset="-122"/>
+                <a:cs typeface="Aptos" pitchFamily="34" charset="-120"/>
+              </a:rPr>
+              <a:t>• What privacy safeguards are needed for internal and public maps?</a:t>
             </a:r>
             <a:endParaRPr lang="en-US" sz="2100" dirty="0"/>
           </a:p>
           <a:p>
+            <a:pPr indent="0" marL="0">
+              <a:buNone/>
+            </a:pPr>
             <a:r>
               <a:rPr lang="en-US" sz="2100" dirty="0">
                 <a:solidFill>
-                  <a:srgbClr val="17364A"/>
-                </a:solidFill>
-                <a:latin typeface="Aptos" pitchFamily="34" charset="0"/>
-                <a:ea typeface="Aptos" pitchFamily="34" charset="-122"/>
-                <a:cs typeface="Aptos" pitchFamily="34" charset="-120"/>
-              </a:rPr>
-              <a:t>How will community context be included before action is taken?</a:t>
+                  <a:srgbClr val="003A63"/>
+                </a:solidFill>
+                <a:latin typeface="Aptos" pitchFamily="34" charset="0"/>
+                <a:ea typeface="Aptos" pitchFamily="34" charset="-122"/>
+                <a:cs typeface="Aptos" pitchFamily="34" charset="-120"/>
+              </a:rPr>
+              <a:t>• How will community context be included before action is taken?</a:t>
             </a:r>
             <a:endParaRPr lang="en-US" sz="2100" dirty="0"/>
           </a:p>
@@ -7607,17 +7721,17 @@
         </p:nvSpPr>
         <p:spPr>
           <a:xfrm>
-            <a:off x="7799832" y="1828800"/>
-            <a:ext cx="3145536" cy="685800"/>
-          </a:xfrm>
-          <a:prstGeom prst="rect">
-            <a:avLst/>
-          </a:prstGeom>
-          <a:noFill/>
-          <a:ln/>
-        </p:spPr>
-        <p:txBody>
-          <a:bodyPr wrap="square" lIns="0" tIns="0" rIns="0" bIns="0" rtlCol="0" anchor="t">
+            <a:off x="7799832" y="1801368"/>
+            <a:ext cx="3145536" cy="758952"/>
+          </a:xfrm>
+          <a:prstGeom prst="rect">
+            <a:avLst/>
+          </a:prstGeom>
+          <a:noFill/>
+          <a:ln/>
+        </p:spPr>
+        <p:txBody>
+          <a:bodyPr wrap="square" lIns="254" tIns="254" rIns="254" bIns="254" rtlCol="0" anchor="t">
             <a:normAutofit/>
           </a:bodyPr>
           <a:lstStyle/>
@@ -7626,7 +7740,7 @@
               <a:buNone/>
             </a:pPr>
             <a:r>
-              <a:rPr lang="en-US" sz="1550" dirty="0">
+              <a:rPr lang="en-US" sz="1320" dirty="0">
                 <a:solidFill>
                   <a:srgbClr val="17364A"/>
                 </a:solidFill>
@@ -7636,7 +7750,7 @@
               </a:rPr>
               <a:t>What privacy safeguards are needed for internal and public maps?</a:t>
             </a:r>
-            <a:endParaRPr lang="en-US" sz="1550" dirty="0"/>
+            <a:endParaRPr lang="en-US" sz="1320" dirty="0"/>
           </a:p>
         </p:txBody>
       </p:sp>
@@ -7724,13 +7838,16 @@
           <a:ln/>
         </p:spPr>
         <p:txBody>
-          <a:bodyPr wrap="square" lIns="254" tIns="254" rIns="254" bIns="254" rtlCol="0" anchor="t">
+          <a:bodyPr wrap="square" lIns="508" tIns="508" rIns="508" bIns="508" rtlCol="0" anchor="t">
             <a:normAutofit/>
           </a:bodyPr>
           <a:lstStyle/>
           <a:p>
-            <a:r>
-              <a:rPr lang="en-US" sz="1380" dirty="0">
+            <a:pPr indent="0" marL="0">
+              <a:buNone/>
+            </a:pPr>
+            <a:r>
+              <a:rPr lang="en-US" sz="1220" dirty="0">
                 <a:solidFill>
                   <a:srgbClr val="17364A"/>
                 </a:solidFill>
@@ -7740,11 +7857,14 @@
               </a:rPr>
               <a:t>What privacy safeguards are needed for internal and public maps?</a:t>
             </a:r>
-            <a:endParaRPr lang="en-US" sz="1380" dirty="0"/>
-          </a:p>
-          <a:p>
-            <a:r>
-              <a:rPr lang="en-US" sz="1380" dirty="0">
+            <a:endParaRPr lang="en-US" sz="1220" dirty="0"/>
+          </a:p>
+          <a:p>
+            <a:pPr indent="0" marL="0">
+              <a:buNone/>
+            </a:pPr>
+            <a:r>
+              <a:rPr lang="en-US" sz="1220" dirty="0">
                 <a:solidFill>
                   <a:srgbClr val="17364A"/>
                 </a:solidFill>
@@ -7754,7 +7874,7 @@
               </a:rPr>
               <a:t>How will community context be included before action is taken?</a:t>
             </a:r>
-            <a:endParaRPr lang="en-US" sz="1380" dirty="0"/>
+            <a:endParaRPr lang="en-US" sz="1220" dirty="0"/>
           </a:p>
         </p:txBody>
       </p:sp>
@@ -7832,17 +7952,17 @@
         </p:nvSpPr>
         <p:spPr>
           <a:xfrm>
-            <a:off x="7799832" y="5001768"/>
-            <a:ext cx="3145536" cy="502920"/>
-          </a:xfrm>
-          <a:prstGeom prst="rect">
-            <a:avLst/>
-          </a:prstGeom>
-          <a:noFill/>
-          <a:ln/>
-        </p:spPr>
-        <p:txBody>
-          <a:bodyPr wrap="square" lIns="0" tIns="0" rIns="0" bIns="0" rtlCol="0" anchor="t">
+            <a:off x="7799832" y="4974336"/>
+            <a:ext cx="3145536" cy="576072"/>
+          </a:xfrm>
+          <a:prstGeom prst="rect">
+            <a:avLst/>
+          </a:prstGeom>
+          <a:noFill/>
+          <a:ln/>
+        </p:spPr>
+        <p:txBody>
+          <a:bodyPr wrap="square" lIns="254" tIns="254" rIns="254" bIns="254" rtlCol="0" anchor="t">
             <a:normAutofit/>
           </a:bodyPr>
           <a:lstStyle/>
@@ -7851,7 +7971,7 @@
               <a:buNone/>
             </a:pPr>
             <a:r>
-              <a:rPr lang="en-US" sz="1550" dirty="0">
+              <a:rPr lang="en-US" sz="1320" dirty="0">
                 <a:solidFill>
                   <a:srgbClr val="17364A"/>
                 </a:solidFill>
@@ -7859,9 +7979,9 @@
                 <a:ea typeface="Aptos" pitchFamily="34" charset="-122"/>
                 <a:cs typeface="Aptos" pitchFamily="34" charset="-120"/>
               </a:rPr>
-              <a:t>Connect the concept to public health purpose, responsible use, required safeguards, documentation, and the next action a department should take.</a:t>
-            </a:r>
-            <a:endParaRPr lang="en-US" sz="1550" dirty="0"/>
+              <a:t>Connect the concept to public health purpose, responsible use, required safeguards, documentation, and the next action a.</a:t>
+            </a:r>
+            <a:endParaRPr lang="en-US" sz="1320" dirty="0"/>
           </a:p>
         </p:txBody>
       </p:sp>
@@ -8162,49 +8282,58 @@
           <a:ln/>
         </p:spPr>
         <p:txBody>
-          <a:bodyPr wrap="square" lIns="635" tIns="635" rIns="635" bIns="635" rtlCol="0" anchor="t">
+          <a:bodyPr wrap="square" lIns="1016" tIns="1016" rIns="1016" bIns="1016" rtlCol="0" anchor="t">
             <a:normAutofit/>
           </a:bodyPr>
           <a:lstStyle/>
           <a:p>
+            <a:pPr indent="0" marL="0">
+              <a:buNone/>
+            </a:pPr>
             <a:r>
               <a:rPr lang="en-US" sz="2100" dirty="0">
                 <a:solidFill>
-                  <a:srgbClr val="17364A"/>
-                </a:solidFill>
-                <a:latin typeface="Aptos" pitchFamily="34" charset="0"/>
-                <a:ea typeface="Aptos" pitchFamily="34" charset="-122"/>
-                <a:cs typeface="Aptos" pitchFamily="34" charset="-120"/>
-              </a:rPr>
-              <a:t>Create a geospatial AI readiness worksheet for one public health workflow.</a:t>
+                  <a:srgbClr val="003A63"/>
+                </a:solidFill>
+                <a:latin typeface="Aptos" pitchFamily="34" charset="0"/>
+                <a:ea typeface="Aptos" pitchFamily="34" charset="-122"/>
+                <a:cs typeface="Aptos" pitchFamily="34" charset="-120"/>
+              </a:rPr>
+              <a:t>• Create a geospatial AI readiness worksheet for one public health workflow.</a:t>
             </a:r>
             <a:endParaRPr lang="en-US" sz="2100" dirty="0"/>
           </a:p>
           <a:p>
+            <a:pPr indent="0" marL="0">
+              <a:buNone/>
+            </a:pPr>
             <a:r>
               <a:rPr lang="en-US" sz="2100" dirty="0">
                 <a:solidFill>
-                  <a:srgbClr val="17364A"/>
-                </a:solidFill>
-                <a:latin typeface="Aptos" pitchFamily="34" charset="0"/>
-                <a:ea typeface="Aptos" pitchFamily="34" charset="-122"/>
-                <a:cs typeface="Aptos" pitchFamily="34" charset="-120"/>
-              </a:rPr>
-              <a:t>Include the public health question, location data sources, geocoding method, geographic unit,.</a:t>
+                  <a:srgbClr val="003A63"/>
+                </a:solidFill>
+                <a:latin typeface="Aptos" pitchFamily="34" charset="0"/>
+                <a:ea typeface="Aptos" pitchFamily="34" charset="-122"/>
+                <a:cs typeface="Aptos" pitchFamily="34" charset="-120"/>
+              </a:rPr>
+              <a:t>• Include the public health question, location data sources, geocoding method, geographic unit,.</a:t>
             </a:r>
             <a:endParaRPr lang="en-US" sz="2100" dirty="0"/>
           </a:p>
           <a:p>
+            <a:pPr indent="0" marL="0">
+              <a:buNone/>
+            </a:pPr>
             <a:r>
               <a:rPr lang="en-US" sz="2100" dirty="0">
                 <a:solidFill>
-                  <a:srgbClr val="17364A"/>
-                </a:solidFill>
-                <a:latin typeface="Aptos" pitchFamily="34" charset="0"/>
-                <a:ea typeface="Aptos" pitchFamily="34" charset="-122"/>
-                <a:cs typeface="Aptos" pitchFamily="34" charset="-120"/>
-              </a:rPr>
-              <a:t>The worksheet should identify at least one way the map could be misinterpreted and one safeguard that.</a:t>
+                  <a:srgbClr val="003A63"/>
+                </a:solidFill>
+                <a:latin typeface="Aptos" pitchFamily="34" charset="0"/>
+                <a:ea typeface="Aptos" pitchFamily="34" charset="-122"/>
+                <a:cs typeface="Aptos" pitchFamily="34" charset="-120"/>
+              </a:rPr>
+              <a:t>• The worksheet should identify at least one way the map could be misinterpreted and one.</a:t>
             </a:r>
             <a:endParaRPr lang="en-US" sz="2100" dirty="0"/>
           </a:p>
@@ -8284,17 +8413,17 @@
         </p:nvSpPr>
         <p:spPr>
           <a:xfrm>
-            <a:off x="7799832" y="1828800"/>
-            <a:ext cx="3145536" cy="685800"/>
-          </a:xfrm>
-          <a:prstGeom prst="rect">
-            <a:avLst/>
-          </a:prstGeom>
-          <a:noFill/>
-          <a:ln/>
-        </p:spPr>
-        <p:txBody>
-          <a:bodyPr wrap="square" lIns="0" tIns="0" rIns="0" bIns="0" rtlCol="0" anchor="t">
+            <a:off x="7799832" y="1801368"/>
+            <a:ext cx="3145536" cy="758952"/>
+          </a:xfrm>
+          <a:prstGeom prst="rect">
+            <a:avLst/>
+          </a:prstGeom>
+          <a:noFill/>
+          <a:ln/>
+        </p:spPr>
+        <p:txBody>
+          <a:bodyPr wrap="square" lIns="254" tIns="254" rIns="254" bIns="254" rtlCol="0" anchor="t">
             <a:normAutofit/>
           </a:bodyPr>
           <a:lstStyle/>
@@ -8303,7 +8432,7 @@
               <a:buNone/>
             </a:pPr>
             <a:r>
-              <a:rPr lang="en-US" sz="1550" dirty="0">
+              <a:rPr lang="en-US" sz="1320" dirty="0">
                 <a:solidFill>
                   <a:srgbClr val="17364A"/>
                 </a:solidFill>
@@ -8313,7 +8442,7 @@
               </a:rPr>
               <a:t>Create a geospatial AI readiness worksheet for one public health workflow.</a:t>
             </a:r>
-            <a:endParaRPr lang="en-US" sz="1550" dirty="0"/>
+            <a:endParaRPr lang="en-US" sz="1320" dirty="0"/>
           </a:p>
         </p:txBody>
       </p:sp>
@@ -8401,13 +8530,16 @@
           <a:ln/>
         </p:spPr>
         <p:txBody>
-          <a:bodyPr wrap="square" lIns="254" tIns="254" rIns="254" bIns="254" rtlCol="0" anchor="t">
+          <a:bodyPr wrap="square" lIns="508" tIns="508" rIns="508" bIns="508" rtlCol="0" anchor="t">
             <a:normAutofit/>
           </a:bodyPr>
           <a:lstStyle/>
           <a:p>
-            <a:r>
-              <a:rPr lang="en-US" sz="1380" dirty="0">
+            <a:pPr indent="0" marL="0">
+              <a:buNone/>
+            </a:pPr>
+            <a:r>
+              <a:rPr lang="en-US" sz="1220" dirty="0">
                 <a:solidFill>
                   <a:srgbClr val="17364A"/>
                 </a:solidFill>
@@ -8415,13 +8547,16 @@
                 <a:ea typeface="Aptos" pitchFamily="34" charset="-122"/>
                 <a:cs typeface="Aptos" pitchFamily="34" charset="-120"/>
               </a:rPr>
-              <a:t>Include the public health question, location data sources, geocoding method, geographic.</a:t>
-            </a:r>
-            <a:endParaRPr lang="en-US" sz="1380" dirty="0"/>
-          </a:p>
-          <a:p>
-            <a:r>
-              <a:rPr lang="en-US" sz="1380" dirty="0">
+              <a:t>Include the public health question, location data sources,.</a:t>
+            </a:r>
+            <a:endParaRPr lang="en-US" sz="1220" dirty="0"/>
+          </a:p>
+          <a:p>
+            <a:pPr indent="0" marL="0">
+              <a:buNone/>
+            </a:pPr>
+            <a:r>
+              <a:rPr lang="en-US" sz="1220" dirty="0">
                 <a:solidFill>
                   <a:srgbClr val="17364A"/>
                 </a:solidFill>
@@ -8429,9 +8564,9 @@
                 <a:ea typeface="Aptos" pitchFamily="34" charset="-122"/>
                 <a:cs typeface="Aptos" pitchFamily="34" charset="-120"/>
               </a:rPr>
-              <a:t>The worksheet should identify at least one way the map could be misinterpreted and one.</a:t>
-            </a:r>
-            <a:endParaRPr lang="en-US" sz="1380" dirty="0"/>
+              <a:t>The worksheet should identify at least one way the map could be.</a:t>
+            </a:r>
+            <a:endParaRPr lang="en-US" sz="1220" dirty="0"/>
           </a:p>
         </p:txBody>
       </p:sp>
@@ -8509,17 +8644,17 @@
         </p:nvSpPr>
         <p:spPr>
           <a:xfrm>
-            <a:off x="7799832" y="5001768"/>
-            <a:ext cx="3145536" cy="502920"/>
-          </a:xfrm>
-          <a:prstGeom prst="rect">
-            <a:avLst/>
-          </a:prstGeom>
-          <a:noFill/>
-          <a:ln/>
-        </p:spPr>
-        <p:txBody>
-          <a:bodyPr wrap="square" lIns="0" tIns="0" rIns="0" bIns="0" rtlCol="0" anchor="t">
+            <a:off x="7799832" y="4974336"/>
+            <a:ext cx="3145536" cy="576072"/>
+          </a:xfrm>
+          <a:prstGeom prst="rect">
+            <a:avLst/>
+          </a:prstGeom>
+          <a:noFill/>
+          <a:ln/>
+        </p:spPr>
+        <p:txBody>
+          <a:bodyPr wrap="square" lIns="254" tIns="254" rIns="254" bIns="254" rtlCol="0" anchor="t">
             <a:normAutofit/>
           </a:bodyPr>
           <a:lstStyle/>
@@ -8528,7 +8663,7 @@
               <a:buNone/>
             </a:pPr>
             <a:r>
-              <a:rPr lang="en-US" sz="1550" dirty="0">
+              <a:rPr lang="en-US" sz="1320" dirty="0">
                 <a:solidFill>
                   <a:srgbClr val="17364A"/>
                 </a:solidFill>
@@ -8536,9 +8671,9 @@
                 <a:ea typeface="Aptos" pitchFamily="34" charset="-122"/>
                 <a:cs typeface="Aptos" pitchFamily="34" charset="-120"/>
               </a:rPr>
-              <a:t>Use the assignment to test whether you can explain the concept, apply it to a realistic public health situation, and identify what would need review before the work moves forward.</a:t>
-            </a:r>
-            <a:endParaRPr lang="en-US" sz="1550" dirty="0"/>
+              <a:t>Use the assignment to test whether you can explain the concept, apply it to a realistic public health situation, and.</a:t>
+            </a:r>
+            <a:endParaRPr lang="en-US" sz="1320" dirty="0"/>
           </a:p>
         </p:txBody>
       </p:sp>
@@ -8839,49 +8974,58 @@
           <a:ln/>
         </p:spPr>
         <p:txBody>
-          <a:bodyPr wrap="square" lIns="635" tIns="635" rIns="635" bIns="635" rtlCol="0" anchor="t">
+          <a:bodyPr wrap="square" lIns="1016" tIns="1016" rIns="1016" bIns="1016" rtlCol="0" anchor="t">
             <a:normAutofit/>
           </a:bodyPr>
           <a:lstStyle/>
           <a:p>
+            <a:pPr indent="0" marL="0">
+              <a:buNone/>
+            </a:pPr>
             <a:r>
               <a:rPr lang="en-US" sz="2100" dirty="0">
                 <a:solidFill>
-                  <a:srgbClr val="17364A"/>
-                </a:solidFill>
-                <a:latin typeface="Aptos" pitchFamily="34" charset="0"/>
-                <a:ea typeface="Aptos" pitchFamily="34" charset="-122"/>
-                <a:cs typeface="Aptos" pitchFamily="34" charset="-120"/>
-              </a:rPr>
-              <a:t>Geospatial AI readiness worksheet</a:t>
+                  <a:srgbClr val="003A63"/>
+                </a:solidFill>
+                <a:latin typeface="Aptos" pitchFamily="34" charset="0"/>
+                <a:ea typeface="Aptos" pitchFamily="34" charset="-122"/>
+                <a:cs typeface="Aptos" pitchFamily="34" charset="-120"/>
+              </a:rPr>
+              <a:t>• Geospatial AI readiness worksheet</a:t>
             </a:r>
             <a:endParaRPr lang="en-US" sz="2100" dirty="0"/>
           </a:p>
           <a:p>
+            <a:pPr indent="0" marL="0">
+              <a:buNone/>
+            </a:pPr>
             <a:r>
               <a:rPr lang="en-US" sz="2100" dirty="0">
                 <a:solidFill>
-                  <a:srgbClr val="17364A"/>
-                </a:solidFill>
-                <a:latin typeface="Aptos" pitchFamily="34" charset="0"/>
-                <a:ea typeface="Aptos" pitchFamily="34" charset="-122"/>
-                <a:cs typeface="Aptos" pitchFamily="34" charset="-120"/>
-              </a:rPr>
-              <a:t>Map interpretation and limitations memo</a:t>
+                  <a:srgbClr val="003A63"/>
+                </a:solidFill>
+                <a:latin typeface="Aptos" pitchFamily="34" charset="0"/>
+                <a:ea typeface="Aptos" pitchFamily="34" charset="-122"/>
+                <a:cs typeface="Aptos" pitchFamily="34" charset="-120"/>
+              </a:rPr>
+              <a:t>• Map interpretation and limitations memo</a:t>
             </a:r>
             <a:endParaRPr lang="en-US" sz="2100" dirty="0"/>
           </a:p>
           <a:p>
+            <a:pPr indent="0" marL="0">
+              <a:buNone/>
+            </a:pPr>
             <a:r>
               <a:rPr lang="en-US" sz="2100" dirty="0">
                 <a:solidFill>
-                  <a:srgbClr val="17364A"/>
-                </a:solidFill>
-                <a:latin typeface="Aptos" pitchFamily="34" charset="0"/>
-                <a:ea typeface="Aptos" pitchFamily="34" charset="-122"/>
-                <a:cs typeface="Aptos" pitchFamily="34" charset="-120"/>
-              </a:rPr>
-              <a:t>Privacy and suppression review notes</a:t>
+                  <a:srgbClr val="003A63"/>
+                </a:solidFill>
+                <a:latin typeface="Aptos" pitchFamily="34" charset="0"/>
+                <a:ea typeface="Aptos" pitchFamily="34" charset="-122"/>
+                <a:cs typeface="Aptos" pitchFamily="34" charset="-120"/>
+              </a:rPr>
+              <a:t>• Privacy and suppression review notes</a:t>
             </a:r>
             <a:endParaRPr lang="en-US" sz="2100" dirty="0"/>
           </a:p>
@@ -8961,17 +9105,17 @@
         </p:nvSpPr>
         <p:spPr>
           <a:xfrm>
-            <a:off x="7799832" y="1828800"/>
-            <a:ext cx="3145536" cy="685800"/>
-          </a:xfrm>
-          <a:prstGeom prst="rect">
-            <a:avLst/>
-          </a:prstGeom>
-          <a:noFill/>
-          <a:ln/>
-        </p:spPr>
-        <p:txBody>
-          <a:bodyPr wrap="square" lIns="0" tIns="0" rIns="0" bIns="0" rtlCol="0" anchor="t">
+            <a:off x="7799832" y="1801368"/>
+            <a:ext cx="3145536" cy="758952"/>
+          </a:xfrm>
+          <a:prstGeom prst="rect">
+            <a:avLst/>
+          </a:prstGeom>
+          <a:noFill/>
+          <a:ln/>
+        </p:spPr>
+        <p:txBody>
+          <a:bodyPr wrap="square" lIns="254" tIns="254" rIns="254" bIns="254" rtlCol="0" anchor="t">
             <a:normAutofit/>
           </a:bodyPr>
           <a:lstStyle/>
@@ -8980,7 +9124,7 @@
               <a:buNone/>
             </a:pPr>
             <a:r>
-              <a:rPr lang="en-US" sz="1550" dirty="0">
+              <a:rPr lang="en-US" sz="1320" dirty="0">
                 <a:solidFill>
                   <a:srgbClr val="17364A"/>
                 </a:solidFill>
@@ -8990,7 +9134,7 @@
               </a:rPr>
               <a:t>Geospatial AI readiness worksheet</a:t>
             </a:r>
-            <a:endParaRPr lang="en-US" sz="1550" dirty="0"/>
+            <a:endParaRPr lang="en-US" sz="1320" dirty="0"/>
           </a:p>
         </p:txBody>
       </p:sp>
@@ -9078,13 +9222,16 @@
           <a:ln/>
         </p:spPr>
         <p:txBody>
-          <a:bodyPr wrap="square" lIns="254" tIns="254" rIns="254" bIns="254" rtlCol="0" anchor="t">
+          <a:bodyPr wrap="square" lIns="508" tIns="508" rIns="508" bIns="508" rtlCol="0" anchor="t">
             <a:normAutofit/>
           </a:bodyPr>
           <a:lstStyle/>
           <a:p>
-            <a:r>
-              <a:rPr lang="en-US" sz="1380" dirty="0">
+            <a:pPr indent="0" marL="0">
+              <a:buNone/>
+            </a:pPr>
+            <a:r>
+              <a:rPr lang="en-US" sz="1220" dirty="0">
                 <a:solidFill>
                   <a:srgbClr val="17364A"/>
                 </a:solidFill>
@@ -9094,11 +9241,14 @@
               </a:rPr>
               <a:t>Geospatial AI readiness worksheet</a:t>
             </a:r>
-            <a:endParaRPr lang="en-US" sz="1380" dirty="0"/>
-          </a:p>
-          <a:p>
-            <a:r>
-              <a:rPr lang="en-US" sz="1380" dirty="0">
+            <a:endParaRPr lang="en-US" sz="1220" dirty="0"/>
+          </a:p>
+          <a:p>
+            <a:pPr indent="0" marL="0">
+              <a:buNone/>
+            </a:pPr>
+            <a:r>
+              <a:rPr lang="en-US" sz="1220" dirty="0">
                 <a:solidFill>
                   <a:srgbClr val="17364A"/>
                 </a:solidFill>
@@ -9108,11 +9258,14 @@
               </a:rPr>
               <a:t>Map interpretation and limitations memo</a:t>
             </a:r>
-            <a:endParaRPr lang="en-US" sz="1380" dirty="0"/>
-          </a:p>
-          <a:p>
-            <a:r>
-              <a:rPr lang="en-US" sz="1380" dirty="0">
+            <a:endParaRPr lang="en-US" sz="1220" dirty="0"/>
+          </a:p>
+          <a:p>
+            <a:pPr indent="0" marL="0">
+              <a:buNone/>
+            </a:pPr>
+            <a:r>
+              <a:rPr lang="en-US" sz="1220" dirty="0">
                 <a:solidFill>
                   <a:srgbClr val="17364A"/>
                 </a:solidFill>
@@ -9122,7 +9275,7 @@
               </a:rPr>
               <a:t>Privacy and suppression review notes</a:t>
             </a:r>
-            <a:endParaRPr lang="en-US" sz="1380" dirty="0"/>
+            <a:endParaRPr lang="en-US" sz="1220" dirty="0"/>
           </a:p>
         </p:txBody>
       </p:sp>
@@ -9200,17 +9353,17 @@
         </p:nvSpPr>
         <p:spPr>
           <a:xfrm>
-            <a:off x="7799832" y="5001768"/>
-            <a:ext cx="3145536" cy="502920"/>
-          </a:xfrm>
-          <a:prstGeom prst="rect">
-            <a:avLst/>
-          </a:prstGeom>
-          <a:noFill/>
-          <a:ln/>
-        </p:spPr>
-        <p:txBody>
-          <a:bodyPr wrap="square" lIns="0" tIns="0" rIns="0" bIns="0" rtlCol="0" anchor="t">
+            <a:off x="7799832" y="4974336"/>
+            <a:ext cx="3145536" cy="576072"/>
+          </a:xfrm>
+          <a:prstGeom prst="rect">
+            <a:avLst/>
+          </a:prstGeom>
+          <a:noFill/>
+          <a:ln/>
+        </p:spPr>
+        <p:txBody>
+          <a:bodyPr wrap="square" lIns="254" tIns="254" rIns="254" bIns="254" rtlCol="0" anchor="t">
             <a:normAutofit/>
           </a:bodyPr>
           <a:lstStyle/>
@@ -9219,7 +9372,7 @@
               <a:buNone/>
             </a:pPr>
             <a:r>
-              <a:rPr lang="en-US" sz="1550" dirty="0">
+              <a:rPr lang="en-US" sz="1320" dirty="0">
                 <a:solidFill>
                   <a:srgbClr val="17364A"/>
                 </a:solidFill>
@@ -9227,9 +9380,9 @@
                 <a:ea typeface="Aptos" pitchFamily="34" charset="-122"/>
                 <a:cs typeface="Aptos" pitchFamily="34" charset="-120"/>
               </a:rPr>
-              <a:t>Connect the concept to public health purpose, responsible use, required safeguards, documentation, and the next action a department should take.</a:t>
-            </a:r>
-            <a:endParaRPr lang="en-US" sz="1550" dirty="0"/>
+              <a:t>Connect the concept to public health purpose, responsible use, required safeguards, documentation, and the next action a.</a:t>
+            </a:r>
+            <a:endParaRPr lang="en-US" sz="1320" dirty="0"/>
           </a:p>
         </p:txBody>
       </p:sp>
@@ -9530,21 +9683,24 @@
           <a:ln/>
         </p:spPr>
         <p:txBody>
-          <a:bodyPr wrap="square" lIns="635" tIns="635" rIns="635" bIns="635" rtlCol="0" anchor="t">
+          <a:bodyPr wrap="square" lIns="1016" tIns="1016" rIns="1016" bIns="1016" rtlCol="0" anchor="t">
             <a:normAutofit/>
           </a:bodyPr>
           <a:lstStyle/>
           <a:p>
+            <a:pPr indent="0" marL="0">
+              <a:buNone/>
+            </a:pPr>
             <a:r>
               <a:rPr lang="en-US" sz="2100" dirty="0">
                 <a:solidFill>
-                  <a:srgbClr val="17364A"/>
-                </a:solidFill>
-                <a:latin typeface="Aptos" pitchFamily="34" charset="0"/>
-                <a:ea typeface="Aptos" pitchFamily="34" charset="-122"/>
-                <a:cs typeface="Aptos" pitchFamily="34" charset="-120"/>
-              </a:rPr>
-              <a:t>Community context and action plan</a:t>
+                  <a:srgbClr val="003A63"/>
+                </a:solidFill>
+                <a:latin typeface="Aptos" pitchFamily="34" charset="0"/>
+                <a:ea typeface="Aptos" pitchFamily="34" charset="-122"/>
+                <a:cs typeface="Aptos" pitchFamily="34" charset="-120"/>
+              </a:rPr>
+              <a:t>• Community context and action plan</a:t>
             </a:r>
             <a:endParaRPr lang="en-US" sz="2100" dirty="0"/>
           </a:p>
@@ -9624,17 +9780,17 @@
         </p:nvSpPr>
         <p:spPr>
           <a:xfrm>
-            <a:off x="7799832" y="1828800"/>
-            <a:ext cx="3145536" cy="685800"/>
-          </a:xfrm>
-          <a:prstGeom prst="rect">
-            <a:avLst/>
-          </a:prstGeom>
-          <a:noFill/>
-          <a:ln/>
-        </p:spPr>
-        <p:txBody>
-          <a:bodyPr wrap="square" lIns="0" tIns="0" rIns="0" bIns="0" rtlCol="0" anchor="t">
+            <a:off x="7799832" y="1801368"/>
+            <a:ext cx="3145536" cy="758952"/>
+          </a:xfrm>
+          <a:prstGeom prst="rect">
+            <a:avLst/>
+          </a:prstGeom>
+          <a:noFill/>
+          <a:ln/>
+        </p:spPr>
+        <p:txBody>
+          <a:bodyPr wrap="square" lIns="254" tIns="254" rIns="254" bIns="254" rtlCol="0" anchor="t">
             <a:normAutofit/>
           </a:bodyPr>
           <a:lstStyle/>
@@ -9643,7 +9799,7 @@
               <a:buNone/>
             </a:pPr>
             <a:r>
-              <a:rPr lang="en-US" sz="1550" dirty="0">
+              <a:rPr lang="en-US" sz="1320" dirty="0">
                 <a:solidFill>
                   <a:srgbClr val="17364A"/>
                 </a:solidFill>
@@ -9653,7 +9809,7 @@
               </a:rPr>
               <a:t>Community context and action plan</a:t>
             </a:r>
-            <a:endParaRPr lang="en-US" sz="1550" dirty="0"/>
+            <a:endParaRPr lang="en-US" sz="1320" dirty="0"/>
           </a:p>
         </p:txBody>
       </p:sp>
@@ -9741,13 +9897,16 @@
           <a:ln/>
         </p:spPr>
         <p:txBody>
-          <a:bodyPr wrap="square" lIns="254" tIns="254" rIns="254" bIns="254" rtlCol="0" anchor="t">
+          <a:bodyPr wrap="square" lIns="508" tIns="508" rIns="508" bIns="508" rtlCol="0" anchor="t">
             <a:normAutofit/>
           </a:bodyPr>
           <a:lstStyle/>
           <a:p>
-            <a:r>
-              <a:rPr lang="en-US" sz="1380" dirty="0">
+            <a:pPr indent="0" marL="0">
+              <a:buNone/>
+            </a:pPr>
+            <a:r>
+              <a:rPr lang="en-US" sz="1220" dirty="0">
                 <a:solidFill>
                   <a:srgbClr val="17364A"/>
                 </a:solidFill>
@@ -9757,7 +9916,7 @@
               </a:rPr>
               <a:t>Community context and action plan</a:t>
             </a:r>
-            <a:endParaRPr lang="en-US" sz="1380" dirty="0"/>
+            <a:endParaRPr lang="en-US" sz="1220" dirty="0"/>
           </a:p>
         </p:txBody>
       </p:sp>
@@ -9835,17 +9994,17 @@
         </p:nvSpPr>
         <p:spPr>
           <a:xfrm>
-            <a:off x="7799832" y="5001768"/>
-            <a:ext cx="3145536" cy="502920"/>
-          </a:xfrm>
-          <a:prstGeom prst="rect">
-            <a:avLst/>
-          </a:prstGeom>
-          <a:noFill/>
-          <a:ln/>
-        </p:spPr>
-        <p:txBody>
-          <a:bodyPr wrap="square" lIns="0" tIns="0" rIns="0" bIns="0" rtlCol="0" anchor="t">
+            <a:off x="7799832" y="4974336"/>
+            <a:ext cx="3145536" cy="576072"/>
+          </a:xfrm>
+          <a:prstGeom prst="rect">
+            <a:avLst/>
+          </a:prstGeom>
+          <a:noFill/>
+          <a:ln/>
+        </p:spPr>
+        <p:txBody>
+          <a:bodyPr wrap="square" lIns="254" tIns="254" rIns="254" bIns="254" rtlCol="0" anchor="t">
             <a:normAutofit/>
           </a:bodyPr>
           <a:lstStyle/>
@@ -9854,7 +10013,7 @@
               <a:buNone/>
             </a:pPr>
             <a:r>
-              <a:rPr lang="en-US" sz="1550" dirty="0">
+              <a:rPr lang="en-US" sz="1320" dirty="0">
                 <a:solidFill>
                   <a:srgbClr val="17364A"/>
                 </a:solidFill>
@@ -9862,9 +10021,9 @@
                 <a:ea typeface="Aptos" pitchFamily="34" charset="-122"/>
                 <a:cs typeface="Aptos" pitchFamily="34" charset="-120"/>
               </a:rPr>
-              <a:t>Connect the concept to public health purpose, responsible use, required safeguards, documentation, and the next action a department should take.</a:t>
-            </a:r>
-            <a:endParaRPr lang="en-US" sz="1550" dirty="0"/>
+              <a:t>Connect the concept to public health purpose, responsible use, required safeguards, documentation, and the next action a.</a:t>
+            </a:r>
+            <a:endParaRPr lang="en-US" sz="1320" dirty="0"/>
           </a:p>
         </p:txBody>
       </p:sp>
@@ -10165,49 +10324,58 @@
           <a:ln/>
         </p:spPr>
         <p:txBody>
-          <a:bodyPr wrap="square" lIns="635" tIns="635" rIns="635" bIns="635" rtlCol="0" anchor="t">
+          <a:bodyPr wrap="square" lIns="1016" tIns="1016" rIns="1016" bIns="1016" rtlCol="0" anchor="t">
             <a:normAutofit/>
           </a:bodyPr>
           <a:lstStyle/>
           <a:p>
+            <a:pPr indent="0" marL="0">
+              <a:buNone/>
+            </a:pPr>
             <a:r>
               <a:rPr lang="en-US" sz="2100" dirty="0">
                 <a:solidFill>
-                  <a:srgbClr val="17364A"/>
-                </a:solidFill>
-                <a:latin typeface="Aptos" pitchFamily="34" charset="0"/>
-                <a:ea typeface="Aptos" pitchFamily="34" charset="-122"/>
-                <a:cs typeface="Aptos" pitchFamily="34" charset="-120"/>
-              </a:rPr>
-              <a:t>Geospatial AI combines spatial data, geographic analysis, and AI methods to identify patterns across place.</a:t>
+                  <a:srgbClr val="003A63"/>
+                </a:solidFill>
+                <a:latin typeface="Aptos" pitchFamily="34" charset="0"/>
+                <a:ea typeface="Aptos" pitchFamily="34" charset="-122"/>
+                <a:cs typeface="Aptos" pitchFamily="34" charset="-120"/>
+              </a:rPr>
+              <a:t>• Geospatial AI combines spatial data, geographic analysis, and AI methods to identify patterns.</a:t>
             </a:r>
             <a:endParaRPr lang="en-US" sz="2100" dirty="0"/>
           </a:p>
           <a:p>
+            <a:pPr indent="0" marL="0">
+              <a:buNone/>
+            </a:pPr>
             <a:r>
               <a:rPr lang="en-US" sz="2100" dirty="0">
                 <a:solidFill>
-                  <a:srgbClr val="17364A"/>
-                </a:solidFill>
-                <a:latin typeface="Aptos" pitchFamily="34" charset="0"/>
-                <a:ea typeface="Aptos" pitchFamily="34" charset="-122"/>
-                <a:cs typeface="Aptos" pitchFamily="34" charset="-120"/>
-              </a:rPr>
-              <a:t>In public health, spatial analysis is already central to outbreak response, environmental health, emergency.</a:t>
+                  <a:srgbClr val="003A63"/>
+                </a:solidFill>
+                <a:latin typeface="Aptos" pitchFamily="34" charset="0"/>
+                <a:ea typeface="Aptos" pitchFamily="34" charset="-122"/>
+                <a:cs typeface="Aptos" pitchFamily="34" charset="-120"/>
+              </a:rPr>
+              <a:t>• In public health, spatial analysis is already central to outbreak response, environmental.</a:t>
             </a:r>
             <a:endParaRPr lang="en-US" sz="2100" dirty="0"/>
           </a:p>
           <a:p>
+            <a:pPr indent="0" marL="0">
+              <a:buNone/>
+            </a:pPr>
             <a:r>
               <a:rPr lang="en-US" sz="2100" dirty="0">
                 <a:solidFill>
-                  <a:srgbClr val="17364A"/>
-                </a:solidFill>
-                <a:latin typeface="Aptos" pitchFamily="34" charset="0"/>
-                <a:ea typeface="Aptos" pitchFamily="34" charset="-122"/>
-                <a:cs typeface="Aptos" pitchFamily="34" charset="-120"/>
-              </a:rPr>
-              <a:t>AI can strengthen these activities when it helps detect clusters, estimate access barriers, classify imagery,.</a:t>
+                  <a:srgbClr val="003A63"/>
+                </a:solidFill>
+                <a:latin typeface="Aptos" pitchFamily="34" charset="0"/>
+                <a:ea typeface="Aptos" pitchFamily="34" charset="-122"/>
+                <a:cs typeface="Aptos" pitchFamily="34" charset="-120"/>
+              </a:rPr>
+              <a:t>• AI can strengthen these activities when it helps detect clusters, estimate access barriers,.</a:t>
             </a:r>
             <a:endParaRPr lang="en-US" sz="2100" dirty="0"/>
           </a:p>
@@ -10287,17 +10455,17 @@
         </p:nvSpPr>
         <p:spPr>
           <a:xfrm>
-            <a:off x="8074152" y="1920240"/>
-            <a:ext cx="2825496" cy="1280160"/>
-          </a:xfrm>
-          <a:prstGeom prst="rect">
-            <a:avLst/>
-          </a:prstGeom>
-          <a:noFill/>
-          <a:ln/>
-        </p:spPr>
-        <p:txBody>
-          <a:bodyPr wrap="square" lIns="0" tIns="0" rIns="0" bIns="0" rtlCol="0" anchor="t">
+            <a:off x="8074152" y="1892808"/>
+            <a:ext cx="2825496" cy="1353312"/>
+          </a:xfrm>
+          <a:prstGeom prst="rect">
+            <a:avLst/>
+          </a:prstGeom>
+          <a:noFill/>
+          <a:ln/>
+        </p:spPr>
+        <p:txBody>
+          <a:bodyPr wrap="square" lIns="254" tIns="254" rIns="254" bIns="254" rtlCol="0" anchor="t">
             <a:normAutofit/>
           </a:bodyPr>
           <a:lstStyle/>
@@ -10306,7 +10474,7 @@
               <a:buNone/>
             </a:pPr>
             <a:r>
-              <a:rPr lang="en-US" sz="1550" dirty="0">
+              <a:rPr lang="en-US" sz="1320" dirty="0">
                 <a:solidFill>
                   <a:srgbClr val="17364A"/>
                 </a:solidFill>
@@ -10314,43 +10482,9 @@
                 <a:ea typeface="Aptos" pitchFamily="34" charset="-122"/>
                 <a:cs typeface="Aptos" pitchFamily="34" charset="-120"/>
               </a:rPr>
-              <a:t>Level: applied/foundational</a:t>
-            </a:r>
-            <a:endParaRPr lang="en-US" sz="1550" dirty="0"/>
-          </a:p>
-          <a:p>
-            <a:pPr indent="0" marL="0">
-              <a:buNone/>
-            </a:pPr>
-            <a:r>
-              <a:rPr lang="en-US" sz="1550" dirty="0">
-                <a:solidFill>
-                  <a:srgbClr val="17364A"/>
-                </a:solidFill>
-                <a:latin typeface="Aptos" pitchFamily="34" charset="0"/>
-                <a:ea typeface="Aptos" pitchFamily="34" charset="-122"/>
-                <a:cs typeface="Aptos" pitchFamily="34" charset="-120"/>
-              </a:rPr>
-              <a:t>Primary track: Analytics and Modeling Track</a:t>
-            </a:r>
-            <a:endParaRPr lang="en-US" sz="1550" dirty="0"/>
-          </a:p>
-          <a:p>
-            <a:pPr indent="0" marL="0">
-              <a:buNone/>
-            </a:pPr>
-            <a:r>
-              <a:rPr lang="en-US" sz="1550" dirty="0">
-                <a:solidFill>
-                  <a:srgbClr val="17364A"/>
-                </a:solidFill>
-                <a:latin typeface="Aptos" pitchFamily="34" charset="0"/>
-                <a:ea typeface="Aptos" pitchFamily="34" charset="-122"/>
-                <a:cs typeface="Aptos" pitchFamily="34" charset="-120"/>
-              </a:rPr>
-              <a:t>Appears in tracks: analytics-modeling</a:t>
-            </a:r>
-            <a:endParaRPr lang="en-US" sz="1550" dirty="0"/>
+              <a:t>Level: applied/foundational Primary track: Analytics and Modeling Track Appears in tracks: analytics-modeling</a:t>
+            </a:r>
+            <a:endParaRPr lang="en-US" sz="1320" dirty="0"/>
           </a:p>
         </p:txBody>
       </p:sp>
@@ -10438,13 +10572,16 @@
           <a:ln/>
         </p:spPr>
         <p:txBody>
-          <a:bodyPr wrap="square" lIns="254" tIns="254" rIns="254" bIns="254" rtlCol="0" anchor="t">
+          <a:bodyPr wrap="square" lIns="508" tIns="508" rIns="508" bIns="508" rtlCol="0" anchor="t">
             <a:normAutofit/>
           </a:bodyPr>
           <a:lstStyle/>
           <a:p>
-            <a:r>
-              <a:rPr lang="en-US" sz="1380" dirty="0">
+            <a:pPr indent="0" marL="0">
+              <a:buNone/>
+            </a:pPr>
+            <a:r>
+              <a:rPr lang="en-US" sz="1220" dirty="0">
                 <a:solidFill>
                   <a:srgbClr val="17364A"/>
                 </a:solidFill>
@@ -10454,11 +10591,14 @@
               </a:rPr>
               <a:t>Read the module for shared vocabulary and context.</a:t>
             </a:r>
-            <a:endParaRPr lang="en-US" sz="1380" dirty="0"/>
-          </a:p>
-          <a:p>
-            <a:r>
-              <a:rPr lang="en-US" sz="1380" dirty="0">
+            <a:endParaRPr lang="en-US" sz="1220" dirty="0"/>
+          </a:p>
+          <a:p>
+            <a:pPr indent="0" marL="0">
+              <a:buNone/>
+            </a:pPr>
+            <a:r>
+              <a:rPr lang="en-US" sz="1220" dirty="0">
                 <a:solidFill>
                   <a:srgbClr val="17364A"/>
                 </a:solidFill>
@@ -10468,11 +10608,14 @@
               </a:rPr>
               <a:t>Complete the practical exercise to apply the concept.</a:t>
             </a:r>
-            <a:endParaRPr lang="en-US" sz="1380" dirty="0"/>
-          </a:p>
-          <a:p>
-            <a:r>
-              <a:rPr lang="en-US" sz="1380" dirty="0">
+            <a:endParaRPr lang="en-US" sz="1220" dirty="0"/>
+          </a:p>
+          <a:p>
+            <a:pPr indent="0" marL="0">
+              <a:buNone/>
+            </a:pPr>
+            <a:r>
+              <a:rPr lang="en-US" sz="1220" dirty="0">
                 <a:solidFill>
                   <a:srgbClr val="17364A"/>
                 </a:solidFill>
@@ -10482,7 +10625,7 @@
               </a:rPr>
               <a:t>Use the notes and references for deeper review.</a:t>
             </a:r>
-            <a:endParaRPr lang="en-US" sz="1380" dirty="0"/>
+            <a:endParaRPr lang="en-US" sz="1220" dirty="0"/>
           </a:p>
         </p:txBody>
       </p:sp>
@@ -10783,49 +10926,58 @@
           <a:ln/>
         </p:spPr>
         <p:txBody>
-          <a:bodyPr wrap="square" lIns="635" tIns="635" rIns="635" bIns="635" rtlCol="0" anchor="t">
+          <a:bodyPr wrap="square" lIns="1016" tIns="1016" rIns="1016" bIns="1016" rtlCol="0" anchor="t">
             <a:normAutofit/>
           </a:bodyPr>
           <a:lstStyle/>
           <a:p>
+            <a:pPr indent="0" marL="0">
+              <a:buNone/>
+            </a:pPr>
             <a:r>
               <a:rPr lang="en-US" sz="2100" dirty="0">
                 <a:solidFill>
-                  <a:srgbClr val="17364A"/>
-                </a:solidFill>
-                <a:latin typeface="Aptos" pitchFamily="34" charset="0"/>
-                <a:ea typeface="Aptos" pitchFamily="34" charset="-122"/>
-                <a:cs typeface="Aptos" pitchFamily="34" charset="-120"/>
-              </a:rPr>
-              <a:t>Geospatial AI readiness worksheet</a:t>
+                  <a:srgbClr val="003A63"/>
+                </a:solidFill>
+                <a:latin typeface="Aptos" pitchFamily="34" charset="0"/>
+                <a:ea typeface="Aptos" pitchFamily="34" charset="-122"/>
+                <a:cs typeface="Aptos" pitchFamily="34" charset="-120"/>
+              </a:rPr>
+              <a:t>• Geospatial AI readiness worksheet</a:t>
             </a:r>
             <a:endParaRPr lang="en-US" sz="2100" dirty="0"/>
           </a:p>
           <a:p>
+            <a:pPr indent="0" marL="0">
+              <a:buNone/>
+            </a:pPr>
             <a:r>
               <a:rPr lang="en-US" sz="2100" dirty="0">
                 <a:solidFill>
-                  <a:srgbClr val="17364A"/>
-                </a:solidFill>
-                <a:latin typeface="Aptos" pitchFamily="34" charset="0"/>
-                <a:ea typeface="Aptos" pitchFamily="34" charset="-122"/>
-                <a:cs typeface="Aptos" pitchFamily="34" charset="-120"/>
-              </a:rPr>
-              <a:t>Map interpretation and limitations memo</a:t>
+                  <a:srgbClr val="003A63"/>
+                </a:solidFill>
+                <a:latin typeface="Aptos" pitchFamily="34" charset="0"/>
+                <a:ea typeface="Aptos" pitchFamily="34" charset="-122"/>
+                <a:cs typeface="Aptos" pitchFamily="34" charset="-120"/>
+              </a:rPr>
+              <a:t>• Map interpretation and limitations memo</a:t>
             </a:r>
             <a:endParaRPr lang="en-US" sz="2100" dirty="0"/>
           </a:p>
           <a:p>
+            <a:pPr indent="0" marL="0">
+              <a:buNone/>
+            </a:pPr>
             <a:r>
               <a:rPr lang="en-US" sz="2100" dirty="0">
                 <a:solidFill>
-                  <a:srgbClr val="17364A"/>
-                </a:solidFill>
-                <a:latin typeface="Aptos" pitchFamily="34" charset="0"/>
-                <a:ea typeface="Aptos" pitchFamily="34" charset="-122"/>
-                <a:cs typeface="Aptos" pitchFamily="34" charset="-120"/>
-              </a:rPr>
-              <a:t>Privacy and suppression review notes</a:t>
+                  <a:srgbClr val="003A63"/>
+                </a:solidFill>
+                <a:latin typeface="Aptos" pitchFamily="34" charset="0"/>
+                <a:ea typeface="Aptos" pitchFamily="34" charset="-122"/>
+                <a:cs typeface="Aptos" pitchFamily="34" charset="-120"/>
+              </a:rPr>
+              <a:t>• Privacy and suppression review notes</a:t>
             </a:r>
             <a:endParaRPr lang="en-US" sz="2100" dirty="0"/>
           </a:p>
@@ -10905,17 +11057,17 @@
         </p:nvSpPr>
         <p:spPr>
           <a:xfrm>
-            <a:off x="7799832" y="1828800"/>
-            <a:ext cx="3145536" cy="685800"/>
-          </a:xfrm>
-          <a:prstGeom prst="rect">
-            <a:avLst/>
-          </a:prstGeom>
-          <a:noFill/>
-          <a:ln/>
-        </p:spPr>
-        <p:txBody>
-          <a:bodyPr wrap="square" lIns="0" tIns="0" rIns="0" bIns="0" rtlCol="0" anchor="t">
+            <a:off x="7799832" y="1801368"/>
+            <a:ext cx="3145536" cy="758952"/>
+          </a:xfrm>
+          <a:prstGeom prst="rect">
+            <a:avLst/>
+          </a:prstGeom>
+          <a:noFill/>
+          <a:ln/>
+        </p:spPr>
+        <p:txBody>
+          <a:bodyPr wrap="square" lIns="254" tIns="254" rIns="254" bIns="254" rtlCol="0" anchor="t">
             <a:normAutofit/>
           </a:bodyPr>
           <a:lstStyle/>
@@ -10924,7 +11076,7 @@
               <a:buNone/>
             </a:pPr>
             <a:r>
-              <a:rPr lang="en-US" sz="1550" dirty="0">
+              <a:rPr lang="en-US" sz="1320" dirty="0">
                 <a:solidFill>
                   <a:srgbClr val="17364A"/>
                 </a:solidFill>
@@ -10934,7 +11086,7 @@
               </a:rPr>
               <a:t>Geospatial AI readiness worksheet</a:t>
             </a:r>
-            <a:endParaRPr lang="en-US" sz="1550" dirty="0"/>
+            <a:endParaRPr lang="en-US" sz="1320" dirty="0"/>
           </a:p>
         </p:txBody>
       </p:sp>
@@ -11022,13 +11174,16 @@
           <a:ln/>
         </p:spPr>
         <p:txBody>
-          <a:bodyPr wrap="square" lIns="254" tIns="254" rIns="254" bIns="254" rtlCol="0" anchor="t">
+          <a:bodyPr wrap="square" lIns="508" tIns="508" rIns="508" bIns="508" rtlCol="0" anchor="t">
             <a:normAutofit/>
           </a:bodyPr>
           <a:lstStyle/>
           <a:p>
-            <a:r>
-              <a:rPr lang="en-US" sz="1380" dirty="0">
+            <a:pPr indent="0" marL="0">
+              <a:buNone/>
+            </a:pPr>
+            <a:r>
+              <a:rPr lang="en-US" sz="1220" dirty="0">
                 <a:solidFill>
                   <a:srgbClr val="17364A"/>
                 </a:solidFill>
@@ -11038,11 +11193,14 @@
               </a:rPr>
               <a:t>Geospatial AI readiness worksheet</a:t>
             </a:r>
-            <a:endParaRPr lang="en-US" sz="1380" dirty="0"/>
-          </a:p>
-          <a:p>
-            <a:r>
-              <a:rPr lang="en-US" sz="1380" dirty="0">
+            <a:endParaRPr lang="en-US" sz="1220" dirty="0"/>
+          </a:p>
+          <a:p>
+            <a:pPr indent="0" marL="0">
+              <a:buNone/>
+            </a:pPr>
+            <a:r>
+              <a:rPr lang="en-US" sz="1220" dirty="0">
                 <a:solidFill>
                   <a:srgbClr val="17364A"/>
                 </a:solidFill>
@@ -11052,11 +11210,14 @@
               </a:rPr>
               <a:t>Map interpretation and limitations memo</a:t>
             </a:r>
-            <a:endParaRPr lang="en-US" sz="1380" dirty="0"/>
-          </a:p>
-          <a:p>
-            <a:r>
-              <a:rPr lang="en-US" sz="1380" dirty="0">
+            <a:endParaRPr lang="en-US" sz="1220" dirty="0"/>
+          </a:p>
+          <a:p>
+            <a:pPr indent="0" marL="0">
+              <a:buNone/>
+            </a:pPr>
+            <a:r>
+              <a:rPr lang="en-US" sz="1220" dirty="0">
                 <a:solidFill>
                   <a:srgbClr val="17364A"/>
                 </a:solidFill>
@@ -11066,7 +11227,7 @@
               </a:rPr>
               <a:t>Privacy and suppression review notes</a:t>
             </a:r>
-            <a:endParaRPr lang="en-US" sz="1380" dirty="0"/>
+            <a:endParaRPr lang="en-US" sz="1220" dirty="0"/>
           </a:p>
         </p:txBody>
       </p:sp>
@@ -11144,17 +11305,17 @@
         </p:nvSpPr>
         <p:spPr>
           <a:xfrm>
-            <a:off x="7799832" y="5001768"/>
-            <a:ext cx="3145536" cy="502920"/>
-          </a:xfrm>
-          <a:prstGeom prst="rect">
-            <a:avLst/>
-          </a:prstGeom>
-          <a:noFill/>
-          <a:ln/>
-        </p:spPr>
-        <p:txBody>
-          <a:bodyPr wrap="square" lIns="0" tIns="0" rIns="0" bIns="0" rtlCol="0" anchor="t">
+            <a:off x="7799832" y="4974336"/>
+            <a:ext cx="3145536" cy="576072"/>
+          </a:xfrm>
+          <a:prstGeom prst="rect">
+            <a:avLst/>
+          </a:prstGeom>
+          <a:noFill/>
+          <a:ln/>
+        </p:spPr>
+        <p:txBody>
+          <a:bodyPr wrap="square" lIns="254" tIns="254" rIns="254" bIns="254" rtlCol="0" anchor="t">
             <a:normAutofit/>
           </a:bodyPr>
           <a:lstStyle/>
@@ -11163,7 +11324,7 @@
               <a:buNone/>
             </a:pPr>
             <a:r>
-              <a:rPr lang="en-US" sz="1550" dirty="0">
+              <a:rPr lang="en-US" sz="1320" dirty="0">
                 <a:solidFill>
                   <a:srgbClr val="17364A"/>
                 </a:solidFill>
@@ -11171,9 +11332,9 @@
                 <a:ea typeface="Aptos" pitchFamily="34" charset="-122"/>
                 <a:cs typeface="Aptos" pitchFamily="34" charset="-120"/>
               </a:rPr>
-              <a:t>Use the assignment to test whether you can explain the concept, apply it to a realistic public health situation, and identify what would need review before the work moves forward.</a:t>
-            </a:r>
-            <a:endParaRPr lang="en-US" sz="1550" dirty="0"/>
+              <a:t>Use the assignment to test whether you can explain the concept, apply it to a realistic public health situation, and.</a:t>
+            </a:r>
+            <a:endParaRPr lang="en-US" sz="1320" dirty="0"/>
           </a:p>
         </p:txBody>
       </p:sp>
@@ -11474,49 +11635,58 @@
           <a:ln/>
         </p:spPr>
         <p:txBody>
-          <a:bodyPr wrap="square" lIns="635" tIns="635" rIns="635" bIns="635" rtlCol="0" anchor="t">
+          <a:bodyPr wrap="square" lIns="1016" tIns="1016" rIns="1016" bIns="1016" rtlCol="0" anchor="t">
             <a:normAutofit/>
           </a:bodyPr>
           <a:lstStyle/>
           <a:p>
+            <a:pPr indent="0" marL="0">
+              <a:buNone/>
+            </a:pPr>
             <a:r>
               <a:rPr lang="en-US" sz="2100" dirty="0">
                 <a:solidFill>
-                  <a:srgbClr val="17364A"/>
-                </a:solidFill>
-                <a:latin typeface="Aptos" pitchFamily="34" charset="0"/>
-                <a:ea typeface="Aptos" pitchFamily="34" charset="-122"/>
-                <a:cs typeface="Aptos" pitchFamily="34" charset="-120"/>
-              </a:rPr>
-              <a:t>1. What is geocoding?</a:t>
+                  <a:srgbClr val="003A63"/>
+                </a:solidFill>
+                <a:latin typeface="Aptos" pitchFamily="34" charset="0"/>
+                <a:ea typeface="Aptos" pitchFamily="34" charset="-122"/>
+                <a:cs typeface="Aptos" pitchFamily="34" charset="-120"/>
+              </a:rPr>
+              <a:t>• 1. What is geocoding?</a:t>
             </a:r>
             <a:endParaRPr lang="en-US" sz="2100" dirty="0"/>
           </a:p>
           <a:p>
+            <a:pPr indent="0" marL="0">
+              <a:buNone/>
+            </a:pPr>
             <a:r>
               <a:rPr lang="en-US" sz="2100" dirty="0">
                 <a:solidFill>
-                  <a:srgbClr val="17364A"/>
-                </a:solidFill>
-                <a:latin typeface="Aptos" pitchFamily="34" charset="0"/>
-                <a:ea typeface="Aptos" pitchFamily="34" charset="-122"/>
-                <a:cs typeface="Aptos" pitchFamily="34" charset="-120"/>
-              </a:rPr>
-              <a:t>2. Why can maps create misleading impressions?</a:t>
+                  <a:srgbClr val="003A63"/>
+                </a:solidFill>
+                <a:latin typeface="Aptos" pitchFamily="34" charset="0"/>
+                <a:ea typeface="Aptos" pitchFamily="34" charset="-122"/>
+                <a:cs typeface="Aptos" pitchFamily="34" charset="-120"/>
+              </a:rPr>
+              <a:t>• 2. Why can maps create misleading impressions?</a:t>
             </a:r>
             <a:endParaRPr lang="en-US" sz="2100" dirty="0"/>
           </a:p>
           <a:p>
+            <a:pPr indent="0" marL="0">
+              <a:buNone/>
+            </a:pPr>
             <a:r>
               <a:rPr lang="en-US" sz="2100" dirty="0">
                 <a:solidFill>
-                  <a:srgbClr val="17364A"/>
-                </a:solidFill>
-                <a:latin typeface="Aptos" pitchFamily="34" charset="0"/>
-                <a:ea typeface="Aptos" pitchFamily="34" charset="-122"/>
-                <a:cs typeface="Aptos" pitchFamily="34" charset="-120"/>
-              </a:rPr>
-              <a:t>3. What is the modifiable areal unit problem?</a:t>
+                  <a:srgbClr val="003A63"/>
+                </a:solidFill>
+                <a:latin typeface="Aptos" pitchFamily="34" charset="0"/>
+                <a:ea typeface="Aptos" pitchFamily="34" charset="-122"/>
+                <a:cs typeface="Aptos" pitchFamily="34" charset="-120"/>
+              </a:rPr>
+              <a:t>• 3. What is the modifiable areal unit problem?</a:t>
             </a:r>
             <a:endParaRPr lang="en-US" sz="2100" dirty="0"/>
           </a:p>
@@ -11596,17 +11766,17 @@
         </p:nvSpPr>
         <p:spPr>
           <a:xfrm>
-            <a:off x="7799832" y="1828800"/>
-            <a:ext cx="3145536" cy="685800"/>
-          </a:xfrm>
-          <a:prstGeom prst="rect">
-            <a:avLst/>
-          </a:prstGeom>
-          <a:noFill/>
-          <a:ln/>
-        </p:spPr>
-        <p:txBody>
-          <a:bodyPr wrap="square" lIns="0" tIns="0" rIns="0" bIns="0" rtlCol="0" anchor="t">
+            <a:off x="7799832" y="1801368"/>
+            <a:ext cx="3145536" cy="758952"/>
+          </a:xfrm>
+          <a:prstGeom prst="rect">
+            <a:avLst/>
+          </a:prstGeom>
+          <a:noFill/>
+          <a:ln/>
+        </p:spPr>
+        <p:txBody>
+          <a:bodyPr wrap="square" lIns="254" tIns="254" rIns="254" bIns="254" rtlCol="0" anchor="t">
             <a:normAutofit/>
           </a:bodyPr>
           <a:lstStyle/>
@@ -11615,7 +11785,7 @@
               <a:buNone/>
             </a:pPr>
             <a:r>
-              <a:rPr lang="en-US" sz="1550" dirty="0">
+              <a:rPr lang="en-US" sz="1320" dirty="0">
                 <a:solidFill>
                   <a:srgbClr val="17364A"/>
                 </a:solidFill>
@@ -11625,7 +11795,7 @@
               </a:rPr>
               <a:t>1. What is geocoding?</a:t>
             </a:r>
-            <a:endParaRPr lang="en-US" sz="1550" dirty="0"/>
+            <a:endParaRPr lang="en-US" sz="1320" dirty="0"/>
           </a:p>
         </p:txBody>
       </p:sp>
@@ -11713,13 +11883,16 @@
           <a:ln/>
         </p:spPr>
         <p:txBody>
-          <a:bodyPr wrap="square" lIns="254" tIns="254" rIns="254" bIns="254" rtlCol="0" anchor="t">
+          <a:bodyPr wrap="square" lIns="508" tIns="508" rIns="508" bIns="508" rtlCol="0" anchor="t">
             <a:normAutofit/>
           </a:bodyPr>
           <a:lstStyle/>
           <a:p>
-            <a:r>
-              <a:rPr lang="en-US" sz="1380" dirty="0">
+            <a:pPr indent="0" marL="0">
+              <a:buNone/>
+            </a:pPr>
+            <a:r>
+              <a:rPr lang="en-US" sz="1220" dirty="0">
                 <a:solidFill>
                   <a:srgbClr val="17364A"/>
                 </a:solidFill>
@@ -11729,11 +11902,14 @@
               </a:rPr>
               <a:t>1.</a:t>
             </a:r>
-            <a:endParaRPr lang="en-US" sz="1380" dirty="0"/>
-          </a:p>
-          <a:p>
-            <a:r>
-              <a:rPr lang="en-US" sz="1380" dirty="0">
+            <a:endParaRPr lang="en-US" sz="1220" dirty="0"/>
+          </a:p>
+          <a:p>
+            <a:pPr indent="0" marL="0">
+              <a:buNone/>
+            </a:pPr>
+            <a:r>
+              <a:rPr lang="en-US" sz="1220" dirty="0">
                 <a:solidFill>
                   <a:srgbClr val="17364A"/>
                 </a:solidFill>
@@ -11743,11 +11919,14 @@
               </a:rPr>
               <a:t>What is geocoding?</a:t>
             </a:r>
-            <a:endParaRPr lang="en-US" sz="1380" dirty="0"/>
-          </a:p>
-          <a:p>
-            <a:r>
-              <a:rPr lang="en-US" sz="1380" dirty="0">
+            <a:endParaRPr lang="en-US" sz="1220" dirty="0"/>
+          </a:p>
+          <a:p>
+            <a:pPr indent="0" marL="0">
+              <a:buNone/>
+            </a:pPr>
+            <a:r>
+              <a:rPr lang="en-US" sz="1220" dirty="0">
                 <a:solidFill>
                   <a:srgbClr val="17364A"/>
                 </a:solidFill>
@@ -11757,7 +11936,7 @@
               </a:rPr>
               <a:t>2.</a:t>
             </a:r>
-            <a:endParaRPr lang="en-US" sz="1380" dirty="0"/>
+            <a:endParaRPr lang="en-US" sz="1220" dirty="0"/>
           </a:p>
         </p:txBody>
       </p:sp>
@@ -11835,17 +12014,17 @@
         </p:nvSpPr>
         <p:spPr>
           <a:xfrm>
-            <a:off x="7799832" y="5001768"/>
-            <a:ext cx="3145536" cy="502920"/>
-          </a:xfrm>
-          <a:prstGeom prst="rect">
-            <a:avLst/>
-          </a:prstGeom>
-          <a:noFill/>
-          <a:ln/>
-        </p:spPr>
-        <p:txBody>
-          <a:bodyPr wrap="square" lIns="0" tIns="0" rIns="0" bIns="0" rtlCol="0" anchor="t">
+            <a:off x="7799832" y="4974336"/>
+            <a:ext cx="3145536" cy="576072"/>
+          </a:xfrm>
+          <a:prstGeom prst="rect">
+            <a:avLst/>
+          </a:prstGeom>
+          <a:noFill/>
+          <a:ln/>
+        </p:spPr>
+        <p:txBody>
+          <a:bodyPr wrap="square" lIns="254" tIns="254" rIns="254" bIns="254" rtlCol="0" anchor="t">
             <a:normAutofit/>
           </a:bodyPr>
           <a:lstStyle/>
@@ -11854,7 +12033,7 @@
               <a:buNone/>
             </a:pPr>
             <a:r>
-              <a:rPr lang="en-US" sz="1550" dirty="0">
+              <a:rPr lang="en-US" sz="1320" dirty="0">
                 <a:solidFill>
                   <a:srgbClr val="17364A"/>
                 </a:solidFill>
@@ -11862,9 +12041,9 @@
                 <a:ea typeface="Aptos" pitchFamily="34" charset="-122"/>
                 <a:cs typeface="Aptos" pitchFamily="34" charset="-120"/>
               </a:rPr>
-              <a:t>Use the assignment to test whether you can explain the concept, apply it to a realistic public health situation, and identify what would need review before the work moves forward.</a:t>
-            </a:r>
-            <a:endParaRPr lang="en-US" sz="1550" dirty="0"/>
+              <a:t>Use the assignment to test whether you can explain the concept, apply it to a realistic public health situation, and.</a:t>
+            </a:r>
+            <a:endParaRPr lang="en-US" sz="1320" dirty="0"/>
           </a:p>
         </p:txBody>
       </p:sp>
@@ -12165,49 +12344,58 @@
           <a:ln/>
         </p:spPr>
         <p:txBody>
-          <a:bodyPr wrap="square" lIns="635" tIns="635" rIns="635" bIns="635" rtlCol="0" anchor="t">
+          <a:bodyPr wrap="square" lIns="1016" tIns="1016" rIns="1016" bIns="1016" rtlCol="0" anchor="t">
             <a:normAutofit/>
           </a:bodyPr>
           <a:lstStyle/>
           <a:p>
+            <a:pPr indent="0" marL="0">
+              <a:buNone/>
+            </a:pPr>
             <a:r>
               <a:rPr lang="en-US" sz="2100" dirty="0">
                 <a:solidFill>
-                  <a:srgbClr val="17364A"/>
-                </a:solidFill>
-                <a:latin typeface="Aptos" pitchFamily="34" charset="0"/>
-                <a:ea typeface="Aptos" pitchFamily="34" charset="-122"/>
-                <a:cs typeface="Aptos" pitchFamily="34" charset="-120"/>
-              </a:rPr>
-              <a:t>CDC GIS and Public Health Resources: https://www.cdc.gov/gis/</a:t>
+                  <a:srgbClr val="003A63"/>
+                </a:solidFill>
+                <a:latin typeface="Aptos" pitchFamily="34" charset="0"/>
+                <a:ea typeface="Aptos" pitchFamily="34" charset="-122"/>
+                <a:cs typeface="Aptos" pitchFamily="34" charset="-120"/>
+              </a:rPr>
+              <a:t>• CDC GIS and Public Health Resources: https://www.cdc.gov/gis/</a:t>
             </a:r>
             <a:endParaRPr lang="en-US" sz="2100" dirty="0"/>
           </a:p>
           <a:p>
+            <a:pPr indent="0" marL="0">
+              <a:buNone/>
+            </a:pPr>
             <a:r>
               <a:rPr lang="en-US" sz="2100" dirty="0">
                 <a:solidFill>
-                  <a:srgbClr val="17364A"/>
-                </a:solidFill>
-                <a:latin typeface="Aptos" pitchFamily="34" charset="0"/>
-                <a:ea typeface="Aptos" pitchFamily="34" charset="-122"/>
-                <a:cs typeface="Aptos" pitchFamily="34" charset="-120"/>
-              </a:rPr>
-              <a:t>NIST Artificial Intelligence Risk Management Framework:.</a:t>
+                  <a:srgbClr val="003A63"/>
+                </a:solidFill>
+                <a:latin typeface="Aptos" pitchFamily="34" charset="0"/>
+                <a:ea typeface="Aptos" pitchFamily="34" charset="-122"/>
+                <a:cs typeface="Aptos" pitchFamily="34" charset="-120"/>
+              </a:rPr>
+              <a:t>• NIST Artificial Intelligence Risk Management Framework:.</a:t>
             </a:r>
             <a:endParaRPr lang="en-US" sz="2100" dirty="0"/>
           </a:p>
           <a:p>
+            <a:pPr indent="0" marL="0">
+              <a:buNone/>
+            </a:pPr>
             <a:r>
               <a:rPr lang="en-US" sz="2100" dirty="0">
                 <a:solidFill>
-                  <a:srgbClr val="17364A"/>
-                </a:solidFill>
-                <a:latin typeface="Aptos" pitchFamily="34" charset="0"/>
-                <a:ea typeface="Aptos" pitchFamily="34" charset="-122"/>
-                <a:cs typeface="Aptos" pitchFamily="34" charset="-120"/>
-              </a:rPr>
-              <a:t>NIST Privacy Framework: https://www.nist.gov/privacy-framework</a:t>
+                  <a:srgbClr val="003A63"/>
+                </a:solidFill>
+                <a:latin typeface="Aptos" pitchFamily="34" charset="0"/>
+                <a:ea typeface="Aptos" pitchFamily="34" charset="-122"/>
+                <a:cs typeface="Aptos" pitchFamily="34" charset="-120"/>
+              </a:rPr>
+              <a:t>• NIST Privacy Framework: https://www.nist.gov/privacy-framework</a:t>
             </a:r>
             <a:endParaRPr lang="en-US" sz="2100" dirty="0"/>
           </a:p>
@@ -12287,17 +12475,17 @@
         </p:nvSpPr>
         <p:spPr>
           <a:xfrm>
-            <a:off x="7799832" y="1828800"/>
-            <a:ext cx="3145536" cy="685800"/>
-          </a:xfrm>
-          <a:prstGeom prst="rect">
-            <a:avLst/>
-          </a:prstGeom>
-          <a:noFill/>
-          <a:ln/>
-        </p:spPr>
-        <p:txBody>
-          <a:bodyPr wrap="square" lIns="0" tIns="0" rIns="0" bIns="0" rtlCol="0" anchor="t">
+            <a:off x="7799832" y="1801368"/>
+            <a:ext cx="3145536" cy="758952"/>
+          </a:xfrm>
+          <a:prstGeom prst="rect">
+            <a:avLst/>
+          </a:prstGeom>
+          <a:noFill/>
+          <a:ln/>
+        </p:spPr>
+        <p:txBody>
+          <a:bodyPr wrap="square" lIns="254" tIns="254" rIns="254" bIns="254" rtlCol="0" anchor="t">
             <a:normAutofit/>
           </a:bodyPr>
           <a:lstStyle/>
@@ -12306,7 +12494,7 @@
               <a:buNone/>
             </a:pPr>
             <a:r>
-              <a:rPr lang="en-US" sz="1550" dirty="0">
+              <a:rPr lang="en-US" sz="1320" dirty="0">
                 <a:solidFill>
                   <a:srgbClr val="17364A"/>
                 </a:solidFill>
@@ -12316,7 +12504,7 @@
               </a:rPr>
               <a:t>CDC GIS and Public Health Resources: https://www.cdc.gov/gis/</a:t>
             </a:r>
-            <a:endParaRPr lang="en-US" sz="1550" dirty="0"/>
+            <a:endParaRPr lang="en-US" sz="1320" dirty="0"/>
           </a:p>
         </p:txBody>
       </p:sp>
@@ -12404,13 +12592,16 @@
           <a:ln/>
         </p:spPr>
         <p:txBody>
-          <a:bodyPr wrap="square" lIns="254" tIns="254" rIns="254" bIns="254" rtlCol="0" anchor="t">
+          <a:bodyPr wrap="square" lIns="508" tIns="508" rIns="508" bIns="508" rtlCol="0" anchor="t">
             <a:normAutofit/>
           </a:bodyPr>
           <a:lstStyle/>
           <a:p>
-            <a:r>
-              <a:rPr lang="en-US" sz="1380" dirty="0">
+            <a:pPr indent="0" marL="0">
+              <a:buNone/>
+            </a:pPr>
+            <a:r>
+              <a:rPr lang="en-US" sz="1220" dirty="0">
                 <a:solidFill>
                   <a:srgbClr val="17364A"/>
                 </a:solidFill>
@@ -12420,11 +12611,14 @@
               </a:rPr>
               <a:t>NIST Artificial Intelligence Risk Management Framework:.</a:t>
             </a:r>
-            <a:endParaRPr lang="en-US" sz="1380" dirty="0"/>
-          </a:p>
-          <a:p>
-            <a:r>
-              <a:rPr lang="en-US" sz="1380" dirty="0">
+            <a:endParaRPr lang="en-US" sz="1220" dirty="0"/>
+          </a:p>
+          <a:p>
+            <a:pPr indent="0" marL="0">
+              <a:buNone/>
+            </a:pPr>
+            <a:r>
+              <a:rPr lang="en-US" sz="1220" dirty="0">
                 <a:solidFill>
                   <a:srgbClr val="17364A"/>
                 </a:solidFill>
@@ -12434,7 +12628,7 @@
               </a:rPr>
               <a:t>CDC Public Health Data Strategy:.</a:t>
             </a:r>
-            <a:endParaRPr lang="en-US" sz="1380" dirty="0"/>
+            <a:endParaRPr lang="en-US" sz="1220" dirty="0"/>
           </a:p>
         </p:txBody>
       </p:sp>
@@ -12512,17 +12706,17 @@
         </p:nvSpPr>
         <p:spPr>
           <a:xfrm>
-            <a:off x="7799832" y="5001768"/>
-            <a:ext cx="3145536" cy="502920"/>
-          </a:xfrm>
-          <a:prstGeom prst="rect">
-            <a:avLst/>
-          </a:prstGeom>
-          <a:noFill/>
-          <a:ln/>
-        </p:spPr>
-        <p:txBody>
-          <a:bodyPr wrap="square" lIns="0" tIns="0" rIns="0" bIns="0" rtlCol="0" anchor="t">
+            <a:off x="7799832" y="4974336"/>
+            <a:ext cx="3145536" cy="576072"/>
+          </a:xfrm>
+          <a:prstGeom prst="rect">
+            <a:avLst/>
+          </a:prstGeom>
+          <a:noFill/>
+          <a:ln/>
+        </p:spPr>
+        <p:txBody>
+          <a:bodyPr wrap="square" lIns="254" tIns="254" rIns="254" bIns="254" rtlCol="0" anchor="t">
             <a:normAutofit/>
           </a:bodyPr>
           <a:lstStyle/>
@@ -12531,7 +12725,7 @@
               <a:buNone/>
             </a:pPr>
             <a:r>
-              <a:rPr lang="en-US" sz="1550" dirty="0">
+              <a:rPr lang="en-US" sz="1320" dirty="0">
                 <a:solidFill>
                   <a:srgbClr val="17364A"/>
                 </a:solidFill>
@@ -12539,9 +12733,9 @@
                 <a:ea typeface="Aptos" pitchFamily="34" charset="-122"/>
                 <a:cs typeface="Aptos" pitchFamily="34" charset="-120"/>
               </a:rPr>
-              <a:t>Connect the concept to public health purpose, responsible use, required safeguards, documentation, and the next action a department should take.</a:t>
-            </a:r>
-            <a:endParaRPr lang="en-US" sz="1550" dirty="0"/>
+              <a:t>Connect the concept to public health purpose, responsible use, required safeguards, documentation, and the next action a.</a:t>
+            </a:r>
+            <a:endParaRPr lang="en-US" sz="1320" dirty="0"/>
           </a:p>
         </p:txBody>
       </p:sp>
@@ -12842,63 +13036,75 @@
           <a:ln/>
         </p:spPr>
         <p:txBody>
-          <a:bodyPr wrap="square" lIns="635" tIns="635" rIns="635" bIns="635" rtlCol="0" anchor="t">
+          <a:bodyPr wrap="square" lIns="1016" tIns="1016" rIns="1016" bIns="1016" rtlCol="0" anchor="t">
             <a:normAutofit/>
           </a:bodyPr>
           <a:lstStyle/>
           <a:p>
+            <a:pPr indent="0" marL="0">
+              <a:buNone/>
+            </a:pPr>
             <a:r>
               <a:rPr lang="en-US" sz="1900" dirty="0">
                 <a:solidFill>
-                  <a:srgbClr val="17364A"/>
-                </a:solidFill>
-                <a:latin typeface="Aptos" pitchFamily="34" charset="0"/>
-                <a:ea typeface="Aptos" pitchFamily="34" charset="-122"/>
-                <a:cs typeface="Aptos" pitchFamily="34" charset="-120"/>
-              </a:rPr>
-              <a:t>Play 11: Build and Deploy AI Solutions - This lesson informs Play 11 by helping learners connect the lesson.</a:t>
+                  <a:srgbClr val="003A63"/>
+                </a:solidFill>
+                <a:latin typeface="Aptos" pitchFamily="34" charset="0"/>
+                <a:ea typeface="Aptos" pitchFamily="34" charset="-122"/>
+                <a:cs typeface="Aptos" pitchFamily="34" charset="-120"/>
+              </a:rPr>
+              <a:t>• Play 11: Build and Deploy AI Solutions - This lesson informs Play 11 by helping learners.</a:t>
             </a:r>
             <a:endParaRPr lang="en-US" sz="1900" dirty="0"/>
           </a:p>
           <a:p>
+            <a:pPr indent="0" marL="0">
+              <a:buNone/>
+            </a:pPr>
             <a:r>
               <a:rPr lang="en-US" sz="1900" dirty="0">
                 <a:solidFill>
-                  <a:srgbClr val="17364A"/>
-                </a:solidFill>
-                <a:latin typeface="Aptos" pitchFamily="34" charset="0"/>
-                <a:ea typeface="Aptos" pitchFamily="34" charset="-122"/>
-                <a:cs typeface="Aptos" pitchFamily="34" charset="-120"/>
-              </a:rPr>
-              <a:t>Play 2: Readiness Assessment - This lesson informs Play 2 by helping learners connect the lesson topic to.</a:t>
+                  <a:srgbClr val="003A63"/>
+                </a:solidFill>
+                <a:latin typeface="Aptos" pitchFamily="34" charset="0"/>
+                <a:ea typeface="Aptos" pitchFamily="34" charset="-122"/>
+                <a:cs typeface="Aptos" pitchFamily="34" charset="-120"/>
+              </a:rPr>
+              <a:t>• Play 2: Readiness Assessment - This lesson informs Play 2 by helping learners connect the.</a:t>
             </a:r>
             <a:endParaRPr lang="en-US" sz="1900" dirty="0"/>
           </a:p>
           <a:p>
+            <a:pPr indent="0" marL="0">
+              <a:buNone/>
+            </a:pPr>
             <a:r>
               <a:rPr lang="en-US" sz="1900" dirty="0">
                 <a:solidFill>
-                  <a:srgbClr val="17364A"/>
-                </a:solidFill>
-                <a:latin typeface="Aptos" pitchFamily="34" charset="0"/>
-                <a:ea typeface="Aptos" pitchFamily="34" charset="-122"/>
-                <a:cs typeface="Aptos" pitchFamily="34" charset="-120"/>
-              </a:rPr>
-              <a:t>Play 1: Vision &amp; Guardrails - This lesson informs Play 1 by helping learners connect the lesson topic to.</a:t>
+                  <a:srgbClr val="003A63"/>
+                </a:solidFill>
+                <a:latin typeface="Aptos" pitchFamily="34" charset="0"/>
+                <a:ea typeface="Aptos" pitchFamily="34" charset="-122"/>
+                <a:cs typeface="Aptos" pitchFamily="34" charset="-120"/>
+              </a:rPr>
+              <a:t>• Play 1: Vision &amp; Guardrails - This lesson informs Play 1 by helping learners connect the.</a:t>
             </a:r>
             <a:endParaRPr lang="en-US" sz="1900" dirty="0"/>
           </a:p>
           <a:p>
+            <a:pPr indent="0" marL="0">
+              <a:buNone/>
+            </a:pPr>
             <a:r>
               <a:rPr lang="en-US" sz="1900" dirty="0">
                 <a:solidFill>
-                  <a:srgbClr val="17364A"/>
-                </a:solidFill>
-                <a:latin typeface="Aptos" pitchFamily="34" charset="0"/>
-                <a:ea typeface="Aptos" pitchFamily="34" charset="-122"/>
-                <a:cs typeface="Aptos" pitchFamily="34" charset="-120"/>
-              </a:rPr>
-              <a:t>Play 7: Prioritize Use Cases - This lesson informs Play 7 by helping learners connect the lesson topic to.</a:t>
+                  <a:srgbClr val="003A63"/>
+                </a:solidFill>
+                <a:latin typeface="Aptos" pitchFamily="34" charset="0"/>
+                <a:ea typeface="Aptos" pitchFamily="34" charset="-122"/>
+                <a:cs typeface="Aptos" pitchFamily="34" charset="-120"/>
+              </a:rPr>
+              <a:t>• Play 7: Prioritize Use Cases - This lesson informs Play 7 by helping learners connect the.</a:t>
             </a:r>
             <a:endParaRPr lang="en-US" sz="1900" dirty="0"/>
           </a:p>
@@ -12978,17 +13184,17 @@
         </p:nvSpPr>
         <p:spPr>
           <a:xfrm>
-            <a:off x="8211312" y="1920240"/>
-            <a:ext cx="2734056" cy="1463040"/>
-          </a:xfrm>
-          <a:prstGeom prst="rect">
-            <a:avLst/>
-          </a:prstGeom>
-          <a:noFill/>
-          <a:ln/>
-        </p:spPr>
-        <p:txBody>
-          <a:bodyPr wrap="square" lIns="0" tIns="0" rIns="0" bIns="0" rtlCol="0" anchor="t">
+            <a:off x="8211312" y="1892808"/>
+            <a:ext cx="2734056" cy="1536192"/>
+          </a:xfrm>
+          <a:prstGeom prst="rect">
+            <a:avLst/>
+          </a:prstGeom>
+          <a:noFill/>
+          <a:ln/>
+        </p:spPr>
+        <p:txBody>
+          <a:bodyPr wrap="square" lIns="254" tIns="254" rIns="254" bIns="254" rtlCol="0" anchor="t">
             <a:normAutofit/>
           </a:bodyPr>
           <a:lstStyle/>
@@ -12997,7 +13203,7 @@
               <a:buNone/>
             </a:pPr>
             <a:r>
-              <a:rPr lang="en-US" sz="1550" dirty="0">
+              <a:rPr lang="en-US" sz="1320" dirty="0">
                 <a:solidFill>
                   <a:srgbClr val="17364A"/>
                 </a:solidFill>
@@ -13005,9 +13211,9 @@
                 <a:ea typeface="Aptos" pitchFamily="34" charset="-122"/>
                 <a:cs typeface="Aptos" pitchFamily="34" charset="-120"/>
               </a:rPr>
-              <a:t>Use the related plays to identify decisions, participants, timing, approvals, and documentation needed for responsible implementation.</a:t>
-            </a:r>
-            <a:endParaRPr lang="en-US" sz="1550" dirty="0"/>
+              <a:t>Use the related plays to identify decisions, participants, timing, approvals, and documentation needed for responsible.</a:t>
+            </a:r>
+            <a:endParaRPr lang="en-US" sz="1320" dirty="0"/>
           </a:p>
         </p:txBody>
       </p:sp>
@@ -13095,13 +13301,16 @@
           <a:ln/>
         </p:spPr>
         <p:txBody>
-          <a:bodyPr wrap="square" lIns="254" tIns="254" rIns="254" bIns="254" rtlCol="0" anchor="t">
+          <a:bodyPr wrap="square" lIns="508" tIns="508" rIns="508" bIns="508" rtlCol="0" anchor="t">
             <a:normAutofit/>
           </a:bodyPr>
           <a:lstStyle/>
           <a:p>
-            <a:r>
-              <a:rPr lang="en-US" sz="1380" dirty="0">
+            <a:pPr indent="0" marL="0">
+              <a:buNone/>
+            </a:pPr>
+            <a:r>
+              <a:rPr lang="en-US" sz="1220" dirty="0">
                 <a:solidFill>
                   <a:srgbClr val="17364A"/>
                 </a:solidFill>
@@ -13111,11 +13320,14 @@
               </a:rPr>
               <a:t>Locate the decision point in the playbook sequence.</a:t>
             </a:r>
-            <a:endParaRPr lang="en-US" sz="1380" dirty="0"/>
-          </a:p>
-          <a:p>
-            <a:r>
-              <a:rPr lang="en-US" sz="1380" dirty="0">
+            <a:endParaRPr lang="en-US" sz="1220" dirty="0"/>
+          </a:p>
+          <a:p>
+            <a:pPr indent="0" marL="0">
+              <a:buNone/>
+            </a:pPr>
+            <a:r>
+              <a:rPr lang="en-US" sz="1220" dirty="0">
                 <a:solidFill>
                   <a:srgbClr val="17364A"/>
                 </a:solidFill>
@@ -13125,11 +13337,14 @@
               </a:rPr>
               <a:t>Identify who should participate in the work.</a:t>
             </a:r>
-            <a:endParaRPr lang="en-US" sz="1380" dirty="0"/>
-          </a:p>
-          <a:p>
-            <a:r>
-              <a:rPr lang="en-US" sz="1380" dirty="0">
+            <a:endParaRPr lang="en-US" sz="1220" dirty="0"/>
+          </a:p>
+          <a:p>
+            <a:pPr indent="0" marL="0">
+              <a:buNone/>
+            </a:pPr>
+            <a:r>
+              <a:rPr lang="en-US" sz="1220" dirty="0">
                 <a:solidFill>
                   <a:srgbClr val="17364A"/>
                 </a:solidFill>
@@ -13139,7 +13354,7 @@
               </a:rPr>
               <a:t>Document the review, approval, or implementation step.</a:t>
             </a:r>
-            <a:endParaRPr lang="en-US" sz="1380" dirty="0"/>
+            <a:endParaRPr lang="en-US" sz="1220" dirty="0"/>
           </a:p>
         </p:txBody>
       </p:sp>
@@ -13440,63 +13655,75 @@
           <a:ln/>
         </p:spPr>
         <p:txBody>
-          <a:bodyPr wrap="square" lIns="635" tIns="635" rIns="635" bIns="635" rtlCol="0" anchor="t">
+          <a:bodyPr wrap="square" lIns="1016" tIns="1016" rIns="1016" bIns="1016" rtlCol="0" anchor="t">
             <a:normAutofit/>
           </a:bodyPr>
           <a:lstStyle/>
           <a:p>
+            <a:pPr indent="0" marL="0">
+              <a:buNone/>
+            </a:pPr>
             <a:r>
               <a:rPr lang="en-US" sz="1850" dirty="0">
                 <a:solidFill>
-                  <a:srgbClr val="17364A"/>
-                </a:solidFill>
-                <a:latin typeface="Aptos" pitchFamily="34" charset="0"/>
-                <a:ea typeface="Aptos" pitchFamily="34" charset="-122"/>
-                <a:cs typeface="Aptos" pitchFamily="34" charset="-120"/>
-              </a:rPr>
-              <a:t>Tool 3: Equity Impact Assessment Checklist (Checklist) - Use this tool to complete or strengthen the.</a:t>
+                  <a:srgbClr val="003A63"/>
+                </a:solidFill>
+                <a:latin typeface="Aptos" pitchFamily="34" charset="0"/>
+                <a:ea typeface="Aptos" pitchFamily="34" charset="-122"/>
+                <a:cs typeface="Aptos" pitchFamily="34" charset="-120"/>
+              </a:rPr>
+              <a:t>• Tool 3: Equity Impact Assessment Checklist (Checklist) - Use this tool to complete or.</a:t>
             </a:r>
             <a:endParaRPr lang="en-US" sz="1850" dirty="0"/>
           </a:p>
           <a:p>
+            <a:pPr indent="0" marL="0">
+              <a:buNone/>
+            </a:pPr>
             <a:r>
               <a:rPr lang="en-US" sz="1850" dirty="0">
                 <a:solidFill>
-                  <a:srgbClr val="17364A"/>
-                </a:solidFill>
-                <a:latin typeface="Aptos" pitchFamily="34" charset="0"/>
-                <a:ea typeface="Aptos" pitchFamily="34" charset="-122"/>
-                <a:cs typeface="Aptos" pitchFamily="34" charset="-120"/>
-              </a:rPr>
-              <a:t>Tool 4: AI Policy Landscape Scan (Worksheet) - Use AI Policy Landscape Scan to translate this lesson into a.</a:t>
+                  <a:srgbClr val="003A63"/>
+                </a:solidFill>
+                <a:latin typeface="Aptos" pitchFamily="34" charset="0"/>
+                <a:ea typeface="Aptos" pitchFamily="34" charset="-122"/>
+                <a:cs typeface="Aptos" pitchFamily="34" charset="-120"/>
+              </a:rPr>
+              <a:t>• Tool 4: AI Policy Landscape Scan (Worksheet) - Use AI Policy Landscape Scan to translate this.</a:t>
             </a:r>
             <a:endParaRPr lang="en-US" sz="1850" dirty="0"/>
           </a:p>
           <a:p>
+            <a:pPr indent="0" marL="0">
+              <a:buNone/>
+            </a:pPr>
             <a:r>
               <a:rPr lang="en-US" sz="1850" dirty="0">
                 <a:solidFill>
-                  <a:srgbClr val="17364A"/>
-                </a:solidFill>
-                <a:latin typeface="Aptos" pitchFamily="34" charset="0"/>
-                <a:ea typeface="Aptos" pitchFamily="34" charset="-122"/>
-                <a:cs typeface="Aptos" pitchFamily="34" charset="-120"/>
-              </a:rPr>
-              <a:t>Tool 5: AI Environmental and Resource Impact Review (Checklist) - Use AI Environmental and Resource Impact.</a:t>
+                  <a:srgbClr val="003A63"/>
+                </a:solidFill>
+                <a:latin typeface="Aptos" pitchFamily="34" charset="0"/>
+                <a:ea typeface="Aptos" pitchFamily="34" charset="-122"/>
+                <a:cs typeface="Aptos" pitchFamily="34" charset="-120"/>
+              </a:rPr>
+              <a:t>• Tool 5: AI Environmental and Resource Impact Review (Checklist) - Use AI Environmental and.</a:t>
             </a:r>
             <a:endParaRPr lang="en-US" sz="1850" dirty="0"/>
           </a:p>
           <a:p>
+            <a:pPr indent="0" marL="0">
+              <a:buNone/>
+            </a:pPr>
             <a:r>
               <a:rPr lang="en-US" sz="1850" dirty="0">
                 <a:solidFill>
-                  <a:srgbClr val="17364A"/>
-                </a:solidFill>
-                <a:latin typeface="Aptos" pitchFamily="34" charset="0"/>
-                <a:ea typeface="Aptos" pitchFamily="34" charset="-122"/>
-                <a:cs typeface="Aptos" pitchFamily="34" charset="-120"/>
-              </a:rPr>
-              <a:t>Tool 6: Human-Centered AI Decision Rule Checklist (Checklist) - Use Human-Centered AI Decision Rule.</a:t>
+                  <a:srgbClr val="003A63"/>
+                </a:solidFill>
+                <a:latin typeface="Aptos" pitchFamily="34" charset="0"/>
+                <a:ea typeface="Aptos" pitchFamily="34" charset="-122"/>
+                <a:cs typeface="Aptos" pitchFamily="34" charset="-120"/>
+              </a:rPr>
+              <a:t>• Tool 6: Human-Centered AI Decision Rule Checklist (Checklist) - Use Human-Centered AI Decision.</a:t>
             </a:r>
             <a:endParaRPr lang="en-US" sz="1850" dirty="0"/>
           </a:p>
@@ -13576,17 +13803,17 @@
         </p:nvSpPr>
         <p:spPr>
           <a:xfrm>
-            <a:off x="8211312" y="1920240"/>
-            <a:ext cx="2734056" cy="1463040"/>
-          </a:xfrm>
-          <a:prstGeom prst="rect">
-            <a:avLst/>
-          </a:prstGeom>
-          <a:noFill/>
-          <a:ln/>
-        </p:spPr>
-        <p:txBody>
-          <a:bodyPr wrap="square" lIns="0" tIns="0" rIns="0" bIns="0" rtlCol="0" anchor="t">
+            <a:off x="8211312" y="1892808"/>
+            <a:ext cx="2734056" cy="1536192"/>
+          </a:xfrm>
+          <a:prstGeom prst="rect">
+            <a:avLst/>
+          </a:prstGeom>
+          <a:noFill/>
+          <a:ln/>
+        </p:spPr>
+        <p:txBody>
+          <a:bodyPr wrap="square" lIns="254" tIns="254" rIns="254" bIns="254" rtlCol="0" anchor="t">
             <a:normAutofit/>
           </a:bodyPr>
           <a:lstStyle/>
@@ -13595,7 +13822,7 @@
               <a:buNone/>
             </a:pPr>
             <a:r>
-              <a:rPr lang="en-US" sz="1550" dirty="0">
+              <a:rPr lang="en-US" sz="1320" dirty="0">
                 <a:solidFill>
                   <a:srgbClr val="17364A"/>
                 </a:solidFill>
@@ -13603,9 +13830,9 @@
                 <a:ea typeface="Aptos" pitchFamily="34" charset="-122"/>
                 <a:cs typeface="Aptos" pitchFamily="34" charset="-120"/>
               </a:rPr>
-              <a:t>Use linked tools when your department needs a structured worksheet, template, checklist, review process, or documentation artifact.</a:t>
-            </a:r>
-            <a:endParaRPr lang="en-US" sz="1550" dirty="0"/>
+              <a:t>Use linked tools when your department needs a structured worksheet, template, checklist, review process, or.</a:t>
+            </a:r>
+            <a:endParaRPr lang="en-US" sz="1320" dirty="0"/>
           </a:p>
         </p:txBody>
       </p:sp>
@@ -13693,13 +13920,16 @@
           <a:ln/>
         </p:spPr>
         <p:txBody>
-          <a:bodyPr wrap="square" lIns="254" tIns="254" rIns="254" bIns="254" rtlCol="0" anchor="t">
+          <a:bodyPr wrap="square" lIns="508" tIns="508" rIns="508" bIns="508" rtlCol="0" anchor="t">
             <a:normAutofit/>
           </a:bodyPr>
           <a:lstStyle/>
           <a:p>
-            <a:r>
-              <a:rPr lang="en-US" sz="1380" dirty="0">
+            <a:pPr indent="0" marL="0">
+              <a:buNone/>
+            </a:pPr>
+            <a:r>
+              <a:rPr lang="en-US" sz="1220" dirty="0">
                 <a:solidFill>
                   <a:srgbClr val="17364A"/>
                 </a:solidFill>
@@ -13709,11 +13939,14 @@
               </a:rPr>
               <a:t>Use a tool when no comparable local process exists.</a:t>
             </a:r>
-            <a:endParaRPr lang="en-US" sz="1380" dirty="0"/>
-          </a:p>
-          <a:p>
-            <a:r>
-              <a:rPr lang="en-US" sz="1380" dirty="0">
+            <a:endParaRPr lang="en-US" sz="1220" dirty="0"/>
+          </a:p>
+          <a:p>
+            <a:pPr indent="0" marL="0">
+              <a:buNone/>
+            </a:pPr>
+            <a:r>
+              <a:rPr lang="en-US" sz="1220" dirty="0">
                 <a:solidFill>
                   <a:srgbClr val="17364A"/>
                 </a:solidFill>
@@ -13721,13 +13954,16 @@
                 <a:ea typeface="Aptos" pitchFamily="34" charset="-122"/>
                 <a:cs typeface="Aptos" pitchFamily="34" charset="-120"/>
               </a:rPr>
-              <a:t>Adapt existing department templates when they already fit the purpose.</a:t>
-            </a:r>
-            <a:endParaRPr lang="en-US" sz="1380" dirty="0"/>
-          </a:p>
-          <a:p>
-            <a:r>
-              <a:rPr lang="en-US" sz="1380" dirty="0">
+              <a:t>Adapt existing department templates when they already fit the.</a:t>
+            </a:r>
+            <a:endParaRPr lang="en-US" sz="1220" dirty="0"/>
+          </a:p>
+          <a:p>
+            <a:pPr indent="0" marL="0">
+              <a:buNone/>
+            </a:pPr>
+            <a:r>
+              <a:rPr lang="en-US" sz="1220" dirty="0">
                 <a:solidFill>
                   <a:srgbClr val="17364A"/>
                 </a:solidFill>
@@ -13737,7 +13973,7 @@
               </a:rPr>
               <a:t>Save the completed artifact as evidence of the decision.</a:t>
             </a:r>
-            <a:endParaRPr lang="en-US" sz="1380" dirty="0"/>
+            <a:endParaRPr lang="en-US" sz="1220" dirty="0"/>
           </a:p>
         </p:txBody>
       </p:sp>
@@ -14038,49 +14274,58 @@
           <a:ln/>
         </p:spPr>
         <p:txBody>
-          <a:bodyPr wrap="square" lIns="635" tIns="635" rIns="635" bIns="635" rtlCol="0" anchor="t">
+          <a:bodyPr wrap="square" lIns="1016" tIns="1016" rIns="1016" bIns="1016" rtlCol="0" anchor="t">
             <a:normAutofit/>
           </a:bodyPr>
           <a:lstStyle/>
           <a:p>
+            <a:pPr indent="0" marL="0">
+              <a:buNone/>
+            </a:pPr>
             <a:r>
               <a:rPr lang="en-US" sz="2100" dirty="0">
                 <a:solidFill>
-                  <a:srgbClr val="17364A"/>
-                </a:solidFill>
-                <a:latin typeface="Aptos" pitchFamily="34" charset="0"/>
-                <a:ea typeface="Aptos" pitchFamily="34" charset="-122"/>
-                <a:cs typeface="Aptos" pitchFamily="34" charset="-120"/>
-              </a:rPr>
-              <a:t>Define geospatial AI and spatial epidemiology in public health terms.</a:t>
+                  <a:srgbClr val="003A63"/>
+                </a:solidFill>
+                <a:latin typeface="Aptos" pitchFamily="34" charset="0"/>
+                <a:ea typeface="Aptos" pitchFamily="34" charset="-122"/>
+                <a:cs typeface="Aptos" pitchFamily="34" charset="-120"/>
+              </a:rPr>
+              <a:t>• Define geospatial AI and spatial epidemiology in public health terms.</a:t>
             </a:r>
             <a:endParaRPr lang="en-US" sz="2100" dirty="0"/>
           </a:p>
           <a:p>
+            <a:pPr indent="0" marL="0">
+              <a:buNone/>
+            </a:pPr>
             <a:r>
               <a:rPr lang="en-US" sz="2100" dirty="0">
                 <a:solidFill>
-                  <a:srgbClr val="17364A"/>
-                </a:solidFill>
-                <a:latin typeface="Aptos" pitchFamily="34" charset="0"/>
-                <a:ea typeface="Aptos" pitchFamily="34" charset="-122"/>
-                <a:cs typeface="Aptos" pitchFamily="34" charset="-120"/>
-              </a:rPr>
-              <a:t>Explain how geocoding, aggregation, spatial scale, and data quality affect AI-supported maps and.</a:t>
+                  <a:srgbClr val="003A63"/>
+                </a:solidFill>
+                <a:latin typeface="Aptos" pitchFamily="34" charset="0"/>
+                <a:ea typeface="Aptos" pitchFamily="34" charset="-122"/>
+                <a:cs typeface="Aptos" pitchFamily="34" charset="-120"/>
+              </a:rPr>
+              <a:t>• Explain how geocoding, aggregation, spatial scale, and data quality affect AI-supported maps.</a:t>
             </a:r>
             <a:endParaRPr lang="en-US" sz="2100" dirty="0"/>
           </a:p>
           <a:p>
+            <a:pPr indent="0" marL="0">
+              <a:buNone/>
+            </a:pPr>
             <a:r>
               <a:rPr lang="en-US" sz="2100" dirty="0">
                 <a:solidFill>
-                  <a:srgbClr val="17364A"/>
-                </a:solidFill>
-                <a:latin typeface="Aptos" pitchFamily="34" charset="0"/>
-                <a:ea typeface="Aptos" pitchFamily="34" charset="-122"/>
-                <a:cs typeface="Aptos" pitchFamily="34" charset="-120"/>
-              </a:rPr>
-              <a:t>Identify privacy and re-identification risks related to location data.</a:t>
+                  <a:srgbClr val="003A63"/>
+                </a:solidFill>
+                <a:latin typeface="Aptos" pitchFamily="34" charset="0"/>
+                <a:ea typeface="Aptos" pitchFamily="34" charset="-122"/>
+                <a:cs typeface="Aptos" pitchFamily="34" charset="-120"/>
+              </a:rPr>
+              <a:t>• Identify privacy and re-identification risks related to location data.</a:t>
             </a:r>
             <a:endParaRPr lang="en-US" sz="2100" dirty="0"/>
           </a:p>
@@ -14160,17 +14405,17 @@
         </p:nvSpPr>
         <p:spPr>
           <a:xfrm>
-            <a:off x="7799832" y="1828800"/>
-            <a:ext cx="3145536" cy="685800"/>
-          </a:xfrm>
-          <a:prstGeom prst="rect">
-            <a:avLst/>
-          </a:prstGeom>
-          <a:noFill/>
-          <a:ln/>
-        </p:spPr>
-        <p:txBody>
-          <a:bodyPr wrap="square" lIns="0" tIns="0" rIns="0" bIns="0" rtlCol="0" anchor="t">
+            <a:off x="7799832" y="1801368"/>
+            <a:ext cx="3145536" cy="758952"/>
+          </a:xfrm>
+          <a:prstGeom prst="rect">
+            <a:avLst/>
+          </a:prstGeom>
+          <a:noFill/>
+          <a:ln/>
+        </p:spPr>
+        <p:txBody>
+          <a:bodyPr wrap="square" lIns="254" tIns="254" rIns="254" bIns="254" rtlCol="0" anchor="t">
             <a:normAutofit/>
           </a:bodyPr>
           <a:lstStyle/>
@@ -14179,7 +14424,7 @@
               <a:buNone/>
             </a:pPr>
             <a:r>
-              <a:rPr lang="en-US" sz="1550" dirty="0">
+              <a:rPr lang="en-US" sz="1320" dirty="0">
                 <a:solidFill>
                   <a:srgbClr val="17364A"/>
                 </a:solidFill>
@@ -14189,7 +14434,7 @@
               </a:rPr>
               <a:t>Define geospatial AI and spatial epidemiology in public health terms.</a:t>
             </a:r>
-            <a:endParaRPr lang="en-US" sz="1550" dirty="0"/>
+            <a:endParaRPr lang="en-US" sz="1320" dirty="0"/>
           </a:p>
         </p:txBody>
       </p:sp>
@@ -14277,13 +14522,16 @@
           <a:ln/>
         </p:spPr>
         <p:txBody>
-          <a:bodyPr wrap="square" lIns="254" tIns="254" rIns="254" bIns="254" rtlCol="0" anchor="t">
+          <a:bodyPr wrap="square" lIns="508" tIns="508" rIns="508" bIns="508" rtlCol="0" anchor="t">
             <a:normAutofit/>
           </a:bodyPr>
           <a:lstStyle/>
           <a:p>
-            <a:r>
-              <a:rPr lang="en-US" sz="1380" dirty="0">
+            <a:pPr indent="0" marL="0">
+              <a:buNone/>
+            </a:pPr>
+            <a:r>
+              <a:rPr lang="en-US" sz="1220" dirty="0">
                 <a:solidFill>
                   <a:srgbClr val="17364A"/>
                 </a:solidFill>
@@ -14291,13 +14539,16 @@
                 <a:ea typeface="Aptos" pitchFamily="34" charset="-122"/>
                 <a:cs typeface="Aptos" pitchFamily="34" charset="-120"/>
               </a:rPr>
-              <a:t>Explain how geocoding, aggregation, spatial scale, and data quality affect AI-supported.</a:t>
-            </a:r>
-            <a:endParaRPr lang="en-US" sz="1380" dirty="0"/>
-          </a:p>
-          <a:p>
-            <a:r>
-              <a:rPr lang="en-US" sz="1380" dirty="0">
+              <a:t>Explain how geocoding, aggregation, spatial scale, and data.</a:t>
+            </a:r>
+            <a:endParaRPr lang="en-US" sz="1220" dirty="0"/>
+          </a:p>
+          <a:p>
+            <a:pPr indent="0" marL="0">
+              <a:buNone/>
+            </a:pPr>
+            <a:r>
+              <a:rPr lang="en-US" sz="1220" dirty="0">
                 <a:solidFill>
                   <a:srgbClr val="17364A"/>
                 </a:solidFill>
@@ -14305,13 +14556,16 @@
                 <a:ea typeface="Aptos" pitchFamily="34" charset="-122"/>
                 <a:cs typeface="Aptos" pitchFamily="34" charset="-120"/>
               </a:rPr>
-              <a:t>Recognize spatial bias, modifiable areal unit problems, and ecological interpretation risks.</a:t>
-            </a:r>
-            <a:endParaRPr lang="en-US" sz="1380" dirty="0"/>
-          </a:p>
-          <a:p>
-            <a:r>
-              <a:rPr lang="en-US" sz="1380" dirty="0">
+              <a:t>Recognize spatial bias, modifiable areal unit problems, and.</a:t>
+            </a:r>
+            <a:endParaRPr lang="en-US" sz="1220" dirty="0"/>
+          </a:p>
+          <a:p>
+            <a:pPr indent="0" marL="0">
+              <a:buNone/>
+            </a:pPr>
+            <a:r>
+              <a:rPr lang="en-US" sz="1220" dirty="0">
                 <a:solidFill>
                   <a:srgbClr val="17364A"/>
                 </a:solidFill>
@@ -14319,9 +14573,9 @@
                 <a:ea typeface="Aptos" pitchFamily="34" charset="-122"/>
                 <a:cs typeface="Aptos" pitchFamily="34" charset="-120"/>
               </a:rPr>
-              <a:t>Design guardrails for AI-supported spatial analysis, hotspot detection, service planning,.</a:t>
-            </a:r>
-            <a:endParaRPr lang="en-US" sz="1380" dirty="0"/>
+              <a:t>Design guardrails for AI-supported spatial analysis, hotspot.</a:t>
+            </a:r>
+            <a:endParaRPr lang="en-US" sz="1220" dirty="0"/>
           </a:p>
         </p:txBody>
       </p:sp>
@@ -14399,17 +14653,17 @@
         </p:nvSpPr>
         <p:spPr>
           <a:xfrm>
-            <a:off x="7799832" y="5001768"/>
-            <a:ext cx="3145536" cy="502920"/>
-          </a:xfrm>
-          <a:prstGeom prst="rect">
-            <a:avLst/>
-          </a:prstGeom>
-          <a:noFill/>
-          <a:ln/>
-        </p:spPr>
-        <p:txBody>
-          <a:bodyPr wrap="square" lIns="0" tIns="0" rIns="0" bIns="0" rtlCol="0" anchor="t">
+            <a:off x="7799832" y="4974336"/>
+            <a:ext cx="3145536" cy="576072"/>
+          </a:xfrm>
+          <a:prstGeom prst="rect">
+            <a:avLst/>
+          </a:prstGeom>
+          <a:noFill/>
+          <a:ln/>
+        </p:spPr>
+        <p:txBody>
+          <a:bodyPr wrap="square" lIns="254" tIns="254" rIns="254" bIns="254" rtlCol="0" anchor="t">
             <a:normAutofit/>
           </a:bodyPr>
           <a:lstStyle/>
@@ -14418,7 +14672,7 @@
               <a:buNone/>
             </a:pPr>
             <a:r>
-              <a:rPr lang="en-US" sz="1550" dirty="0">
+              <a:rPr lang="en-US" sz="1320" dirty="0">
                 <a:solidFill>
                   <a:srgbClr val="17364A"/>
                 </a:solidFill>
@@ -14426,9 +14680,9 @@
                 <a:ea typeface="Aptos" pitchFamily="34" charset="-122"/>
                 <a:cs typeface="Aptos" pitchFamily="34" charset="-120"/>
               </a:rPr>
-              <a:t>Use the assignment to test whether you can explain the concept, apply it to a realistic public health situation, and identify what would need review before the work moves forward.</a:t>
-            </a:r>
-            <a:endParaRPr lang="en-US" sz="1550" dirty="0"/>
+              <a:t>Use the assignment to test whether you can explain the concept, apply it to a realistic public health situation, and.</a:t>
+            </a:r>
+            <a:endParaRPr lang="en-US" sz="1320" dirty="0"/>
           </a:p>
         </p:txBody>
       </p:sp>
@@ -14729,21 +14983,24 @@
           <a:ln/>
         </p:spPr>
         <p:txBody>
-          <a:bodyPr wrap="square" lIns="635" tIns="635" rIns="635" bIns="635" rtlCol="0" anchor="t">
+          <a:bodyPr wrap="square" lIns="1016" tIns="1016" rIns="1016" bIns="1016" rtlCol="0" anchor="t">
             <a:normAutofit/>
           </a:bodyPr>
           <a:lstStyle/>
           <a:p>
+            <a:pPr indent="0" marL="0">
+              <a:buNone/>
+            </a:pPr>
             <a:r>
               <a:rPr lang="en-US" sz="2100" dirty="0">
                 <a:solidFill>
-                  <a:srgbClr val="17364A"/>
-                </a:solidFill>
-                <a:latin typeface="Aptos" pitchFamily="34" charset="0"/>
-                <a:ea typeface="Aptos" pitchFamily="34" charset="-122"/>
-                <a:cs typeface="Aptos" pitchFamily="34" charset="-120"/>
-              </a:rPr>
-              <a:t>Produce a geospatial AI readiness worksheet for a public health workflow.</a:t>
+                  <a:srgbClr val="003A63"/>
+                </a:solidFill>
+                <a:latin typeface="Aptos" pitchFamily="34" charset="0"/>
+                <a:ea typeface="Aptos" pitchFamily="34" charset="-122"/>
+                <a:cs typeface="Aptos" pitchFamily="34" charset="-120"/>
+              </a:rPr>
+              <a:t>• Produce a geospatial AI readiness worksheet for a public health workflow.</a:t>
             </a:r>
             <a:endParaRPr lang="en-US" sz="2100" dirty="0"/>
           </a:p>
@@ -14823,17 +15080,17 @@
         </p:nvSpPr>
         <p:spPr>
           <a:xfrm>
-            <a:off x="7799832" y="1828800"/>
-            <a:ext cx="3145536" cy="685800"/>
-          </a:xfrm>
-          <a:prstGeom prst="rect">
-            <a:avLst/>
-          </a:prstGeom>
-          <a:noFill/>
-          <a:ln/>
-        </p:spPr>
-        <p:txBody>
-          <a:bodyPr wrap="square" lIns="0" tIns="0" rIns="0" bIns="0" rtlCol="0" anchor="t">
+            <a:off x="7799832" y="1801368"/>
+            <a:ext cx="3145536" cy="758952"/>
+          </a:xfrm>
+          <a:prstGeom prst="rect">
+            <a:avLst/>
+          </a:prstGeom>
+          <a:noFill/>
+          <a:ln/>
+        </p:spPr>
+        <p:txBody>
+          <a:bodyPr wrap="square" lIns="254" tIns="254" rIns="254" bIns="254" rtlCol="0" anchor="t">
             <a:normAutofit/>
           </a:bodyPr>
           <a:lstStyle/>
@@ -14842,7 +15099,7 @@
               <a:buNone/>
             </a:pPr>
             <a:r>
-              <a:rPr lang="en-US" sz="1550" dirty="0">
+              <a:rPr lang="en-US" sz="1320" dirty="0">
                 <a:solidFill>
                   <a:srgbClr val="17364A"/>
                 </a:solidFill>
@@ -14852,7 +15109,7 @@
               </a:rPr>
               <a:t>Produce a geospatial AI readiness worksheet for a public health workflow.</a:t>
             </a:r>
-            <a:endParaRPr lang="en-US" sz="1550" dirty="0"/>
+            <a:endParaRPr lang="en-US" sz="1320" dirty="0"/>
           </a:p>
         </p:txBody>
       </p:sp>
@@ -14940,13 +15197,16 @@
           <a:ln/>
         </p:spPr>
         <p:txBody>
-          <a:bodyPr wrap="square" lIns="254" tIns="254" rIns="254" bIns="254" rtlCol="0" anchor="t">
+          <a:bodyPr wrap="square" lIns="508" tIns="508" rIns="508" bIns="508" rtlCol="0" anchor="t">
             <a:normAutofit/>
           </a:bodyPr>
           <a:lstStyle/>
           <a:p>
-            <a:r>
-              <a:rPr lang="en-US" sz="1380" dirty="0">
+            <a:pPr indent="0" marL="0">
+              <a:buNone/>
+            </a:pPr>
+            <a:r>
+              <a:rPr lang="en-US" sz="1220" dirty="0">
                 <a:solidFill>
                   <a:srgbClr val="17364A"/>
                 </a:solidFill>
@@ -14954,9 +15214,9 @@
                 <a:ea typeface="Aptos" pitchFamily="34" charset="-122"/>
                 <a:cs typeface="Aptos" pitchFamily="34" charset="-120"/>
               </a:rPr>
-              <a:t>Produce a geospatial AI readiness worksheet for a public health workflow.</a:t>
-            </a:r>
-            <a:endParaRPr lang="en-US" sz="1380" dirty="0"/>
+              <a:t>Produce a geospatial AI readiness worksheet for a public health.</a:t>
+            </a:r>
+            <a:endParaRPr lang="en-US" sz="1220" dirty="0"/>
           </a:p>
         </p:txBody>
       </p:sp>
@@ -15034,17 +15294,17 @@
         </p:nvSpPr>
         <p:spPr>
           <a:xfrm>
-            <a:off x="7799832" y="5001768"/>
-            <a:ext cx="3145536" cy="502920"/>
-          </a:xfrm>
-          <a:prstGeom prst="rect">
-            <a:avLst/>
-          </a:prstGeom>
-          <a:noFill/>
-          <a:ln/>
-        </p:spPr>
-        <p:txBody>
-          <a:bodyPr wrap="square" lIns="0" tIns="0" rIns="0" bIns="0" rtlCol="0" anchor="t">
+            <a:off x="7799832" y="4974336"/>
+            <a:ext cx="3145536" cy="576072"/>
+          </a:xfrm>
+          <a:prstGeom prst="rect">
+            <a:avLst/>
+          </a:prstGeom>
+          <a:noFill/>
+          <a:ln/>
+        </p:spPr>
+        <p:txBody>
+          <a:bodyPr wrap="square" lIns="254" tIns="254" rIns="254" bIns="254" rtlCol="0" anchor="t">
             <a:normAutofit/>
           </a:bodyPr>
           <a:lstStyle/>
@@ -15053,7 +15313,7 @@
               <a:buNone/>
             </a:pPr>
             <a:r>
-              <a:rPr lang="en-US" sz="1550" dirty="0">
+              <a:rPr lang="en-US" sz="1320" dirty="0">
                 <a:solidFill>
                   <a:srgbClr val="17364A"/>
                 </a:solidFill>
@@ -15061,9 +15321,9 @@
                 <a:ea typeface="Aptos" pitchFamily="34" charset="-122"/>
                 <a:cs typeface="Aptos" pitchFamily="34" charset="-120"/>
               </a:rPr>
-              <a:t>Use the assignment to test whether you can explain the concept, apply it to a realistic public health situation, and identify what would need review before the work moves forward.</a:t>
-            </a:r>
-            <a:endParaRPr lang="en-US" sz="1550" dirty="0"/>
+              <a:t>Use the assignment to test whether you can explain the concept, apply it to a realistic public health situation, and.</a:t>
+            </a:r>
+            <a:endParaRPr lang="en-US" sz="1320" dirty="0"/>
           </a:p>
         </p:txBody>
       </p:sp>
@@ -15364,49 +15624,58 @@
           <a:ln/>
         </p:spPr>
         <p:txBody>
-          <a:bodyPr wrap="square" lIns="635" tIns="635" rIns="635" bIns="635" rtlCol="0" anchor="t">
+          <a:bodyPr wrap="square" lIns="1016" tIns="1016" rIns="1016" bIns="1016" rtlCol="0" anchor="t">
             <a:normAutofit/>
           </a:bodyPr>
           <a:lstStyle/>
           <a:p>
+            <a:pPr indent="0" marL="0">
+              <a:buNone/>
+            </a:pPr>
             <a:r>
               <a:rPr lang="en-US" sz="2100" dirty="0">
                 <a:solidFill>
-                  <a:srgbClr val="17364A"/>
-                </a:solidFill>
-                <a:latin typeface="Aptos" pitchFamily="34" charset="0"/>
-                <a:ea typeface="Aptos" pitchFamily="34" charset="-122"/>
-                <a:cs typeface="Aptos" pitchFamily="34" charset="-120"/>
-              </a:rPr>
-              <a:t>Geospatial AI combines spatial data, geographic analysis, and AI methods to identify patterns across.</a:t>
+                  <a:srgbClr val="003A63"/>
+                </a:solidFill>
+                <a:latin typeface="Aptos" pitchFamily="34" charset="0"/>
+                <a:ea typeface="Aptos" pitchFamily="34" charset="-122"/>
+                <a:cs typeface="Aptos" pitchFamily="34" charset="-120"/>
+              </a:rPr>
+              <a:t>• Geospatial AI combines spatial data, geographic analysis, and AI methods to identify patterns.</a:t>
             </a:r>
             <a:endParaRPr lang="en-US" sz="2100" dirty="0"/>
           </a:p>
           <a:p>
+            <a:pPr indent="0" marL="0">
+              <a:buNone/>
+            </a:pPr>
             <a:r>
               <a:rPr lang="en-US" sz="2100" dirty="0">
                 <a:solidFill>
-                  <a:srgbClr val="17364A"/>
-                </a:solidFill>
-                <a:latin typeface="Aptos" pitchFamily="34" charset="0"/>
-                <a:ea typeface="Aptos" pitchFamily="34" charset="-122"/>
-                <a:cs typeface="Aptos" pitchFamily="34" charset="-120"/>
-              </a:rPr>
-              <a:t>In public health, spatial analysis is already central to outbreak response, environmental health,.</a:t>
+                  <a:srgbClr val="003A63"/>
+                </a:solidFill>
+                <a:latin typeface="Aptos" pitchFamily="34" charset="0"/>
+                <a:ea typeface="Aptos" pitchFamily="34" charset="-122"/>
+                <a:cs typeface="Aptos" pitchFamily="34" charset="-120"/>
+              </a:rPr>
+              <a:t>• In public health, spatial analysis is already central to outbreak response, environmental.</a:t>
             </a:r>
             <a:endParaRPr lang="en-US" sz="2100" dirty="0"/>
           </a:p>
           <a:p>
+            <a:pPr indent="0" marL="0">
+              <a:buNone/>
+            </a:pPr>
             <a:r>
               <a:rPr lang="en-US" sz="2100" dirty="0">
                 <a:solidFill>
-                  <a:srgbClr val="17364A"/>
-                </a:solidFill>
-                <a:latin typeface="Aptos" pitchFamily="34" charset="0"/>
-                <a:ea typeface="Aptos" pitchFamily="34" charset="-122"/>
-                <a:cs typeface="Aptos" pitchFamily="34" charset="-120"/>
-              </a:rPr>
-              <a:t>AI can strengthen these activities when it helps detect clusters, estimate access barriers, classify.</a:t>
+                  <a:srgbClr val="003A63"/>
+                </a:solidFill>
+                <a:latin typeface="Aptos" pitchFamily="34" charset="0"/>
+                <a:ea typeface="Aptos" pitchFamily="34" charset="-122"/>
+                <a:cs typeface="Aptos" pitchFamily="34" charset="-120"/>
+              </a:rPr>
+              <a:t>• AI can strengthen these activities when it helps detect clusters, estimate access barriers,.</a:t>
             </a:r>
             <a:endParaRPr lang="en-US" sz="2100" dirty="0"/>
           </a:p>
@@ -15486,17 +15755,17 @@
         </p:nvSpPr>
         <p:spPr>
           <a:xfrm>
-            <a:off x="7799832" y="1828800"/>
-            <a:ext cx="3145536" cy="685800"/>
-          </a:xfrm>
-          <a:prstGeom prst="rect">
-            <a:avLst/>
-          </a:prstGeom>
-          <a:noFill/>
-          <a:ln/>
-        </p:spPr>
-        <p:txBody>
-          <a:bodyPr wrap="square" lIns="0" tIns="0" rIns="0" bIns="0" rtlCol="0" anchor="t">
+            <a:off x="7799832" y="1801368"/>
+            <a:ext cx="3145536" cy="758952"/>
+          </a:xfrm>
+          <a:prstGeom prst="rect">
+            <a:avLst/>
+          </a:prstGeom>
+          <a:noFill/>
+          <a:ln/>
+        </p:spPr>
+        <p:txBody>
+          <a:bodyPr wrap="square" lIns="254" tIns="254" rIns="254" bIns="254" rtlCol="0" anchor="t">
             <a:normAutofit/>
           </a:bodyPr>
           <a:lstStyle/>
@@ -15505,7 +15774,7 @@
               <a:buNone/>
             </a:pPr>
             <a:r>
-              <a:rPr lang="en-US" sz="1550" dirty="0">
+              <a:rPr lang="en-US" sz="1320" dirty="0">
                 <a:solidFill>
                   <a:srgbClr val="17364A"/>
                 </a:solidFill>
@@ -15515,7 +15784,7 @@
               </a:rPr>
               <a:t>Geospatial AI combines spatial data, geographic analysis, and AI methods to identify patterns across.</a:t>
             </a:r>
-            <a:endParaRPr lang="en-US" sz="1550" dirty="0"/>
+            <a:endParaRPr lang="en-US" sz="1320" dirty="0"/>
           </a:p>
         </p:txBody>
       </p:sp>
@@ -15603,13 +15872,16 @@
           <a:ln/>
         </p:spPr>
         <p:txBody>
-          <a:bodyPr wrap="square" lIns="254" tIns="254" rIns="254" bIns="254" rtlCol="0" anchor="t">
+          <a:bodyPr wrap="square" lIns="508" tIns="508" rIns="508" bIns="508" rtlCol="0" anchor="t">
             <a:normAutofit/>
           </a:bodyPr>
           <a:lstStyle/>
           <a:p>
-            <a:r>
-              <a:rPr lang="en-US" sz="1380" dirty="0">
+            <a:pPr indent="0" marL="0">
+              <a:buNone/>
+            </a:pPr>
+            <a:r>
+              <a:rPr lang="en-US" sz="1220" dirty="0">
                 <a:solidFill>
                   <a:srgbClr val="17364A"/>
                 </a:solidFill>
@@ -15617,13 +15889,16 @@
                 <a:ea typeface="Aptos" pitchFamily="34" charset="-122"/>
                 <a:cs typeface="Aptos" pitchFamily="34" charset="-120"/>
               </a:rPr>
-              <a:t>Geospatial AI combines spatial data, geographic analysis, and AI methods to identify.</a:t>
-            </a:r>
-            <a:endParaRPr lang="en-US" sz="1380" dirty="0"/>
-          </a:p>
-          <a:p>
-            <a:r>
-              <a:rPr lang="en-US" sz="1380" dirty="0">
+              <a:t>Geospatial AI combines spatial data, geographic analysis, and AI.</a:t>
+            </a:r>
+            <a:endParaRPr lang="en-US" sz="1220" dirty="0"/>
+          </a:p>
+          <a:p>
+            <a:pPr indent="0" marL="0">
+              <a:buNone/>
+            </a:pPr>
+            <a:r>
+              <a:rPr lang="en-US" sz="1220" dirty="0">
                 <a:solidFill>
                   <a:srgbClr val="17364A"/>
                 </a:solidFill>
@@ -15631,13 +15906,16 @@
                 <a:ea typeface="Aptos" pitchFamily="34" charset="-122"/>
                 <a:cs typeface="Aptos" pitchFamily="34" charset="-120"/>
               </a:rPr>
-              <a:t>In public health, spatial analysis is already central to outbreak response, environmental.</a:t>
-            </a:r>
-            <a:endParaRPr lang="en-US" sz="1380" dirty="0"/>
-          </a:p>
-          <a:p>
-            <a:r>
-              <a:rPr lang="en-US" sz="1380" dirty="0">
+              <a:t>In public health, spatial analysis is already central to outbreak.</a:t>
+            </a:r>
+            <a:endParaRPr lang="en-US" sz="1220" dirty="0"/>
+          </a:p>
+          <a:p>
+            <a:pPr indent="0" marL="0">
+              <a:buNone/>
+            </a:pPr>
+            <a:r>
+              <a:rPr lang="en-US" sz="1220" dirty="0">
                 <a:solidFill>
                   <a:srgbClr val="17364A"/>
                 </a:solidFill>
@@ -15645,9 +15923,9 @@
                 <a:ea typeface="Aptos" pitchFamily="34" charset="-122"/>
                 <a:cs typeface="Aptos" pitchFamily="34" charset="-120"/>
               </a:rPr>
-              <a:t>AI can strengthen these activities when it helps detect clusters, estimate access.</a:t>
-            </a:r>
-            <a:endParaRPr lang="en-US" sz="1380" dirty="0"/>
+              <a:t>AI can strengthen these activities when it helps detect clusters,.</a:t>
+            </a:r>
+            <a:endParaRPr lang="en-US" sz="1220" dirty="0"/>
           </a:p>
         </p:txBody>
       </p:sp>
@@ -15725,17 +16003,17 @@
         </p:nvSpPr>
         <p:spPr>
           <a:xfrm>
-            <a:off x="7799832" y="5001768"/>
-            <a:ext cx="3145536" cy="502920"/>
-          </a:xfrm>
-          <a:prstGeom prst="rect">
-            <a:avLst/>
-          </a:prstGeom>
-          <a:noFill/>
-          <a:ln/>
-        </p:spPr>
-        <p:txBody>
-          <a:bodyPr wrap="square" lIns="0" tIns="0" rIns="0" bIns="0" rtlCol="0" anchor="t">
+            <a:off x="7799832" y="4974336"/>
+            <a:ext cx="3145536" cy="576072"/>
+          </a:xfrm>
+          <a:prstGeom prst="rect">
+            <a:avLst/>
+          </a:prstGeom>
+          <a:noFill/>
+          <a:ln/>
+        </p:spPr>
+        <p:txBody>
+          <a:bodyPr wrap="square" lIns="254" tIns="254" rIns="254" bIns="254" rtlCol="0" anchor="t">
             <a:normAutofit/>
           </a:bodyPr>
           <a:lstStyle/>
@@ -15744,7 +16022,7 @@
               <a:buNone/>
             </a:pPr>
             <a:r>
-              <a:rPr lang="en-US" sz="1550" dirty="0">
+              <a:rPr lang="en-US" sz="1320" dirty="0">
                 <a:solidFill>
                   <a:srgbClr val="17364A"/>
                 </a:solidFill>
@@ -15752,9 +16030,9 @@
                 <a:ea typeface="Aptos" pitchFamily="34" charset="-122"/>
                 <a:cs typeface="Aptos" pitchFamily="34" charset="-120"/>
               </a:rPr>
-              <a:t>Connect the concept to public health purpose, responsible use, required safeguards, documentation, and the next action a department should take.</a:t>
-            </a:r>
-            <a:endParaRPr lang="en-US" sz="1550" dirty="0"/>
+              <a:t>Connect the concept to public health purpose, responsible use, required safeguards, documentation, and the next action a.</a:t>
+            </a:r>
+            <a:endParaRPr lang="en-US" sz="1320" dirty="0"/>
           </a:p>
         </p:txBody>
       </p:sp>
@@ -16055,49 +16333,58 @@
           <a:ln/>
         </p:spPr>
         <p:txBody>
-          <a:bodyPr wrap="square" lIns="635" tIns="635" rIns="635" bIns="635" rtlCol="0" anchor="t">
+          <a:bodyPr wrap="square" lIns="1016" tIns="1016" rIns="1016" bIns="1016" rtlCol="0" anchor="t">
             <a:normAutofit/>
           </a:bodyPr>
           <a:lstStyle/>
           <a:p>
+            <a:pPr indent="0" marL="0">
+              <a:buNone/>
+            </a:pPr>
             <a:r>
               <a:rPr lang="en-US" sz="2100" dirty="0">
                 <a:solidFill>
-                  <a:srgbClr val="17364A"/>
-                </a:solidFill>
-                <a:latin typeface="Aptos" pitchFamily="34" charset="0"/>
-                <a:ea typeface="Aptos" pitchFamily="34" charset="-122"/>
-                <a:cs typeface="Aptos" pitchFamily="34" charset="-120"/>
-              </a:rPr>
-              <a:t>Geospatial AI matters because public health decisions are often place-based.</a:t>
+                  <a:srgbClr val="003A63"/>
+                </a:solidFill>
+                <a:latin typeface="Aptos" pitchFamily="34" charset="0"/>
+                <a:ea typeface="Aptos" pitchFamily="34" charset="-122"/>
+                <a:cs typeface="Aptos" pitchFamily="34" charset="-120"/>
+              </a:rPr>
+              <a:t>• Geospatial AI matters because public health decisions are often place-based.</a:t>
             </a:r>
             <a:endParaRPr lang="en-US" sz="2100" dirty="0"/>
           </a:p>
           <a:p>
+            <a:pPr indent="0" marL="0">
+              <a:buNone/>
+            </a:pPr>
             <a:r>
               <a:rPr lang="en-US" sz="2100" dirty="0">
                 <a:solidFill>
-                  <a:srgbClr val="17364A"/>
-                </a:solidFill>
-                <a:latin typeface="Aptos" pitchFamily="34" charset="0"/>
-                <a:ea typeface="Aptos" pitchFamily="34" charset="-122"/>
-                <a:cs typeface="Aptos" pitchFamily="34" charset="-120"/>
-              </a:rPr>
-              <a:t>Agencies decide where to conduct outreach, deploy mobile services, inspect facilities, respond to.</a:t>
+                  <a:srgbClr val="003A63"/>
+                </a:solidFill>
+                <a:latin typeface="Aptos" pitchFamily="34" charset="0"/>
+                <a:ea typeface="Aptos" pitchFamily="34" charset="-122"/>
+                <a:cs typeface="Aptos" pitchFamily="34" charset="-120"/>
+              </a:rPr>
+              <a:t>• Agencies decide where to conduct outreach, deploy mobile services, inspect facilities, respond.</a:t>
             </a:r>
             <a:endParaRPr lang="en-US" sz="2100" dirty="0"/>
           </a:p>
           <a:p>
+            <a:pPr indent="0" marL="0">
+              <a:buNone/>
+            </a:pPr>
             <a:r>
               <a:rPr lang="en-US" sz="2100" dirty="0">
                 <a:solidFill>
-                  <a:srgbClr val="17364A"/>
-                </a:solidFill>
-                <a:latin typeface="Aptos" pitchFamily="34" charset="0"/>
-                <a:ea typeface="Aptos" pitchFamily="34" charset="-122"/>
-                <a:cs typeface="Aptos" pitchFamily="34" charset="-120"/>
-              </a:rPr>
-              <a:t>AI-supported spatial tools can help analyze large volumes of geographic information and identify.</a:t>
+                  <a:srgbClr val="003A63"/>
+                </a:solidFill>
+                <a:latin typeface="Aptos" pitchFamily="34" charset="0"/>
+                <a:ea typeface="Aptos" pitchFamily="34" charset="-122"/>
+                <a:cs typeface="Aptos" pitchFamily="34" charset="-120"/>
+              </a:rPr>
+              <a:t>• AI-supported spatial tools can help analyze large volumes of geographic information and.</a:t>
             </a:r>
             <a:endParaRPr lang="en-US" sz="2100" dirty="0"/>
           </a:p>
@@ -16177,17 +16464,17 @@
         </p:nvSpPr>
         <p:spPr>
           <a:xfrm>
-            <a:off x="7799832" y="1828800"/>
-            <a:ext cx="3145536" cy="685800"/>
-          </a:xfrm>
-          <a:prstGeom prst="rect">
-            <a:avLst/>
-          </a:prstGeom>
-          <a:noFill/>
-          <a:ln/>
-        </p:spPr>
-        <p:txBody>
-          <a:bodyPr wrap="square" lIns="0" tIns="0" rIns="0" bIns="0" rtlCol="0" anchor="t">
+            <a:off x="7799832" y="1801368"/>
+            <a:ext cx="3145536" cy="758952"/>
+          </a:xfrm>
+          <a:prstGeom prst="rect">
+            <a:avLst/>
+          </a:prstGeom>
+          <a:noFill/>
+          <a:ln/>
+        </p:spPr>
+        <p:txBody>
+          <a:bodyPr wrap="square" lIns="254" tIns="254" rIns="254" bIns="254" rtlCol="0" anchor="t">
             <a:normAutofit/>
           </a:bodyPr>
           <a:lstStyle/>
@@ -16196,7 +16483,7 @@
               <a:buNone/>
             </a:pPr>
             <a:r>
-              <a:rPr lang="en-US" sz="1550" dirty="0">
+              <a:rPr lang="en-US" sz="1320" dirty="0">
                 <a:solidFill>
                   <a:srgbClr val="17364A"/>
                 </a:solidFill>
@@ -16206,7 +16493,7 @@
               </a:rPr>
               <a:t>Geospatial AI matters because public health decisions are often place-based.</a:t>
             </a:r>
-            <a:endParaRPr lang="en-US" sz="1550" dirty="0"/>
+            <a:endParaRPr lang="en-US" sz="1320" dirty="0"/>
           </a:p>
         </p:txBody>
       </p:sp>
@@ -16294,13 +16581,16 @@
           <a:ln/>
         </p:spPr>
         <p:txBody>
-          <a:bodyPr wrap="square" lIns="254" tIns="254" rIns="254" bIns="254" rtlCol="0" anchor="t">
+          <a:bodyPr wrap="square" lIns="508" tIns="508" rIns="508" bIns="508" rtlCol="0" anchor="t">
             <a:normAutofit/>
           </a:bodyPr>
           <a:lstStyle/>
           <a:p>
-            <a:r>
-              <a:rPr lang="en-US" sz="1380" dirty="0">
+            <a:pPr indent="0" marL="0">
+              <a:buNone/>
+            </a:pPr>
+            <a:r>
+              <a:rPr lang="en-US" sz="1220" dirty="0">
                 <a:solidFill>
                   <a:srgbClr val="17364A"/>
                 </a:solidFill>
@@ -16308,13 +16598,16 @@
                 <a:ea typeface="Aptos" pitchFamily="34" charset="-122"/>
                 <a:cs typeface="Aptos" pitchFamily="34" charset="-120"/>
               </a:rPr>
-              <a:t>Agencies decide where to conduct outreach, deploy mobile services, inspect facilities,.</a:t>
-            </a:r>
-            <a:endParaRPr lang="en-US" sz="1380" dirty="0"/>
-          </a:p>
-          <a:p>
-            <a:r>
-              <a:rPr lang="en-US" sz="1380" dirty="0">
+              <a:t>Agencies decide where to conduct outreach, deploy mobile services,.</a:t>
+            </a:r>
+            <a:endParaRPr lang="en-US" sz="1220" dirty="0"/>
+          </a:p>
+          <a:p>
+            <a:pPr indent="0" marL="0">
+              <a:buNone/>
+            </a:pPr>
+            <a:r>
+              <a:rPr lang="en-US" sz="1220" dirty="0">
                 <a:solidFill>
                   <a:srgbClr val="17364A"/>
                 </a:solidFill>
@@ -16322,13 +16615,16 @@
                 <a:ea typeface="Aptos" pitchFamily="34" charset="-122"/>
                 <a:cs typeface="Aptos" pitchFamily="34" charset="-120"/>
               </a:rPr>
-              <a:t>AI-supported spatial tools can help analyze large volumes of geographic information and.</a:t>
-            </a:r>
-            <a:endParaRPr lang="en-US" sz="1380" dirty="0"/>
-          </a:p>
-          <a:p>
-            <a:r>
-              <a:rPr lang="en-US" sz="1380" dirty="0">
+              <a:t>AI-supported spatial tools can help analyze large volumes of.</a:t>
+            </a:r>
+            <a:endParaRPr lang="en-US" sz="1220" dirty="0"/>
+          </a:p>
+          <a:p>
+            <a:pPr indent="0" marL="0">
+              <a:buNone/>
+            </a:pPr>
+            <a:r>
+              <a:rPr lang="en-US" sz="1220" dirty="0">
                 <a:solidFill>
                   <a:srgbClr val="17364A"/>
                 </a:solidFill>
@@ -16338,7 +16634,7 @@
               </a:rPr>
               <a:t>However, maps can create a false sense of objectivity.</a:t>
             </a:r>
-            <a:endParaRPr lang="en-US" sz="1380" dirty="0"/>
+            <a:endParaRPr lang="en-US" sz="1220" dirty="0"/>
           </a:p>
         </p:txBody>
       </p:sp>
@@ -16416,17 +16712,17 @@
         </p:nvSpPr>
         <p:spPr>
           <a:xfrm>
-            <a:off x="7799832" y="5001768"/>
-            <a:ext cx="3145536" cy="502920"/>
-          </a:xfrm>
-          <a:prstGeom prst="rect">
-            <a:avLst/>
-          </a:prstGeom>
-          <a:noFill/>
-          <a:ln/>
-        </p:spPr>
-        <p:txBody>
-          <a:bodyPr wrap="square" lIns="0" tIns="0" rIns="0" bIns="0" rtlCol="0" anchor="t">
+            <a:off x="7799832" y="4974336"/>
+            <a:ext cx="3145536" cy="576072"/>
+          </a:xfrm>
+          <a:prstGeom prst="rect">
+            <a:avLst/>
+          </a:prstGeom>
+          <a:noFill/>
+          <a:ln/>
+        </p:spPr>
+        <p:txBody>
+          <a:bodyPr wrap="square" lIns="254" tIns="254" rIns="254" bIns="254" rtlCol="0" anchor="t">
             <a:normAutofit/>
           </a:bodyPr>
           <a:lstStyle/>
@@ -16435,7 +16731,7 @@
               <a:buNone/>
             </a:pPr>
             <a:r>
-              <a:rPr lang="en-US" sz="1550" dirty="0">
+              <a:rPr lang="en-US" sz="1320" dirty="0">
                 <a:solidFill>
                   <a:srgbClr val="17364A"/>
                 </a:solidFill>
@@ -16443,9 +16739,9 @@
                 <a:ea typeface="Aptos" pitchFamily="34" charset="-122"/>
                 <a:cs typeface="Aptos" pitchFamily="34" charset="-120"/>
               </a:rPr>
-              <a:t>Connect the concept to public health purpose, responsible use, required safeguards, documentation, and the next action a department should take.</a:t>
-            </a:r>
-            <a:endParaRPr lang="en-US" sz="1550" dirty="0"/>
+              <a:t>Connect the concept to public health purpose, responsible use, required safeguards, documentation, and the next action a.</a:t>
+            </a:r>
+            <a:endParaRPr lang="en-US" sz="1320" dirty="0"/>
           </a:p>
         </p:txBody>
       </p:sp>
@@ -16746,49 +17042,58 @@
           <a:ln/>
         </p:spPr>
         <p:txBody>
-          <a:bodyPr wrap="square" lIns="635" tIns="635" rIns="635" bIns="635" rtlCol="0" anchor="t">
+          <a:bodyPr wrap="square" lIns="1016" tIns="1016" rIns="1016" bIns="1016" rtlCol="0" anchor="t">
             <a:normAutofit/>
           </a:bodyPr>
           <a:lstStyle/>
           <a:p>
+            <a:pPr indent="0" marL="0">
+              <a:buNone/>
+            </a:pPr>
             <a:r>
               <a:rPr lang="en-US" sz="2100" dirty="0">
                 <a:solidFill>
-                  <a:srgbClr val="17364A"/>
-                </a:solidFill>
-                <a:latin typeface="Aptos" pitchFamily="34" charset="0"/>
-                <a:ea typeface="Aptos" pitchFamily="34" charset="-122"/>
-                <a:cs typeface="Aptos" pitchFamily="34" charset="-120"/>
-              </a:rPr>
-              <a:t>A health department may use AI-supported geospatial analysis to identify areas where mobile vaccination.</a:t>
+                  <a:srgbClr val="003A63"/>
+                </a:solidFill>
+                <a:latin typeface="Aptos" pitchFamily="34" charset="0"/>
+                <a:ea typeface="Aptos" pitchFamily="34" charset="-122"/>
+                <a:cs typeface="Aptos" pitchFamily="34" charset="-120"/>
+              </a:rPr>
+              <a:t>• A health department may use AI-supported geospatial analysis to identify areas where mobile.</a:t>
             </a:r>
             <a:endParaRPr lang="en-US" sz="2100" dirty="0"/>
           </a:p>
           <a:p>
+            <a:pPr indent="0" marL="0">
+              <a:buNone/>
+            </a:pPr>
             <a:r>
               <a:rPr lang="en-US" sz="2100" dirty="0">
                 <a:solidFill>
-                  <a:srgbClr val="17364A"/>
-                </a:solidFill>
-                <a:latin typeface="Aptos" pitchFamily="34" charset="0"/>
-                <a:ea typeface="Aptos" pitchFamily="34" charset="-122"/>
-                <a:cs typeface="Aptos" pitchFamily="34" charset="-120"/>
-              </a:rPr>
-              <a:t>The tool may combine immunization coverage, school locations, transportation routes, census variables,.</a:t>
+                  <a:srgbClr val="003A63"/>
+                </a:solidFill>
+                <a:latin typeface="Aptos" pitchFamily="34" charset="0"/>
+                <a:ea typeface="Aptos" pitchFamily="34" charset="-122"/>
+                <a:cs typeface="Aptos" pitchFamily="34" charset="-120"/>
+              </a:rPr>
+              <a:t>• The tool may combine immunization coverage, school locations, transportation routes, census.</a:t>
             </a:r>
             <a:endParaRPr lang="en-US" sz="2100" dirty="0"/>
           </a:p>
           <a:p>
+            <a:pPr indent="0" marL="0">
+              <a:buNone/>
+            </a:pPr>
             <a:r>
               <a:rPr lang="en-US" sz="2100" dirty="0">
                 <a:solidFill>
-                  <a:srgbClr val="17364A"/>
-                </a:solidFill>
-                <a:latin typeface="Aptos" pitchFamily="34" charset="0"/>
-                <a:ea typeface="Aptos" pitchFamily="34" charset="-122"/>
-                <a:cs typeface="Aptos" pitchFamily="34" charset="-120"/>
-              </a:rPr>
-              <a:t>The output may recommend priority areas for outreach and clinic placement.</a:t>
+                  <a:srgbClr val="003A63"/>
+                </a:solidFill>
+                <a:latin typeface="Aptos" pitchFamily="34" charset="0"/>
+                <a:ea typeface="Aptos" pitchFamily="34" charset="-122"/>
+                <a:cs typeface="Aptos" pitchFamily="34" charset="-120"/>
+              </a:rPr>
+              <a:t>• The output may recommend priority areas for outreach and clinic placement.</a:t>
             </a:r>
             <a:endParaRPr lang="en-US" sz="2100" dirty="0"/>
           </a:p>
@@ -16868,17 +17173,17 @@
         </p:nvSpPr>
         <p:spPr>
           <a:xfrm>
-            <a:off x="7799832" y="1828800"/>
-            <a:ext cx="3145536" cy="685800"/>
-          </a:xfrm>
-          <a:prstGeom prst="rect">
-            <a:avLst/>
-          </a:prstGeom>
-          <a:noFill/>
-          <a:ln/>
-        </p:spPr>
-        <p:txBody>
-          <a:bodyPr wrap="square" lIns="0" tIns="0" rIns="0" bIns="0" rtlCol="0" anchor="t">
+            <a:off x="7799832" y="1801368"/>
+            <a:ext cx="3145536" cy="758952"/>
+          </a:xfrm>
+          <a:prstGeom prst="rect">
+            <a:avLst/>
+          </a:prstGeom>
+          <a:noFill/>
+          <a:ln/>
+        </p:spPr>
+        <p:txBody>
+          <a:bodyPr wrap="square" lIns="254" tIns="254" rIns="254" bIns="254" rtlCol="0" anchor="t">
             <a:normAutofit/>
           </a:bodyPr>
           <a:lstStyle/>
@@ -16887,7 +17192,7 @@
               <a:buNone/>
             </a:pPr>
             <a:r>
-              <a:rPr lang="en-US" sz="1550" dirty="0">
+              <a:rPr lang="en-US" sz="1320" dirty="0">
                 <a:solidFill>
                   <a:srgbClr val="17364A"/>
                 </a:solidFill>
@@ -16897,7 +17202,7 @@
               </a:rPr>
               <a:t>A health department may use AI-supported geospatial analysis to identify areas where mobile vaccination.</a:t>
             </a:r>
-            <a:endParaRPr lang="en-US" sz="1550" dirty="0"/>
+            <a:endParaRPr lang="en-US" sz="1320" dirty="0"/>
           </a:p>
         </p:txBody>
       </p:sp>
@@ -16985,13 +17290,16 @@
           <a:ln/>
         </p:spPr>
         <p:txBody>
-          <a:bodyPr wrap="square" lIns="254" tIns="254" rIns="254" bIns="254" rtlCol="0" anchor="t">
+          <a:bodyPr wrap="square" lIns="508" tIns="508" rIns="508" bIns="508" rtlCol="0" anchor="t">
             <a:normAutofit/>
           </a:bodyPr>
           <a:lstStyle/>
           <a:p>
-            <a:r>
-              <a:rPr lang="en-US" sz="1380" dirty="0">
+            <a:pPr indent="0" marL="0">
+              <a:buNone/>
+            </a:pPr>
+            <a:r>
+              <a:rPr lang="en-US" sz="1220" dirty="0">
                 <a:solidFill>
                   <a:srgbClr val="17364A"/>
                 </a:solidFill>
@@ -16999,13 +17307,16 @@
                 <a:ea typeface="Aptos" pitchFamily="34" charset="-122"/>
                 <a:cs typeface="Aptos" pitchFamily="34" charset="-120"/>
               </a:rPr>
-              <a:t>A health department may use AI-supported geospatial analysis to identify areas where.</a:t>
-            </a:r>
-            <a:endParaRPr lang="en-US" sz="1380" dirty="0"/>
-          </a:p>
-          <a:p>
-            <a:r>
-              <a:rPr lang="en-US" sz="1380" dirty="0">
+              <a:t>A health department may use AI-supported geospatial analysis to.</a:t>
+            </a:r>
+            <a:endParaRPr lang="en-US" sz="1220" dirty="0"/>
+          </a:p>
+          <a:p>
+            <a:pPr indent="0" marL="0">
+              <a:buNone/>
+            </a:pPr>
+            <a:r>
+              <a:rPr lang="en-US" sz="1220" dirty="0">
                 <a:solidFill>
                   <a:srgbClr val="17364A"/>
                 </a:solidFill>
@@ -17013,13 +17324,16 @@
                 <a:ea typeface="Aptos" pitchFamily="34" charset="-122"/>
                 <a:cs typeface="Aptos" pitchFamily="34" charset="-120"/>
               </a:rPr>
-              <a:t>The tool may combine immunization coverage, school locations, transportation routes,.</a:t>
-            </a:r>
-            <a:endParaRPr lang="en-US" sz="1380" dirty="0"/>
-          </a:p>
-          <a:p>
-            <a:r>
-              <a:rPr lang="en-US" sz="1380" dirty="0">
+              <a:t>The tool may combine immunization coverage, school locations,.</a:t>
+            </a:r>
+            <a:endParaRPr lang="en-US" sz="1220" dirty="0"/>
+          </a:p>
+          <a:p>
+            <a:pPr indent="0" marL="0">
+              <a:buNone/>
+            </a:pPr>
+            <a:r>
+              <a:rPr lang="en-US" sz="1220" dirty="0">
                 <a:solidFill>
                   <a:srgbClr val="17364A"/>
                 </a:solidFill>
@@ -17027,9 +17341,9 @@
                 <a:ea typeface="Aptos" pitchFamily="34" charset="-122"/>
                 <a:cs typeface="Aptos" pitchFamily="34" charset="-120"/>
               </a:rPr>
-              <a:t>This workflow can advance equity if it identifies access barriers and supports community.</a:t>
-            </a:r>
-            <a:endParaRPr lang="en-US" sz="1380" dirty="0"/>
+              <a:t>This workflow can advance equity if it identifies access barriers.</a:t>
+            </a:r>
+            <a:endParaRPr lang="en-US" sz="1220" dirty="0"/>
           </a:p>
         </p:txBody>
       </p:sp>
@@ -17107,17 +17421,17 @@
         </p:nvSpPr>
         <p:spPr>
           <a:xfrm>
-            <a:off x="7799832" y="5001768"/>
-            <a:ext cx="3145536" cy="502920"/>
-          </a:xfrm>
-          <a:prstGeom prst="rect">
-            <a:avLst/>
-          </a:prstGeom>
-          <a:noFill/>
-          <a:ln/>
-        </p:spPr>
-        <p:txBody>
-          <a:bodyPr wrap="square" lIns="0" tIns="0" rIns="0" bIns="0" rtlCol="0" anchor="t">
+            <a:off x="7799832" y="4974336"/>
+            <a:ext cx="3145536" cy="576072"/>
+          </a:xfrm>
+          <a:prstGeom prst="rect">
+            <a:avLst/>
+          </a:prstGeom>
+          <a:noFill/>
+          <a:ln/>
+        </p:spPr>
+        <p:txBody>
+          <a:bodyPr wrap="square" lIns="254" tIns="254" rIns="254" bIns="254" rtlCol="0" anchor="t">
             <a:normAutofit/>
           </a:bodyPr>
           <a:lstStyle/>
@@ -17126,7 +17440,7 @@
               <a:buNone/>
             </a:pPr>
             <a:r>
-              <a:rPr lang="en-US" sz="1550" dirty="0">
+              <a:rPr lang="en-US" sz="1320" dirty="0">
                 <a:solidFill>
                   <a:srgbClr val="17364A"/>
                 </a:solidFill>
@@ -17134,9 +17448,9 @@
                 <a:ea typeface="Aptos" pitchFamily="34" charset="-122"/>
                 <a:cs typeface="Aptos" pitchFamily="34" charset="-120"/>
               </a:rPr>
-              <a:t>Connect the concept to public health purpose, responsible use, required safeguards, documentation, and the next action a department should take.</a:t>
-            </a:r>
-            <a:endParaRPr lang="en-US" sz="1550" dirty="0"/>
+              <a:t>Connect the concept to public health purpose, responsible use, required safeguards, documentation, and the next action a.</a:t>
+            </a:r>
+            <a:endParaRPr lang="en-US" sz="1320" dirty="0"/>
           </a:p>
         </p:txBody>
       </p:sp>

--- a/downloads/presentations/modules/anl-230.pptx
+++ b/downloads/presentations/modules/anl-230.pptx
@@ -3419,11 +3419,11 @@
         <p:spPr>
           <a:xfrm>
             <a:off x="7635240" y="1325880"/>
-            <a:ext cx="3474720" cy="1325880"/>
+            <a:ext cx="3474720" cy="1207008"/>
           </a:xfrm>
           <a:prstGeom prst="roundRect">
             <a:avLst>
-              <a:gd name="adj" fmla="val 8276"/>
+              <a:gd name="adj" fmla="val 9091"/>
             </a:avLst>
           </a:prstGeom>
           <a:solidFill>
@@ -3485,7 +3485,7 @@
         <p:spPr>
           <a:xfrm>
             <a:off x="7799832" y="1801368"/>
-            <a:ext cx="3145536" cy="758952"/>
+            <a:ext cx="3145536" cy="640080"/>
           </a:xfrm>
           <a:prstGeom prst="rect">
             <a:avLst/>
@@ -3525,12 +3525,12 @@
         </p:nvSpPr>
         <p:spPr>
           <a:xfrm>
-            <a:off x="7635240" y="2788920"/>
-            <a:ext cx="3474720" cy="1536192"/>
+            <a:off x="7635240" y="2670048"/>
+            <a:ext cx="3474720" cy="1377086"/>
           </a:xfrm>
           <a:prstGeom prst="roundRect">
             <a:avLst>
-              <a:gd name="adj" fmla="val 7143"/>
+              <a:gd name="adj" fmla="val 7968"/>
             </a:avLst>
           </a:prstGeom>
           <a:solidFill>
@@ -3552,8 +3552,8 @@
         </p:nvSpPr>
         <p:spPr>
           <a:xfrm>
-            <a:off x="7799832" y="2935224"/>
-            <a:ext cx="3145536" cy="256032"/>
+            <a:off x="7799832" y="2798064"/>
+            <a:ext cx="3145536" cy="237744"/>
           </a:xfrm>
           <a:prstGeom prst="rect">
             <a:avLst/>
@@ -3569,7 +3569,7 @@
               <a:buNone/>
             </a:pPr>
             <a:r>
-              <a:rPr lang="en-US" sz="1300" b="1" dirty="0">
+              <a:rPr lang="en-US" sz="1250" b="1" dirty="0">
                 <a:solidFill>
                   <a:srgbClr val="0068B7"/>
                 </a:solidFill>
@@ -3577,101 +3577,317 @@
                 <a:ea typeface="Aptos" pitchFamily="34" charset="-122"/>
                 <a:cs typeface="Aptos" pitchFamily="34" charset="-120"/>
               </a:rPr>
-              <a:t>Concept checkpoints</a:t>
-            </a:r>
-            <a:endParaRPr lang="en-US" sz="1300" dirty="0"/>
-          </a:p>
-        </p:txBody>
-      </p:sp>
-      <p:sp>
-        <p:nvSpPr>
-          <p:cNvPr id="15" name="Text 13"/>
-          <p:cNvSpPr/>
-          <p:nvPr/>
-        </p:nvSpPr>
-        <p:spPr>
-          <a:xfrm>
-            <a:off x="7818120" y="3300984"/>
-            <a:ext cx="3090672" cy="877824"/>
-          </a:xfrm>
-          <a:prstGeom prst="rect">
-            <a:avLst/>
-          </a:prstGeom>
-          <a:noFill/>
-          <a:ln/>
-        </p:spPr>
-        <p:txBody>
-          <a:bodyPr wrap="square" lIns="508" tIns="508" rIns="508" bIns="508" rtlCol="0" anchor="t">
+              <a:t>Data-to-decision flow</a:t>
+            </a:r>
+            <a:endParaRPr lang="en-US" sz="1250" dirty="0"/>
+          </a:p>
+        </p:txBody>
+      </p:sp>
+      <p:sp>
+        <p:nvSpPr>
+          <p:cNvPr id="15" name="Shape 13"/>
+          <p:cNvSpPr/>
+          <p:nvPr/>
+        </p:nvSpPr>
+        <p:spPr>
+          <a:xfrm>
+            <a:off x="8763000" y="3351276"/>
+            <a:ext cx="164592" cy="0"/>
+          </a:xfrm>
+          <a:prstGeom prst="line">
+            <a:avLst/>
+          </a:prstGeom>
+          <a:noFill/>
+          <a:ln w="15240">
+            <a:solidFill>
+              <a:srgbClr val="8ABBD8"/>
+            </a:solidFill>
+            <a:prstDash val="solid"/>
+          </a:ln>
+        </p:spPr>
+      </p:sp>
+      <p:sp>
+        <p:nvSpPr>
+          <p:cNvPr id="16" name="Shape 14"/>
+          <p:cNvSpPr/>
+          <p:nvPr/>
+        </p:nvSpPr>
+        <p:spPr>
+          <a:xfrm>
+            <a:off x="7872984" y="3200400"/>
+            <a:ext cx="890016" cy="301752"/>
+          </a:xfrm>
+          <a:prstGeom prst="roundRect">
+            <a:avLst>
+              <a:gd name="adj" fmla="val 24242"/>
+            </a:avLst>
+          </a:prstGeom>
+          <a:solidFill>
+            <a:srgbClr val="0068B7"/>
+          </a:solidFill>
+          <a:ln w="12700">
+            <a:solidFill>
+              <a:srgbClr val="0068B7"/>
+            </a:solidFill>
+            <a:prstDash val="solid"/>
+          </a:ln>
+        </p:spPr>
+      </p:sp>
+      <p:sp>
+        <p:nvSpPr>
+          <p:cNvPr id="17" name="Text 15"/>
+          <p:cNvSpPr/>
+          <p:nvPr/>
+        </p:nvSpPr>
+        <p:spPr>
+          <a:xfrm>
+            <a:off x="7909560" y="3273552"/>
+            <a:ext cx="816864" cy="146304"/>
+          </a:xfrm>
+          <a:prstGeom prst="rect">
+            <a:avLst/>
+          </a:prstGeom>
+          <a:noFill/>
+          <a:ln/>
+        </p:spPr>
+        <p:txBody>
+          <a:bodyPr wrap="square" lIns="0" tIns="0" rIns="0" bIns="0" rtlCol="0" anchor="ctr">
             <a:normAutofit/>
           </a:bodyPr>
           <a:lstStyle/>
           <a:p>
-            <a:pPr indent="0" marL="0">
-              <a:buNone/>
-            </a:pPr>
-            <a:r>
-              <a:rPr lang="en-US" sz="1220" dirty="0">
-                <a:solidFill>
-                  <a:srgbClr val="17364A"/>
-                </a:solidFill>
-                <a:latin typeface="Aptos" pitchFamily="34" charset="0"/>
-                <a:ea typeface="Aptos" pitchFamily="34" charset="-122"/>
-                <a:cs typeface="Aptos" pitchFamily="34" charset="-120"/>
-              </a:rPr>
-              <a:t>People experiencing homelessness, migration, displacement,.</a:t>
-            </a:r>
-            <a:endParaRPr lang="en-US" sz="1220" dirty="0"/>
-          </a:p>
-          <a:p>
-            <a:pPr indent="0" marL="0">
-              <a:buNone/>
-            </a:pPr>
-            <a:r>
-              <a:rPr lang="en-US" sz="1220" dirty="0">
-                <a:solidFill>
-                  <a:srgbClr val="17364A"/>
-                </a:solidFill>
-                <a:latin typeface="Aptos" pitchFamily="34" charset="0"/>
-                <a:ea typeface="Aptos" pitchFamily="34" charset="-122"/>
-                <a:cs typeface="Aptos" pitchFamily="34" charset="-120"/>
-              </a:rPr>
-              <a:t>Geocoding errors can shift records across boundaries and distort.</a:t>
-            </a:r>
-            <a:endParaRPr lang="en-US" sz="1220" dirty="0"/>
-          </a:p>
-          <a:p>
-            <a:pPr indent="0" marL="0">
-              <a:buNone/>
-            </a:pPr>
-            <a:r>
-              <a:rPr lang="en-US" sz="1220" dirty="0">
-                <a:solidFill>
-                  <a:srgbClr val="17364A"/>
-                </a:solidFill>
-                <a:latin typeface="Aptos" pitchFamily="34" charset="0"/>
-                <a:ea typeface="Aptos" pitchFamily="34" charset="-122"/>
-                <a:cs typeface="Aptos" pitchFamily="34" charset="-120"/>
-              </a:rPr>
-              <a:t>Spatial scale shapes interpretation.</a:t>
-            </a:r>
-            <a:endParaRPr lang="en-US" sz="1220" dirty="0"/>
-          </a:p>
-        </p:txBody>
-      </p:sp>
-      <p:sp>
-        <p:nvSpPr>
-          <p:cNvPr id="16" name="Shape 14"/>
-          <p:cNvSpPr/>
-          <p:nvPr/>
-        </p:nvSpPr>
-        <p:spPr>
-          <a:xfrm>
-            <a:off x="7635240" y="4498848"/>
-            <a:ext cx="3474720" cy="1143000"/>
+            <a:pPr algn="ctr" indent="0" marL="0">
+              <a:buNone/>
+            </a:pPr>
+            <a:r>
+              <a:rPr lang="en-US" sz="880" b="1" dirty="0">
+                <a:solidFill>
+                  <a:srgbClr val="FFFFFF"/>
+                </a:solidFill>
+                <a:latin typeface="Aptos" pitchFamily="34" charset="0"/>
+                <a:ea typeface="Aptos" pitchFamily="34" charset="-122"/>
+                <a:cs typeface="Aptos" pitchFamily="34" charset="-120"/>
+              </a:rPr>
+              <a:t>Data</a:t>
+            </a:r>
+            <a:endParaRPr lang="en-US" sz="880" dirty="0"/>
+          </a:p>
+        </p:txBody>
+      </p:sp>
+      <p:sp>
+        <p:nvSpPr>
+          <p:cNvPr id="18" name="Shape 16"/>
+          <p:cNvSpPr/>
+          <p:nvPr/>
+        </p:nvSpPr>
+        <p:spPr>
+          <a:xfrm>
+            <a:off x="9817608" y="3351276"/>
+            <a:ext cx="164592" cy="0"/>
+          </a:xfrm>
+          <a:prstGeom prst="line">
+            <a:avLst/>
+          </a:prstGeom>
+          <a:noFill/>
+          <a:ln w="15240">
+            <a:solidFill>
+              <a:srgbClr val="8ABBD8"/>
+            </a:solidFill>
+            <a:prstDash val="solid"/>
+          </a:ln>
+        </p:spPr>
+      </p:sp>
+      <p:sp>
+        <p:nvSpPr>
+          <p:cNvPr id="19" name="Shape 17"/>
+          <p:cNvSpPr/>
+          <p:nvPr/>
+        </p:nvSpPr>
+        <p:spPr>
+          <a:xfrm>
+            <a:off x="8927592" y="3200400"/>
+            <a:ext cx="890016" cy="301752"/>
           </a:xfrm>
           <a:prstGeom prst="roundRect">
             <a:avLst>
-              <a:gd name="adj" fmla="val 9600"/>
+              <a:gd name="adj" fmla="val 24242"/>
+            </a:avLst>
+          </a:prstGeom>
+          <a:solidFill>
+            <a:srgbClr val="2F8A28"/>
+          </a:solidFill>
+          <a:ln w="12700">
+            <a:solidFill>
+              <a:srgbClr val="2F8A28"/>
+            </a:solidFill>
+            <a:prstDash val="solid"/>
+          </a:ln>
+        </p:spPr>
+      </p:sp>
+      <p:sp>
+        <p:nvSpPr>
+          <p:cNvPr id="20" name="Text 18"/>
+          <p:cNvSpPr/>
+          <p:nvPr/>
+        </p:nvSpPr>
+        <p:spPr>
+          <a:xfrm>
+            <a:off x="8964168" y="3273552"/>
+            <a:ext cx="816864" cy="146304"/>
+          </a:xfrm>
+          <a:prstGeom prst="rect">
+            <a:avLst/>
+          </a:prstGeom>
+          <a:noFill/>
+          <a:ln/>
+        </p:spPr>
+        <p:txBody>
+          <a:bodyPr wrap="square" lIns="0" tIns="0" rIns="0" bIns="0" rtlCol="0" anchor="ctr">
+            <a:normAutofit/>
+          </a:bodyPr>
+          <a:lstStyle/>
+          <a:p>
+            <a:pPr algn="ctr" indent="0" marL="0">
+              <a:buNone/>
+            </a:pPr>
+            <a:r>
+              <a:rPr lang="en-US" sz="880" b="1" dirty="0">
+                <a:solidFill>
+                  <a:srgbClr val="FFFFFF"/>
+                </a:solidFill>
+                <a:latin typeface="Aptos" pitchFamily="34" charset="0"/>
+                <a:ea typeface="Aptos" pitchFamily="34" charset="-122"/>
+                <a:cs typeface="Aptos" pitchFamily="34" charset="-120"/>
+              </a:rPr>
+              <a:t>Analysis</a:t>
+            </a:r>
+            <a:endParaRPr lang="en-US" sz="880" dirty="0"/>
+          </a:p>
+        </p:txBody>
+      </p:sp>
+      <p:sp>
+        <p:nvSpPr>
+          <p:cNvPr id="21" name="Shape 19"/>
+          <p:cNvSpPr/>
+          <p:nvPr/>
+        </p:nvSpPr>
+        <p:spPr>
+          <a:xfrm>
+            <a:off x="9982200" y="3200400"/>
+            <a:ext cx="890016" cy="301752"/>
+          </a:xfrm>
+          <a:prstGeom prst="roundRect">
+            <a:avLst>
+              <a:gd name="adj" fmla="val 24242"/>
+            </a:avLst>
+          </a:prstGeom>
+          <a:solidFill>
+            <a:srgbClr val="6A4CA3"/>
+          </a:solidFill>
+          <a:ln w="12700">
+            <a:solidFill>
+              <a:srgbClr val="6A4CA3"/>
+            </a:solidFill>
+            <a:prstDash val="solid"/>
+          </a:ln>
+        </p:spPr>
+      </p:sp>
+      <p:sp>
+        <p:nvSpPr>
+          <p:cNvPr id="22" name="Text 20"/>
+          <p:cNvSpPr/>
+          <p:nvPr/>
+        </p:nvSpPr>
+        <p:spPr>
+          <a:xfrm>
+            <a:off x="10018776" y="3273552"/>
+            <a:ext cx="816864" cy="146304"/>
+          </a:xfrm>
+          <a:prstGeom prst="rect">
+            <a:avLst/>
+          </a:prstGeom>
+          <a:noFill/>
+          <a:ln/>
+        </p:spPr>
+        <p:txBody>
+          <a:bodyPr wrap="square" lIns="0" tIns="0" rIns="0" bIns="0" rtlCol="0" anchor="ctr">
+            <a:normAutofit/>
+          </a:bodyPr>
+          <a:lstStyle/>
+          <a:p>
+            <a:pPr algn="ctr" indent="0" marL="0">
+              <a:buNone/>
+            </a:pPr>
+            <a:r>
+              <a:rPr lang="en-US" sz="880" b="1" dirty="0">
+                <a:solidFill>
+                  <a:srgbClr val="FFFFFF"/>
+                </a:solidFill>
+                <a:latin typeface="Aptos" pitchFamily="34" charset="0"/>
+                <a:ea typeface="Aptos" pitchFamily="34" charset="-122"/>
+                <a:cs typeface="Aptos" pitchFamily="34" charset="-120"/>
+              </a:rPr>
+              <a:t>Review</a:t>
+            </a:r>
+            <a:endParaRPr lang="en-US" sz="880" dirty="0"/>
+          </a:p>
+        </p:txBody>
+      </p:sp>
+      <p:sp>
+        <p:nvSpPr>
+          <p:cNvPr id="23" name="Text 21"/>
+          <p:cNvSpPr/>
+          <p:nvPr/>
+        </p:nvSpPr>
+        <p:spPr>
+          <a:xfrm>
+            <a:off x="7854696" y="3694176"/>
+            <a:ext cx="3035808" cy="206654"/>
+          </a:xfrm>
+          <a:prstGeom prst="rect">
+            <a:avLst/>
+          </a:prstGeom>
+          <a:noFill/>
+          <a:ln/>
+        </p:spPr>
+        <p:txBody>
+          <a:bodyPr wrap="square" lIns="254" tIns="254" rIns="254" bIns="254" rtlCol="0" anchor="t">
+            <a:normAutofit/>
+          </a:bodyPr>
+          <a:lstStyle/>
+          <a:p>
+            <a:pPr indent="0" marL="0">
+              <a:buNone/>
+            </a:pPr>
+            <a:r>
+              <a:rPr lang="en-US" sz="1120" dirty="0">
+                <a:solidFill>
+                  <a:srgbClr val="17364A"/>
+                </a:solidFill>
+                <a:latin typeface="Aptos" pitchFamily="34" charset="0"/>
+                <a:ea typeface="Aptos" pitchFamily="34" charset="-122"/>
+                <a:cs typeface="Aptos" pitchFamily="34" charset="-120"/>
+              </a:rPr>
+              <a:t>The important handoff is not from data to AI; it is from analysis to accountable human review.</a:t>
+            </a:r>
+            <a:endParaRPr lang="en-US" sz="1120" dirty="0"/>
+          </a:p>
+        </p:txBody>
+      </p:sp>
+      <p:sp>
+        <p:nvSpPr>
+          <p:cNvPr id="24" name="Shape 22"/>
+          <p:cNvSpPr/>
+          <p:nvPr/>
+        </p:nvSpPr>
+        <p:spPr>
+          <a:xfrm>
+            <a:off x="7635240" y="4184294"/>
+            <a:ext cx="3474720" cy="1466698"/>
+          </a:xfrm>
+          <a:prstGeom prst="roundRect">
+            <a:avLst>
+              <a:gd name="adj" fmla="val 7481"/>
             </a:avLst>
           </a:prstGeom>
           <a:solidFill>
@@ -3687,13 +3903,13 @@
       </p:sp>
       <p:sp>
         <p:nvSpPr>
-          <p:cNvPr id="17" name="Text 15"/>
-          <p:cNvSpPr/>
-          <p:nvPr/>
-        </p:nvSpPr>
-        <p:spPr>
-          <a:xfrm>
-            <a:off x="7799832" y="4645152"/>
+          <p:cNvPr id="25" name="Text 23"/>
+          <p:cNvSpPr/>
+          <p:nvPr/>
+        </p:nvSpPr>
+        <p:spPr>
+          <a:xfrm>
+            <a:off x="7799832" y="4330598"/>
             <a:ext cx="3145536" cy="256032"/>
           </a:xfrm>
           <a:prstGeom prst="rect">
@@ -3726,14 +3942,14 @@
       </p:sp>
       <p:sp>
         <p:nvSpPr>
-          <p:cNvPr id="18" name="Text 16"/>
-          <p:cNvSpPr/>
-          <p:nvPr/>
-        </p:nvSpPr>
-        <p:spPr>
-          <a:xfrm>
-            <a:off x="7799832" y="4974336"/>
-            <a:ext cx="3145536" cy="576072"/>
+          <p:cNvPr id="26" name="Text 24"/>
+          <p:cNvSpPr/>
+          <p:nvPr/>
+        </p:nvSpPr>
+        <p:spPr>
+          <a:xfrm>
+            <a:off x="7799832" y="4659782"/>
+            <a:ext cx="3145536" cy="899770"/>
           </a:xfrm>
           <a:prstGeom prst="rect">
             <a:avLst/>
@@ -3759,7 +3975,7 @@
                 <a:ea typeface="Aptos" pitchFamily="34" charset="-122"/>
                 <a:cs typeface="Aptos" pitchFamily="34" charset="-120"/>
               </a:rPr>
-              <a:t>Connect the concept to public health purpose, responsible use, required safeguards, documentation, and the next action a.</a:t>
+              <a:t>Connect the concept to public health purpose, responsible use, required safeguards, documentation, and the next action a department should take.</a:t>
             </a:r>
             <a:endParaRPr lang="en-US" sz="1320" dirty="0"/>
           </a:p>
@@ -4128,11 +4344,11 @@
         <p:spPr>
           <a:xfrm>
             <a:off x="7635240" y="1325880"/>
-            <a:ext cx="3474720" cy="1325880"/>
+            <a:ext cx="3474720" cy="1207008"/>
           </a:xfrm>
           <a:prstGeom prst="roundRect">
             <a:avLst>
-              <a:gd name="adj" fmla="val 8276"/>
+              <a:gd name="adj" fmla="val 9091"/>
             </a:avLst>
           </a:prstGeom>
           <a:solidFill>
@@ -4194,7 +4410,7 @@
         <p:spPr>
           <a:xfrm>
             <a:off x="7799832" y="1801368"/>
-            <a:ext cx="3145536" cy="758952"/>
+            <a:ext cx="3145536" cy="640080"/>
           </a:xfrm>
           <a:prstGeom prst="rect">
             <a:avLst/>
@@ -4234,12 +4450,12 @@
         </p:nvSpPr>
         <p:spPr>
           <a:xfrm>
-            <a:off x="7635240" y="2788920"/>
-            <a:ext cx="3474720" cy="1536192"/>
+            <a:off x="7635240" y="2670048"/>
+            <a:ext cx="3474720" cy="1377086"/>
           </a:xfrm>
           <a:prstGeom prst="roundRect">
             <a:avLst>
-              <a:gd name="adj" fmla="val 7143"/>
+              <a:gd name="adj" fmla="val 7968"/>
             </a:avLst>
           </a:prstGeom>
           <a:solidFill>
@@ -4261,7 +4477,7 @@
         </p:nvSpPr>
         <p:spPr>
           <a:xfrm>
-            <a:off x="7799832" y="2935224"/>
+            <a:off x="7799832" y="2816352"/>
             <a:ext cx="3145536" cy="256032"/>
           </a:xfrm>
           <a:prstGeom prst="rect">
@@ -4300,8 +4516,8 @@
         </p:nvSpPr>
         <p:spPr>
           <a:xfrm>
-            <a:off x="7818120" y="3300984"/>
-            <a:ext cx="3090672" cy="877824"/>
+            <a:off x="7818120" y="3182112"/>
+            <a:ext cx="3090672" cy="718718"/>
           </a:xfrm>
           <a:prstGeom prst="rect">
             <a:avLst/>
@@ -4375,12 +4591,12 @@
         </p:nvSpPr>
         <p:spPr>
           <a:xfrm>
-            <a:off x="7635240" y="4498848"/>
-            <a:ext cx="3474720" cy="1143000"/>
+            <a:off x="7635240" y="4184294"/>
+            <a:ext cx="3474720" cy="1466698"/>
           </a:xfrm>
           <a:prstGeom prst="roundRect">
             <a:avLst>
-              <a:gd name="adj" fmla="val 9600"/>
+              <a:gd name="adj" fmla="val 7481"/>
             </a:avLst>
           </a:prstGeom>
           <a:solidFill>
@@ -4402,7 +4618,7 @@
         </p:nvSpPr>
         <p:spPr>
           <a:xfrm>
-            <a:off x="7799832" y="4645152"/>
+            <a:off x="7799832" y="4330598"/>
             <a:ext cx="3145536" cy="256032"/>
           </a:xfrm>
           <a:prstGeom prst="rect">
@@ -4441,8 +4657,8 @@
         </p:nvSpPr>
         <p:spPr>
           <a:xfrm>
-            <a:off x="7799832" y="4974336"/>
-            <a:ext cx="3145536" cy="576072"/>
+            <a:off x="7799832" y="4659782"/>
+            <a:ext cx="3145536" cy="899770"/>
           </a:xfrm>
           <a:prstGeom prst="rect">
             <a:avLst/>
@@ -4468,7 +4684,7 @@
                 <a:ea typeface="Aptos" pitchFamily="34" charset="-122"/>
                 <a:cs typeface="Aptos" pitchFamily="34" charset="-120"/>
               </a:rPr>
-              <a:t>Connect the concept to public health purpose, responsible use, required safeguards, documentation, and the next action a.</a:t>
+              <a:t>Connect the concept to public health purpose, responsible use, required safeguards, documentation, and the next action a department should take.</a:t>
             </a:r>
             <a:endParaRPr lang="en-US" sz="1320" dirty="0"/>
           </a:p>
@@ -4837,11 +5053,11 @@
         <p:spPr>
           <a:xfrm>
             <a:off x="7635240" y="1325880"/>
-            <a:ext cx="3474720" cy="1325880"/>
+            <a:ext cx="3474720" cy="1207008"/>
           </a:xfrm>
           <a:prstGeom prst="roundRect">
             <a:avLst>
-              <a:gd name="adj" fmla="val 8276"/>
+              <a:gd name="adj" fmla="val 9091"/>
             </a:avLst>
           </a:prstGeom>
           <a:solidFill>
@@ -4903,7 +5119,7 @@
         <p:spPr>
           <a:xfrm>
             <a:off x="7799832" y="1801368"/>
-            <a:ext cx="3145536" cy="758952"/>
+            <a:ext cx="3145536" cy="640080"/>
           </a:xfrm>
           <a:prstGeom prst="rect">
             <a:avLst/>
@@ -4943,7 +5159,7 @@
         </p:nvSpPr>
         <p:spPr>
           <a:xfrm>
-            <a:off x="7635240" y="2788920"/>
+            <a:off x="7635240" y="2670048"/>
             <a:ext cx="3474720" cy="1536192"/>
           </a:xfrm>
           <a:prstGeom prst="roundRect">
@@ -4970,7 +5186,7 @@
         </p:nvSpPr>
         <p:spPr>
           <a:xfrm>
-            <a:off x="7799832" y="2935224"/>
+            <a:off x="7799832" y="2816352"/>
             <a:ext cx="3145536" cy="256032"/>
           </a:xfrm>
           <a:prstGeom prst="rect">
@@ -5009,7 +5225,7 @@
         </p:nvSpPr>
         <p:spPr>
           <a:xfrm>
-            <a:off x="7818120" y="3300984"/>
+            <a:off x="7818120" y="3182112"/>
             <a:ext cx="3090672" cy="877824"/>
           </a:xfrm>
           <a:prstGeom prst="rect">
@@ -5084,12 +5300,12 @@
         </p:nvSpPr>
         <p:spPr>
           <a:xfrm>
-            <a:off x="7635240" y="4498848"/>
-            <a:ext cx="3474720" cy="1143000"/>
+            <a:off x="7635240" y="4343400"/>
+            <a:ext cx="3474720" cy="1255471"/>
           </a:xfrm>
           <a:prstGeom prst="roundRect">
             <a:avLst>
-              <a:gd name="adj" fmla="val 9600"/>
+              <a:gd name="adj" fmla="val 8740"/>
             </a:avLst>
           </a:prstGeom>
           <a:solidFill>
@@ -5111,7 +5327,7 @@
         </p:nvSpPr>
         <p:spPr>
           <a:xfrm>
-            <a:off x="7799832" y="4645152"/>
+            <a:off x="7799832" y="4489704"/>
             <a:ext cx="3145536" cy="256032"/>
           </a:xfrm>
           <a:prstGeom prst="rect">
@@ -5150,8 +5366,8 @@
         </p:nvSpPr>
         <p:spPr>
           <a:xfrm>
-            <a:off x="7799832" y="4974336"/>
-            <a:ext cx="3145536" cy="576072"/>
+            <a:off x="7799832" y="4818888"/>
+            <a:ext cx="3145536" cy="688543"/>
           </a:xfrm>
           <a:prstGeom prst="rect">
             <a:avLst/>
@@ -5177,7 +5393,7 @@
                 <a:ea typeface="Aptos" pitchFamily="34" charset="-122"/>
                 <a:cs typeface="Aptos" pitchFamily="34" charset="-120"/>
               </a:rPr>
-              <a:t>Identify what could go wrong, who could be affected, what safeguards are needed, and what evidence should be reviewed.</a:t>
+              <a:t>Identify what could go wrong, who could be affected, what safeguards are needed, and what evidence should be reviewed before use.</a:t>
             </a:r>
             <a:endParaRPr lang="en-US" sz="1320" dirty="0"/>
           </a:p>
@@ -5546,11 +5762,11 @@
         <p:spPr>
           <a:xfrm>
             <a:off x="7635240" y="1325880"/>
-            <a:ext cx="3474720" cy="1325880"/>
+            <a:ext cx="3474720" cy="1207008"/>
           </a:xfrm>
           <a:prstGeom prst="roundRect">
             <a:avLst>
-              <a:gd name="adj" fmla="val 8276"/>
+              <a:gd name="adj" fmla="val 9091"/>
             </a:avLst>
           </a:prstGeom>
           <a:solidFill>
@@ -5612,7 +5828,7 @@
         <p:spPr>
           <a:xfrm>
             <a:off x="7799832" y="1801368"/>
-            <a:ext cx="3145536" cy="758952"/>
+            <a:ext cx="3145536" cy="640080"/>
           </a:xfrm>
           <a:prstGeom prst="rect">
             <a:avLst/>
@@ -5652,7 +5868,7 @@
         </p:nvSpPr>
         <p:spPr>
           <a:xfrm>
-            <a:off x="7635240" y="2788920"/>
+            <a:off x="7635240" y="2670048"/>
             <a:ext cx="3474720" cy="1536192"/>
           </a:xfrm>
           <a:prstGeom prst="roundRect">
@@ -5679,7 +5895,7 @@
         </p:nvSpPr>
         <p:spPr>
           <a:xfrm>
-            <a:off x="7799832" y="2935224"/>
+            <a:off x="7799832" y="2816352"/>
             <a:ext cx="3145536" cy="256032"/>
           </a:xfrm>
           <a:prstGeom prst="rect">
@@ -5718,7 +5934,7 @@
         </p:nvSpPr>
         <p:spPr>
           <a:xfrm>
-            <a:off x="7818120" y="3300984"/>
+            <a:off x="7818120" y="3182112"/>
             <a:ext cx="3090672" cy="877824"/>
           </a:xfrm>
           <a:prstGeom prst="rect">
@@ -5793,12 +6009,12 @@
         </p:nvSpPr>
         <p:spPr>
           <a:xfrm>
-            <a:off x="7635240" y="4498848"/>
-            <a:ext cx="3474720" cy="1143000"/>
+            <a:off x="7635240" y="4343400"/>
+            <a:ext cx="3474720" cy="1255471"/>
           </a:xfrm>
           <a:prstGeom prst="roundRect">
             <a:avLst>
-              <a:gd name="adj" fmla="val 9600"/>
+              <a:gd name="adj" fmla="val 8740"/>
             </a:avLst>
           </a:prstGeom>
           <a:solidFill>
@@ -5820,7 +6036,7 @@
         </p:nvSpPr>
         <p:spPr>
           <a:xfrm>
-            <a:off x="7799832" y="4645152"/>
+            <a:off x="7799832" y="4489704"/>
             <a:ext cx="3145536" cy="256032"/>
           </a:xfrm>
           <a:prstGeom prst="rect">
@@ -5859,8 +6075,8 @@
         </p:nvSpPr>
         <p:spPr>
           <a:xfrm>
-            <a:off x="7799832" y="4974336"/>
-            <a:ext cx="3145536" cy="576072"/>
+            <a:off x="7799832" y="4818888"/>
+            <a:ext cx="3145536" cy="688543"/>
           </a:xfrm>
           <a:prstGeom prst="rect">
             <a:avLst/>
@@ -5886,7 +6102,7 @@
                 <a:ea typeface="Aptos" pitchFamily="34" charset="-122"/>
                 <a:cs typeface="Aptos" pitchFamily="34" charset="-120"/>
               </a:rPr>
-              <a:t>Identify what could go wrong, who could be affected, what safeguards are needed, and what evidence should be reviewed.</a:t>
+              <a:t>Identify what could go wrong, who could be affected, what safeguards are needed, and what evidence should be reviewed before use.</a:t>
             </a:r>
             <a:endParaRPr lang="en-US" sz="1320" dirty="0"/>
           </a:p>
@@ -6255,11 +6471,11 @@
         <p:spPr>
           <a:xfrm>
             <a:off x="7635240" y="1325880"/>
-            <a:ext cx="3474720" cy="1325880"/>
+            <a:ext cx="3474720" cy="1255471"/>
           </a:xfrm>
           <a:prstGeom prst="roundRect">
             <a:avLst>
-              <a:gd name="adj" fmla="val 8276"/>
+              <a:gd name="adj" fmla="val 8740"/>
             </a:avLst>
           </a:prstGeom>
           <a:solidFill>
@@ -6321,7 +6537,7 @@
         <p:spPr>
           <a:xfrm>
             <a:off x="7799832" y="1801368"/>
-            <a:ext cx="3145536" cy="758952"/>
+            <a:ext cx="3145536" cy="688543"/>
           </a:xfrm>
           <a:prstGeom prst="rect">
             <a:avLst/>
@@ -6361,12 +6577,12 @@
         </p:nvSpPr>
         <p:spPr>
           <a:xfrm>
-            <a:off x="7635240" y="2788920"/>
-            <a:ext cx="3474720" cy="1536192"/>
+            <a:off x="7635240" y="2718511"/>
+            <a:ext cx="3474720" cy="1328623"/>
           </a:xfrm>
           <a:prstGeom prst="roundRect">
             <a:avLst>
-              <a:gd name="adj" fmla="val 7143"/>
+              <a:gd name="adj" fmla="val 8259"/>
             </a:avLst>
           </a:prstGeom>
           <a:solidFill>
@@ -6388,7 +6604,7 @@
         </p:nvSpPr>
         <p:spPr>
           <a:xfrm>
-            <a:off x="7799832" y="2935224"/>
+            <a:off x="7799832" y="2864815"/>
             <a:ext cx="3145536" cy="256032"/>
           </a:xfrm>
           <a:prstGeom prst="rect">
@@ -6427,8 +6643,8 @@
         </p:nvSpPr>
         <p:spPr>
           <a:xfrm>
-            <a:off x="7818120" y="3300984"/>
-            <a:ext cx="3090672" cy="877824"/>
+            <a:off x="7818120" y="3230575"/>
+            <a:ext cx="3090672" cy="670255"/>
           </a:xfrm>
           <a:prstGeom prst="rect">
             <a:avLst/>
@@ -6502,12 +6718,12 @@
         </p:nvSpPr>
         <p:spPr>
           <a:xfrm>
-            <a:off x="7635240" y="4498848"/>
-            <a:ext cx="3474720" cy="1143000"/>
+            <a:off x="7635240" y="4184294"/>
+            <a:ext cx="3474720" cy="1466698"/>
           </a:xfrm>
           <a:prstGeom prst="roundRect">
             <a:avLst>
-              <a:gd name="adj" fmla="val 9600"/>
+              <a:gd name="adj" fmla="val 7481"/>
             </a:avLst>
           </a:prstGeom>
           <a:solidFill>
@@ -6529,7 +6745,7 @@
         </p:nvSpPr>
         <p:spPr>
           <a:xfrm>
-            <a:off x="7799832" y="4645152"/>
+            <a:off x="7799832" y="4330598"/>
             <a:ext cx="3145536" cy="256032"/>
           </a:xfrm>
           <a:prstGeom prst="rect">
@@ -6568,8 +6784,8 @@
         </p:nvSpPr>
         <p:spPr>
           <a:xfrm>
-            <a:off x="7799832" y="4974336"/>
-            <a:ext cx="3145536" cy="576072"/>
+            <a:off x="7799832" y="4659782"/>
+            <a:ext cx="3145536" cy="899770"/>
           </a:xfrm>
           <a:prstGeom prst="rect">
             <a:avLst/>
@@ -6595,7 +6811,7 @@
                 <a:ea typeface="Aptos" pitchFamily="34" charset="-122"/>
                 <a:cs typeface="Aptos" pitchFamily="34" charset="-120"/>
               </a:rPr>
-              <a:t>Use the concept to clarify workflow changes, dependencies, staffing, procurement requirements, training needs, and.</a:t>
+              <a:t>Use the concept to clarify workflow changes, dependencies, staffing, procurement requirements, training needs, and implementation checkpoints.</a:t>
             </a:r>
             <a:endParaRPr lang="en-US" sz="1320" dirty="0"/>
           </a:p>
@@ -6964,11 +7180,11 @@
         <p:spPr>
           <a:xfrm>
             <a:off x="7635240" y="1325880"/>
-            <a:ext cx="3474720" cy="1325880"/>
+            <a:ext cx="3474720" cy="1207008"/>
           </a:xfrm>
           <a:prstGeom prst="roundRect">
             <a:avLst>
-              <a:gd name="adj" fmla="val 8276"/>
+              <a:gd name="adj" fmla="val 9091"/>
             </a:avLst>
           </a:prstGeom>
           <a:solidFill>
@@ -7030,7 +7246,7 @@
         <p:spPr>
           <a:xfrm>
             <a:off x="7799832" y="1801368"/>
-            <a:ext cx="3145536" cy="758952"/>
+            <a:ext cx="3145536" cy="640080"/>
           </a:xfrm>
           <a:prstGeom prst="rect">
             <a:avLst/>
@@ -7070,12 +7286,12 @@
         </p:nvSpPr>
         <p:spPr>
           <a:xfrm>
-            <a:off x="7635240" y="2788920"/>
-            <a:ext cx="3474720" cy="1536192"/>
+            <a:off x="7635240" y="2670048"/>
+            <a:ext cx="3474720" cy="1377086"/>
           </a:xfrm>
           <a:prstGeom prst="roundRect">
             <a:avLst>
-              <a:gd name="adj" fmla="val 7143"/>
+              <a:gd name="adj" fmla="val 7968"/>
             </a:avLst>
           </a:prstGeom>
           <a:solidFill>
@@ -7097,7 +7313,7 @@
         </p:nvSpPr>
         <p:spPr>
           <a:xfrm>
-            <a:off x="7799832" y="2935224"/>
+            <a:off x="7799832" y="2816352"/>
             <a:ext cx="3145536" cy="256032"/>
           </a:xfrm>
           <a:prstGeom prst="rect">
@@ -7136,8 +7352,8 @@
         </p:nvSpPr>
         <p:spPr>
           <a:xfrm>
-            <a:off x="7818120" y="3300984"/>
-            <a:ext cx="3090672" cy="877824"/>
+            <a:off x="7818120" y="3182112"/>
+            <a:ext cx="3090672" cy="718718"/>
           </a:xfrm>
           <a:prstGeom prst="rect">
             <a:avLst/>
@@ -7211,12 +7427,12 @@
         </p:nvSpPr>
         <p:spPr>
           <a:xfrm>
-            <a:off x="7635240" y="4498848"/>
-            <a:ext cx="3474720" cy="1143000"/>
+            <a:off x="7635240" y="4184294"/>
+            <a:ext cx="3474720" cy="1466698"/>
           </a:xfrm>
           <a:prstGeom prst="roundRect">
             <a:avLst>
-              <a:gd name="adj" fmla="val 9600"/>
+              <a:gd name="adj" fmla="val 7481"/>
             </a:avLst>
           </a:prstGeom>
           <a:solidFill>
@@ -7238,7 +7454,7 @@
         </p:nvSpPr>
         <p:spPr>
           <a:xfrm>
-            <a:off x="7799832" y="4645152"/>
+            <a:off x="7799832" y="4330598"/>
             <a:ext cx="3145536" cy="256032"/>
           </a:xfrm>
           <a:prstGeom prst="rect">
@@ -7277,8 +7493,8 @@
         </p:nvSpPr>
         <p:spPr>
           <a:xfrm>
-            <a:off x="7799832" y="4974336"/>
-            <a:ext cx="3145536" cy="576072"/>
+            <a:off x="7799832" y="4659782"/>
+            <a:ext cx="3145536" cy="899770"/>
           </a:xfrm>
           <a:prstGeom prst="rect">
             <a:avLst/>
@@ -7304,7 +7520,7 @@
                 <a:ea typeface="Aptos" pitchFamily="34" charset="-122"/>
                 <a:cs typeface="Aptos" pitchFamily="34" charset="-120"/>
               </a:rPr>
-              <a:t>Connect the concept to public health purpose, responsible use, required safeguards, documentation, and the next action a.</a:t>
+              <a:t>Connect the concept to public health purpose, responsible use, required safeguards, documentation, and the next action a department should take.</a:t>
             </a:r>
             <a:endParaRPr lang="en-US" sz="1320" dirty="0"/>
           </a:p>
@@ -7656,11 +7872,11 @@
         <p:spPr>
           <a:xfrm>
             <a:off x="7635240" y="1325880"/>
-            <a:ext cx="3474720" cy="1325880"/>
+            <a:ext cx="3474720" cy="1207008"/>
           </a:xfrm>
           <a:prstGeom prst="roundRect">
             <a:avLst>
-              <a:gd name="adj" fmla="val 8276"/>
+              <a:gd name="adj" fmla="val 9091"/>
             </a:avLst>
           </a:prstGeom>
           <a:solidFill>
@@ -7722,7 +7938,7 @@
         <p:spPr>
           <a:xfrm>
             <a:off x="7799832" y="1801368"/>
-            <a:ext cx="3145536" cy="758952"/>
+            <a:ext cx="3145536" cy="640080"/>
           </a:xfrm>
           <a:prstGeom prst="rect">
             <a:avLst/>
@@ -7762,12 +7978,12 @@
         </p:nvSpPr>
         <p:spPr>
           <a:xfrm>
-            <a:off x="7635240" y="2788920"/>
-            <a:ext cx="3474720" cy="1536192"/>
+            <a:off x="7635240" y="2670048"/>
+            <a:ext cx="3474720" cy="1377086"/>
           </a:xfrm>
           <a:prstGeom prst="roundRect">
             <a:avLst>
-              <a:gd name="adj" fmla="val 7143"/>
+              <a:gd name="adj" fmla="val 7968"/>
             </a:avLst>
           </a:prstGeom>
           <a:solidFill>
@@ -7789,7 +8005,7 @@
         </p:nvSpPr>
         <p:spPr>
           <a:xfrm>
-            <a:off x="7799832" y="2935224"/>
+            <a:off x="7799832" y="2816352"/>
             <a:ext cx="3145536" cy="256032"/>
           </a:xfrm>
           <a:prstGeom prst="rect">
@@ -7828,8 +8044,8 @@
         </p:nvSpPr>
         <p:spPr>
           <a:xfrm>
-            <a:off x="7818120" y="3300984"/>
-            <a:ext cx="3090672" cy="877824"/>
+            <a:off x="7818120" y="3182112"/>
+            <a:ext cx="3090672" cy="718718"/>
           </a:xfrm>
           <a:prstGeom prst="rect">
             <a:avLst/>
@@ -7886,12 +8102,12 @@
         </p:nvSpPr>
         <p:spPr>
           <a:xfrm>
-            <a:off x="7635240" y="4498848"/>
-            <a:ext cx="3474720" cy="1143000"/>
+            <a:off x="7635240" y="4184294"/>
+            <a:ext cx="3474720" cy="1466698"/>
           </a:xfrm>
           <a:prstGeom prst="roundRect">
             <a:avLst>
-              <a:gd name="adj" fmla="val 9600"/>
+              <a:gd name="adj" fmla="val 7481"/>
             </a:avLst>
           </a:prstGeom>
           <a:solidFill>
@@ -7913,7 +8129,7 @@
         </p:nvSpPr>
         <p:spPr>
           <a:xfrm>
-            <a:off x="7799832" y="4645152"/>
+            <a:off x="7799832" y="4330598"/>
             <a:ext cx="3145536" cy="256032"/>
           </a:xfrm>
           <a:prstGeom prst="rect">
@@ -7952,8 +8168,8 @@
         </p:nvSpPr>
         <p:spPr>
           <a:xfrm>
-            <a:off x="7799832" y="4974336"/>
-            <a:ext cx="3145536" cy="576072"/>
+            <a:off x="7799832" y="4659782"/>
+            <a:ext cx="3145536" cy="899770"/>
           </a:xfrm>
           <a:prstGeom prst="rect">
             <a:avLst/>
@@ -7979,7 +8195,7 @@
                 <a:ea typeface="Aptos" pitchFamily="34" charset="-122"/>
                 <a:cs typeface="Aptos" pitchFamily="34" charset="-120"/>
               </a:rPr>
-              <a:t>Connect the concept to public health purpose, responsible use, required safeguards, documentation, and the next action a.</a:t>
+              <a:t>Connect the concept to public health purpose, responsible use, required safeguards, documentation, and the next action a department should take.</a:t>
             </a:r>
             <a:endParaRPr lang="en-US" sz="1320" dirty="0"/>
           </a:p>
@@ -8348,11 +8564,11 @@
         <p:spPr>
           <a:xfrm>
             <a:off x="7635240" y="1325880"/>
-            <a:ext cx="3474720" cy="1325880"/>
+            <a:ext cx="3474720" cy="1207008"/>
           </a:xfrm>
           <a:prstGeom prst="roundRect">
             <a:avLst>
-              <a:gd name="adj" fmla="val 8276"/>
+              <a:gd name="adj" fmla="val 9091"/>
             </a:avLst>
           </a:prstGeom>
           <a:solidFill>
@@ -8414,7 +8630,7 @@
         <p:spPr>
           <a:xfrm>
             <a:off x="7799832" y="1801368"/>
-            <a:ext cx="3145536" cy="758952"/>
+            <a:ext cx="3145536" cy="640080"/>
           </a:xfrm>
           <a:prstGeom prst="rect">
             <a:avLst/>
@@ -8454,12 +8670,12 @@
         </p:nvSpPr>
         <p:spPr>
           <a:xfrm>
-            <a:off x="7635240" y="2788920"/>
-            <a:ext cx="3474720" cy="1536192"/>
+            <a:off x="7635240" y="2670048"/>
+            <a:ext cx="3474720" cy="1377086"/>
           </a:xfrm>
           <a:prstGeom prst="roundRect">
             <a:avLst>
-              <a:gd name="adj" fmla="val 7143"/>
+              <a:gd name="adj" fmla="val 7968"/>
             </a:avLst>
           </a:prstGeom>
           <a:solidFill>
@@ -8481,7 +8697,7 @@
         </p:nvSpPr>
         <p:spPr>
           <a:xfrm>
-            <a:off x="7799832" y="2935224"/>
+            <a:off x="7799832" y="2816352"/>
             <a:ext cx="3145536" cy="256032"/>
           </a:xfrm>
           <a:prstGeom prst="rect">
@@ -8520,8 +8736,8 @@
         </p:nvSpPr>
         <p:spPr>
           <a:xfrm>
-            <a:off x="7818120" y="3300984"/>
-            <a:ext cx="3090672" cy="877824"/>
+            <a:off x="7818120" y="3182112"/>
+            <a:ext cx="3090672" cy="718718"/>
           </a:xfrm>
           <a:prstGeom prst="rect">
             <a:avLst/>
@@ -8578,12 +8794,12 @@
         </p:nvSpPr>
         <p:spPr>
           <a:xfrm>
-            <a:off x="7635240" y="4498848"/>
-            <a:ext cx="3474720" cy="1143000"/>
+            <a:off x="7635240" y="4184294"/>
+            <a:ext cx="3474720" cy="1466698"/>
           </a:xfrm>
           <a:prstGeom prst="roundRect">
             <a:avLst>
-              <a:gd name="adj" fmla="val 9600"/>
+              <a:gd name="adj" fmla="val 7481"/>
             </a:avLst>
           </a:prstGeom>
           <a:solidFill>
@@ -8605,7 +8821,7 @@
         </p:nvSpPr>
         <p:spPr>
           <a:xfrm>
-            <a:off x="7799832" y="4645152"/>
+            <a:off x="7799832" y="4330598"/>
             <a:ext cx="3145536" cy="256032"/>
           </a:xfrm>
           <a:prstGeom prst="rect">
@@ -8644,8 +8860,8 @@
         </p:nvSpPr>
         <p:spPr>
           <a:xfrm>
-            <a:off x="7799832" y="4974336"/>
-            <a:ext cx="3145536" cy="576072"/>
+            <a:off x="7799832" y="4659782"/>
+            <a:ext cx="3145536" cy="899770"/>
           </a:xfrm>
           <a:prstGeom prst="rect">
             <a:avLst/>
@@ -8671,7 +8887,7 @@
                 <a:ea typeface="Aptos" pitchFamily="34" charset="-122"/>
                 <a:cs typeface="Aptos" pitchFamily="34" charset="-120"/>
               </a:rPr>
-              <a:t>Use the assignment to test whether you can explain the concept, apply it to a realistic public health situation, and.</a:t>
+              <a:t>Use the assignment to test whether you can explain the concept, apply it to a realistic public health situation, and identify what would need review before the work moves forward.</a:t>
             </a:r>
             <a:endParaRPr lang="en-US" sz="1320" dirty="0"/>
           </a:p>
@@ -9040,11 +9256,11 @@
         <p:spPr>
           <a:xfrm>
             <a:off x="7635240" y="1325880"/>
-            <a:ext cx="3474720" cy="1325880"/>
+            <a:ext cx="3474720" cy="1207008"/>
           </a:xfrm>
           <a:prstGeom prst="roundRect">
             <a:avLst>
-              <a:gd name="adj" fmla="val 8276"/>
+              <a:gd name="adj" fmla="val 9091"/>
             </a:avLst>
           </a:prstGeom>
           <a:solidFill>
@@ -9106,7 +9322,7 @@
         <p:spPr>
           <a:xfrm>
             <a:off x="7799832" y="1801368"/>
-            <a:ext cx="3145536" cy="758952"/>
+            <a:ext cx="3145536" cy="640080"/>
           </a:xfrm>
           <a:prstGeom prst="rect">
             <a:avLst/>
@@ -9146,12 +9362,12 @@
         </p:nvSpPr>
         <p:spPr>
           <a:xfrm>
-            <a:off x="7635240" y="2788920"/>
-            <a:ext cx="3474720" cy="1536192"/>
+            <a:off x="7635240" y="2670048"/>
+            <a:ext cx="3474720" cy="1377086"/>
           </a:xfrm>
           <a:prstGeom prst="roundRect">
             <a:avLst>
-              <a:gd name="adj" fmla="val 7143"/>
+              <a:gd name="adj" fmla="val 7968"/>
             </a:avLst>
           </a:prstGeom>
           <a:solidFill>
@@ -9173,7 +9389,7 @@
         </p:nvSpPr>
         <p:spPr>
           <a:xfrm>
-            <a:off x="7799832" y="2935224"/>
+            <a:off x="7799832" y="2816352"/>
             <a:ext cx="3145536" cy="256032"/>
           </a:xfrm>
           <a:prstGeom prst="rect">
@@ -9212,8 +9428,8 @@
         </p:nvSpPr>
         <p:spPr>
           <a:xfrm>
-            <a:off x="7818120" y="3300984"/>
-            <a:ext cx="3090672" cy="877824"/>
+            <a:off x="7818120" y="3182112"/>
+            <a:ext cx="3090672" cy="718718"/>
           </a:xfrm>
           <a:prstGeom prst="rect">
             <a:avLst/>
@@ -9287,12 +9503,12 @@
         </p:nvSpPr>
         <p:spPr>
           <a:xfrm>
-            <a:off x="7635240" y="4498848"/>
-            <a:ext cx="3474720" cy="1143000"/>
+            <a:off x="7635240" y="4184294"/>
+            <a:ext cx="3474720" cy="1466698"/>
           </a:xfrm>
           <a:prstGeom prst="roundRect">
             <a:avLst>
-              <a:gd name="adj" fmla="val 9600"/>
+              <a:gd name="adj" fmla="val 7481"/>
             </a:avLst>
           </a:prstGeom>
           <a:solidFill>
@@ -9314,7 +9530,7 @@
         </p:nvSpPr>
         <p:spPr>
           <a:xfrm>
-            <a:off x="7799832" y="4645152"/>
+            <a:off x="7799832" y="4330598"/>
             <a:ext cx="3145536" cy="256032"/>
           </a:xfrm>
           <a:prstGeom prst="rect">
@@ -9353,8 +9569,8 @@
         </p:nvSpPr>
         <p:spPr>
           <a:xfrm>
-            <a:off x="7799832" y="4974336"/>
-            <a:ext cx="3145536" cy="576072"/>
+            <a:off x="7799832" y="4659782"/>
+            <a:ext cx="3145536" cy="899770"/>
           </a:xfrm>
           <a:prstGeom prst="rect">
             <a:avLst/>
@@ -9380,7 +9596,7 @@
                 <a:ea typeface="Aptos" pitchFamily="34" charset="-122"/>
                 <a:cs typeface="Aptos" pitchFamily="34" charset="-120"/>
               </a:rPr>
-              <a:t>Connect the concept to public health purpose, responsible use, required safeguards, documentation, and the next action a.</a:t>
+              <a:t>Connect the concept to public health purpose, responsible use, required safeguards, documentation, and the next action a department should take.</a:t>
             </a:r>
             <a:endParaRPr lang="en-US" sz="1320" dirty="0"/>
           </a:p>
@@ -9715,11 +9931,11 @@
         <p:spPr>
           <a:xfrm>
             <a:off x="7635240" y="1325880"/>
-            <a:ext cx="3474720" cy="1325880"/>
+            <a:ext cx="3474720" cy="1207008"/>
           </a:xfrm>
           <a:prstGeom prst="roundRect">
             <a:avLst>
-              <a:gd name="adj" fmla="val 8276"/>
+              <a:gd name="adj" fmla="val 9091"/>
             </a:avLst>
           </a:prstGeom>
           <a:solidFill>
@@ -9781,7 +9997,7 @@
         <p:spPr>
           <a:xfrm>
             <a:off x="7799832" y="1801368"/>
-            <a:ext cx="3145536" cy="758952"/>
+            <a:ext cx="3145536" cy="640080"/>
           </a:xfrm>
           <a:prstGeom prst="rect">
             <a:avLst/>
@@ -9821,12 +10037,12 @@
         </p:nvSpPr>
         <p:spPr>
           <a:xfrm>
-            <a:off x="7635240" y="2788920"/>
-            <a:ext cx="3474720" cy="1536192"/>
+            <a:off x="7635240" y="2670048"/>
+            <a:ext cx="3474720" cy="1377086"/>
           </a:xfrm>
           <a:prstGeom prst="roundRect">
             <a:avLst>
-              <a:gd name="adj" fmla="val 7143"/>
+              <a:gd name="adj" fmla="val 7968"/>
             </a:avLst>
           </a:prstGeom>
           <a:solidFill>
@@ -9848,7 +10064,7 @@
         </p:nvSpPr>
         <p:spPr>
           <a:xfrm>
-            <a:off x="7799832" y="2935224"/>
+            <a:off x="7799832" y="2816352"/>
             <a:ext cx="3145536" cy="256032"/>
           </a:xfrm>
           <a:prstGeom prst="rect">
@@ -9887,8 +10103,8 @@
         </p:nvSpPr>
         <p:spPr>
           <a:xfrm>
-            <a:off x="7818120" y="3300984"/>
-            <a:ext cx="3090672" cy="877824"/>
+            <a:off x="7818120" y="3182112"/>
+            <a:ext cx="3090672" cy="718718"/>
           </a:xfrm>
           <a:prstGeom prst="rect">
             <a:avLst/>
@@ -9928,12 +10144,12 @@
         </p:nvSpPr>
         <p:spPr>
           <a:xfrm>
-            <a:off x="7635240" y="4498848"/>
-            <a:ext cx="3474720" cy="1143000"/>
+            <a:off x="7635240" y="4184294"/>
+            <a:ext cx="3474720" cy="1466698"/>
           </a:xfrm>
           <a:prstGeom prst="roundRect">
             <a:avLst>
-              <a:gd name="adj" fmla="val 9600"/>
+              <a:gd name="adj" fmla="val 7481"/>
             </a:avLst>
           </a:prstGeom>
           <a:solidFill>
@@ -9955,7 +10171,7 @@
         </p:nvSpPr>
         <p:spPr>
           <a:xfrm>
-            <a:off x="7799832" y="4645152"/>
+            <a:off x="7799832" y="4330598"/>
             <a:ext cx="3145536" cy="256032"/>
           </a:xfrm>
           <a:prstGeom prst="rect">
@@ -9994,8 +10210,8 @@
         </p:nvSpPr>
         <p:spPr>
           <a:xfrm>
-            <a:off x="7799832" y="4974336"/>
-            <a:ext cx="3145536" cy="576072"/>
+            <a:off x="7799832" y="4659782"/>
+            <a:ext cx="3145536" cy="899770"/>
           </a:xfrm>
           <a:prstGeom prst="rect">
             <a:avLst/>
@@ -10021,7 +10237,7 @@
                 <a:ea typeface="Aptos" pitchFamily="34" charset="-122"/>
                 <a:cs typeface="Aptos" pitchFamily="34" charset="-120"/>
               </a:rPr>
-              <a:t>Connect the concept to public health purpose, responsible use, required safeguards, documentation, and the next action a.</a:t>
+              <a:t>Connect the concept to public health purpose, responsible use, required safeguards, documentation, and the next action a department should take.</a:t>
             </a:r>
             <a:endParaRPr lang="en-US" sz="1320" dirty="0"/>
           </a:p>
@@ -10992,11 +11208,11 @@
         <p:spPr>
           <a:xfrm>
             <a:off x="7635240" y="1325880"/>
-            <a:ext cx="3474720" cy="1325880"/>
+            <a:ext cx="3474720" cy="1207008"/>
           </a:xfrm>
           <a:prstGeom prst="roundRect">
             <a:avLst>
-              <a:gd name="adj" fmla="val 8276"/>
+              <a:gd name="adj" fmla="val 9091"/>
             </a:avLst>
           </a:prstGeom>
           <a:solidFill>
@@ -11058,7 +11274,7 @@
         <p:spPr>
           <a:xfrm>
             <a:off x="7799832" y="1801368"/>
-            <a:ext cx="3145536" cy="758952"/>
+            <a:ext cx="3145536" cy="640080"/>
           </a:xfrm>
           <a:prstGeom prst="rect">
             <a:avLst/>
@@ -11098,12 +11314,12 @@
         </p:nvSpPr>
         <p:spPr>
           <a:xfrm>
-            <a:off x="7635240" y="2788920"/>
-            <a:ext cx="3474720" cy="1536192"/>
+            <a:off x="7635240" y="2670048"/>
+            <a:ext cx="3474720" cy="1377086"/>
           </a:xfrm>
           <a:prstGeom prst="roundRect">
             <a:avLst>
-              <a:gd name="adj" fmla="val 7143"/>
+              <a:gd name="adj" fmla="val 7968"/>
             </a:avLst>
           </a:prstGeom>
           <a:solidFill>
@@ -11125,7 +11341,7 @@
         </p:nvSpPr>
         <p:spPr>
           <a:xfrm>
-            <a:off x="7799832" y="2935224"/>
+            <a:off x="7799832" y="2816352"/>
             <a:ext cx="3145536" cy="256032"/>
           </a:xfrm>
           <a:prstGeom prst="rect">
@@ -11164,8 +11380,8 @@
         </p:nvSpPr>
         <p:spPr>
           <a:xfrm>
-            <a:off x="7818120" y="3300984"/>
-            <a:ext cx="3090672" cy="877824"/>
+            <a:off x="7818120" y="3182112"/>
+            <a:ext cx="3090672" cy="718718"/>
           </a:xfrm>
           <a:prstGeom prst="rect">
             <a:avLst/>
@@ -11239,12 +11455,12 @@
         </p:nvSpPr>
         <p:spPr>
           <a:xfrm>
-            <a:off x="7635240" y="4498848"/>
-            <a:ext cx="3474720" cy="1143000"/>
+            <a:off x="7635240" y="4184294"/>
+            <a:ext cx="3474720" cy="1466698"/>
           </a:xfrm>
           <a:prstGeom prst="roundRect">
             <a:avLst>
-              <a:gd name="adj" fmla="val 9600"/>
+              <a:gd name="adj" fmla="val 7481"/>
             </a:avLst>
           </a:prstGeom>
           <a:solidFill>
@@ -11266,7 +11482,7 @@
         </p:nvSpPr>
         <p:spPr>
           <a:xfrm>
-            <a:off x="7799832" y="4645152"/>
+            <a:off x="7799832" y="4330598"/>
             <a:ext cx="3145536" cy="256032"/>
           </a:xfrm>
           <a:prstGeom prst="rect">
@@ -11305,8 +11521,8 @@
         </p:nvSpPr>
         <p:spPr>
           <a:xfrm>
-            <a:off x="7799832" y="4974336"/>
-            <a:ext cx="3145536" cy="576072"/>
+            <a:off x="7799832" y="4659782"/>
+            <a:ext cx="3145536" cy="899770"/>
           </a:xfrm>
           <a:prstGeom prst="rect">
             <a:avLst/>
@@ -11332,7 +11548,7 @@
                 <a:ea typeface="Aptos" pitchFamily="34" charset="-122"/>
                 <a:cs typeface="Aptos" pitchFamily="34" charset="-120"/>
               </a:rPr>
-              <a:t>Use the assignment to test whether you can explain the concept, apply it to a realistic public health situation, and.</a:t>
+              <a:t>Use the assignment to test whether you can explain the concept, apply it to a realistic public health situation, and identify what would need review before the work moves forward.</a:t>
             </a:r>
             <a:endParaRPr lang="en-US" sz="1320" dirty="0"/>
           </a:p>
@@ -11701,11 +11917,11 @@
         <p:spPr>
           <a:xfrm>
             <a:off x="7635240" y="1325880"/>
-            <a:ext cx="3474720" cy="1325880"/>
+            <a:ext cx="3474720" cy="1207008"/>
           </a:xfrm>
           <a:prstGeom prst="roundRect">
             <a:avLst>
-              <a:gd name="adj" fmla="val 8276"/>
+              <a:gd name="adj" fmla="val 9091"/>
             </a:avLst>
           </a:prstGeom>
           <a:solidFill>
@@ -11767,7 +11983,7 @@
         <p:spPr>
           <a:xfrm>
             <a:off x="7799832" y="1801368"/>
-            <a:ext cx="3145536" cy="758952"/>
+            <a:ext cx="3145536" cy="640080"/>
           </a:xfrm>
           <a:prstGeom prst="rect">
             <a:avLst/>
@@ -11807,12 +12023,12 @@
         </p:nvSpPr>
         <p:spPr>
           <a:xfrm>
-            <a:off x="7635240" y="2788920"/>
-            <a:ext cx="3474720" cy="1536192"/>
+            <a:off x="7635240" y="2670048"/>
+            <a:ext cx="3474720" cy="1377086"/>
           </a:xfrm>
           <a:prstGeom prst="roundRect">
             <a:avLst>
-              <a:gd name="adj" fmla="val 7143"/>
+              <a:gd name="adj" fmla="val 7968"/>
             </a:avLst>
           </a:prstGeom>
           <a:solidFill>
@@ -11834,7 +12050,7 @@
         </p:nvSpPr>
         <p:spPr>
           <a:xfrm>
-            <a:off x="7799832" y="2935224"/>
+            <a:off x="7799832" y="2816352"/>
             <a:ext cx="3145536" cy="256032"/>
           </a:xfrm>
           <a:prstGeom prst="rect">
@@ -11873,8 +12089,8 @@
         </p:nvSpPr>
         <p:spPr>
           <a:xfrm>
-            <a:off x="7818120" y="3300984"/>
-            <a:ext cx="3090672" cy="877824"/>
+            <a:off x="7818120" y="3182112"/>
+            <a:ext cx="3090672" cy="718718"/>
           </a:xfrm>
           <a:prstGeom prst="rect">
             <a:avLst/>
@@ -11948,12 +12164,12 @@
         </p:nvSpPr>
         <p:spPr>
           <a:xfrm>
-            <a:off x="7635240" y="4498848"/>
-            <a:ext cx="3474720" cy="1143000"/>
+            <a:off x="7635240" y="4184294"/>
+            <a:ext cx="3474720" cy="1466698"/>
           </a:xfrm>
           <a:prstGeom prst="roundRect">
             <a:avLst>
-              <a:gd name="adj" fmla="val 9600"/>
+              <a:gd name="adj" fmla="val 7481"/>
             </a:avLst>
           </a:prstGeom>
           <a:solidFill>
@@ -11975,7 +12191,7 @@
         </p:nvSpPr>
         <p:spPr>
           <a:xfrm>
-            <a:off x="7799832" y="4645152"/>
+            <a:off x="7799832" y="4330598"/>
             <a:ext cx="3145536" cy="256032"/>
           </a:xfrm>
           <a:prstGeom prst="rect">
@@ -12014,8 +12230,8 @@
         </p:nvSpPr>
         <p:spPr>
           <a:xfrm>
-            <a:off x="7799832" y="4974336"/>
-            <a:ext cx="3145536" cy="576072"/>
+            <a:off x="7799832" y="4659782"/>
+            <a:ext cx="3145536" cy="899770"/>
           </a:xfrm>
           <a:prstGeom prst="rect">
             <a:avLst/>
@@ -12041,7 +12257,7 @@
                 <a:ea typeface="Aptos" pitchFamily="34" charset="-122"/>
                 <a:cs typeface="Aptos" pitchFamily="34" charset="-120"/>
               </a:rPr>
-              <a:t>Use the assignment to test whether you can explain the concept, apply it to a realistic public health situation, and.</a:t>
+              <a:t>Use the assignment to test whether you can explain the concept, apply it to a realistic public health situation, and identify what would need review before the work moves forward.</a:t>
             </a:r>
             <a:endParaRPr lang="en-US" sz="1320" dirty="0"/>
           </a:p>
@@ -12410,11 +12626,11 @@
         <p:spPr>
           <a:xfrm>
             <a:off x="7635240" y="1325880"/>
-            <a:ext cx="3474720" cy="1325880"/>
+            <a:ext cx="3474720" cy="1207008"/>
           </a:xfrm>
           <a:prstGeom prst="roundRect">
             <a:avLst>
-              <a:gd name="adj" fmla="val 8276"/>
+              <a:gd name="adj" fmla="val 9091"/>
             </a:avLst>
           </a:prstGeom>
           <a:solidFill>
@@ -12476,7 +12692,7 @@
         <p:spPr>
           <a:xfrm>
             <a:off x="7799832" y="1801368"/>
-            <a:ext cx="3145536" cy="758952"/>
+            <a:ext cx="3145536" cy="640080"/>
           </a:xfrm>
           <a:prstGeom prst="rect">
             <a:avLst/>
@@ -12516,12 +12732,12 @@
         </p:nvSpPr>
         <p:spPr>
           <a:xfrm>
-            <a:off x="7635240" y="2788920"/>
-            <a:ext cx="3474720" cy="1536192"/>
+            <a:off x="7635240" y="2670048"/>
+            <a:ext cx="3474720" cy="1377086"/>
           </a:xfrm>
           <a:prstGeom prst="roundRect">
             <a:avLst>
-              <a:gd name="adj" fmla="val 7143"/>
+              <a:gd name="adj" fmla="val 7968"/>
             </a:avLst>
           </a:prstGeom>
           <a:solidFill>
@@ -12543,7 +12759,7 @@
         </p:nvSpPr>
         <p:spPr>
           <a:xfrm>
-            <a:off x="7799832" y="2935224"/>
+            <a:off x="7799832" y="2816352"/>
             <a:ext cx="3145536" cy="256032"/>
           </a:xfrm>
           <a:prstGeom prst="rect">
@@ -12582,8 +12798,8 @@
         </p:nvSpPr>
         <p:spPr>
           <a:xfrm>
-            <a:off x="7818120" y="3300984"/>
-            <a:ext cx="3090672" cy="877824"/>
+            <a:off x="7818120" y="3182112"/>
+            <a:ext cx="3090672" cy="718718"/>
           </a:xfrm>
           <a:prstGeom prst="rect">
             <a:avLst/>
@@ -12640,12 +12856,12 @@
         </p:nvSpPr>
         <p:spPr>
           <a:xfrm>
-            <a:off x="7635240" y="4498848"/>
-            <a:ext cx="3474720" cy="1143000"/>
+            <a:off x="7635240" y="4184294"/>
+            <a:ext cx="3474720" cy="1466698"/>
           </a:xfrm>
           <a:prstGeom prst="roundRect">
             <a:avLst>
-              <a:gd name="adj" fmla="val 9600"/>
+              <a:gd name="adj" fmla="val 7481"/>
             </a:avLst>
           </a:prstGeom>
           <a:solidFill>
@@ -12667,7 +12883,7 @@
         </p:nvSpPr>
         <p:spPr>
           <a:xfrm>
-            <a:off x="7799832" y="4645152"/>
+            <a:off x="7799832" y="4330598"/>
             <a:ext cx="3145536" cy="256032"/>
           </a:xfrm>
           <a:prstGeom prst="rect">
@@ -12706,8 +12922,8 @@
         </p:nvSpPr>
         <p:spPr>
           <a:xfrm>
-            <a:off x="7799832" y="4974336"/>
-            <a:ext cx="3145536" cy="576072"/>
+            <a:off x="7799832" y="4659782"/>
+            <a:ext cx="3145536" cy="899770"/>
           </a:xfrm>
           <a:prstGeom prst="rect">
             <a:avLst/>
@@ -12733,7 +12949,7 @@
                 <a:ea typeface="Aptos" pitchFamily="34" charset="-122"/>
                 <a:cs typeface="Aptos" pitchFamily="34" charset="-120"/>
               </a:rPr>
-              <a:t>Connect the concept to public health purpose, responsible use, required safeguards, documentation, and the next action a.</a:t>
+              <a:t>Connect the concept to public health purpose, responsible use, required safeguards, documentation, and the next action a department should take.</a:t>
             </a:r>
             <a:endParaRPr lang="en-US" sz="1320" dirty="0"/>
           </a:p>
@@ -13211,7 +13427,7 @@
                 <a:ea typeface="Aptos" pitchFamily="34" charset="-122"/>
                 <a:cs typeface="Aptos" pitchFamily="34" charset="-120"/>
               </a:rPr>
-              <a:t>Use the related plays to identify decisions, participants, timing, approvals, and documentation needed for responsible.</a:t>
+              <a:t>Use the related plays to identify decisions, participants, timing, approvals, and documentation needed for responsible implementation.</a:t>
             </a:r>
             <a:endParaRPr lang="en-US" sz="1320" dirty="0"/>
           </a:p>
@@ -13830,7 +14046,7 @@
                 <a:ea typeface="Aptos" pitchFamily="34" charset="-122"/>
                 <a:cs typeface="Aptos" pitchFamily="34" charset="-120"/>
               </a:rPr>
-              <a:t>Use linked tools when your department needs a structured worksheet, template, checklist, review process, or.</a:t>
+              <a:t>Use linked tools when your department needs a structured worksheet, template, checklist, review process, or documentation artifact.</a:t>
             </a:r>
             <a:endParaRPr lang="en-US" sz="1320" dirty="0"/>
           </a:p>
@@ -14340,11 +14556,11 @@
         <p:spPr>
           <a:xfrm>
             <a:off x="7635240" y="1325880"/>
-            <a:ext cx="3474720" cy="1325880"/>
+            <a:ext cx="3474720" cy="1207008"/>
           </a:xfrm>
           <a:prstGeom prst="roundRect">
             <a:avLst>
-              <a:gd name="adj" fmla="val 8276"/>
+              <a:gd name="adj" fmla="val 9091"/>
             </a:avLst>
           </a:prstGeom>
           <a:solidFill>
@@ -14406,7 +14622,7 @@
         <p:spPr>
           <a:xfrm>
             <a:off x="7799832" y="1801368"/>
-            <a:ext cx="3145536" cy="758952"/>
+            <a:ext cx="3145536" cy="640080"/>
           </a:xfrm>
           <a:prstGeom prst="rect">
             <a:avLst/>
@@ -14446,12 +14662,12 @@
         </p:nvSpPr>
         <p:spPr>
           <a:xfrm>
-            <a:off x="7635240" y="2788920"/>
-            <a:ext cx="3474720" cy="1536192"/>
+            <a:off x="7635240" y="2670048"/>
+            <a:ext cx="3474720" cy="1377086"/>
           </a:xfrm>
           <a:prstGeom prst="roundRect">
             <a:avLst>
-              <a:gd name="adj" fmla="val 7143"/>
+              <a:gd name="adj" fmla="val 7968"/>
             </a:avLst>
           </a:prstGeom>
           <a:solidFill>
@@ -14473,7 +14689,7 @@
         </p:nvSpPr>
         <p:spPr>
           <a:xfrm>
-            <a:off x="7799832" y="2935224"/>
+            <a:off x="7799832" y="2816352"/>
             <a:ext cx="3145536" cy="256032"/>
           </a:xfrm>
           <a:prstGeom prst="rect">
@@ -14512,8 +14728,8 @@
         </p:nvSpPr>
         <p:spPr>
           <a:xfrm>
-            <a:off x="7818120" y="3300984"/>
-            <a:ext cx="3090672" cy="877824"/>
+            <a:off x="7818120" y="3182112"/>
+            <a:ext cx="3090672" cy="718718"/>
           </a:xfrm>
           <a:prstGeom prst="rect">
             <a:avLst/>
@@ -14587,12 +14803,12 @@
         </p:nvSpPr>
         <p:spPr>
           <a:xfrm>
-            <a:off x="7635240" y="4498848"/>
-            <a:ext cx="3474720" cy="1143000"/>
+            <a:off x="7635240" y="4184294"/>
+            <a:ext cx="3474720" cy="1466698"/>
           </a:xfrm>
           <a:prstGeom prst="roundRect">
             <a:avLst>
-              <a:gd name="adj" fmla="val 9600"/>
+              <a:gd name="adj" fmla="val 7481"/>
             </a:avLst>
           </a:prstGeom>
           <a:solidFill>
@@ -14614,7 +14830,7 @@
         </p:nvSpPr>
         <p:spPr>
           <a:xfrm>
-            <a:off x="7799832" y="4645152"/>
+            <a:off x="7799832" y="4330598"/>
             <a:ext cx="3145536" cy="256032"/>
           </a:xfrm>
           <a:prstGeom prst="rect">
@@ -14653,8 +14869,8 @@
         </p:nvSpPr>
         <p:spPr>
           <a:xfrm>
-            <a:off x="7799832" y="4974336"/>
-            <a:ext cx="3145536" cy="576072"/>
+            <a:off x="7799832" y="4659782"/>
+            <a:ext cx="3145536" cy="899770"/>
           </a:xfrm>
           <a:prstGeom prst="rect">
             <a:avLst/>
@@ -14680,7 +14896,7 @@
                 <a:ea typeface="Aptos" pitchFamily="34" charset="-122"/>
                 <a:cs typeface="Aptos" pitchFamily="34" charset="-120"/>
               </a:rPr>
-              <a:t>Use the assignment to test whether you can explain the concept, apply it to a realistic public health situation, and.</a:t>
+              <a:t>Use the assignment to test whether you can explain the concept, apply it to a realistic public health situation, and identify what would need review before the work moves forward.</a:t>
             </a:r>
             <a:endParaRPr lang="en-US" sz="1320" dirty="0"/>
           </a:p>
@@ -15015,11 +15231,11 @@
         <p:spPr>
           <a:xfrm>
             <a:off x="7635240" y="1325880"/>
-            <a:ext cx="3474720" cy="1325880"/>
+            <a:ext cx="3474720" cy="1207008"/>
           </a:xfrm>
           <a:prstGeom prst="roundRect">
             <a:avLst>
-              <a:gd name="adj" fmla="val 8276"/>
+              <a:gd name="adj" fmla="val 9091"/>
             </a:avLst>
           </a:prstGeom>
           <a:solidFill>
@@ -15081,7 +15297,7 @@
         <p:spPr>
           <a:xfrm>
             <a:off x="7799832" y="1801368"/>
-            <a:ext cx="3145536" cy="758952"/>
+            <a:ext cx="3145536" cy="640080"/>
           </a:xfrm>
           <a:prstGeom prst="rect">
             <a:avLst/>
@@ -15121,12 +15337,12 @@
         </p:nvSpPr>
         <p:spPr>
           <a:xfrm>
-            <a:off x="7635240" y="2788920"/>
-            <a:ext cx="3474720" cy="1536192"/>
+            <a:off x="7635240" y="2670048"/>
+            <a:ext cx="3474720" cy="1377086"/>
           </a:xfrm>
           <a:prstGeom prst="roundRect">
             <a:avLst>
-              <a:gd name="adj" fmla="val 7143"/>
+              <a:gd name="adj" fmla="val 7968"/>
             </a:avLst>
           </a:prstGeom>
           <a:solidFill>
@@ -15148,7 +15364,7 @@
         </p:nvSpPr>
         <p:spPr>
           <a:xfrm>
-            <a:off x="7799832" y="2935224"/>
+            <a:off x="7799832" y="2816352"/>
             <a:ext cx="3145536" cy="256032"/>
           </a:xfrm>
           <a:prstGeom prst="rect">
@@ -15187,8 +15403,8 @@
         </p:nvSpPr>
         <p:spPr>
           <a:xfrm>
-            <a:off x="7818120" y="3300984"/>
-            <a:ext cx="3090672" cy="877824"/>
+            <a:off x="7818120" y="3182112"/>
+            <a:ext cx="3090672" cy="718718"/>
           </a:xfrm>
           <a:prstGeom prst="rect">
             <a:avLst/>
@@ -15228,12 +15444,12 @@
         </p:nvSpPr>
         <p:spPr>
           <a:xfrm>
-            <a:off x="7635240" y="4498848"/>
-            <a:ext cx="3474720" cy="1143000"/>
+            <a:off x="7635240" y="4184294"/>
+            <a:ext cx="3474720" cy="1466698"/>
           </a:xfrm>
           <a:prstGeom prst="roundRect">
             <a:avLst>
-              <a:gd name="adj" fmla="val 9600"/>
+              <a:gd name="adj" fmla="val 7481"/>
             </a:avLst>
           </a:prstGeom>
           <a:solidFill>
@@ -15255,7 +15471,7 @@
         </p:nvSpPr>
         <p:spPr>
           <a:xfrm>
-            <a:off x="7799832" y="4645152"/>
+            <a:off x="7799832" y="4330598"/>
             <a:ext cx="3145536" cy="256032"/>
           </a:xfrm>
           <a:prstGeom prst="rect">
@@ -15294,8 +15510,8 @@
         </p:nvSpPr>
         <p:spPr>
           <a:xfrm>
-            <a:off x="7799832" y="4974336"/>
-            <a:ext cx="3145536" cy="576072"/>
+            <a:off x="7799832" y="4659782"/>
+            <a:ext cx="3145536" cy="899770"/>
           </a:xfrm>
           <a:prstGeom prst="rect">
             <a:avLst/>
@@ -15321,7 +15537,7 @@
                 <a:ea typeface="Aptos" pitchFamily="34" charset="-122"/>
                 <a:cs typeface="Aptos" pitchFamily="34" charset="-120"/>
               </a:rPr>
-              <a:t>Use the assignment to test whether you can explain the concept, apply it to a realistic public health situation, and.</a:t>
+              <a:t>Use the assignment to test whether you can explain the concept, apply it to a realistic public health situation, and identify what would need review before the work moves forward.</a:t>
             </a:r>
             <a:endParaRPr lang="en-US" sz="1320" dirty="0"/>
           </a:p>
@@ -15690,11 +15906,11 @@
         <p:spPr>
           <a:xfrm>
             <a:off x="7635240" y="1325880"/>
-            <a:ext cx="3474720" cy="1325880"/>
+            <a:ext cx="3474720" cy="1255471"/>
           </a:xfrm>
           <a:prstGeom prst="roundRect">
             <a:avLst>
-              <a:gd name="adj" fmla="val 8276"/>
+              <a:gd name="adj" fmla="val 8740"/>
             </a:avLst>
           </a:prstGeom>
           <a:solidFill>
@@ -15756,7 +15972,7 @@
         <p:spPr>
           <a:xfrm>
             <a:off x="7799832" y="1801368"/>
-            <a:ext cx="3145536" cy="758952"/>
+            <a:ext cx="3145536" cy="688543"/>
           </a:xfrm>
           <a:prstGeom prst="rect">
             <a:avLst/>
@@ -15796,12 +16012,12 @@
         </p:nvSpPr>
         <p:spPr>
           <a:xfrm>
-            <a:off x="7635240" y="2788920"/>
-            <a:ext cx="3474720" cy="1536192"/>
+            <a:off x="7635240" y="2718511"/>
+            <a:ext cx="3474720" cy="1328623"/>
           </a:xfrm>
           <a:prstGeom prst="roundRect">
             <a:avLst>
-              <a:gd name="adj" fmla="val 7143"/>
+              <a:gd name="adj" fmla="val 8259"/>
             </a:avLst>
           </a:prstGeom>
           <a:solidFill>
@@ -15823,8 +16039,8 @@
         </p:nvSpPr>
         <p:spPr>
           <a:xfrm>
-            <a:off x="7799832" y="2935224"/>
-            <a:ext cx="3145536" cy="256032"/>
+            <a:off x="7799832" y="2846527"/>
+            <a:ext cx="3145536" cy="237744"/>
           </a:xfrm>
           <a:prstGeom prst="rect">
             <a:avLst/>
@@ -15840,7 +16056,7 @@
               <a:buNone/>
             </a:pPr>
             <a:r>
-              <a:rPr lang="en-US" sz="1300" b="1" dirty="0">
+              <a:rPr lang="en-US" sz="1250" b="1" dirty="0">
                 <a:solidFill>
                   <a:srgbClr val="0068B7"/>
                 </a:solidFill>
@@ -15848,101 +16064,317 @@
                 <a:ea typeface="Aptos" pitchFamily="34" charset="-122"/>
                 <a:cs typeface="Aptos" pitchFamily="34" charset="-120"/>
               </a:rPr>
-              <a:t>Concept checkpoints</a:t>
-            </a:r>
-            <a:endParaRPr lang="en-US" sz="1300" dirty="0"/>
-          </a:p>
-        </p:txBody>
-      </p:sp>
-      <p:sp>
-        <p:nvSpPr>
-          <p:cNvPr id="15" name="Text 13"/>
-          <p:cNvSpPr/>
-          <p:nvPr/>
-        </p:nvSpPr>
-        <p:spPr>
-          <a:xfrm>
-            <a:off x="7818120" y="3300984"/>
-            <a:ext cx="3090672" cy="877824"/>
-          </a:xfrm>
-          <a:prstGeom prst="rect">
-            <a:avLst/>
-          </a:prstGeom>
-          <a:noFill/>
-          <a:ln/>
-        </p:spPr>
-        <p:txBody>
-          <a:bodyPr wrap="square" lIns="508" tIns="508" rIns="508" bIns="508" rtlCol="0" anchor="t">
+              <a:t>Data-to-decision flow</a:t>
+            </a:r>
+            <a:endParaRPr lang="en-US" sz="1250" dirty="0"/>
+          </a:p>
+        </p:txBody>
+      </p:sp>
+      <p:sp>
+        <p:nvSpPr>
+          <p:cNvPr id="15" name="Shape 13"/>
+          <p:cNvSpPr/>
+          <p:nvPr/>
+        </p:nvSpPr>
+        <p:spPr>
+          <a:xfrm>
+            <a:off x="8763000" y="3399739"/>
+            <a:ext cx="164592" cy="0"/>
+          </a:xfrm>
+          <a:prstGeom prst="line">
+            <a:avLst/>
+          </a:prstGeom>
+          <a:noFill/>
+          <a:ln w="15240">
+            <a:solidFill>
+              <a:srgbClr val="8ABBD8"/>
+            </a:solidFill>
+            <a:prstDash val="solid"/>
+          </a:ln>
+        </p:spPr>
+      </p:sp>
+      <p:sp>
+        <p:nvSpPr>
+          <p:cNvPr id="16" name="Shape 14"/>
+          <p:cNvSpPr/>
+          <p:nvPr/>
+        </p:nvSpPr>
+        <p:spPr>
+          <a:xfrm>
+            <a:off x="7872984" y="3248863"/>
+            <a:ext cx="890016" cy="301752"/>
+          </a:xfrm>
+          <a:prstGeom prst="roundRect">
+            <a:avLst>
+              <a:gd name="adj" fmla="val 24242"/>
+            </a:avLst>
+          </a:prstGeom>
+          <a:solidFill>
+            <a:srgbClr val="0068B7"/>
+          </a:solidFill>
+          <a:ln w="12700">
+            <a:solidFill>
+              <a:srgbClr val="0068B7"/>
+            </a:solidFill>
+            <a:prstDash val="solid"/>
+          </a:ln>
+        </p:spPr>
+      </p:sp>
+      <p:sp>
+        <p:nvSpPr>
+          <p:cNvPr id="17" name="Text 15"/>
+          <p:cNvSpPr/>
+          <p:nvPr/>
+        </p:nvSpPr>
+        <p:spPr>
+          <a:xfrm>
+            <a:off x="7909560" y="3322015"/>
+            <a:ext cx="816864" cy="146304"/>
+          </a:xfrm>
+          <a:prstGeom prst="rect">
+            <a:avLst/>
+          </a:prstGeom>
+          <a:noFill/>
+          <a:ln/>
+        </p:spPr>
+        <p:txBody>
+          <a:bodyPr wrap="square" lIns="0" tIns="0" rIns="0" bIns="0" rtlCol="0" anchor="ctr">
             <a:normAutofit/>
           </a:bodyPr>
           <a:lstStyle/>
           <a:p>
-            <a:pPr indent="0" marL="0">
-              <a:buNone/>
-            </a:pPr>
-            <a:r>
-              <a:rPr lang="en-US" sz="1220" dirty="0">
-                <a:solidFill>
-                  <a:srgbClr val="17364A"/>
-                </a:solidFill>
-                <a:latin typeface="Aptos" pitchFamily="34" charset="0"/>
-                <a:ea typeface="Aptos" pitchFamily="34" charset="-122"/>
-                <a:cs typeface="Aptos" pitchFamily="34" charset="-120"/>
-              </a:rPr>
-              <a:t>Geospatial AI combines spatial data, geographic analysis, and AI.</a:t>
-            </a:r>
-            <a:endParaRPr lang="en-US" sz="1220" dirty="0"/>
-          </a:p>
-          <a:p>
-            <a:pPr indent="0" marL="0">
-              <a:buNone/>
-            </a:pPr>
-            <a:r>
-              <a:rPr lang="en-US" sz="1220" dirty="0">
-                <a:solidFill>
-                  <a:srgbClr val="17364A"/>
-                </a:solidFill>
-                <a:latin typeface="Aptos" pitchFamily="34" charset="0"/>
-                <a:ea typeface="Aptos" pitchFamily="34" charset="-122"/>
-                <a:cs typeface="Aptos" pitchFamily="34" charset="-120"/>
-              </a:rPr>
-              <a:t>In public health, spatial analysis is already central to outbreak.</a:t>
-            </a:r>
-            <a:endParaRPr lang="en-US" sz="1220" dirty="0"/>
-          </a:p>
-          <a:p>
-            <a:pPr indent="0" marL="0">
-              <a:buNone/>
-            </a:pPr>
-            <a:r>
-              <a:rPr lang="en-US" sz="1220" dirty="0">
-                <a:solidFill>
-                  <a:srgbClr val="17364A"/>
-                </a:solidFill>
-                <a:latin typeface="Aptos" pitchFamily="34" charset="0"/>
-                <a:ea typeface="Aptos" pitchFamily="34" charset="-122"/>
-                <a:cs typeface="Aptos" pitchFamily="34" charset="-120"/>
-              </a:rPr>
-              <a:t>AI can strengthen these activities when it helps detect clusters,.</a:t>
-            </a:r>
-            <a:endParaRPr lang="en-US" sz="1220" dirty="0"/>
-          </a:p>
-        </p:txBody>
-      </p:sp>
-      <p:sp>
-        <p:nvSpPr>
-          <p:cNvPr id="16" name="Shape 14"/>
-          <p:cNvSpPr/>
-          <p:nvPr/>
-        </p:nvSpPr>
-        <p:spPr>
-          <a:xfrm>
-            <a:off x="7635240" y="4498848"/>
-            <a:ext cx="3474720" cy="1143000"/>
+            <a:pPr algn="ctr" indent="0" marL="0">
+              <a:buNone/>
+            </a:pPr>
+            <a:r>
+              <a:rPr lang="en-US" sz="880" b="1" dirty="0">
+                <a:solidFill>
+                  <a:srgbClr val="FFFFFF"/>
+                </a:solidFill>
+                <a:latin typeface="Aptos" pitchFamily="34" charset="0"/>
+                <a:ea typeface="Aptos" pitchFamily="34" charset="-122"/>
+                <a:cs typeface="Aptos" pitchFamily="34" charset="-120"/>
+              </a:rPr>
+              <a:t>Data</a:t>
+            </a:r>
+            <a:endParaRPr lang="en-US" sz="880" dirty="0"/>
+          </a:p>
+        </p:txBody>
+      </p:sp>
+      <p:sp>
+        <p:nvSpPr>
+          <p:cNvPr id="18" name="Shape 16"/>
+          <p:cNvSpPr/>
+          <p:nvPr/>
+        </p:nvSpPr>
+        <p:spPr>
+          <a:xfrm>
+            <a:off x="9817608" y="3399739"/>
+            <a:ext cx="164592" cy="0"/>
+          </a:xfrm>
+          <a:prstGeom prst="line">
+            <a:avLst/>
+          </a:prstGeom>
+          <a:noFill/>
+          <a:ln w="15240">
+            <a:solidFill>
+              <a:srgbClr val="8ABBD8"/>
+            </a:solidFill>
+            <a:prstDash val="solid"/>
+          </a:ln>
+        </p:spPr>
+      </p:sp>
+      <p:sp>
+        <p:nvSpPr>
+          <p:cNvPr id="19" name="Shape 17"/>
+          <p:cNvSpPr/>
+          <p:nvPr/>
+        </p:nvSpPr>
+        <p:spPr>
+          <a:xfrm>
+            <a:off x="8927592" y="3248863"/>
+            <a:ext cx="890016" cy="301752"/>
           </a:xfrm>
           <a:prstGeom prst="roundRect">
             <a:avLst>
-              <a:gd name="adj" fmla="val 9600"/>
+              <a:gd name="adj" fmla="val 24242"/>
+            </a:avLst>
+          </a:prstGeom>
+          <a:solidFill>
+            <a:srgbClr val="2F8A28"/>
+          </a:solidFill>
+          <a:ln w="12700">
+            <a:solidFill>
+              <a:srgbClr val="2F8A28"/>
+            </a:solidFill>
+            <a:prstDash val="solid"/>
+          </a:ln>
+        </p:spPr>
+      </p:sp>
+      <p:sp>
+        <p:nvSpPr>
+          <p:cNvPr id="20" name="Text 18"/>
+          <p:cNvSpPr/>
+          <p:nvPr/>
+        </p:nvSpPr>
+        <p:spPr>
+          <a:xfrm>
+            <a:off x="8964168" y="3322015"/>
+            <a:ext cx="816864" cy="146304"/>
+          </a:xfrm>
+          <a:prstGeom prst="rect">
+            <a:avLst/>
+          </a:prstGeom>
+          <a:noFill/>
+          <a:ln/>
+        </p:spPr>
+        <p:txBody>
+          <a:bodyPr wrap="square" lIns="0" tIns="0" rIns="0" bIns="0" rtlCol="0" anchor="ctr">
+            <a:normAutofit/>
+          </a:bodyPr>
+          <a:lstStyle/>
+          <a:p>
+            <a:pPr algn="ctr" indent="0" marL="0">
+              <a:buNone/>
+            </a:pPr>
+            <a:r>
+              <a:rPr lang="en-US" sz="880" b="1" dirty="0">
+                <a:solidFill>
+                  <a:srgbClr val="FFFFFF"/>
+                </a:solidFill>
+                <a:latin typeface="Aptos" pitchFamily="34" charset="0"/>
+                <a:ea typeface="Aptos" pitchFamily="34" charset="-122"/>
+                <a:cs typeface="Aptos" pitchFamily="34" charset="-120"/>
+              </a:rPr>
+              <a:t>Analysis</a:t>
+            </a:r>
+            <a:endParaRPr lang="en-US" sz="880" dirty="0"/>
+          </a:p>
+        </p:txBody>
+      </p:sp>
+      <p:sp>
+        <p:nvSpPr>
+          <p:cNvPr id="21" name="Shape 19"/>
+          <p:cNvSpPr/>
+          <p:nvPr/>
+        </p:nvSpPr>
+        <p:spPr>
+          <a:xfrm>
+            <a:off x="9982200" y="3248863"/>
+            <a:ext cx="890016" cy="301752"/>
+          </a:xfrm>
+          <a:prstGeom prst="roundRect">
+            <a:avLst>
+              <a:gd name="adj" fmla="val 24242"/>
+            </a:avLst>
+          </a:prstGeom>
+          <a:solidFill>
+            <a:srgbClr val="6A4CA3"/>
+          </a:solidFill>
+          <a:ln w="12700">
+            <a:solidFill>
+              <a:srgbClr val="6A4CA3"/>
+            </a:solidFill>
+            <a:prstDash val="solid"/>
+          </a:ln>
+        </p:spPr>
+      </p:sp>
+      <p:sp>
+        <p:nvSpPr>
+          <p:cNvPr id="22" name="Text 20"/>
+          <p:cNvSpPr/>
+          <p:nvPr/>
+        </p:nvSpPr>
+        <p:spPr>
+          <a:xfrm>
+            <a:off x="10018776" y="3322015"/>
+            <a:ext cx="816864" cy="146304"/>
+          </a:xfrm>
+          <a:prstGeom prst="rect">
+            <a:avLst/>
+          </a:prstGeom>
+          <a:noFill/>
+          <a:ln/>
+        </p:spPr>
+        <p:txBody>
+          <a:bodyPr wrap="square" lIns="0" tIns="0" rIns="0" bIns="0" rtlCol="0" anchor="ctr">
+            <a:normAutofit/>
+          </a:bodyPr>
+          <a:lstStyle/>
+          <a:p>
+            <a:pPr algn="ctr" indent="0" marL="0">
+              <a:buNone/>
+            </a:pPr>
+            <a:r>
+              <a:rPr lang="en-US" sz="880" b="1" dirty="0">
+                <a:solidFill>
+                  <a:srgbClr val="FFFFFF"/>
+                </a:solidFill>
+                <a:latin typeface="Aptos" pitchFamily="34" charset="0"/>
+                <a:ea typeface="Aptos" pitchFamily="34" charset="-122"/>
+                <a:cs typeface="Aptos" pitchFamily="34" charset="-120"/>
+              </a:rPr>
+              <a:t>Review</a:t>
+            </a:r>
+            <a:endParaRPr lang="en-US" sz="880" dirty="0"/>
+          </a:p>
+        </p:txBody>
+      </p:sp>
+      <p:sp>
+        <p:nvSpPr>
+          <p:cNvPr id="23" name="Text 21"/>
+          <p:cNvSpPr/>
+          <p:nvPr/>
+        </p:nvSpPr>
+        <p:spPr>
+          <a:xfrm>
+            <a:off x="7854696" y="3742639"/>
+            <a:ext cx="3035808" cy="158191"/>
+          </a:xfrm>
+          <a:prstGeom prst="rect">
+            <a:avLst/>
+          </a:prstGeom>
+          <a:noFill/>
+          <a:ln/>
+        </p:spPr>
+        <p:txBody>
+          <a:bodyPr wrap="square" lIns="254" tIns="254" rIns="254" bIns="254" rtlCol="0" anchor="t">
+            <a:normAutofit/>
+          </a:bodyPr>
+          <a:lstStyle/>
+          <a:p>
+            <a:pPr indent="0" marL="0">
+              <a:buNone/>
+            </a:pPr>
+            <a:r>
+              <a:rPr lang="en-US" sz="1120" dirty="0">
+                <a:solidFill>
+                  <a:srgbClr val="17364A"/>
+                </a:solidFill>
+                <a:latin typeface="Aptos" pitchFamily="34" charset="0"/>
+                <a:ea typeface="Aptos" pitchFamily="34" charset="-122"/>
+                <a:cs typeface="Aptos" pitchFamily="34" charset="-120"/>
+              </a:rPr>
+              <a:t>The important handoff is not from data to AI; it is from analysis to accountable human review.</a:t>
+            </a:r>
+            <a:endParaRPr lang="en-US" sz="1120" dirty="0"/>
+          </a:p>
+        </p:txBody>
+      </p:sp>
+      <p:sp>
+        <p:nvSpPr>
+          <p:cNvPr id="24" name="Shape 22"/>
+          <p:cNvSpPr/>
+          <p:nvPr/>
+        </p:nvSpPr>
+        <p:spPr>
+          <a:xfrm>
+            <a:off x="7635240" y="4184294"/>
+            <a:ext cx="3474720" cy="1466698"/>
+          </a:xfrm>
+          <a:prstGeom prst="roundRect">
+            <a:avLst>
+              <a:gd name="adj" fmla="val 7481"/>
             </a:avLst>
           </a:prstGeom>
           <a:solidFill>
@@ -15958,13 +16390,13 @@
       </p:sp>
       <p:sp>
         <p:nvSpPr>
-          <p:cNvPr id="17" name="Text 15"/>
-          <p:cNvSpPr/>
-          <p:nvPr/>
-        </p:nvSpPr>
-        <p:spPr>
-          <a:xfrm>
-            <a:off x="7799832" y="4645152"/>
+          <p:cNvPr id="25" name="Text 23"/>
+          <p:cNvSpPr/>
+          <p:nvPr/>
+        </p:nvSpPr>
+        <p:spPr>
+          <a:xfrm>
+            <a:off x="7799832" y="4330598"/>
             <a:ext cx="3145536" cy="256032"/>
           </a:xfrm>
           <a:prstGeom prst="rect">
@@ -15997,14 +16429,14 @@
       </p:sp>
       <p:sp>
         <p:nvSpPr>
-          <p:cNvPr id="18" name="Text 16"/>
-          <p:cNvSpPr/>
-          <p:nvPr/>
-        </p:nvSpPr>
-        <p:spPr>
-          <a:xfrm>
-            <a:off x="7799832" y="4974336"/>
-            <a:ext cx="3145536" cy="576072"/>
+          <p:cNvPr id="26" name="Text 24"/>
+          <p:cNvSpPr/>
+          <p:nvPr/>
+        </p:nvSpPr>
+        <p:spPr>
+          <a:xfrm>
+            <a:off x="7799832" y="4659782"/>
+            <a:ext cx="3145536" cy="899770"/>
           </a:xfrm>
           <a:prstGeom prst="rect">
             <a:avLst/>
@@ -16030,7 +16462,7 @@
                 <a:ea typeface="Aptos" pitchFamily="34" charset="-122"/>
                 <a:cs typeface="Aptos" pitchFamily="34" charset="-120"/>
               </a:rPr>
-              <a:t>Connect the concept to public health purpose, responsible use, required safeguards, documentation, and the next action a.</a:t>
+              <a:t>Connect the concept to public health purpose, responsible use, required safeguards, documentation, and the next action a department should take.</a:t>
             </a:r>
             <a:endParaRPr lang="en-US" sz="1320" dirty="0"/>
           </a:p>
@@ -16399,11 +16831,11 @@
         <p:spPr>
           <a:xfrm>
             <a:off x="7635240" y="1325880"/>
-            <a:ext cx="3474720" cy="1325880"/>
+            <a:ext cx="3474720" cy="1207008"/>
           </a:xfrm>
           <a:prstGeom prst="roundRect">
             <a:avLst>
-              <a:gd name="adj" fmla="val 8276"/>
+              <a:gd name="adj" fmla="val 9091"/>
             </a:avLst>
           </a:prstGeom>
           <a:solidFill>
@@ -16465,7 +16897,7 @@
         <p:spPr>
           <a:xfrm>
             <a:off x="7799832" y="1801368"/>
-            <a:ext cx="3145536" cy="758952"/>
+            <a:ext cx="3145536" cy="640080"/>
           </a:xfrm>
           <a:prstGeom prst="rect">
             <a:avLst/>
@@ -16505,12 +16937,12 @@
         </p:nvSpPr>
         <p:spPr>
           <a:xfrm>
-            <a:off x="7635240" y="2788920"/>
-            <a:ext cx="3474720" cy="1536192"/>
+            <a:off x="7635240" y="2670048"/>
+            <a:ext cx="3474720" cy="1377086"/>
           </a:xfrm>
           <a:prstGeom prst="roundRect">
             <a:avLst>
-              <a:gd name="adj" fmla="val 7143"/>
+              <a:gd name="adj" fmla="val 7968"/>
             </a:avLst>
           </a:prstGeom>
           <a:solidFill>
@@ -16532,8 +16964,8 @@
         </p:nvSpPr>
         <p:spPr>
           <a:xfrm>
-            <a:off x="7799832" y="2935224"/>
-            <a:ext cx="3145536" cy="256032"/>
+            <a:off x="7799832" y="2798064"/>
+            <a:ext cx="3145536" cy="237744"/>
           </a:xfrm>
           <a:prstGeom prst="rect">
             <a:avLst/>
@@ -16549,7 +16981,7 @@
               <a:buNone/>
             </a:pPr>
             <a:r>
-              <a:rPr lang="en-US" sz="1300" b="1" dirty="0">
+              <a:rPr lang="en-US" sz="1250" b="1" dirty="0">
                 <a:solidFill>
                   <a:srgbClr val="0068B7"/>
                 </a:solidFill>
@@ -16557,101 +16989,317 @@
                 <a:ea typeface="Aptos" pitchFamily="34" charset="-122"/>
                 <a:cs typeface="Aptos" pitchFamily="34" charset="-120"/>
               </a:rPr>
-              <a:t>Concept checkpoints</a:t>
-            </a:r>
-            <a:endParaRPr lang="en-US" sz="1300" dirty="0"/>
-          </a:p>
-        </p:txBody>
-      </p:sp>
-      <p:sp>
-        <p:nvSpPr>
-          <p:cNvPr id="15" name="Text 13"/>
-          <p:cNvSpPr/>
-          <p:nvPr/>
-        </p:nvSpPr>
-        <p:spPr>
-          <a:xfrm>
-            <a:off x="7818120" y="3300984"/>
-            <a:ext cx="3090672" cy="877824"/>
-          </a:xfrm>
-          <a:prstGeom prst="rect">
-            <a:avLst/>
-          </a:prstGeom>
-          <a:noFill/>
-          <a:ln/>
-        </p:spPr>
-        <p:txBody>
-          <a:bodyPr wrap="square" lIns="508" tIns="508" rIns="508" bIns="508" rtlCol="0" anchor="t">
+              <a:t>Data-to-decision flow</a:t>
+            </a:r>
+            <a:endParaRPr lang="en-US" sz="1250" dirty="0"/>
+          </a:p>
+        </p:txBody>
+      </p:sp>
+      <p:sp>
+        <p:nvSpPr>
+          <p:cNvPr id="15" name="Shape 13"/>
+          <p:cNvSpPr/>
+          <p:nvPr/>
+        </p:nvSpPr>
+        <p:spPr>
+          <a:xfrm>
+            <a:off x="8763000" y="3351276"/>
+            <a:ext cx="164592" cy="0"/>
+          </a:xfrm>
+          <a:prstGeom prst="line">
+            <a:avLst/>
+          </a:prstGeom>
+          <a:noFill/>
+          <a:ln w="15240">
+            <a:solidFill>
+              <a:srgbClr val="8ABBD8"/>
+            </a:solidFill>
+            <a:prstDash val="solid"/>
+          </a:ln>
+        </p:spPr>
+      </p:sp>
+      <p:sp>
+        <p:nvSpPr>
+          <p:cNvPr id="16" name="Shape 14"/>
+          <p:cNvSpPr/>
+          <p:nvPr/>
+        </p:nvSpPr>
+        <p:spPr>
+          <a:xfrm>
+            <a:off x="7872984" y="3200400"/>
+            <a:ext cx="890016" cy="301752"/>
+          </a:xfrm>
+          <a:prstGeom prst="roundRect">
+            <a:avLst>
+              <a:gd name="adj" fmla="val 24242"/>
+            </a:avLst>
+          </a:prstGeom>
+          <a:solidFill>
+            <a:srgbClr val="0068B7"/>
+          </a:solidFill>
+          <a:ln w="12700">
+            <a:solidFill>
+              <a:srgbClr val="0068B7"/>
+            </a:solidFill>
+            <a:prstDash val="solid"/>
+          </a:ln>
+        </p:spPr>
+      </p:sp>
+      <p:sp>
+        <p:nvSpPr>
+          <p:cNvPr id="17" name="Text 15"/>
+          <p:cNvSpPr/>
+          <p:nvPr/>
+        </p:nvSpPr>
+        <p:spPr>
+          <a:xfrm>
+            <a:off x="7909560" y="3273552"/>
+            <a:ext cx="816864" cy="146304"/>
+          </a:xfrm>
+          <a:prstGeom prst="rect">
+            <a:avLst/>
+          </a:prstGeom>
+          <a:noFill/>
+          <a:ln/>
+        </p:spPr>
+        <p:txBody>
+          <a:bodyPr wrap="square" lIns="0" tIns="0" rIns="0" bIns="0" rtlCol="0" anchor="ctr">
             <a:normAutofit/>
           </a:bodyPr>
           <a:lstStyle/>
           <a:p>
-            <a:pPr indent="0" marL="0">
-              <a:buNone/>
-            </a:pPr>
-            <a:r>
-              <a:rPr lang="en-US" sz="1220" dirty="0">
-                <a:solidFill>
-                  <a:srgbClr val="17364A"/>
-                </a:solidFill>
-                <a:latin typeface="Aptos" pitchFamily="34" charset="0"/>
-                <a:ea typeface="Aptos" pitchFamily="34" charset="-122"/>
-                <a:cs typeface="Aptos" pitchFamily="34" charset="-120"/>
-              </a:rPr>
-              <a:t>Agencies decide where to conduct outreach, deploy mobile services,.</a:t>
-            </a:r>
-            <a:endParaRPr lang="en-US" sz="1220" dirty="0"/>
-          </a:p>
-          <a:p>
-            <a:pPr indent="0" marL="0">
-              <a:buNone/>
-            </a:pPr>
-            <a:r>
-              <a:rPr lang="en-US" sz="1220" dirty="0">
-                <a:solidFill>
-                  <a:srgbClr val="17364A"/>
-                </a:solidFill>
-                <a:latin typeface="Aptos" pitchFamily="34" charset="0"/>
-                <a:ea typeface="Aptos" pitchFamily="34" charset="-122"/>
-                <a:cs typeface="Aptos" pitchFamily="34" charset="-120"/>
-              </a:rPr>
-              <a:t>AI-supported spatial tools can help analyze large volumes of.</a:t>
-            </a:r>
-            <a:endParaRPr lang="en-US" sz="1220" dirty="0"/>
-          </a:p>
-          <a:p>
-            <a:pPr indent="0" marL="0">
-              <a:buNone/>
-            </a:pPr>
-            <a:r>
-              <a:rPr lang="en-US" sz="1220" dirty="0">
-                <a:solidFill>
-                  <a:srgbClr val="17364A"/>
-                </a:solidFill>
-                <a:latin typeface="Aptos" pitchFamily="34" charset="0"/>
-                <a:ea typeface="Aptos" pitchFamily="34" charset="-122"/>
-                <a:cs typeface="Aptos" pitchFamily="34" charset="-120"/>
-              </a:rPr>
-              <a:t>However, maps can create a false sense of objectivity.</a:t>
-            </a:r>
-            <a:endParaRPr lang="en-US" sz="1220" dirty="0"/>
-          </a:p>
-        </p:txBody>
-      </p:sp>
-      <p:sp>
-        <p:nvSpPr>
-          <p:cNvPr id="16" name="Shape 14"/>
-          <p:cNvSpPr/>
-          <p:nvPr/>
-        </p:nvSpPr>
-        <p:spPr>
-          <a:xfrm>
-            <a:off x="7635240" y="4498848"/>
-            <a:ext cx="3474720" cy="1143000"/>
+            <a:pPr algn="ctr" indent="0" marL="0">
+              <a:buNone/>
+            </a:pPr>
+            <a:r>
+              <a:rPr lang="en-US" sz="880" b="1" dirty="0">
+                <a:solidFill>
+                  <a:srgbClr val="FFFFFF"/>
+                </a:solidFill>
+                <a:latin typeface="Aptos" pitchFamily="34" charset="0"/>
+                <a:ea typeface="Aptos" pitchFamily="34" charset="-122"/>
+                <a:cs typeface="Aptos" pitchFamily="34" charset="-120"/>
+              </a:rPr>
+              <a:t>Data</a:t>
+            </a:r>
+            <a:endParaRPr lang="en-US" sz="880" dirty="0"/>
+          </a:p>
+        </p:txBody>
+      </p:sp>
+      <p:sp>
+        <p:nvSpPr>
+          <p:cNvPr id="18" name="Shape 16"/>
+          <p:cNvSpPr/>
+          <p:nvPr/>
+        </p:nvSpPr>
+        <p:spPr>
+          <a:xfrm>
+            <a:off x="9817608" y="3351276"/>
+            <a:ext cx="164592" cy="0"/>
+          </a:xfrm>
+          <a:prstGeom prst="line">
+            <a:avLst/>
+          </a:prstGeom>
+          <a:noFill/>
+          <a:ln w="15240">
+            <a:solidFill>
+              <a:srgbClr val="8ABBD8"/>
+            </a:solidFill>
+            <a:prstDash val="solid"/>
+          </a:ln>
+        </p:spPr>
+      </p:sp>
+      <p:sp>
+        <p:nvSpPr>
+          <p:cNvPr id="19" name="Shape 17"/>
+          <p:cNvSpPr/>
+          <p:nvPr/>
+        </p:nvSpPr>
+        <p:spPr>
+          <a:xfrm>
+            <a:off x="8927592" y="3200400"/>
+            <a:ext cx="890016" cy="301752"/>
           </a:xfrm>
           <a:prstGeom prst="roundRect">
             <a:avLst>
-              <a:gd name="adj" fmla="val 9600"/>
+              <a:gd name="adj" fmla="val 24242"/>
+            </a:avLst>
+          </a:prstGeom>
+          <a:solidFill>
+            <a:srgbClr val="2F8A28"/>
+          </a:solidFill>
+          <a:ln w="12700">
+            <a:solidFill>
+              <a:srgbClr val="2F8A28"/>
+            </a:solidFill>
+            <a:prstDash val="solid"/>
+          </a:ln>
+        </p:spPr>
+      </p:sp>
+      <p:sp>
+        <p:nvSpPr>
+          <p:cNvPr id="20" name="Text 18"/>
+          <p:cNvSpPr/>
+          <p:nvPr/>
+        </p:nvSpPr>
+        <p:spPr>
+          <a:xfrm>
+            <a:off x="8964168" y="3273552"/>
+            <a:ext cx="816864" cy="146304"/>
+          </a:xfrm>
+          <a:prstGeom prst="rect">
+            <a:avLst/>
+          </a:prstGeom>
+          <a:noFill/>
+          <a:ln/>
+        </p:spPr>
+        <p:txBody>
+          <a:bodyPr wrap="square" lIns="0" tIns="0" rIns="0" bIns="0" rtlCol="0" anchor="ctr">
+            <a:normAutofit/>
+          </a:bodyPr>
+          <a:lstStyle/>
+          <a:p>
+            <a:pPr algn="ctr" indent="0" marL="0">
+              <a:buNone/>
+            </a:pPr>
+            <a:r>
+              <a:rPr lang="en-US" sz="880" b="1" dirty="0">
+                <a:solidFill>
+                  <a:srgbClr val="FFFFFF"/>
+                </a:solidFill>
+                <a:latin typeface="Aptos" pitchFamily="34" charset="0"/>
+                <a:ea typeface="Aptos" pitchFamily="34" charset="-122"/>
+                <a:cs typeface="Aptos" pitchFamily="34" charset="-120"/>
+              </a:rPr>
+              <a:t>Analysis</a:t>
+            </a:r>
+            <a:endParaRPr lang="en-US" sz="880" dirty="0"/>
+          </a:p>
+        </p:txBody>
+      </p:sp>
+      <p:sp>
+        <p:nvSpPr>
+          <p:cNvPr id="21" name="Shape 19"/>
+          <p:cNvSpPr/>
+          <p:nvPr/>
+        </p:nvSpPr>
+        <p:spPr>
+          <a:xfrm>
+            <a:off x="9982200" y="3200400"/>
+            <a:ext cx="890016" cy="301752"/>
+          </a:xfrm>
+          <a:prstGeom prst="roundRect">
+            <a:avLst>
+              <a:gd name="adj" fmla="val 24242"/>
+            </a:avLst>
+          </a:prstGeom>
+          <a:solidFill>
+            <a:srgbClr val="6A4CA3"/>
+          </a:solidFill>
+          <a:ln w="12700">
+            <a:solidFill>
+              <a:srgbClr val="6A4CA3"/>
+            </a:solidFill>
+            <a:prstDash val="solid"/>
+          </a:ln>
+        </p:spPr>
+      </p:sp>
+      <p:sp>
+        <p:nvSpPr>
+          <p:cNvPr id="22" name="Text 20"/>
+          <p:cNvSpPr/>
+          <p:nvPr/>
+        </p:nvSpPr>
+        <p:spPr>
+          <a:xfrm>
+            <a:off x="10018776" y="3273552"/>
+            <a:ext cx="816864" cy="146304"/>
+          </a:xfrm>
+          <a:prstGeom prst="rect">
+            <a:avLst/>
+          </a:prstGeom>
+          <a:noFill/>
+          <a:ln/>
+        </p:spPr>
+        <p:txBody>
+          <a:bodyPr wrap="square" lIns="0" tIns="0" rIns="0" bIns="0" rtlCol="0" anchor="ctr">
+            <a:normAutofit/>
+          </a:bodyPr>
+          <a:lstStyle/>
+          <a:p>
+            <a:pPr algn="ctr" indent="0" marL="0">
+              <a:buNone/>
+            </a:pPr>
+            <a:r>
+              <a:rPr lang="en-US" sz="880" b="1" dirty="0">
+                <a:solidFill>
+                  <a:srgbClr val="FFFFFF"/>
+                </a:solidFill>
+                <a:latin typeface="Aptos" pitchFamily="34" charset="0"/>
+                <a:ea typeface="Aptos" pitchFamily="34" charset="-122"/>
+                <a:cs typeface="Aptos" pitchFamily="34" charset="-120"/>
+              </a:rPr>
+              <a:t>Review</a:t>
+            </a:r>
+            <a:endParaRPr lang="en-US" sz="880" dirty="0"/>
+          </a:p>
+        </p:txBody>
+      </p:sp>
+      <p:sp>
+        <p:nvSpPr>
+          <p:cNvPr id="23" name="Text 21"/>
+          <p:cNvSpPr/>
+          <p:nvPr/>
+        </p:nvSpPr>
+        <p:spPr>
+          <a:xfrm>
+            <a:off x="7854696" y="3694176"/>
+            <a:ext cx="3035808" cy="206654"/>
+          </a:xfrm>
+          <a:prstGeom prst="rect">
+            <a:avLst/>
+          </a:prstGeom>
+          <a:noFill/>
+          <a:ln/>
+        </p:spPr>
+        <p:txBody>
+          <a:bodyPr wrap="square" lIns="254" tIns="254" rIns="254" bIns="254" rtlCol="0" anchor="t">
+            <a:normAutofit/>
+          </a:bodyPr>
+          <a:lstStyle/>
+          <a:p>
+            <a:pPr indent="0" marL="0">
+              <a:buNone/>
+            </a:pPr>
+            <a:r>
+              <a:rPr lang="en-US" sz="1120" dirty="0">
+                <a:solidFill>
+                  <a:srgbClr val="17364A"/>
+                </a:solidFill>
+                <a:latin typeface="Aptos" pitchFamily="34" charset="0"/>
+                <a:ea typeface="Aptos" pitchFamily="34" charset="-122"/>
+                <a:cs typeface="Aptos" pitchFamily="34" charset="-120"/>
+              </a:rPr>
+              <a:t>The important handoff is not from data to AI; it is from analysis to accountable human review.</a:t>
+            </a:r>
+            <a:endParaRPr lang="en-US" sz="1120" dirty="0"/>
+          </a:p>
+        </p:txBody>
+      </p:sp>
+      <p:sp>
+        <p:nvSpPr>
+          <p:cNvPr id="24" name="Shape 22"/>
+          <p:cNvSpPr/>
+          <p:nvPr/>
+        </p:nvSpPr>
+        <p:spPr>
+          <a:xfrm>
+            <a:off x="7635240" y="4184294"/>
+            <a:ext cx="3474720" cy="1466698"/>
+          </a:xfrm>
+          <a:prstGeom prst="roundRect">
+            <a:avLst>
+              <a:gd name="adj" fmla="val 7481"/>
             </a:avLst>
           </a:prstGeom>
           <a:solidFill>
@@ -16667,13 +17315,13 @@
       </p:sp>
       <p:sp>
         <p:nvSpPr>
-          <p:cNvPr id="17" name="Text 15"/>
-          <p:cNvSpPr/>
-          <p:nvPr/>
-        </p:nvSpPr>
-        <p:spPr>
-          <a:xfrm>
-            <a:off x="7799832" y="4645152"/>
+          <p:cNvPr id="25" name="Text 23"/>
+          <p:cNvSpPr/>
+          <p:nvPr/>
+        </p:nvSpPr>
+        <p:spPr>
+          <a:xfrm>
+            <a:off x="7799832" y="4330598"/>
             <a:ext cx="3145536" cy="256032"/>
           </a:xfrm>
           <a:prstGeom prst="rect">
@@ -16706,14 +17354,14 @@
       </p:sp>
       <p:sp>
         <p:nvSpPr>
-          <p:cNvPr id="18" name="Text 16"/>
-          <p:cNvSpPr/>
-          <p:nvPr/>
-        </p:nvSpPr>
-        <p:spPr>
-          <a:xfrm>
-            <a:off x="7799832" y="4974336"/>
-            <a:ext cx="3145536" cy="576072"/>
+          <p:cNvPr id="26" name="Text 24"/>
+          <p:cNvSpPr/>
+          <p:nvPr/>
+        </p:nvSpPr>
+        <p:spPr>
+          <a:xfrm>
+            <a:off x="7799832" y="4659782"/>
+            <a:ext cx="3145536" cy="899770"/>
           </a:xfrm>
           <a:prstGeom prst="rect">
             <a:avLst/>
@@ -16739,7 +17387,7 @@
                 <a:ea typeface="Aptos" pitchFamily="34" charset="-122"/>
                 <a:cs typeface="Aptos" pitchFamily="34" charset="-120"/>
               </a:rPr>
-              <a:t>Connect the concept to public health purpose, responsible use, required safeguards, documentation, and the next action a.</a:t>
+              <a:t>Connect the concept to public health purpose, responsible use, required safeguards, documentation, and the next action a department should take.</a:t>
             </a:r>
             <a:endParaRPr lang="en-US" sz="1320" dirty="0"/>
           </a:p>
@@ -17108,11 +17756,11 @@
         <p:spPr>
           <a:xfrm>
             <a:off x="7635240" y="1325880"/>
-            <a:ext cx="3474720" cy="1325880"/>
+            <a:ext cx="3474720" cy="1255471"/>
           </a:xfrm>
           <a:prstGeom prst="roundRect">
             <a:avLst>
-              <a:gd name="adj" fmla="val 8276"/>
+              <a:gd name="adj" fmla="val 8740"/>
             </a:avLst>
           </a:prstGeom>
           <a:solidFill>
@@ -17174,7 +17822,7 @@
         <p:spPr>
           <a:xfrm>
             <a:off x="7799832" y="1801368"/>
-            <a:ext cx="3145536" cy="758952"/>
+            <a:ext cx="3145536" cy="688543"/>
           </a:xfrm>
           <a:prstGeom prst="rect">
             <a:avLst/>
@@ -17214,12 +17862,12 @@
         </p:nvSpPr>
         <p:spPr>
           <a:xfrm>
-            <a:off x="7635240" y="2788920"/>
-            <a:ext cx="3474720" cy="1536192"/>
+            <a:off x="7635240" y="2718511"/>
+            <a:ext cx="3474720" cy="1328623"/>
           </a:xfrm>
           <a:prstGeom prst="roundRect">
             <a:avLst>
-              <a:gd name="adj" fmla="val 7143"/>
+              <a:gd name="adj" fmla="val 8259"/>
             </a:avLst>
           </a:prstGeom>
           <a:solidFill>
@@ -17241,7 +17889,7 @@
         </p:nvSpPr>
         <p:spPr>
           <a:xfrm>
-            <a:off x="7799832" y="2935224"/>
+            <a:off x="7799832" y="2864815"/>
             <a:ext cx="3145536" cy="256032"/>
           </a:xfrm>
           <a:prstGeom prst="rect">
@@ -17280,8 +17928,8 @@
         </p:nvSpPr>
         <p:spPr>
           <a:xfrm>
-            <a:off x="7818120" y="3300984"/>
-            <a:ext cx="3090672" cy="877824"/>
+            <a:off x="7818120" y="3230575"/>
+            <a:ext cx="3090672" cy="670255"/>
           </a:xfrm>
           <a:prstGeom prst="rect">
             <a:avLst/>
@@ -17355,12 +18003,12 @@
         </p:nvSpPr>
         <p:spPr>
           <a:xfrm>
-            <a:off x="7635240" y="4498848"/>
-            <a:ext cx="3474720" cy="1143000"/>
+            <a:off x="7635240" y="4184294"/>
+            <a:ext cx="3474720" cy="1466698"/>
           </a:xfrm>
           <a:prstGeom prst="roundRect">
             <a:avLst>
-              <a:gd name="adj" fmla="val 9600"/>
+              <a:gd name="adj" fmla="val 7481"/>
             </a:avLst>
           </a:prstGeom>
           <a:solidFill>
@@ -17382,7 +18030,7 @@
         </p:nvSpPr>
         <p:spPr>
           <a:xfrm>
-            <a:off x="7799832" y="4645152"/>
+            <a:off x="7799832" y="4330598"/>
             <a:ext cx="3145536" cy="256032"/>
           </a:xfrm>
           <a:prstGeom prst="rect">
@@ -17421,8 +18069,8 @@
         </p:nvSpPr>
         <p:spPr>
           <a:xfrm>
-            <a:off x="7799832" y="4974336"/>
-            <a:ext cx="3145536" cy="576072"/>
+            <a:off x="7799832" y="4659782"/>
+            <a:ext cx="3145536" cy="899770"/>
           </a:xfrm>
           <a:prstGeom prst="rect">
             <a:avLst/>
@@ -17448,7 +18096,7 @@
                 <a:ea typeface="Aptos" pitchFamily="34" charset="-122"/>
                 <a:cs typeface="Aptos" pitchFamily="34" charset="-120"/>
               </a:rPr>
-              <a:t>Connect the concept to public health purpose, responsible use, required safeguards, documentation, and the next action a.</a:t>
+              <a:t>Connect the concept to public health purpose, responsible use, required safeguards, documentation, and the next action a department should take.</a:t>
             </a:r>
             <a:endParaRPr lang="en-US" sz="1320" dirty="0"/>
           </a:p>

--- a/downloads/presentations/modules/anl-230.pptx
+++ b/downloads/presentations/modules/anl-230.pptx
@@ -3343,8 +3343,8 @@
         </p:nvSpPr>
         <p:spPr>
           <a:xfrm>
-            <a:off x="868680" y="1508760"/>
-            <a:ext cx="6309360" cy="4160520"/>
+            <a:off x="822960" y="1463040"/>
+            <a:ext cx="6565392" cy="4343400"/>
           </a:xfrm>
           <a:prstGeom prst="rect">
             <a:avLst/>
@@ -3362,7 +3362,7 @@
               <a:buNone/>
             </a:pPr>
             <a:r>
-              <a:rPr lang="en-US" sz="2100" dirty="0">
+              <a:rPr lang="en-US" sz="1920" dirty="0">
                 <a:solidFill>
                   <a:srgbClr val="003A63"/>
                 </a:solidFill>
@@ -3372,14 +3372,14 @@
               </a:rPr>
               <a:t>• Geospatial AI begins with location data, and location data are rarely perfect.</a:t>
             </a:r>
-            <a:endParaRPr lang="en-US" sz="2100" dirty="0"/>
-          </a:p>
-          <a:p>
-            <a:pPr indent="0" marL="0">
-              <a:buNone/>
-            </a:pPr>
-            <a:r>
-              <a:rPr lang="en-US" sz="2100" dirty="0">
+            <a:endParaRPr lang="en-US" sz="1920" dirty="0"/>
+          </a:p>
+          <a:p>
+            <a:pPr indent="0" marL="0">
+              <a:buNone/>
+            </a:pPr>
+            <a:r>
+              <a:rPr lang="en-US" sz="1920" dirty="0">
                 <a:solidFill>
                   <a:srgbClr val="003A63"/>
                 </a:solidFill>
@@ -3387,16 +3387,16 @@
                 <a:ea typeface="Aptos" pitchFamily="34" charset="-122"/>
                 <a:cs typeface="Aptos" pitchFamily="34" charset="-120"/>
               </a:rPr>
-              <a:t>• Addresses may be missing, misspelled, outdated, rural route-based, temporary, or unstable.</a:t>
-            </a:r>
-            <a:endParaRPr lang="en-US" sz="2100" dirty="0"/>
-          </a:p>
-          <a:p>
-            <a:pPr indent="0" marL="0">
-              <a:buNone/>
-            </a:pPr>
-            <a:r>
-              <a:rPr lang="en-US" sz="2100" dirty="0">
+              <a:t>• Addresses may be missing, misspelled, outdated, rural route-based,.</a:t>
+            </a:r>
+            <a:endParaRPr lang="en-US" sz="1920" dirty="0"/>
+          </a:p>
+          <a:p>
+            <a:pPr indent="0" marL="0">
+              <a:buNone/>
+            </a:pPr>
+            <a:r>
+              <a:rPr lang="en-US" sz="1920" dirty="0">
                 <a:solidFill>
                   <a:srgbClr val="003A63"/>
                 </a:solidFill>
@@ -3404,9 +3404,9 @@
                 <a:ea typeface="Aptos" pitchFamily="34" charset="-122"/>
                 <a:cs typeface="Aptos" pitchFamily="34" charset="-120"/>
               </a:rPr>
-              <a:t>• People experiencing homelessness, migration, displacement, incarceration, or housing.</a:t>
-            </a:r>
-            <a:endParaRPr lang="en-US" sz="2100" dirty="0"/>
+              <a:t>• People experiencing homelessness, migration, displacement, incarceration, or.</a:t>
+            </a:r>
+            <a:endParaRPr lang="en-US" sz="1920" dirty="0"/>
           </a:p>
         </p:txBody>
       </p:sp>
@@ -3418,12 +3418,12 @@
         </p:nvSpPr>
         <p:spPr>
           <a:xfrm>
-            <a:off x="7635240" y="1325880"/>
-            <a:ext cx="3474720" cy="1207008"/>
+            <a:off x="7543800" y="1325880"/>
+            <a:ext cx="3611880" cy="1261872"/>
           </a:xfrm>
           <a:prstGeom prst="roundRect">
             <a:avLst>
-              <a:gd name="adj" fmla="val 9091"/>
+              <a:gd name="adj" fmla="val 8696"/>
             </a:avLst>
           </a:prstGeom>
           <a:solidFill>
@@ -3445,8 +3445,8 @@
         </p:nvSpPr>
         <p:spPr>
           <a:xfrm>
-            <a:off x="7799832" y="1472184"/>
-            <a:ext cx="3145536" cy="256032"/>
+            <a:off x="7708392" y="1453896"/>
+            <a:ext cx="3282696" cy="228600"/>
           </a:xfrm>
           <a:prstGeom prst="rect">
             <a:avLst/>
@@ -3462,7 +3462,7 @@
               <a:buNone/>
             </a:pPr>
             <a:r>
-              <a:rPr lang="en-US" sz="1300" b="1" dirty="0">
+              <a:rPr lang="en-US" sz="1220" b="1" dirty="0">
                 <a:solidFill>
                   <a:srgbClr val="0068B7"/>
                 </a:solidFill>
@@ -3472,7 +3472,7 @@
               </a:rPr>
               <a:t>Core concept</a:t>
             </a:r>
-            <a:endParaRPr lang="en-US" sz="1300" dirty="0"/>
+            <a:endParaRPr lang="en-US" sz="1220" dirty="0"/>
           </a:p>
         </p:txBody>
       </p:sp>
@@ -3484,8 +3484,8 @@
         </p:nvSpPr>
         <p:spPr>
           <a:xfrm>
-            <a:off x="7799832" y="1801368"/>
-            <a:ext cx="3145536" cy="640080"/>
+            <a:off x="7708392" y="1764792"/>
+            <a:ext cx="3282696" cy="749808"/>
           </a:xfrm>
           <a:prstGeom prst="rect">
             <a:avLst/>
@@ -3503,7 +3503,7 @@
               <a:buNone/>
             </a:pPr>
             <a:r>
-              <a:rPr lang="en-US" sz="1320" dirty="0">
+              <a:rPr lang="en-US" sz="1220" dirty="0">
                 <a:solidFill>
                   <a:srgbClr val="17364A"/>
                 </a:solidFill>
@@ -3513,7 +3513,7 @@
               </a:rPr>
               <a:t>Geospatial AI begins with location data, and location data are rarely perfect.</a:t>
             </a:r>
-            <a:endParaRPr lang="en-US" sz="1320" dirty="0"/>
+            <a:endParaRPr lang="en-US" sz="1220" dirty="0"/>
           </a:p>
         </p:txBody>
       </p:sp>
@@ -3525,12 +3525,12 @@
         </p:nvSpPr>
         <p:spPr>
           <a:xfrm>
-            <a:off x="7635240" y="2670048"/>
-            <a:ext cx="3474720" cy="1377086"/>
+            <a:off x="7543800" y="2724912"/>
+            <a:ext cx="3611880" cy="1527048"/>
           </a:xfrm>
           <a:prstGeom prst="roundRect">
             <a:avLst>
-              <a:gd name="adj" fmla="val 7968"/>
+              <a:gd name="adj" fmla="val 7186"/>
             </a:avLst>
           </a:prstGeom>
           <a:solidFill>
@@ -3552,24 +3552,26 @@
         </p:nvSpPr>
         <p:spPr>
           <a:xfrm>
-            <a:off x="7799832" y="2798064"/>
-            <a:ext cx="3145536" cy="237744"/>
-          </a:xfrm>
-          <a:prstGeom prst="rect">
-            <a:avLst/>
-          </a:prstGeom>
-          <a:noFill/>
-          <a:ln/>
-        </p:spPr>
-        <p:txBody>
-          <a:bodyPr wrap="square" lIns="0" tIns="0" rIns="0" bIns="0" rtlCol="0" anchor="ctr"/>
-          <a:lstStyle/>
-          <a:p>
-            <a:pPr indent="0" marL="0">
-              <a:buNone/>
-            </a:pPr>
-            <a:r>
-              <a:rPr lang="en-US" sz="1250" b="1" dirty="0">
+            <a:off x="7708392" y="2852928"/>
+            <a:ext cx="3282696" cy="219456"/>
+          </a:xfrm>
+          <a:prstGeom prst="rect">
+            <a:avLst/>
+          </a:prstGeom>
+          <a:noFill/>
+          <a:ln/>
+        </p:spPr>
+        <p:txBody>
+          <a:bodyPr wrap="square" lIns="0" tIns="0" rIns="0" bIns="0" rtlCol="0" anchor="ctr">
+            <a:normAutofit/>
+          </a:bodyPr>
+          <a:lstStyle/>
+          <a:p>
+            <a:pPr indent="0" marL="0">
+              <a:buNone/>
+            </a:pPr>
+            <a:r>
+              <a:rPr lang="en-US" sz="1160" b="1" dirty="0">
                 <a:solidFill>
                   <a:srgbClr val="0068B7"/>
                 </a:solidFill>
@@ -3579,7 +3581,7 @@
               </a:rPr>
               <a:t>Data-to-decision flow</a:t>
             </a:r>
-            <a:endParaRPr lang="en-US" sz="1250" dirty="0"/>
+            <a:endParaRPr lang="en-US" sz="1160" dirty="0"/>
           </a:p>
         </p:txBody>
       </p:sp>
@@ -3591,7 +3593,7 @@
         </p:nvSpPr>
         <p:spPr>
           <a:xfrm>
-            <a:off x="8763000" y="3351276"/>
+            <a:off x="8717280" y="3406140"/>
             <a:ext cx="164592" cy="0"/>
           </a:xfrm>
           <a:prstGeom prst="line">
@@ -3614,8 +3616,8 @@
         </p:nvSpPr>
         <p:spPr>
           <a:xfrm>
-            <a:off x="7872984" y="3200400"/>
-            <a:ext cx="890016" cy="301752"/>
+            <a:off x="7781544" y="3255264"/>
+            <a:ext cx="935736" cy="301752"/>
           </a:xfrm>
           <a:prstGeom prst="roundRect">
             <a:avLst>
@@ -3641,8 +3643,8 @@
         </p:nvSpPr>
         <p:spPr>
           <a:xfrm>
-            <a:off x="7909560" y="3273552"/>
-            <a:ext cx="816864" cy="146304"/>
+            <a:off x="7818120" y="3328416"/>
+            <a:ext cx="862584" cy="146304"/>
           </a:xfrm>
           <a:prstGeom prst="rect">
             <a:avLst/>
@@ -3682,7 +3684,7 @@
         </p:nvSpPr>
         <p:spPr>
           <a:xfrm>
-            <a:off x="9817608" y="3351276"/>
+            <a:off x="9817608" y="3406140"/>
             <a:ext cx="164592" cy="0"/>
           </a:xfrm>
           <a:prstGeom prst="line">
@@ -3705,8 +3707,8 @@
         </p:nvSpPr>
         <p:spPr>
           <a:xfrm>
-            <a:off x="8927592" y="3200400"/>
-            <a:ext cx="890016" cy="301752"/>
+            <a:off x="8881872" y="3255264"/>
+            <a:ext cx="935736" cy="301752"/>
           </a:xfrm>
           <a:prstGeom prst="roundRect">
             <a:avLst>
@@ -3732,8 +3734,8 @@
         </p:nvSpPr>
         <p:spPr>
           <a:xfrm>
-            <a:off x="8964168" y="3273552"/>
-            <a:ext cx="816864" cy="146304"/>
+            <a:off x="8918448" y="3328416"/>
+            <a:ext cx="862584" cy="146304"/>
           </a:xfrm>
           <a:prstGeom prst="rect">
             <a:avLst/>
@@ -3773,8 +3775,8 @@
         </p:nvSpPr>
         <p:spPr>
           <a:xfrm>
-            <a:off x="9982200" y="3200400"/>
-            <a:ext cx="890016" cy="301752"/>
+            <a:off x="9982200" y="3255264"/>
+            <a:ext cx="935736" cy="301752"/>
           </a:xfrm>
           <a:prstGeom prst="roundRect">
             <a:avLst>
@@ -3800,8 +3802,8 @@
         </p:nvSpPr>
         <p:spPr>
           <a:xfrm>
-            <a:off x="10018776" y="3273552"/>
-            <a:ext cx="816864" cy="146304"/>
+            <a:off x="10018776" y="3328416"/>
+            <a:ext cx="862584" cy="146304"/>
           </a:xfrm>
           <a:prstGeom prst="rect">
             <a:avLst/>
@@ -3841,8 +3843,8 @@
         </p:nvSpPr>
         <p:spPr>
           <a:xfrm>
-            <a:off x="7854696" y="3694176"/>
-            <a:ext cx="3035808" cy="206654"/>
+            <a:off x="7763256" y="3749040"/>
+            <a:ext cx="3172968" cy="356616"/>
           </a:xfrm>
           <a:prstGeom prst="rect">
             <a:avLst/>
@@ -3860,7 +3862,7 @@
               <a:buNone/>
             </a:pPr>
             <a:r>
-              <a:rPr lang="en-US" sz="1120" dirty="0">
+              <a:rPr lang="en-US" sz="1040" dirty="0">
                 <a:solidFill>
                   <a:srgbClr val="17364A"/>
                 </a:solidFill>
@@ -3868,9 +3870,9 @@
                 <a:ea typeface="Aptos" pitchFamily="34" charset="-122"/>
                 <a:cs typeface="Aptos" pitchFamily="34" charset="-120"/>
               </a:rPr>
-              <a:t>The important handoff is not from data to AI; it is from analysis to accountable human review.</a:t>
-            </a:r>
-            <a:endParaRPr lang="en-US" sz="1120" dirty="0"/>
+              <a:t>The important handoff is not from data to AI; it is from analysis to.</a:t>
+            </a:r>
+            <a:endParaRPr lang="en-US" sz="1040" dirty="0"/>
           </a:p>
         </p:txBody>
       </p:sp>
@@ -3882,12 +3884,12 @@
         </p:nvSpPr>
         <p:spPr>
           <a:xfrm>
-            <a:off x="7635240" y="4184294"/>
-            <a:ext cx="3474720" cy="1466698"/>
+            <a:off x="7543800" y="4389120"/>
+            <a:ext cx="3611880" cy="1261872"/>
           </a:xfrm>
           <a:prstGeom prst="roundRect">
             <a:avLst>
-              <a:gd name="adj" fmla="val 7481"/>
+              <a:gd name="adj" fmla="val 8696"/>
             </a:avLst>
           </a:prstGeom>
           <a:solidFill>
@@ -3909,8 +3911,8 @@
         </p:nvSpPr>
         <p:spPr>
           <a:xfrm>
-            <a:off x="7799832" y="4330598"/>
-            <a:ext cx="3145536" cy="256032"/>
+            <a:off x="7708392" y="4517136"/>
+            <a:ext cx="3282696" cy="228600"/>
           </a:xfrm>
           <a:prstGeom prst="rect">
             <a:avLst/>
@@ -3926,7 +3928,7 @@
               <a:buNone/>
             </a:pPr>
             <a:r>
-              <a:rPr lang="en-US" sz="1300" b="1" dirty="0">
+              <a:rPr lang="en-US" sz="1220" b="1" dirty="0">
                 <a:solidFill>
                   <a:srgbClr val="0068B7"/>
                 </a:solidFill>
@@ -3936,7 +3938,7 @@
               </a:rPr>
               <a:t>Apply it</a:t>
             </a:r>
-            <a:endParaRPr lang="en-US" sz="1300" dirty="0"/>
+            <a:endParaRPr lang="en-US" sz="1220" dirty="0"/>
           </a:p>
         </p:txBody>
       </p:sp>
@@ -3948,8 +3950,8 @@
         </p:nvSpPr>
         <p:spPr>
           <a:xfrm>
-            <a:off x="7799832" y="4659782"/>
-            <a:ext cx="3145536" cy="899770"/>
+            <a:off x="7708392" y="4828032"/>
+            <a:ext cx="3282696" cy="749808"/>
           </a:xfrm>
           <a:prstGeom prst="rect">
             <a:avLst/>
@@ -3967,7 +3969,7 @@
               <a:buNone/>
             </a:pPr>
             <a:r>
-              <a:rPr lang="en-US" sz="1320" dirty="0">
+              <a:rPr lang="en-US" sz="1220" dirty="0">
                 <a:solidFill>
                   <a:srgbClr val="17364A"/>
                 </a:solidFill>
@@ -3975,9 +3977,9 @@
                 <a:ea typeface="Aptos" pitchFamily="34" charset="-122"/>
                 <a:cs typeface="Aptos" pitchFamily="34" charset="-120"/>
               </a:rPr>
-              <a:t>Connect the concept to public health purpose, responsible use, required safeguards, documentation, and the next action a department should take.</a:t>
-            </a:r>
-            <a:endParaRPr lang="en-US" sz="1320" dirty="0"/>
+              <a:t>Connect the concept to public health purpose, responsible use, required.</a:t>
+            </a:r>
+            <a:endParaRPr lang="en-US" sz="1220" dirty="0"/>
           </a:p>
         </p:txBody>
       </p:sp>
@@ -4268,8 +4270,8 @@
         </p:nvSpPr>
         <p:spPr>
           <a:xfrm>
-            <a:off x="868680" y="1508760"/>
-            <a:ext cx="6309360" cy="4160520"/>
+            <a:off x="822960" y="1463040"/>
+            <a:ext cx="6565392" cy="4343400"/>
           </a:xfrm>
           <a:prstGeom prst="rect">
             <a:avLst/>
@@ -4287,7 +4289,7 @@
               <a:buNone/>
             </a:pPr>
             <a:r>
-              <a:rPr lang="en-US" sz="2100" dirty="0">
+              <a:rPr lang="en-US" sz="1920" dirty="0">
                 <a:solidFill>
                   <a:srgbClr val="003A63"/>
                 </a:solidFill>
@@ -4297,14 +4299,14 @@
               </a:rPr>
               <a:t>• Geospatial models may use spatial proxies for social conditions.</a:t>
             </a:r>
-            <a:endParaRPr lang="en-US" sz="2100" dirty="0"/>
-          </a:p>
-          <a:p>
-            <a:pPr indent="0" marL="0">
-              <a:buNone/>
-            </a:pPr>
-            <a:r>
-              <a:rPr lang="en-US" sz="2100" dirty="0">
+            <a:endParaRPr lang="en-US" sz="1920" dirty="0"/>
+          </a:p>
+          <a:p>
+            <a:pPr indent="0" marL="0">
+              <a:buNone/>
+            </a:pPr>
+            <a:r>
+              <a:rPr lang="en-US" sz="1920" dirty="0">
                 <a:solidFill>
                   <a:srgbClr val="003A63"/>
                 </a:solidFill>
@@ -4312,16 +4314,16 @@
                 <a:ea typeface="Aptos" pitchFamily="34" charset="-122"/>
                 <a:cs typeface="Aptos" pitchFamily="34" charset="-120"/>
               </a:rPr>
-              <a:t>• Social vulnerability, deprivation, rurality, housing burden, transportation access, and.</a:t>
-            </a:r>
-            <a:endParaRPr lang="en-US" sz="2100" dirty="0"/>
-          </a:p>
-          <a:p>
-            <a:pPr indent="0" marL="0">
-              <a:buNone/>
-            </a:pPr>
-            <a:r>
-              <a:rPr lang="en-US" sz="2100" dirty="0">
+              <a:t>• Social vulnerability, deprivation, rurality, housing burden, transportation.</a:t>
+            </a:r>
+            <a:endParaRPr lang="en-US" sz="1920" dirty="0"/>
+          </a:p>
+          <a:p>
+            <a:pPr indent="0" marL="0">
+              <a:buNone/>
+            </a:pPr>
+            <a:r>
+              <a:rPr lang="en-US" sz="1920" dirty="0">
                 <a:solidFill>
                   <a:srgbClr val="003A63"/>
                 </a:solidFill>
@@ -4329,9 +4331,9 @@
                 <a:ea typeface="Aptos" pitchFamily="34" charset="-122"/>
                 <a:cs typeface="Aptos" pitchFamily="34" charset="-120"/>
               </a:rPr>
-              <a:t>• They can also be misused if they stigmatize communities or support restrictive decisions.</a:t>
-            </a:r>
-            <a:endParaRPr lang="en-US" sz="2100" dirty="0"/>
+              <a:t>• They can also be misused if they stigmatize communities or support.</a:t>
+            </a:r>
+            <a:endParaRPr lang="en-US" sz="1920" dirty="0"/>
           </a:p>
         </p:txBody>
       </p:sp>
@@ -4343,12 +4345,12 @@
         </p:nvSpPr>
         <p:spPr>
           <a:xfrm>
-            <a:off x="7635240" y="1325880"/>
-            <a:ext cx="3474720" cy="1207008"/>
+            <a:off x="7543800" y="1325880"/>
+            <a:ext cx="3611880" cy="1261872"/>
           </a:xfrm>
           <a:prstGeom prst="roundRect">
             <a:avLst>
-              <a:gd name="adj" fmla="val 9091"/>
+              <a:gd name="adj" fmla="val 8696"/>
             </a:avLst>
           </a:prstGeom>
           <a:solidFill>
@@ -4370,8 +4372,8 @@
         </p:nvSpPr>
         <p:spPr>
           <a:xfrm>
-            <a:off x="7799832" y="1472184"/>
-            <a:ext cx="3145536" cy="256032"/>
+            <a:off x="7708392" y="1453896"/>
+            <a:ext cx="3282696" cy="228600"/>
           </a:xfrm>
           <a:prstGeom prst="rect">
             <a:avLst/>
@@ -4387,7 +4389,7 @@
               <a:buNone/>
             </a:pPr>
             <a:r>
-              <a:rPr lang="en-US" sz="1300" b="1" dirty="0">
+              <a:rPr lang="en-US" sz="1220" b="1" dirty="0">
                 <a:solidFill>
                   <a:srgbClr val="0068B7"/>
                 </a:solidFill>
@@ -4397,7 +4399,7 @@
               </a:rPr>
               <a:t>Core concept</a:t>
             </a:r>
-            <a:endParaRPr lang="en-US" sz="1300" dirty="0"/>
+            <a:endParaRPr lang="en-US" sz="1220" dirty="0"/>
           </a:p>
         </p:txBody>
       </p:sp>
@@ -4409,8 +4411,8 @@
         </p:nvSpPr>
         <p:spPr>
           <a:xfrm>
-            <a:off x="7799832" y="1801368"/>
-            <a:ext cx="3145536" cy="640080"/>
+            <a:off x="7708392" y="1764792"/>
+            <a:ext cx="3282696" cy="749808"/>
           </a:xfrm>
           <a:prstGeom prst="rect">
             <a:avLst/>
@@ -4428,7 +4430,7 @@
               <a:buNone/>
             </a:pPr>
             <a:r>
-              <a:rPr lang="en-US" sz="1320" dirty="0">
+              <a:rPr lang="en-US" sz="1220" dirty="0">
                 <a:solidFill>
                   <a:srgbClr val="17364A"/>
                 </a:solidFill>
@@ -4438,7 +4440,7 @@
               </a:rPr>
               <a:t>Geospatial models may use spatial proxies for social conditions.</a:t>
             </a:r>
-            <a:endParaRPr lang="en-US" sz="1320" dirty="0"/>
+            <a:endParaRPr lang="en-US" sz="1220" dirty="0"/>
           </a:p>
         </p:txBody>
       </p:sp>
@@ -4450,12 +4452,12 @@
         </p:nvSpPr>
         <p:spPr>
           <a:xfrm>
-            <a:off x="7635240" y="2670048"/>
-            <a:ext cx="3474720" cy="1377086"/>
+            <a:off x="7543800" y="2724912"/>
+            <a:ext cx="3611880" cy="1527048"/>
           </a:xfrm>
           <a:prstGeom prst="roundRect">
             <a:avLst>
-              <a:gd name="adj" fmla="val 7968"/>
+              <a:gd name="adj" fmla="val 7186"/>
             </a:avLst>
           </a:prstGeom>
           <a:solidFill>
@@ -4477,8 +4479,8 @@
         </p:nvSpPr>
         <p:spPr>
           <a:xfrm>
-            <a:off x="7799832" y="2816352"/>
-            <a:ext cx="3145536" cy="256032"/>
+            <a:off x="7708392" y="2852928"/>
+            <a:ext cx="3282696" cy="228600"/>
           </a:xfrm>
           <a:prstGeom prst="rect">
             <a:avLst/>
@@ -4494,7 +4496,7 @@
               <a:buNone/>
             </a:pPr>
             <a:r>
-              <a:rPr lang="en-US" sz="1300" b="1" dirty="0">
+              <a:rPr lang="en-US" sz="1220" b="1" dirty="0">
                 <a:solidFill>
                   <a:srgbClr val="0068B7"/>
                 </a:solidFill>
@@ -4504,7 +4506,7 @@
               </a:rPr>
               <a:t>Concept checkpoints</a:t>
             </a:r>
-            <a:endParaRPr lang="en-US" sz="1300" dirty="0"/>
+            <a:endParaRPr lang="en-US" sz="1220" dirty="0"/>
           </a:p>
         </p:txBody>
       </p:sp>
@@ -4516,8 +4518,8 @@
         </p:nvSpPr>
         <p:spPr>
           <a:xfrm>
-            <a:off x="7818120" y="3182112"/>
-            <a:ext cx="3090672" cy="718718"/>
+            <a:off x="7726680" y="3182112"/>
+            <a:ext cx="3227832" cy="960120"/>
           </a:xfrm>
           <a:prstGeom prst="rect">
             <a:avLst/>
@@ -4535,7 +4537,7 @@
               <a:buNone/>
             </a:pPr>
             <a:r>
-              <a:rPr lang="en-US" sz="1220" dirty="0">
+              <a:rPr lang="en-US" sz="1140" dirty="0">
                 <a:solidFill>
                   <a:srgbClr val="17364A"/>
                 </a:solidFill>
@@ -4543,16 +4545,16 @@
                 <a:ea typeface="Aptos" pitchFamily="34" charset="-122"/>
                 <a:cs typeface="Aptos" pitchFamily="34" charset="-120"/>
               </a:rPr>
-              <a:t>Social vulnerability, deprivation, rurality, housing burden,.</a:t>
-            </a:r>
-            <a:endParaRPr lang="en-US" sz="1220" dirty="0"/>
-          </a:p>
-          <a:p>
-            <a:pPr indent="0" marL="0">
-              <a:buNone/>
-            </a:pPr>
-            <a:r>
-              <a:rPr lang="en-US" sz="1220" dirty="0">
+              <a:t>Social vulnerability, deprivation, rurality,.</a:t>
+            </a:r>
+            <a:endParaRPr lang="en-US" sz="1140" dirty="0"/>
+          </a:p>
+          <a:p>
+            <a:pPr indent="0" marL="0">
+              <a:buNone/>
+            </a:pPr>
+            <a:r>
+              <a:rPr lang="en-US" sz="1140" dirty="0">
                 <a:solidFill>
                   <a:srgbClr val="17364A"/>
                 </a:solidFill>
@@ -4560,16 +4562,16 @@
                 <a:ea typeface="Aptos" pitchFamily="34" charset="-122"/>
                 <a:cs typeface="Aptos" pitchFamily="34" charset="-120"/>
               </a:rPr>
-              <a:t>Agencies should use these indicators to guide supportive action.</a:t>
-            </a:r>
-            <a:endParaRPr lang="en-US" sz="1220" dirty="0"/>
-          </a:p>
-          <a:p>
-            <a:pPr indent="0" marL="0">
-              <a:buNone/>
-            </a:pPr>
-            <a:r>
-              <a:rPr lang="en-US" sz="1220" dirty="0">
+              <a:t>Agencies should use these indicators to guide.</a:t>
+            </a:r>
+            <a:endParaRPr lang="en-US" sz="1140" dirty="0"/>
+          </a:p>
+          <a:p>
+            <a:pPr indent="0" marL="0">
+              <a:buNone/>
+            </a:pPr>
+            <a:r>
+              <a:rPr lang="en-US" sz="1140" dirty="0">
                 <a:solidFill>
                   <a:srgbClr val="17364A"/>
                 </a:solidFill>
@@ -4577,9 +4579,9 @@
                 <a:ea typeface="Aptos" pitchFamily="34" charset="-122"/>
                 <a:cs typeface="Aptos" pitchFamily="34" charset="-120"/>
               </a:rPr>
-              <a:t>Privacy protection should be planned before analysis.</a:t>
-            </a:r>
-            <a:endParaRPr lang="en-US" sz="1220" dirty="0"/>
+              <a:t>Privacy protection should be planned before.</a:t>
+            </a:r>
+            <a:endParaRPr lang="en-US" sz="1140" dirty="0"/>
           </a:p>
         </p:txBody>
       </p:sp>
@@ -4591,12 +4593,12 @@
         </p:nvSpPr>
         <p:spPr>
           <a:xfrm>
-            <a:off x="7635240" y="4184294"/>
-            <a:ext cx="3474720" cy="1466698"/>
+            <a:off x="7543800" y="4389120"/>
+            <a:ext cx="3611880" cy="1261872"/>
           </a:xfrm>
           <a:prstGeom prst="roundRect">
             <a:avLst>
-              <a:gd name="adj" fmla="val 7481"/>
+              <a:gd name="adj" fmla="val 8696"/>
             </a:avLst>
           </a:prstGeom>
           <a:solidFill>
@@ -4618,8 +4620,8 @@
         </p:nvSpPr>
         <p:spPr>
           <a:xfrm>
-            <a:off x="7799832" y="4330598"/>
-            <a:ext cx="3145536" cy="256032"/>
+            <a:off x="7708392" y="4517136"/>
+            <a:ext cx="3282696" cy="228600"/>
           </a:xfrm>
           <a:prstGeom prst="rect">
             <a:avLst/>
@@ -4635,7 +4637,7 @@
               <a:buNone/>
             </a:pPr>
             <a:r>
-              <a:rPr lang="en-US" sz="1300" b="1" dirty="0">
+              <a:rPr lang="en-US" sz="1220" b="1" dirty="0">
                 <a:solidFill>
                   <a:srgbClr val="0068B7"/>
                 </a:solidFill>
@@ -4645,7 +4647,7 @@
               </a:rPr>
               <a:t>Apply it</a:t>
             </a:r>
-            <a:endParaRPr lang="en-US" sz="1300" dirty="0"/>
+            <a:endParaRPr lang="en-US" sz="1220" dirty="0"/>
           </a:p>
         </p:txBody>
       </p:sp>
@@ -4657,8 +4659,8 @@
         </p:nvSpPr>
         <p:spPr>
           <a:xfrm>
-            <a:off x="7799832" y="4659782"/>
-            <a:ext cx="3145536" cy="899770"/>
+            <a:off x="7708392" y="4828032"/>
+            <a:ext cx="3282696" cy="749808"/>
           </a:xfrm>
           <a:prstGeom prst="rect">
             <a:avLst/>
@@ -4676,7 +4678,7 @@
               <a:buNone/>
             </a:pPr>
             <a:r>
-              <a:rPr lang="en-US" sz="1320" dirty="0">
+              <a:rPr lang="en-US" sz="1220" dirty="0">
                 <a:solidFill>
                   <a:srgbClr val="17364A"/>
                 </a:solidFill>
@@ -4684,9 +4686,9 @@
                 <a:ea typeface="Aptos" pitchFamily="34" charset="-122"/>
                 <a:cs typeface="Aptos" pitchFamily="34" charset="-120"/>
               </a:rPr>
-              <a:t>Connect the concept to public health purpose, responsible use, required safeguards, documentation, and the next action a department should take.</a:t>
-            </a:r>
-            <a:endParaRPr lang="en-US" sz="1320" dirty="0"/>
+              <a:t>Connect the concept to public health purpose, responsible use, required.</a:t>
+            </a:r>
+            <a:endParaRPr lang="en-US" sz="1220" dirty="0"/>
           </a:p>
         </p:txBody>
       </p:sp>
@@ -4977,8 +4979,8 @@
         </p:nvSpPr>
         <p:spPr>
           <a:xfrm>
-            <a:off x="868680" y="1508760"/>
-            <a:ext cx="6309360" cy="4160520"/>
+            <a:off x="822960" y="1463040"/>
+            <a:ext cx="6565392" cy="4343400"/>
           </a:xfrm>
           <a:prstGeom prst="rect">
             <a:avLst/>
@@ -4996,7 +4998,7 @@
               <a:buNone/>
             </a:pPr>
             <a:r>
-              <a:rPr lang="en-US" sz="2100" dirty="0">
+              <a:rPr lang="en-US" sz="1920" dirty="0">
                 <a:solidFill>
                   <a:srgbClr val="003A63"/>
                 </a:solidFill>
@@ -5006,14 +5008,14 @@
               </a:rPr>
               <a:t>• Geocoding bias.</a:t>
             </a:r>
-            <a:endParaRPr lang="en-US" sz="2100" dirty="0"/>
-          </a:p>
-          <a:p>
-            <a:pPr indent="0" marL="0">
-              <a:buNone/>
-            </a:pPr>
-            <a:r>
-              <a:rPr lang="en-US" sz="2100" dirty="0">
+            <a:endParaRPr lang="en-US" sz="1920" dirty="0"/>
+          </a:p>
+          <a:p>
+            <a:pPr indent="0" marL="0">
+              <a:buNone/>
+            </a:pPr>
+            <a:r>
+              <a:rPr lang="en-US" sz="1920" dirty="0">
                 <a:solidFill>
                   <a:srgbClr val="003A63"/>
                 </a:solidFill>
@@ -5023,14 +5025,14 @@
               </a:rPr>
               <a:t>• Some populations and locations are harder to geocode accurately.</a:t>
             </a:r>
-            <a:endParaRPr lang="en-US" sz="2100" dirty="0"/>
-          </a:p>
-          <a:p>
-            <a:pPr indent="0" marL="0">
-              <a:buNone/>
-            </a:pPr>
-            <a:r>
-              <a:rPr lang="en-US" sz="2100" dirty="0">
+            <a:endParaRPr lang="en-US" sz="1920" dirty="0"/>
+          </a:p>
+          <a:p>
+            <a:pPr indent="0" marL="0">
+              <a:buNone/>
+            </a:pPr>
+            <a:r>
+              <a:rPr lang="en-US" sz="1920" dirty="0">
                 <a:solidFill>
                   <a:srgbClr val="003A63"/>
                 </a:solidFill>
@@ -5038,9 +5040,9 @@
                 <a:ea typeface="Aptos" pitchFamily="34" charset="-122"/>
                 <a:cs typeface="Aptos" pitchFamily="34" charset="-120"/>
               </a:rPr>
-              <a:t>• Guardrails include geocoding quality checks, manual review for unmatched records, and.</a:t>
-            </a:r>
-            <a:endParaRPr lang="en-US" sz="2100" dirty="0"/>
+              <a:t>• Guardrails include geocoding quality checks, manual review for unmatched.</a:t>
+            </a:r>
+            <a:endParaRPr lang="en-US" sz="1920" dirty="0"/>
           </a:p>
         </p:txBody>
       </p:sp>
@@ -5052,12 +5054,12 @@
         </p:nvSpPr>
         <p:spPr>
           <a:xfrm>
-            <a:off x="7635240" y="1325880"/>
-            <a:ext cx="3474720" cy="1207008"/>
+            <a:off x="7543800" y="1325880"/>
+            <a:ext cx="3611880" cy="1261872"/>
           </a:xfrm>
           <a:prstGeom prst="roundRect">
             <a:avLst>
-              <a:gd name="adj" fmla="val 9091"/>
+              <a:gd name="adj" fmla="val 8696"/>
             </a:avLst>
           </a:prstGeom>
           <a:solidFill>
@@ -5079,8 +5081,8 @@
         </p:nvSpPr>
         <p:spPr>
           <a:xfrm>
-            <a:off x="7799832" y="1472184"/>
-            <a:ext cx="3145536" cy="256032"/>
+            <a:off x="7708392" y="1453896"/>
+            <a:ext cx="3282696" cy="228600"/>
           </a:xfrm>
           <a:prstGeom prst="rect">
             <a:avLst/>
@@ -5096,7 +5098,7 @@
               <a:buNone/>
             </a:pPr>
             <a:r>
-              <a:rPr lang="en-US" sz="1300" b="1" dirty="0">
+              <a:rPr lang="en-US" sz="1220" b="1" dirty="0">
                 <a:solidFill>
                   <a:srgbClr val="0068B7"/>
                 </a:solidFill>
@@ -5106,7 +5108,7 @@
               </a:rPr>
               <a:t>Risk check</a:t>
             </a:r>
-            <a:endParaRPr lang="en-US" sz="1300" dirty="0"/>
+            <a:endParaRPr lang="en-US" sz="1220" dirty="0"/>
           </a:p>
         </p:txBody>
       </p:sp>
@@ -5118,8 +5120,8 @@
         </p:nvSpPr>
         <p:spPr>
           <a:xfrm>
-            <a:off x="7799832" y="1801368"/>
-            <a:ext cx="3145536" cy="640080"/>
+            <a:off x="7708392" y="1764792"/>
+            <a:ext cx="3282696" cy="749808"/>
           </a:xfrm>
           <a:prstGeom prst="rect">
             <a:avLst/>
@@ -5137,7 +5139,7 @@
               <a:buNone/>
             </a:pPr>
             <a:r>
-              <a:rPr lang="en-US" sz="1320" dirty="0">
+              <a:rPr lang="en-US" sz="1220" dirty="0">
                 <a:solidFill>
                   <a:srgbClr val="17364A"/>
                 </a:solidFill>
@@ -5147,7 +5149,7 @@
               </a:rPr>
               <a:t>Geocoding bias.</a:t>
             </a:r>
-            <a:endParaRPr lang="en-US" sz="1320" dirty="0"/>
+            <a:endParaRPr lang="en-US" sz="1220" dirty="0"/>
           </a:p>
         </p:txBody>
       </p:sp>
@@ -5159,12 +5161,12 @@
         </p:nvSpPr>
         <p:spPr>
           <a:xfrm>
-            <a:off x="7635240" y="2670048"/>
-            <a:ext cx="3474720" cy="1536192"/>
+            <a:off x="7543800" y="2724912"/>
+            <a:ext cx="3611880" cy="1527048"/>
           </a:xfrm>
           <a:prstGeom prst="roundRect">
             <a:avLst>
-              <a:gd name="adj" fmla="val 7143"/>
+              <a:gd name="adj" fmla="val 7186"/>
             </a:avLst>
           </a:prstGeom>
           <a:solidFill>
@@ -5186,8 +5188,8 @@
         </p:nvSpPr>
         <p:spPr>
           <a:xfrm>
-            <a:off x="7799832" y="2816352"/>
-            <a:ext cx="3145536" cy="256032"/>
+            <a:off x="7708392" y="2852928"/>
+            <a:ext cx="3282696" cy="228600"/>
           </a:xfrm>
           <a:prstGeom prst="rect">
             <a:avLst/>
@@ -5203,7 +5205,7 @@
               <a:buNone/>
             </a:pPr>
             <a:r>
-              <a:rPr lang="en-US" sz="1300" b="1" dirty="0">
+              <a:rPr lang="en-US" sz="1220" b="1" dirty="0">
                 <a:solidFill>
                   <a:srgbClr val="0068B7"/>
                 </a:solidFill>
@@ -5213,7 +5215,7 @@
               </a:rPr>
               <a:t>Concept checkpoints</a:t>
             </a:r>
-            <a:endParaRPr lang="en-US" sz="1300" dirty="0"/>
+            <a:endParaRPr lang="en-US" sz="1220" dirty="0"/>
           </a:p>
         </p:txBody>
       </p:sp>
@@ -5225,8 +5227,8 @@
         </p:nvSpPr>
         <p:spPr>
           <a:xfrm>
-            <a:off x="7818120" y="3182112"/>
-            <a:ext cx="3090672" cy="877824"/>
+            <a:off x="7726680" y="3182112"/>
+            <a:ext cx="3227832" cy="960120"/>
           </a:xfrm>
           <a:prstGeom prst="rect">
             <a:avLst/>
@@ -5244,7 +5246,7 @@
               <a:buNone/>
             </a:pPr>
             <a:r>
-              <a:rPr lang="en-US" sz="1220" dirty="0">
+              <a:rPr lang="en-US" sz="1140" dirty="0">
                 <a:solidFill>
                   <a:srgbClr val="17364A"/>
                 </a:solidFill>
@@ -5252,16 +5254,16 @@
                 <a:ea typeface="Aptos" pitchFamily="34" charset="-122"/>
                 <a:cs typeface="Aptos" pitchFamily="34" charset="-120"/>
               </a:rPr>
-              <a:t>Guardrails include geocoding quality checks, manual review for.</a:t>
-            </a:r>
-            <a:endParaRPr lang="en-US" sz="1220" dirty="0"/>
-          </a:p>
-          <a:p>
-            <a:pPr indent="0" marL="0">
-              <a:buNone/>
-            </a:pPr>
-            <a:r>
-              <a:rPr lang="en-US" sz="1220" dirty="0">
+              <a:t>Guardrails include geocoding quality checks,.</a:t>
+            </a:r>
+            <a:endParaRPr lang="en-US" sz="1140" dirty="0"/>
+          </a:p>
+          <a:p>
+            <a:pPr indent="0" marL="0">
+              <a:buNone/>
+            </a:pPr>
+            <a:r>
+              <a:rPr lang="en-US" sz="1140" dirty="0">
                 <a:solidFill>
                   <a:srgbClr val="17364A"/>
                 </a:solidFill>
@@ -5271,14 +5273,14 @@
               </a:rPr>
               <a:t>Small-area privacy risk.</a:t>
             </a:r>
-            <a:endParaRPr lang="en-US" sz="1220" dirty="0"/>
-          </a:p>
-          <a:p>
-            <a:pPr indent="0" marL="0">
-              <a:buNone/>
-            </a:pPr>
-            <a:r>
-              <a:rPr lang="en-US" sz="1220" dirty="0">
+            <a:endParaRPr lang="en-US" sz="1140" dirty="0"/>
+          </a:p>
+          <a:p>
+            <a:pPr indent="0" marL="0">
+              <a:buNone/>
+            </a:pPr>
+            <a:r>
+              <a:rPr lang="en-US" sz="1140" dirty="0">
                 <a:solidFill>
                   <a:srgbClr val="17364A"/>
                 </a:solidFill>
@@ -5286,9 +5288,9 @@
                 <a:ea typeface="Aptos" pitchFamily="34" charset="-122"/>
                 <a:cs typeface="Aptos" pitchFamily="34" charset="-120"/>
               </a:rPr>
-              <a:t>Detailed maps can reveal sensitive patterns or identities.</a:t>
-            </a:r>
-            <a:endParaRPr lang="en-US" sz="1220" dirty="0"/>
+              <a:t>Detailed maps can reveal sensitive patterns or.</a:t>
+            </a:r>
+            <a:endParaRPr lang="en-US" sz="1140" dirty="0"/>
           </a:p>
         </p:txBody>
       </p:sp>
@@ -5300,12 +5302,12 @@
         </p:nvSpPr>
         <p:spPr>
           <a:xfrm>
-            <a:off x="7635240" y="4343400"/>
-            <a:ext cx="3474720" cy="1255471"/>
+            <a:off x="7543800" y="4389120"/>
+            <a:ext cx="3611880" cy="1261872"/>
           </a:xfrm>
           <a:prstGeom prst="roundRect">
             <a:avLst>
-              <a:gd name="adj" fmla="val 8740"/>
+              <a:gd name="adj" fmla="val 8696"/>
             </a:avLst>
           </a:prstGeom>
           <a:solidFill>
@@ -5327,8 +5329,8 @@
         </p:nvSpPr>
         <p:spPr>
           <a:xfrm>
-            <a:off x="7799832" y="4489704"/>
-            <a:ext cx="3145536" cy="256032"/>
+            <a:off x="7708392" y="4517136"/>
+            <a:ext cx="3282696" cy="228600"/>
           </a:xfrm>
           <a:prstGeom prst="rect">
             <a:avLst/>
@@ -5344,7 +5346,7 @@
               <a:buNone/>
             </a:pPr>
             <a:r>
-              <a:rPr lang="en-US" sz="1300" b="1" dirty="0">
+              <a:rPr lang="en-US" sz="1220" b="1" dirty="0">
                 <a:solidFill>
                   <a:srgbClr val="0068B7"/>
                 </a:solidFill>
@@ -5354,7 +5356,7 @@
               </a:rPr>
               <a:t>Safeguard to plan</a:t>
             </a:r>
-            <a:endParaRPr lang="en-US" sz="1300" dirty="0"/>
+            <a:endParaRPr lang="en-US" sz="1220" dirty="0"/>
           </a:p>
         </p:txBody>
       </p:sp>
@@ -5366,8 +5368,8 @@
         </p:nvSpPr>
         <p:spPr>
           <a:xfrm>
-            <a:off x="7799832" y="4818888"/>
-            <a:ext cx="3145536" cy="688543"/>
+            <a:off x="7708392" y="4828032"/>
+            <a:ext cx="3282696" cy="749808"/>
           </a:xfrm>
           <a:prstGeom prst="rect">
             <a:avLst/>
@@ -5385,7 +5387,7 @@
               <a:buNone/>
             </a:pPr>
             <a:r>
-              <a:rPr lang="en-US" sz="1320" dirty="0">
+              <a:rPr lang="en-US" sz="1220" dirty="0">
                 <a:solidFill>
                   <a:srgbClr val="17364A"/>
                 </a:solidFill>
@@ -5393,9 +5395,9 @@
                 <a:ea typeface="Aptos" pitchFamily="34" charset="-122"/>
                 <a:cs typeface="Aptos" pitchFamily="34" charset="-120"/>
               </a:rPr>
-              <a:t>Identify what could go wrong, who could be affected, what safeguards are needed, and what evidence should be reviewed before use.</a:t>
-            </a:r>
-            <a:endParaRPr lang="en-US" sz="1320" dirty="0"/>
+              <a:t>Identify what could go wrong, who could be affected, what safeguards are needed,.</a:t>
+            </a:r>
+            <a:endParaRPr lang="en-US" sz="1220" dirty="0"/>
           </a:p>
         </p:txBody>
       </p:sp>
@@ -5686,8 +5688,8 @@
         </p:nvSpPr>
         <p:spPr>
           <a:xfrm>
-            <a:off x="868680" y="1508760"/>
-            <a:ext cx="6309360" cy="4160520"/>
+            <a:off x="822960" y="1463040"/>
+            <a:ext cx="6565392" cy="4343400"/>
           </a:xfrm>
           <a:prstGeom prst="rect">
             <a:avLst/>
@@ -5705,7 +5707,7 @@
               <a:buNone/>
             </a:pPr>
             <a:r>
-              <a:rPr lang="en-US" sz="2100" dirty="0">
+              <a:rPr lang="en-US" sz="1920" dirty="0">
                 <a:solidFill>
                   <a:srgbClr val="003A63"/>
                 </a:solidFill>
@@ -5715,14 +5717,14 @@
               </a:rPr>
               <a:t>• Stigmatizing communities.</a:t>
             </a:r>
-            <a:endParaRPr lang="en-US" sz="2100" dirty="0"/>
-          </a:p>
-          <a:p>
-            <a:pPr indent="0" marL="0">
-              <a:buNone/>
-            </a:pPr>
-            <a:r>
-              <a:rPr lang="en-US" sz="2100" dirty="0">
+            <a:endParaRPr lang="en-US" sz="1920" dirty="0"/>
+          </a:p>
+          <a:p>
+            <a:pPr indent="0" marL="0">
+              <a:buNone/>
+            </a:pPr>
+            <a:r>
+              <a:rPr lang="en-US" sz="1920" dirty="0">
                 <a:solidFill>
                   <a:srgbClr val="003A63"/>
                 </a:solidFill>
@@ -5732,14 +5734,14 @@
               </a:rPr>
               <a:t>• Maps can unintentionally label communities as problems.</a:t>
             </a:r>
-            <a:endParaRPr lang="en-US" sz="2100" dirty="0"/>
-          </a:p>
-          <a:p>
-            <a:pPr indent="0" marL="0">
-              <a:buNone/>
-            </a:pPr>
-            <a:r>
-              <a:rPr lang="en-US" sz="2100" dirty="0">
+            <a:endParaRPr lang="en-US" sz="1920" dirty="0"/>
+          </a:p>
+          <a:p>
+            <a:pPr indent="0" marL="0">
+              <a:buNone/>
+            </a:pPr>
+            <a:r>
+              <a:rPr lang="en-US" sz="1920" dirty="0">
                 <a:solidFill>
                   <a:srgbClr val="003A63"/>
                 </a:solidFill>
@@ -5747,9 +5749,9 @@
                 <a:ea typeface="Aptos" pitchFamily="34" charset="-122"/>
                 <a:cs typeface="Aptos" pitchFamily="34" charset="-120"/>
               </a:rPr>
-              <a:t>• Guardrails include equity framing, community engagement, careful language, and focus on.</a:t>
-            </a:r>
-            <a:endParaRPr lang="en-US" sz="2100" dirty="0"/>
+              <a:t>• Guardrails include equity framing, community engagement, careful language,.</a:t>
+            </a:r>
+            <a:endParaRPr lang="en-US" sz="1920" dirty="0"/>
           </a:p>
         </p:txBody>
       </p:sp>
@@ -5761,12 +5763,12 @@
         </p:nvSpPr>
         <p:spPr>
           <a:xfrm>
-            <a:off x="7635240" y="1325880"/>
-            <a:ext cx="3474720" cy="1207008"/>
+            <a:off x="7543800" y="1325880"/>
+            <a:ext cx="3611880" cy="1261872"/>
           </a:xfrm>
           <a:prstGeom prst="roundRect">
             <a:avLst>
-              <a:gd name="adj" fmla="val 9091"/>
+              <a:gd name="adj" fmla="val 8696"/>
             </a:avLst>
           </a:prstGeom>
           <a:solidFill>
@@ -5788,8 +5790,8 @@
         </p:nvSpPr>
         <p:spPr>
           <a:xfrm>
-            <a:off x="7799832" y="1472184"/>
-            <a:ext cx="3145536" cy="256032"/>
+            <a:off x="7708392" y="1453896"/>
+            <a:ext cx="3282696" cy="228600"/>
           </a:xfrm>
           <a:prstGeom prst="rect">
             <a:avLst/>
@@ -5805,7 +5807,7 @@
               <a:buNone/>
             </a:pPr>
             <a:r>
-              <a:rPr lang="en-US" sz="1300" b="1" dirty="0">
+              <a:rPr lang="en-US" sz="1220" b="1" dirty="0">
                 <a:solidFill>
                   <a:srgbClr val="0068B7"/>
                 </a:solidFill>
@@ -5815,7 +5817,7 @@
               </a:rPr>
               <a:t>Risk check</a:t>
             </a:r>
-            <a:endParaRPr lang="en-US" sz="1300" dirty="0"/>
+            <a:endParaRPr lang="en-US" sz="1220" dirty="0"/>
           </a:p>
         </p:txBody>
       </p:sp>
@@ -5827,8 +5829,8 @@
         </p:nvSpPr>
         <p:spPr>
           <a:xfrm>
-            <a:off x="7799832" y="1801368"/>
-            <a:ext cx="3145536" cy="640080"/>
+            <a:off x="7708392" y="1764792"/>
+            <a:ext cx="3282696" cy="749808"/>
           </a:xfrm>
           <a:prstGeom prst="rect">
             <a:avLst/>
@@ -5846,7 +5848,7 @@
               <a:buNone/>
             </a:pPr>
             <a:r>
-              <a:rPr lang="en-US" sz="1320" dirty="0">
+              <a:rPr lang="en-US" sz="1220" dirty="0">
                 <a:solidFill>
                   <a:srgbClr val="17364A"/>
                 </a:solidFill>
@@ -5856,7 +5858,7 @@
               </a:rPr>
               <a:t>Stigmatizing communities.</a:t>
             </a:r>
-            <a:endParaRPr lang="en-US" sz="1320" dirty="0"/>
+            <a:endParaRPr lang="en-US" sz="1220" dirty="0"/>
           </a:p>
         </p:txBody>
       </p:sp>
@@ -5868,12 +5870,12 @@
         </p:nvSpPr>
         <p:spPr>
           <a:xfrm>
-            <a:off x="7635240" y="2670048"/>
-            <a:ext cx="3474720" cy="1536192"/>
+            <a:off x="7543800" y="2724912"/>
+            <a:ext cx="3611880" cy="1527048"/>
           </a:xfrm>
           <a:prstGeom prst="roundRect">
             <a:avLst>
-              <a:gd name="adj" fmla="val 7143"/>
+              <a:gd name="adj" fmla="val 7186"/>
             </a:avLst>
           </a:prstGeom>
           <a:solidFill>
@@ -5895,8 +5897,8 @@
         </p:nvSpPr>
         <p:spPr>
           <a:xfrm>
-            <a:off x="7799832" y="2816352"/>
-            <a:ext cx="3145536" cy="256032"/>
+            <a:off x="7708392" y="2852928"/>
+            <a:ext cx="3282696" cy="228600"/>
           </a:xfrm>
           <a:prstGeom prst="rect">
             <a:avLst/>
@@ -5912,7 +5914,7 @@
               <a:buNone/>
             </a:pPr>
             <a:r>
-              <a:rPr lang="en-US" sz="1300" b="1" dirty="0">
+              <a:rPr lang="en-US" sz="1220" b="1" dirty="0">
                 <a:solidFill>
                   <a:srgbClr val="0068B7"/>
                 </a:solidFill>
@@ -5922,7 +5924,7 @@
               </a:rPr>
               <a:t>Concept checkpoints</a:t>
             </a:r>
-            <a:endParaRPr lang="en-US" sz="1300" dirty="0"/>
+            <a:endParaRPr lang="en-US" sz="1220" dirty="0"/>
           </a:p>
         </p:txBody>
       </p:sp>
@@ -5934,8 +5936,8 @@
         </p:nvSpPr>
         <p:spPr>
           <a:xfrm>
-            <a:off x="7818120" y="3182112"/>
-            <a:ext cx="3090672" cy="877824"/>
+            <a:off x="7726680" y="3182112"/>
+            <a:ext cx="3227832" cy="960120"/>
           </a:xfrm>
           <a:prstGeom prst="rect">
             <a:avLst/>
@@ -5953,7 +5955,7 @@
               <a:buNone/>
             </a:pPr>
             <a:r>
-              <a:rPr lang="en-US" sz="1220" dirty="0">
+              <a:rPr lang="en-US" sz="1140" dirty="0">
                 <a:solidFill>
                   <a:srgbClr val="17364A"/>
                 </a:solidFill>
@@ -5963,14 +5965,14 @@
               </a:rPr>
               <a:t>Stigmatizing communities.</a:t>
             </a:r>
-            <a:endParaRPr lang="en-US" sz="1220" dirty="0"/>
-          </a:p>
-          <a:p>
-            <a:pPr indent="0" marL="0">
-              <a:buNone/>
-            </a:pPr>
-            <a:r>
-              <a:rPr lang="en-US" sz="1220" dirty="0">
+            <a:endParaRPr lang="en-US" sz="1140" dirty="0"/>
+          </a:p>
+          <a:p>
+            <a:pPr indent="0" marL="0">
+              <a:buNone/>
+            </a:pPr>
+            <a:r>
+              <a:rPr lang="en-US" sz="1140" dirty="0">
                 <a:solidFill>
                   <a:srgbClr val="17364A"/>
                 </a:solidFill>
@@ -5978,16 +5980,16 @@
                 <a:ea typeface="Aptos" pitchFamily="34" charset="-122"/>
                 <a:cs typeface="Aptos" pitchFamily="34" charset="-120"/>
               </a:rPr>
-              <a:t>Maps can unintentionally label communities as problems.</a:t>
-            </a:r>
-            <a:endParaRPr lang="en-US" sz="1220" dirty="0"/>
-          </a:p>
-          <a:p>
-            <a:pPr indent="0" marL="0">
-              <a:buNone/>
-            </a:pPr>
-            <a:r>
-              <a:rPr lang="en-US" sz="1220" dirty="0">
+              <a:t>Maps can unintentionally label communities as.</a:t>
+            </a:r>
+            <a:endParaRPr lang="en-US" sz="1140" dirty="0"/>
+          </a:p>
+          <a:p>
+            <a:pPr indent="0" marL="0">
+              <a:buNone/>
+            </a:pPr>
+            <a:r>
+              <a:rPr lang="en-US" sz="1140" dirty="0">
                 <a:solidFill>
                   <a:srgbClr val="17364A"/>
                 </a:solidFill>
@@ -5995,9 +5997,9 @@
                 <a:ea typeface="Aptos" pitchFamily="34" charset="-122"/>
                 <a:cs typeface="Aptos" pitchFamily="34" charset="-120"/>
               </a:rPr>
-              <a:t>Guardrails include equity framing, community engagement, careful.</a:t>
-            </a:r>
-            <a:endParaRPr lang="en-US" sz="1220" dirty="0"/>
+              <a:t>Guardrails include equity framing, community.</a:t>
+            </a:r>
+            <a:endParaRPr lang="en-US" sz="1140" dirty="0"/>
           </a:p>
         </p:txBody>
       </p:sp>
@@ -6009,12 +6011,12 @@
         </p:nvSpPr>
         <p:spPr>
           <a:xfrm>
-            <a:off x="7635240" y="4343400"/>
-            <a:ext cx="3474720" cy="1255471"/>
+            <a:off x="7543800" y="4389120"/>
+            <a:ext cx="3611880" cy="1261872"/>
           </a:xfrm>
           <a:prstGeom prst="roundRect">
             <a:avLst>
-              <a:gd name="adj" fmla="val 8740"/>
+              <a:gd name="adj" fmla="val 8696"/>
             </a:avLst>
           </a:prstGeom>
           <a:solidFill>
@@ -6036,8 +6038,8 @@
         </p:nvSpPr>
         <p:spPr>
           <a:xfrm>
-            <a:off x="7799832" y="4489704"/>
-            <a:ext cx="3145536" cy="256032"/>
+            <a:off x="7708392" y="4517136"/>
+            <a:ext cx="3282696" cy="228600"/>
           </a:xfrm>
           <a:prstGeom prst="rect">
             <a:avLst/>
@@ -6053,7 +6055,7 @@
               <a:buNone/>
             </a:pPr>
             <a:r>
-              <a:rPr lang="en-US" sz="1300" b="1" dirty="0">
+              <a:rPr lang="en-US" sz="1220" b="1" dirty="0">
                 <a:solidFill>
                   <a:srgbClr val="0068B7"/>
                 </a:solidFill>
@@ -6063,7 +6065,7 @@
               </a:rPr>
               <a:t>Safeguard to plan</a:t>
             </a:r>
-            <a:endParaRPr lang="en-US" sz="1300" dirty="0"/>
+            <a:endParaRPr lang="en-US" sz="1220" dirty="0"/>
           </a:p>
         </p:txBody>
       </p:sp>
@@ -6075,8 +6077,8 @@
         </p:nvSpPr>
         <p:spPr>
           <a:xfrm>
-            <a:off x="7799832" y="4818888"/>
-            <a:ext cx="3145536" cy="688543"/>
+            <a:off x="7708392" y="4828032"/>
+            <a:ext cx="3282696" cy="749808"/>
           </a:xfrm>
           <a:prstGeom prst="rect">
             <a:avLst/>
@@ -6094,7 +6096,7 @@
               <a:buNone/>
             </a:pPr>
             <a:r>
-              <a:rPr lang="en-US" sz="1320" dirty="0">
+              <a:rPr lang="en-US" sz="1220" dirty="0">
                 <a:solidFill>
                   <a:srgbClr val="17364A"/>
                 </a:solidFill>
@@ -6102,9 +6104,9 @@
                 <a:ea typeface="Aptos" pitchFamily="34" charset="-122"/>
                 <a:cs typeface="Aptos" pitchFamily="34" charset="-120"/>
               </a:rPr>
-              <a:t>Identify what could go wrong, who could be affected, what safeguards are needed, and what evidence should be reviewed before use.</a:t>
-            </a:r>
-            <a:endParaRPr lang="en-US" sz="1320" dirty="0"/>
+              <a:t>Identify what could go wrong, who could be affected, what safeguards are needed,.</a:t>
+            </a:r>
+            <a:endParaRPr lang="en-US" sz="1220" dirty="0"/>
           </a:p>
         </p:txBody>
       </p:sp>
@@ -6395,8 +6397,8 @@
         </p:nvSpPr>
         <p:spPr>
           <a:xfrm>
-            <a:off x="868680" y="1508760"/>
-            <a:ext cx="6309360" cy="4160520"/>
+            <a:off x="822960" y="1463040"/>
+            <a:ext cx="6565392" cy="4343400"/>
           </a:xfrm>
           <a:prstGeom prst="rect">
             <a:avLst/>
@@ -6414,7 +6416,7 @@
               <a:buNone/>
             </a:pPr>
             <a:r>
-              <a:rPr lang="en-US" sz="2100" dirty="0">
+              <a:rPr lang="en-US" sz="1920" dirty="0">
                 <a:solidFill>
                   <a:srgbClr val="003A63"/>
                 </a:solidFill>
@@ -6422,16 +6424,16 @@
                 <a:ea typeface="Aptos" pitchFamily="34" charset="-122"/>
                 <a:cs typeface="Aptos" pitchFamily="34" charset="-120"/>
               </a:rPr>
-              <a:t>• Geospatial AI may support predictive analytics, emergency response, inspection prioritization,.</a:t>
-            </a:r>
-            <a:endParaRPr lang="en-US" sz="2100" dirty="0"/>
-          </a:p>
-          <a:p>
-            <a:pPr indent="0" marL="0">
-              <a:buNone/>
-            </a:pPr>
-            <a:r>
-              <a:rPr lang="en-US" sz="2100" dirty="0">
+              <a:t>• Geospatial AI may support predictive analytics, emergency response,.</a:t>
+            </a:r>
+            <a:endParaRPr lang="en-US" sz="1920" dirty="0"/>
+          </a:p>
+          <a:p>
+            <a:pPr indent="0" marL="0">
+              <a:buNone/>
+            </a:pPr>
+            <a:r>
+              <a:rPr lang="en-US" sz="1920" dirty="0">
                 <a:solidFill>
                   <a:srgbClr val="003A63"/>
                 </a:solidFill>
@@ -6439,16 +6441,16 @@
                 <a:ea typeface="Aptos" pitchFamily="34" charset="-122"/>
                 <a:cs typeface="Aptos" pitchFamily="34" charset="-120"/>
               </a:rPr>
-              <a:t>• Generative AI may summarize spatial patterns for leaders, but it must not overstate certainty.</a:t>
-            </a:r>
-            <a:endParaRPr lang="en-US" sz="2100" dirty="0"/>
-          </a:p>
-          <a:p>
-            <a:pPr indent="0" marL="0">
-              <a:buNone/>
-            </a:pPr>
-            <a:r>
-              <a:rPr lang="en-US" sz="2100" dirty="0">
+              <a:t>• Generative AI may summarize spatial patterns for leaders, but it must not.</a:t>
+            </a:r>
+            <a:endParaRPr lang="en-US" sz="1920" dirty="0"/>
+          </a:p>
+          <a:p>
+            <a:pPr indent="0" marL="0">
+              <a:buNone/>
+            </a:pPr>
+            <a:r>
+              <a:rPr lang="en-US" sz="1920" dirty="0">
                 <a:solidFill>
                   <a:srgbClr val="003A63"/>
                 </a:solidFill>
@@ -6456,9 +6458,9 @@
                 <a:ea typeface="Aptos" pitchFamily="34" charset="-122"/>
                 <a:cs typeface="Aptos" pitchFamily="34" charset="-120"/>
               </a:rPr>
-              <a:t>• RAG tools may retrieve local plans, maps, and protocols, while agentic workflows may propose.</a:t>
-            </a:r>
-            <a:endParaRPr lang="en-US" sz="2100" dirty="0"/>
+              <a:t>• RAG tools may retrieve local plans, maps, and protocols, while agentic.</a:t>
+            </a:r>
+            <a:endParaRPr lang="en-US" sz="1920" dirty="0"/>
           </a:p>
         </p:txBody>
       </p:sp>
@@ -6470,12 +6472,12 @@
         </p:nvSpPr>
         <p:spPr>
           <a:xfrm>
-            <a:off x="7635240" y="1325880"/>
-            <a:ext cx="3474720" cy="1255471"/>
+            <a:off x="7543800" y="1325880"/>
+            <a:ext cx="3611880" cy="1261872"/>
           </a:xfrm>
           <a:prstGeom prst="roundRect">
             <a:avLst>
-              <a:gd name="adj" fmla="val 8740"/>
+              <a:gd name="adj" fmla="val 8696"/>
             </a:avLst>
           </a:prstGeom>
           <a:solidFill>
@@ -6497,8 +6499,8 @@
         </p:nvSpPr>
         <p:spPr>
           <a:xfrm>
-            <a:off x="7799832" y="1472184"/>
-            <a:ext cx="3145536" cy="256032"/>
+            <a:off x="7708392" y="1453896"/>
+            <a:ext cx="3282696" cy="228600"/>
           </a:xfrm>
           <a:prstGeom prst="rect">
             <a:avLst/>
@@ -6514,7 +6516,7 @@
               <a:buNone/>
             </a:pPr>
             <a:r>
-              <a:rPr lang="en-US" sz="1300" b="1" dirty="0">
+              <a:rPr lang="en-US" sz="1220" b="1" dirty="0">
                 <a:solidFill>
                   <a:srgbClr val="0068B7"/>
                 </a:solidFill>
@@ -6524,7 +6526,7 @@
               </a:rPr>
               <a:t>Implementation cue</a:t>
             </a:r>
-            <a:endParaRPr lang="en-US" sz="1300" dirty="0"/>
+            <a:endParaRPr lang="en-US" sz="1220" dirty="0"/>
           </a:p>
         </p:txBody>
       </p:sp>
@@ -6536,8 +6538,8 @@
         </p:nvSpPr>
         <p:spPr>
           <a:xfrm>
-            <a:off x="7799832" y="1801368"/>
-            <a:ext cx="3145536" cy="688543"/>
+            <a:off x="7708392" y="1764792"/>
+            <a:ext cx="3282696" cy="749808"/>
           </a:xfrm>
           <a:prstGeom prst="rect">
             <a:avLst/>
@@ -6555,7 +6557,7 @@
               <a:buNone/>
             </a:pPr>
             <a:r>
-              <a:rPr lang="en-US" sz="1320" dirty="0">
+              <a:rPr lang="en-US" sz="1220" dirty="0">
                 <a:solidFill>
                   <a:srgbClr val="17364A"/>
                 </a:solidFill>
@@ -6563,9 +6565,9 @@
                 <a:ea typeface="Aptos" pitchFamily="34" charset="-122"/>
                 <a:cs typeface="Aptos" pitchFamily="34" charset="-120"/>
               </a:rPr>
-              <a:t>Geospatial AI may support predictive analytics, emergency response, inspection prioritization,.</a:t>
-            </a:r>
-            <a:endParaRPr lang="en-US" sz="1320" dirty="0"/>
+              <a:t>Geospatial AI may support predictive analytics, emergency response, inspection.</a:t>
+            </a:r>
+            <a:endParaRPr lang="en-US" sz="1220" dirty="0"/>
           </a:p>
         </p:txBody>
       </p:sp>
@@ -6577,12 +6579,12 @@
         </p:nvSpPr>
         <p:spPr>
           <a:xfrm>
-            <a:off x="7635240" y="2718511"/>
-            <a:ext cx="3474720" cy="1328623"/>
+            <a:off x="7543800" y="2724912"/>
+            <a:ext cx="3611880" cy="1527048"/>
           </a:xfrm>
           <a:prstGeom prst="roundRect">
             <a:avLst>
-              <a:gd name="adj" fmla="val 8259"/>
+              <a:gd name="adj" fmla="val 7186"/>
             </a:avLst>
           </a:prstGeom>
           <a:solidFill>
@@ -6604,8 +6606,8 @@
         </p:nvSpPr>
         <p:spPr>
           <a:xfrm>
-            <a:off x="7799832" y="2864815"/>
-            <a:ext cx="3145536" cy="256032"/>
+            <a:off x="7708392" y="2852928"/>
+            <a:ext cx="3282696" cy="228600"/>
           </a:xfrm>
           <a:prstGeom prst="rect">
             <a:avLst/>
@@ -6621,7 +6623,7 @@
               <a:buNone/>
             </a:pPr>
             <a:r>
-              <a:rPr lang="en-US" sz="1300" b="1" dirty="0">
+              <a:rPr lang="en-US" sz="1220" b="1" dirty="0">
                 <a:solidFill>
                   <a:srgbClr val="0068B7"/>
                 </a:solidFill>
@@ -6631,7 +6633,7 @@
               </a:rPr>
               <a:t>Concept checkpoints</a:t>
             </a:r>
-            <a:endParaRPr lang="en-US" sz="1300" dirty="0"/>
+            <a:endParaRPr lang="en-US" sz="1220" dirty="0"/>
           </a:p>
         </p:txBody>
       </p:sp>
@@ -6643,8 +6645,8 @@
         </p:nvSpPr>
         <p:spPr>
           <a:xfrm>
-            <a:off x="7818120" y="3230575"/>
-            <a:ext cx="3090672" cy="670255"/>
+            <a:off x="7726680" y="3182112"/>
+            <a:ext cx="3227832" cy="960120"/>
           </a:xfrm>
           <a:prstGeom prst="rect">
             <a:avLst/>
@@ -6662,7 +6664,7 @@
               <a:buNone/>
             </a:pPr>
             <a:r>
-              <a:rPr lang="en-US" sz="1220" dirty="0">
+              <a:rPr lang="en-US" sz="1140" dirty="0">
                 <a:solidFill>
                   <a:srgbClr val="17364A"/>
                 </a:solidFill>
@@ -6670,16 +6672,16 @@
                 <a:ea typeface="Aptos" pitchFamily="34" charset="-122"/>
                 <a:cs typeface="Aptos" pitchFamily="34" charset="-120"/>
               </a:rPr>
-              <a:t>Geospatial AI may support predictive analytics, emergency.</a:t>
-            </a:r>
-            <a:endParaRPr lang="en-US" sz="1220" dirty="0"/>
-          </a:p>
-          <a:p>
-            <a:pPr indent="0" marL="0">
-              <a:buNone/>
-            </a:pPr>
-            <a:r>
-              <a:rPr lang="en-US" sz="1220" dirty="0">
+              <a:t>Geospatial AI may support predictive analytics,.</a:t>
+            </a:r>
+            <a:endParaRPr lang="en-US" sz="1140" dirty="0"/>
+          </a:p>
+          <a:p>
+            <a:pPr indent="0" marL="0">
+              <a:buNone/>
+            </a:pPr>
+            <a:r>
+              <a:rPr lang="en-US" sz="1140" dirty="0">
                 <a:solidFill>
                   <a:srgbClr val="17364A"/>
                 </a:solidFill>
@@ -6687,16 +6689,16 @@
                 <a:ea typeface="Aptos" pitchFamily="34" charset="-122"/>
                 <a:cs typeface="Aptos" pitchFamily="34" charset="-120"/>
               </a:rPr>
-              <a:t>Generative AI may summarize spatial patterns for leaders, but it.</a:t>
-            </a:r>
-            <a:endParaRPr lang="en-US" sz="1220" dirty="0"/>
-          </a:p>
-          <a:p>
-            <a:pPr indent="0" marL="0">
-              <a:buNone/>
-            </a:pPr>
-            <a:r>
-              <a:rPr lang="en-US" sz="1220" dirty="0">
+              <a:t>Generative AI may summarize spatial patterns for.</a:t>
+            </a:r>
+            <a:endParaRPr lang="en-US" sz="1140" dirty="0"/>
+          </a:p>
+          <a:p>
+            <a:pPr indent="0" marL="0">
+              <a:buNone/>
+            </a:pPr>
+            <a:r>
+              <a:rPr lang="en-US" sz="1140" dirty="0">
                 <a:solidFill>
                   <a:srgbClr val="17364A"/>
                 </a:solidFill>
@@ -6704,9 +6706,9 @@
                 <a:ea typeface="Aptos" pitchFamily="34" charset="-122"/>
                 <a:cs typeface="Aptos" pitchFamily="34" charset="-120"/>
               </a:rPr>
-              <a:t>RAG tools may retrieve local plans, maps, and protocols, while.</a:t>
-            </a:r>
-            <a:endParaRPr lang="en-US" sz="1220" dirty="0"/>
+              <a:t>RAG tools may retrieve local plans, maps, and.</a:t>
+            </a:r>
+            <a:endParaRPr lang="en-US" sz="1140" dirty="0"/>
           </a:p>
         </p:txBody>
       </p:sp>
@@ -6718,12 +6720,12 @@
         </p:nvSpPr>
         <p:spPr>
           <a:xfrm>
-            <a:off x="7635240" y="4184294"/>
-            <a:ext cx="3474720" cy="1466698"/>
+            <a:off x="7543800" y="4389120"/>
+            <a:ext cx="3611880" cy="1261872"/>
           </a:xfrm>
           <a:prstGeom prst="roundRect">
             <a:avLst>
-              <a:gd name="adj" fmla="val 7481"/>
+              <a:gd name="adj" fmla="val 8696"/>
             </a:avLst>
           </a:prstGeom>
           <a:solidFill>
@@ -6745,8 +6747,8 @@
         </p:nvSpPr>
         <p:spPr>
           <a:xfrm>
-            <a:off x="7799832" y="4330598"/>
-            <a:ext cx="3145536" cy="256032"/>
+            <a:off x="7708392" y="4517136"/>
+            <a:ext cx="3282696" cy="228600"/>
           </a:xfrm>
           <a:prstGeom prst="rect">
             <a:avLst/>
@@ -6762,7 +6764,7 @@
               <a:buNone/>
             </a:pPr>
             <a:r>
-              <a:rPr lang="en-US" sz="1300" b="1" dirty="0">
+              <a:rPr lang="en-US" sz="1220" b="1" dirty="0">
                 <a:solidFill>
                   <a:srgbClr val="0068B7"/>
                 </a:solidFill>
@@ -6772,7 +6774,7 @@
               </a:rPr>
               <a:t>Next action</a:t>
             </a:r>
-            <a:endParaRPr lang="en-US" sz="1300" dirty="0"/>
+            <a:endParaRPr lang="en-US" sz="1220" dirty="0"/>
           </a:p>
         </p:txBody>
       </p:sp>
@@ -6784,8 +6786,8 @@
         </p:nvSpPr>
         <p:spPr>
           <a:xfrm>
-            <a:off x="7799832" y="4659782"/>
-            <a:ext cx="3145536" cy="899770"/>
+            <a:off x="7708392" y="4828032"/>
+            <a:ext cx="3282696" cy="749808"/>
           </a:xfrm>
           <a:prstGeom prst="rect">
             <a:avLst/>
@@ -6803,7 +6805,7 @@
               <a:buNone/>
             </a:pPr>
             <a:r>
-              <a:rPr lang="en-US" sz="1320" dirty="0">
+              <a:rPr lang="en-US" sz="1220" dirty="0">
                 <a:solidFill>
                   <a:srgbClr val="17364A"/>
                 </a:solidFill>
@@ -6811,9 +6813,9 @@
                 <a:ea typeface="Aptos" pitchFamily="34" charset="-122"/>
                 <a:cs typeface="Aptos" pitchFamily="34" charset="-120"/>
               </a:rPr>
-              <a:t>Use the concept to clarify workflow changes, dependencies, staffing, procurement requirements, training needs, and implementation checkpoints.</a:t>
-            </a:r>
-            <a:endParaRPr lang="en-US" sz="1320" dirty="0"/>
+              <a:t>Use the concept to clarify workflow changes, dependencies, staffing, procurement.</a:t>
+            </a:r>
+            <a:endParaRPr lang="en-US" sz="1220" dirty="0"/>
           </a:p>
         </p:txBody>
       </p:sp>
@@ -7104,8 +7106,8 @@
         </p:nvSpPr>
         <p:spPr>
           <a:xfrm>
-            <a:off x="868680" y="1508760"/>
-            <a:ext cx="6309360" cy="4160520"/>
+            <a:off x="822960" y="1463040"/>
+            <a:ext cx="6565392" cy="4343400"/>
           </a:xfrm>
           <a:prstGeom prst="rect">
             <a:avLst/>
@@ -7123,7 +7125,7 @@
               <a:buNone/>
             </a:pPr>
             <a:r>
-              <a:rPr lang="en-US" sz="2100" dirty="0">
+              <a:rPr lang="en-US" sz="1920" dirty="0">
                 <a:solidFill>
                   <a:srgbClr val="003A63"/>
                 </a:solidFill>
@@ -7133,14 +7135,14 @@
               </a:rPr>
               <a:t>• What location data are used, and how complete and accurate are they?</a:t>
             </a:r>
-            <a:endParaRPr lang="en-US" sz="2100" dirty="0"/>
-          </a:p>
-          <a:p>
-            <a:pPr indent="0" marL="0">
-              <a:buNone/>
-            </a:pPr>
-            <a:r>
-              <a:rPr lang="en-US" sz="2100" dirty="0">
+            <a:endParaRPr lang="en-US" sz="1920" dirty="0"/>
+          </a:p>
+          <a:p>
+            <a:pPr indent="0" marL="0">
+              <a:buNone/>
+            </a:pPr>
+            <a:r>
+              <a:rPr lang="en-US" sz="1920" dirty="0">
                 <a:solidFill>
                   <a:srgbClr val="003A63"/>
                 </a:solidFill>
@@ -7150,14 +7152,14 @@
               </a:rPr>
               <a:t>• Which geographic unit best matches the public health action?</a:t>
             </a:r>
-            <a:endParaRPr lang="en-US" sz="2100" dirty="0"/>
-          </a:p>
-          <a:p>
-            <a:pPr indent="0" marL="0">
-              <a:buNone/>
-            </a:pPr>
-            <a:r>
-              <a:rPr lang="en-US" sz="2100" dirty="0">
+            <a:endParaRPr lang="en-US" sz="1920" dirty="0"/>
+          </a:p>
+          <a:p>
+            <a:pPr indent="0" marL="0">
+              <a:buNone/>
+            </a:pPr>
+            <a:r>
+              <a:rPr lang="en-US" sz="1920" dirty="0">
                 <a:solidFill>
                   <a:srgbClr val="003A63"/>
                 </a:solidFill>
@@ -7165,9 +7167,9 @@
                 <a:ea typeface="Aptos" pitchFamily="34" charset="-122"/>
                 <a:cs typeface="Aptos" pitchFamily="34" charset="-120"/>
               </a:rPr>
-              <a:t>• Could missing or poor-quality location data affect certain populations more than others?</a:t>
-            </a:r>
-            <a:endParaRPr lang="en-US" sz="2100" dirty="0"/>
+              <a:t>• Could missing or poor-quality location data affect certain populations more.</a:t>
+            </a:r>
+            <a:endParaRPr lang="en-US" sz="1920" dirty="0"/>
           </a:p>
         </p:txBody>
       </p:sp>
@@ -7179,12 +7181,12 @@
         </p:nvSpPr>
         <p:spPr>
           <a:xfrm>
-            <a:off x="7635240" y="1325880"/>
-            <a:ext cx="3474720" cy="1207008"/>
+            <a:off x="7543800" y="1325880"/>
+            <a:ext cx="3611880" cy="1261872"/>
           </a:xfrm>
           <a:prstGeom prst="roundRect">
             <a:avLst>
-              <a:gd name="adj" fmla="val 9091"/>
+              <a:gd name="adj" fmla="val 8696"/>
             </a:avLst>
           </a:prstGeom>
           <a:solidFill>
@@ -7206,8 +7208,8 @@
         </p:nvSpPr>
         <p:spPr>
           <a:xfrm>
-            <a:off x="7799832" y="1472184"/>
-            <a:ext cx="3145536" cy="256032"/>
+            <a:off x="7708392" y="1453896"/>
+            <a:ext cx="3282696" cy="228600"/>
           </a:xfrm>
           <a:prstGeom prst="rect">
             <a:avLst/>
@@ -7223,7 +7225,7 @@
               <a:buNone/>
             </a:pPr>
             <a:r>
-              <a:rPr lang="en-US" sz="1300" b="1" dirty="0">
+              <a:rPr lang="en-US" sz="1220" b="1" dirty="0">
                 <a:solidFill>
                   <a:srgbClr val="0068B7"/>
                 </a:solidFill>
@@ -7233,7 +7235,7 @@
               </a:rPr>
               <a:t>Core concept</a:t>
             </a:r>
-            <a:endParaRPr lang="en-US" sz="1300" dirty="0"/>
+            <a:endParaRPr lang="en-US" sz="1220" dirty="0"/>
           </a:p>
         </p:txBody>
       </p:sp>
@@ -7245,8 +7247,8 @@
         </p:nvSpPr>
         <p:spPr>
           <a:xfrm>
-            <a:off x="7799832" y="1801368"/>
-            <a:ext cx="3145536" cy="640080"/>
+            <a:off x="7708392" y="1764792"/>
+            <a:ext cx="3282696" cy="749808"/>
           </a:xfrm>
           <a:prstGeom prst="rect">
             <a:avLst/>
@@ -7264,7 +7266,7 @@
               <a:buNone/>
             </a:pPr>
             <a:r>
-              <a:rPr lang="en-US" sz="1320" dirty="0">
+              <a:rPr lang="en-US" sz="1220" dirty="0">
                 <a:solidFill>
                   <a:srgbClr val="17364A"/>
                 </a:solidFill>
@@ -7274,7 +7276,7 @@
               </a:rPr>
               <a:t>What location data are used, and how complete and accurate are they?</a:t>
             </a:r>
-            <a:endParaRPr lang="en-US" sz="1320" dirty="0"/>
+            <a:endParaRPr lang="en-US" sz="1220" dirty="0"/>
           </a:p>
         </p:txBody>
       </p:sp>
@@ -7286,12 +7288,12 @@
         </p:nvSpPr>
         <p:spPr>
           <a:xfrm>
-            <a:off x="7635240" y="2670048"/>
-            <a:ext cx="3474720" cy="1377086"/>
+            <a:off x="7543800" y="2724912"/>
+            <a:ext cx="3611880" cy="1527048"/>
           </a:xfrm>
           <a:prstGeom prst="roundRect">
             <a:avLst>
-              <a:gd name="adj" fmla="val 7968"/>
+              <a:gd name="adj" fmla="val 7186"/>
             </a:avLst>
           </a:prstGeom>
           <a:solidFill>
@@ -7313,8 +7315,8 @@
         </p:nvSpPr>
         <p:spPr>
           <a:xfrm>
-            <a:off x="7799832" y="2816352"/>
-            <a:ext cx="3145536" cy="256032"/>
+            <a:off x="7708392" y="2852928"/>
+            <a:ext cx="3282696" cy="228600"/>
           </a:xfrm>
           <a:prstGeom prst="rect">
             <a:avLst/>
@@ -7330,7 +7332,7 @@
               <a:buNone/>
             </a:pPr>
             <a:r>
-              <a:rPr lang="en-US" sz="1300" b="1" dirty="0">
+              <a:rPr lang="en-US" sz="1220" b="1" dirty="0">
                 <a:solidFill>
                   <a:srgbClr val="0068B7"/>
                 </a:solidFill>
@@ -7340,7 +7342,7 @@
               </a:rPr>
               <a:t>Concept checkpoints</a:t>
             </a:r>
-            <a:endParaRPr lang="en-US" sz="1300" dirty="0"/>
+            <a:endParaRPr lang="en-US" sz="1220" dirty="0"/>
           </a:p>
         </p:txBody>
       </p:sp>
@@ -7352,8 +7354,8 @@
         </p:nvSpPr>
         <p:spPr>
           <a:xfrm>
-            <a:off x="7818120" y="3182112"/>
-            <a:ext cx="3090672" cy="718718"/>
+            <a:off x="7726680" y="3182112"/>
+            <a:ext cx="3227832" cy="960120"/>
           </a:xfrm>
           <a:prstGeom prst="rect">
             <a:avLst/>
@@ -7371,7 +7373,7 @@
               <a:buNone/>
             </a:pPr>
             <a:r>
-              <a:rPr lang="en-US" sz="1220" dirty="0">
+              <a:rPr lang="en-US" sz="1140" dirty="0">
                 <a:solidFill>
                   <a:srgbClr val="17364A"/>
                 </a:solidFill>
@@ -7379,16 +7381,16 @@
                 <a:ea typeface="Aptos" pitchFamily="34" charset="-122"/>
                 <a:cs typeface="Aptos" pitchFamily="34" charset="-120"/>
               </a:rPr>
-              <a:t>What location data are used, and how complete and accurate are they?</a:t>
-            </a:r>
-            <a:endParaRPr lang="en-US" sz="1220" dirty="0"/>
-          </a:p>
-          <a:p>
-            <a:pPr indent="0" marL="0">
-              <a:buNone/>
-            </a:pPr>
-            <a:r>
-              <a:rPr lang="en-US" sz="1220" dirty="0">
+              <a:t>What location data are used, and how complete and.</a:t>
+            </a:r>
+            <a:endParaRPr lang="en-US" sz="1140" dirty="0"/>
+          </a:p>
+          <a:p>
+            <a:pPr indent="0" marL="0">
+              <a:buNone/>
+            </a:pPr>
+            <a:r>
+              <a:rPr lang="en-US" sz="1140" dirty="0">
                 <a:solidFill>
                   <a:srgbClr val="17364A"/>
                 </a:solidFill>
@@ -7396,16 +7398,16 @@
                 <a:ea typeface="Aptos" pitchFamily="34" charset="-122"/>
                 <a:cs typeface="Aptos" pitchFamily="34" charset="-120"/>
               </a:rPr>
-              <a:t>Which geographic unit best matches the public health action?</a:t>
-            </a:r>
-            <a:endParaRPr lang="en-US" sz="1220" dirty="0"/>
-          </a:p>
-          <a:p>
-            <a:pPr indent="0" marL="0">
-              <a:buNone/>
-            </a:pPr>
-            <a:r>
-              <a:rPr lang="en-US" sz="1220" dirty="0">
+              <a:t>Which geographic unit best matches the public.</a:t>
+            </a:r>
+            <a:endParaRPr lang="en-US" sz="1140" dirty="0"/>
+          </a:p>
+          <a:p>
+            <a:pPr indent="0" marL="0">
+              <a:buNone/>
+            </a:pPr>
+            <a:r>
+              <a:rPr lang="en-US" sz="1140" dirty="0">
                 <a:solidFill>
                   <a:srgbClr val="17364A"/>
                 </a:solidFill>
@@ -7413,9 +7415,9 @@
                 <a:ea typeface="Aptos" pitchFamily="34" charset="-122"/>
                 <a:cs typeface="Aptos" pitchFamily="34" charset="-120"/>
               </a:rPr>
-              <a:t>Could missing or poor-quality location data affect certain.</a:t>
-            </a:r>
-            <a:endParaRPr lang="en-US" sz="1220" dirty="0"/>
+              <a:t>Could missing or poor-quality location data affect.</a:t>
+            </a:r>
+            <a:endParaRPr lang="en-US" sz="1140" dirty="0"/>
           </a:p>
         </p:txBody>
       </p:sp>
@@ -7427,12 +7429,12 @@
         </p:nvSpPr>
         <p:spPr>
           <a:xfrm>
-            <a:off x="7635240" y="4184294"/>
-            <a:ext cx="3474720" cy="1466698"/>
+            <a:off x="7543800" y="4389120"/>
+            <a:ext cx="3611880" cy="1261872"/>
           </a:xfrm>
           <a:prstGeom prst="roundRect">
             <a:avLst>
-              <a:gd name="adj" fmla="val 7481"/>
+              <a:gd name="adj" fmla="val 8696"/>
             </a:avLst>
           </a:prstGeom>
           <a:solidFill>
@@ -7454,8 +7456,8 @@
         </p:nvSpPr>
         <p:spPr>
           <a:xfrm>
-            <a:off x="7799832" y="4330598"/>
-            <a:ext cx="3145536" cy="256032"/>
+            <a:off x="7708392" y="4517136"/>
+            <a:ext cx="3282696" cy="228600"/>
           </a:xfrm>
           <a:prstGeom prst="rect">
             <a:avLst/>
@@ -7471,7 +7473,7 @@
               <a:buNone/>
             </a:pPr>
             <a:r>
-              <a:rPr lang="en-US" sz="1300" b="1" dirty="0">
+              <a:rPr lang="en-US" sz="1220" b="1" dirty="0">
                 <a:solidFill>
                   <a:srgbClr val="0068B7"/>
                 </a:solidFill>
@@ -7481,7 +7483,7 @@
               </a:rPr>
               <a:t>Apply it</a:t>
             </a:r>
-            <a:endParaRPr lang="en-US" sz="1300" dirty="0"/>
+            <a:endParaRPr lang="en-US" sz="1220" dirty="0"/>
           </a:p>
         </p:txBody>
       </p:sp>
@@ -7493,8 +7495,8 @@
         </p:nvSpPr>
         <p:spPr>
           <a:xfrm>
-            <a:off x="7799832" y="4659782"/>
-            <a:ext cx="3145536" cy="899770"/>
+            <a:off x="7708392" y="4828032"/>
+            <a:ext cx="3282696" cy="749808"/>
           </a:xfrm>
           <a:prstGeom prst="rect">
             <a:avLst/>
@@ -7512,7 +7514,7 @@
               <a:buNone/>
             </a:pPr>
             <a:r>
-              <a:rPr lang="en-US" sz="1320" dirty="0">
+              <a:rPr lang="en-US" sz="1220" dirty="0">
                 <a:solidFill>
                   <a:srgbClr val="17364A"/>
                 </a:solidFill>
@@ -7520,9 +7522,9 @@
                 <a:ea typeface="Aptos" pitchFamily="34" charset="-122"/>
                 <a:cs typeface="Aptos" pitchFamily="34" charset="-120"/>
               </a:rPr>
-              <a:t>Connect the concept to public health purpose, responsible use, required safeguards, documentation, and the next action a department should take.</a:t>
-            </a:r>
-            <a:endParaRPr lang="en-US" sz="1320" dirty="0"/>
+              <a:t>Connect the concept to public health purpose, responsible use, required.</a:t>
+            </a:r>
+            <a:endParaRPr lang="en-US" sz="1220" dirty="0"/>
           </a:p>
         </p:txBody>
       </p:sp>
@@ -7813,8 +7815,8 @@
         </p:nvSpPr>
         <p:spPr>
           <a:xfrm>
-            <a:off x="868680" y="1508760"/>
-            <a:ext cx="6309360" cy="4160520"/>
+            <a:off x="822960" y="1463040"/>
+            <a:ext cx="6565392" cy="4343400"/>
           </a:xfrm>
           <a:prstGeom prst="rect">
             <a:avLst/>
@@ -7832,7 +7834,7 @@
               <a:buNone/>
             </a:pPr>
             <a:r>
-              <a:rPr lang="en-US" sz="2100" dirty="0">
+              <a:rPr lang="en-US" sz="1920" dirty="0">
                 <a:solidFill>
                   <a:srgbClr val="003A63"/>
                 </a:solidFill>
@@ -7842,14 +7844,14 @@
               </a:rPr>
               <a:t>• What privacy safeguards are needed for internal and public maps?</a:t>
             </a:r>
-            <a:endParaRPr lang="en-US" sz="2100" dirty="0"/>
-          </a:p>
-          <a:p>
-            <a:pPr indent="0" marL="0">
-              <a:buNone/>
-            </a:pPr>
-            <a:r>
-              <a:rPr lang="en-US" sz="2100" dirty="0">
+            <a:endParaRPr lang="en-US" sz="1920" dirty="0"/>
+          </a:p>
+          <a:p>
+            <a:pPr indent="0" marL="0">
+              <a:buNone/>
+            </a:pPr>
+            <a:r>
+              <a:rPr lang="en-US" sz="1920" dirty="0">
                 <a:solidFill>
                   <a:srgbClr val="003A63"/>
                 </a:solidFill>
@@ -7859,7 +7861,7 @@
               </a:rPr>
               <a:t>• How will community context be included before action is taken?</a:t>
             </a:r>
-            <a:endParaRPr lang="en-US" sz="2100" dirty="0"/>
+            <a:endParaRPr lang="en-US" sz="1920" dirty="0"/>
           </a:p>
         </p:txBody>
       </p:sp>
@@ -7871,12 +7873,12 @@
         </p:nvSpPr>
         <p:spPr>
           <a:xfrm>
-            <a:off x="7635240" y="1325880"/>
-            <a:ext cx="3474720" cy="1207008"/>
+            <a:off x="7543800" y="1325880"/>
+            <a:ext cx="3611880" cy="1261872"/>
           </a:xfrm>
           <a:prstGeom prst="roundRect">
             <a:avLst>
-              <a:gd name="adj" fmla="val 9091"/>
+              <a:gd name="adj" fmla="val 8696"/>
             </a:avLst>
           </a:prstGeom>
           <a:solidFill>
@@ -7898,8 +7900,8 @@
         </p:nvSpPr>
         <p:spPr>
           <a:xfrm>
-            <a:off x="7799832" y="1472184"/>
-            <a:ext cx="3145536" cy="256032"/>
+            <a:off x="7708392" y="1453896"/>
+            <a:ext cx="3282696" cy="228600"/>
           </a:xfrm>
           <a:prstGeom prst="rect">
             <a:avLst/>
@@ -7915,7 +7917,7 @@
               <a:buNone/>
             </a:pPr>
             <a:r>
-              <a:rPr lang="en-US" sz="1300" b="1" dirty="0">
+              <a:rPr lang="en-US" sz="1220" b="1" dirty="0">
                 <a:solidFill>
                   <a:srgbClr val="0068B7"/>
                 </a:solidFill>
@@ -7925,7 +7927,7 @@
               </a:rPr>
               <a:t>Core concept</a:t>
             </a:r>
-            <a:endParaRPr lang="en-US" sz="1300" dirty="0"/>
+            <a:endParaRPr lang="en-US" sz="1220" dirty="0"/>
           </a:p>
         </p:txBody>
       </p:sp>
@@ -7937,8 +7939,8 @@
         </p:nvSpPr>
         <p:spPr>
           <a:xfrm>
-            <a:off x="7799832" y="1801368"/>
-            <a:ext cx="3145536" cy="640080"/>
+            <a:off x="7708392" y="1764792"/>
+            <a:ext cx="3282696" cy="749808"/>
           </a:xfrm>
           <a:prstGeom prst="rect">
             <a:avLst/>
@@ -7956,7 +7958,7 @@
               <a:buNone/>
             </a:pPr>
             <a:r>
-              <a:rPr lang="en-US" sz="1320" dirty="0">
+              <a:rPr lang="en-US" sz="1220" dirty="0">
                 <a:solidFill>
                   <a:srgbClr val="17364A"/>
                 </a:solidFill>
@@ -7966,7 +7968,7 @@
               </a:rPr>
               <a:t>What privacy safeguards are needed for internal and public maps?</a:t>
             </a:r>
-            <a:endParaRPr lang="en-US" sz="1320" dirty="0"/>
+            <a:endParaRPr lang="en-US" sz="1220" dirty="0"/>
           </a:p>
         </p:txBody>
       </p:sp>
@@ -7978,12 +7980,12 @@
         </p:nvSpPr>
         <p:spPr>
           <a:xfrm>
-            <a:off x="7635240" y="2670048"/>
-            <a:ext cx="3474720" cy="1377086"/>
+            <a:off x="7543800" y="2724912"/>
+            <a:ext cx="3611880" cy="1527048"/>
           </a:xfrm>
           <a:prstGeom prst="roundRect">
             <a:avLst>
-              <a:gd name="adj" fmla="val 7968"/>
+              <a:gd name="adj" fmla="val 7186"/>
             </a:avLst>
           </a:prstGeom>
           <a:solidFill>
@@ -8005,8 +8007,8 @@
         </p:nvSpPr>
         <p:spPr>
           <a:xfrm>
-            <a:off x="7799832" y="2816352"/>
-            <a:ext cx="3145536" cy="256032"/>
+            <a:off x="7708392" y="2852928"/>
+            <a:ext cx="3282696" cy="228600"/>
           </a:xfrm>
           <a:prstGeom prst="rect">
             <a:avLst/>
@@ -8022,7 +8024,7 @@
               <a:buNone/>
             </a:pPr>
             <a:r>
-              <a:rPr lang="en-US" sz="1300" b="1" dirty="0">
+              <a:rPr lang="en-US" sz="1220" b="1" dirty="0">
                 <a:solidFill>
                   <a:srgbClr val="0068B7"/>
                 </a:solidFill>
@@ -8032,7 +8034,7 @@
               </a:rPr>
               <a:t>Concept checkpoints</a:t>
             </a:r>
-            <a:endParaRPr lang="en-US" sz="1300" dirty="0"/>
+            <a:endParaRPr lang="en-US" sz="1220" dirty="0"/>
           </a:p>
         </p:txBody>
       </p:sp>
@@ -8044,8 +8046,8 @@
         </p:nvSpPr>
         <p:spPr>
           <a:xfrm>
-            <a:off x="7818120" y="3182112"/>
-            <a:ext cx="3090672" cy="718718"/>
+            <a:off x="7726680" y="3182112"/>
+            <a:ext cx="3227832" cy="960120"/>
           </a:xfrm>
           <a:prstGeom prst="rect">
             <a:avLst/>
@@ -8063,7 +8065,7 @@
               <a:buNone/>
             </a:pPr>
             <a:r>
-              <a:rPr lang="en-US" sz="1220" dirty="0">
+              <a:rPr lang="en-US" sz="1140" dirty="0">
                 <a:solidFill>
                   <a:srgbClr val="17364A"/>
                 </a:solidFill>
@@ -8071,16 +8073,16 @@
                 <a:ea typeface="Aptos" pitchFamily="34" charset="-122"/>
                 <a:cs typeface="Aptos" pitchFamily="34" charset="-120"/>
               </a:rPr>
-              <a:t>What privacy safeguards are needed for internal and public maps?</a:t>
-            </a:r>
-            <a:endParaRPr lang="en-US" sz="1220" dirty="0"/>
-          </a:p>
-          <a:p>
-            <a:pPr indent="0" marL="0">
-              <a:buNone/>
-            </a:pPr>
-            <a:r>
-              <a:rPr lang="en-US" sz="1220" dirty="0">
+              <a:t>What privacy safeguards are needed for internal.</a:t>
+            </a:r>
+            <a:endParaRPr lang="en-US" sz="1140" dirty="0"/>
+          </a:p>
+          <a:p>
+            <a:pPr indent="0" marL="0">
+              <a:buNone/>
+            </a:pPr>
+            <a:r>
+              <a:rPr lang="en-US" sz="1140" dirty="0">
                 <a:solidFill>
                   <a:srgbClr val="17364A"/>
                 </a:solidFill>
@@ -8088,9 +8090,9 @@
                 <a:ea typeface="Aptos" pitchFamily="34" charset="-122"/>
                 <a:cs typeface="Aptos" pitchFamily="34" charset="-120"/>
               </a:rPr>
-              <a:t>How will community context be included before action is taken?</a:t>
-            </a:r>
-            <a:endParaRPr lang="en-US" sz="1220" dirty="0"/>
+              <a:t>How will community context be included before.</a:t>
+            </a:r>
+            <a:endParaRPr lang="en-US" sz="1140" dirty="0"/>
           </a:p>
         </p:txBody>
       </p:sp>
@@ -8102,12 +8104,12 @@
         </p:nvSpPr>
         <p:spPr>
           <a:xfrm>
-            <a:off x="7635240" y="4184294"/>
-            <a:ext cx="3474720" cy="1466698"/>
+            <a:off x="7543800" y="4389120"/>
+            <a:ext cx="3611880" cy="1261872"/>
           </a:xfrm>
           <a:prstGeom prst="roundRect">
             <a:avLst>
-              <a:gd name="adj" fmla="val 7481"/>
+              <a:gd name="adj" fmla="val 8696"/>
             </a:avLst>
           </a:prstGeom>
           <a:solidFill>
@@ -8129,8 +8131,8 @@
         </p:nvSpPr>
         <p:spPr>
           <a:xfrm>
-            <a:off x="7799832" y="4330598"/>
-            <a:ext cx="3145536" cy="256032"/>
+            <a:off x="7708392" y="4517136"/>
+            <a:ext cx="3282696" cy="228600"/>
           </a:xfrm>
           <a:prstGeom prst="rect">
             <a:avLst/>
@@ -8146,7 +8148,7 @@
               <a:buNone/>
             </a:pPr>
             <a:r>
-              <a:rPr lang="en-US" sz="1300" b="1" dirty="0">
+              <a:rPr lang="en-US" sz="1220" b="1" dirty="0">
                 <a:solidFill>
                   <a:srgbClr val="0068B7"/>
                 </a:solidFill>
@@ -8156,7 +8158,7 @@
               </a:rPr>
               <a:t>Apply it</a:t>
             </a:r>
-            <a:endParaRPr lang="en-US" sz="1300" dirty="0"/>
+            <a:endParaRPr lang="en-US" sz="1220" dirty="0"/>
           </a:p>
         </p:txBody>
       </p:sp>
@@ -8168,8 +8170,8 @@
         </p:nvSpPr>
         <p:spPr>
           <a:xfrm>
-            <a:off x="7799832" y="4659782"/>
-            <a:ext cx="3145536" cy="899770"/>
+            <a:off x="7708392" y="4828032"/>
+            <a:ext cx="3282696" cy="749808"/>
           </a:xfrm>
           <a:prstGeom prst="rect">
             <a:avLst/>
@@ -8187,7 +8189,7 @@
               <a:buNone/>
             </a:pPr>
             <a:r>
-              <a:rPr lang="en-US" sz="1320" dirty="0">
+              <a:rPr lang="en-US" sz="1220" dirty="0">
                 <a:solidFill>
                   <a:srgbClr val="17364A"/>
                 </a:solidFill>
@@ -8195,9 +8197,9 @@
                 <a:ea typeface="Aptos" pitchFamily="34" charset="-122"/>
                 <a:cs typeface="Aptos" pitchFamily="34" charset="-120"/>
               </a:rPr>
-              <a:t>Connect the concept to public health purpose, responsible use, required safeguards, documentation, and the next action a department should take.</a:t>
-            </a:r>
-            <a:endParaRPr lang="en-US" sz="1320" dirty="0"/>
+              <a:t>Connect the concept to public health purpose, responsible use, required.</a:t>
+            </a:r>
+            <a:endParaRPr lang="en-US" sz="1220" dirty="0"/>
           </a:p>
         </p:txBody>
       </p:sp>
@@ -8488,8 +8490,8 @@
         </p:nvSpPr>
         <p:spPr>
           <a:xfrm>
-            <a:off x="868680" y="1508760"/>
-            <a:ext cx="6309360" cy="4160520"/>
+            <a:off x="822960" y="1463040"/>
+            <a:ext cx="6565392" cy="4343400"/>
           </a:xfrm>
           <a:prstGeom prst="rect">
             <a:avLst/>
@@ -8507,7 +8509,7 @@
               <a:buNone/>
             </a:pPr>
             <a:r>
-              <a:rPr lang="en-US" sz="2100" dirty="0">
+              <a:rPr lang="en-US" sz="1920" dirty="0">
                 <a:solidFill>
                   <a:srgbClr val="003A63"/>
                 </a:solidFill>
@@ -8517,14 +8519,14 @@
               </a:rPr>
               <a:t>• Create a geospatial AI readiness worksheet for one public health workflow.</a:t>
             </a:r>
-            <a:endParaRPr lang="en-US" sz="2100" dirty="0"/>
-          </a:p>
-          <a:p>
-            <a:pPr indent="0" marL="0">
-              <a:buNone/>
-            </a:pPr>
-            <a:r>
-              <a:rPr lang="en-US" sz="2100" dirty="0">
+            <a:endParaRPr lang="en-US" sz="1920" dirty="0"/>
+          </a:p>
+          <a:p>
+            <a:pPr indent="0" marL="0">
+              <a:buNone/>
+            </a:pPr>
+            <a:r>
+              <a:rPr lang="en-US" sz="1920" dirty="0">
                 <a:solidFill>
                   <a:srgbClr val="003A63"/>
                 </a:solidFill>
@@ -8532,16 +8534,16 @@
                 <a:ea typeface="Aptos" pitchFamily="34" charset="-122"/>
                 <a:cs typeface="Aptos" pitchFamily="34" charset="-120"/>
               </a:rPr>
-              <a:t>• Include the public health question, location data sources, geocoding method, geographic unit,.</a:t>
-            </a:r>
-            <a:endParaRPr lang="en-US" sz="2100" dirty="0"/>
-          </a:p>
-          <a:p>
-            <a:pPr indent="0" marL="0">
-              <a:buNone/>
-            </a:pPr>
-            <a:r>
-              <a:rPr lang="en-US" sz="2100" dirty="0">
+              <a:t>• Include the public health question, location data sources, geocoding method,.</a:t>
+            </a:r>
+            <a:endParaRPr lang="en-US" sz="1920" dirty="0"/>
+          </a:p>
+          <a:p>
+            <a:pPr indent="0" marL="0">
+              <a:buNone/>
+            </a:pPr>
+            <a:r>
+              <a:rPr lang="en-US" sz="1920" dirty="0">
                 <a:solidFill>
                   <a:srgbClr val="003A63"/>
                 </a:solidFill>
@@ -8549,9 +8551,9 @@
                 <a:ea typeface="Aptos" pitchFamily="34" charset="-122"/>
                 <a:cs typeface="Aptos" pitchFamily="34" charset="-120"/>
               </a:rPr>
-              <a:t>• The worksheet should identify at least one way the map could be misinterpreted and one.</a:t>
-            </a:r>
-            <a:endParaRPr lang="en-US" sz="2100" dirty="0"/>
+              <a:t>• The worksheet should identify at least one way the map could be.</a:t>
+            </a:r>
+            <a:endParaRPr lang="en-US" sz="1920" dirty="0"/>
           </a:p>
         </p:txBody>
       </p:sp>
@@ -8563,12 +8565,12 @@
         </p:nvSpPr>
         <p:spPr>
           <a:xfrm>
-            <a:off x="7635240" y="1325880"/>
-            <a:ext cx="3474720" cy="1207008"/>
+            <a:off x="7543800" y="1325880"/>
+            <a:ext cx="3611880" cy="1261872"/>
           </a:xfrm>
           <a:prstGeom prst="roundRect">
             <a:avLst>
-              <a:gd name="adj" fmla="val 9091"/>
+              <a:gd name="adj" fmla="val 8696"/>
             </a:avLst>
           </a:prstGeom>
           <a:solidFill>
@@ -8590,8 +8592,8 @@
         </p:nvSpPr>
         <p:spPr>
           <a:xfrm>
-            <a:off x="7799832" y="1472184"/>
-            <a:ext cx="3145536" cy="256032"/>
+            <a:off x="7708392" y="1453896"/>
+            <a:ext cx="3282696" cy="228600"/>
           </a:xfrm>
           <a:prstGeom prst="rect">
             <a:avLst/>
@@ -8607,7 +8609,7 @@
               <a:buNone/>
             </a:pPr>
             <a:r>
-              <a:rPr lang="en-US" sz="1300" b="1" dirty="0">
+              <a:rPr lang="en-US" sz="1220" b="1" dirty="0">
                 <a:solidFill>
                   <a:srgbClr val="0068B7"/>
                 </a:solidFill>
@@ -8617,7 +8619,7 @@
               </a:rPr>
               <a:t>Practice focus</a:t>
             </a:r>
-            <a:endParaRPr lang="en-US" sz="1300" dirty="0"/>
+            <a:endParaRPr lang="en-US" sz="1220" dirty="0"/>
           </a:p>
         </p:txBody>
       </p:sp>
@@ -8629,8 +8631,8 @@
         </p:nvSpPr>
         <p:spPr>
           <a:xfrm>
-            <a:off x="7799832" y="1801368"/>
-            <a:ext cx="3145536" cy="640080"/>
+            <a:off x="7708392" y="1764792"/>
+            <a:ext cx="3282696" cy="749808"/>
           </a:xfrm>
           <a:prstGeom prst="rect">
             <a:avLst/>
@@ -8648,7 +8650,7 @@
               <a:buNone/>
             </a:pPr>
             <a:r>
-              <a:rPr lang="en-US" sz="1320" dirty="0">
+              <a:rPr lang="en-US" sz="1220" dirty="0">
                 <a:solidFill>
                   <a:srgbClr val="17364A"/>
                 </a:solidFill>
@@ -8658,7 +8660,7 @@
               </a:rPr>
               <a:t>Create a geospatial AI readiness worksheet for one public health workflow.</a:t>
             </a:r>
-            <a:endParaRPr lang="en-US" sz="1320" dirty="0"/>
+            <a:endParaRPr lang="en-US" sz="1220" dirty="0"/>
           </a:p>
         </p:txBody>
       </p:sp>
@@ -8670,12 +8672,12 @@
         </p:nvSpPr>
         <p:spPr>
           <a:xfrm>
-            <a:off x="7635240" y="2670048"/>
-            <a:ext cx="3474720" cy="1377086"/>
+            <a:off x="7543800" y="2724912"/>
+            <a:ext cx="3611880" cy="1527048"/>
           </a:xfrm>
           <a:prstGeom prst="roundRect">
             <a:avLst>
-              <a:gd name="adj" fmla="val 7968"/>
+              <a:gd name="adj" fmla="val 7186"/>
             </a:avLst>
           </a:prstGeom>
           <a:solidFill>
@@ -8697,8 +8699,8 @@
         </p:nvSpPr>
         <p:spPr>
           <a:xfrm>
-            <a:off x="7799832" y="2816352"/>
-            <a:ext cx="3145536" cy="256032"/>
+            <a:off x="7708392" y="2852928"/>
+            <a:ext cx="3282696" cy="228600"/>
           </a:xfrm>
           <a:prstGeom prst="rect">
             <a:avLst/>
@@ -8714,7 +8716,7 @@
               <a:buNone/>
             </a:pPr>
             <a:r>
-              <a:rPr lang="en-US" sz="1300" b="1" dirty="0">
+              <a:rPr lang="en-US" sz="1220" b="1" dirty="0">
                 <a:solidFill>
                   <a:srgbClr val="0068B7"/>
                 </a:solidFill>
@@ -8724,7 +8726,7 @@
               </a:rPr>
               <a:t>Concept checkpoints</a:t>
             </a:r>
-            <a:endParaRPr lang="en-US" sz="1300" dirty="0"/>
+            <a:endParaRPr lang="en-US" sz="1220" dirty="0"/>
           </a:p>
         </p:txBody>
       </p:sp>
@@ -8736,8 +8738,8 @@
         </p:nvSpPr>
         <p:spPr>
           <a:xfrm>
-            <a:off x="7818120" y="3182112"/>
-            <a:ext cx="3090672" cy="718718"/>
+            <a:off x="7726680" y="3182112"/>
+            <a:ext cx="3227832" cy="960120"/>
           </a:xfrm>
           <a:prstGeom prst="rect">
             <a:avLst/>
@@ -8755,7 +8757,7 @@
               <a:buNone/>
             </a:pPr>
             <a:r>
-              <a:rPr lang="en-US" sz="1220" dirty="0">
+              <a:rPr lang="en-US" sz="1140" dirty="0">
                 <a:solidFill>
                   <a:srgbClr val="17364A"/>
                 </a:solidFill>
@@ -8763,16 +8765,16 @@
                 <a:ea typeface="Aptos" pitchFamily="34" charset="-122"/>
                 <a:cs typeface="Aptos" pitchFamily="34" charset="-120"/>
               </a:rPr>
-              <a:t>Include the public health question, location data sources,.</a:t>
-            </a:r>
-            <a:endParaRPr lang="en-US" sz="1220" dirty="0"/>
-          </a:p>
-          <a:p>
-            <a:pPr indent="0" marL="0">
-              <a:buNone/>
-            </a:pPr>
-            <a:r>
-              <a:rPr lang="en-US" sz="1220" dirty="0">
+              <a:t>Include the public health question, location data.</a:t>
+            </a:r>
+            <a:endParaRPr lang="en-US" sz="1140" dirty="0"/>
+          </a:p>
+          <a:p>
+            <a:pPr indent="0" marL="0">
+              <a:buNone/>
+            </a:pPr>
+            <a:r>
+              <a:rPr lang="en-US" sz="1140" dirty="0">
                 <a:solidFill>
                   <a:srgbClr val="17364A"/>
                 </a:solidFill>
@@ -8780,9 +8782,9 @@
                 <a:ea typeface="Aptos" pitchFamily="34" charset="-122"/>
                 <a:cs typeface="Aptos" pitchFamily="34" charset="-120"/>
               </a:rPr>
-              <a:t>The worksheet should identify at least one way the map could be.</a:t>
-            </a:r>
-            <a:endParaRPr lang="en-US" sz="1220" dirty="0"/>
+              <a:t>The worksheet should identify at least one way the.</a:t>
+            </a:r>
+            <a:endParaRPr lang="en-US" sz="1140" dirty="0"/>
           </a:p>
         </p:txBody>
       </p:sp>
@@ -8794,12 +8796,12 @@
         </p:nvSpPr>
         <p:spPr>
           <a:xfrm>
-            <a:off x="7635240" y="4184294"/>
-            <a:ext cx="3474720" cy="1466698"/>
+            <a:off x="7543800" y="4389120"/>
+            <a:ext cx="3611880" cy="1261872"/>
           </a:xfrm>
           <a:prstGeom prst="roundRect">
             <a:avLst>
-              <a:gd name="adj" fmla="val 7481"/>
+              <a:gd name="adj" fmla="val 8696"/>
             </a:avLst>
           </a:prstGeom>
           <a:solidFill>
@@ -8821,8 +8823,8 @@
         </p:nvSpPr>
         <p:spPr>
           <a:xfrm>
-            <a:off x="7799832" y="4330598"/>
-            <a:ext cx="3145536" cy="256032"/>
+            <a:off x="7708392" y="4517136"/>
+            <a:ext cx="3282696" cy="228600"/>
           </a:xfrm>
           <a:prstGeom prst="rect">
             <a:avLst/>
@@ -8838,7 +8840,7 @@
               <a:buNone/>
             </a:pPr>
             <a:r>
-              <a:rPr lang="en-US" sz="1300" b="1" dirty="0">
+              <a:rPr lang="en-US" sz="1220" b="1" dirty="0">
                 <a:solidFill>
                   <a:srgbClr val="0068B7"/>
                 </a:solidFill>
@@ -8848,7 +8850,7 @@
               </a:rPr>
               <a:t>What to produce</a:t>
             </a:r>
-            <a:endParaRPr lang="en-US" sz="1300" dirty="0"/>
+            <a:endParaRPr lang="en-US" sz="1220" dirty="0"/>
           </a:p>
         </p:txBody>
       </p:sp>
@@ -8860,8 +8862,8 @@
         </p:nvSpPr>
         <p:spPr>
           <a:xfrm>
-            <a:off x="7799832" y="4659782"/>
-            <a:ext cx="3145536" cy="899770"/>
+            <a:off x="7708392" y="4828032"/>
+            <a:ext cx="3282696" cy="749808"/>
           </a:xfrm>
           <a:prstGeom prst="rect">
             <a:avLst/>
@@ -8879,7 +8881,7 @@
               <a:buNone/>
             </a:pPr>
             <a:r>
-              <a:rPr lang="en-US" sz="1320" dirty="0">
+              <a:rPr lang="en-US" sz="1220" dirty="0">
                 <a:solidFill>
                   <a:srgbClr val="17364A"/>
                 </a:solidFill>
@@ -8887,9 +8889,9 @@
                 <a:ea typeface="Aptos" pitchFamily="34" charset="-122"/>
                 <a:cs typeface="Aptos" pitchFamily="34" charset="-120"/>
               </a:rPr>
-              <a:t>Use the assignment to test whether you can explain the concept, apply it to a realistic public health situation, and identify what would need review before the work moves forward.</a:t>
-            </a:r>
-            <a:endParaRPr lang="en-US" sz="1320" dirty="0"/>
+              <a:t>Use the assignment to test whether you can explain the concept, apply it to a.</a:t>
+            </a:r>
+            <a:endParaRPr lang="en-US" sz="1220" dirty="0"/>
           </a:p>
         </p:txBody>
       </p:sp>
@@ -9180,8 +9182,8 @@
         </p:nvSpPr>
         <p:spPr>
           <a:xfrm>
-            <a:off x="868680" y="1508760"/>
-            <a:ext cx="6309360" cy="4160520"/>
+            <a:off x="822960" y="1463040"/>
+            <a:ext cx="6565392" cy="4343400"/>
           </a:xfrm>
           <a:prstGeom prst="rect">
             <a:avLst/>
@@ -9199,7 +9201,7 @@
               <a:buNone/>
             </a:pPr>
             <a:r>
-              <a:rPr lang="en-US" sz="2100" dirty="0">
+              <a:rPr lang="en-US" sz="1920" dirty="0">
                 <a:solidFill>
                   <a:srgbClr val="003A63"/>
                 </a:solidFill>
@@ -9209,14 +9211,14 @@
               </a:rPr>
               <a:t>• Geospatial AI readiness worksheet</a:t>
             </a:r>
-            <a:endParaRPr lang="en-US" sz="2100" dirty="0"/>
-          </a:p>
-          <a:p>
-            <a:pPr indent="0" marL="0">
-              <a:buNone/>
-            </a:pPr>
-            <a:r>
-              <a:rPr lang="en-US" sz="2100" dirty="0">
+            <a:endParaRPr lang="en-US" sz="1920" dirty="0"/>
+          </a:p>
+          <a:p>
+            <a:pPr indent="0" marL="0">
+              <a:buNone/>
+            </a:pPr>
+            <a:r>
+              <a:rPr lang="en-US" sz="1920" dirty="0">
                 <a:solidFill>
                   <a:srgbClr val="003A63"/>
                 </a:solidFill>
@@ -9226,14 +9228,14 @@
               </a:rPr>
               <a:t>• Map interpretation and limitations memo</a:t>
             </a:r>
-            <a:endParaRPr lang="en-US" sz="2100" dirty="0"/>
-          </a:p>
-          <a:p>
-            <a:pPr indent="0" marL="0">
-              <a:buNone/>
-            </a:pPr>
-            <a:r>
-              <a:rPr lang="en-US" sz="2100" dirty="0">
+            <a:endParaRPr lang="en-US" sz="1920" dirty="0"/>
+          </a:p>
+          <a:p>
+            <a:pPr indent="0" marL="0">
+              <a:buNone/>
+            </a:pPr>
+            <a:r>
+              <a:rPr lang="en-US" sz="1920" dirty="0">
                 <a:solidFill>
                   <a:srgbClr val="003A63"/>
                 </a:solidFill>
@@ -9243,7 +9245,7 @@
               </a:rPr>
               <a:t>• Privacy and suppression review notes</a:t>
             </a:r>
-            <a:endParaRPr lang="en-US" sz="2100" dirty="0"/>
+            <a:endParaRPr lang="en-US" sz="1920" dirty="0"/>
           </a:p>
         </p:txBody>
       </p:sp>
@@ -9255,12 +9257,12 @@
         </p:nvSpPr>
         <p:spPr>
           <a:xfrm>
-            <a:off x="7635240" y="1325880"/>
-            <a:ext cx="3474720" cy="1207008"/>
+            <a:off x="7543800" y="1325880"/>
+            <a:ext cx="3611880" cy="1261872"/>
           </a:xfrm>
           <a:prstGeom prst="roundRect">
             <a:avLst>
-              <a:gd name="adj" fmla="val 9091"/>
+              <a:gd name="adj" fmla="val 8696"/>
             </a:avLst>
           </a:prstGeom>
           <a:solidFill>
@@ -9282,8 +9284,8 @@
         </p:nvSpPr>
         <p:spPr>
           <a:xfrm>
-            <a:off x="7799832" y="1472184"/>
-            <a:ext cx="3145536" cy="256032"/>
+            <a:off x="7708392" y="1453896"/>
+            <a:ext cx="3282696" cy="228600"/>
           </a:xfrm>
           <a:prstGeom prst="rect">
             <a:avLst/>
@@ -9299,7 +9301,7 @@
               <a:buNone/>
             </a:pPr>
             <a:r>
-              <a:rPr lang="en-US" sz="1300" b="1" dirty="0">
+              <a:rPr lang="en-US" sz="1220" b="1" dirty="0">
                 <a:solidFill>
                   <a:srgbClr val="0068B7"/>
                 </a:solidFill>
@@ -9309,7 +9311,7 @@
               </a:rPr>
               <a:t>Core concept</a:t>
             </a:r>
-            <a:endParaRPr lang="en-US" sz="1300" dirty="0"/>
+            <a:endParaRPr lang="en-US" sz="1220" dirty="0"/>
           </a:p>
         </p:txBody>
       </p:sp>
@@ -9321,8 +9323,8 @@
         </p:nvSpPr>
         <p:spPr>
           <a:xfrm>
-            <a:off x="7799832" y="1801368"/>
-            <a:ext cx="3145536" cy="640080"/>
+            <a:off x="7708392" y="1764792"/>
+            <a:ext cx="3282696" cy="749808"/>
           </a:xfrm>
           <a:prstGeom prst="rect">
             <a:avLst/>
@@ -9340,7 +9342,7 @@
               <a:buNone/>
             </a:pPr>
             <a:r>
-              <a:rPr lang="en-US" sz="1320" dirty="0">
+              <a:rPr lang="en-US" sz="1220" dirty="0">
                 <a:solidFill>
                   <a:srgbClr val="17364A"/>
                 </a:solidFill>
@@ -9350,7 +9352,7 @@
               </a:rPr>
               <a:t>Geospatial AI readiness worksheet</a:t>
             </a:r>
-            <a:endParaRPr lang="en-US" sz="1320" dirty="0"/>
+            <a:endParaRPr lang="en-US" sz="1220" dirty="0"/>
           </a:p>
         </p:txBody>
       </p:sp>
@@ -9362,12 +9364,12 @@
         </p:nvSpPr>
         <p:spPr>
           <a:xfrm>
-            <a:off x="7635240" y="2670048"/>
-            <a:ext cx="3474720" cy="1377086"/>
+            <a:off x="7543800" y="2724912"/>
+            <a:ext cx="3611880" cy="1527048"/>
           </a:xfrm>
           <a:prstGeom prst="roundRect">
             <a:avLst>
-              <a:gd name="adj" fmla="val 7968"/>
+              <a:gd name="adj" fmla="val 7186"/>
             </a:avLst>
           </a:prstGeom>
           <a:solidFill>
@@ -9389,8 +9391,8 @@
         </p:nvSpPr>
         <p:spPr>
           <a:xfrm>
-            <a:off x="7799832" y="2816352"/>
-            <a:ext cx="3145536" cy="256032"/>
+            <a:off x="7708392" y="2852928"/>
+            <a:ext cx="3282696" cy="228600"/>
           </a:xfrm>
           <a:prstGeom prst="rect">
             <a:avLst/>
@@ -9406,7 +9408,7 @@
               <a:buNone/>
             </a:pPr>
             <a:r>
-              <a:rPr lang="en-US" sz="1300" b="1" dirty="0">
+              <a:rPr lang="en-US" sz="1220" b="1" dirty="0">
                 <a:solidFill>
                   <a:srgbClr val="0068B7"/>
                 </a:solidFill>
@@ -9416,7 +9418,7 @@
               </a:rPr>
               <a:t>Concept checkpoints</a:t>
             </a:r>
-            <a:endParaRPr lang="en-US" sz="1300" dirty="0"/>
+            <a:endParaRPr lang="en-US" sz="1220" dirty="0"/>
           </a:p>
         </p:txBody>
       </p:sp>
@@ -9428,8 +9430,8 @@
         </p:nvSpPr>
         <p:spPr>
           <a:xfrm>
-            <a:off x="7818120" y="3182112"/>
-            <a:ext cx="3090672" cy="718718"/>
+            <a:off x="7726680" y="3182112"/>
+            <a:ext cx="3227832" cy="960120"/>
           </a:xfrm>
           <a:prstGeom prst="rect">
             <a:avLst/>
@@ -9447,7 +9449,7 @@
               <a:buNone/>
             </a:pPr>
             <a:r>
-              <a:rPr lang="en-US" sz="1220" dirty="0">
+              <a:rPr lang="en-US" sz="1140" dirty="0">
                 <a:solidFill>
                   <a:srgbClr val="17364A"/>
                 </a:solidFill>
@@ -9457,14 +9459,14 @@
               </a:rPr>
               <a:t>Geospatial AI readiness worksheet</a:t>
             </a:r>
-            <a:endParaRPr lang="en-US" sz="1220" dirty="0"/>
-          </a:p>
-          <a:p>
-            <a:pPr indent="0" marL="0">
-              <a:buNone/>
-            </a:pPr>
-            <a:r>
-              <a:rPr lang="en-US" sz="1220" dirty="0">
+            <a:endParaRPr lang="en-US" sz="1140" dirty="0"/>
+          </a:p>
+          <a:p>
+            <a:pPr indent="0" marL="0">
+              <a:buNone/>
+            </a:pPr>
+            <a:r>
+              <a:rPr lang="en-US" sz="1140" dirty="0">
                 <a:solidFill>
                   <a:srgbClr val="17364A"/>
                 </a:solidFill>
@@ -9474,14 +9476,14 @@
               </a:rPr>
               <a:t>Map interpretation and limitations memo</a:t>
             </a:r>
-            <a:endParaRPr lang="en-US" sz="1220" dirty="0"/>
-          </a:p>
-          <a:p>
-            <a:pPr indent="0" marL="0">
-              <a:buNone/>
-            </a:pPr>
-            <a:r>
-              <a:rPr lang="en-US" sz="1220" dirty="0">
+            <a:endParaRPr lang="en-US" sz="1140" dirty="0"/>
+          </a:p>
+          <a:p>
+            <a:pPr indent="0" marL="0">
+              <a:buNone/>
+            </a:pPr>
+            <a:r>
+              <a:rPr lang="en-US" sz="1140" dirty="0">
                 <a:solidFill>
                   <a:srgbClr val="17364A"/>
                 </a:solidFill>
@@ -9491,7 +9493,7 @@
               </a:rPr>
               <a:t>Privacy and suppression review notes</a:t>
             </a:r>
-            <a:endParaRPr lang="en-US" sz="1220" dirty="0"/>
+            <a:endParaRPr lang="en-US" sz="1140" dirty="0"/>
           </a:p>
         </p:txBody>
       </p:sp>
@@ -9503,12 +9505,12 @@
         </p:nvSpPr>
         <p:spPr>
           <a:xfrm>
-            <a:off x="7635240" y="4184294"/>
-            <a:ext cx="3474720" cy="1466698"/>
+            <a:off x="7543800" y="4389120"/>
+            <a:ext cx="3611880" cy="1261872"/>
           </a:xfrm>
           <a:prstGeom prst="roundRect">
             <a:avLst>
-              <a:gd name="adj" fmla="val 7481"/>
+              <a:gd name="adj" fmla="val 8696"/>
             </a:avLst>
           </a:prstGeom>
           <a:solidFill>
@@ -9530,8 +9532,8 @@
         </p:nvSpPr>
         <p:spPr>
           <a:xfrm>
-            <a:off x="7799832" y="4330598"/>
-            <a:ext cx="3145536" cy="256032"/>
+            <a:off x="7708392" y="4517136"/>
+            <a:ext cx="3282696" cy="228600"/>
           </a:xfrm>
           <a:prstGeom prst="rect">
             <a:avLst/>
@@ -9547,7 +9549,7 @@
               <a:buNone/>
             </a:pPr>
             <a:r>
-              <a:rPr lang="en-US" sz="1300" b="1" dirty="0">
+              <a:rPr lang="en-US" sz="1220" b="1" dirty="0">
                 <a:solidFill>
                   <a:srgbClr val="0068B7"/>
                 </a:solidFill>
@@ -9557,7 +9559,7 @@
               </a:rPr>
               <a:t>Apply it</a:t>
             </a:r>
-            <a:endParaRPr lang="en-US" sz="1300" dirty="0"/>
+            <a:endParaRPr lang="en-US" sz="1220" dirty="0"/>
           </a:p>
         </p:txBody>
       </p:sp>
@@ -9569,8 +9571,8 @@
         </p:nvSpPr>
         <p:spPr>
           <a:xfrm>
-            <a:off x="7799832" y="4659782"/>
-            <a:ext cx="3145536" cy="899770"/>
+            <a:off x="7708392" y="4828032"/>
+            <a:ext cx="3282696" cy="749808"/>
           </a:xfrm>
           <a:prstGeom prst="rect">
             <a:avLst/>
@@ -9588,7 +9590,7 @@
               <a:buNone/>
             </a:pPr>
             <a:r>
-              <a:rPr lang="en-US" sz="1320" dirty="0">
+              <a:rPr lang="en-US" sz="1220" dirty="0">
                 <a:solidFill>
                   <a:srgbClr val="17364A"/>
                 </a:solidFill>
@@ -9596,9 +9598,9 @@
                 <a:ea typeface="Aptos" pitchFamily="34" charset="-122"/>
                 <a:cs typeface="Aptos" pitchFamily="34" charset="-120"/>
               </a:rPr>
-              <a:t>Connect the concept to public health purpose, responsible use, required safeguards, documentation, and the next action a department should take.</a:t>
-            </a:r>
-            <a:endParaRPr lang="en-US" sz="1320" dirty="0"/>
+              <a:t>Connect the concept to public health purpose, responsible use, required.</a:t>
+            </a:r>
+            <a:endParaRPr lang="en-US" sz="1220" dirty="0"/>
           </a:p>
         </p:txBody>
       </p:sp>
@@ -9889,8 +9891,8 @@
         </p:nvSpPr>
         <p:spPr>
           <a:xfrm>
-            <a:off x="868680" y="1508760"/>
-            <a:ext cx="6309360" cy="4160520"/>
+            <a:off x="822960" y="1463040"/>
+            <a:ext cx="6565392" cy="4343400"/>
           </a:xfrm>
           <a:prstGeom prst="rect">
             <a:avLst/>
@@ -9908,7 +9910,7 @@
               <a:buNone/>
             </a:pPr>
             <a:r>
-              <a:rPr lang="en-US" sz="2100" dirty="0">
+              <a:rPr lang="en-US" sz="1920" dirty="0">
                 <a:solidFill>
                   <a:srgbClr val="003A63"/>
                 </a:solidFill>
@@ -9918,7 +9920,7 @@
               </a:rPr>
               <a:t>• Community context and action plan</a:t>
             </a:r>
-            <a:endParaRPr lang="en-US" sz="2100" dirty="0"/>
+            <a:endParaRPr lang="en-US" sz="1920" dirty="0"/>
           </a:p>
         </p:txBody>
       </p:sp>
@@ -9930,12 +9932,12 @@
         </p:nvSpPr>
         <p:spPr>
           <a:xfrm>
-            <a:off x="7635240" y="1325880"/>
-            <a:ext cx="3474720" cy="1207008"/>
+            <a:off x="7543800" y="1325880"/>
+            <a:ext cx="3611880" cy="1261872"/>
           </a:xfrm>
           <a:prstGeom prst="roundRect">
             <a:avLst>
-              <a:gd name="adj" fmla="val 9091"/>
+              <a:gd name="adj" fmla="val 8696"/>
             </a:avLst>
           </a:prstGeom>
           <a:solidFill>
@@ -9957,8 +9959,8 @@
         </p:nvSpPr>
         <p:spPr>
           <a:xfrm>
-            <a:off x="7799832" y="1472184"/>
-            <a:ext cx="3145536" cy="256032"/>
+            <a:off x="7708392" y="1453896"/>
+            <a:ext cx="3282696" cy="228600"/>
           </a:xfrm>
           <a:prstGeom prst="rect">
             <a:avLst/>
@@ -9974,7 +9976,7 @@
               <a:buNone/>
             </a:pPr>
             <a:r>
-              <a:rPr lang="en-US" sz="1300" b="1" dirty="0">
+              <a:rPr lang="en-US" sz="1220" b="1" dirty="0">
                 <a:solidFill>
                   <a:srgbClr val="0068B7"/>
                 </a:solidFill>
@@ -9984,7 +9986,7 @@
               </a:rPr>
               <a:t>Core concept</a:t>
             </a:r>
-            <a:endParaRPr lang="en-US" sz="1300" dirty="0"/>
+            <a:endParaRPr lang="en-US" sz="1220" dirty="0"/>
           </a:p>
         </p:txBody>
       </p:sp>
@@ -9996,8 +9998,8 @@
         </p:nvSpPr>
         <p:spPr>
           <a:xfrm>
-            <a:off x="7799832" y="1801368"/>
-            <a:ext cx="3145536" cy="640080"/>
+            <a:off x="7708392" y="1764792"/>
+            <a:ext cx="3282696" cy="749808"/>
           </a:xfrm>
           <a:prstGeom prst="rect">
             <a:avLst/>
@@ -10015,7 +10017,7 @@
               <a:buNone/>
             </a:pPr>
             <a:r>
-              <a:rPr lang="en-US" sz="1320" dirty="0">
+              <a:rPr lang="en-US" sz="1220" dirty="0">
                 <a:solidFill>
                   <a:srgbClr val="17364A"/>
                 </a:solidFill>
@@ -10025,7 +10027,7 @@
               </a:rPr>
               <a:t>Community context and action plan</a:t>
             </a:r>
-            <a:endParaRPr lang="en-US" sz="1320" dirty="0"/>
+            <a:endParaRPr lang="en-US" sz="1220" dirty="0"/>
           </a:p>
         </p:txBody>
       </p:sp>
@@ -10037,12 +10039,12 @@
         </p:nvSpPr>
         <p:spPr>
           <a:xfrm>
-            <a:off x="7635240" y="2670048"/>
-            <a:ext cx="3474720" cy="1377086"/>
+            <a:off x="7543800" y="2724912"/>
+            <a:ext cx="3611880" cy="1527048"/>
           </a:xfrm>
           <a:prstGeom prst="roundRect">
             <a:avLst>
-              <a:gd name="adj" fmla="val 7968"/>
+              <a:gd name="adj" fmla="val 7186"/>
             </a:avLst>
           </a:prstGeom>
           <a:solidFill>
@@ -10064,8 +10066,8 @@
         </p:nvSpPr>
         <p:spPr>
           <a:xfrm>
-            <a:off x="7799832" y="2816352"/>
-            <a:ext cx="3145536" cy="256032"/>
+            <a:off x="7708392" y="2852928"/>
+            <a:ext cx="3282696" cy="228600"/>
           </a:xfrm>
           <a:prstGeom prst="rect">
             <a:avLst/>
@@ -10081,7 +10083,7 @@
               <a:buNone/>
             </a:pPr>
             <a:r>
-              <a:rPr lang="en-US" sz="1300" b="1" dirty="0">
+              <a:rPr lang="en-US" sz="1220" b="1" dirty="0">
                 <a:solidFill>
                   <a:srgbClr val="0068B7"/>
                 </a:solidFill>
@@ -10091,7 +10093,7 @@
               </a:rPr>
               <a:t>Concept checkpoints</a:t>
             </a:r>
-            <a:endParaRPr lang="en-US" sz="1300" dirty="0"/>
+            <a:endParaRPr lang="en-US" sz="1220" dirty="0"/>
           </a:p>
         </p:txBody>
       </p:sp>
@@ -10103,8 +10105,8 @@
         </p:nvSpPr>
         <p:spPr>
           <a:xfrm>
-            <a:off x="7818120" y="3182112"/>
-            <a:ext cx="3090672" cy="718718"/>
+            <a:off x="7726680" y="3182112"/>
+            <a:ext cx="3227832" cy="960120"/>
           </a:xfrm>
           <a:prstGeom prst="rect">
             <a:avLst/>
@@ -10122,7 +10124,7 @@
               <a:buNone/>
             </a:pPr>
             <a:r>
-              <a:rPr lang="en-US" sz="1220" dirty="0">
+              <a:rPr lang="en-US" sz="1140" dirty="0">
                 <a:solidFill>
                   <a:srgbClr val="17364A"/>
                 </a:solidFill>
@@ -10132,7 +10134,7 @@
               </a:rPr>
               <a:t>Community context and action plan</a:t>
             </a:r>
-            <a:endParaRPr lang="en-US" sz="1220" dirty="0"/>
+            <a:endParaRPr lang="en-US" sz="1140" dirty="0"/>
           </a:p>
         </p:txBody>
       </p:sp>
@@ -10144,12 +10146,12 @@
         </p:nvSpPr>
         <p:spPr>
           <a:xfrm>
-            <a:off x="7635240" y="4184294"/>
-            <a:ext cx="3474720" cy="1466698"/>
+            <a:off x="7543800" y="4389120"/>
+            <a:ext cx="3611880" cy="1261872"/>
           </a:xfrm>
           <a:prstGeom prst="roundRect">
             <a:avLst>
-              <a:gd name="adj" fmla="val 7481"/>
+              <a:gd name="adj" fmla="val 8696"/>
             </a:avLst>
           </a:prstGeom>
           <a:solidFill>
@@ -10171,8 +10173,8 @@
         </p:nvSpPr>
         <p:spPr>
           <a:xfrm>
-            <a:off x="7799832" y="4330598"/>
-            <a:ext cx="3145536" cy="256032"/>
+            <a:off x="7708392" y="4517136"/>
+            <a:ext cx="3282696" cy="228600"/>
           </a:xfrm>
           <a:prstGeom prst="rect">
             <a:avLst/>
@@ -10188,7 +10190,7 @@
               <a:buNone/>
             </a:pPr>
             <a:r>
-              <a:rPr lang="en-US" sz="1300" b="1" dirty="0">
+              <a:rPr lang="en-US" sz="1220" b="1" dirty="0">
                 <a:solidFill>
                   <a:srgbClr val="0068B7"/>
                 </a:solidFill>
@@ -10198,7 +10200,7 @@
               </a:rPr>
               <a:t>Apply it</a:t>
             </a:r>
-            <a:endParaRPr lang="en-US" sz="1300" dirty="0"/>
+            <a:endParaRPr lang="en-US" sz="1220" dirty="0"/>
           </a:p>
         </p:txBody>
       </p:sp>
@@ -10210,8 +10212,8 @@
         </p:nvSpPr>
         <p:spPr>
           <a:xfrm>
-            <a:off x="7799832" y="4659782"/>
-            <a:ext cx="3145536" cy="899770"/>
+            <a:off x="7708392" y="4828032"/>
+            <a:ext cx="3282696" cy="749808"/>
           </a:xfrm>
           <a:prstGeom prst="rect">
             <a:avLst/>
@@ -10229,7 +10231,7 @@
               <a:buNone/>
             </a:pPr>
             <a:r>
-              <a:rPr lang="en-US" sz="1320" dirty="0">
+              <a:rPr lang="en-US" sz="1220" dirty="0">
                 <a:solidFill>
                   <a:srgbClr val="17364A"/>
                 </a:solidFill>
@@ -10237,9 +10239,9 @@
                 <a:ea typeface="Aptos" pitchFamily="34" charset="-122"/>
                 <a:cs typeface="Aptos" pitchFamily="34" charset="-120"/>
               </a:rPr>
-              <a:t>Connect the concept to public health purpose, responsible use, required safeguards, documentation, and the next action a department should take.</a:t>
-            </a:r>
-            <a:endParaRPr lang="en-US" sz="1320" dirty="0"/>
+              <a:t>Connect the concept to public health purpose, responsible use, required.</a:t>
+            </a:r>
+            <a:endParaRPr lang="en-US" sz="1220" dirty="0"/>
           </a:p>
         </p:txBody>
       </p:sp>
@@ -10557,7 +10559,7 @@
                 <a:ea typeface="Aptos" pitchFamily="34" charset="-122"/>
                 <a:cs typeface="Aptos" pitchFamily="34" charset="-120"/>
               </a:rPr>
-              <a:t>• Geospatial AI combines spatial data, geographic analysis, and AI methods to identify patterns.</a:t>
+              <a:t>• Geospatial AI combines spatial data, geographic analysis, and AI methods to.</a:t>
             </a:r>
             <a:endParaRPr lang="en-US" sz="2100" dirty="0"/>
           </a:p>
@@ -10574,7 +10576,7 @@
                 <a:ea typeface="Aptos" pitchFamily="34" charset="-122"/>
                 <a:cs typeface="Aptos" pitchFamily="34" charset="-120"/>
               </a:rPr>
-              <a:t>• In public health, spatial analysis is already central to outbreak response, environmental.</a:t>
+              <a:t>• In public health, spatial analysis is already central to outbreak response,.</a:t>
             </a:r>
             <a:endParaRPr lang="en-US" sz="2100" dirty="0"/>
           </a:p>
@@ -10591,7 +10593,7 @@
                 <a:ea typeface="Aptos" pitchFamily="34" charset="-122"/>
                 <a:cs typeface="Aptos" pitchFamily="34" charset="-120"/>
               </a:rPr>
-              <a:t>• AI can strengthen these activities when it helps detect clusters, estimate access barriers,.</a:t>
+              <a:t>• AI can strengthen these activities when it helps detect clusters, estimate.</a:t>
             </a:r>
             <a:endParaRPr lang="en-US" sz="2100" dirty="0"/>
           </a:p>
@@ -10632,8 +10634,8 @@
         </p:nvSpPr>
         <p:spPr>
           <a:xfrm>
-            <a:off x="8074152" y="1563624"/>
-            <a:ext cx="2825496" cy="256032"/>
+            <a:off x="8074152" y="1545336"/>
+            <a:ext cx="2825496" cy="228600"/>
           </a:xfrm>
           <a:prstGeom prst="rect">
             <a:avLst/>
@@ -10649,7 +10651,7 @@
               <a:buNone/>
             </a:pPr>
             <a:r>
-              <a:rPr lang="en-US" sz="1300" b="1" dirty="0">
+              <a:rPr lang="en-US" sz="1220" b="1" dirty="0">
                 <a:solidFill>
                   <a:srgbClr val="0068B7"/>
                 </a:solidFill>
@@ -10659,7 +10661,7 @@
               </a:rPr>
               <a:t>Module details</a:t>
             </a:r>
-            <a:endParaRPr lang="en-US" sz="1300" dirty="0"/>
+            <a:endParaRPr lang="en-US" sz="1220" dirty="0"/>
           </a:p>
         </p:txBody>
       </p:sp>
@@ -10671,8 +10673,8 @@
         </p:nvSpPr>
         <p:spPr>
           <a:xfrm>
-            <a:off x="8074152" y="1892808"/>
-            <a:ext cx="2825496" cy="1353312"/>
+            <a:off x="8074152" y="1856232"/>
+            <a:ext cx="2825496" cy="1408176"/>
           </a:xfrm>
           <a:prstGeom prst="rect">
             <a:avLst/>
@@ -10690,7 +10692,7 @@
               <a:buNone/>
             </a:pPr>
             <a:r>
-              <a:rPr lang="en-US" sz="1320" dirty="0">
+              <a:rPr lang="en-US" sz="1220" dirty="0">
                 <a:solidFill>
                   <a:srgbClr val="17364A"/>
                 </a:solidFill>
@@ -10698,9 +10700,9 @@
                 <a:ea typeface="Aptos" pitchFamily="34" charset="-122"/>
                 <a:cs typeface="Aptos" pitchFamily="34" charset="-120"/>
               </a:rPr>
-              <a:t>Level: applied/foundational Primary track: Analytics and Modeling Track Appears in tracks: analytics-modeling</a:t>
-            </a:r>
-            <a:endParaRPr lang="en-US" sz="1320" dirty="0"/>
+              <a:t>Level: applied/foundational Primary track: Analytics and Modeling Track Appears.</a:t>
+            </a:r>
+            <a:endParaRPr lang="en-US" sz="1220" dirty="0"/>
           </a:p>
         </p:txBody>
       </p:sp>
@@ -10739,8 +10741,8 @@
         </p:nvSpPr>
         <p:spPr>
           <a:xfrm>
-            <a:off x="8074152" y="3822192"/>
-            <a:ext cx="2825496" cy="256032"/>
+            <a:off x="8074152" y="3803904"/>
+            <a:ext cx="2825496" cy="228600"/>
           </a:xfrm>
           <a:prstGeom prst="rect">
             <a:avLst/>
@@ -10756,7 +10758,7 @@
               <a:buNone/>
             </a:pPr>
             <a:r>
-              <a:rPr lang="en-US" sz="1300" b="1" dirty="0">
+              <a:rPr lang="en-US" sz="1220" b="1" dirty="0">
                 <a:solidFill>
                   <a:srgbClr val="0068B7"/>
                 </a:solidFill>
@@ -10766,7 +10768,7 @@
               </a:rPr>
               <a:t>Learning sequence</a:t>
             </a:r>
-            <a:endParaRPr lang="en-US" sz="1300" dirty="0"/>
+            <a:endParaRPr lang="en-US" sz="1220" dirty="0"/>
           </a:p>
         </p:txBody>
       </p:sp>
@@ -10778,8 +10780,8 @@
         </p:nvSpPr>
         <p:spPr>
           <a:xfrm>
-            <a:off x="8092440" y="4187952"/>
-            <a:ext cx="2770632" cy="1033272"/>
+            <a:off x="8092440" y="4133088"/>
+            <a:ext cx="2770632" cy="1124712"/>
           </a:xfrm>
           <a:prstGeom prst="rect">
             <a:avLst/>
@@ -10797,7 +10799,7 @@
               <a:buNone/>
             </a:pPr>
             <a:r>
-              <a:rPr lang="en-US" sz="1220" dirty="0">
+              <a:rPr lang="en-US" sz="1140" dirty="0">
                 <a:solidFill>
                   <a:srgbClr val="17364A"/>
                 </a:solidFill>
@@ -10807,14 +10809,14 @@
               </a:rPr>
               <a:t>Read the module for shared vocabulary and context.</a:t>
             </a:r>
-            <a:endParaRPr lang="en-US" sz="1220" dirty="0"/>
-          </a:p>
-          <a:p>
-            <a:pPr indent="0" marL="0">
-              <a:buNone/>
-            </a:pPr>
-            <a:r>
-              <a:rPr lang="en-US" sz="1220" dirty="0">
+            <a:endParaRPr lang="en-US" sz="1140" dirty="0"/>
+          </a:p>
+          <a:p>
+            <a:pPr indent="0" marL="0">
+              <a:buNone/>
+            </a:pPr>
+            <a:r>
+              <a:rPr lang="en-US" sz="1140" dirty="0">
                 <a:solidFill>
                   <a:srgbClr val="17364A"/>
                 </a:solidFill>
@@ -10822,16 +10824,16 @@
                 <a:ea typeface="Aptos" pitchFamily="34" charset="-122"/>
                 <a:cs typeface="Aptos" pitchFamily="34" charset="-120"/>
               </a:rPr>
-              <a:t>Complete the practical exercise to apply the concept.</a:t>
-            </a:r>
-            <a:endParaRPr lang="en-US" sz="1220" dirty="0"/>
-          </a:p>
-          <a:p>
-            <a:pPr indent="0" marL="0">
-              <a:buNone/>
-            </a:pPr>
-            <a:r>
-              <a:rPr lang="en-US" sz="1220" dirty="0">
+              <a:t>Complete the practical exercise to apply the.</a:t>
+            </a:r>
+            <a:endParaRPr lang="en-US" sz="1140" dirty="0"/>
+          </a:p>
+          <a:p>
+            <a:pPr indent="0" marL="0">
+              <a:buNone/>
+            </a:pPr>
+            <a:r>
+              <a:rPr lang="en-US" sz="1140" dirty="0">
                 <a:solidFill>
                   <a:srgbClr val="17364A"/>
                 </a:solidFill>
@@ -10841,7 +10843,7 @@
               </a:rPr>
               <a:t>Use the notes and references for deeper review.</a:t>
             </a:r>
-            <a:endParaRPr lang="en-US" sz="1220" dirty="0"/>
+            <a:endParaRPr lang="en-US" sz="1140" dirty="0"/>
           </a:p>
         </p:txBody>
       </p:sp>
@@ -11132,8 +11134,8 @@
         </p:nvSpPr>
         <p:spPr>
           <a:xfrm>
-            <a:off x="868680" y="1508760"/>
-            <a:ext cx="6309360" cy="4160520"/>
+            <a:off x="822960" y="1463040"/>
+            <a:ext cx="6565392" cy="4343400"/>
           </a:xfrm>
           <a:prstGeom prst="rect">
             <a:avLst/>
@@ -11151,7 +11153,7 @@
               <a:buNone/>
             </a:pPr>
             <a:r>
-              <a:rPr lang="en-US" sz="2100" dirty="0">
+              <a:rPr lang="en-US" sz="1920" dirty="0">
                 <a:solidFill>
                   <a:srgbClr val="003A63"/>
                 </a:solidFill>
@@ -11161,14 +11163,14 @@
               </a:rPr>
               <a:t>• Geospatial AI readiness worksheet</a:t>
             </a:r>
-            <a:endParaRPr lang="en-US" sz="2100" dirty="0"/>
-          </a:p>
-          <a:p>
-            <a:pPr indent="0" marL="0">
-              <a:buNone/>
-            </a:pPr>
-            <a:r>
-              <a:rPr lang="en-US" sz="2100" dirty="0">
+            <a:endParaRPr lang="en-US" sz="1920" dirty="0"/>
+          </a:p>
+          <a:p>
+            <a:pPr indent="0" marL="0">
+              <a:buNone/>
+            </a:pPr>
+            <a:r>
+              <a:rPr lang="en-US" sz="1920" dirty="0">
                 <a:solidFill>
                   <a:srgbClr val="003A63"/>
                 </a:solidFill>
@@ -11178,14 +11180,14 @@
               </a:rPr>
               <a:t>• Map interpretation and limitations memo</a:t>
             </a:r>
-            <a:endParaRPr lang="en-US" sz="2100" dirty="0"/>
-          </a:p>
-          <a:p>
-            <a:pPr indent="0" marL="0">
-              <a:buNone/>
-            </a:pPr>
-            <a:r>
-              <a:rPr lang="en-US" sz="2100" dirty="0">
+            <a:endParaRPr lang="en-US" sz="1920" dirty="0"/>
+          </a:p>
+          <a:p>
+            <a:pPr indent="0" marL="0">
+              <a:buNone/>
+            </a:pPr>
+            <a:r>
+              <a:rPr lang="en-US" sz="1920" dirty="0">
                 <a:solidFill>
                   <a:srgbClr val="003A63"/>
                 </a:solidFill>
@@ -11195,7 +11197,7 @@
               </a:rPr>
               <a:t>• Privacy and suppression review notes</a:t>
             </a:r>
-            <a:endParaRPr lang="en-US" sz="2100" dirty="0"/>
+            <a:endParaRPr lang="en-US" sz="1920" dirty="0"/>
           </a:p>
         </p:txBody>
       </p:sp>
@@ -11207,12 +11209,12 @@
         </p:nvSpPr>
         <p:spPr>
           <a:xfrm>
-            <a:off x="7635240" y="1325880"/>
-            <a:ext cx="3474720" cy="1207008"/>
+            <a:off x="7543800" y="1325880"/>
+            <a:ext cx="3611880" cy="1261872"/>
           </a:xfrm>
           <a:prstGeom prst="roundRect">
             <a:avLst>
-              <a:gd name="adj" fmla="val 9091"/>
+              <a:gd name="adj" fmla="val 8696"/>
             </a:avLst>
           </a:prstGeom>
           <a:solidFill>
@@ -11234,8 +11236,8 @@
         </p:nvSpPr>
         <p:spPr>
           <a:xfrm>
-            <a:off x="7799832" y="1472184"/>
-            <a:ext cx="3145536" cy="256032"/>
+            <a:off x="7708392" y="1453896"/>
+            <a:ext cx="3282696" cy="228600"/>
           </a:xfrm>
           <a:prstGeom prst="rect">
             <a:avLst/>
@@ -11251,7 +11253,7 @@
               <a:buNone/>
             </a:pPr>
             <a:r>
-              <a:rPr lang="en-US" sz="1300" b="1" dirty="0">
+              <a:rPr lang="en-US" sz="1220" b="1" dirty="0">
                 <a:solidFill>
                   <a:srgbClr val="0068B7"/>
                 </a:solidFill>
@@ -11261,7 +11263,7 @@
               </a:rPr>
               <a:t>Practice focus</a:t>
             </a:r>
-            <a:endParaRPr lang="en-US" sz="1300" dirty="0"/>
+            <a:endParaRPr lang="en-US" sz="1220" dirty="0"/>
           </a:p>
         </p:txBody>
       </p:sp>
@@ -11273,8 +11275,8 @@
         </p:nvSpPr>
         <p:spPr>
           <a:xfrm>
-            <a:off x="7799832" y="1801368"/>
-            <a:ext cx="3145536" cy="640080"/>
+            <a:off x="7708392" y="1764792"/>
+            <a:ext cx="3282696" cy="749808"/>
           </a:xfrm>
           <a:prstGeom prst="rect">
             <a:avLst/>
@@ -11292,7 +11294,7 @@
               <a:buNone/>
             </a:pPr>
             <a:r>
-              <a:rPr lang="en-US" sz="1320" dirty="0">
+              <a:rPr lang="en-US" sz="1220" dirty="0">
                 <a:solidFill>
                   <a:srgbClr val="17364A"/>
                 </a:solidFill>
@@ -11302,7 +11304,7 @@
               </a:rPr>
               <a:t>Geospatial AI readiness worksheet</a:t>
             </a:r>
-            <a:endParaRPr lang="en-US" sz="1320" dirty="0"/>
+            <a:endParaRPr lang="en-US" sz="1220" dirty="0"/>
           </a:p>
         </p:txBody>
       </p:sp>
@@ -11314,12 +11316,12 @@
         </p:nvSpPr>
         <p:spPr>
           <a:xfrm>
-            <a:off x="7635240" y="2670048"/>
-            <a:ext cx="3474720" cy="1377086"/>
+            <a:off x="7543800" y="2724912"/>
+            <a:ext cx="3611880" cy="1527048"/>
           </a:xfrm>
           <a:prstGeom prst="roundRect">
             <a:avLst>
-              <a:gd name="adj" fmla="val 7968"/>
+              <a:gd name="adj" fmla="val 7186"/>
             </a:avLst>
           </a:prstGeom>
           <a:solidFill>
@@ -11341,8 +11343,8 @@
         </p:nvSpPr>
         <p:spPr>
           <a:xfrm>
-            <a:off x="7799832" y="2816352"/>
-            <a:ext cx="3145536" cy="256032"/>
+            <a:off x="7708392" y="2852928"/>
+            <a:ext cx="3282696" cy="228600"/>
           </a:xfrm>
           <a:prstGeom prst="rect">
             <a:avLst/>
@@ -11358,7 +11360,7 @@
               <a:buNone/>
             </a:pPr>
             <a:r>
-              <a:rPr lang="en-US" sz="1300" b="1" dirty="0">
+              <a:rPr lang="en-US" sz="1220" b="1" dirty="0">
                 <a:solidFill>
                   <a:srgbClr val="0068B7"/>
                 </a:solidFill>
@@ -11368,7 +11370,7 @@
               </a:rPr>
               <a:t>Concept checkpoints</a:t>
             </a:r>
-            <a:endParaRPr lang="en-US" sz="1300" dirty="0"/>
+            <a:endParaRPr lang="en-US" sz="1220" dirty="0"/>
           </a:p>
         </p:txBody>
       </p:sp>
@@ -11380,8 +11382,8 @@
         </p:nvSpPr>
         <p:spPr>
           <a:xfrm>
-            <a:off x="7818120" y="3182112"/>
-            <a:ext cx="3090672" cy="718718"/>
+            <a:off x="7726680" y="3182112"/>
+            <a:ext cx="3227832" cy="960120"/>
           </a:xfrm>
           <a:prstGeom prst="rect">
             <a:avLst/>
@@ -11399,7 +11401,7 @@
               <a:buNone/>
             </a:pPr>
             <a:r>
-              <a:rPr lang="en-US" sz="1220" dirty="0">
+              <a:rPr lang="en-US" sz="1140" dirty="0">
                 <a:solidFill>
                   <a:srgbClr val="17364A"/>
                 </a:solidFill>
@@ -11409,14 +11411,14 @@
               </a:rPr>
               <a:t>Geospatial AI readiness worksheet</a:t>
             </a:r>
-            <a:endParaRPr lang="en-US" sz="1220" dirty="0"/>
-          </a:p>
-          <a:p>
-            <a:pPr indent="0" marL="0">
-              <a:buNone/>
-            </a:pPr>
-            <a:r>
-              <a:rPr lang="en-US" sz="1220" dirty="0">
+            <a:endParaRPr lang="en-US" sz="1140" dirty="0"/>
+          </a:p>
+          <a:p>
+            <a:pPr indent="0" marL="0">
+              <a:buNone/>
+            </a:pPr>
+            <a:r>
+              <a:rPr lang="en-US" sz="1140" dirty="0">
                 <a:solidFill>
                   <a:srgbClr val="17364A"/>
                 </a:solidFill>
@@ -11426,14 +11428,14 @@
               </a:rPr>
               <a:t>Map interpretation and limitations memo</a:t>
             </a:r>
-            <a:endParaRPr lang="en-US" sz="1220" dirty="0"/>
-          </a:p>
-          <a:p>
-            <a:pPr indent="0" marL="0">
-              <a:buNone/>
-            </a:pPr>
-            <a:r>
-              <a:rPr lang="en-US" sz="1220" dirty="0">
+            <a:endParaRPr lang="en-US" sz="1140" dirty="0"/>
+          </a:p>
+          <a:p>
+            <a:pPr indent="0" marL="0">
+              <a:buNone/>
+            </a:pPr>
+            <a:r>
+              <a:rPr lang="en-US" sz="1140" dirty="0">
                 <a:solidFill>
                   <a:srgbClr val="17364A"/>
                 </a:solidFill>
@@ -11443,7 +11445,7 @@
               </a:rPr>
               <a:t>Privacy and suppression review notes</a:t>
             </a:r>
-            <a:endParaRPr lang="en-US" sz="1220" dirty="0"/>
+            <a:endParaRPr lang="en-US" sz="1140" dirty="0"/>
           </a:p>
         </p:txBody>
       </p:sp>
@@ -11455,12 +11457,12 @@
         </p:nvSpPr>
         <p:spPr>
           <a:xfrm>
-            <a:off x="7635240" y="4184294"/>
-            <a:ext cx="3474720" cy="1466698"/>
+            <a:off x="7543800" y="4389120"/>
+            <a:ext cx="3611880" cy="1261872"/>
           </a:xfrm>
           <a:prstGeom prst="roundRect">
             <a:avLst>
-              <a:gd name="adj" fmla="val 7481"/>
+              <a:gd name="adj" fmla="val 8696"/>
             </a:avLst>
           </a:prstGeom>
           <a:solidFill>
@@ -11482,8 +11484,8 @@
         </p:nvSpPr>
         <p:spPr>
           <a:xfrm>
-            <a:off x="7799832" y="4330598"/>
-            <a:ext cx="3145536" cy="256032"/>
+            <a:off x="7708392" y="4517136"/>
+            <a:ext cx="3282696" cy="228600"/>
           </a:xfrm>
           <a:prstGeom prst="rect">
             <a:avLst/>
@@ -11499,7 +11501,7 @@
               <a:buNone/>
             </a:pPr>
             <a:r>
-              <a:rPr lang="en-US" sz="1300" b="1" dirty="0">
+              <a:rPr lang="en-US" sz="1220" b="1" dirty="0">
                 <a:solidFill>
                   <a:srgbClr val="0068B7"/>
                 </a:solidFill>
@@ -11509,7 +11511,7 @@
               </a:rPr>
               <a:t>What to produce</a:t>
             </a:r>
-            <a:endParaRPr lang="en-US" sz="1300" dirty="0"/>
+            <a:endParaRPr lang="en-US" sz="1220" dirty="0"/>
           </a:p>
         </p:txBody>
       </p:sp>
@@ -11521,8 +11523,8 @@
         </p:nvSpPr>
         <p:spPr>
           <a:xfrm>
-            <a:off x="7799832" y="4659782"/>
-            <a:ext cx="3145536" cy="899770"/>
+            <a:off x="7708392" y="4828032"/>
+            <a:ext cx="3282696" cy="749808"/>
           </a:xfrm>
           <a:prstGeom prst="rect">
             <a:avLst/>
@@ -11540,7 +11542,7 @@
               <a:buNone/>
             </a:pPr>
             <a:r>
-              <a:rPr lang="en-US" sz="1320" dirty="0">
+              <a:rPr lang="en-US" sz="1220" dirty="0">
                 <a:solidFill>
                   <a:srgbClr val="17364A"/>
                 </a:solidFill>
@@ -11548,9 +11550,9 @@
                 <a:ea typeface="Aptos" pitchFamily="34" charset="-122"/>
                 <a:cs typeface="Aptos" pitchFamily="34" charset="-120"/>
               </a:rPr>
-              <a:t>Use the assignment to test whether you can explain the concept, apply it to a realistic public health situation, and identify what would need review before the work moves forward.</a:t>
-            </a:r>
-            <a:endParaRPr lang="en-US" sz="1320" dirty="0"/>
+              <a:t>Use the assignment to test whether you can explain the concept, apply it to a.</a:t>
+            </a:r>
+            <a:endParaRPr lang="en-US" sz="1220" dirty="0"/>
           </a:p>
         </p:txBody>
       </p:sp>
@@ -11841,8 +11843,8 @@
         </p:nvSpPr>
         <p:spPr>
           <a:xfrm>
-            <a:off x="868680" y="1508760"/>
-            <a:ext cx="6309360" cy="4160520"/>
+            <a:off x="822960" y="1463040"/>
+            <a:ext cx="6565392" cy="4343400"/>
           </a:xfrm>
           <a:prstGeom prst="rect">
             <a:avLst/>
@@ -11860,7 +11862,7 @@
               <a:buNone/>
             </a:pPr>
             <a:r>
-              <a:rPr lang="en-US" sz="2100" dirty="0">
+              <a:rPr lang="en-US" sz="1920" dirty="0">
                 <a:solidFill>
                   <a:srgbClr val="003A63"/>
                 </a:solidFill>
@@ -11870,14 +11872,14 @@
               </a:rPr>
               <a:t>• 1. What is geocoding?</a:t>
             </a:r>
-            <a:endParaRPr lang="en-US" sz="2100" dirty="0"/>
-          </a:p>
-          <a:p>
-            <a:pPr indent="0" marL="0">
-              <a:buNone/>
-            </a:pPr>
-            <a:r>
-              <a:rPr lang="en-US" sz="2100" dirty="0">
+            <a:endParaRPr lang="en-US" sz="1920" dirty="0"/>
+          </a:p>
+          <a:p>
+            <a:pPr indent="0" marL="0">
+              <a:buNone/>
+            </a:pPr>
+            <a:r>
+              <a:rPr lang="en-US" sz="1920" dirty="0">
                 <a:solidFill>
                   <a:srgbClr val="003A63"/>
                 </a:solidFill>
@@ -11887,14 +11889,14 @@
               </a:rPr>
               <a:t>• 2. Why can maps create misleading impressions?</a:t>
             </a:r>
-            <a:endParaRPr lang="en-US" sz="2100" dirty="0"/>
-          </a:p>
-          <a:p>
-            <a:pPr indent="0" marL="0">
-              <a:buNone/>
-            </a:pPr>
-            <a:r>
-              <a:rPr lang="en-US" sz="2100" dirty="0">
+            <a:endParaRPr lang="en-US" sz="1920" dirty="0"/>
+          </a:p>
+          <a:p>
+            <a:pPr indent="0" marL="0">
+              <a:buNone/>
+            </a:pPr>
+            <a:r>
+              <a:rPr lang="en-US" sz="1920" dirty="0">
                 <a:solidFill>
                   <a:srgbClr val="003A63"/>
                 </a:solidFill>
@@ -11904,7 +11906,7 @@
               </a:rPr>
               <a:t>• 3. What is the modifiable areal unit problem?</a:t>
             </a:r>
-            <a:endParaRPr lang="en-US" sz="2100" dirty="0"/>
+            <a:endParaRPr lang="en-US" sz="1920" dirty="0"/>
           </a:p>
         </p:txBody>
       </p:sp>
@@ -11916,12 +11918,12 @@
         </p:nvSpPr>
         <p:spPr>
           <a:xfrm>
-            <a:off x="7635240" y="1325880"/>
-            <a:ext cx="3474720" cy="1207008"/>
+            <a:off x="7543800" y="1325880"/>
+            <a:ext cx="3611880" cy="1261872"/>
           </a:xfrm>
           <a:prstGeom prst="roundRect">
             <a:avLst>
-              <a:gd name="adj" fmla="val 9091"/>
+              <a:gd name="adj" fmla="val 8696"/>
             </a:avLst>
           </a:prstGeom>
           <a:solidFill>
@@ -11943,8 +11945,8 @@
         </p:nvSpPr>
         <p:spPr>
           <a:xfrm>
-            <a:off x="7799832" y="1472184"/>
-            <a:ext cx="3145536" cy="256032"/>
+            <a:off x="7708392" y="1453896"/>
+            <a:ext cx="3282696" cy="228600"/>
           </a:xfrm>
           <a:prstGeom prst="rect">
             <a:avLst/>
@@ -11960,7 +11962,7 @@
               <a:buNone/>
             </a:pPr>
             <a:r>
-              <a:rPr lang="en-US" sz="1300" b="1" dirty="0">
+              <a:rPr lang="en-US" sz="1220" b="1" dirty="0">
                 <a:solidFill>
                   <a:srgbClr val="0068B7"/>
                 </a:solidFill>
@@ -11970,7 +11972,7 @@
               </a:rPr>
               <a:t>Practice focus</a:t>
             </a:r>
-            <a:endParaRPr lang="en-US" sz="1300" dirty="0"/>
+            <a:endParaRPr lang="en-US" sz="1220" dirty="0"/>
           </a:p>
         </p:txBody>
       </p:sp>
@@ -11982,8 +11984,8 @@
         </p:nvSpPr>
         <p:spPr>
           <a:xfrm>
-            <a:off x="7799832" y="1801368"/>
-            <a:ext cx="3145536" cy="640080"/>
+            <a:off x="7708392" y="1764792"/>
+            <a:ext cx="3282696" cy="749808"/>
           </a:xfrm>
           <a:prstGeom prst="rect">
             <a:avLst/>
@@ -12001,7 +12003,7 @@
               <a:buNone/>
             </a:pPr>
             <a:r>
-              <a:rPr lang="en-US" sz="1320" dirty="0">
+              <a:rPr lang="en-US" sz="1220" dirty="0">
                 <a:solidFill>
                   <a:srgbClr val="17364A"/>
                 </a:solidFill>
@@ -12011,7 +12013,7 @@
               </a:rPr>
               <a:t>1. What is geocoding?</a:t>
             </a:r>
-            <a:endParaRPr lang="en-US" sz="1320" dirty="0"/>
+            <a:endParaRPr lang="en-US" sz="1220" dirty="0"/>
           </a:p>
         </p:txBody>
       </p:sp>
@@ -12023,12 +12025,12 @@
         </p:nvSpPr>
         <p:spPr>
           <a:xfrm>
-            <a:off x="7635240" y="2670048"/>
-            <a:ext cx="3474720" cy="1377086"/>
+            <a:off x="7543800" y="2724912"/>
+            <a:ext cx="3611880" cy="1527048"/>
           </a:xfrm>
           <a:prstGeom prst="roundRect">
             <a:avLst>
-              <a:gd name="adj" fmla="val 7968"/>
+              <a:gd name="adj" fmla="val 7186"/>
             </a:avLst>
           </a:prstGeom>
           <a:solidFill>
@@ -12050,8 +12052,8 @@
         </p:nvSpPr>
         <p:spPr>
           <a:xfrm>
-            <a:off x="7799832" y="2816352"/>
-            <a:ext cx="3145536" cy="256032"/>
+            <a:off x="7708392" y="2852928"/>
+            <a:ext cx="3282696" cy="228600"/>
           </a:xfrm>
           <a:prstGeom prst="rect">
             <a:avLst/>
@@ -12067,7 +12069,7 @@
               <a:buNone/>
             </a:pPr>
             <a:r>
-              <a:rPr lang="en-US" sz="1300" b="1" dirty="0">
+              <a:rPr lang="en-US" sz="1220" b="1" dirty="0">
                 <a:solidFill>
                   <a:srgbClr val="0068B7"/>
                 </a:solidFill>
@@ -12077,7 +12079,7 @@
               </a:rPr>
               <a:t>Concept checkpoints</a:t>
             </a:r>
-            <a:endParaRPr lang="en-US" sz="1300" dirty="0"/>
+            <a:endParaRPr lang="en-US" sz="1220" dirty="0"/>
           </a:p>
         </p:txBody>
       </p:sp>
@@ -12089,8 +12091,8 @@
         </p:nvSpPr>
         <p:spPr>
           <a:xfrm>
-            <a:off x="7818120" y="3182112"/>
-            <a:ext cx="3090672" cy="718718"/>
+            <a:off x="7726680" y="3182112"/>
+            <a:ext cx="3227832" cy="960120"/>
           </a:xfrm>
           <a:prstGeom prst="rect">
             <a:avLst/>
@@ -12108,7 +12110,7 @@
               <a:buNone/>
             </a:pPr>
             <a:r>
-              <a:rPr lang="en-US" sz="1220" dirty="0">
+              <a:rPr lang="en-US" sz="1140" dirty="0">
                 <a:solidFill>
                   <a:srgbClr val="17364A"/>
                 </a:solidFill>
@@ -12118,14 +12120,14 @@
               </a:rPr>
               <a:t>1.</a:t>
             </a:r>
-            <a:endParaRPr lang="en-US" sz="1220" dirty="0"/>
-          </a:p>
-          <a:p>
-            <a:pPr indent="0" marL="0">
-              <a:buNone/>
-            </a:pPr>
-            <a:r>
-              <a:rPr lang="en-US" sz="1220" dirty="0">
+            <a:endParaRPr lang="en-US" sz="1140" dirty="0"/>
+          </a:p>
+          <a:p>
+            <a:pPr indent="0" marL="0">
+              <a:buNone/>
+            </a:pPr>
+            <a:r>
+              <a:rPr lang="en-US" sz="1140" dirty="0">
                 <a:solidFill>
                   <a:srgbClr val="17364A"/>
                 </a:solidFill>
@@ -12135,14 +12137,14 @@
               </a:rPr>
               <a:t>What is geocoding?</a:t>
             </a:r>
-            <a:endParaRPr lang="en-US" sz="1220" dirty="0"/>
-          </a:p>
-          <a:p>
-            <a:pPr indent="0" marL="0">
-              <a:buNone/>
-            </a:pPr>
-            <a:r>
-              <a:rPr lang="en-US" sz="1220" dirty="0">
+            <a:endParaRPr lang="en-US" sz="1140" dirty="0"/>
+          </a:p>
+          <a:p>
+            <a:pPr indent="0" marL="0">
+              <a:buNone/>
+            </a:pPr>
+            <a:r>
+              <a:rPr lang="en-US" sz="1140" dirty="0">
                 <a:solidFill>
                   <a:srgbClr val="17364A"/>
                 </a:solidFill>
@@ -12152,7 +12154,7 @@
               </a:rPr>
               <a:t>2.</a:t>
             </a:r>
-            <a:endParaRPr lang="en-US" sz="1220" dirty="0"/>
+            <a:endParaRPr lang="en-US" sz="1140" dirty="0"/>
           </a:p>
         </p:txBody>
       </p:sp>
@@ -12164,12 +12166,12 @@
         </p:nvSpPr>
         <p:spPr>
           <a:xfrm>
-            <a:off x="7635240" y="4184294"/>
-            <a:ext cx="3474720" cy="1466698"/>
+            <a:off x="7543800" y="4389120"/>
+            <a:ext cx="3611880" cy="1261872"/>
           </a:xfrm>
           <a:prstGeom prst="roundRect">
             <a:avLst>
-              <a:gd name="adj" fmla="val 7481"/>
+              <a:gd name="adj" fmla="val 8696"/>
             </a:avLst>
           </a:prstGeom>
           <a:solidFill>
@@ -12191,8 +12193,8 @@
         </p:nvSpPr>
         <p:spPr>
           <a:xfrm>
-            <a:off x="7799832" y="4330598"/>
-            <a:ext cx="3145536" cy="256032"/>
+            <a:off x="7708392" y="4517136"/>
+            <a:ext cx="3282696" cy="228600"/>
           </a:xfrm>
           <a:prstGeom prst="rect">
             <a:avLst/>
@@ -12208,7 +12210,7 @@
               <a:buNone/>
             </a:pPr>
             <a:r>
-              <a:rPr lang="en-US" sz="1300" b="1" dirty="0">
+              <a:rPr lang="en-US" sz="1220" b="1" dirty="0">
                 <a:solidFill>
                   <a:srgbClr val="0068B7"/>
                 </a:solidFill>
@@ -12218,7 +12220,7 @@
               </a:rPr>
               <a:t>What to produce</a:t>
             </a:r>
-            <a:endParaRPr lang="en-US" sz="1300" dirty="0"/>
+            <a:endParaRPr lang="en-US" sz="1220" dirty="0"/>
           </a:p>
         </p:txBody>
       </p:sp>
@@ -12230,8 +12232,8 @@
         </p:nvSpPr>
         <p:spPr>
           <a:xfrm>
-            <a:off x="7799832" y="4659782"/>
-            <a:ext cx="3145536" cy="899770"/>
+            <a:off x="7708392" y="4828032"/>
+            <a:ext cx="3282696" cy="749808"/>
           </a:xfrm>
           <a:prstGeom prst="rect">
             <a:avLst/>
@@ -12249,7 +12251,7 @@
               <a:buNone/>
             </a:pPr>
             <a:r>
-              <a:rPr lang="en-US" sz="1320" dirty="0">
+              <a:rPr lang="en-US" sz="1220" dirty="0">
                 <a:solidFill>
                   <a:srgbClr val="17364A"/>
                 </a:solidFill>
@@ -12257,9 +12259,9 @@
                 <a:ea typeface="Aptos" pitchFamily="34" charset="-122"/>
                 <a:cs typeface="Aptos" pitchFamily="34" charset="-120"/>
               </a:rPr>
-              <a:t>Use the assignment to test whether you can explain the concept, apply it to a realistic public health situation, and identify what would need review before the work moves forward.</a:t>
-            </a:r>
-            <a:endParaRPr lang="en-US" sz="1320" dirty="0"/>
+              <a:t>Use the assignment to test whether you can explain the concept, apply it to a.</a:t>
+            </a:r>
+            <a:endParaRPr lang="en-US" sz="1220" dirty="0"/>
           </a:p>
         </p:txBody>
       </p:sp>
@@ -12550,8 +12552,8 @@
         </p:nvSpPr>
         <p:spPr>
           <a:xfrm>
-            <a:off x="868680" y="1508760"/>
-            <a:ext cx="6309360" cy="4160520"/>
+            <a:off x="822960" y="1463040"/>
+            <a:ext cx="6565392" cy="4343400"/>
           </a:xfrm>
           <a:prstGeom prst="rect">
             <a:avLst/>
@@ -12569,7 +12571,7 @@
               <a:buNone/>
             </a:pPr>
             <a:r>
-              <a:rPr lang="en-US" sz="2100" dirty="0">
+              <a:rPr lang="en-US" sz="1920" dirty="0">
                 <a:solidFill>
                   <a:srgbClr val="003A63"/>
                 </a:solidFill>
@@ -12579,14 +12581,14 @@
               </a:rPr>
               <a:t>• CDC GIS and Public Health Resources: https://www.cdc.gov/gis/</a:t>
             </a:r>
-            <a:endParaRPr lang="en-US" sz="2100" dirty="0"/>
-          </a:p>
-          <a:p>
-            <a:pPr indent="0" marL="0">
-              <a:buNone/>
-            </a:pPr>
-            <a:r>
-              <a:rPr lang="en-US" sz="2100" dirty="0">
+            <a:endParaRPr lang="en-US" sz="1920" dirty="0"/>
+          </a:p>
+          <a:p>
+            <a:pPr indent="0" marL="0">
+              <a:buNone/>
+            </a:pPr>
+            <a:r>
+              <a:rPr lang="en-US" sz="1920" dirty="0">
                 <a:solidFill>
                   <a:srgbClr val="003A63"/>
                 </a:solidFill>
@@ -12596,14 +12598,14 @@
               </a:rPr>
               <a:t>• NIST Artificial Intelligence Risk Management Framework:.</a:t>
             </a:r>
-            <a:endParaRPr lang="en-US" sz="2100" dirty="0"/>
-          </a:p>
-          <a:p>
-            <a:pPr indent="0" marL="0">
-              <a:buNone/>
-            </a:pPr>
-            <a:r>
-              <a:rPr lang="en-US" sz="2100" dirty="0">
+            <a:endParaRPr lang="en-US" sz="1920" dirty="0"/>
+          </a:p>
+          <a:p>
+            <a:pPr indent="0" marL="0">
+              <a:buNone/>
+            </a:pPr>
+            <a:r>
+              <a:rPr lang="en-US" sz="1920" dirty="0">
                 <a:solidFill>
                   <a:srgbClr val="003A63"/>
                 </a:solidFill>
@@ -12613,7 +12615,7 @@
               </a:rPr>
               <a:t>• NIST Privacy Framework: https://www.nist.gov/privacy-framework</a:t>
             </a:r>
-            <a:endParaRPr lang="en-US" sz="2100" dirty="0"/>
+            <a:endParaRPr lang="en-US" sz="1920" dirty="0"/>
           </a:p>
         </p:txBody>
       </p:sp>
@@ -12625,12 +12627,12 @@
         </p:nvSpPr>
         <p:spPr>
           <a:xfrm>
-            <a:off x="7635240" y="1325880"/>
-            <a:ext cx="3474720" cy="1207008"/>
+            <a:off x="7543800" y="1325880"/>
+            <a:ext cx="3611880" cy="1261872"/>
           </a:xfrm>
           <a:prstGeom prst="roundRect">
             <a:avLst>
-              <a:gd name="adj" fmla="val 9091"/>
+              <a:gd name="adj" fmla="val 8696"/>
             </a:avLst>
           </a:prstGeom>
           <a:solidFill>
@@ -12652,8 +12654,8 @@
         </p:nvSpPr>
         <p:spPr>
           <a:xfrm>
-            <a:off x="7799832" y="1472184"/>
-            <a:ext cx="3145536" cy="256032"/>
+            <a:off x="7708392" y="1453896"/>
+            <a:ext cx="3282696" cy="228600"/>
           </a:xfrm>
           <a:prstGeom prst="rect">
             <a:avLst/>
@@ -12669,7 +12671,7 @@
               <a:buNone/>
             </a:pPr>
             <a:r>
-              <a:rPr lang="en-US" sz="1300" b="1" dirty="0">
+              <a:rPr lang="en-US" sz="1220" b="1" dirty="0">
                 <a:solidFill>
                   <a:srgbClr val="0068B7"/>
                 </a:solidFill>
@@ -12679,7 +12681,7 @@
               </a:rPr>
               <a:t>Core concept</a:t>
             </a:r>
-            <a:endParaRPr lang="en-US" sz="1300" dirty="0"/>
+            <a:endParaRPr lang="en-US" sz="1220" dirty="0"/>
           </a:p>
         </p:txBody>
       </p:sp>
@@ -12691,8 +12693,8 @@
         </p:nvSpPr>
         <p:spPr>
           <a:xfrm>
-            <a:off x="7799832" y="1801368"/>
-            <a:ext cx="3145536" cy="640080"/>
+            <a:off x="7708392" y="1764792"/>
+            <a:ext cx="3282696" cy="749808"/>
           </a:xfrm>
           <a:prstGeom prst="rect">
             <a:avLst/>
@@ -12710,7 +12712,7 @@
               <a:buNone/>
             </a:pPr>
             <a:r>
-              <a:rPr lang="en-US" sz="1320" dirty="0">
+              <a:rPr lang="en-US" sz="1220" dirty="0">
                 <a:solidFill>
                   <a:srgbClr val="17364A"/>
                 </a:solidFill>
@@ -12720,7 +12722,7 @@
               </a:rPr>
               <a:t>CDC GIS and Public Health Resources: https://www.cdc.gov/gis/</a:t>
             </a:r>
-            <a:endParaRPr lang="en-US" sz="1320" dirty="0"/>
+            <a:endParaRPr lang="en-US" sz="1220" dirty="0"/>
           </a:p>
         </p:txBody>
       </p:sp>
@@ -12732,12 +12734,12 @@
         </p:nvSpPr>
         <p:spPr>
           <a:xfrm>
-            <a:off x="7635240" y="2670048"/>
-            <a:ext cx="3474720" cy="1377086"/>
+            <a:off x="7543800" y="2724912"/>
+            <a:ext cx="3611880" cy="1527048"/>
           </a:xfrm>
           <a:prstGeom prst="roundRect">
             <a:avLst>
-              <a:gd name="adj" fmla="val 7968"/>
+              <a:gd name="adj" fmla="val 7186"/>
             </a:avLst>
           </a:prstGeom>
           <a:solidFill>
@@ -12759,8 +12761,8 @@
         </p:nvSpPr>
         <p:spPr>
           <a:xfrm>
-            <a:off x="7799832" y="2816352"/>
-            <a:ext cx="3145536" cy="256032"/>
+            <a:off x="7708392" y="2852928"/>
+            <a:ext cx="3282696" cy="228600"/>
           </a:xfrm>
           <a:prstGeom prst="rect">
             <a:avLst/>
@@ -12776,7 +12778,7 @@
               <a:buNone/>
             </a:pPr>
             <a:r>
-              <a:rPr lang="en-US" sz="1300" b="1" dirty="0">
+              <a:rPr lang="en-US" sz="1220" b="1" dirty="0">
                 <a:solidFill>
                   <a:srgbClr val="0068B7"/>
                 </a:solidFill>
@@ -12786,7 +12788,7 @@
               </a:rPr>
               <a:t>Concept checkpoints</a:t>
             </a:r>
-            <a:endParaRPr lang="en-US" sz="1300" dirty="0"/>
+            <a:endParaRPr lang="en-US" sz="1220" dirty="0"/>
           </a:p>
         </p:txBody>
       </p:sp>
@@ -12798,8 +12800,8 @@
         </p:nvSpPr>
         <p:spPr>
           <a:xfrm>
-            <a:off x="7818120" y="3182112"/>
-            <a:ext cx="3090672" cy="718718"/>
+            <a:off x="7726680" y="3182112"/>
+            <a:ext cx="3227832" cy="960120"/>
           </a:xfrm>
           <a:prstGeom prst="rect">
             <a:avLst/>
@@ -12817,7 +12819,7 @@
               <a:buNone/>
             </a:pPr>
             <a:r>
-              <a:rPr lang="en-US" sz="1220" dirty="0">
+              <a:rPr lang="en-US" sz="1140" dirty="0">
                 <a:solidFill>
                   <a:srgbClr val="17364A"/>
                 </a:solidFill>
@@ -12825,16 +12827,16 @@
                 <a:ea typeface="Aptos" pitchFamily="34" charset="-122"/>
                 <a:cs typeface="Aptos" pitchFamily="34" charset="-120"/>
               </a:rPr>
-              <a:t>NIST Artificial Intelligence Risk Management Framework:.</a:t>
-            </a:r>
-            <a:endParaRPr lang="en-US" sz="1220" dirty="0"/>
-          </a:p>
-          <a:p>
-            <a:pPr indent="0" marL="0">
-              <a:buNone/>
-            </a:pPr>
-            <a:r>
-              <a:rPr lang="en-US" sz="1220" dirty="0">
+              <a:t>NIST Artificial Intelligence Risk Management.</a:t>
+            </a:r>
+            <a:endParaRPr lang="en-US" sz="1140" dirty="0"/>
+          </a:p>
+          <a:p>
+            <a:pPr indent="0" marL="0">
+              <a:buNone/>
+            </a:pPr>
+            <a:r>
+              <a:rPr lang="en-US" sz="1140" dirty="0">
                 <a:solidFill>
                   <a:srgbClr val="17364A"/>
                 </a:solidFill>
@@ -12844,7 +12846,7 @@
               </a:rPr>
               <a:t>CDC Public Health Data Strategy:.</a:t>
             </a:r>
-            <a:endParaRPr lang="en-US" sz="1220" dirty="0"/>
+            <a:endParaRPr lang="en-US" sz="1140" dirty="0"/>
           </a:p>
         </p:txBody>
       </p:sp>
@@ -12856,12 +12858,12 @@
         </p:nvSpPr>
         <p:spPr>
           <a:xfrm>
-            <a:off x="7635240" y="4184294"/>
-            <a:ext cx="3474720" cy="1466698"/>
+            <a:off x="7543800" y="4389120"/>
+            <a:ext cx="3611880" cy="1261872"/>
           </a:xfrm>
           <a:prstGeom prst="roundRect">
             <a:avLst>
-              <a:gd name="adj" fmla="val 7481"/>
+              <a:gd name="adj" fmla="val 8696"/>
             </a:avLst>
           </a:prstGeom>
           <a:solidFill>
@@ -12883,8 +12885,8 @@
         </p:nvSpPr>
         <p:spPr>
           <a:xfrm>
-            <a:off x="7799832" y="4330598"/>
-            <a:ext cx="3145536" cy="256032"/>
+            <a:off x="7708392" y="4517136"/>
+            <a:ext cx="3282696" cy="228600"/>
           </a:xfrm>
           <a:prstGeom prst="rect">
             <a:avLst/>
@@ -12900,7 +12902,7 @@
               <a:buNone/>
             </a:pPr>
             <a:r>
-              <a:rPr lang="en-US" sz="1300" b="1" dirty="0">
+              <a:rPr lang="en-US" sz="1220" b="1" dirty="0">
                 <a:solidFill>
                   <a:srgbClr val="0068B7"/>
                 </a:solidFill>
@@ -12910,7 +12912,7 @@
               </a:rPr>
               <a:t>Apply it</a:t>
             </a:r>
-            <a:endParaRPr lang="en-US" sz="1300" dirty="0"/>
+            <a:endParaRPr lang="en-US" sz="1220" dirty="0"/>
           </a:p>
         </p:txBody>
       </p:sp>
@@ -12922,8 +12924,8 @@
         </p:nvSpPr>
         <p:spPr>
           <a:xfrm>
-            <a:off x="7799832" y="4659782"/>
-            <a:ext cx="3145536" cy="899770"/>
+            <a:off x="7708392" y="4828032"/>
+            <a:ext cx="3282696" cy="749808"/>
           </a:xfrm>
           <a:prstGeom prst="rect">
             <a:avLst/>
@@ -12941,7 +12943,7 @@
               <a:buNone/>
             </a:pPr>
             <a:r>
-              <a:rPr lang="en-US" sz="1320" dirty="0">
+              <a:rPr lang="en-US" sz="1220" dirty="0">
                 <a:solidFill>
                   <a:srgbClr val="17364A"/>
                 </a:solidFill>
@@ -12949,9 +12951,9 @@
                 <a:ea typeface="Aptos" pitchFamily="34" charset="-122"/>
                 <a:cs typeface="Aptos" pitchFamily="34" charset="-120"/>
               </a:rPr>
-              <a:t>Connect the concept to public health purpose, responsible use, required safeguards, documentation, and the next action a department should take.</a:t>
-            </a:r>
-            <a:endParaRPr lang="en-US" sz="1320" dirty="0"/>
+              <a:t>Connect the concept to public health purpose, responsible use, required.</a:t>
+            </a:r>
+            <a:endParaRPr lang="en-US" sz="1220" dirty="0"/>
           </a:p>
         </p:txBody>
       </p:sp>
@@ -13269,7 +13271,7 @@
                 <a:ea typeface="Aptos" pitchFamily="34" charset="-122"/>
                 <a:cs typeface="Aptos" pitchFamily="34" charset="-120"/>
               </a:rPr>
-              <a:t>• Play 11: Build and Deploy AI Solutions - This lesson informs Play 11 by helping learners.</a:t>
+              <a:t>• Play 11: Build and Deploy AI Solutions - This lesson informs Play 11 by.</a:t>
             </a:r>
             <a:endParaRPr lang="en-US" sz="1900" dirty="0"/>
           </a:p>
@@ -13286,7 +13288,7 @@
                 <a:ea typeface="Aptos" pitchFamily="34" charset="-122"/>
                 <a:cs typeface="Aptos" pitchFamily="34" charset="-120"/>
               </a:rPr>
-              <a:t>• Play 2: Readiness Assessment - This lesson informs Play 2 by helping learners connect the.</a:t>
+              <a:t>• Play 2: Readiness Assessment - This lesson informs Play 2 by helping.</a:t>
             </a:r>
             <a:endParaRPr lang="en-US" sz="1900" dirty="0"/>
           </a:p>
@@ -13303,7 +13305,7 @@
                 <a:ea typeface="Aptos" pitchFamily="34" charset="-122"/>
                 <a:cs typeface="Aptos" pitchFamily="34" charset="-120"/>
               </a:rPr>
-              <a:t>• Play 1: Vision &amp; Guardrails - This lesson informs Play 1 by helping learners connect the.</a:t>
+              <a:t>• Play 1: Vision &amp; Guardrails - This lesson informs Play 1 by helping learners.</a:t>
             </a:r>
             <a:endParaRPr lang="en-US" sz="1900" dirty="0"/>
           </a:p>
@@ -13320,7 +13322,7 @@
                 <a:ea typeface="Aptos" pitchFamily="34" charset="-122"/>
                 <a:cs typeface="Aptos" pitchFamily="34" charset="-120"/>
               </a:rPr>
-              <a:t>• Play 7: Prioritize Use Cases - This lesson informs Play 7 by helping learners connect the.</a:t>
+              <a:t>• Play 7: Prioritize Use Cases - This lesson informs Play 7 by helping.</a:t>
             </a:r>
             <a:endParaRPr lang="en-US" sz="1900" dirty="0"/>
           </a:p>
@@ -13361,8 +13363,8 @@
         </p:nvSpPr>
         <p:spPr>
           <a:xfrm>
-            <a:off x="8211312" y="1563624"/>
-            <a:ext cx="2734056" cy="256032"/>
+            <a:off x="8211312" y="1545336"/>
+            <a:ext cx="2734056" cy="228600"/>
           </a:xfrm>
           <a:prstGeom prst="rect">
             <a:avLst/>
@@ -13378,7 +13380,7 @@
               <a:buNone/>
             </a:pPr>
             <a:r>
-              <a:rPr lang="en-US" sz="1300" b="1" dirty="0">
+              <a:rPr lang="en-US" sz="1220" b="1" dirty="0">
                 <a:solidFill>
                   <a:srgbClr val="0068B7"/>
                 </a:solidFill>
@@ -13388,7 +13390,7 @@
               </a:rPr>
               <a:t>Apply the lesson</a:t>
             </a:r>
-            <a:endParaRPr lang="en-US" sz="1300" dirty="0"/>
+            <a:endParaRPr lang="en-US" sz="1220" dirty="0"/>
           </a:p>
         </p:txBody>
       </p:sp>
@@ -13400,8 +13402,8 @@
         </p:nvSpPr>
         <p:spPr>
           <a:xfrm>
-            <a:off x="8211312" y="1892808"/>
-            <a:ext cx="2734056" cy="1536192"/>
+            <a:off x="8211312" y="1856232"/>
+            <a:ext cx="2734056" cy="1591056"/>
           </a:xfrm>
           <a:prstGeom prst="rect">
             <a:avLst/>
@@ -13419,7 +13421,7 @@
               <a:buNone/>
             </a:pPr>
             <a:r>
-              <a:rPr lang="en-US" sz="1320" dirty="0">
+              <a:rPr lang="en-US" sz="1220" dirty="0">
                 <a:solidFill>
                   <a:srgbClr val="17364A"/>
                 </a:solidFill>
@@ -13427,9 +13429,9 @@
                 <a:ea typeface="Aptos" pitchFamily="34" charset="-122"/>
                 <a:cs typeface="Aptos" pitchFamily="34" charset="-120"/>
               </a:rPr>
-              <a:t>Use the related plays to identify decisions, participants, timing, approvals, and documentation needed for responsible implementation.</a:t>
-            </a:r>
-            <a:endParaRPr lang="en-US" sz="1320" dirty="0"/>
+              <a:t>Use the related plays to identify decisions, participants, timing, approvals,.</a:t>
+            </a:r>
+            <a:endParaRPr lang="en-US" sz="1220" dirty="0"/>
           </a:p>
         </p:txBody>
       </p:sp>
@@ -13468,8 +13470,8 @@
         </p:nvSpPr>
         <p:spPr>
           <a:xfrm>
-            <a:off x="8211312" y="3941064"/>
-            <a:ext cx="2734056" cy="256032"/>
+            <a:off x="8211312" y="3922776"/>
+            <a:ext cx="2734056" cy="228600"/>
           </a:xfrm>
           <a:prstGeom prst="rect">
             <a:avLst/>
@@ -13485,7 +13487,7 @@
               <a:buNone/>
             </a:pPr>
             <a:r>
-              <a:rPr lang="en-US" sz="1300" b="1" dirty="0">
+              <a:rPr lang="en-US" sz="1220" b="1" dirty="0">
                 <a:solidFill>
                   <a:srgbClr val="0068B7"/>
                 </a:solidFill>
@@ -13495,7 +13497,7 @@
               </a:rPr>
               <a:t>Use the play links to</a:t>
             </a:r>
-            <a:endParaRPr lang="en-US" sz="1300" dirty="0"/>
+            <a:endParaRPr lang="en-US" sz="1220" dirty="0"/>
           </a:p>
         </p:txBody>
       </p:sp>
@@ -13507,8 +13509,8 @@
         </p:nvSpPr>
         <p:spPr>
           <a:xfrm>
-            <a:off x="8229600" y="4306824"/>
-            <a:ext cx="2679192" cy="941832"/>
+            <a:off x="8229600" y="4251960"/>
+            <a:ext cx="2679192" cy="1033272"/>
           </a:xfrm>
           <a:prstGeom prst="rect">
             <a:avLst/>
@@ -13526,7 +13528,7 @@
               <a:buNone/>
             </a:pPr>
             <a:r>
-              <a:rPr lang="en-US" sz="1220" dirty="0">
+              <a:rPr lang="en-US" sz="1140" dirty="0">
                 <a:solidFill>
                   <a:srgbClr val="17364A"/>
                 </a:solidFill>
@@ -13536,14 +13538,14 @@
               </a:rPr>
               <a:t>Locate the decision point in the playbook sequence.</a:t>
             </a:r>
-            <a:endParaRPr lang="en-US" sz="1220" dirty="0"/>
-          </a:p>
-          <a:p>
-            <a:pPr indent="0" marL="0">
-              <a:buNone/>
-            </a:pPr>
-            <a:r>
-              <a:rPr lang="en-US" sz="1220" dirty="0">
+            <a:endParaRPr lang="en-US" sz="1140" dirty="0"/>
+          </a:p>
+          <a:p>
+            <a:pPr indent="0" marL="0">
+              <a:buNone/>
+            </a:pPr>
+            <a:r>
+              <a:rPr lang="en-US" sz="1140" dirty="0">
                 <a:solidFill>
                   <a:srgbClr val="17364A"/>
                 </a:solidFill>
@@ -13553,14 +13555,14 @@
               </a:rPr>
               <a:t>Identify who should participate in the work.</a:t>
             </a:r>
-            <a:endParaRPr lang="en-US" sz="1220" dirty="0"/>
-          </a:p>
-          <a:p>
-            <a:pPr indent="0" marL="0">
-              <a:buNone/>
-            </a:pPr>
-            <a:r>
-              <a:rPr lang="en-US" sz="1220" dirty="0">
+            <a:endParaRPr lang="en-US" sz="1140" dirty="0"/>
+          </a:p>
+          <a:p>
+            <a:pPr indent="0" marL="0">
+              <a:buNone/>
+            </a:pPr>
+            <a:r>
+              <a:rPr lang="en-US" sz="1140" dirty="0">
                 <a:solidFill>
                   <a:srgbClr val="17364A"/>
                 </a:solidFill>
@@ -13568,9 +13570,9 @@
                 <a:ea typeface="Aptos" pitchFamily="34" charset="-122"/>
                 <a:cs typeface="Aptos" pitchFamily="34" charset="-120"/>
               </a:rPr>
-              <a:t>Document the review, approval, or implementation step.</a:t>
-            </a:r>
-            <a:endParaRPr lang="en-US" sz="1220" dirty="0"/>
+              <a:t>Document the review, approval, or implementation.</a:t>
+            </a:r>
+            <a:endParaRPr lang="en-US" sz="1140" dirty="0"/>
           </a:p>
         </p:txBody>
       </p:sp>
@@ -13888,7 +13890,7 @@
                 <a:ea typeface="Aptos" pitchFamily="34" charset="-122"/>
                 <a:cs typeface="Aptos" pitchFamily="34" charset="-120"/>
               </a:rPr>
-              <a:t>• Tool 3: Equity Impact Assessment Checklist (Checklist) - Use this tool to complete or.</a:t>
+              <a:t>• Tool 3: Equity Impact Assessment Checklist (Checklist) - Use this tool to.</a:t>
             </a:r>
             <a:endParaRPr lang="en-US" sz="1850" dirty="0"/>
           </a:p>
@@ -13905,7 +13907,7 @@
                 <a:ea typeface="Aptos" pitchFamily="34" charset="-122"/>
                 <a:cs typeface="Aptos" pitchFamily="34" charset="-120"/>
               </a:rPr>
-              <a:t>• Tool 4: AI Policy Landscape Scan (Worksheet) - Use AI Policy Landscape Scan to translate this.</a:t>
+              <a:t>• Tool 4: AI Policy Landscape Scan (Worksheet) - Use AI Policy Landscape Scan.</a:t>
             </a:r>
             <a:endParaRPr lang="en-US" sz="1850" dirty="0"/>
           </a:p>
@@ -13922,7 +13924,7 @@
                 <a:ea typeface="Aptos" pitchFamily="34" charset="-122"/>
                 <a:cs typeface="Aptos" pitchFamily="34" charset="-120"/>
               </a:rPr>
-              <a:t>• Tool 5: AI Environmental and Resource Impact Review (Checklist) - Use AI Environmental and.</a:t>
+              <a:t>• Tool 5: AI Environmental and Resource Impact Review (Checklist) - Use AI.</a:t>
             </a:r>
             <a:endParaRPr lang="en-US" sz="1850" dirty="0"/>
           </a:p>
@@ -13939,7 +13941,7 @@
                 <a:ea typeface="Aptos" pitchFamily="34" charset="-122"/>
                 <a:cs typeface="Aptos" pitchFamily="34" charset="-120"/>
               </a:rPr>
-              <a:t>• Tool 6: Human-Centered AI Decision Rule Checklist (Checklist) - Use Human-Centered AI Decision.</a:t>
+              <a:t>• Tool 6: Human-Centered AI Decision Rule Checklist (Checklist) - Use.</a:t>
             </a:r>
             <a:endParaRPr lang="en-US" sz="1850" dirty="0"/>
           </a:p>
@@ -13980,8 +13982,8 @@
         </p:nvSpPr>
         <p:spPr>
           <a:xfrm>
-            <a:off x="8211312" y="1563624"/>
-            <a:ext cx="2734056" cy="256032"/>
+            <a:off x="8211312" y="1545336"/>
+            <a:ext cx="2734056" cy="228600"/>
           </a:xfrm>
           <a:prstGeom prst="rect">
             <a:avLst/>
@@ -13997,7 +13999,7 @@
               <a:buNone/>
             </a:pPr>
             <a:r>
-              <a:rPr lang="en-US" sz="1300" b="1" dirty="0">
+              <a:rPr lang="en-US" sz="1220" b="1" dirty="0">
                 <a:solidFill>
                   <a:srgbClr val="0068B7"/>
                 </a:solidFill>
@@ -14007,7 +14009,7 @@
               </a:rPr>
               <a:t>Use the tools</a:t>
             </a:r>
-            <a:endParaRPr lang="en-US" sz="1300" dirty="0"/>
+            <a:endParaRPr lang="en-US" sz="1220" dirty="0"/>
           </a:p>
         </p:txBody>
       </p:sp>
@@ -14019,8 +14021,8 @@
         </p:nvSpPr>
         <p:spPr>
           <a:xfrm>
-            <a:off x="8211312" y="1892808"/>
-            <a:ext cx="2734056" cy="1536192"/>
+            <a:off x="8211312" y="1856232"/>
+            <a:ext cx="2734056" cy="1591056"/>
           </a:xfrm>
           <a:prstGeom prst="rect">
             <a:avLst/>
@@ -14038,7 +14040,7 @@
               <a:buNone/>
             </a:pPr>
             <a:r>
-              <a:rPr lang="en-US" sz="1320" dirty="0">
+              <a:rPr lang="en-US" sz="1220" dirty="0">
                 <a:solidFill>
                   <a:srgbClr val="17364A"/>
                 </a:solidFill>
@@ -14046,9 +14048,9 @@
                 <a:ea typeface="Aptos" pitchFamily="34" charset="-122"/>
                 <a:cs typeface="Aptos" pitchFamily="34" charset="-120"/>
               </a:rPr>
-              <a:t>Use linked tools when your department needs a structured worksheet, template, checklist, review process, or documentation artifact.</a:t>
-            </a:r>
-            <a:endParaRPr lang="en-US" sz="1320" dirty="0"/>
+              <a:t>Use linked tools when your department needs a structured worksheet, template,.</a:t>
+            </a:r>
+            <a:endParaRPr lang="en-US" sz="1220" dirty="0"/>
           </a:p>
         </p:txBody>
       </p:sp>
@@ -14087,8 +14089,8 @@
         </p:nvSpPr>
         <p:spPr>
           <a:xfrm>
-            <a:off x="8211312" y="3941064"/>
-            <a:ext cx="2734056" cy="256032"/>
+            <a:off x="8211312" y="3922776"/>
+            <a:ext cx="2734056" cy="228600"/>
           </a:xfrm>
           <a:prstGeom prst="rect">
             <a:avLst/>
@@ -14104,7 +14106,7 @@
               <a:buNone/>
             </a:pPr>
             <a:r>
-              <a:rPr lang="en-US" sz="1300" b="1" dirty="0">
+              <a:rPr lang="en-US" sz="1220" b="1" dirty="0">
                 <a:solidFill>
                   <a:srgbClr val="0068B7"/>
                 </a:solidFill>
@@ -14114,7 +14116,7 @@
               </a:rPr>
               <a:t>Tool selection cues</a:t>
             </a:r>
-            <a:endParaRPr lang="en-US" sz="1300" dirty="0"/>
+            <a:endParaRPr lang="en-US" sz="1220" dirty="0"/>
           </a:p>
         </p:txBody>
       </p:sp>
@@ -14126,8 +14128,8 @@
         </p:nvSpPr>
         <p:spPr>
           <a:xfrm>
-            <a:off x="8229600" y="4306824"/>
-            <a:ext cx="2679192" cy="941832"/>
+            <a:off x="8229600" y="4251960"/>
+            <a:ext cx="2679192" cy="1033272"/>
           </a:xfrm>
           <a:prstGeom prst="rect">
             <a:avLst/>
@@ -14145,7 +14147,7 @@
               <a:buNone/>
             </a:pPr>
             <a:r>
-              <a:rPr lang="en-US" sz="1220" dirty="0">
+              <a:rPr lang="en-US" sz="1140" dirty="0">
                 <a:solidFill>
                   <a:srgbClr val="17364A"/>
                 </a:solidFill>
@@ -14155,14 +14157,14 @@
               </a:rPr>
               <a:t>Use a tool when no comparable local process exists.</a:t>
             </a:r>
-            <a:endParaRPr lang="en-US" sz="1220" dirty="0"/>
-          </a:p>
-          <a:p>
-            <a:pPr indent="0" marL="0">
-              <a:buNone/>
-            </a:pPr>
-            <a:r>
-              <a:rPr lang="en-US" sz="1220" dirty="0">
+            <a:endParaRPr lang="en-US" sz="1140" dirty="0"/>
+          </a:p>
+          <a:p>
+            <a:pPr indent="0" marL="0">
+              <a:buNone/>
+            </a:pPr>
+            <a:r>
+              <a:rPr lang="en-US" sz="1140" dirty="0">
                 <a:solidFill>
                   <a:srgbClr val="17364A"/>
                 </a:solidFill>
@@ -14170,16 +14172,16 @@
                 <a:ea typeface="Aptos" pitchFamily="34" charset="-122"/>
                 <a:cs typeface="Aptos" pitchFamily="34" charset="-120"/>
               </a:rPr>
-              <a:t>Adapt existing department templates when they already fit the.</a:t>
-            </a:r>
-            <a:endParaRPr lang="en-US" sz="1220" dirty="0"/>
-          </a:p>
-          <a:p>
-            <a:pPr indent="0" marL="0">
-              <a:buNone/>
-            </a:pPr>
-            <a:r>
-              <a:rPr lang="en-US" sz="1220" dirty="0">
+              <a:t>Adapt existing department templates when they.</a:t>
+            </a:r>
+            <a:endParaRPr lang="en-US" sz="1140" dirty="0"/>
+          </a:p>
+          <a:p>
+            <a:pPr indent="0" marL="0">
+              <a:buNone/>
+            </a:pPr>
+            <a:r>
+              <a:rPr lang="en-US" sz="1140" dirty="0">
                 <a:solidFill>
                   <a:srgbClr val="17364A"/>
                 </a:solidFill>
@@ -14187,9 +14189,9 @@
                 <a:ea typeface="Aptos" pitchFamily="34" charset="-122"/>
                 <a:cs typeface="Aptos" pitchFamily="34" charset="-120"/>
               </a:rPr>
-              <a:t>Save the completed artifact as evidence of the decision.</a:t>
-            </a:r>
-            <a:endParaRPr lang="en-US" sz="1220" dirty="0"/>
+              <a:t>Save the completed artifact as evidence of the.</a:t>
+            </a:r>
+            <a:endParaRPr lang="en-US" sz="1140" dirty="0"/>
           </a:p>
         </p:txBody>
       </p:sp>
@@ -14480,8 +14482,8 @@
         </p:nvSpPr>
         <p:spPr>
           <a:xfrm>
-            <a:off x="868680" y="1508760"/>
-            <a:ext cx="6309360" cy="4160520"/>
+            <a:off x="822960" y="1463040"/>
+            <a:ext cx="6565392" cy="4343400"/>
           </a:xfrm>
           <a:prstGeom prst="rect">
             <a:avLst/>
@@ -14499,7 +14501,7 @@
               <a:buNone/>
             </a:pPr>
             <a:r>
-              <a:rPr lang="en-US" sz="2100" dirty="0">
+              <a:rPr lang="en-US" sz="1920" dirty="0">
                 <a:solidFill>
                   <a:srgbClr val="003A63"/>
                 </a:solidFill>
@@ -14509,14 +14511,14 @@
               </a:rPr>
               <a:t>• Define geospatial AI and spatial epidemiology in public health terms.</a:t>
             </a:r>
-            <a:endParaRPr lang="en-US" sz="2100" dirty="0"/>
-          </a:p>
-          <a:p>
-            <a:pPr indent="0" marL="0">
-              <a:buNone/>
-            </a:pPr>
-            <a:r>
-              <a:rPr lang="en-US" sz="2100" dirty="0">
+            <a:endParaRPr lang="en-US" sz="1920" dirty="0"/>
+          </a:p>
+          <a:p>
+            <a:pPr indent="0" marL="0">
+              <a:buNone/>
+            </a:pPr>
+            <a:r>
+              <a:rPr lang="en-US" sz="1920" dirty="0">
                 <a:solidFill>
                   <a:srgbClr val="003A63"/>
                 </a:solidFill>
@@ -14524,16 +14526,16 @@
                 <a:ea typeface="Aptos" pitchFamily="34" charset="-122"/>
                 <a:cs typeface="Aptos" pitchFamily="34" charset="-120"/>
               </a:rPr>
-              <a:t>• Explain how geocoding, aggregation, spatial scale, and data quality affect AI-supported maps.</a:t>
-            </a:r>
-            <a:endParaRPr lang="en-US" sz="2100" dirty="0"/>
-          </a:p>
-          <a:p>
-            <a:pPr indent="0" marL="0">
-              <a:buNone/>
-            </a:pPr>
-            <a:r>
-              <a:rPr lang="en-US" sz="2100" dirty="0">
+              <a:t>• Explain how geocoding, aggregation, spatial scale, and data quality affect.</a:t>
+            </a:r>
+            <a:endParaRPr lang="en-US" sz="1920" dirty="0"/>
+          </a:p>
+          <a:p>
+            <a:pPr indent="0" marL="0">
+              <a:buNone/>
+            </a:pPr>
+            <a:r>
+              <a:rPr lang="en-US" sz="1920" dirty="0">
                 <a:solidFill>
                   <a:srgbClr val="003A63"/>
                 </a:solidFill>
@@ -14543,7 +14545,7 @@
               </a:rPr>
               <a:t>• Identify privacy and re-identification risks related to location data.</a:t>
             </a:r>
-            <a:endParaRPr lang="en-US" sz="2100" dirty="0"/>
+            <a:endParaRPr lang="en-US" sz="1920" dirty="0"/>
           </a:p>
         </p:txBody>
       </p:sp>
@@ -14555,12 +14557,12 @@
         </p:nvSpPr>
         <p:spPr>
           <a:xfrm>
-            <a:off x="7635240" y="1325880"/>
-            <a:ext cx="3474720" cy="1207008"/>
+            <a:off x="7543800" y="1325880"/>
+            <a:ext cx="3611880" cy="1261872"/>
           </a:xfrm>
           <a:prstGeom prst="roundRect">
             <a:avLst>
-              <a:gd name="adj" fmla="val 9091"/>
+              <a:gd name="adj" fmla="val 8696"/>
             </a:avLst>
           </a:prstGeom>
           <a:solidFill>
@@ -14582,8 +14584,8 @@
         </p:nvSpPr>
         <p:spPr>
           <a:xfrm>
-            <a:off x="7799832" y="1472184"/>
-            <a:ext cx="3145536" cy="256032"/>
+            <a:off x="7708392" y="1453896"/>
+            <a:ext cx="3282696" cy="228600"/>
           </a:xfrm>
           <a:prstGeom prst="rect">
             <a:avLst/>
@@ -14599,7 +14601,7 @@
               <a:buNone/>
             </a:pPr>
             <a:r>
-              <a:rPr lang="en-US" sz="1300" b="1" dirty="0">
+              <a:rPr lang="en-US" sz="1220" b="1" dirty="0">
                 <a:solidFill>
                   <a:srgbClr val="0068B7"/>
                 </a:solidFill>
@@ -14609,7 +14611,7 @@
               </a:rPr>
               <a:t>Practice focus</a:t>
             </a:r>
-            <a:endParaRPr lang="en-US" sz="1300" dirty="0"/>
+            <a:endParaRPr lang="en-US" sz="1220" dirty="0"/>
           </a:p>
         </p:txBody>
       </p:sp>
@@ -14621,8 +14623,8 @@
         </p:nvSpPr>
         <p:spPr>
           <a:xfrm>
-            <a:off x="7799832" y="1801368"/>
-            <a:ext cx="3145536" cy="640080"/>
+            <a:off x="7708392" y="1764792"/>
+            <a:ext cx="3282696" cy="749808"/>
           </a:xfrm>
           <a:prstGeom prst="rect">
             <a:avLst/>
@@ -14640,7 +14642,7 @@
               <a:buNone/>
             </a:pPr>
             <a:r>
-              <a:rPr lang="en-US" sz="1320" dirty="0">
+              <a:rPr lang="en-US" sz="1220" dirty="0">
                 <a:solidFill>
                   <a:srgbClr val="17364A"/>
                 </a:solidFill>
@@ -14650,7 +14652,7 @@
               </a:rPr>
               <a:t>Define geospatial AI and spatial epidemiology in public health terms.</a:t>
             </a:r>
-            <a:endParaRPr lang="en-US" sz="1320" dirty="0"/>
+            <a:endParaRPr lang="en-US" sz="1220" dirty="0"/>
           </a:p>
         </p:txBody>
       </p:sp>
@@ -14662,12 +14664,12 @@
         </p:nvSpPr>
         <p:spPr>
           <a:xfrm>
-            <a:off x="7635240" y="2670048"/>
-            <a:ext cx="3474720" cy="1377086"/>
+            <a:off x="7543800" y="2724912"/>
+            <a:ext cx="3611880" cy="1527048"/>
           </a:xfrm>
           <a:prstGeom prst="roundRect">
             <a:avLst>
-              <a:gd name="adj" fmla="val 7968"/>
+              <a:gd name="adj" fmla="val 7186"/>
             </a:avLst>
           </a:prstGeom>
           <a:solidFill>
@@ -14689,8 +14691,8 @@
         </p:nvSpPr>
         <p:spPr>
           <a:xfrm>
-            <a:off x="7799832" y="2816352"/>
-            <a:ext cx="3145536" cy="256032"/>
+            <a:off x="7708392" y="2852928"/>
+            <a:ext cx="3282696" cy="228600"/>
           </a:xfrm>
           <a:prstGeom prst="rect">
             <a:avLst/>
@@ -14706,7 +14708,7 @@
               <a:buNone/>
             </a:pPr>
             <a:r>
-              <a:rPr lang="en-US" sz="1300" b="1" dirty="0">
+              <a:rPr lang="en-US" sz="1220" b="1" dirty="0">
                 <a:solidFill>
                   <a:srgbClr val="0068B7"/>
                 </a:solidFill>
@@ -14716,7 +14718,7 @@
               </a:rPr>
               <a:t>Concept checkpoints</a:t>
             </a:r>
-            <a:endParaRPr lang="en-US" sz="1300" dirty="0"/>
+            <a:endParaRPr lang="en-US" sz="1220" dirty="0"/>
           </a:p>
         </p:txBody>
       </p:sp>
@@ -14728,8 +14730,8 @@
         </p:nvSpPr>
         <p:spPr>
           <a:xfrm>
-            <a:off x="7818120" y="3182112"/>
-            <a:ext cx="3090672" cy="718718"/>
+            <a:off x="7726680" y="3182112"/>
+            <a:ext cx="3227832" cy="960120"/>
           </a:xfrm>
           <a:prstGeom prst="rect">
             <a:avLst/>
@@ -14747,7 +14749,7 @@
               <a:buNone/>
             </a:pPr>
             <a:r>
-              <a:rPr lang="en-US" sz="1220" dirty="0">
+              <a:rPr lang="en-US" sz="1140" dirty="0">
                 <a:solidFill>
                   <a:srgbClr val="17364A"/>
                 </a:solidFill>
@@ -14755,16 +14757,16 @@
                 <a:ea typeface="Aptos" pitchFamily="34" charset="-122"/>
                 <a:cs typeface="Aptos" pitchFamily="34" charset="-120"/>
               </a:rPr>
-              <a:t>Explain how geocoding, aggregation, spatial scale, and data.</a:t>
-            </a:r>
-            <a:endParaRPr lang="en-US" sz="1220" dirty="0"/>
-          </a:p>
-          <a:p>
-            <a:pPr indent="0" marL="0">
-              <a:buNone/>
-            </a:pPr>
-            <a:r>
-              <a:rPr lang="en-US" sz="1220" dirty="0">
+              <a:t>Explain how geocoding, aggregation, spatial scale,.</a:t>
+            </a:r>
+            <a:endParaRPr lang="en-US" sz="1140" dirty="0"/>
+          </a:p>
+          <a:p>
+            <a:pPr indent="0" marL="0">
+              <a:buNone/>
+            </a:pPr>
+            <a:r>
+              <a:rPr lang="en-US" sz="1140" dirty="0">
                 <a:solidFill>
                   <a:srgbClr val="17364A"/>
                 </a:solidFill>
@@ -14772,16 +14774,16 @@
                 <a:ea typeface="Aptos" pitchFamily="34" charset="-122"/>
                 <a:cs typeface="Aptos" pitchFamily="34" charset="-120"/>
               </a:rPr>
-              <a:t>Recognize spatial bias, modifiable areal unit problems, and.</a:t>
-            </a:r>
-            <a:endParaRPr lang="en-US" sz="1220" dirty="0"/>
-          </a:p>
-          <a:p>
-            <a:pPr indent="0" marL="0">
-              <a:buNone/>
-            </a:pPr>
-            <a:r>
-              <a:rPr lang="en-US" sz="1220" dirty="0">
+              <a:t>Recognize spatial bias, modifiable areal unit.</a:t>
+            </a:r>
+            <a:endParaRPr lang="en-US" sz="1140" dirty="0"/>
+          </a:p>
+          <a:p>
+            <a:pPr indent="0" marL="0">
+              <a:buNone/>
+            </a:pPr>
+            <a:r>
+              <a:rPr lang="en-US" sz="1140" dirty="0">
                 <a:solidFill>
                   <a:srgbClr val="17364A"/>
                 </a:solidFill>
@@ -14789,9 +14791,9 @@
                 <a:ea typeface="Aptos" pitchFamily="34" charset="-122"/>
                 <a:cs typeface="Aptos" pitchFamily="34" charset="-120"/>
               </a:rPr>
-              <a:t>Design guardrails for AI-supported spatial analysis, hotspot.</a:t>
-            </a:r>
-            <a:endParaRPr lang="en-US" sz="1220" dirty="0"/>
+              <a:t>Design guardrails for AI-supported spatial.</a:t>
+            </a:r>
+            <a:endParaRPr lang="en-US" sz="1140" dirty="0"/>
           </a:p>
         </p:txBody>
       </p:sp>
@@ -14803,12 +14805,12 @@
         </p:nvSpPr>
         <p:spPr>
           <a:xfrm>
-            <a:off x="7635240" y="4184294"/>
-            <a:ext cx="3474720" cy="1466698"/>
+            <a:off x="7543800" y="4389120"/>
+            <a:ext cx="3611880" cy="1261872"/>
           </a:xfrm>
           <a:prstGeom prst="roundRect">
             <a:avLst>
-              <a:gd name="adj" fmla="val 7481"/>
+              <a:gd name="adj" fmla="val 8696"/>
             </a:avLst>
           </a:prstGeom>
           <a:solidFill>
@@ -14830,8 +14832,8 @@
         </p:nvSpPr>
         <p:spPr>
           <a:xfrm>
-            <a:off x="7799832" y="4330598"/>
-            <a:ext cx="3145536" cy="256032"/>
+            <a:off x="7708392" y="4517136"/>
+            <a:ext cx="3282696" cy="228600"/>
           </a:xfrm>
           <a:prstGeom prst="rect">
             <a:avLst/>
@@ -14847,7 +14849,7 @@
               <a:buNone/>
             </a:pPr>
             <a:r>
-              <a:rPr lang="en-US" sz="1300" b="1" dirty="0">
+              <a:rPr lang="en-US" sz="1220" b="1" dirty="0">
                 <a:solidFill>
                   <a:srgbClr val="0068B7"/>
                 </a:solidFill>
@@ -14857,7 +14859,7 @@
               </a:rPr>
               <a:t>What to produce</a:t>
             </a:r>
-            <a:endParaRPr lang="en-US" sz="1300" dirty="0"/>
+            <a:endParaRPr lang="en-US" sz="1220" dirty="0"/>
           </a:p>
         </p:txBody>
       </p:sp>
@@ -14869,8 +14871,8 @@
         </p:nvSpPr>
         <p:spPr>
           <a:xfrm>
-            <a:off x="7799832" y="4659782"/>
-            <a:ext cx="3145536" cy="899770"/>
+            <a:off x="7708392" y="4828032"/>
+            <a:ext cx="3282696" cy="749808"/>
           </a:xfrm>
           <a:prstGeom prst="rect">
             <a:avLst/>
@@ -14888,7 +14890,7 @@
               <a:buNone/>
             </a:pPr>
             <a:r>
-              <a:rPr lang="en-US" sz="1320" dirty="0">
+              <a:rPr lang="en-US" sz="1220" dirty="0">
                 <a:solidFill>
                   <a:srgbClr val="17364A"/>
                 </a:solidFill>
@@ -14896,9 +14898,9 @@
                 <a:ea typeface="Aptos" pitchFamily="34" charset="-122"/>
                 <a:cs typeface="Aptos" pitchFamily="34" charset="-120"/>
               </a:rPr>
-              <a:t>Use the assignment to test whether you can explain the concept, apply it to a realistic public health situation, and identify what would need review before the work moves forward.</a:t>
-            </a:r>
-            <a:endParaRPr lang="en-US" sz="1320" dirty="0"/>
+              <a:t>Use the assignment to test whether you can explain the concept, apply it to a.</a:t>
+            </a:r>
+            <a:endParaRPr lang="en-US" sz="1220" dirty="0"/>
           </a:p>
         </p:txBody>
       </p:sp>
@@ -15189,8 +15191,8 @@
         </p:nvSpPr>
         <p:spPr>
           <a:xfrm>
-            <a:off x="868680" y="1508760"/>
-            <a:ext cx="6309360" cy="4160520"/>
+            <a:off x="822960" y="1463040"/>
+            <a:ext cx="6565392" cy="4343400"/>
           </a:xfrm>
           <a:prstGeom prst="rect">
             <a:avLst/>
@@ -15208,7 +15210,7 @@
               <a:buNone/>
             </a:pPr>
             <a:r>
-              <a:rPr lang="en-US" sz="2100" dirty="0">
+              <a:rPr lang="en-US" sz="1920" dirty="0">
                 <a:solidFill>
                   <a:srgbClr val="003A63"/>
                 </a:solidFill>
@@ -15218,7 +15220,7 @@
               </a:rPr>
               <a:t>• Produce a geospatial AI readiness worksheet for a public health workflow.</a:t>
             </a:r>
-            <a:endParaRPr lang="en-US" sz="2100" dirty="0"/>
+            <a:endParaRPr lang="en-US" sz="1920" dirty="0"/>
           </a:p>
         </p:txBody>
       </p:sp>
@@ -15230,12 +15232,12 @@
         </p:nvSpPr>
         <p:spPr>
           <a:xfrm>
-            <a:off x="7635240" y="1325880"/>
-            <a:ext cx="3474720" cy="1207008"/>
+            <a:off x="7543800" y="1325880"/>
+            <a:ext cx="3611880" cy="1261872"/>
           </a:xfrm>
           <a:prstGeom prst="roundRect">
             <a:avLst>
-              <a:gd name="adj" fmla="val 9091"/>
+              <a:gd name="adj" fmla="val 8696"/>
             </a:avLst>
           </a:prstGeom>
           <a:solidFill>
@@ -15257,8 +15259,8 @@
         </p:nvSpPr>
         <p:spPr>
           <a:xfrm>
-            <a:off x="7799832" y="1472184"/>
-            <a:ext cx="3145536" cy="256032"/>
+            <a:off x="7708392" y="1453896"/>
+            <a:ext cx="3282696" cy="228600"/>
           </a:xfrm>
           <a:prstGeom prst="rect">
             <a:avLst/>
@@ -15274,7 +15276,7 @@
               <a:buNone/>
             </a:pPr>
             <a:r>
-              <a:rPr lang="en-US" sz="1300" b="1" dirty="0">
+              <a:rPr lang="en-US" sz="1220" b="1" dirty="0">
                 <a:solidFill>
                   <a:srgbClr val="0068B7"/>
                 </a:solidFill>
@@ -15284,7 +15286,7 @@
               </a:rPr>
               <a:t>Practice focus</a:t>
             </a:r>
-            <a:endParaRPr lang="en-US" sz="1300" dirty="0"/>
+            <a:endParaRPr lang="en-US" sz="1220" dirty="0"/>
           </a:p>
         </p:txBody>
       </p:sp>
@@ -15296,8 +15298,8 @@
         </p:nvSpPr>
         <p:spPr>
           <a:xfrm>
-            <a:off x="7799832" y="1801368"/>
-            <a:ext cx="3145536" cy="640080"/>
+            <a:off x="7708392" y="1764792"/>
+            <a:ext cx="3282696" cy="749808"/>
           </a:xfrm>
           <a:prstGeom prst="rect">
             <a:avLst/>
@@ -15315,7 +15317,7 @@
               <a:buNone/>
             </a:pPr>
             <a:r>
-              <a:rPr lang="en-US" sz="1320" dirty="0">
+              <a:rPr lang="en-US" sz="1220" dirty="0">
                 <a:solidFill>
                   <a:srgbClr val="17364A"/>
                 </a:solidFill>
@@ -15325,7 +15327,7 @@
               </a:rPr>
               <a:t>Produce a geospatial AI readiness worksheet for a public health workflow.</a:t>
             </a:r>
-            <a:endParaRPr lang="en-US" sz="1320" dirty="0"/>
+            <a:endParaRPr lang="en-US" sz="1220" dirty="0"/>
           </a:p>
         </p:txBody>
       </p:sp>
@@ -15337,12 +15339,12 @@
         </p:nvSpPr>
         <p:spPr>
           <a:xfrm>
-            <a:off x="7635240" y="2670048"/>
-            <a:ext cx="3474720" cy="1377086"/>
+            <a:off x="7543800" y="2724912"/>
+            <a:ext cx="3611880" cy="1527048"/>
           </a:xfrm>
           <a:prstGeom prst="roundRect">
             <a:avLst>
-              <a:gd name="adj" fmla="val 7968"/>
+              <a:gd name="adj" fmla="val 7186"/>
             </a:avLst>
           </a:prstGeom>
           <a:solidFill>
@@ -15364,8 +15366,8 @@
         </p:nvSpPr>
         <p:spPr>
           <a:xfrm>
-            <a:off x="7799832" y="2816352"/>
-            <a:ext cx="3145536" cy="256032"/>
+            <a:off x="7708392" y="2852928"/>
+            <a:ext cx="3282696" cy="228600"/>
           </a:xfrm>
           <a:prstGeom prst="rect">
             <a:avLst/>
@@ -15381,7 +15383,7 @@
               <a:buNone/>
             </a:pPr>
             <a:r>
-              <a:rPr lang="en-US" sz="1300" b="1" dirty="0">
+              <a:rPr lang="en-US" sz="1220" b="1" dirty="0">
                 <a:solidFill>
                   <a:srgbClr val="0068B7"/>
                 </a:solidFill>
@@ -15391,7 +15393,7 @@
               </a:rPr>
               <a:t>Concept checkpoints</a:t>
             </a:r>
-            <a:endParaRPr lang="en-US" sz="1300" dirty="0"/>
+            <a:endParaRPr lang="en-US" sz="1220" dirty="0"/>
           </a:p>
         </p:txBody>
       </p:sp>
@@ -15403,8 +15405,8 @@
         </p:nvSpPr>
         <p:spPr>
           <a:xfrm>
-            <a:off x="7818120" y="3182112"/>
-            <a:ext cx="3090672" cy="718718"/>
+            <a:off x="7726680" y="3182112"/>
+            <a:ext cx="3227832" cy="960120"/>
           </a:xfrm>
           <a:prstGeom prst="rect">
             <a:avLst/>
@@ -15422,7 +15424,7 @@
               <a:buNone/>
             </a:pPr>
             <a:r>
-              <a:rPr lang="en-US" sz="1220" dirty="0">
+              <a:rPr lang="en-US" sz="1140" dirty="0">
                 <a:solidFill>
                   <a:srgbClr val="17364A"/>
                 </a:solidFill>
@@ -15430,9 +15432,9 @@
                 <a:ea typeface="Aptos" pitchFamily="34" charset="-122"/>
                 <a:cs typeface="Aptos" pitchFamily="34" charset="-120"/>
               </a:rPr>
-              <a:t>Produce a geospatial AI readiness worksheet for a public health.</a:t>
-            </a:r>
-            <a:endParaRPr lang="en-US" sz="1220" dirty="0"/>
+              <a:t>Produce a geospatial AI readiness worksheet for a.</a:t>
+            </a:r>
+            <a:endParaRPr lang="en-US" sz="1140" dirty="0"/>
           </a:p>
         </p:txBody>
       </p:sp>
@@ -15444,12 +15446,12 @@
         </p:nvSpPr>
         <p:spPr>
           <a:xfrm>
-            <a:off x="7635240" y="4184294"/>
-            <a:ext cx="3474720" cy="1466698"/>
+            <a:off x="7543800" y="4389120"/>
+            <a:ext cx="3611880" cy="1261872"/>
           </a:xfrm>
           <a:prstGeom prst="roundRect">
             <a:avLst>
-              <a:gd name="adj" fmla="val 7481"/>
+              <a:gd name="adj" fmla="val 8696"/>
             </a:avLst>
           </a:prstGeom>
           <a:solidFill>
@@ -15471,8 +15473,8 @@
         </p:nvSpPr>
         <p:spPr>
           <a:xfrm>
-            <a:off x="7799832" y="4330598"/>
-            <a:ext cx="3145536" cy="256032"/>
+            <a:off x="7708392" y="4517136"/>
+            <a:ext cx="3282696" cy="228600"/>
           </a:xfrm>
           <a:prstGeom prst="rect">
             <a:avLst/>
@@ -15488,7 +15490,7 @@
               <a:buNone/>
             </a:pPr>
             <a:r>
-              <a:rPr lang="en-US" sz="1300" b="1" dirty="0">
+              <a:rPr lang="en-US" sz="1220" b="1" dirty="0">
                 <a:solidFill>
                   <a:srgbClr val="0068B7"/>
                 </a:solidFill>
@@ -15498,7 +15500,7 @@
               </a:rPr>
               <a:t>What to produce</a:t>
             </a:r>
-            <a:endParaRPr lang="en-US" sz="1300" dirty="0"/>
+            <a:endParaRPr lang="en-US" sz="1220" dirty="0"/>
           </a:p>
         </p:txBody>
       </p:sp>
@@ -15510,8 +15512,8 @@
         </p:nvSpPr>
         <p:spPr>
           <a:xfrm>
-            <a:off x="7799832" y="4659782"/>
-            <a:ext cx="3145536" cy="899770"/>
+            <a:off x="7708392" y="4828032"/>
+            <a:ext cx="3282696" cy="749808"/>
           </a:xfrm>
           <a:prstGeom prst="rect">
             <a:avLst/>
@@ -15529,7 +15531,7 @@
               <a:buNone/>
             </a:pPr>
             <a:r>
-              <a:rPr lang="en-US" sz="1320" dirty="0">
+              <a:rPr lang="en-US" sz="1220" dirty="0">
                 <a:solidFill>
                   <a:srgbClr val="17364A"/>
                 </a:solidFill>
@@ -15537,9 +15539,9 @@
                 <a:ea typeface="Aptos" pitchFamily="34" charset="-122"/>
                 <a:cs typeface="Aptos" pitchFamily="34" charset="-120"/>
               </a:rPr>
-              <a:t>Use the assignment to test whether you can explain the concept, apply it to a realistic public health situation, and identify what would need review before the work moves forward.</a:t>
-            </a:r>
-            <a:endParaRPr lang="en-US" sz="1320" dirty="0"/>
+              <a:t>Use the assignment to test whether you can explain the concept, apply it to a.</a:t>
+            </a:r>
+            <a:endParaRPr lang="en-US" sz="1220" dirty="0"/>
           </a:p>
         </p:txBody>
       </p:sp>
@@ -15830,8 +15832,8 @@
         </p:nvSpPr>
         <p:spPr>
           <a:xfrm>
-            <a:off x="868680" y="1508760"/>
-            <a:ext cx="6309360" cy="4160520"/>
+            <a:off x="822960" y="1463040"/>
+            <a:ext cx="6565392" cy="4343400"/>
           </a:xfrm>
           <a:prstGeom prst="rect">
             <a:avLst/>
@@ -15849,7 +15851,7 @@
               <a:buNone/>
             </a:pPr>
             <a:r>
-              <a:rPr lang="en-US" sz="2100" dirty="0">
+              <a:rPr lang="en-US" sz="1920" dirty="0">
                 <a:solidFill>
                   <a:srgbClr val="003A63"/>
                 </a:solidFill>
@@ -15857,16 +15859,16 @@
                 <a:ea typeface="Aptos" pitchFamily="34" charset="-122"/>
                 <a:cs typeface="Aptos" pitchFamily="34" charset="-120"/>
               </a:rPr>
-              <a:t>• Geospatial AI combines spatial data, geographic analysis, and AI methods to identify patterns.</a:t>
-            </a:r>
-            <a:endParaRPr lang="en-US" sz="2100" dirty="0"/>
-          </a:p>
-          <a:p>
-            <a:pPr indent="0" marL="0">
-              <a:buNone/>
-            </a:pPr>
-            <a:r>
-              <a:rPr lang="en-US" sz="2100" dirty="0">
+              <a:t>• Geospatial AI combines spatial data, geographic analysis, and AI methods to.</a:t>
+            </a:r>
+            <a:endParaRPr lang="en-US" sz="1920" dirty="0"/>
+          </a:p>
+          <a:p>
+            <a:pPr indent="0" marL="0">
+              <a:buNone/>
+            </a:pPr>
+            <a:r>
+              <a:rPr lang="en-US" sz="1920" dirty="0">
                 <a:solidFill>
                   <a:srgbClr val="003A63"/>
                 </a:solidFill>
@@ -15874,16 +15876,16 @@
                 <a:ea typeface="Aptos" pitchFamily="34" charset="-122"/>
                 <a:cs typeface="Aptos" pitchFamily="34" charset="-120"/>
               </a:rPr>
-              <a:t>• In public health, spatial analysis is already central to outbreak response, environmental.</a:t>
-            </a:r>
-            <a:endParaRPr lang="en-US" sz="2100" dirty="0"/>
-          </a:p>
-          <a:p>
-            <a:pPr indent="0" marL="0">
-              <a:buNone/>
-            </a:pPr>
-            <a:r>
-              <a:rPr lang="en-US" sz="2100" dirty="0">
+              <a:t>• In public health, spatial analysis is already central to outbreak response,.</a:t>
+            </a:r>
+            <a:endParaRPr lang="en-US" sz="1920" dirty="0"/>
+          </a:p>
+          <a:p>
+            <a:pPr indent="0" marL="0">
+              <a:buNone/>
+            </a:pPr>
+            <a:r>
+              <a:rPr lang="en-US" sz="1920" dirty="0">
                 <a:solidFill>
                   <a:srgbClr val="003A63"/>
                 </a:solidFill>
@@ -15891,9 +15893,9 @@
                 <a:ea typeface="Aptos" pitchFamily="34" charset="-122"/>
                 <a:cs typeface="Aptos" pitchFamily="34" charset="-120"/>
               </a:rPr>
-              <a:t>• AI can strengthen these activities when it helps detect clusters, estimate access barriers,.</a:t>
-            </a:r>
-            <a:endParaRPr lang="en-US" sz="2100" dirty="0"/>
+              <a:t>• AI can strengthen these activities when it helps detect clusters, estimate.</a:t>
+            </a:r>
+            <a:endParaRPr lang="en-US" sz="1920" dirty="0"/>
           </a:p>
         </p:txBody>
       </p:sp>
@@ -15905,12 +15907,12 @@
         </p:nvSpPr>
         <p:spPr>
           <a:xfrm>
-            <a:off x="7635240" y="1325880"/>
-            <a:ext cx="3474720" cy="1255471"/>
+            <a:off x="7543800" y="1325880"/>
+            <a:ext cx="3611880" cy="1261872"/>
           </a:xfrm>
           <a:prstGeom prst="roundRect">
             <a:avLst>
-              <a:gd name="adj" fmla="val 8740"/>
+              <a:gd name="adj" fmla="val 8696"/>
             </a:avLst>
           </a:prstGeom>
           <a:solidFill>
@@ -15932,8 +15934,8 @@
         </p:nvSpPr>
         <p:spPr>
           <a:xfrm>
-            <a:off x="7799832" y="1472184"/>
-            <a:ext cx="3145536" cy="256032"/>
+            <a:off x="7708392" y="1453896"/>
+            <a:ext cx="3282696" cy="228600"/>
           </a:xfrm>
           <a:prstGeom prst="rect">
             <a:avLst/>
@@ -15949,7 +15951,7 @@
               <a:buNone/>
             </a:pPr>
             <a:r>
-              <a:rPr lang="en-US" sz="1300" b="1" dirty="0">
+              <a:rPr lang="en-US" sz="1220" b="1" dirty="0">
                 <a:solidFill>
                   <a:srgbClr val="0068B7"/>
                 </a:solidFill>
@@ -15959,7 +15961,7 @@
               </a:rPr>
               <a:t>Core concept</a:t>
             </a:r>
-            <a:endParaRPr lang="en-US" sz="1300" dirty="0"/>
+            <a:endParaRPr lang="en-US" sz="1220" dirty="0"/>
           </a:p>
         </p:txBody>
       </p:sp>
@@ -15971,8 +15973,8 @@
         </p:nvSpPr>
         <p:spPr>
           <a:xfrm>
-            <a:off x="7799832" y="1801368"/>
-            <a:ext cx="3145536" cy="688543"/>
+            <a:off x="7708392" y="1764792"/>
+            <a:ext cx="3282696" cy="749808"/>
           </a:xfrm>
           <a:prstGeom prst="rect">
             <a:avLst/>
@@ -15990,7 +15992,7 @@
               <a:buNone/>
             </a:pPr>
             <a:r>
-              <a:rPr lang="en-US" sz="1320" dirty="0">
+              <a:rPr lang="en-US" sz="1220" dirty="0">
                 <a:solidFill>
                   <a:srgbClr val="17364A"/>
                 </a:solidFill>
@@ -15998,9 +16000,9 @@
                 <a:ea typeface="Aptos" pitchFamily="34" charset="-122"/>
                 <a:cs typeface="Aptos" pitchFamily="34" charset="-120"/>
               </a:rPr>
-              <a:t>Geospatial AI combines spatial data, geographic analysis, and AI methods to identify patterns across.</a:t>
-            </a:r>
-            <a:endParaRPr lang="en-US" sz="1320" dirty="0"/>
+              <a:t>Geospatial AI combines spatial data, geographic analysis, and AI methods to.</a:t>
+            </a:r>
+            <a:endParaRPr lang="en-US" sz="1220" dirty="0"/>
           </a:p>
         </p:txBody>
       </p:sp>
@@ -16012,12 +16014,12 @@
         </p:nvSpPr>
         <p:spPr>
           <a:xfrm>
-            <a:off x="7635240" y="2718511"/>
-            <a:ext cx="3474720" cy="1328623"/>
+            <a:off x="7543800" y="2724912"/>
+            <a:ext cx="3611880" cy="1527048"/>
           </a:xfrm>
           <a:prstGeom prst="roundRect">
             <a:avLst>
-              <a:gd name="adj" fmla="val 8259"/>
+              <a:gd name="adj" fmla="val 7186"/>
             </a:avLst>
           </a:prstGeom>
           <a:solidFill>
@@ -16039,24 +16041,26 @@
         </p:nvSpPr>
         <p:spPr>
           <a:xfrm>
-            <a:off x="7799832" y="2846527"/>
-            <a:ext cx="3145536" cy="237744"/>
-          </a:xfrm>
-          <a:prstGeom prst="rect">
-            <a:avLst/>
-          </a:prstGeom>
-          <a:noFill/>
-          <a:ln/>
-        </p:spPr>
-        <p:txBody>
-          <a:bodyPr wrap="square" lIns="0" tIns="0" rIns="0" bIns="0" rtlCol="0" anchor="ctr"/>
-          <a:lstStyle/>
-          <a:p>
-            <a:pPr indent="0" marL="0">
-              <a:buNone/>
-            </a:pPr>
-            <a:r>
-              <a:rPr lang="en-US" sz="1250" b="1" dirty="0">
+            <a:off x="7708392" y="2852928"/>
+            <a:ext cx="3282696" cy="219456"/>
+          </a:xfrm>
+          <a:prstGeom prst="rect">
+            <a:avLst/>
+          </a:prstGeom>
+          <a:noFill/>
+          <a:ln/>
+        </p:spPr>
+        <p:txBody>
+          <a:bodyPr wrap="square" lIns="0" tIns="0" rIns="0" bIns="0" rtlCol="0" anchor="ctr">
+            <a:normAutofit/>
+          </a:bodyPr>
+          <a:lstStyle/>
+          <a:p>
+            <a:pPr indent="0" marL="0">
+              <a:buNone/>
+            </a:pPr>
+            <a:r>
+              <a:rPr lang="en-US" sz="1160" b="1" dirty="0">
                 <a:solidFill>
                   <a:srgbClr val="0068B7"/>
                 </a:solidFill>
@@ -16066,7 +16070,7 @@
               </a:rPr>
               <a:t>Data-to-decision flow</a:t>
             </a:r>
-            <a:endParaRPr lang="en-US" sz="1250" dirty="0"/>
+            <a:endParaRPr lang="en-US" sz="1160" dirty="0"/>
           </a:p>
         </p:txBody>
       </p:sp>
@@ -16078,7 +16082,7 @@
         </p:nvSpPr>
         <p:spPr>
           <a:xfrm>
-            <a:off x="8763000" y="3399739"/>
+            <a:off x="8717280" y="3406140"/>
             <a:ext cx="164592" cy="0"/>
           </a:xfrm>
           <a:prstGeom prst="line">
@@ -16101,8 +16105,8 @@
         </p:nvSpPr>
         <p:spPr>
           <a:xfrm>
-            <a:off x="7872984" y="3248863"/>
-            <a:ext cx="890016" cy="301752"/>
+            <a:off x="7781544" y="3255264"/>
+            <a:ext cx="935736" cy="301752"/>
           </a:xfrm>
           <a:prstGeom prst="roundRect">
             <a:avLst>
@@ -16128,8 +16132,8 @@
         </p:nvSpPr>
         <p:spPr>
           <a:xfrm>
-            <a:off x="7909560" y="3322015"/>
-            <a:ext cx="816864" cy="146304"/>
+            <a:off x="7818120" y="3328416"/>
+            <a:ext cx="862584" cy="146304"/>
           </a:xfrm>
           <a:prstGeom prst="rect">
             <a:avLst/>
@@ -16169,7 +16173,7 @@
         </p:nvSpPr>
         <p:spPr>
           <a:xfrm>
-            <a:off x="9817608" y="3399739"/>
+            <a:off x="9817608" y="3406140"/>
             <a:ext cx="164592" cy="0"/>
           </a:xfrm>
           <a:prstGeom prst="line">
@@ -16192,8 +16196,8 @@
         </p:nvSpPr>
         <p:spPr>
           <a:xfrm>
-            <a:off x="8927592" y="3248863"/>
-            <a:ext cx="890016" cy="301752"/>
+            <a:off x="8881872" y="3255264"/>
+            <a:ext cx="935736" cy="301752"/>
           </a:xfrm>
           <a:prstGeom prst="roundRect">
             <a:avLst>
@@ -16219,8 +16223,8 @@
         </p:nvSpPr>
         <p:spPr>
           <a:xfrm>
-            <a:off x="8964168" y="3322015"/>
-            <a:ext cx="816864" cy="146304"/>
+            <a:off x="8918448" y="3328416"/>
+            <a:ext cx="862584" cy="146304"/>
           </a:xfrm>
           <a:prstGeom prst="rect">
             <a:avLst/>
@@ -16260,8 +16264,8 @@
         </p:nvSpPr>
         <p:spPr>
           <a:xfrm>
-            <a:off x="9982200" y="3248863"/>
-            <a:ext cx="890016" cy="301752"/>
+            <a:off x="9982200" y="3255264"/>
+            <a:ext cx="935736" cy="301752"/>
           </a:xfrm>
           <a:prstGeom prst="roundRect">
             <a:avLst>
@@ -16287,8 +16291,8 @@
         </p:nvSpPr>
         <p:spPr>
           <a:xfrm>
-            <a:off x="10018776" y="3322015"/>
-            <a:ext cx="816864" cy="146304"/>
+            <a:off x="10018776" y="3328416"/>
+            <a:ext cx="862584" cy="146304"/>
           </a:xfrm>
           <a:prstGeom prst="rect">
             <a:avLst/>
@@ -16328,8 +16332,8 @@
         </p:nvSpPr>
         <p:spPr>
           <a:xfrm>
-            <a:off x="7854696" y="3742639"/>
-            <a:ext cx="3035808" cy="158191"/>
+            <a:off x="7763256" y="3749040"/>
+            <a:ext cx="3172968" cy="356616"/>
           </a:xfrm>
           <a:prstGeom prst="rect">
             <a:avLst/>
@@ -16347,7 +16351,7 @@
               <a:buNone/>
             </a:pPr>
             <a:r>
-              <a:rPr lang="en-US" sz="1120" dirty="0">
+              <a:rPr lang="en-US" sz="1040" dirty="0">
                 <a:solidFill>
                   <a:srgbClr val="17364A"/>
                 </a:solidFill>
@@ -16355,9 +16359,9 @@
                 <a:ea typeface="Aptos" pitchFamily="34" charset="-122"/>
                 <a:cs typeface="Aptos" pitchFamily="34" charset="-120"/>
               </a:rPr>
-              <a:t>The important handoff is not from data to AI; it is from analysis to accountable human review.</a:t>
-            </a:r>
-            <a:endParaRPr lang="en-US" sz="1120" dirty="0"/>
+              <a:t>The important handoff is not from data to AI; it is from analysis to.</a:t>
+            </a:r>
+            <a:endParaRPr lang="en-US" sz="1040" dirty="0"/>
           </a:p>
         </p:txBody>
       </p:sp>
@@ -16369,12 +16373,12 @@
         </p:nvSpPr>
         <p:spPr>
           <a:xfrm>
-            <a:off x="7635240" y="4184294"/>
-            <a:ext cx="3474720" cy="1466698"/>
+            <a:off x="7543800" y="4389120"/>
+            <a:ext cx="3611880" cy="1261872"/>
           </a:xfrm>
           <a:prstGeom prst="roundRect">
             <a:avLst>
-              <a:gd name="adj" fmla="val 7481"/>
+              <a:gd name="adj" fmla="val 8696"/>
             </a:avLst>
           </a:prstGeom>
           <a:solidFill>
@@ -16396,8 +16400,8 @@
         </p:nvSpPr>
         <p:spPr>
           <a:xfrm>
-            <a:off x="7799832" y="4330598"/>
-            <a:ext cx="3145536" cy="256032"/>
+            <a:off x="7708392" y="4517136"/>
+            <a:ext cx="3282696" cy="228600"/>
           </a:xfrm>
           <a:prstGeom prst="rect">
             <a:avLst/>
@@ -16413,7 +16417,7 @@
               <a:buNone/>
             </a:pPr>
             <a:r>
-              <a:rPr lang="en-US" sz="1300" b="1" dirty="0">
+              <a:rPr lang="en-US" sz="1220" b="1" dirty="0">
                 <a:solidFill>
                   <a:srgbClr val="0068B7"/>
                 </a:solidFill>
@@ -16423,7 +16427,7 @@
               </a:rPr>
               <a:t>Apply it</a:t>
             </a:r>
-            <a:endParaRPr lang="en-US" sz="1300" dirty="0"/>
+            <a:endParaRPr lang="en-US" sz="1220" dirty="0"/>
           </a:p>
         </p:txBody>
       </p:sp>
@@ -16435,8 +16439,8 @@
         </p:nvSpPr>
         <p:spPr>
           <a:xfrm>
-            <a:off x="7799832" y="4659782"/>
-            <a:ext cx="3145536" cy="899770"/>
+            <a:off x="7708392" y="4828032"/>
+            <a:ext cx="3282696" cy="749808"/>
           </a:xfrm>
           <a:prstGeom prst="rect">
             <a:avLst/>
@@ -16454,7 +16458,7 @@
               <a:buNone/>
             </a:pPr>
             <a:r>
-              <a:rPr lang="en-US" sz="1320" dirty="0">
+              <a:rPr lang="en-US" sz="1220" dirty="0">
                 <a:solidFill>
                   <a:srgbClr val="17364A"/>
                 </a:solidFill>
@@ -16462,9 +16466,9 @@
                 <a:ea typeface="Aptos" pitchFamily="34" charset="-122"/>
                 <a:cs typeface="Aptos" pitchFamily="34" charset="-120"/>
               </a:rPr>
-              <a:t>Connect the concept to public health purpose, responsible use, required safeguards, documentation, and the next action a department should take.</a:t>
-            </a:r>
-            <a:endParaRPr lang="en-US" sz="1320" dirty="0"/>
+              <a:t>Connect the concept to public health purpose, responsible use, required.</a:t>
+            </a:r>
+            <a:endParaRPr lang="en-US" sz="1220" dirty="0"/>
           </a:p>
         </p:txBody>
       </p:sp>
@@ -16755,8 +16759,8 @@
         </p:nvSpPr>
         <p:spPr>
           <a:xfrm>
-            <a:off x="868680" y="1508760"/>
-            <a:ext cx="6309360" cy="4160520"/>
+            <a:off x="822960" y="1463040"/>
+            <a:ext cx="6565392" cy="4343400"/>
           </a:xfrm>
           <a:prstGeom prst="rect">
             <a:avLst/>
@@ -16774,7 +16778,7 @@
               <a:buNone/>
             </a:pPr>
             <a:r>
-              <a:rPr lang="en-US" sz="2100" dirty="0">
+              <a:rPr lang="en-US" sz="1920" dirty="0">
                 <a:solidFill>
                   <a:srgbClr val="003A63"/>
                 </a:solidFill>
@@ -16784,14 +16788,14 @@
               </a:rPr>
               <a:t>• Geospatial AI matters because public health decisions are often place-based.</a:t>
             </a:r>
-            <a:endParaRPr lang="en-US" sz="2100" dirty="0"/>
-          </a:p>
-          <a:p>
-            <a:pPr indent="0" marL="0">
-              <a:buNone/>
-            </a:pPr>
-            <a:r>
-              <a:rPr lang="en-US" sz="2100" dirty="0">
+            <a:endParaRPr lang="en-US" sz="1920" dirty="0"/>
+          </a:p>
+          <a:p>
+            <a:pPr indent="0" marL="0">
+              <a:buNone/>
+            </a:pPr>
+            <a:r>
+              <a:rPr lang="en-US" sz="1920" dirty="0">
                 <a:solidFill>
                   <a:srgbClr val="003A63"/>
                 </a:solidFill>
@@ -16799,16 +16803,16 @@
                 <a:ea typeface="Aptos" pitchFamily="34" charset="-122"/>
                 <a:cs typeface="Aptos" pitchFamily="34" charset="-120"/>
               </a:rPr>
-              <a:t>• Agencies decide where to conduct outreach, deploy mobile services, inspect facilities, respond.</a:t>
-            </a:r>
-            <a:endParaRPr lang="en-US" sz="2100" dirty="0"/>
-          </a:p>
-          <a:p>
-            <a:pPr indent="0" marL="0">
-              <a:buNone/>
-            </a:pPr>
-            <a:r>
-              <a:rPr lang="en-US" sz="2100" dirty="0">
+              <a:t>• Agencies decide where to conduct outreach, deploy mobile services, inspect.</a:t>
+            </a:r>
+            <a:endParaRPr lang="en-US" sz="1920" dirty="0"/>
+          </a:p>
+          <a:p>
+            <a:pPr indent="0" marL="0">
+              <a:buNone/>
+            </a:pPr>
+            <a:r>
+              <a:rPr lang="en-US" sz="1920" dirty="0">
                 <a:solidFill>
                   <a:srgbClr val="003A63"/>
                 </a:solidFill>
@@ -16816,9 +16820,9 @@
                 <a:ea typeface="Aptos" pitchFamily="34" charset="-122"/>
                 <a:cs typeface="Aptos" pitchFamily="34" charset="-120"/>
               </a:rPr>
-              <a:t>• AI-supported spatial tools can help analyze large volumes of geographic information and.</a:t>
-            </a:r>
-            <a:endParaRPr lang="en-US" sz="2100" dirty="0"/>
+              <a:t>• AI-supported spatial tools can help analyze large volumes of geographic.</a:t>
+            </a:r>
+            <a:endParaRPr lang="en-US" sz="1920" dirty="0"/>
           </a:p>
         </p:txBody>
       </p:sp>
@@ -16830,12 +16834,12 @@
         </p:nvSpPr>
         <p:spPr>
           <a:xfrm>
-            <a:off x="7635240" y="1325880"/>
-            <a:ext cx="3474720" cy="1207008"/>
+            <a:off x="7543800" y="1325880"/>
+            <a:ext cx="3611880" cy="1261872"/>
           </a:xfrm>
           <a:prstGeom prst="roundRect">
             <a:avLst>
-              <a:gd name="adj" fmla="val 9091"/>
+              <a:gd name="adj" fmla="val 8696"/>
             </a:avLst>
           </a:prstGeom>
           <a:solidFill>
@@ -16857,8 +16861,8 @@
         </p:nvSpPr>
         <p:spPr>
           <a:xfrm>
-            <a:off x="7799832" y="1472184"/>
-            <a:ext cx="3145536" cy="256032"/>
+            <a:off x="7708392" y="1453896"/>
+            <a:ext cx="3282696" cy="228600"/>
           </a:xfrm>
           <a:prstGeom prst="rect">
             <a:avLst/>
@@ -16874,7 +16878,7 @@
               <a:buNone/>
             </a:pPr>
             <a:r>
-              <a:rPr lang="en-US" sz="1300" b="1" dirty="0">
+              <a:rPr lang="en-US" sz="1220" b="1" dirty="0">
                 <a:solidFill>
                   <a:srgbClr val="0068B7"/>
                 </a:solidFill>
@@ -16884,7 +16888,7 @@
               </a:rPr>
               <a:t>Core concept</a:t>
             </a:r>
-            <a:endParaRPr lang="en-US" sz="1300" dirty="0"/>
+            <a:endParaRPr lang="en-US" sz="1220" dirty="0"/>
           </a:p>
         </p:txBody>
       </p:sp>
@@ -16896,8 +16900,8 @@
         </p:nvSpPr>
         <p:spPr>
           <a:xfrm>
-            <a:off x="7799832" y="1801368"/>
-            <a:ext cx="3145536" cy="640080"/>
+            <a:off x="7708392" y="1764792"/>
+            <a:ext cx="3282696" cy="749808"/>
           </a:xfrm>
           <a:prstGeom prst="rect">
             <a:avLst/>
@@ -16915,7 +16919,7 @@
               <a:buNone/>
             </a:pPr>
             <a:r>
-              <a:rPr lang="en-US" sz="1320" dirty="0">
+              <a:rPr lang="en-US" sz="1220" dirty="0">
                 <a:solidFill>
                   <a:srgbClr val="17364A"/>
                 </a:solidFill>
@@ -16925,7 +16929,7 @@
               </a:rPr>
               <a:t>Geospatial AI matters because public health decisions are often place-based.</a:t>
             </a:r>
-            <a:endParaRPr lang="en-US" sz="1320" dirty="0"/>
+            <a:endParaRPr lang="en-US" sz="1220" dirty="0"/>
           </a:p>
         </p:txBody>
       </p:sp>
@@ -16937,12 +16941,12 @@
         </p:nvSpPr>
         <p:spPr>
           <a:xfrm>
-            <a:off x="7635240" y="2670048"/>
-            <a:ext cx="3474720" cy="1377086"/>
+            <a:off x="7543800" y="2724912"/>
+            <a:ext cx="3611880" cy="1527048"/>
           </a:xfrm>
           <a:prstGeom prst="roundRect">
             <a:avLst>
-              <a:gd name="adj" fmla="val 7968"/>
+              <a:gd name="adj" fmla="val 7186"/>
             </a:avLst>
           </a:prstGeom>
           <a:solidFill>
@@ -16964,24 +16968,26 @@
         </p:nvSpPr>
         <p:spPr>
           <a:xfrm>
-            <a:off x="7799832" y="2798064"/>
-            <a:ext cx="3145536" cy="237744"/>
-          </a:xfrm>
-          <a:prstGeom prst="rect">
-            <a:avLst/>
-          </a:prstGeom>
-          <a:noFill/>
-          <a:ln/>
-        </p:spPr>
-        <p:txBody>
-          <a:bodyPr wrap="square" lIns="0" tIns="0" rIns="0" bIns="0" rtlCol="0" anchor="ctr"/>
-          <a:lstStyle/>
-          <a:p>
-            <a:pPr indent="0" marL="0">
-              <a:buNone/>
-            </a:pPr>
-            <a:r>
-              <a:rPr lang="en-US" sz="1250" b="1" dirty="0">
+            <a:off x="7708392" y="2852928"/>
+            <a:ext cx="3282696" cy="219456"/>
+          </a:xfrm>
+          <a:prstGeom prst="rect">
+            <a:avLst/>
+          </a:prstGeom>
+          <a:noFill/>
+          <a:ln/>
+        </p:spPr>
+        <p:txBody>
+          <a:bodyPr wrap="square" lIns="0" tIns="0" rIns="0" bIns="0" rtlCol="0" anchor="ctr">
+            <a:normAutofit/>
+          </a:bodyPr>
+          <a:lstStyle/>
+          <a:p>
+            <a:pPr indent="0" marL="0">
+              <a:buNone/>
+            </a:pPr>
+            <a:r>
+              <a:rPr lang="en-US" sz="1160" b="1" dirty="0">
                 <a:solidFill>
                   <a:srgbClr val="0068B7"/>
                 </a:solidFill>
@@ -16991,7 +16997,7 @@
               </a:rPr>
               <a:t>Data-to-decision flow</a:t>
             </a:r>
-            <a:endParaRPr lang="en-US" sz="1250" dirty="0"/>
+            <a:endParaRPr lang="en-US" sz="1160" dirty="0"/>
           </a:p>
         </p:txBody>
       </p:sp>
@@ -17003,7 +17009,7 @@
         </p:nvSpPr>
         <p:spPr>
           <a:xfrm>
-            <a:off x="8763000" y="3351276"/>
+            <a:off x="8717280" y="3406140"/>
             <a:ext cx="164592" cy="0"/>
           </a:xfrm>
           <a:prstGeom prst="line">
@@ -17026,8 +17032,8 @@
         </p:nvSpPr>
         <p:spPr>
           <a:xfrm>
-            <a:off x="7872984" y="3200400"/>
-            <a:ext cx="890016" cy="301752"/>
+            <a:off x="7781544" y="3255264"/>
+            <a:ext cx="935736" cy="301752"/>
           </a:xfrm>
           <a:prstGeom prst="roundRect">
             <a:avLst>
@@ -17053,8 +17059,8 @@
         </p:nvSpPr>
         <p:spPr>
           <a:xfrm>
-            <a:off x="7909560" y="3273552"/>
-            <a:ext cx="816864" cy="146304"/>
+            <a:off x="7818120" y="3328416"/>
+            <a:ext cx="862584" cy="146304"/>
           </a:xfrm>
           <a:prstGeom prst="rect">
             <a:avLst/>
@@ -17094,7 +17100,7 @@
         </p:nvSpPr>
         <p:spPr>
           <a:xfrm>
-            <a:off x="9817608" y="3351276"/>
+            <a:off x="9817608" y="3406140"/>
             <a:ext cx="164592" cy="0"/>
           </a:xfrm>
           <a:prstGeom prst="line">
@@ -17117,8 +17123,8 @@
         </p:nvSpPr>
         <p:spPr>
           <a:xfrm>
-            <a:off x="8927592" y="3200400"/>
-            <a:ext cx="890016" cy="301752"/>
+            <a:off x="8881872" y="3255264"/>
+            <a:ext cx="935736" cy="301752"/>
           </a:xfrm>
           <a:prstGeom prst="roundRect">
             <a:avLst>
@@ -17144,8 +17150,8 @@
         </p:nvSpPr>
         <p:spPr>
           <a:xfrm>
-            <a:off x="8964168" y="3273552"/>
-            <a:ext cx="816864" cy="146304"/>
+            <a:off x="8918448" y="3328416"/>
+            <a:ext cx="862584" cy="146304"/>
           </a:xfrm>
           <a:prstGeom prst="rect">
             <a:avLst/>
@@ -17185,8 +17191,8 @@
         </p:nvSpPr>
         <p:spPr>
           <a:xfrm>
-            <a:off x="9982200" y="3200400"/>
-            <a:ext cx="890016" cy="301752"/>
+            <a:off x="9982200" y="3255264"/>
+            <a:ext cx="935736" cy="301752"/>
           </a:xfrm>
           <a:prstGeom prst="roundRect">
             <a:avLst>
@@ -17212,8 +17218,8 @@
         </p:nvSpPr>
         <p:spPr>
           <a:xfrm>
-            <a:off x="10018776" y="3273552"/>
-            <a:ext cx="816864" cy="146304"/>
+            <a:off x="10018776" y="3328416"/>
+            <a:ext cx="862584" cy="146304"/>
           </a:xfrm>
           <a:prstGeom prst="rect">
             <a:avLst/>
@@ -17253,8 +17259,8 @@
         </p:nvSpPr>
         <p:spPr>
           <a:xfrm>
-            <a:off x="7854696" y="3694176"/>
-            <a:ext cx="3035808" cy="206654"/>
+            <a:off x="7763256" y="3749040"/>
+            <a:ext cx="3172968" cy="356616"/>
           </a:xfrm>
           <a:prstGeom prst="rect">
             <a:avLst/>
@@ -17272,7 +17278,7 @@
               <a:buNone/>
             </a:pPr>
             <a:r>
-              <a:rPr lang="en-US" sz="1120" dirty="0">
+              <a:rPr lang="en-US" sz="1040" dirty="0">
                 <a:solidFill>
                   <a:srgbClr val="17364A"/>
                 </a:solidFill>
@@ -17280,9 +17286,9 @@
                 <a:ea typeface="Aptos" pitchFamily="34" charset="-122"/>
                 <a:cs typeface="Aptos" pitchFamily="34" charset="-120"/>
               </a:rPr>
-              <a:t>The important handoff is not from data to AI; it is from analysis to accountable human review.</a:t>
-            </a:r>
-            <a:endParaRPr lang="en-US" sz="1120" dirty="0"/>
+              <a:t>The important handoff is not from data to AI; it is from analysis to.</a:t>
+            </a:r>
+            <a:endParaRPr lang="en-US" sz="1040" dirty="0"/>
           </a:p>
         </p:txBody>
       </p:sp>
@@ -17294,12 +17300,12 @@
         </p:nvSpPr>
         <p:spPr>
           <a:xfrm>
-            <a:off x="7635240" y="4184294"/>
-            <a:ext cx="3474720" cy="1466698"/>
+            <a:off x="7543800" y="4389120"/>
+            <a:ext cx="3611880" cy="1261872"/>
           </a:xfrm>
           <a:prstGeom prst="roundRect">
             <a:avLst>
-              <a:gd name="adj" fmla="val 7481"/>
+              <a:gd name="adj" fmla="val 8696"/>
             </a:avLst>
           </a:prstGeom>
           <a:solidFill>
@@ -17321,8 +17327,8 @@
         </p:nvSpPr>
         <p:spPr>
           <a:xfrm>
-            <a:off x="7799832" y="4330598"/>
-            <a:ext cx="3145536" cy="256032"/>
+            <a:off x="7708392" y="4517136"/>
+            <a:ext cx="3282696" cy="228600"/>
           </a:xfrm>
           <a:prstGeom prst="rect">
             <a:avLst/>
@@ -17338,7 +17344,7 @@
               <a:buNone/>
             </a:pPr>
             <a:r>
-              <a:rPr lang="en-US" sz="1300" b="1" dirty="0">
+              <a:rPr lang="en-US" sz="1220" b="1" dirty="0">
                 <a:solidFill>
                   <a:srgbClr val="0068B7"/>
                 </a:solidFill>
@@ -17348,7 +17354,7 @@
               </a:rPr>
               <a:t>Apply it</a:t>
             </a:r>
-            <a:endParaRPr lang="en-US" sz="1300" dirty="0"/>
+            <a:endParaRPr lang="en-US" sz="1220" dirty="0"/>
           </a:p>
         </p:txBody>
       </p:sp>
@@ -17360,8 +17366,8 @@
         </p:nvSpPr>
         <p:spPr>
           <a:xfrm>
-            <a:off x="7799832" y="4659782"/>
-            <a:ext cx="3145536" cy="899770"/>
+            <a:off x="7708392" y="4828032"/>
+            <a:ext cx="3282696" cy="749808"/>
           </a:xfrm>
           <a:prstGeom prst="rect">
             <a:avLst/>
@@ -17379,7 +17385,7 @@
               <a:buNone/>
             </a:pPr>
             <a:r>
-              <a:rPr lang="en-US" sz="1320" dirty="0">
+              <a:rPr lang="en-US" sz="1220" dirty="0">
                 <a:solidFill>
                   <a:srgbClr val="17364A"/>
                 </a:solidFill>
@@ -17387,9 +17393,9 @@
                 <a:ea typeface="Aptos" pitchFamily="34" charset="-122"/>
                 <a:cs typeface="Aptos" pitchFamily="34" charset="-120"/>
               </a:rPr>
-              <a:t>Connect the concept to public health purpose, responsible use, required safeguards, documentation, and the next action a department should take.</a:t>
-            </a:r>
-            <a:endParaRPr lang="en-US" sz="1320" dirty="0"/>
+              <a:t>Connect the concept to public health purpose, responsible use, required.</a:t>
+            </a:r>
+            <a:endParaRPr lang="en-US" sz="1220" dirty="0"/>
           </a:p>
         </p:txBody>
       </p:sp>
@@ -17680,8 +17686,8 @@
         </p:nvSpPr>
         <p:spPr>
           <a:xfrm>
-            <a:off x="868680" y="1508760"/>
-            <a:ext cx="6309360" cy="4160520"/>
+            <a:off x="822960" y="1463040"/>
+            <a:ext cx="6565392" cy="4343400"/>
           </a:xfrm>
           <a:prstGeom prst="rect">
             <a:avLst/>
@@ -17699,7 +17705,7 @@
               <a:buNone/>
             </a:pPr>
             <a:r>
-              <a:rPr lang="en-US" sz="2100" dirty="0">
+              <a:rPr lang="en-US" sz="1920" dirty="0">
                 <a:solidFill>
                   <a:srgbClr val="003A63"/>
                 </a:solidFill>
@@ -17707,16 +17713,16 @@
                 <a:ea typeface="Aptos" pitchFamily="34" charset="-122"/>
                 <a:cs typeface="Aptos" pitchFamily="34" charset="-120"/>
               </a:rPr>
-              <a:t>• A health department may use AI-supported geospatial analysis to identify areas where mobile.</a:t>
-            </a:r>
-            <a:endParaRPr lang="en-US" sz="2100" dirty="0"/>
-          </a:p>
-          <a:p>
-            <a:pPr indent="0" marL="0">
-              <a:buNone/>
-            </a:pPr>
-            <a:r>
-              <a:rPr lang="en-US" sz="2100" dirty="0">
+              <a:t>• A health department may use AI-supported geospatial analysis to identify.</a:t>
+            </a:r>
+            <a:endParaRPr lang="en-US" sz="1920" dirty="0"/>
+          </a:p>
+          <a:p>
+            <a:pPr indent="0" marL="0">
+              <a:buNone/>
+            </a:pPr>
+            <a:r>
+              <a:rPr lang="en-US" sz="1920" dirty="0">
                 <a:solidFill>
                   <a:srgbClr val="003A63"/>
                 </a:solidFill>
@@ -17724,16 +17730,16 @@
                 <a:ea typeface="Aptos" pitchFamily="34" charset="-122"/>
                 <a:cs typeface="Aptos" pitchFamily="34" charset="-120"/>
               </a:rPr>
-              <a:t>• The tool may combine immunization coverage, school locations, transportation routes, census.</a:t>
-            </a:r>
-            <a:endParaRPr lang="en-US" sz="2100" dirty="0"/>
-          </a:p>
-          <a:p>
-            <a:pPr indent="0" marL="0">
-              <a:buNone/>
-            </a:pPr>
-            <a:r>
-              <a:rPr lang="en-US" sz="2100" dirty="0">
+              <a:t>• The tool may combine immunization coverage, school locations, transportation.</a:t>
+            </a:r>
+            <a:endParaRPr lang="en-US" sz="1920" dirty="0"/>
+          </a:p>
+          <a:p>
+            <a:pPr indent="0" marL="0">
+              <a:buNone/>
+            </a:pPr>
+            <a:r>
+              <a:rPr lang="en-US" sz="1920" dirty="0">
                 <a:solidFill>
                   <a:srgbClr val="003A63"/>
                 </a:solidFill>
@@ -17743,7 +17749,7 @@
               </a:rPr>
               <a:t>• The output may recommend priority areas for outreach and clinic placement.</a:t>
             </a:r>
-            <a:endParaRPr lang="en-US" sz="2100" dirty="0"/>
+            <a:endParaRPr lang="en-US" sz="1920" dirty="0"/>
           </a:p>
         </p:txBody>
       </p:sp>
@@ -17755,12 +17761,12 @@
         </p:nvSpPr>
         <p:spPr>
           <a:xfrm>
-            <a:off x="7635240" y="1325880"/>
-            <a:ext cx="3474720" cy="1255471"/>
+            <a:off x="7543800" y="1325880"/>
+            <a:ext cx="3611880" cy="1261872"/>
           </a:xfrm>
           <a:prstGeom prst="roundRect">
             <a:avLst>
-              <a:gd name="adj" fmla="val 8740"/>
+              <a:gd name="adj" fmla="val 8696"/>
             </a:avLst>
           </a:prstGeom>
           <a:solidFill>
@@ -17782,8 +17788,8 @@
         </p:nvSpPr>
         <p:spPr>
           <a:xfrm>
-            <a:off x="7799832" y="1472184"/>
-            <a:ext cx="3145536" cy="256032"/>
+            <a:off x="7708392" y="1453896"/>
+            <a:ext cx="3282696" cy="228600"/>
           </a:xfrm>
           <a:prstGeom prst="rect">
             <a:avLst/>
@@ -17799,7 +17805,7 @@
               <a:buNone/>
             </a:pPr>
             <a:r>
-              <a:rPr lang="en-US" sz="1300" b="1" dirty="0">
+              <a:rPr lang="en-US" sz="1220" b="1" dirty="0">
                 <a:solidFill>
                   <a:srgbClr val="0068B7"/>
                 </a:solidFill>
@@ -17809,7 +17815,7 @@
               </a:rPr>
               <a:t>Core concept</a:t>
             </a:r>
-            <a:endParaRPr lang="en-US" sz="1300" dirty="0"/>
+            <a:endParaRPr lang="en-US" sz="1220" dirty="0"/>
           </a:p>
         </p:txBody>
       </p:sp>
@@ -17821,8 +17827,8 @@
         </p:nvSpPr>
         <p:spPr>
           <a:xfrm>
-            <a:off x="7799832" y="1801368"/>
-            <a:ext cx="3145536" cy="688543"/>
+            <a:off x="7708392" y="1764792"/>
+            <a:ext cx="3282696" cy="749808"/>
           </a:xfrm>
           <a:prstGeom prst="rect">
             <a:avLst/>
@@ -17840,7 +17846,7 @@
               <a:buNone/>
             </a:pPr>
             <a:r>
-              <a:rPr lang="en-US" sz="1320" dirty="0">
+              <a:rPr lang="en-US" sz="1220" dirty="0">
                 <a:solidFill>
                   <a:srgbClr val="17364A"/>
                 </a:solidFill>
@@ -17848,9 +17854,9 @@
                 <a:ea typeface="Aptos" pitchFamily="34" charset="-122"/>
                 <a:cs typeface="Aptos" pitchFamily="34" charset="-120"/>
               </a:rPr>
-              <a:t>A health department may use AI-supported geospatial analysis to identify areas where mobile vaccination.</a:t>
-            </a:r>
-            <a:endParaRPr lang="en-US" sz="1320" dirty="0"/>
+              <a:t>A health department may use AI-supported geospatial analysis to identify areas.</a:t>
+            </a:r>
+            <a:endParaRPr lang="en-US" sz="1220" dirty="0"/>
           </a:p>
         </p:txBody>
       </p:sp>
@@ -17862,12 +17868,12 @@
         </p:nvSpPr>
         <p:spPr>
           <a:xfrm>
-            <a:off x="7635240" y="2718511"/>
-            <a:ext cx="3474720" cy="1328623"/>
+            <a:off x="7543800" y="2724912"/>
+            <a:ext cx="3611880" cy="1527048"/>
           </a:xfrm>
           <a:prstGeom prst="roundRect">
             <a:avLst>
-              <a:gd name="adj" fmla="val 8259"/>
+              <a:gd name="adj" fmla="val 7186"/>
             </a:avLst>
           </a:prstGeom>
           <a:solidFill>
@@ -17889,8 +17895,8 @@
         </p:nvSpPr>
         <p:spPr>
           <a:xfrm>
-            <a:off x="7799832" y="2864815"/>
-            <a:ext cx="3145536" cy="256032"/>
+            <a:off x="7708392" y="2852928"/>
+            <a:ext cx="3282696" cy="228600"/>
           </a:xfrm>
           <a:prstGeom prst="rect">
             <a:avLst/>
@@ -17906,7 +17912,7 @@
               <a:buNone/>
             </a:pPr>
             <a:r>
-              <a:rPr lang="en-US" sz="1300" b="1" dirty="0">
+              <a:rPr lang="en-US" sz="1220" b="1" dirty="0">
                 <a:solidFill>
                   <a:srgbClr val="0068B7"/>
                 </a:solidFill>
@@ -17916,7 +17922,7 @@
               </a:rPr>
               <a:t>Concept checkpoints</a:t>
             </a:r>
-            <a:endParaRPr lang="en-US" sz="1300" dirty="0"/>
+            <a:endParaRPr lang="en-US" sz="1220" dirty="0"/>
           </a:p>
         </p:txBody>
       </p:sp>
@@ -17928,8 +17934,8 @@
         </p:nvSpPr>
         <p:spPr>
           <a:xfrm>
-            <a:off x="7818120" y="3230575"/>
-            <a:ext cx="3090672" cy="670255"/>
+            <a:off x="7726680" y="3182112"/>
+            <a:ext cx="3227832" cy="960120"/>
           </a:xfrm>
           <a:prstGeom prst="rect">
             <a:avLst/>
@@ -17947,7 +17953,7 @@
               <a:buNone/>
             </a:pPr>
             <a:r>
-              <a:rPr lang="en-US" sz="1220" dirty="0">
+              <a:rPr lang="en-US" sz="1140" dirty="0">
                 <a:solidFill>
                   <a:srgbClr val="17364A"/>
                 </a:solidFill>
@@ -17955,16 +17961,16 @@
                 <a:ea typeface="Aptos" pitchFamily="34" charset="-122"/>
                 <a:cs typeface="Aptos" pitchFamily="34" charset="-120"/>
               </a:rPr>
-              <a:t>A health department may use AI-supported geospatial analysis to.</a:t>
-            </a:r>
-            <a:endParaRPr lang="en-US" sz="1220" dirty="0"/>
-          </a:p>
-          <a:p>
-            <a:pPr indent="0" marL="0">
-              <a:buNone/>
-            </a:pPr>
-            <a:r>
-              <a:rPr lang="en-US" sz="1220" dirty="0">
+              <a:t>A health department may use AI-supported.</a:t>
+            </a:r>
+            <a:endParaRPr lang="en-US" sz="1140" dirty="0"/>
+          </a:p>
+          <a:p>
+            <a:pPr indent="0" marL="0">
+              <a:buNone/>
+            </a:pPr>
+            <a:r>
+              <a:rPr lang="en-US" sz="1140" dirty="0">
                 <a:solidFill>
                   <a:srgbClr val="17364A"/>
                 </a:solidFill>
@@ -17972,16 +17978,16 @@
                 <a:ea typeface="Aptos" pitchFamily="34" charset="-122"/>
                 <a:cs typeface="Aptos" pitchFamily="34" charset="-120"/>
               </a:rPr>
-              <a:t>The tool may combine immunization coverage, school locations,.</a:t>
-            </a:r>
-            <a:endParaRPr lang="en-US" sz="1220" dirty="0"/>
-          </a:p>
-          <a:p>
-            <a:pPr indent="0" marL="0">
-              <a:buNone/>
-            </a:pPr>
-            <a:r>
-              <a:rPr lang="en-US" sz="1220" dirty="0">
+              <a:t>The tool may combine immunization coverage, school.</a:t>
+            </a:r>
+            <a:endParaRPr lang="en-US" sz="1140" dirty="0"/>
+          </a:p>
+          <a:p>
+            <a:pPr indent="0" marL="0">
+              <a:buNone/>
+            </a:pPr>
+            <a:r>
+              <a:rPr lang="en-US" sz="1140" dirty="0">
                 <a:solidFill>
                   <a:srgbClr val="17364A"/>
                 </a:solidFill>
@@ -17989,9 +17995,9 @@
                 <a:ea typeface="Aptos" pitchFamily="34" charset="-122"/>
                 <a:cs typeface="Aptos" pitchFamily="34" charset="-120"/>
               </a:rPr>
-              <a:t>This workflow can advance equity if it identifies access barriers.</a:t>
-            </a:r>
-            <a:endParaRPr lang="en-US" sz="1220" dirty="0"/>
+              <a:t>This workflow can advance equity if it identifies.</a:t>
+            </a:r>
+            <a:endParaRPr lang="en-US" sz="1140" dirty="0"/>
           </a:p>
         </p:txBody>
       </p:sp>
@@ -18003,12 +18009,12 @@
         </p:nvSpPr>
         <p:spPr>
           <a:xfrm>
-            <a:off x="7635240" y="4184294"/>
-            <a:ext cx="3474720" cy="1466698"/>
+            <a:off x="7543800" y="4389120"/>
+            <a:ext cx="3611880" cy="1261872"/>
           </a:xfrm>
           <a:prstGeom prst="roundRect">
             <a:avLst>
-              <a:gd name="adj" fmla="val 7481"/>
+              <a:gd name="adj" fmla="val 8696"/>
             </a:avLst>
           </a:prstGeom>
           <a:solidFill>
@@ -18030,8 +18036,8 @@
         </p:nvSpPr>
         <p:spPr>
           <a:xfrm>
-            <a:off x="7799832" y="4330598"/>
-            <a:ext cx="3145536" cy="256032"/>
+            <a:off x="7708392" y="4517136"/>
+            <a:ext cx="3282696" cy="228600"/>
           </a:xfrm>
           <a:prstGeom prst="rect">
             <a:avLst/>
@@ -18047,7 +18053,7 @@
               <a:buNone/>
             </a:pPr>
             <a:r>
-              <a:rPr lang="en-US" sz="1300" b="1" dirty="0">
+              <a:rPr lang="en-US" sz="1220" b="1" dirty="0">
                 <a:solidFill>
                   <a:srgbClr val="0068B7"/>
                 </a:solidFill>
@@ -18057,7 +18063,7 @@
               </a:rPr>
               <a:t>Apply it</a:t>
             </a:r>
-            <a:endParaRPr lang="en-US" sz="1300" dirty="0"/>
+            <a:endParaRPr lang="en-US" sz="1220" dirty="0"/>
           </a:p>
         </p:txBody>
       </p:sp>
@@ -18069,8 +18075,8 @@
         </p:nvSpPr>
         <p:spPr>
           <a:xfrm>
-            <a:off x="7799832" y="4659782"/>
-            <a:ext cx="3145536" cy="899770"/>
+            <a:off x="7708392" y="4828032"/>
+            <a:ext cx="3282696" cy="749808"/>
           </a:xfrm>
           <a:prstGeom prst="rect">
             <a:avLst/>
@@ -18088,7 +18094,7 @@
               <a:buNone/>
             </a:pPr>
             <a:r>
-              <a:rPr lang="en-US" sz="1320" dirty="0">
+              <a:rPr lang="en-US" sz="1220" dirty="0">
                 <a:solidFill>
                   <a:srgbClr val="17364A"/>
                 </a:solidFill>
@@ -18096,9 +18102,9 @@
                 <a:ea typeface="Aptos" pitchFamily="34" charset="-122"/>
                 <a:cs typeface="Aptos" pitchFamily="34" charset="-120"/>
               </a:rPr>
-              <a:t>Connect the concept to public health purpose, responsible use, required safeguards, documentation, and the next action a department should take.</a:t>
-            </a:r>
-            <a:endParaRPr lang="en-US" sz="1320" dirty="0"/>
+              <a:t>Connect the concept to public health purpose, responsible use, required.</a:t>
+            </a:r>
+            <a:endParaRPr lang="en-US" sz="1220" dirty="0"/>
           </a:p>
         </p:txBody>
       </p:sp>

--- a/downloads/presentations/modules/anl-230.pptx
+++ b/downloads/presentations/modules/anl-230.pptx
@@ -11870,7 +11870,7 @@
                 <a:ea typeface="Aptos" pitchFamily="34" charset="-122"/>
                 <a:cs typeface="Aptos" pitchFamily="34" charset="-120"/>
               </a:rPr>
-              <a:t>• 1. What is geocoding?</a:t>
+              <a:t>1. What is geocoding?</a:t>
             </a:r>
             <a:endParaRPr lang="en-US" sz="1920" dirty="0"/>
           </a:p>
@@ -11887,7 +11887,7 @@
                 <a:ea typeface="Aptos" pitchFamily="34" charset="-122"/>
                 <a:cs typeface="Aptos" pitchFamily="34" charset="-120"/>
               </a:rPr>
-              <a:t>• 2. Why can maps create misleading impressions?</a:t>
+              <a:t>2. Why can maps create misleading impressions?</a:t>
             </a:r>
             <a:endParaRPr lang="en-US" sz="1920" dirty="0"/>
           </a:p>
@@ -11904,7 +11904,7 @@
                 <a:ea typeface="Aptos" pitchFamily="34" charset="-122"/>
                 <a:cs typeface="Aptos" pitchFamily="34" charset="-120"/>
               </a:rPr>
-              <a:t>• 3. What is the modifiable areal unit problem?</a:t>
+              <a:t>3. What is the modifiable areal unit problem?</a:t>
             </a:r>
             <a:endParaRPr lang="en-US" sz="1920" dirty="0"/>
           </a:p>
@@ -12011,7 +12011,7 @@
                 <a:ea typeface="Aptos" pitchFamily="34" charset="-122"/>
                 <a:cs typeface="Aptos" pitchFamily="34" charset="-120"/>
               </a:rPr>
-              <a:t>1. What is geocoding?</a:t>
+              <a:t>What is geocoding?</a:t>
             </a:r>
             <a:endParaRPr lang="en-US" sz="1220" dirty="0"/>
           </a:p>
@@ -12118,41 +12118,7 @@
                 <a:ea typeface="Aptos" pitchFamily="34" charset="-122"/>
                 <a:cs typeface="Aptos" pitchFamily="34" charset="-120"/>
               </a:rPr>
-              <a:t>1.</a:t>
-            </a:r>
-            <a:endParaRPr lang="en-US" sz="1140" dirty="0"/>
-          </a:p>
-          <a:p>
-            <a:pPr indent="0" marL="0">
-              <a:buNone/>
-            </a:pPr>
-            <a:r>
-              <a:rPr lang="en-US" sz="1140" dirty="0">
-                <a:solidFill>
-                  <a:srgbClr val="17364A"/>
-                </a:solidFill>
-                <a:latin typeface="Aptos" pitchFamily="34" charset="0"/>
-                <a:ea typeface="Aptos" pitchFamily="34" charset="-122"/>
-                <a:cs typeface="Aptos" pitchFamily="34" charset="-120"/>
-              </a:rPr>
               <a:t>What is geocoding?</a:t>
-            </a:r>
-            <a:endParaRPr lang="en-US" sz="1140" dirty="0"/>
-          </a:p>
-          <a:p>
-            <a:pPr indent="0" marL="0">
-              <a:buNone/>
-            </a:pPr>
-            <a:r>
-              <a:rPr lang="en-US" sz="1140" dirty="0">
-                <a:solidFill>
-                  <a:srgbClr val="17364A"/>
-                </a:solidFill>
-                <a:latin typeface="Aptos" pitchFamily="34" charset="0"/>
-                <a:ea typeface="Aptos" pitchFamily="34" charset="-122"/>
-                <a:cs typeface="Aptos" pitchFamily="34" charset="-120"/>
-              </a:rPr>
-              <a:t>2.</a:t>
             </a:r>
             <a:endParaRPr lang="en-US" sz="1140" dirty="0"/>
           </a:p>
